--- a/data_structure/assets/pics_and_ppts/ch4/画图用.pptx
+++ b/data_structure/assets/pics_and_ppts/ch4/画图用.pptx
@@ -118,6 +118,11 @@
       </a:defRPr>
     </a:lvl9pPr>
   </p:defaultTextStyle>
+  <p:extLst>
+    <p:ext uri="{EFAFB233-063F-42B5-8137-9DF3F51BA10A}">
+      <p15:sldGuideLst xmlns:p15="http://schemas.microsoft.com/office/powerpoint/2012/main"/>
+    </p:ext>
+  </p:extLst>
 </p:presentation>
 </file>
 
@@ -268,7 +273,7 @@
           <a:p>
             <a:fld id="{0617A84F-C5EA-4D1F-9163-CC9D70D46673}" type="datetimeFigureOut">
               <a:rPr lang="zh-CN" altLang="en-US" smtClean="0"/>
-              <a:t>2026/10/8</a:t>
+              <a:t>2026/10/9</a:t>
             </a:fld>
             <a:endParaRPr lang="zh-CN" altLang="en-US"/>
           </a:p>
@@ -466,7 +471,7 @@
           <a:p>
             <a:fld id="{0617A84F-C5EA-4D1F-9163-CC9D70D46673}" type="datetimeFigureOut">
               <a:rPr lang="zh-CN" altLang="en-US" smtClean="0"/>
-              <a:t>2026/10/8</a:t>
+              <a:t>2026/10/9</a:t>
             </a:fld>
             <a:endParaRPr lang="zh-CN" altLang="en-US"/>
           </a:p>
@@ -674,7 +679,7 @@
           <a:p>
             <a:fld id="{0617A84F-C5EA-4D1F-9163-CC9D70D46673}" type="datetimeFigureOut">
               <a:rPr lang="zh-CN" altLang="en-US" smtClean="0"/>
-              <a:t>2026/10/8</a:t>
+              <a:t>2026/10/9</a:t>
             </a:fld>
             <a:endParaRPr lang="zh-CN" altLang="en-US"/>
           </a:p>
@@ -872,7 +877,7 @@
           <a:p>
             <a:fld id="{0617A84F-C5EA-4D1F-9163-CC9D70D46673}" type="datetimeFigureOut">
               <a:rPr lang="zh-CN" altLang="en-US" smtClean="0"/>
-              <a:t>2026/10/8</a:t>
+              <a:t>2026/10/9</a:t>
             </a:fld>
             <a:endParaRPr lang="zh-CN" altLang="en-US"/>
           </a:p>
@@ -1147,7 +1152,7 @@
           <a:p>
             <a:fld id="{0617A84F-C5EA-4D1F-9163-CC9D70D46673}" type="datetimeFigureOut">
               <a:rPr lang="zh-CN" altLang="en-US" smtClean="0"/>
-              <a:t>2026/10/8</a:t>
+              <a:t>2026/10/9</a:t>
             </a:fld>
             <a:endParaRPr lang="zh-CN" altLang="en-US"/>
           </a:p>
@@ -1412,7 +1417,7 @@
           <a:p>
             <a:fld id="{0617A84F-C5EA-4D1F-9163-CC9D70D46673}" type="datetimeFigureOut">
               <a:rPr lang="zh-CN" altLang="en-US" smtClean="0"/>
-              <a:t>2026/10/8</a:t>
+              <a:t>2026/10/9</a:t>
             </a:fld>
             <a:endParaRPr lang="zh-CN" altLang="en-US"/>
           </a:p>
@@ -1824,7 +1829,7 @@
           <a:p>
             <a:fld id="{0617A84F-C5EA-4D1F-9163-CC9D70D46673}" type="datetimeFigureOut">
               <a:rPr lang="zh-CN" altLang="en-US" smtClean="0"/>
-              <a:t>2026/10/8</a:t>
+              <a:t>2026/10/9</a:t>
             </a:fld>
             <a:endParaRPr lang="zh-CN" altLang="en-US"/>
           </a:p>
@@ -1965,7 +1970,7 @@
           <a:p>
             <a:fld id="{0617A84F-C5EA-4D1F-9163-CC9D70D46673}" type="datetimeFigureOut">
               <a:rPr lang="zh-CN" altLang="en-US" smtClean="0"/>
-              <a:t>2026/10/8</a:t>
+              <a:t>2026/10/9</a:t>
             </a:fld>
             <a:endParaRPr lang="zh-CN" altLang="en-US"/>
           </a:p>
@@ -2078,7 +2083,7 @@
           <a:p>
             <a:fld id="{0617A84F-C5EA-4D1F-9163-CC9D70D46673}" type="datetimeFigureOut">
               <a:rPr lang="zh-CN" altLang="en-US" smtClean="0"/>
-              <a:t>2026/10/8</a:t>
+              <a:t>2026/10/9</a:t>
             </a:fld>
             <a:endParaRPr lang="zh-CN" altLang="en-US"/>
           </a:p>
@@ -2389,7 +2394,7 @@
           <a:p>
             <a:fld id="{0617A84F-C5EA-4D1F-9163-CC9D70D46673}" type="datetimeFigureOut">
               <a:rPr lang="zh-CN" altLang="en-US" smtClean="0"/>
-              <a:t>2026/10/8</a:t>
+              <a:t>2026/10/9</a:t>
             </a:fld>
             <a:endParaRPr lang="zh-CN" altLang="en-US"/>
           </a:p>
@@ -2677,7 +2682,7 @@
           <a:p>
             <a:fld id="{0617A84F-C5EA-4D1F-9163-CC9D70D46673}" type="datetimeFigureOut">
               <a:rPr lang="zh-CN" altLang="en-US" smtClean="0"/>
-              <a:t>2026/10/8</a:t>
+              <a:t>2026/10/9</a:t>
             </a:fld>
             <a:endParaRPr lang="zh-CN" altLang="en-US"/>
           </a:p>
@@ -2918,7 +2923,7 @@
           <a:p>
             <a:fld id="{0617A84F-C5EA-4D1F-9163-CC9D70D46673}" type="datetimeFigureOut">
               <a:rPr lang="zh-CN" altLang="en-US" smtClean="0"/>
-              <a:t>2026/10/8</a:t>
+              <a:t>2026/10/9</a:t>
             </a:fld>
             <a:endParaRPr lang="zh-CN" altLang="en-US"/>
           </a:p>
@@ -7544,7 +7549,7 @@
             </a:r>
             <a:r>
               <a:rPr lang="en-US" altLang="zh-CN" sz="1400"/>
-              <a:t>3</a:t>
+              <a:t>4</a:t>
             </a:r>
             <a:r>
               <a:rPr lang="zh-CN" altLang="en-US" sz="1400"/>
@@ -7756,6 +7761,4321 @@
           <a:chExt cx="0" cy="0"/>
         </a:xfrm>
       </p:grpSpPr>
+      <p:sp>
+        <p:nvSpPr>
+          <p:cNvPr id="26" name="文本框 25">
+            <a:extLst>
+              <a:ext uri="{FF2B5EF4-FFF2-40B4-BE49-F238E27FC236}">
+                <a16:creationId xmlns:a16="http://schemas.microsoft.com/office/drawing/2014/main" id="{4519B7DF-DA90-16B0-C9EB-00C09A59004D}"/>
+              </a:ext>
+            </a:extLst>
+          </p:cNvPr>
+          <p:cNvSpPr txBox="1"/>
+          <p:nvPr/>
+        </p:nvSpPr>
+        <p:spPr>
+          <a:xfrm>
+            <a:off x="2671344" y="921843"/>
+            <a:ext cx="277640" cy="369332"/>
+          </a:xfrm>
+          <a:prstGeom prst="rect">
+            <a:avLst/>
+          </a:prstGeom>
+          <a:noFill/>
+        </p:spPr>
+        <p:txBody>
+          <a:bodyPr wrap="none" rtlCol="0">
+            <a:spAutoFit/>
+          </a:bodyPr>
+          <a:lstStyle/>
+          <a:p>
+            <a:r>
+              <a:rPr lang="en-US" altLang="zh-CN"/>
+              <a:t>•</a:t>
+            </a:r>
+            <a:endParaRPr lang="zh-CN" altLang="en-US"/>
+          </a:p>
+        </p:txBody>
+      </p:sp>
+      <p:cxnSp>
+        <p:nvCxnSpPr>
+          <p:cNvPr id="28" name="直接连接符 27">
+            <a:extLst>
+              <a:ext uri="{FF2B5EF4-FFF2-40B4-BE49-F238E27FC236}">
+                <a16:creationId xmlns:a16="http://schemas.microsoft.com/office/drawing/2014/main" id="{2BFB2A18-9A4D-0F71-9BDD-00902D77FCDE}"/>
+              </a:ext>
+            </a:extLst>
+          </p:cNvPr>
+          <p:cNvCxnSpPr>
+            <a:cxnSpLocks/>
+          </p:cNvCxnSpPr>
+          <p:nvPr/>
+        </p:nvCxnSpPr>
+        <p:spPr>
+          <a:xfrm flipH="1">
+            <a:off x="2513689" y="1106509"/>
+            <a:ext cx="296475" cy="459469"/>
+          </a:xfrm>
+          <a:prstGeom prst="line">
+            <a:avLst/>
+          </a:prstGeom>
+        </p:spPr>
+        <p:style>
+          <a:lnRef idx="2">
+            <a:schemeClr val="dk1"/>
+          </a:lnRef>
+          <a:fillRef idx="0">
+            <a:schemeClr val="dk1"/>
+          </a:fillRef>
+          <a:effectRef idx="1">
+            <a:schemeClr val="dk1"/>
+          </a:effectRef>
+          <a:fontRef idx="minor">
+            <a:schemeClr val="tx1"/>
+          </a:fontRef>
+        </p:style>
+      </p:cxnSp>
+      <p:sp>
+        <p:nvSpPr>
+          <p:cNvPr id="31" name="文本框 30">
+            <a:extLst>
+              <a:ext uri="{FF2B5EF4-FFF2-40B4-BE49-F238E27FC236}">
+                <a16:creationId xmlns:a16="http://schemas.microsoft.com/office/drawing/2014/main" id="{52AD18CB-9A4B-6D5B-3C2A-61D23CF86854}"/>
+              </a:ext>
+            </a:extLst>
+          </p:cNvPr>
+          <p:cNvSpPr txBox="1"/>
+          <p:nvPr/>
+        </p:nvSpPr>
+        <p:spPr>
+          <a:xfrm>
+            <a:off x="2374869" y="1394042"/>
+            <a:ext cx="277640" cy="369332"/>
+          </a:xfrm>
+          <a:prstGeom prst="rect">
+            <a:avLst/>
+          </a:prstGeom>
+          <a:noFill/>
+        </p:spPr>
+        <p:txBody>
+          <a:bodyPr wrap="none" rtlCol="0">
+            <a:spAutoFit/>
+          </a:bodyPr>
+          <a:lstStyle/>
+          <a:p>
+            <a:r>
+              <a:rPr lang="en-US" altLang="zh-CN"/>
+              <a:t>•</a:t>
+            </a:r>
+            <a:endParaRPr lang="zh-CN" altLang="en-US"/>
+          </a:p>
+        </p:txBody>
+      </p:sp>
+      <p:sp>
+        <p:nvSpPr>
+          <p:cNvPr id="33" name="文本框 32">
+            <a:extLst>
+              <a:ext uri="{FF2B5EF4-FFF2-40B4-BE49-F238E27FC236}">
+                <a16:creationId xmlns:a16="http://schemas.microsoft.com/office/drawing/2014/main" id="{43A4BEFF-735E-1C8B-56FE-C29E89F0259D}"/>
+              </a:ext>
+            </a:extLst>
+          </p:cNvPr>
+          <p:cNvSpPr txBox="1"/>
+          <p:nvPr/>
+        </p:nvSpPr>
+        <p:spPr>
+          <a:xfrm>
+            <a:off x="2948984" y="1381312"/>
+            <a:ext cx="277640" cy="369332"/>
+          </a:xfrm>
+          <a:prstGeom prst="rect">
+            <a:avLst/>
+          </a:prstGeom>
+          <a:noFill/>
+        </p:spPr>
+        <p:txBody>
+          <a:bodyPr wrap="none" rtlCol="0">
+            <a:spAutoFit/>
+          </a:bodyPr>
+          <a:lstStyle/>
+          <a:p>
+            <a:r>
+              <a:rPr lang="en-US" altLang="zh-CN"/>
+              <a:t>•</a:t>
+            </a:r>
+            <a:endParaRPr lang="zh-CN" altLang="en-US"/>
+          </a:p>
+        </p:txBody>
+      </p:sp>
+      <p:cxnSp>
+        <p:nvCxnSpPr>
+          <p:cNvPr id="35" name="直接连接符 34">
+            <a:extLst>
+              <a:ext uri="{FF2B5EF4-FFF2-40B4-BE49-F238E27FC236}">
+                <a16:creationId xmlns:a16="http://schemas.microsoft.com/office/drawing/2014/main" id="{0B30774B-A529-5A87-371C-F8509FED24BC}"/>
+              </a:ext>
+            </a:extLst>
+          </p:cNvPr>
+          <p:cNvCxnSpPr/>
+          <p:nvPr/>
+        </p:nvCxnSpPr>
+        <p:spPr>
+          <a:xfrm>
+            <a:off x="2810164" y="1106509"/>
+            <a:ext cx="277640" cy="459469"/>
+          </a:xfrm>
+          <a:prstGeom prst="line">
+            <a:avLst/>
+          </a:prstGeom>
+        </p:spPr>
+        <p:style>
+          <a:lnRef idx="2">
+            <a:schemeClr val="dk1"/>
+          </a:lnRef>
+          <a:fillRef idx="0">
+            <a:schemeClr val="dk1"/>
+          </a:fillRef>
+          <a:effectRef idx="1">
+            <a:schemeClr val="dk1"/>
+          </a:effectRef>
+          <a:fontRef idx="minor">
+            <a:schemeClr val="tx1"/>
+          </a:fontRef>
+        </p:style>
+      </p:cxnSp>
+      <p:sp>
+        <p:nvSpPr>
+          <p:cNvPr id="36" name="文本框 35">
+            <a:extLst>
+              <a:ext uri="{FF2B5EF4-FFF2-40B4-BE49-F238E27FC236}">
+                <a16:creationId xmlns:a16="http://schemas.microsoft.com/office/drawing/2014/main" id="{3DCBAE67-A52A-7804-51FB-56261BACB6B1}"/>
+              </a:ext>
+            </a:extLst>
+          </p:cNvPr>
+          <p:cNvSpPr txBox="1"/>
+          <p:nvPr/>
+        </p:nvSpPr>
+        <p:spPr>
+          <a:xfrm>
+            <a:off x="5055098" y="655426"/>
+            <a:ext cx="277640" cy="369332"/>
+          </a:xfrm>
+          <a:prstGeom prst="rect">
+            <a:avLst/>
+          </a:prstGeom>
+          <a:noFill/>
+        </p:spPr>
+        <p:txBody>
+          <a:bodyPr wrap="none" rtlCol="0">
+            <a:spAutoFit/>
+          </a:bodyPr>
+          <a:lstStyle/>
+          <a:p>
+            <a:r>
+              <a:rPr lang="en-US" altLang="zh-CN"/>
+              <a:t>•</a:t>
+            </a:r>
+            <a:endParaRPr lang="zh-CN" altLang="en-US"/>
+          </a:p>
+        </p:txBody>
+      </p:sp>
+      <p:cxnSp>
+        <p:nvCxnSpPr>
+          <p:cNvPr id="37" name="直接连接符 36">
+            <a:extLst>
+              <a:ext uri="{FF2B5EF4-FFF2-40B4-BE49-F238E27FC236}">
+                <a16:creationId xmlns:a16="http://schemas.microsoft.com/office/drawing/2014/main" id="{B65D18AC-060A-C83A-512A-571060E4FCE0}"/>
+              </a:ext>
+            </a:extLst>
+          </p:cNvPr>
+          <p:cNvCxnSpPr>
+            <a:cxnSpLocks/>
+          </p:cNvCxnSpPr>
+          <p:nvPr/>
+        </p:nvCxnSpPr>
+        <p:spPr>
+          <a:xfrm flipH="1">
+            <a:off x="4888026" y="858844"/>
+            <a:ext cx="296475" cy="459469"/>
+          </a:xfrm>
+          <a:prstGeom prst="line">
+            <a:avLst/>
+          </a:prstGeom>
+        </p:spPr>
+        <p:style>
+          <a:lnRef idx="2">
+            <a:schemeClr val="dk1"/>
+          </a:lnRef>
+          <a:fillRef idx="0">
+            <a:schemeClr val="dk1"/>
+          </a:fillRef>
+          <a:effectRef idx="1">
+            <a:schemeClr val="dk1"/>
+          </a:effectRef>
+          <a:fontRef idx="minor">
+            <a:schemeClr val="tx1"/>
+          </a:fontRef>
+        </p:style>
+      </p:cxnSp>
+      <p:sp>
+        <p:nvSpPr>
+          <p:cNvPr id="38" name="文本框 37">
+            <a:extLst>
+              <a:ext uri="{FF2B5EF4-FFF2-40B4-BE49-F238E27FC236}">
+                <a16:creationId xmlns:a16="http://schemas.microsoft.com/office/drawing/2014/main" id="{7F0FE231-88DC-4BBC-736C-C644312702BB}"/>
+              </a:ext>
+            </a:extLst>
+          </p:cNvPr>
+          <p:cNvSpPr txBox="1"/>
+          <p:nvPr/>
+        </p:nvSpPr>
+        <p:spPr>
+          <a:xfrm>
+            <a:off x="4749206" y="1146377"/>
+            <a:ext cx="277640" cy="369332"/>
+          </a:xfrm>
+          <a:prstGeom prst="rect">
+            <a:avLst/>
+          </a:prstGeom>
+          <a:noFill/>
+        </p:spPr>
+        <p:txBody>
+          <a:bodyPr wrap="none" rtlCol="0">
+            <a:spAutoFit/>
+          </a:bodyPr>
+          <a:lstStyle/>
+          <a:p>
+            <a:r>
+              <a:rPr lang="en-US" altLang="zh-CN"/>
+              <a:t>•</a:t>
+            </a:r>
+            <a:endParaRPr lang="zh-CN" altLang="en-US"/>
+          </a:p>
+        </p:txBody>
+      </p:sp>
+      <p:sp>
+        <p:nvSpPr>
+          <p:cNvPr id="39" name="文本框 38">
+            <a:extLst>
+              <a:ext uri="{FF2B5EF4-FFF2-40B4-BE49-F238E27FC236}">
+                <a16:creationId xmlns:a16="http://schemas.microsoft.com/office/drawing/2014/main" id="{0D19785F-04DA-612E-436F-B2DAB20969AF}"/>
+              </a:ext>
+            </a:extLst>
+          </p:cNvPr>
+          <p:cNvSpPr txBox="1"/>
+          <p:nvPr/>
+        </p:nvSpPr>
+        <p:spPr>
+          <a:xfrm>
+            <a:off x="5323321" y="1133647"/>
+            <a:ext cx="277640" cy="369332"/>
+          </a:xfrm>
+          <a:prstGeom prst="rect">
+            <a:avLst/>
+          </a:prstGeom>
+          <a:noFill/>
+        </p:spPr>
+        <p:txBody>
+          <a:bodyPr wrap="none" rtlCol="0">
+            <a:spAutoFit/>
+          </a:bodyPr>
+          <a:lstStyle/>
+          <a:p>
+            <a:r>
+              <a:rPr lang="en-US" altLang="zh-CN"/>
+              <a:t>•</a:t>
+            </a:r>
+            <a:endParaRPr lang="zh-CN" altLang="en-US"/>
+          </a:p>
+        </p:txBody>
+      </p:sp>
+      <p:cxnSp>
+        <p:nvCxnSpPr>
+          <p:cNvPr id="40" name="直接连接符 39">
+            <a:extLst>
+              <a:ext uri="{FF2B5EF4-FFF2-40B4-BE49-F238E27FC236}">
+                <a16:creationId xmlns:a16="http://schemas.microsoft.com/office/drawing/2014/main" id="{9A8B5B97-5118-23B5-C9B3-30138EE6AB03}"/>
+              </a:ext>
+            </a:extLst>
+          </p:cNvPr>
+          <p:cNvCxnSpPr/>
+          <p:nvPr/>
+        </p:nvCxnSpPr>
+        <p:spPr>
+          <a:xfrm>
+            <a:off x="5184501" y="858844"/>
+            <a:ext cx="277640" cy="459469"/>
+          </a:xfrm>
+          <a:prstGeom prst="line">
+            <a:avLst/>
+          </a:prstGeom>
+        </p:spPr>
+        <p:style>
+          <a:lnRef idx="2">
+            <a:schemeClr val="dk1"/>
+          </a:lnRef>
+          <a:fillRef idx="0">
+            <a:schemeClr val="dk1"/>
+          </a:fillRef>
+          <a:effectRef idx="1">
+            <a:schemeClr val="dk1"/>
+          </a:effectRef>
+          <a:fontRef idx="minor">
+            <a:schemeClr val="tx1"/>
+          </a:fontRef>
+        </p:style>
+      </p:cxnSp>
+      <p:sp>
+        <p:nvSpPr>
+          <p:cNvPr id="41" name="文本框 40">
+            <a:extLst>
+              <a:ext uri="{FF2B5EF4-FFF2-40B4-BE49-F238E27FC236}">
+                <a16:creationId xmlns:a16="http://schemas.microsoft.com/office/drawing/2014/main" id="{4E81F240-4D5E-AEC9-CBCA-8B6D328124FC}"/>
+              </a:ext>
+            </a:extLst>
+          </p:cNvPr>
+          <p:cNvSpPr txBox="1"/>
+          <p:nvPr/>
+        </p:nvSpPr>
+        <p:spPr>
+          <a:xfrm>
+            <a:off x="7811142" y="489512"/>
+            <a:ext cx="277640" cy="369332"/>
+          </a:xfrm>
+          <a:prstGeom prst="rect">
+            <a:avLst/>
+          </a:prstGeom>
+          <a:noFill/>
+        </p:spPr>
+        <p:txBody>
+          <a:bodyPr wrap="none" rtlCol="0">
+            <a:spAutoFit/>
+          </a:bodyPr>
+          <a:lstStyle/>
+          <a:p>
+            <a:r>
+              <a:rPr lang="en-US" altLang="zh-CN"/>
+              <a:t>•</a:t>
+            </a:r>
+            <a:endParaRPr lang="zh-CN" altLang="en-US"/>
+          </a:p>
+        </p:txBody>
+      </p:sp>
+      <p:cxnSp>
+        <p:nvCxnSpPr>
+          <p:cNvPr id="42" name="直接连接符 41">
+            <a:extLst>
+              <a:ext uri="{FF2B5EF4-FFF2-40B4-BE49-F238E27FC236}">
+                <a16:creationId xmlns:a16="http://schemas.microsoft.com/office/drawing/2014/main" id="{453F7E6E-95B2-AA65-5414-413056AE06DD}"/>
+              </a:ext>
+            </a:extLst>
+          </p:cNvPr>
+          <p:cNvCxnSpPr>
+            <a:cxnSpLocks/>
+          </p:cNvCxnSpPr>
+          <p:nvPr/>
+        </p:nvCxnSpPr>
+        <p:spPr>
+          <a:xfrm flipH="1">
+            <a:off x="7653487" y="674178"/>
+            <a:ext cx="296475" cy="459469"/>
+          </a:xfrm>
+          <a:prstGeom prst="line">
+            <a:avLst/>
+          </a:prstGeom>
+        </p:spPr>
+        <p:style>
+          <a:lnRef idx="2">
+            <a:schemeClr val="dk1"/>
+          </a:lnRef>
+          <a:fillRef idx="0">
+            <a:schemeClr val="dk1"/>
+          </a:fillRef>
+          <a:effectRef idx="1">
+            <a:schemeClr val="dk1"/>
+          </a:effectRef>
+          <a:fontRef idx="minor">
+            <a:schemeClr val="tx1"/>
+          </a:fontRef>
+        </p:style>
+      </p:cxnSp>
+      <p:sp>
+        <p:nvSpPr>
+          <p:cNvPr id="43" name="文本框 42">
+            <a:extLst>
+              <a:ext uri="{FF2B5EF4-FFF2-40B4-BE49-F238E27FC236}">
+                <a16:creationId xmlns:a16="http://schemas.microsoft.com/office/drawing/2014/main" id="{9BB08DC5-B404-DB8E-2B1B-41DFC3CC3107}"/>
+              </a:ext>
+            </a:extLst>
+          </p:cNvPr>
+          <p:cNvSpPr txBox="1"/>
+          <p:nvPr/>
+        </p:nvSpPr>
+        <p:spPr>
+          <a:xfrm>
+            <a:off x="7514667" y="961711"/>
+            <a:ext cx="277640" cy="369332"/>
+          </a:xfrm>
+          <a:prstGeom prst="rect">
+            <a:avLst/>
+          </a:prstGeom>
+          <a:noFill/>
+        </p:spPr>
+        <p:txBody>
+          <a:bodyPr wrap="none" rtlCol="0">
+            <a:spAutoFit/>
+          </a:bodyPr>
+          <a:lstStyle/>
+          <a:p>
+            <a:r>
+              <a:rPr lang="en-US" altLang="zh-CN"/>
+              <a:t>•</a:t>
+            </a:r>
+            <a:endParaRPr lang="zh-CN" altLang="en-US"/>
+          </a:p>
+        </p:txBody>
+      </p:sp>
+      <p:sp>
+        <p:nvSpPr>
+          <p:cNvPr id="44" name="文本框 43">
+            <a:extLst>
+              <a:ext uri="{FF2B5EF4-FFF2-40B4-BE49-F238E27FC236}">
+                <a16:creationId xmlns:a16="http://schemas.microsoft.com/office/drawing/2014/main" id="{5CEC051C-54D0-3729-1B76-9662FBDC98F7}"/>
+              </a:ext>
+            </a:extLst>
+          </p:cNvPr>
+          <p:cNvSpPr txBox="1"/>
+          <p:nvPr/>
+        </p:nvSpPr>
+        <p:spPr>
+          <a:xfrm>
+            <a:off x="8088782" y="948981"/>
+            <a:ext cx="277640" cy="369332"/>
+          </a:xfrm>
+          <a:prstGeom prst="rect">
+            <a:avLst/>
+          </a:prstGeom>
+          <a:noFill/>
+        </p:spPr>
+        <p:txBody>
+          <a:bodyPr wrap="none" rtlCol="0">
+            <a:spAutoFit/>
+          </a:bodyPr>
+          <a:lstStyle/>
+          <a:p>
+            <a:r>
+              <a:rPr lang="en-US" altLang="zh-CN"/>
+              <a:t>•</a:t>
+            </a:r>
+            <a:endParaRPr lang="zh-CN" altLang="en-US"/>
+          </a:p>
+        </p:txBody>
+      </p:sp>
+      <p:cxnSp>
+        <p:nvCxnSpPr>
+          <p:cNvPr id="45" name="直接连接符 44">
+            <a:extLst>
+              <a:ext uri="{FF2B5EF4-FFF2-40B4-BE49-F238E27FC236}">
+                <a16:creationId xmlns:a16="http://schemas.microsoft.com/office/drawing/2014/main" id="{82386A96-BE97-27DA-EDDE-D8DD948625C2}"/>
+              </a:ext>
+            </a:extLst>
+          </p:cNvPr>
+          <p:cNvCxnSpPr/>
+          <p:nvPr/>
+        </p:nvCxnSpPr>
+        <p:spPr>
+          <a:xfrm>
+            <a:off x="7949962" y="674178"/>
+            <a:ext cx="277640" cy="459469"/>
+          </a:xfrm>
+          <a:prstGeom prst="line">
+            <a:avLst/>
+          </a:prstGeom>
+        </p:spPr>
+        <p:style>
+          <a:lnRef idx="2">
+            <a:schemeClr val="dk1"/>
+          </a:lnRef>
+          <a:fillRef idx="0">
+            <a:schemeClr val="dk1"/>
+          </a:fillRef>
+          <a:effectRef idx="1">
+            <a:schemeClr val="dk1"/>
+          </a:effectRef>
+          <a:fontRef idx="minor">
+            <a:schemeClr val="tx1"/>
+          </a:fontRef>
+        </p:style>
+      </p:cxnSp>
+      <p:sp>
+        <p:nvSpPr>
+          <p:cNvPr id="46" name="文本框 45">
+            <a:extLst>
+              <a:ext uri="{FF2B5EF4-FFF2-40B4-BE49-F238E27FC236}">
+                <a16:creationId xmlns:a16="http://schemas.microsoft.com/office/drawing/2014/main" id="{47F3C1AC-5B9F-B473-6DF7-425A1F60076D}"/>
+              </a:ext>
+            </a:extLst>
+          </p:cNvPr>
+          <p:cNvSpPr txBox="1"/>
+          <p:nvPr/>
+        </p:nvSpPr>
+        <p:spPr>
+          <a:xfrm>
+            <a:off x="4749206" y="1159107"/>
+            <a:ext cx="277640" cy="369332"/>
+          </a:xfrm>
+          <a:prstGeom prst="rect">
+            <a:avLst/>
+          </a:prstGeom>
+          <a:noFill/>
+        </p:spPr>
+        <p:txBody>
+          <a:bodyPr wrap="none" rtlCol="0">
+            <a:spAutoFit/>
+          </a:bodyPr>
+          <a:lstStyle/>
+          <a:p>
+            <a:r>
+              <a:rPr lang="en-US" altLang="zh-CN"/>
+              <a:t>•</a:t>
+            </a:r>
+            <a:endParaRPr lang="zh-CN" altLang="en-US"/>
+          </a:p>
+        </p:txBody>
+      </p:sp>
+      <p:cxnSp>
+        <p:nvCxnSpPr>
+          <p:cNvPr id="47" name="直接连接符 46">
+            <a:extLst>
+              <a:ext uri="{FF2B5EF4-FFF2-40B4-BE49-F238E27FC236}">
+                <a16:creationId xmlns:a16="http://schemas.microsoft.com/office/drawing/2014/main" id="{A272B8F6-5F20-B6A4-AAE4-B062AD712929}"/>
+              </a:ext>
+            </a:extLst>
+          </p:cNvPr>
+          <p:cNvCxnSpPr>
+            <a:cxnSpLocks/>
+          </p:cNvCxnSpPr>
+          <p:nvPr/>
+        </p:nvCxnSpPr>
+        <p:spPr>
+          <a:xfrm flipH="1">
+            <a:off x="4722077" y="1343773"/>
+            <a:ext cx="165949" cy="459469"/>
+          </a:xfrm>
+          <a:prstGeom prst="line">
+            <a:avLst/>
+          </a:prstGeom>
+        </p:spPr>
+        <p:style>
+          <a:lnRef idx="2">
+            <a:schemeClr val="dk1"/>
+          </a:lnRef>
+          <a:fillRef idx="0">
+            <a:schemeClr val="dk1"/>
+          </a:fillRef>
+          <a:effectRef idx="1">
+            <a:schemeClr val="dk1"/>
+          </a:effectRef>
+          <a:fontRef idx="minor">
+            <a:schemeClr val="tx1"/>
+          </a:fontRef>
+        </p:style>
+      </p:cxnSp>
+      <p:sp>
+        <p:nvSpPr>
+          <p:cNvPr id="48" name="文本框 47">
+            <a:extLst>
+              <a:ext uri="{FF2B5EF4-FFF2-40B4-BE49-F238E27FC236}">
+                <a16:creationId xmlns:a16="http://schemas.microsoft.com/office/drawing/2014/main" id="{E609F8F3-59AE-4B6C-C3AD-D1ED6F4EDB90}"/>
+              </a:ext>
+            </a:extLst>
+          </p:cNvPr>
+          <p:cNvSpPr txBox="1"/>
+          <p:nvPr/>
+        </p:nvSpPr>
+        <p:spPr>
+          <a:xfrm>
+            <a:off x="4583257" y="1618576"/>
+            <a:ext cx="277640" cy="369332"/>
+          </a:xfrm>
+          <a:prstGeom prst="rect">
+            <a:avLst/>
+          </a:prstGeom>
+          <a:noFill/>
+        </p:spPr>
+        <p:txBody>
+          <a:bodyPr wrap="none" rtlCol="0">
+            <a:spAutoFit/>
+          </a:bodyPr>
+          <a:lstStyle/>
+          <a:p>
+            <a:r>
+              <a:rPr lang="en-US" altLang="zh-CN"/>
+              <a:t>•</a:t>
+            </a:r>
+            <a:endParaRPr lang="zh-CN" altLang="en-US"/>
+          </a:p>
+        </p:txBody>
+      </p:sp>
+      <p:sp>
+        <p:nvSpPr>
+          <p:cNvPr id="49" name="文本框 48">
+            <a:extLst>
+              <a:ext uri="{FF2B5EF4-FFF2-40B4-BE49-F238E27FC236}">
+                <a16:creationId xmlns:a16="http://schemas.microsoft.com/office/drawing/2014/main" id="{19169406-B539-A661-F065-0158FDDF52CD}"/>
+              </a:ext>
+            </a:extLst>
+          </p:cNvPr>
+          <p:cNvSpPr txBox="1"/>
+          <p:nvPr/>
+        </p:nvSpPr>
+        <p:spPr>
+          <a:xfrm>
+            <a:off x="4879732" y="1618576"/>
+            <a:ext cx="277640" cy="369332"/>
+          </a:xfrm>
+          <a:prstGeom prst="rect">
+            <a:avLst/>
+          </a:prstGeom>
+          <a:noFill/>
+        </p:spPr>
+        <p:txBody>
+          <a:bodyPr wrap="none" rtlCol="0">
+            <a:spAutoFit/>
+          </a:bodyPr>
+          <a:lstStyle/>
+          <a:p>
+            <a:r>
+              <a:rPr lang="en-US" altLang="zh-CN"/>
+              <a:t>•</a:t>
+            </a:r>
+            <a:endParaRPr lang="zh-CN" altLang="en-US"/>
+          </a:p>
+        </p:txBody>
+      </p:sp>
+      <p:cxnSp>
+        <p:nvCxnSpPr>
+          <p:cNvPr id="50" name="直接连接符 49">
+            <a:extLst>
+              <a:ext uri="{FF2B5EF4-FFF2-40B4-BE49-F238E27FC236}">
+                <a16:creationId xmlns:a16="http://schemas.microsoft.com/office/drawing/2014/main" id="{02E9C603-D0FA-C05B-D9A4-D139B4F86162}"/>
+              </a:ext>
+            </a:extLst>
+          </p:cNvPr>
+          <p:cNvCxnSpPr>
+            <a:cxnSpLocks/>
+          </p:cNvCxnSpPr>
+          <p:nvPr/>
+        </p:nvCxnSpPr>
+        <p:spPr>
+          <a:xfrm>
+            <a:off x="4888026" y="1343773"/>
+            <a:ext cx="130526" cy="459469"/>
+          </a:xfrm>
+          <a:prstGeom prst="line">
+            <a:avLst/>
+          </a:prstGeom>
+        </p:spPr>
+        <p:style>
+          <a:lnRef idx="2">
+            <a:schemeClr val="dk1"/>
+          </a:lnRef>
+          <a:fillRef idx="0">
+            <a:schemeClr val="dk1"/>
+          </a:fillRef>
+          <a:effectRef idx="1">
+            <a:schemeClr val="dk1"/>
+          </a:effectRef>
+          <a:fontRef idx="minor">
+            <a:schemeClr val="tx1"/>
+          </a:fontRef>
+        </p:style>
+      </p:cxnSp>
+      <p:cxnSp>
+        <p:nvCxnSpPr>
+          <p:cNvPr id="54" name="直接连接符 53">
+            <a:extLst>
+              <a:ext uri="{FF2B5EF4-FFF2-40B4-BE49-F238E27FC236}">
+                <a16:creationId xmlns:a16="http://schemas.microsoft.com/office/drawing/2014/main" id="{99456611-AF73-DE02-7EB8-462CD9E3CF30}"/>
+              </a:ext>
+            </a:extLst>
+          </p:cNvPr>
+          <p:cNvCxnSpPr>
+            <a:cxnSpLocks/>
+          </p:cNvCxnSpPr>
+          <p:nvPr/>
+        </p:nvCxnSpPr>
+        <p:spPr>
+          <a:xfrm flipH="1">
+            <a:off x="5287898" y="1345257"/>
+            <a:ext cx="165949" cy="459469"/>
+          </a:xfrm>
+          <a:prstGeom prst="line">
+            <a:avLst/>
+          </a:prstGeom>
+        </p:spPr>
+        <p:style>
+          <a:lnRef idx="2">
+            <a:schemeClr val="dk1"/>
+          </a:lnRef>
+          <a:fillRef idx="0">
+            <a:schemeClr val="dk1"/>
+          </a:fillRef>
+          <a:effectRef idx="1">
+            <a:schemeClr val="dk1"/>
+          </a:effectRef>
+          <a:fontRef idx="minor">
+            <a:schemeClr val="tx1"/>
+          </a:fontRef>
+        </p:style>
+      </p:cxnSp>
+      <p:sp>
+        <p:nvSpPr>
+          <p:cNvPr id="55" name="文本框 54">
+            <a:extLst>
+              <a:ext uri="{FF2B5EF4-FFF2-40B4-BE49-F238E27FC236}">
+                <a16:creationId xmlns:a16="http://schemas.microsoft.com/office/drawing/2014/main" id="{35CBD176-5FDE-126F-537D-D052A6F10FAD}"/>
+              </a:ext>
+            </a:extLst>
+          </p:cNvPr>
+          <p:cNvSpPr txBox="1"/>
+          <p:nvPr/>
+        </p:nvSpPr>
+        <p:spPr>
+          <a:xfrm>
+            <a:off x="5149078" y="1620060"/>
+            <a:ext cx="277640" cy="369332"/>
+          </a:xfrm>
+          <a:prstGeom prst="rect">
+            <a:avLst/>
+          </a:prstGeom>
+          <a:noFill/>
+        </p:spPr>
+        <p:txBody>
+          <a:bodyPr wrap="none" rtlCol="0">
+            <a:spAutoFit/>
+          </a:bodyPr>
+          <a:lstStyle/>
+          <a:p>
+            <a:r>
+              <a:rPr lang="en-US" altLang="zh-CN"/>
+              <a:t>•</a:t>
+            </a:r>
+            <a:endParaRPr lang="zh-CN" altLang="en-US"/>
+          </a:p>
+        </p:txBody>
+      </p:sp>
+      <p:sp>
+        <p:nvSpPr>
+          <p:cNvPr id="56" name="文本框 55">
+            <a:extLst>
+              <a:ext uri="{FF2B5EF4-FFF2-40B4-BE49-F238E27FC236}">
+                <a16:creationId xmlns:a16="http://schemas.microsoft.com/office/drawing/2014/main" id="{E4C04CF5-A6F5-C619-9868-590BA40957BE}"/>
+              </a:ext>
+            </a:extLst>
+          </p:cNvPr>
+          <p:cNvSpPr txBox="1"/>
+          <p:nvPr/>
+        </p:nvSpPr>
+        <p:spPr>
+          <a:xfrm>
+            <a:off x="5445553" y="1620060"/>
+            <a:ext cx="277640" cy="369332"/>
+          </a:xfrm>
+          <a:prstGeom prst="rect">
+            <a:avLst/>
+          </a:prstGeom>
+          <a:noFill/>
+        </p:spPr>
+        <p:txBody>
+          <a:bodyPr wrap="none" rtlCol="0">
+            <a:spAutoFit/>
+          </a:bodyPr>
+          <a:lstStyle/>
+          <a:p>
+            <a:r>
+              <a:rPr lang="en-US" altLang="zh-CN"/>
+              <a:t>•</a:t>
+            </a:r>
+            <a:endParaRPr lang="zh-CN" altLang="en-US"/>
+          </a:p>
+        </p:txBody>
+      </p:sp>
+      <p:cxnSp>
+        <p:nvCxnSpPr>
+          <p:cNvPr id="57" name="直接连接符 56">
+            <a:extLst>
+              <a:ext uri="{FF2B5EF4-FFF2-40B4-BE49-F238E27FC236}">
+                <a16:creationId xmlns:a16="http://schemas.microsoft.com/office/drawing/2014/main" id="{2744E43B-229E-1D9C-854B-1EFE6D55E06C}"/>
+              </a:ext>
+            </a:extLst>
+          </p:cNvPr>
+          <p:cNvCxnSpPr>
+            <a:cxnSpLocks/>
+          </p:cNvCxnSpPr>
+          <p:nvPr/>
+        </p:nvCxnSpPr>
+        <p:spPr>
+          <a:xfrm>
+            <a:off x="5453847" y="1345257"/>
+            <a:ext cx="130526" cy="459469"/>
+          </a:xfrm>
+          <a:prstGeom prst="line">
+            <a:avLst/>
+          </a:prstGeom>
+        </p:spPr>
+        <p:style>
+          <a:lnRef idx="2">
+            <a:schemeClr val="dk1"/>
+          </a:lnRef>
+          <a:fillRef idx="0">
+            <a:schemeClr val="dk1"/>
+          </a:fillRef>
+          <a:effectRef idx="1">
+            <a:schemeClr val="dk1"/>
+          </a:effectRef>
+          <a:fontRef idx="minor">
+            <a:schemeClr val="tx1"/>
+          </a:fontRef>
+        </p:style>
+      </p:cxnSp>
+      <p:cxnSp>
+        <p:nvCxnSpPr>
+          <p:cNvPr id="58" name="直接连接符 57">
+            <a:extLst>
+              <a:ext uri="{FF2B5EF4-FFF2-40B4-BE49-F238E27FC236}">
+                <a16:creationId xmlns:a16="http://schemas.microsoft.com/office/drawing/2014/main" id="{AEA81B2C-7EC0-70AB-A1F5-72DC6C68DA67}"/>
+              </a:ext>
+            </a:extLst>
+          </p:cNvPr>
+          <p:cNvCxnSpPr>
+            <a:cxnSpLocks/>
+          </p:cNvCxnSpPr>
+          <p:nvPr/>
+        </p:nvCxnSpPr>
+        <p:spPr>
+          <a:xfrm flipH="1">
+            <a:off x="7495832" y="1149378"/>
+            <a:ext cx="165949" cy="459469"/>
+          </a:xfrm>
+          <a:prstGeom prst="line">
+            <a:avLst/>
+          </a:prstGeom>
+        </p:spPr>
+        <p:style>
+          <a:lnRef idx="2">
+            <a:schemeClr val="dk1"/>
+          </a:lnRef>
+          <a:fillRef idx="0">
+            <a:schemeClr val="dk1"/>
+          </a:fillRef>
+          <a:effectRef idx="1">
+            <a:schemeClr val="dk1"/>
+          </a:effectRef>
+          <a:fontRef idx="minor">
+            <a:schemeClr val="tx1"/>
+          </a:fontRef>
+        </p:style>
+      </p:cxnSp>
+      <p:sp>
+        <p:nvSpPr>
+          <p:cNvPr id="59" name="文本框 58">
+            <a:extLst>
+              <a:ext uri="{FF2B5EF4-FFF2-40B4-BE49-F238E27FC236}">
+                <a16:creationId xmlns:a16="http://schemas.microsoft.com/office/drawing/2014/main" id="{54C403D8-A45E-3C02-B50B-BEC029EECF34}"/>
+              </a:ext>
+            </a:extLst>
+          </p:cNvPr>
+          <p:cNvSpPr txBox="1"/>
+          <p:nvPr/>
+        </p:nvSpPr>
+        <p:spPr>
+          <a:xfrm>
+            <a:off x="7357012" y="1424181"/>
+            <a:ext cx="277640" cy="369332"/>
+          </a:xfrm>
+          <a:prstGeom prst="rect">
+            <a:avLst/>
+          </a:prstGeom>
+          <a:noFill/>
+        </p:spPr>
+        <p:txBody>
+          <a:bodyPr wrap="none" rtlCol="0">
+            <a:spAutoFit/>
+          </a:bodyPr>
+          <a:lstStyle/>
+          <a:p>
+            <a:r>
+              <a:rPr lang="en-US" altLang="zh-CN"/>
+              <a:t>•</a:t>
+            </a:r>
+            <a:endParaRPr lang="zh-CN" altLang="en-US"/>
+          </a:p>
+        </p:txBody>
+      </p:sp>
+      <p:sp>
+        <p:nvSpPr>
+          <p:cNvPr id="60" name="文本框 59">
+            <a:extLst>
+              <a:ext uri="{FF2B5EF4-FFF2-40B4-BE49-F238E27FC236}">
+                <a16:creationId xmlns:a16="http://schemas.microsoft.com/office/drawing/2014/main" id="{F39C5D79-FCB8-7183-C17B-5F3EE51640E0}"/>
+              </a:ext>
+            </a:extLst>
+          </p:cNvPr>
+          <p:cNvSpPr txBox="1"/>
+          <p:nvPr/>
+        </p:nvSpPr>
+        <p:spPr>
+          <a:xfrm>
+            <a:off x="7653487" y="1424181"/>
+            <a:ext cx="277640" cy="369332"/>
+          </a:xfrm>
+          <a:prstGeom prst="rect">
+            <a:avLst/>
+          </a:prstGeom>
+          <a:noFill/>
+        </p:spPr>
+        <p:txBody>
+          <a:bodyPr wrap="none" rtlCol="0">
+            <a:spAutoFit/>
+          </a:bodyPr>
+          <a:lstStyle/>
+          <a:p>
+            <a:r>
+              <a:rPr lang="en-US" altLang="zh-CN"/>
+              <a:t>•</a:t>
+            </a:r>
+            <a:endParaRPr lang="zh-CN" altLang="en-US"/>
+          </a:p>
+        </p:txBody>
+      </p:sp>
+      <p:cxnSp>
+        <p:nvCxnSpPr>
+          <p:cNvPr id="61" name="直接连接符 60">
+            <a:extLst>
+              <a:ext uri="{FF2B5EF4-FFF2-40B4-BE49-F238E27FC236}">
+                <a16:creationId xmlns:a16="http://schemas.microsoft.com/office/drawing/2014/main" id="{4007EE6D-8092-E809-70B7-E6F729611C93}"/>
+              </a:ext>
+            </a:extLst>
+          </p:cNvPr>
+          <p:cNvCxnSpPr>
+            <a:cxnSpLocks/>
+          </p:cNvCxnSpPr>
+          <p:nvPr/>
+        </p:nvCxnSpPr>
+        <p:spPr>
+          <a:xfrm>
+            <a:off x="7661781" y="1149378"/>
+            <a:ext cx="130526" cy="459469"/>
+          </a:xfrm>
+          <a:prstGeom prst="line">
+            <a:avLst/>
+          </a:prstGeom>
+        </p:spPr>
+        <p:style>
+          <a:lnRef idx="2">
+            <a:schemeClr val="dk1"/>
+          </a:lnRef>
+          <a:fillRef idx="0">
+            <a:schemeClr val="dk1"/>
+          </a:fillRef>
+          <a:effectRef idx="1">
+            <a:schemeClr val="dk1"/>
+          </a:effectRef>
+          <a:fontRef idx="minor">
+            <a:schemeClr val="tx1"/>
+          </a:fontRef>
+        </p:style>
+      </p:cxnSp>
+      <p:cxnSp>
+        <p:nvCxnSpPr>
+          <p:cNvPr id="62" name="直接连接符 61">
+            <a:extLst>
+              <a:ext uri="{FF2B5EF4-FFF2-40B4-BE49-F238E27FC236}">
+                <a16:creationId xmlns:a16="http://schemas.microsoft.com/office/drawing/2014/main" id="{C3BDA4FC-9A9C-4511-AB4F-6A6254E0127E}"/>
+              </a:ext>
+            </a:extLst>
+          </p:cNvPr>
+          <p:cNvCxnSpPr>
+            <a:cxnSpLocks/>
+          </p:cNvCxnSpPr>
+          <p:nvPr/>
+        </p:nvCxnSpPr>
+        <p:spPr>
+          <a:xfrm flipH="1">
+            <a:off x="8061653" y="1150862"/>
+            <a:ext cx="165949" cy="459469"/>
+          </a:xfrm>
+          <a:prstGeom prst="line">
+            <a:avLst/>
+          </a:prstGeom>
+        </p:spPr>
+        <p:style>
+          <a:lnRef idx="2">
+            <a:schemeClr val="dk1"/>
+          </a:lnRef>
+          <a:fillRef idx="0">
+            <a:schemeClr val="dk1"/>
+          </a:fillRef>
+          <a:effectRef idx="1">
+            <a:schemeClr val="dk1"/>
+          </a:effectRef>
+          <a:fontRef idx="minor">
+            <a:schemeClr val="tx1"/>
+          </a:fontRef>
+        </p:style>
+      </p:cxnSp>
+      <p:sp>
+        <p:nvSpPr>
+          <p:cNvPr id="63" name="文本框 62">
+            <a:extLst>
+              <a:ext uri="{FF2B5EF4-FFF2-40B4-BE49-F238E27FC236}">
+                <a16:creationId xmlns:a16="http://schemas.microsoft.com/office/drawing/2014/main" id="{8F60BDE4-A758-7603-2B20-4D0E1FCE2B46}"/>
+              </a:ext>
+            </a:extLst>
+          </p:cNvPr>
+          <p:cNvSpPr txBox="1"/>
+          <p:nvPr/>
+        </p:nvSpPr>
+        <p:spPr>
+          <a:xfrm>
+            <a:off x="7922833" y="1425665"/>
+            <a:ext cx="277640" cy="369332"/>
+          </a:xfrm>
+          <a:prstGeom prst="rect">
+            <a:avLst/>
+          </a:prstGeom>
+          <a:noFill/>
+        </p:spPr>
+        <p:txBody>
+          <a:bodyPr wrap="none" rtlCol="0">
+            <a:spAutoFit/>
+          </a:bodyPr>
+          <a:lstStyle/>
+          <a:p>
+            <a:r>
+              <a:rPr lang="en-US" altLang="zh-CN"/>
+              <a:t>•</a:t>
+            </a:r>
+            <a:endParaRPr lang="zh-CN" altLang="en-US"/>
+          </a:p>
+        </p:txBody>
+      </p:sp>
+      <p:sp>
+        <p:nvSpPr>
+          <p:cNvPr id="64" name="文本框 63">
+            <a:extLst>
+              <a:ext uri="{FF2B5EF4-FFF2-40B4-BE49-F238E27FC236}">
+                <a16:creationId xmlns:a16="http://schemas.microsoft.com/office/drawing/2014/main" id="{7DEB08BC-3CD1-0E54-0F51-C5DBC6319D51}"/>
+              </a:ext>
+            </a:extLst>
+          </p:cNvPr>
+          <p:cNvSpPr txBox="1"/>
+          <p:nvPr/>
+        </p:nvSpPr>
+        <p:spPr>
+          <a:xfrm>
+            <a:off x="8219308" y="1425665"/>
+            <a:ext cx="277640" cy="369332"/>
+          </a:xfrm>
+          <a:prstGeom prst="rect">
+            <a:avLst/>
+          </a:prstGeom>
+          <a:noFill/>
+        </p:spPr>
+        <p:txBody>
+          <a:bodyPr wrap="none" rtlCol="0">
+            <a:spAutoFit/>
+          </a:bodyPr>
+          <a:lstStyle/>
+          <a:p>
+            <a:r>
+              <a:rPr lang="en-US" altLang="zh-CN"/>
+              <a:t>•</a:t>
+            </a:r>
+            <a:endParaRPr lang="zh-CN" altLang="en-US"/>
+          </a:p>
+        </p:txBody>
+      </p:sp>
+      <p:cxnSp>
+        <p:nvCxnSpPr>
+          <p:cNvPr id="65" name="直接连接符 64">
+            <a:extLst>
+              <a:ext uri="{FF2B5EF4-FFF2-40B4-BE49-F238E27FC236}">
+                <a16:creationId xmlns:a16="http://schemas.microsoft.com/office/drawing/2014/main" id="{08A5D556-E318-80DE-E891-1F0CB3D04B42}"/>
+              </a:ext>
+            </a:extLst>
+          </p:cNvPr>
+          <p:cNvCxnSpPr>
+            <a:cxnSpLocks/>
+          </p:cNvCxnSpPr>
+          <p:nvPr/>
+        </p:nvCxnSpPr>
+        <p:spPr>
+          <a:xfrm>
+            <a:off x="8227602" y="1150862"/>
+            <a:ext cx="130526" cy="459469"/>
+          </a:xfrm>
+          <a:prstGeom prst="line">
+            <a:avLst/>
+          </a:prstGeom>
+        </p:spPr>
+        <p:style>
+          <a:lnRef idx="2">
+            <a:schemeClr val="dk1"/>
+          </a:lnRef>
+          <a:fillRef idx="0">
+            <a:schemeClr val="dk1"/>
+          </a:fillRef>
+          <a:effectRef idx="1">
+            <a:schemeClr val="dk1"/>
+          </a:effectRef>
+          <a:fontRef idx="minor">
+            <a:schemeClr val="tx1"/>
+          </a:fontRef>
+        </p:style>
+      </p:cxnSp>
+      <p:cxnSp>
+        <p:nvCxnSpPr>
+          <p:cNvPr id="70" name="直接连接符 69">
+            <a:extLst>
+              <a:ext uri="{FF2B5EF4-FFF2-40B4-BE49-F238E27FC236}">
+                <a16:creationId xmlns:a16="http://schemas.microsoft.com/office/drawing/2014/main" id="{C2932750-0334-889A-A3FD-FA7C126F440B}"/>
+              </a:ext>
+            </a:extLst>
+          </p:cNvPr>
+          <p:cNvCxnSpPr>
+            <a:cxnSpLocks/>
+            <a:endCxn id="72" idx="1"/>
+          </p:cNvCxnSpPr>
+          <p:nvPr/>
+        </p:nvCxnSpPr>
+        <p:spPr>
+          <a:xfrm flipH="1">
+            <a:off x="7738068" y="1605846"/>
+            <a:ext cx="54239" cy="454984"/>
+          </a:xfrm>
+          <a:prstGeom prst="line">
+            <a:avLst/>
+          </a:prstGeom>
+        </p:spPr>
+        <p:style>
+          <a:lnRef idx="2">
+            <a:schemeClr val="dk1"/>
+          </a:lnRef>
+          <a:fillRef idx="0">
+            <a:schemeClr val="dk1"/>
+          </a:fillRef>
+          <a:effectRef idx="1">
+            <a:schemeClr val="dk1"/>
+          </a:effectRef>
+          <a:fontRef idx="minor">
+            <a:schemeClr val="tx1"/>
+          </a:fontRef>
+        </p:style>
+      </p:cxnSp>
+      <p:sp>
+        <p:nvSpPr>
+          <p:cNvPr id="71" name="文本框 70">
+            <a:extLst>
+              <a:ext uri="{FF2B5EF4-FFF2-40B4-BE49-F238E27FC236}">
+                <a16:creationId xmlns:a16="http://schemas.microsoft.com/office/drawing/2014/main" id="{867D41D6-5958-BD96-4BBF-A34E0EEAE826}"/>
+              </a:ext>
+            </a:extLst>
+          </p:cNvPr>
+          <p:cNvSpPr txBox="1"/>
+          <p:nvPr/>
+        </p:nvSpPr>
+        <p:spPr>
+          <a:xfrm>
+            <a:off x="7588224" y="1879165"/>
+            <a:ext cx="277640" cy="369332"/>
+          </a:xfrm>
+          <a:prstGeom prst="rect">
+            <a:avLst/>
+          </a:prstGeom>
+          <a:noFill/>
+        </p:spPr>
+        <p:txBody>
+          <a:bodyPr wrap="none" rtlCol="0">
+            <a:spAutoFit/>
+          </a:bodyPr>
+          <a:lstStyle/>
+          <a:p>
+            <a:r>
+              <a:rPr lang="en-US" altLang="zh-CN"/>
+              <a:t>•</a:t>
+            </a:r>
+            <a:endParaRPr lang="zh-CN" altLang="en-US"/>
+          </a:p>
+        </p:txBody>
+      </p:sp>
+      <p:sp>
+        <p:nvSpPr>
+          <p:cNvPr id="72" name="文本框 71">
+            <a:extLst>
+              <a:ext uri="{FF2B5EF4-FFF2-40B4-BE49-F238E27FC236}">
+                <a16:creationId xmlns:a16="http://schemas.microsoft.com/office/drawing/2014/main" id="{96FC4732-39D0-FAE4-E37C-FFE954C2833E}"/>
+              </a:ext>
+            </a:extLst>
+          </p:cNvPr>
+          <p:cNvSpPr txBox="1"/>
+          <p:nvPr/>
+        </p:nvSpPr>
+        <p:spPr>
+          <a:xfrm>
+            <a:off x="7738068" y="1876164"/>
+            <a:ext cx="277640" cy="369332"/>
+          </a:xfrm>
+          <a:prstGeom prst="rect">
+            <a:avLst/>
+          </a:prstGeom>
+          <a:noFill/>
+        </p:spPr>
+        <p:txBody>
+          <a:bodyPr wrap="none" rtlCol="0">
+            <a:spAutoFit/>
+          </a:bodyPr>
+          <a:lstStyle/>
+          <a:p>
+            <a:r>
+              <a:rPr lang="en-US" altLang="zh-CN"/>
+              <a:t>•</a:t>
+            </a:r>
+            <a:endParaRPr lang="zh-CN" altLang="en-US"/>
+          </a:p>
+        </p:txBody>
+      </p:sp>
+      <p:cxnSp>
+        <p:nvCxnSpPr>
+          <p:cNvPr id="73" name="直接连接符 72">
+            <a:extLst>
+              <a:ext uri="{FF2B5EF4-FFF2-40B4-BE49-F238E27FC236}">
+                <a16:creationId xmlns:a16="http://schemas.microsoft.com/office/drawing/2014/main" id="{C42ACEA4-A026-5565-A00D-D352E0CE84DF}"/>
+              </a:ext>
+            </a:extLst>
+          </p:cNvPr>
+          <p:cNvCxnSpPr>
+            <a:cxnSpLocks/>
+          </p:cNvCxnSpPr>
+          <p:nvPr/>
+        </p:nvCxnSpPr>
+        <p:spPr>
+          <a:xfrm>
+            <a:off x="7792307" y="1605846"/>
+            <a:ext cx="73557" cy="454984"/>
+          </a:xfrm>
+          <a:prstGeom prst="line">
+            <a:avLst/>
+          </a:prstGeom>
+        </p:spPr>
+        <p:style>
+          <a:lnRef idx="2">
+            <a:schemeClr val="dk1"/>
+          </a:lnRef>
+          <a:fillRef idx="0">
+            <a:schemeClr val="dk1"/>
+          </a:fillRef>
+          <a:effectRef idx="1">
+            <a:schemeClr val="dk1"/>
+          </a:effectRef>
+          <a:fontRef idx="minor">
+            <a:schemeClr val="tx1"/>
+          </a:fontRef>
+        </p:style>
+      </p:cxnSp>
+      <p:cxnSp>
+        <p:nvCxnSpPr>
+          <p:cNvPr id="77" name="直接连接符 76">
+            <a:extLst>
+              <a:ext uri="{FF2B5EF4-FFF2-40B4-BE49-F238E27FC236}">
+                <a16:creationId xmlns:a16="http://schemas.microsoft.com/office/drawing/2014/main" id="{B5186534-3AC3-1328-84A3-EA3F9BBFCB21}"/>
+              </a:ext>
+            </a:extLst>
+          </p:cNvPr>
+          <p:cNvCxnSpPr>
+            <a:cxnSpLocks/>
+            <a:endCxn id="79" idx="1"/>
+          </p:cNvCxnSpPr>
+          <p:nvPr/>
+        </p:nvCxnSpPr>
+        <p:spPr>
+          <a:xfrm flipH="1">
+            <a:off x="7997764" y="1604346"/>
+            <a:ext cx="54239" cy="454984"/>
+          </a:xfrm>
+          <a:prstGeom prst="line">
+            <a:avLst/>
+          </a:prstGeom>
+        </p:spPr>
+        <p:style>
+          <a:lnRef idx="2">
+            <a:schemeClr val="dk1"/>
+          </a:lnRef>
+          <a:fillRef idx="0">
+            <a:schemeClr val="dk1"/>
+          </a:fillRef>
+          <a:effectRef idx="1">
+            <a:schemeClr val="dk1"/>
+          </a:effectRef>
+          <a:fontRef idx="minor">
+            <a:schemeClr val="tx1"/>
+          </a:fontRef>
+        </p:style>
+      </p:cxnSp>
+      <p:sp>
+        <p:nvSpPr>
+          <p:cNvPr id="78" name="文本框 77">
+            <a:extLst>
+              <a:ext uri="{FF2B5EF4-FFF2-40B4-BE49-F238E27FC236}">
+                <a16:creationId xmlns:a16="http://schemas.microsoft.com/office/drawing/2014/main" id="{847861AD-017E-92CF-EB71-35E42599462C}"/>
+              </a:ext>
+            </a:extLst>
+          </p:cNvPr>
+          <p:cNvSpPr txBox="1"/>
+          <p:nvPr/>
+        </p:nvSpPr>
+        <p:spPr>
+          <a:xfrm>
+            <a:off x="7847920" y="1877665"/>
+            <a:ext cx="277640" cy="369332"/>
+          </a:xfrm>
+          <a:prstGeom prst="rect">
+            <a:avLst/>
+          </a:prstGeom>
+          <a:noFill/>
+        </p:spPr>
+        <p:txBody>
+          <a:bodyPr wrap="none" rtlCol="0">
+            <a:spAutoFit/>
+          </a:bodyPr>
+          <a:lstStyle/>
+          <a:p>
+            <a:r>
+              <a:rPr lang="en-US" altLang="zh-CN"/>
+              <a:t>•</a:t>
+            </a:r>
+            <a:endParaRPr lang="zh-CN" altLang="en-US"/>
+          </a:p>
+        </p:txBody>
+      </p:sp>
+      <p:sp>
+        <p:nvSpPr>
+          <p:cNvPr id="79" name="文本框 78">
+            <a:extLst>
+              <a:ext uri="{FF2B5EF4-FFF2-40B4-BE49-F238E27FC236}">
+                <a16:creationId xmlns:a16="http://schemas.microsoft.com/office/drawing/2014/main" id="{6FAE5592-E1E4-9837-0F62-E69F9D37D1BA}"/>
+              </a:ext>
+            </a:extLst>
+          </p:cNvPr>
+          <p:cNvSpPr txBox="1"/>
+          <p:nvPr/>
+        </p:nvSpPr>
+        <p:spPr>
+          <a:xfrm>
+            <a:off x="7997764" y="1874664"/>
+            <a:ext cx="277640" cy="369332"/>
+          </a:xfrm>
+          <a:prstGeom prst="rect">
+            <a:avLst/>
+          </a:prstGeom>
+          <a:noFill/>
+        </p:spPr>
+        <p:txBody>
+          <a:bodyPr wrap="none" rtlCol="0">
+            <a:spAutoFit/>
+          </a:bodyPr>
+          <a:lstStyle/>
+          <a:p>
+            <a:r>
+              <a:rPr lang="en-US" altLang="zh-CN"/>
+              <a:t>•</a:t>
+            </a:r>
+            <a:endParaRPr lang="zh-CN" altLang="en-US"/>
+          </a:p>
+        </p:txBody>
+      </p:sp>
+      <p:cxnSp>
+        <p:nvCxnSpPr>
+          <p:cNvPr id="80" name="直接连接符 79">
+            <a:extLst>
+              <a:ext uri="{FF2B5EF4-FFF2-40B4-BE49-F238E27FC236}">
+                <a16:creationId xmlns:a16="http://schemas.microsoft.com/office/drawing/2014/main" id="{9F7CB859-F572-C742-4204-690F75C7C833}"/>
+              </a:ext>
+            </a:extLst>
+          </p:cNvPr>
+          <p:cNvCxnSpPr>
+            <a:cxnSpLocks/>
+          </p:cNvCxnSpPr>
+          <p:nvPr/>
+        </p:nvCxnSpPr>
+        <p:spPr>
+          <a:xfrm>
+            <a:off x="8052003" y="1604346"/>
+            <a:ext cx="73557" cy="454984"/>
+          </a:xfrm>
+          <a:prstGeom prst="line">
+            <a:avLst/>
+          </a:prstGeom>
+        </p:spPr>
+        <p:style>
+          <a:lnRef idx="2">
+            <a:schemeClr val="dk1"/>
+          </a:lnRef>
+          <a:fillRef idx="0">
+            <a:schemeClr val="dk1"/>
+          </a:fillRef>
+          <a:effectRef idx="1">
+            <a:schemeClr val="dk1"/>
+          </a:effectRef>
+          <a:fontRef idx="minor">
+            <a:schemeClr val="tx1"/>
+          </a:fontRef>
+        </p:style>
+      </p:cxnSp>
+      <p:cxnSp>
+        <p:nvCxnSpPr>
+          <p:cNvPr id="81" name="直接连接符 80">
+            <a:extLst>
+              <a:ext uri="{FF2B5EF4-FFF2-40B4-BE49-F238E27FC236}">
+                <a16:creationId xmlns:a16="http://schemas.microsoft.com/office/drawing/2014/main" id="{FDFEFE7B-B910-1082-D056-7659D74E59C7}"/>
+              </a:ext>
+            </a:extLst>
+          </p:cNvPr>
+          <p:cNvCxnSpPr>
+            <a:cxnSpLocks/>
+            <a:endCxn id="83" idx="1"/>
+          </p:cNvCxnSpPr>
+          <p:nvPr/>
+        </p:nvCxnSpPr>
+        <p:spPr>
+          <a:xfrm flipH="1">
+            <a:off x="8294238" y="1604346"/>
+            <a:ext cx="54239" cy="454984"/>
+          </a:xfrm>
+          <a:prstGeom prst="line">
+            <a:avLst/>
+          </a:prstGeom>
+        </p:spPr>
+        <p:style>
+          <a:lnRef idx="2">
+            <a:schemeClr val="dk1"/>
+          </a:lnRef>
+          <a:fillRef idx="0">
+            <a:schemeClr val="dk1"/>
+          </a:fillRef>
+          <a:effectRef idx="1">
+            <a:schemeClr val="dk1"/>
+          </a:effectRef>
+          <a:fontRef idx="minor">
+            <a:schemeClr val="tx1"/>
+          </a:fontRef>
+        </p:style>
+      </p:cxnSp>
+      <p:sp>
+        <p:nvSpPr>
+          <p:cNvPr id="82" name="文本框 81">
+            <a:extLst>
+              <a:ext uri="{FF2B5EF4-FFF2-40B4-BE49-F238E27FC236}">
+                <a16:creationId xmlns:a16="http://schemas.microsoft.com/office/drawing/2014/main" id="{A89887FE-D9B4-6115-28AA-C7ADC9D699D4}"/>
+              </a:ext>
+            </a:extLst>
+          </p:cNvPr>
+          <p:cNvSpPr txBox="1"/>
+          <p:nvPr/>
+        </p:nvSpPr>
+        <p:spPr>
+          <a:xfrm>
+            <a:off x="8144394" y="1877665"/>
+            <a:ext cx="277640" cy="369332"/>
+          </a:xfrm>
+          <a:prstGeom prst="rect">
+            <a:avLst/>
+          </a:prstGeom>
+          <a:noFill/>
+        </p:spPr>
+        <p:txBody>
+          <a:bodyPr wrap="none" rtlCol="0">
+            <a:spAutoFit/>
+          </a:bodyPr>
+          <a:lstStyle/>
+          <a:p>
+            <a:r>
+              <a:rPr lang="en-US" altLang="zh-CN"/>
+              <a:t>•</a:t>
+            </a:r>
+            <a:endParaRPr lang="zh-CN" altLang="en-US"/>
+          </a:p>
+        </p:txBody>
+      </p:sp>
+      <p:sp>
+        <p:nvSpPr>
+          <p:cNvPr id="83" name="文本框 82">
+            <a:extLst>
+              <a:ext uri="{FF2B5EF4-FFF2-40B4-BE49-F238E27FC236}">
+                <a16:creationId xmlns:a16="http://schemas.microsoft.com/office/drawing/2014/main" id="{DE96FF1C-2472-290C-AD44-E3A73CC9FB06}"/>
+              </a:ext>
+            </a:extLst>
+          </p:cNvPr>
+          <p:cNvSpPr txBox="1"/>
+          <p:nvPr/>
+        </p:nvSpPr>
+        <p:spPr>
+          <a:xfrm>
+            <a:off x="8294238" y="1874664"/>
+            <a:ext cx="277640" cy="369332"/>
+          </a:xfrm>
+          <a:prstGeom prst="rect">
+            <a:avLst/>
+          </a:prstGeom>
+          <a:noFill/>
+        </p:spPr>
+        <p:txBody>
+          <a:bodyPr wrap="none" rtlCol="0">
+            <a:spAutoFit/>
+          </a:bodyPr>
+          <a:lstStyle/>
+          <a:p>
+            <a:r>
+              <a:rPr lang="en-US" altLang="zh-CN"/>
+              <a:t>•</a:t>
+            </a:r>
+            <a:endParaRPr lang="zh-CN" altLang="en-US"/>
+          </a:p>
+        </p:txBody>
+      </p:sp>
+      <p:cxnSp>
+        <p:nvCxnSpPr>
+          <p:cNvPr id="84" name="直接连接符 83">
+            <a:extLst>
+              <a:ext uri="{FF2B5EF4-FFF2-40B4-BE49-F238E27FC236}">
+                <a16:creationId xmlns:a16="http://schemas.microsoft.com/office/drawing/2014/main" id="{6C4166EF-FD54-E0F6-CF61-4A3EE22759D9}"/>
+              </a:ext>
+            </a:extLst>
+          </p:cNvPr>
+          <p:cNvCxnSpPr>
+            <a:cxnSpLocks/>
+          </p:cNvCxnSpPr>
+          <p:nvPr/>
+        </p:nvCxnSpPr>
+        <p:spPr>
+          <a:xfrm>
+            <a:off x="8348477" y="1604346"/>
+            <a:ext cx="73557" cy="454984"/>
+          </a:xfrm>
+          <a:prstGeom prst="line">
+            <a:avLst/>
+          </a:prstGeom>
+        </p:spPr>
+        <p:style>
+          <a:lnRef idx="2">
+            <a:schemeClr val="dk1"/>
+          </a:lnRef>
+          <a:fillRef idx="0">
+            <a:schemeClr val="dk1"/>
+          </a:fillRef>
+          <a:effectRef idx="1">
+            <a:schemeClr val="dk1"/>
+          </a:effectRef>
+          <a:fontRef idx="minor">
+            <a:schemeClr val="tx1"/>
+          </a:fontRef>
+        </p:style>
+      </p:cxnSp>
+      <p:cxnSp>
+        <p:nvCxnSpPr>
+          <p:cNvPr id="85" name="直接连接符 84">
+            <a:extLst>
+              <a:ext uri="{FF2B5EF4-FFF2-40B4-BE49-F238E27FC236}">
+                <a16:creationId xmlns:a16="http://schemas.microsoft.com/office/drawing/2014/main" id="{62C0E072-0FBD-D30F-20EE-410242290C74}"/>
+              </a:ext>
+            </a:extLst>
+          </p:cNvPr>
+          <p:cNvCxnSpPr>
+            <a:cxnSpLocks/>
+            <a:endCxn id="87" idx="1"/>
+          </p:cNvCxnSpPr>
+          <p:nvPr/>
+        </p:nvCxnSpPr>
+        <p:spPr>
+          <a:xfrm flipH="1">
+            <a:off x="7431460" y="1604346"/>
+            <a:ext cx="54239" cy="454984"/>
+          </a:xfrm>
+          <a:prstGeom prst="line">
+            <a:avLst/>
+          </a:prstGeom>
+        </p:spPr>
+        <p:style>
+          <a:lnRef idx="2">
+            <a:schemeClr val="dk1"/>
+          </a:lnRef>
+          <a:fillRef idx="0">
+            <a:schemeClr val="dk1"/>
+          </a:fillRef>
+          <a:effectRef idx="1">
+            <a:schemeClr val="dk1"/>
+          </a:effectRef>
+          <a:fontRef idx="minor">
+            <a:schemeClr val="tx1"/>
+          </a:fontRef>
+        </p:style>
+      </p:cxnSp>
+      <p:sp>
+        <p:nvSpPr>
+          <p:cNvPr id="86" name="文本框 85">
+            <a:extLst>
+              <a:ext uri="{FF2B5EF4-FFF2-40B4-BE49-F238E27FC236}">
+                <a16:creationId xmlns:a16="http://schemas.microsoft.com/office/drawing/2014/main" id="{0076A89D-4FCB-925F-B2E2-55DFEE2C3244}"/>
+              </a:ext>
+            </a:extLst>
+          </p:cNvPr>
+          <p:cNvSpPr txBox="1"/>
+          <p:nvPr/>
+        </p:nvSpPr>
+        <p:spPr>
+          <a:xfrm>
+            <a:off x="7281616" y="1877665"/>
+            <a:ext cx="277640" cy="369332"/>
+          </a:xfrm>
+          <a:prstGeom prst="rect">
+            <a:avLst/>
+          </a:prstGeom>
+          <a:noFill/>
+        </p:spPr>
+        <p:txBody>
+          <a:bodyPr wrap="none" rtlCol="0">
+            <a:spAutoFit/>
+          </a:bodyPr>
+          <a:lstStyle/>
+          <a:p>
+            <a:r>
+              <a:rPr lang="en-US" altLang="zh-CN"/>
+              <a:t>•</a:t>
+            </a:r>
+            <a:endParaRPr lang="zh-CN" altLang="en-US"/>
+          </a:p>
+        </p:txBody>
+      </p:sp>
+      <p:sp>
+        <p:nvSpPr>
+          <p:cNvPr id="87" name="文本框 86">
+            <a:extLst>
+              <a:ext uri="{FF2B5EF4-FFF2-40B4-BE49-F238E27FC236}">
+                <a16:creationId xmlns:a16="http://schemas.microsoft.com/office/drawing/2014/main" id="{383BFB84-25B1-CA00-B242-28B52EF4859E}"/>
+              </a:ext>
+            </a:extLst>
+          </p:cNvPr>
+          <p:cNvSpPr txBox="1"/>
+          <p:nvPr/>
+        </p:nvSpPr>
+        <p:spPr>
+          <a:xfrm>
+            <a:off x="7431460" y="1874664"/>
+            <a:ext cx="277640" cy="369332"/>
+          </a:xfrm>
+          <a:prstGeom prst="rect">
+            <a:avLst/>
+          </a:prstGeom>
+          <a:noFill/>
+        </p:spPr>
+        <p:txBody>
+          <a:bodyPr wrap="none" rtlCol="0">
+            <a:spAutoFit/>
+          </a:bodyPr>
+          <a:lstStyle/>
+          <a:p>
+            <a:r>
+              <a:rPr lang="en-US" altLang="zh-CN"/>
+              <a:t>•</a:t>
+            </a:r>
+            <a:endParaRPr lang="zh-CN" altLang="en-US"/>
+          </a:p>
+        </p:txBody>
+      </p:sp>
+      <p:cxnSp>
+        <p:nvCxnSpPr>
+          <p:cNvPr id="88" name="直接连接符 87">
+            <a:extLst>
+              <a:ext uri="{FF2B5EF4-FFF2-40B4-BE49-F238E27FC236}">
+                <a16:creationId xmlns:a16="http://schemas.microsoft.com/office/drawing/2014/main" id="{8EAE3EA9-DF9F-9FA1-15DF-A701C200A8FA}"/>
+              </a:ext>
+            </a:extLst>
+          </p:cNvPr>
+          <p:cNvCxnSpPr>
+            <a:cxnSpLocks/>
+          </p:cNvCxnSpPr>
+          <p:nvPr/>
+        </p:nvCxnSpPr>
+        <p:spPr>
+          <a:xfrm>
+            <a:off x="7485699" y="1604346"/>
+            <a:ext cx="73557" cy="454984"/>
+          </a:xfrm>
+          <a:prstGeom prst="line">
+            <a:avLst/>
+          </a:prstGeom>
+        </p:spPr>
+        <p:style>
+          <a:lnRef idx="2">
+            <a:schemeClr val="dk1"/>
+          </a:lnRef>
+          <a:fillRef idx="0">
+            <a:schemeClr val="dk1"/>
+          </a:fillRef>
+          <a:effectRef idx="1">
+            <a:schemeClr val="dk1"/>
+          </a:effectRef>
+          <a:fontRef idx="minor">
+            <a:schemeClr val="tx1"/>
+          </a:fontRef>
+        </p:style>
+      </p:cxnSp>
+      <p:sp>
+        <p:nvSpPr>
+          <p:cNvPr id="93" name="文本框 92">
+            <a:extLst>
+              <a:ext uri="{FF2B5EF4-FFF2-40B4-BE49-F238E27FC236}">
+                <a16:creationId xmlns:a16="http://schemas.microsoft.com/office/drawing/2014/main" id="{83F1133A-863E-EB94-1068-C9CDB85143F9}"/>
+              </a:ext>
+            </a:extLst>
+          </p:cNvPr>
+          <p:cNvSpPr txBox="1"/>
+          <p:nvPr/>
+        </p:nvSpPr>
+        <p:spPr>
+          <a:xfrm>
+            <a:off x="6828423" y="2753518"/>
+            <a:ext cx="277640" cy="369332"/>
+          </a:xfrm>
+          <a:prstGeom prst="rect">
+            <a:avLst/>
+          </a:prstGeom>
+          <a:noFill/>
+        </p:spPr>
+        <p:txBody>
+          <a:bodyPr wrap="none" rtlCol="0">
+            <a:spAutoFit/>
+          </a:bodyPr>
+          <a:lstStyle/>
+          <a:p>
+            <a:r>
+              <a:rPr lang="en-US" altLang="zh-CN"/>
+              <a:t>•</a:t>
+            </a:r>
+            <a:endParaRPr lang="zh-CN" altLang="en-US"/>
+          </a:p>
+        </p:txBody>
+      </p:sp>
+      <p:cxnSp>
+        <p:nvCxnSpPr>
+          <p:cNvPr id="94" name="直接连接符 93">
+            <a:extLst>
+              <a:ext uri="{FF2B5EF4-FFF2-40B4-BE49-F238E27FC236}">
+                <a16:creationId xmlns:a16="http://schemas.microsoft.com/office/drawing/2014/main" id="{239F3107-89D0-D787-79C4-4182F6872E27}"/>
+              </a:ext>
+            </a:extLst>
+          </p:cNvPr>
+          <p:cNvCxnSpPr>
+            <a:cxnSpLocks/>
+          </p:cNvCxnSpPr>
+          <p:nvPr/>
+        </p:nvCxnSpPr>
+        <p:spPr>
+          <a:xfrm flipH="1">
+            <a:off x="6670768" y="2938184"/>
+            <a:ext cx="296475" cy="459469"/>
+          </a:xfrm>
+          <a:prstGeom prst="line">
+            <a:avLst/>
+          </a:prstGeom>
+        </p:spPr>
+        <p:style>
+          <a:lnRef idx="2">
+            <a:schemeClr val="dk1"/>
+          </a:lnRef>
+          <a:fillRef idx="0">
+            <a:schemeClr val="dk1"/>
+          </a:fillRef>
+          <a:effectRef idx="1">
+            <a:schemeClr val="dk1"/>
+          </a:effectRef>
+          <a:fontRef idx="minor">
+            <a:schemeClr val="tx1"/>
+          </a:fontRef>
+        </p:style>
+      </p:cxnSp>
+      <p:sp>
+        <p:nvSpPr>
+          <p:cNvPr id="95" name="文本框 94">
+            <a:extLst>
+              <a:ext uri="{FF2B5EF4-FFF2-40B4-BE49-F238E27FC236}">
+                <a16:creationId xmlns:a16="http://schemas.microsoft.com/office/drawing/2014/main" id="{867969E9-0047-CDF3-0C74-C32A0E92E91B}"/>
+              </a:ext>
+            </a:extLst>
+          </p:cNvPr>
+          <p:cNvSpPr txBox="1"/>
+          <p:nvPr/>
+        </p:nvSpPr>
+        <p:spPr>
+          <a:xfrm>
+            <a:off x="6531948" y="3225717"/>
+            <a:ext cx="277640" cy="369332"/>
+          </a:xfrm>
+          <a:prstGeom prst="rect">
+            <a:avLst/>
+          </a:prstGeom>
+          <a:noFill/>
+        </p:spPr>
+        <p:txBody>
+          <a:bodyPr wrap="none" rtlCol="0">
+            <a:spAutoFit/>
+          </a:bodyPr>
+          <a:lstStyle/>
+          <a:p>
+            <a:r>
+              <a:rPr lang="en-US" altLang="zh-CN"/>
+              <a:t>•</a:t>
+            </a:r>
+            <a:endParaRPr lang="zh-CN" altLang="en-US"/>
+          </a:p>
+        </p:txBody>
+      </p:sp>
+      <p:sp>
+        <p:nvSpPr>
+          <p:cNvPr id="96" name="文本框 95">
+            <a:extLst>
+              <a:ext uri="{FF2B5EF4-FFF2-40B4-BE49-F238E27FC236}">
+                <a16:creationId xmlns:a16="http://schemas.microsoft.com/office/drawing/2014/main" id="{3FD1F580-4E6D-A340-A531-9EEEF2D3E760}"/>
+              </a:ext>
+            </a:extLst>
+          </p:cNvPr>
+          <p:cNvSpPr txBox="1"/>
+          <p:nvPr/>
+        </p:nvSpPr>
+        <p:spPr>
+          <a:xfrm>
+            <a:off x="7106063" y="3212987"/>
+            <a:ext cx="277640" cy="369332"/>
+          </a:xfrm>
+          <a:prstGeom prst="rect">
+            <a:avLst/>
+          </a:prstGeom>
+          <a:noFill/>
+        </p:spPr>
+        <p:txBody>
+          <a:bodyPr wrap="none" rtlCol="0">
+            <a:spAutoFit/>
+          </a:bodyPr>
+          <a:lstStyle/>
+          <a:p>
+            <a:r>
+              <a:rPr lang="en-US" altLang="zh-CN"/>
+              <a:t>•</a:t>
+            </a:r>
+            <a:endParaRPr lang="zh-CN" altLang="en-US"/>
+          </a:p>
+        </p:txBody>
+      </p:sp>
+      <p:cxnSp>
+        <p:nvCxnSpPr>
+          <p:cNvPr id="97" name="直接连接符 96">
+            <a:extLst>
+              <a:ext uri="{FF2B5EF4-FFF2-40B4-BE49-F238E27FC236}">
+                <a16:creationId xmlns:a16="http://schemas.microsoft.com/office/drawing/2014/main" id="{4BF9300B-B760-9EED-D44F-EC346B747F4C}"/>
+              </a:ext>
+            </a:extLst>
+          </p:cNvPr>
+          <p:cNvCxnSpPr/>
+          <p:nvPr/>
+        </p:nvCxnSpPr>
+        <p:spPr>
+          <a:xfrm>
+            <a:off x="6967243" y="2938184"/>
+            <a:ext cx="277640" cy="459469"/>
+          </a:xfrm>
+          <a:prstGeom prst="line">
+            <a:avLst/>
+          </a:prstGeom>
+        </p:spPr>
+        <p:style>
+          <a:lnRef idx="2">
+            <a:schemeClr val="dk1"/>
+          </a:lnRef>
+          <a:fillRef idx="0">
+            <a:schemeClr val="dk1"/>
+          </a:fillRef>
+          <a:effectRef idx="1">
+            <a:schemeClr val="dk1"/>
+          </a:effectRef>
+          <a:fontRef idx="minor">
+            <a:schemeClr val="tx1"/>
+          </a:fontRef>
+        </p:style>
+      </p:cxnSp>
+      <p:cxnSp>
+        <p:nvCxnSpPr>
+          <p:cNvPr id="98" name="直接连接符 97">
+            <a:extLst>
+              <a:ext uri="{FF2B5EF4-FFF2-40B4-BE49-F238E27FC236}">
+                <a16:creationId xmlns:a16="http://schemas.microsoft.com/office/drawing/2014/main" id="{47FB89EB-7454-3A80-A677-99C1802A5960}"/>
+              </a:ext>
+            </a:extLst>
+          </p:cNvPr>
+          <p:cNvCxnSpPr>
+            <a:cxnSpLocks/>
+          </p:cNvCxnSpPr>
+          <p:nvPr/>
+        </p:nvCxnSpPr>
+        <p:spPr>
+          <a:xfrm flipH="1">
+            <a:off x="6513113" y="3413384"/>
+            <a:ext cx="165949" cy="459469"/>
+          </a:xfrm>
+          <a:prstGeom prst="line">
+            <a:avLst/>
+          </a:prstGeom>
+        </p:spPr>
+        <p:style>
+          <a:lnRef idx="2">
+            <a:schemeClr val="dk1"/>
+          </a:lnRef>
+          <a:fillRef idx="0">
+            <a:schemeClr val="dk1"/>
+          </a:fillRef>
+          <a:effectRef idx="1">
+            <a:schemeClr val="dk1"/>
+          </a:effectRef>
+          <a:fontRef idx="minor">
+            <a:schemeClr val="tx1"/>
+          </a:fontRef>
+        </p:style>
+      </p:cxnSp>
+      <p:sp>
+        <p:nvSpPr>
+          <p:cNvPr id="99" name="文本框 98">
+            <a:extLst>
+              <a:ext uri="{FF2B5EF4-FFF2-40B4-BE49-F238E27FC236}">
+                <a16:creationId xmlns:a16="http://schemas.microsoft.com/office/drawing/2014/main" id="{653DB370-8EBA-63EF-3869-E969435FDB45}"/>
+              </a:ext>
+            </a:extLst>
+          </p:cNvPr>
+          <p:cNvSpPr txBox="1"/>
+          <p:nvPr/>
+        </p:nvSpPr>
+        <p:spPr>
+          <a:xfrm>
+            <a:off x="6374293" y="3688187"/>
+            <a:ext cx="277640" cy="369332"/>
+          </a:xfrm>
+          <a:prstGeom prst="rect">
+            <a:avLst/>
+          </a:prstGeom>
+          <a:noFill/>
+        </p:spPr>
+        <p:txBody>
+          <a:bodyPr wrap="none" rtlCol="0">
+            <a:spAutoFit/>
+          </a:bodyPr>
+          <a:lstStyle/>
+          <a:p>
+            <a:r>
+              <a:rPr lang="en-US" altLang="zh-CN"/>
+              <a:t>•</a:t>
+            </a:r>
+            <a:endParaRPr lang="zh-CN" altLang="en-US"/>
+          </a:p>
+        </p:txBody>
+      </p:sp>
+      <p:sp>
+        <p:nvSpPr>
+          <p:cNvPr id="100" name="文本框 99">
+            <a:extLst>
+              <a:ext uri="{FF2B5EF4-FFF2-40B4-BE49-F238E27FC236}">
+                <a16:creationId xmlns:a16="http://schemas.microsoft.com/office/drawing/2014/main" id="{84CB5530-982A-2CEE-42F2-63001B5EF8A9}"/>
+              </a:ext>
+            </a:extLst>
+          </p:cNvPr>
+          <p:cNvSpPr txBox="1"/>
+          <p:nvPr/>
+        </p:nvSpPr>
+        <p:spPr>
+          <a:xfrm>
+            <a:off x="6670768" y="3688187"/>
+            <a:ext cx="277640" cy="369332"/>
+          </a:xfrm>
+          <a:prstGeom prst="rect">
+            <a:avLst/>
+          </a:prstGeom>
+          <a:noFill/>
+        </p:spPr>
+        <p:txBody>
+          <a:bodyPr wrap="none" rtlCol="0">
+            <a:spAutoFit/>
+          </a:bodyPr>
+          <a:lstStyle/>
+          <a:p>
+            <a:r>
+              <a:rPr lang="en-US" altLang="zh-CN"/>
+              <a:t>•</a:t>
+            </a:r>
+            <a:endParaRPr lang="zh-CN" altLang="en-US"/>
+          </a:p>
+        </p:txBody>
+      </p:sp>
+      <p:cxnSp>
+        <p:nvCxnSpPr>
+          <p:cNvPr id="101" name="直接连接符 100">
+            <a:extLst>
+              <a:ext uri="{FF2B5EF4-FFF2-40B4-BE49-F238E27FC236}">
+                <a16:creationId xmlns:a16="http://schemas.microsoft.com/office/drawing/2014/main" id="{C0F947EA-CE3D-A051-8837-DAB7B8816B9C}"/>
+              </a:ext>
+            </a:extLst>
+          </p:cNvPr>
+          <p:cNvCxnSpPr>
+            <a:cxnSpLocks/>
+          </p:cNvCxnSpPr>
+          <p:nvPr/>
+        </p:nvCxnSpPr>
+        <p:spPr>
+          <a:xfrm>
+            <a:off x="6679062" y="3413384"/>
+            <a:ext cx="130526" cy="459469"/>
+          </a:xfrm>
+          <a:prstGeom prst="line">
+            <a:avLst/>
+          </a:prstGeom>
+        </p:spPr>
+        <p:style>
+          <a:lnRef idx="2">
+            <a:schemeClr val="dk1"/>
+          </a:lnRef>
+          <a:fillRef idx="0">
+            <a:schemeClr val="dk1"/>
+          </a:fillRef>
+          <a:effectRef idx="1">
+            <a:schemeClr val="dk1"/>
+          </a:effectRef>
+          <a:fontRef idx="minor">
+            <a:schemeClr val="tx1"/>
+          </a:fontRef>
+        </p:style>
+      </p:cxnSp>
+      <p:cxnSp>
+        <p:nvCxnSpPr>
+          <p:cNvPr id="102" name="直接连接符 101">
+            <a:extLst>
+              <a:ext uri="{FF2B5EF4-FFF2-40B4-BE49-F238E27FC236}">
+                <a16:creationId xmlns:a16="http://schemas.microsoft.com/office/drawing/2014/main" id="{797F9D2E-B9C0-C8C7-A537-4995498EC50E}"/>
+              </a:ext>
+            </a:extLst>
+          </p:cNvPr>
+          <p:cNvCxnSpPr>
+            <a:cxnSpLocks/>
+          </p:cNvCxnSpPr>
+          <p:nvPr/>
+        </p:nvCxnSpPr>
+        <p:spPr>
+          <a:xfrm flipH="1">
+            <a:off x="7078934" y="3414868"/>
+            <a:ext cx="165949" cy="459469"/>
+          </a:xfrm>
+          <a:prstGeom prst="line">
+            <a:avLst/>
+          </a:prstGeom>
+        </p:spPr>
+        <p:style>
+          <a:lnRef idx="2">
+            <a:schemeClr val="dk1"/>
+          </a:lnRef>
+          <a:fillRef idx="0">
+            <a:schemeClr val="dk1"/>
+          </a:fillRef>
+          <a:effectRef idx="1">
+            <a:schemeClr val="dk1"/>
+          </a:effectRef>
+          <a:fontRef idx="minor">
+            <a:schemeClr val="tx1"/>
+          </a:fontRef>
+        </p:style>
+      </p:cxnSp>
+      <p:sp>
+        <p:nvSpPr>
+          <p:cNvPr id="103" name="文本框 102">
+            <a:extLst>
+              <a:ext uri="{FF2B5EF4-FFF2-40B4-BE49-F238E27FC236}">
+                <a16:creationId xmlns:a16="http://schemas.microsoft.com/office/drawing/2014/main" id="{4774DF60-493D-7E2D-878B-1ED227C21C1E}"/>
+              </a:ext>
+            </a:extLst>
+          </p:cNvPr>
+          <p:cNvSpPr txBox="1"/>
+          <p:nvPr/>
+        </p:nvSpPr>
+        <p:spPr>
+          <a:xfrm>
+            <a:off x="6940114" y="3689671"/>
+            <a:ext cx="277640" cy="369332"/>
+          </a:xfrm>
+          <a:prstGeom prst="rect">
+            <a:avLst/>
+          </a:prstGeom>
+          <a:noFill/>
+        </p:spPr>
+        <p:txBody>
+          <a:bodyPr wrap="none" rtlCol="0">
+            <a:spAutoFit/>
+          </a:bodyPr>
+          <a:lstStyle/>
+          <a:p>
+            <a:r>
+              <a:rPr lang="en-US" altLang="zh-CN"/>
+              <a:t>•</a:t>
+            </a:r>
+            <a:endParaRPr lang="zh-CN" altLang="en-US"/>
+          </a:p>
+        </p:txBody>
+      </p:sp>
+      <p:sp>
+        <p:nvSpPr>
+          <p:cNvPr id="104" name="文本框 103">
+            <a:extLst>
+              <a:ext uri="{FF2B5EF4-FFF2-40B4-BE49-F238E27FC236}">
+                <a16:creationId xmlns:a16="http://schemas.microsoft.com/office/drawing/2014/main" id="{793A7EC1-68DC-F5BB-CF91-21C3EFE43A4C}"/>
+              </a:ext>
+            </a:extLst>
+          </p:cNvPr>
+          <p:cNvSpPr txBox="1"/>
+          <p:nvPr/>
+        </p:nvSpPr>
+        <p:spPr>
+          <a:xfrm>
+            <a:off x="7236589" y="3689671"/>
+            <a:ext cx="277640" cy="369332"/>
+          </a:xfrm>
+          <a:prstGeom prst="rect">
+            <a:avLst/>
+          </a:prstGeom>
+          <a:noFill/>
+        </p:spPr>
+        <p:txBody>
+          <a:bodyPr wrap="none" rtlCol="0">
+            <a:spAutoFit/>
+          </a:bodyPr>
+          <a:lstStyle/>
+          <a:p>
+            <a:r>
+              <a:rPr lang="en-US" altLang="zh-CN"/>
+              <a:t>•</a:t>
+            </a:r>
+            <a:endParaRPr lang="zh-CN" altLang="en-US"/>
+          </a:p>
+        </p:txBody>
+      </p:sp>
+      <p:cxnSp>
+        <p:nvCxnSpPr>
+          <p:cNvPr id="105" name="直接连接符 104">
+            <a:extLst>
+              <a:ext uri="{FF2B5EF4-FFF2-40B4-BE49-F238E27FC236}">
+                <a16:creationId xmlns:a16="http://schemas.microsoft.com/office/drawing/2014/main" id="{52C04D42-8DAB-2427-0167-B80268A486BC}"/>
+              </a:ext>
+            </a:extLst>
+          </p:cNvPr>
+          <p:cNvCxnSpPr>
+            <a:cxnSpLocks/>
+          </p:cNvCxnSpPr>
+          <p:nvPr/>
+        </p:nvCxnSpPr>
+        <p:spPr>
+          <a:xfrm>
+            <a:off x="7244883" y="3414868"/>
+            <a:ext cx="130526" cy="459469"/>
+          </a:xfrm>
+          <a:prstGeom prst="line">
+            <a:avLst/>
+          </a:prstGeom>
+        </p:spPr>
+        <p:style>
+          <a:lnRef idx="2">
+            <a:schemeClr val="dk1"/>
+          </a:lnRef>
+          <a:fillRef idx="0">
+            <a:schemeClr val="dk1"/>
+          </a:fillRef>
+          <a:effectRef idx="1">
+            <a:schemeClr val="dk1"/>
+          </a:effectRef>
+          <a:fontRef idx="minor">
+            <a:schemeClr val="tx1"/>
+          </a:fontRef>
+        </p:style>
+      </p:cxnSp>
+      <p:cxnSp>
+        <p:nvCxnSpPr>
+          <p:cNvPr id="106" name="直接连接符 105">
+            <a:extLst>
+              <a:ext uri="{FF2B5EF4-FFF2-40B4-BE49-F238E27FC236}">
+                <a16:creationId xmlns:a16="http://schemas.microsoft.com/office/drawing/2014/main" id="{E2EAA147-3D69-C550-474D-00ACFD52D003}"/>
+              </a:ext>
+            </a:extLst>
+          </p:cNvPr>
+          <p:cNvCxnSpPr>
+            <a:cxnSpLocks/>
+            <a:endCxn id="108" idx="1"/>
+          </p:cNvCxnSpPr>
+          <p:nvPr/>
+        </p:nvCxnSpPr>
+        <p:spPr>
+          <a:xfrm flipH="1">
+            <a:off x="6755349" y="3869852"/>
+            <a:ext cx="54239" cy="454984"/>
+          </a:xfrm>
+          <a:prstGeom prst="line">
+            <a:avLst/>
+          </a:prstGeom>
+        </p:spPr>
+        <p:style>
+          <a:lnRef idx="2">
+            <a:schemeClr val="dk1"/>
+          </a:lnRef>
+          <a:fillRef idx="0">
+            <a:schemeClr val="dk1"/>
+          </a:fillRef>
+          <a:effectRef idx="1">
+            <a:schemeClr val="dk1"/>
+          </a:effectRef>
+          <a:fontRef idx="minor">
+            <a:schemeClr val="tx1"/>
+          </a:fontRef>
+        </p:style>
+      </p:cxnSp>
+      <p:sp>
+        <p:nvSpPr>
+          <p:cNvPr id="107" name="文本框 106">
+            <a:extLst>
+              <a:ext uri="{FF2B5EF4-FFF2-40B4-BE49-F238E27FC236}">
+                <a16:creationId xmlns:a16="http://schemas.microsoft.com/office/drawing/2014/main" id="{217A724D-C1B0-564C-8351-340007839640}"/>
+              </a:ext>
+            </a:extLst>
+          </p:cNvPr>
+          <p:cNvSpPr txBox="1"/>
+          <p:nvPr/>
+        </p:nvSpPr>
+        <p:spPr>
+          <a:xfrm>
+            <a:off x="6605505" y="4143171"/>
+            <a:ext cx="277640" cy="369332"/>
+          </a:xfrm>
+          <a:prstGeom prst="rect">
+            <a:avLst/>
+          </a:prstGeom>
+          <a:noFill/>
+        </p:spPr>
+        <p:txBody>
+          <a:bodyPr wrap="none" rtlCol="0">
+            <a:spAutoFit/>
+          </a:bodyPr>
+          <a:lstStyle/>
+          <a:p>
+            <a:r>
+              <a:rPr lang="en-US" altLang="zh-CN"/>
+              <a:t>•</a:t>
+            </a:r>
+            <a:endParaRPr lang="zh-CN" altLang="en-US"/>
+          </a:p>
+        </p:txBody>
+      </p:sp>
+      <p:sp>
+        <p:nvSpPr>
+          <p:cNvPr id="108" name="文本框 107">
+            <a:extLst>
+              <a:ext uri="{FF2B5EF4-FFF2-40B4-BE49-F238E27FC236}">
+                <a16:creationId xmlns:a16="http://schemas.microsoft.com/office/drawing/2014/main" id="{5F090E36-99B0-C8A7-16CC-1D62ABF5D1E7}"/>
+              </a:ext>
+            </a:extLst>
+          </p:cNvPr>
+          <p:cNvSpPr txBox="1"/>
+          <p:nvPr/>
+        </p:nvSpPr>
+        <p:spPr>
+          <a:xfrm>
+            <a:off x="6755349" y="4140170"/>
+            <a:ext cx="277640" cy="369332"/>
+          </a:xfrm>
+          <a:prstGeom prst="rect">
+            <a:avLst/>
+          </a:prstGeom>
+          <a:noFill/>
+        </p:spPr>
+        <p:txBody>
+          <a:bodyPr wrap="none" rtlCol="0">
+            <a:spAutoFit/>
+          </a:bodyPr>
+          <a:lstStyle/>
+          <a:p>
+            <a:r>
+              <a:rPr lang="en-US" altLang="zh-CN"/>
+              <a:t>•</a:t>
+            </a:r>
+            <a:endParaRPr lang="zh-CN" altLang="en-US"/>
+          </a:p>
+        </p:txBody>
+      </p:sp>
+      <p:cxnSp>
+        <p:nvCxnSpPr>
+          <p:cNvPr id="109" name="直接连接符 108">
+            <a:extLst>
+              <a:ext uri="{FF2B5EF4-FFF2-40B4-BE49-F238E27FC236}">
+                <a16:creationId xmlns:a16="http://schemas.microsoft.com/office/drawing/2014/main" id="{567BE6BD-BCA7-06F5-5A66-C0938CFE4D61}"/>
+              </a:ext>
+            </a:extLst>
+          </p:cNvPr>
+          <p:cNvCxnSpPr>
+            <a:cxnSpLocks/>
+          </p:cNvCxnSpPr>
+          <p:nvPr/>
+        </p:nvCxnSpPr>
+        <p:spPr>
+          <a:xfrm>
+            <a:off x="6809588" y="3869852"/>
+            <a:ext cx="73557" cy="454984"/>
+          </a:xfrm>
+          <a:prstGeom prst="line">
+            <a:avLst/>
+          </a:prstGeom>
+        </p:spPr>
+        <p:style>
+          <a:lnRef idx="2">
+            <a:schemeClr val="dk1"/>
+          </a:lnRef>
+          <a:fillRef idx="0">
+            <a:schemeClr val="dk1"/>
+          </a:fillRef>
+          <a:effectRef idx="1">
+            <a:schemeClr val="dk1"/>
+          </a:effectRef>
+          <a:fontRef idx="minor">
+            <a:schemeClr val="tx1"/>
+          </a:fontRef>
+        </p:style>
+      </p:cxnSp>
+      <p:cxnSp>
+        <p:nvCxnSpPr>
+          <p:cNvPr id="110" name="直接连接符 109">
+            <a:extLst>
+              <a:ext uri="{FF2B5EF4-FFF2-40B4-BE49-F238E27FC236}">
+                <a16:creationId xmlns:a16="http://schemas.microsoft.com/office/drawing/2014/main" id="{458D8F80-9DA6-6E83-3C05-9D6A5848EB19}"/>
+              </a:ext>
+            </a:extLst>
+          </p:cNvPr>
+          <p:cNvCxnSpPr>
+            <a:cxnSpLocks/>
+          </p:cNvCxnSpPr>
+          <p:nvPr/>
+        </p:nvCxnSpPr>
+        <p:spPr>
+          <a:xfrm flipH="1">
+            <a:off x="7015045" y="3868352"/>
+            <a:ext cx="54239" cy="454984"/>
+          </a:xfrm>
+          <a:prstGeom prst="line">
+            <a:avLst/>
+          </a:prstGeom>
+        </p:spPr>
+        <p:style>
+          <a:lnRef idx="2">
+            <a:schemeClr val="dk1"/>
+          </a:lnRef>
+          <a:fillRef idx="0">
+            <a:schemeClr val="dk1"/>
+          </a:fillRef>
+          <a:effectRef idx="1">
+            <a:schemeClr val="dk1"/>
+          </a:effectRef>
+          <a:fontRef idx="minor">
+            <a:schemeClr val="tx1"/>
+          </a:fontRef>
+        </p:style>
+      </p:cxnSp>
+      <p:sp>
+        <p:nvSpPr>
+          <p:cNvPr id="111" name="文本框 110">
+            <a:extLst>
+              <a:ext uri="{FF2B5EF4-FFF2-40B4-BE49-F238E27FC236}">
+                <a16:creationId xmlns:a16="http://schemas.microsoft.com/office/drawing/2014/main" id="{346165A5-35BD-C896-4C78-882031BB8F3E}"/>
+              </a:ext>
+            </a:extLst>
+          </p:cNvPr>
+          <p:cNvSpPr txBox="1"/>
+          <p:nvPr/>
+        </p:nvSpPr>
+        <p:spPr>
+          <a:xfrm>
+            <a:off x="6865201" y="4141671"/>
+            <a:ext cx="277640" cy="369332"/>
+          </a:xfrm>
+          <a:prstGeom prst="rect">
+            <a:avLst/>
+          </a:prstGeom>
+          <a:noFill/>
+        </p:spPr>
+        <p:txBody>
+          <a:bodyPr wrap="none" rtlCol="0">
+            <a:spAutoFit/>
+          </a:bodyPr>
+          <a:lstStyle/>
+          <a:p>
+            <a:r>
+              <a:rPr lang="en-US" altLang="zh-CN"/>
+              <a:t>•</a:t>
+            </a:r>
+            <a:endParaRPr lang="zh-CN" altLang="en-US"/>
+          </a:p>
+        </p:txBody>
+      </p:sp>
+      <p:cxnSp>
+        <p:nvCxnSpPr>
+          <p:cNvPr id="118" name="直接连接符 117">
+            <a:extLst>
+              <a:ext uri="{FF2B5EF4-FFF2-40B4-BE49-F238E27FC236}">
+                <a16:creationId xmlns:a16="http://schemas.microsoft.com/office/drawing/2014/main" id="{9AE34B9D-AB84-5FAA-5AB5-B9E5979C8D1C}"/>
+              </a:ext>
+            </a:extLst>
+          </p:cNvPr>
+          <p:cNvCxnSpPr>
+            <a:cxnSpLocks/>
+            <a:endCxn id="120" idx="1"/>
+          </p:cNvCxnSpPr>
+          <p:nvPr/>
+        </p:nvCxnSpPr>
+        <p:spPr>
+          <a:xfrm flipH="1">
+            <a:off x="6448741" y="3868352"/>
+            <a:ext cx="54239" cy="454984"/>
+          </a:xfrm>
+          <a:prstGeom prst="line">
+            <a:avLst/>
+          </a:prstGeom>
+        </p:spPr>
+        <p:style>
+          <a:lnRef idx="2">
+            <a:schemeClr val="dk1"/>
+          </a:lnRef>
+          <a:fillRef idx="0">
+            <a:schemeClr val="dk1"/>
+          </a:fillRef>
+          <a:effectRef idx="1">
+            <a:schemeClr val="dk1"/>
+          </a:effectRef>
+          <a:fontRef idx="minor">
+            <a:schemeClr val="tx1"/>
+          </a:fontRef>
+        </p:style>
+      </p:cxnSp>
+      <p:sp>
+        <p:nvSpPr>
+          <p:cNvPr id="119" name="文本框 118">
+            <a:extLst>
+              <a:ext uri="{FF2B5EF4-FFF2-40B4-BE49-F238E27FC236}">
+                <a16:creationId xmlns:a16="http://schemas.microsoft.com/office/drawing/2014/main" id="{D7C88552-2529-2D85-CF75-5D3BFA213FFA}"/>
+              </a:ext>
+            </a:extLst>
+          </p:cNvPr>
+          <p:cNvSpPr txBox="1"/>
+          <p:nvPr/>
+        </p:nvSpPr>
+        <p:spPr>
+          <a:xfrm>
+            <a:off x="6298897" y="4141671"/>
+            <a:ext cx="277640" cy="369332"/>
+          </a:xfrm>
+          <a:prstGeom prst="rect">
+            <a:avLst/>
+          </a:prstGeom>
+          <a:noFill/>
+        </p:spPr>
+        <p:txBody>
+          <a:bodyPr wrap="none" rtlCol="0">
+            <a:spAutoFit/>
+          </a:bodyPr>
+          <a:lstStyle/>
+          <a:p>
+            <a:r>
+              <a:rPr lang="en-US" altLang="zh-CN"/>
+              <a:t>•</a:t>
+            </a:r>
+            <a:endParaRPr lang="zh-CN" altLang="en-US"/>
+          </a:p>
+        </p:txBody>
+      </p:sp>
+      <p:sp>
+        <p:nvSpPr>
+          <p:cNvPr id="120" name="文本框 119">
+            <a:extLst>
+              <a:ext uri="{FF2B5EF4-FFF2-40B4-BE49-F238E27FC236}">
+                <a16:creationId xmlns:a16="http://schemas.microsoft.com/office/drawing/2014/main" id="{633ED9A2-0976-986B-6801-1B39115D7D7E}"/>
+              </a:ext>
+            </a:extLst>
+          </p:cNvPr>
+          <p:cNvSpPr txBox="1"/>
+          <p:nvPr/>
+        </p:nvSpPr>
+        <p:spPr>
+          <a:xfrm>
+            <a:off x="6448741" y="4138670"/>
+            <a:ext cx="277640" cy="369332"/>
+          </a:xfrm>
+          <a:prstGeom prst="rect">
+            <a:avLst/>
+          </a:prstGeom>
+          <a:noFill/>
+        </p:spPr>
+        <p:txBody>
+          <a:bodyPr wrap="none" rtlCol="0">
+            <a:spAutoFit/>
+          </a:bodyPr>
+          <a:lstStyle/>
+          <a:p>
+            <a:r>
+              <a:rPr lang="en-US" altLang="zh-CN"/>
+              <a:t>•</a:t>
+            </a:r>
+            <a:endParaRPr lang="zh-CN" altLang="en-US"/>
+          </a:p>
+        </p:txBody>
+      </p:sp>
+      <p:cxnSp>
+        <p:nvCxnSpPr>
+          <p:cNvPr id="121" name="直接连接符 120">
+            <a:extLst>
+              <a:ext uri="{FF2B5EF4-FFF2-40B4-BE49-F238E27FC236}">
+                <a16:creationId xmlns:a16="http://schemas.microsoft.com/office/drawing/2014/main" id="{3D880D05-1478-218A-A0F5-F5488EA58410}"/>
+              </a:ext>
+            </a:extLst>
+          </p:cNvPr>
+          <p:cNvCxnSpPr>
+            <a:cxnSpLocks/>
+          </p:cNvCxnSpPr>
+          <p:nvPr/>
+        </p:nvCxnSpPr>
+        <p:spPr>
+          <a:xfrm>
+            <a:off x="6502980" y="3868352"/>
+            <a:ext cx="73557" cy="454984"/>
+          </a:xfrm>
+          <a:prstGeom prst="line">
+            <a:avLst/>
+          </a:prstGeom>
+        </p:spPr>
+        <p:style>
+          <a:lnRef idx="2">
+            <a:schemeClr val="dk1"/>
+          </a:lnRef>
+          <a:fillRef idx="0">
+            <a:schemeClr val="dk1"/>
+          </a:fillRef>
+          <a:effectRef idx="1">
+            <a:schemeClr val="dk1"/>
+          </a:effectRef>
+          <a:fontRef idx="minor">
+            <a:schemeClr val="tx1"/>
+          </a:fontRef>
+        </p:style>
+      </p:cxnSp>
+      <p:sp>
+        <p:nvSpPr>
+          <p:cNvPr id="122" name="文本框 121">
+            <a:extLst>
+              <a:ext uri="{FF2B5EF4-FFF2-40B4-BE49-F238E27FC236}">
+                <a16:creationId xmlns:a16="http://schemas.microsoft.com/office/drawing/2014/main" id="{C47A93A8-FEEC-D4AC-339C-A665F3AABAF9}"/>
+              </a:ext>
+            </a:extLst>
+          </p:cNvPr>
+          <p:cNvSpPr txBox="1"/>
+          <p:nvPr/>
+        </p:nvSpPr>
+        <p:spPr>
+          <a:xfrm>
+            <a:off x="3717153" y="2951889"/>
+            <a:ext cx="277640" cy="369332"/>
+          </a:xfrm>
+          <a:prstGeom prst="rect">
+            <a:avLst/>
+          </a:prstGeom>
+          <a:noFill/>
+        </p:spPr>
+        <p:txBody>
+          <a:bodyPr wrap="none" rtlCol="0">
+            <a:spAutoFit/>
+          </a:bodyPr>
+          <a:lstStyle/>
+          <a:p>
+            <a:r>
+              <a:rPr lang="en-US" altLang="zh-CN"/>
+              <a:t>•</a:t>
+            </a:r>
+            <a:endParaRPr lang="zh-CN" altLang="en-US"/>
+          </a:p>
+        </p:txBody>
+      </p:sp>
+      <p:cxnSp>
+        <p:nvCxnSpPr>
+          <p:cNvPr id="123" name="直接连接符 122">
+            <a:extLst>
+              <a:ext uri="{FF2B5EF4-FFF2-40B4-BE49-F238E27FC236}">
+                <a16:creationId xmlns:a16="http://schemas.microsoft.com/office/drawing/2014/main" id="{30F9FE94-B2C2-B8B4-DAEC-1E77174621FC}"/>
+              </a:ext>
+            </a:extLst>
+          </p:cNvPr>
+          <p:cNvCxnSpPr>
+            <a:cxnSpLocks/>
+          </p:cNvCxnSpPr>
+          <p:nvPr/>
+        </p:nvCxnSpPr>
+        <p:spPr>
+          <a:xfrm flipH="1">
+            <a:off x="3550081" y="3155307"/>
+            <a:ext cx="296475" cy="459469"/>
+          </a:xfrm>
+          <a:prstGeom prst="line">
+            <a:avLst/>
+          </a:prstGeom>
+        </p:spPr>
+        <p:style>
+          <a:lnRef idx="2">
+            <a:schemeClr val="dk1"/>
+          </a:lnRef>
+          <a:fillRef idx="0">
+            <a:schemeClr val="dk1"/>
+          </a:fillRef>
+          <a:effectRef idx="1">
+            <a:schemeClr val="dk1"/>
+          </a:effectRef>
+          <a:fontRef idx="minor">
+            <a:schemeClr val="tx1"/>
+          </a:fontRef>
+        </p:style>
+      </p:cxnSp>
+      <p:sp>
+        <p:nvSpPr>
+          <p:cNvPr id="124" name="文本框 123">
+            <a:extLst>
+              <a:ext uri="{FF2B5EF4-FFF2-40B4-BE49-F238E27FC236}">
+                <a16:creationId xmlns:a16="http://schemas.microsoft.com/office/drawing/2014/main" id="{F07C7483-FBE3-2CCB-3147-F6D97BC590F2}"/>
+              </a:ext>
+            </a:extLst>
+          </p:cNvPr>
+          <p:cNvSpPr txBox="1"/>
+          <p:nvPr/>
+        </p:nvSpPr>
+        <p:spPr>
+          <a:xfrm>
+            <a:off x="3411261" y="3442840"/>
+            <a:ext cx="277640" cy="369332"/>
+          </a:xfrm>
+          <a:prstGeom prst="rect">
+            <a:avLst/>
+          </a:prstGeom>
+          <a:noFill/>
+        </p:spPr>
+        <p:txBody>
+          <a:bodyPr wrap="none" rtlCol="0">
+            <a:spAutoFit/>
+          </a:bodyPr>
+          <a:lstStyle/>
+          <a:p>
+            <a:r>
+              <a:rPr lang="en-US" altLang="zh-CN"/>
+              <a:t>•</a:t>
+            </a:r>
+            <a:endParaRPr lang="zh-CN" altLang="en-US"/>
+          </a:p>
+        </p:txBody>
+      </p:sp>
+      <p:sp>
+        <p:nvSpPr>
+          <p:cNvPr id="125" name="文本框 124">
+            <a:extLst>
+              <a:ext uri="{FF2B5EF4-FFF2-40B4-BE49-F238E27FC236}">
+                <a16:creationId xmlns:a16="http://schemas.microsoft.com/office/drawing/2014/main" id="{0F0601CB-8B6F-9315-9186-21EBD59A6B6A}"/>
+              </a:ext>
+            </a:extLst>
+          </p:cNvPr>
+          <p:cNvSpPr txBox="1"/>
+          <p:nvPr/>
+        </p:nvSpPr>
+        <p:spPr>
+          <a:xfrm>
+            <a:off x="3985376" y="3430110"/>
+            <a:ext cx="277640" cy="369332"/>
+          </a:xfrm>
+          <a:prstGeom prst="rect">
+            <a:avLst/>
+          </a:prstGeom>
+          <a:noFill/>
+        </p:spPr>
+        <p:txBody>
+          <a:bodyPr wrap="none" rtlCol="0">
+            <a:spAutoFit/>
+          </a:bodyPr>
+          <a:lstStyle/>
+          <a:p>
+            <a:r>
+              <a:rPr lang="en-US" altLang="zh-CN"/>
+              <a:t>•</a:t>
+            </a:r>
+            <a:endParaRPr lang="zh-CN" altLang="en-US"/>
+          </a:p>
+        </p:txBody>
+      </p:sp>
+      <p:cxnSp>
+        <p:nvCxnSpPr>
+          <p:cNvPr id="126" name="直接连接符 125">
+            <a:extLst>
+              <a:ext uri="{FF2B5EF4-FFF2-40B4-BE49-F238E27FC236}">
+                <a16:creationId xmlns:a16="http://schemas.microsoft.com/office/drawing/2014/main" id="{F2D583EA-F4F4-E95B-1587-4A0AFC684AEE}"/>
+              </a:ext>
+            </a:extLst>
+          </p:cNvPr>
+          <p:cNvCxnSpPr/>
+          <p:nvPr/>
+        </p:nvCxnSpPr>
+        <p:spPr>
+          <a:xfrm>
+            <a:off x="3846556" y="3155307"/>
+            <a:ext cx="277640" cy="459469"/>
+          </a:xfrm>
+          <a:prstGeom prst="line">
+            <a:avLst/>
+          </a:prstGeom>
+        </p:spPr>
+        <p:style>
+          <a:lnRef idx="2">
+            <a:schemeClr val="dk1"/>
+          </a:lnRef>
+          <a:fillRef idx="0">
+            <a:schemeClr val="dk1"/>
+          </a:fillRef>
+          <a:effectRef idx="1">
+            <a:schemeClr val="dk1"/>
+          </a:effectRef>
+          <a:fontRef idx="minor">
+            <a:schemeClr val="tx1"/>
+          </a:fontRef>
+        </p:style>
+      </p:cxnSp>
+      <p:sp>
+        <p:nvSpPr>
+          <p:cNvPr id="127" name="文本框 126">
+            <a:extLst>
+              <a:ext uri="{FF2B5EF4-FFF2-40B4-BE49-F238E27FC236}">
+                <a16:creationId xmlns:a16="http://schemas.microsoft.com/office/drawing/2014/main" id="{A10D9C4C-5C50-4B17-0A2F-B57C4DBE03E8}"/>
+              </a:ext>
+            </a:extLst>
+          </p:cNvPr>
+          <p:cNvSpPr txBox="1"/>
+          <p:nvPr/>
+        </p:nvSpPr>
+        <p:spPr>
+          <a:xfrm>
+            <a:off x="3411261" y="3455570"/>
+            <a:ext cx="277640" cy="369332"/>
+          </a:xfrm>
+          <a:prstGeom prst="rect">
+            <a:avLst/>
+          </a:prstGeom>
+          <a:noFill/>
+        </p:spPr>
+        <p:txBody>
+          <a:bodyPr wrap="none" rtlCol="0">
+            <a:spAutoFit/>
+          </a:bodyPr>
+          <a:lstStyle/>
+          <a:p>
+            <a:r>
+              <a:rPr lang="en-US" altLang="zh-CN"/>
+              <a:t>•</a:t>
+            </a:r>
+            <a:endParaRPr lang="zh-CN" altLang="en-US"/>
+          </a:p>
+        </p:txBody>
+      </p:sp>
+      <p:cxnSp>
+        <p:nvCxnSpPr>
+          <p:cNvPr id="128" name="直接连接符 127">
+            <a:extLst>
+              <a:ext uri="{FF2B5EF4-FFF2-40B4-BE49-F238E27FC236}">
+                <a16:creationId xmlns:a16="http://schemas.microsoft.com/office/drawing/2014/main" id="{2CDCED1D-17F7-0500-C6AB-E2E790FA268A}"/>
+              </a:ext>
+            </a:extLst>
+          </p:cNvPr>
+          <p:cNvCxnSpPr>
+            <a:cxnSpLocks/>
+          </p:cNvCxnSpPr>
+          <p:nvPr/>
+        </p:nvCxnSpPr>
+        <p:spPr>
+          <a:xfrm flipH="1">
+            <a:off x="3384132" y="3640236"/>
+            <a:ext cx="165949" cy="459469"/>
+          </a:xfrm>
+          <a:prstGeom prst="line">
+            <a:avLst/>
+          </a:prstGeom>
+        </p:spPr>
+        <p:style>
+          <a:lnRef idx="2">
+            <a:schemeClr val="dk1"/>
+          </a:lnRef>
+          <a:fillRef idx="0">
+            <a:schemeClr val="dk1"/>
+          </a:fillRef>
+          <a:effectRef idx="1">
+            <a:schemeClr val="dk1"/>
+          </a:effectRef>
+          <a:fontRef idx="minor">
+            <a:schemeClr val="tx1"/>
+          </a:fontRef>
+        </p:style>
+      </p:cxnSp>
+      <p:sp>
+        <p:nvSpPr>
+          <p:cNvPr id="129" name="文本框 128">
+            <a:extLst>
+              <a:ext uri="{FF2B5EF4-FFF2-40B4-BE49-F238E27FC236}">
+                <a16:creationId xmlns:a16="http://schemas.microsoft.com/office/drawing/2014/main" id="{BB3E67F9-EBDE-71CF-D3EF-506E89521073}"/>
+              </a:ext>
+            </a:extLst>
+          </p:cNvPr>
+          <p:cNvSpPr txBox="1"/>
+          <p:nvPr/>
+        </p:nvSpPr>
+        <p:spPr>
+          <a:xfrm>
+            <a:off x="3245312" y="3915039"/>
+            <a:ext cx="277640" cy="369332"/>
+          </a:xfrm>
+          <a:prstGeom prst="rect">
+            <a:avLst/>
+          </a:prstGeom>
+          <a:noFill/>
+        </p:spPr>
+        <p:txBody>
+          <a:bodyPr wrap="none" rtlCol="0">
+            <a:spAutoFit/>
+          </a:bodyPr>
+          <a:lstStyle/>
+          <a:p>
+            <a:r>
+              <a:rPr lang="en-US" altLang="zh-CN"/>
+              <a:t>•</a:t>
+            </a:r>
+            <a:endParaRPr lang="zh-CN" altLang="en-US"/>
+          </a:p>
+        </p:txBody>
+      </p:sp>
+      <p:sp>
+        <p:nvSpPr>
+          <p:cNvPr id="130" name="文本框 129">
+            <a:extLst>
+              <a:ext uri="{FF2B5EF4-FFF2-40B4-BE49-F238E27FC236}">
+                <a16:creationId xmlns:a16="http://schemas.microsoft.com/office/drawing/2014/main" id="{DC09BC71-5EA9-0585-51DB-B2508CECE63F}"/>
+              </a:ext>
+            </a:extLst>
+          </p:cNvPr>
+          <p:cNvSpPr txBox="1"/>
+          <p:nvPr/>
+        </p:nvSpPr>
+        <p:spPr>
+          <a:xfrm>
+            <a:off x="3541787" y="3915039"/>
+            <a:ext cx="277640" cy="369332"/>
+          </a:xfrm>
+          <a:prstGeom prst="rect">
+            <a:avLst/>
+          </a:prstGeom>
+          <a:noFill/>
+        </p:spPr>
+        <p:txBody>
+          <a:bodyPr wrap="none" rtlCol="0">
+            <a:spAutoFit/>
+          </a:bodyPr>
+          <a:lstStyle/>
+          <a:p>
+            <a:r>
+              <a:rPr lang="en-US" altLang="zh-CN"/>
+              <a:t>•</a:t>
+            </a:r>
+            <a:endParaRPr lang="zh-CN" altLang="en-US"/>
+          </a:p>
+        </p:txBody>
+      </p:sp>
+      <p:cxnSp>
+        <p:nvCxnSpPr>
+          <p:cNvPr id="131" name="直接连接符 130">
+            <a:extLst>
+              <a:ext uri="{FF2B5EF4-FFF2-40B4-BE49-F238E27FC236}">
+                <a16:creationId xmlns:a16="http://schemas.microsoft.com/office/drawing/2014/main" id="{E8D969F8-60B3-AE34-382D-56A6F072EC4D}"/>
+              </a:ext>
+            </a:extLst>
+          </p:cNvPr>
+          <p:cNvCxnSpPr>
+            <a:cxnSpLocks/>
+          </p:cNvCxnSpPr>
+          <p:nvPr/>
+        </p:nvCxnSpPr>
+        <p:spPr>
+          <a:xfrm>
+            <a:off x="3550081" y="3640236"/>
+            <a:ext cx="130526" cy="459469"/>
+          </a:xfrm>
+          <a:prstGeom prst="line">
+            <a:avLst/>
+          </a:prstGeom>
+        </p:spPr>
+        <p:style>
+          <a:lnRef idx="2">
+            <a:schemeClr val="dk1"/>
+          </a:lnRef>
+          <a:fillRef idx="0">
+            <a:schemeClr val="dk1"/>
+          </a:fillRef>
+          <a:effectRef idx="1">
+            <a:schemeClr val="dk1"/>
+          </a:effectRef>
+          <a:fontRef idx="minor">
+            <a:schemeClr val="tx1"/>
+          </a:fontRef>
+        </p:style>
+      </p:cxnSp>
+      <p:sp>
+        <p:nvSpPr>
+          <p:cNvPr id="146" name="文本框 145">
+            <a:extLst>
+              <a:ext uri="{FF2B5EF4-FFF2-40B4-BE49-F238E27FC236}">
+                <a16:creationId xmlns:a16="http://schemas.microsoft.com/office/drawing/2014/main" id="{7D6F693D-A919-CB0A-C35D-ACB377BFE076}"/>
+              </a:ext>
+            </a:extLst>
+          </p:cNvPr>
+          <p:cNvSpPr txBox="1"/>
+          <p:nvPr/>
+        </p:nvSpPr>
+        <p:spPr>
+          <a:xfrm>
+            <a:off x="2110163" y="3140190"/>
+            <a:ext cx="277640" cy="369332"/>
+          </a:xfrm>
+          <a:prstGeom prst="rect">
+            <a:avLst/>
+          </a:prstGeom>
+          <a:noFill/>
+        </p:spPr>
+        <p:txBody>
+          <a:bodyPr wrap="none" rtlCol="0">
+            <a:spAutoFit/>
+          </a:bodyPr>
+          <a:lstStyle/>
+          <a:p>
+            <a:r>
+              <a:rPr lang="en-US" altLang="zh-CN"/>
+              <a:t>•</a:t>
+            </a:r>
+            <a:endParaRPr lang="zh-CN" altLang="en-US"/>
+          </a:p>
+        </p:txBody>
+      </p:sp>
+      <p:cxnSp>
+        <p:nvCxnSpPr>
+          <p:cNvPr id="147" name="直接连接符 146">
+            <a:extLst>
+              <a:ext uri="{FF2B5EF4-FFF2-40B4-BE49-F238E27FC236}">
+                <a16:creationId xmlns:a16="http://schemas.microsoft.com/office/drawing/2014/main" id="{6D6D1FC5-3401-F037-F6E3-9698C3DD2502}"/>
+              </a:ext>
+            </a:extLst>
+          </p:cNvPr>
+          <p:cNvCxnSpPr>
+            <a:cxnSpLocks/>
+          </p:cNvCxnSpPr>
+          <p:nvPr/>
+        </p:nvCxnSpPr>
+        <p:spPr>
+          <a:xfrm flipH="1">
+            <a:off x="1952508" y="3324856"/>
+            <a:ext cx="296475" cy="459469"/>
+          </a:xfrm>
+          <a:prstGeom prst="line">
+            <a:avLst/>
+          </a:prstGeom>
+        </p:spPr>
+        <p:style>
+          <a:lnRef idx="2">
+            <a:schemeClr val="dk1"/>
+          </a:lnRef>
+          <a:fillRef idx="0">
+            <a:schemeClr val="dk1"/>
+          </a:fillRef>
+          <a:effectRef idx="1">
+            <a:schemeClr val="dk1"/>
+          </a:effectRef>
+          <a:fontRef idx="minor">
+            <a:schemeClr val="tx1"/>
+          </a:fontRef>
+        </p:style>
+      </p:cxnSp>
+      <p:sp>
+        <p:nvSpPr>
+          <p:cNvPr id="148" name="文本框 147">
+            <a:extLst>
+              <a:ext uri="{FF2B5EF4-FFF2-40B4-BE49-F238E27FC236}">
+                <a16:creationId xmlns:a16="http://schemas.microsoft.com/office/drawing/2014/main" id="{B1F46634-B731-F237-0C34-7E0C3321DAA8}"/>
+              </a:ext>
+            </a:extLst>
+          </p:cNvPr>
+          <p:cNvSpPr txBox="1"/>
+          <p:nvPr/>
+        </p:nvSpPr>
+        <p:spPr>
+          <a:xfrm>
+            <a:off x="1813688" y="3612389"/>
+            <a:ext cx="277640" cy="369332"/>
+          </a:xfrm>
+          <a:prstGeom prst="rect">
+            <a:avLst/>
+          </a:prstGeom>
+          <a:noFill/>
+        </p:spPr>
+        <p:txBody>
+          <a:bodyPr wrap="none" rtlCol="0">
+            <a:spAutoFit/>
+          </a:bodyPr>
+          <a:lstStyle/>
+          <a:p>
+            <a:r>
+              <a:rPr lang="en-US" altLang="zh-CN"/>
+              <a:t>•</a:t>
+            </a:r>
+            <a:endParaRPr lang="zh-CN" altLang="en-US"/>
+          </a:p>
+        </p:txBody>
+      </p:sp>
+      <p:sp>
+        <p:nvSpPr>
+          <p:cNvPr id="151" name="文本框 150">
+            <a:extLst>
+              <a:ext uri="{FF2B5EF4-FFF2-40B4-BE49-F238E27FC236}">
+                <a16:creationId xmlns:a16="http://schemas.microsoft.com/office/drawing/2014/main" id="{A465B98F-9451-6AE9-9DD4-00B7464B9432}"/>
+              </a:ext>
+            </a:extLst>
+          </p:cNvPr>
+          <p:cNvSpPr txBox="1"/>
+          <p:nvPr/>
+        </p:nvSpPr>
+        <p:spPr>
+          <a:xfrm>
+            <a:off x="4329943" y="2254101"/>
+            <a:ext cx="1915909" cy="369332"/>
+          </a:xfrm>
+          <a:prstGeom prst="rect">
+            <a:avLst/>
+          </a:prstGeom>
+          <a:noFill/>
+        </p:spPr>
+        <p:txBody>
+          <a:bodyPr wrap="none" rtlCol="0">
+            <a:spAutoFit/>
+          </a:bodyPr>
+          <a:lstStyle/>
+          <a:p>
+            <a:r>
+              <a:rPr lang="en-US" altLang="zh-CN"/>
+              <a:t>a</a:t>
+            </a:r>
+            <a:r>
+              <a:rPr lang="zh-CN" altLang="en-US"/>
+              <a:t>）一些满二叉树</a:t>
+            </a:r>
+          </a:p>
+        </p:txBody>
+      </p:sp>
+      <p:sp>
+        <p:nvSpPr>
+          <p:cNvPr id="152" name="文本框 151">
+            <a:extLst>
+              <a:ext uri="{FF2B5EF4-FFF2-40B4-BE49-F238E27FC236}">
+                <a16:creationId xmlns:a16="http://schemas.microsoft.com/office/drawing/2014/main" id="{21F77C8C-0FBF-8097-6CB4-B91F084F78DA}"/>
+              </a:ext>
+            </a:extLst>
+          </p:cNvPr>
+          <p:cNvSpPr txBox="1"/>
+          <p:nvPr/>
+        </p:nvSpPr>
+        <p:spPr>
+          <a:xfrm>
+            <a:off x="4259968" y="4642588"/>
+            <a:ext cx="2164375" cy="369332"/>
+          </a:xfrm>
+          <a:prstGeom prst="rect">
+            <a:avLst/>
+          </a:prstGeom>
+          <a:noFill/>
+        </p:spPr>
+        <p:txBody>
+          <a:bodyPr wrap="none" rtlCol="0">
+            <a:spAutoFit/>
+          </a:bodyPr>
+          <a:lstStyle/>
+          <a:p>
+            <a:r>
+              <a:rPr lang="en-US" altLang="zh-CN"/>
+              <a:t>b</a:t>
+            </a:r>
+            <a:r>
+              <a:rPr lang="zh-CN" altLang="en-US"/>
+              <a:t>）一些完全二叉树</a:t>
+            </a:r>
+          </a:p>
+        </p:txBody>
+      </p:sp>
+      <p:sp>
+        <p:nvSpPr>
+          <p:cNvPr id="163" name="文本框 162">
+            <a:extLst>
+              <a:ext uri="{FF2B5EF4-FFF2-40B4-BE49-F238E27FC236}">
+                <a16:creationId xmlns:a16="http://schemas.microsoft.com/office/drawing/2014/main" id="{3D078136-021D-11F4-F035-6E46A907DE25}"/>
+              </a:ext>
+            </a:extLst>
+          </p:cNvPr>
+          <p:cNvSpPr txBox="1"/>
+          <p:nvPr/>
+        </p:nvSpPr>
+        <p:spPr>
+          <a:xfrm>
+            <a:off x="5250025" y="2970641"/>
+            <a:ext cx="277640" cy="369332"/>
+          </a:xfrm>
+          <a:prstGeom prst="rect">
+            <a:avLst/>
+          </a:prstGeom>
+          <a:noFill/>
+        </p:spPr>
+        <p:txBody>
+          <a:bodyPr wrap="none" rtlCol="0">
+            <a:spAutoFit/>
+          </a:bodyPr>
+          <a:lstStyle/>
+          <a:p>
+            <a:r>
+              <a:rPr lang="en-US" altLang="zh-CN"/>
+              <a:t>•</a:t>
+            </a:r>
+            <a:endParaRPr lang="zh-CN" altLang="en-US"/>
+          </a:p>
+        </p:txBody>
+      </p:sp>
+      <p:cxnSp>
+        <p:nvCxnSpPr>
+          <p:cNvPr id="164" name="直接连接符 163">
+            <a:extLst>
+              <a:ext uri="{FF2B5EF4-FFF2-40B4-BE49-F238E27FC236}">
+                <a16:creationId xmlns:a16="http://schemas.microsoft.com/office/drawing/2014/main" id="{1FF60726-C104-4F2C-1256-FF80A894EE00}"/>
+              </a:ext>
+            </a:extLst>
+          </p:cNvPr>
+          <p:cNvCxnSpPr>
+            <a:cxnSpLocks/>
+          </p:cNvCxnSpPr>
+          <p:nvPr/>
+        </p:nvCxnSpPr>
+        <p:spPr>
+          <a:xfrm flipH="1">
+            <a:off x="5082953" y="3174059"/>
+            <a:ext cx="296475" cy="459469"/>
+          </a:xfrm>
+          <a:prstGeom prst="line">
+            <a:avLst/>
+          </a:prstGeom>
+        </p:spPr>
+        <p:style>
+          <a:lnRef idx="2">
+            <a:schemeClr val="dk1"/>
+          </a:lnRef>
+          <a:fillRef idx="0">
+            <a:schemeClr val="dk1"/>
+          </a:fillRef>
+          <a:effectRef idx="1">
+            <a:schemeClr val="dk1"/>
+          </a:effectRef>
+          <a:fontRef idx="minor">
+            <a:schemeClr val="tx1"/>
+          </a:fontRef>
+        </p:style>
+      </p:cxnSp>
+      <p:sp>
+        <p:nvSpPr>
+          <p:cNvPr id="165" name="文本框 164">
+            <a:extLst>
+              <a:ext uri="{FF2B5EF4-FFF2-40B4-BE49-F238E27FC236}">
+                <a16:creationId xmlns:a16="http://schemas.microsoft.com/office/drawing/2014/main" id="{35E4F96C-3C02-F60D-64C5-56F412DE39B7}"/>
+              </a:ext>
+            </a:extLst>
+          </p:cNvPr>
+          <p:cNvSpPr txBox="1"/>
+          <p:nvPr/>
+        </p:nvSpPr>
+        <p:spPr>
+          <a:xfrm>
+            <a:off x="4944133" y="3461592"/>
+            <a:ext cx="277640" cy="369332"/>
+          </a:xfrm>
+          <a:prstGeom prst="rect">
+            <a:avLst/>
+          </a:prstGeom>
+          <a:noFill/>
+        </p:spPr>
+        <p:txBody>
+          <a:bodyPr wrap="none" rtlCol="0">
+            <a:spAutoFit/>
+          </a:bodyPr>
+          <a:lstStyle/>
+          <a:p>
+            <a:r>
+              <a:rPr lang="en-US" altLang="zh-CN"/>
+              <a:t>•</a:t>
+            </a:r>
+            <a:endParaRPr lang="zh-CN" altLang="en-US"/>
+          </a:p>
+        </p:txBody>
+      </p:sp>
+      <p:sp>
+        <p:nvSpPr>
+          <p:cNvPr id="166" name="文本框 165">
+            <a:extLst>
+              <a:ext uri="{FF2B5EF4-FFF2-40B4-BE49-F238E27FC236}">
+                <a16:creationId xmlns:a16="http://schemas.microsoft.com/office/drawing/2014/main" id="{B8C55842-6DD1-8D45-3762-C682B9476041}"/>
+              </a:ext>
+            </a:extLst>
+          </p:cNvPr>
+          <p:cNvSpPr txBox="1"/>
+          <p:nvPr/>
+        </p:nvSpPr>
+        <p:spPr>
+          <a:xfrm>
+            <a:off x="5518248" y="3448862"/>
+            <a:ext cx="277640" cy="369332"/>
+          </a:xfrm>
+          <a:prstGeom prst="rect">
+            <a:avLst/>
+          </a:prstGeom>
+          <a:noFill/>
+        </p:spPr>
+        <p:txBody>
+          <a:bodyPr wrap="none" rtlCol="0">
+            <a:spAutoFit/>
+          </a:bodyPr>
+          <a:lstStyle/>
+          <a:p>
+            <a:r>
+              <a:rPr lang="en-US" altLang="zh-CN"/>
+              <a:t>•</a:t>
+            </a:r>
+            <a:endParaRPr lang="zh-CN" altLang="en-US"/>
+          </a:p>
+        </p:txBody>
+      </p:sp>
+      <p:cxnSp>
+        <p:nvCxnSpPr>
+          <p:cNvPr id="167" name="直接连接符 166">
+            <a:extLst>
+              <a:ext uri="{FF2B5EF4-FFF2-40B4-BE49-F238E27FC236}">
+                <a16:creationId xmlns:a16="http://schemas.microsoft.com/office/drawing/2014/main" id="{C746E416-02ED-D3DE-4866-79D553988958}"/>
+              </a:ext>
+            </a:extLst>
+          </p:cNvPr>
+          <p:cNvCxnSpPr/>
+          <p:nvPr/>
+        </p:nvCxnSpPr>
+        <p:spPr>
+          <a:xfrm>
+            <a:off x="5379428" y="3174059"/>
+            <a:ext cx="277640" cy="459469"/>
+          </a:xfrm>
+          <a:prstGeom prst="line">
+            <a:avLst/>
+          </a:prstGeom>
+        </p:spPr>
+        <p:style>
+          <a:lnRef idx="2">
+            <a:schemeClr val="dk1"/>
+          </a:lnRef>
+          <a:fillRef idx="0">
+            <a:schemeClr val="dk1"/>
+          </a:fillRef>
+          <a:effectRef idx="1">
+            <a:schemeClr val="dk1"/>
+          </a:effectRef>
+          <a:fontRef idx="minor">
+            <a:schemeClr val="tx1"/>
+          </a:fontRef>
+        </p:style>
+      </p:cxnSp>
+      <p:sp>
+        <p:nvSpPr>
+          <p:cNvPr id="168" name="文本框 167">
+            <a:extLst>
+              <a:ext uri="{FF2B5EF4-FFF2-40B4-BE49-F238E27FC236}">
+                <a16:creationId xmlns:a16="http://schemas.microsoft.com/office/drawing/2014/main" id="{7AF4C9B4-39CE-DCB1-9F26-C1E1EAF31E74}"/>
+              </a:ext>
+            </a:extLst>
+          </p:cNvPr>
+          <p:cNvSpPr txBox="1"/>
+          <p:nvPr/>
+        </p:nvSpPr>
+        <p:spPr>
+          <a:xfrm>
+            <a:off x="4944133" y="3474322"/>
+            <a:ext cx="277640" cy="369332"/>
+          </a:xfrm>
+          <a:prstGeom prst="rect">
+            <a:avLst/>
+          </a:prstGeom>
+          <a:noFill/>
+        </p:spPr>
+        <p:txBody>
+          <a:bodyPr wrap="none" rtlCol="0">
+            <a:spAutoFit/>
+          </a:bodyPr>
+          <a:lstStyle/>
+          <a:p>
+            <a:r>
+              <a:rPr lang="en-US" altLang="zh-CN"/>
+              <a:t>•</a:t>
+            </a:r>
+            <a:endParaRPr lang="zh-CN" altLang="en-US"/>
+          </a:p>
+        </p:txBody>
+      </p:sp>
+      <p:cxnSp>
+        <p:nvCxnSpPr>
+          <p:cNvPr id="169" name="直接连接符 168">
+            <a:extLst>
+              <a:ext uri="{FF2B5EF4-FFF2-40B4-BE49-F238E27FC236}">
+                <a16:creationId xmlns:a16="http://schemas.microsoft.com/office/drawing/2014/main" id="{1D92DC57-17F7-119F-C87E-CA2882A1BCDD}"/>
+              </a:ext>
+            </a:extLst>
+          </p:cNvPr>
+          <p:cNvCxnSpPr>
+            <a:cxnSpLocks/>
+          </p:cNvCxnSpPr>
+          <p:nvPr/>
+        </p:nvCxnSpPr>
+        <p:spPr>
+          <a:xfrm flipH="1">
+            <a:off x="4917004" y="3658988"/>
+            <a:ext cx="165949" cy="459469"/>
+          </a:xfrm>
+          <a:prstGeom prst="line">
+            <a:avLst/>
+          </a:prstGeom>
+        </p:spPr>
+        <p:style>
+          <a:lnRef idx="2">
+            <a:schemeClr val="dk1"/>
+          </a:lnRef>
+          <a:fillRef idx="0">
+            <a:schemeClr val="dk1"/>
+          </a:fillRef>
+          <a:effectRef idx="1">
+            <a:schemeClr val="dk1"/>
+          </a:effectRef>
+          <a:fontRef idx="minor">
+            <a:schemeClr val="tx1"/>
+          </a:fontRef>
+        </p:style>
+      </p:cxnSp>
+      <p:sp>
+        <p:nvSpPr>
+          <p:cNvPr id="170" name="文本框 169">
+            <a:extLst>
+              <a:ext uri="{FF2B5EF4-FFF2-40B4-BE49-F238E27FC236}">
+                <a16:creationId xmlns:a16="http://schemas.microsoft.com/office/drawing/2014/main" id="{47656AC0-CEE2-AB0D-CBFB-805F3A79A1F1}"/>
+              </a:ext>
+            </a:extLst>
+          </p:cNvPr>
+          <p:cNvSpPr txBox="1"/>
+          <p:nvPr/>
+        </p:nvSpPr>
+        <p:spPr>
+          <a:xfrm>
+            <a:off x="4778184" y="3933791"/>
+            <a:ext cx="277640" cy="369332"/>
+          </a:xfrm>
+          <a:prstGeom prst="rect">
+            <a:avLst/>
+          </a:prstGeom>
+          <a:noFill/>
+        </p:spPr>
+        <p:txBody>
+          <a:bodyPr wrap="none" rtlCol="0">
+            <a:spAutoFit/>
+          </a:bodyPr>
+          <a:lstStyle/>
+          <a:p>
+            <a:r>
+              <a:rPr lang="en-US" altLang="zh-CN"/>
+              <a:t>•</a:t>
+            </a:r>
+            <a:endParaRPr lang="zh-CN" altLang="en-US"/>
+          </a:p>
+        </p:txBody>
+      </p:sp>
+      <p:sp>
+        <p:nvSpPr>
+          <p:cNvPr id="171" name="文本框 170">
+            <a:extLst>
+              <a:ext uri="{FF2B5EF4-FFF2-40B4-BE49-F238E27FC236}">
+                <a16:creationId xmlns:a16="http://schemas.microsoft.com/office/drawing/2014/main" id="{8EE3385E-AB30-0B82-1E86-57F542D4A822}"/>
+              </a:ext>
+            </a:extLst>
+          </p:cNvPr>
+          <p:cNvSpPr txBox="1"/>
+          <p:nvPr/>
+        </p:nvSpPr>
+        <p:spPr>
+          <a:xfrm>
+            <a:off x="5074659" y="3933791"/>
+            <a:ext cx="277640" cy="369332"/>
+          </a:xfrm>
+          <a:prstGeom prst="rect">
+            <a:avLst/>
+          </a:prstGeom>
+          <a:noFill/>
+        </p:spPr>
+        <p:txBody>
+          <a:bodyPr wrap="none" rtlCol="0">
+            <a:spAutoFit/>
+          </a:bodyPr>
+          <a:lstStyle/>
+          <a:p>
+            <a:r>
+              <a:rPr lang="en-US" altLang="zh-CN"/>
+              <a:t>•</a:t>
+            </a:r>
+            <a:endParaRPr lang="zh-CN" altLang="en-US"/>
+          </a:p>
+        </p:txBody>
+      </p:sp>
+      <p:cxnSp>
+        <p:nvCxnSpPr>
+          <p:cNvPr id="172" name="直接连接符 171">
+            <a:extLst>
+              <a:ext uri="{FF2B5EF4-FFF2-40B4-BE49-F238E27FC236}">
+                <a16:creationId xmlns:a16="http://schemas.microsoft.com/office/drawing/2014/main" id="{D5CEDD84-F598-BF99-6270-DCF899865826}"/>
+              </a:ext>
+            </a:extLst>
+          </p:cNvPr>
+          <p:cNvCxnSpPr>
+            <a:cxnSpLocks/>
+          </p:cNvCxnSpPr>
+          <p:nvPr/>
+        </p:nvCxnSpPr>
+        <p:spPr>
+          <a:xfrm>
+            <a:off x="5082953" y="3658988"/>
+            <a:ext cx="130526" cy="459469"/>
+          </a:xfrm>
+          <a:prstGeom prst="line">
+            <a:avLst/>
+          </a:prstGeom>
+        </p:spPr>
+        <p:style>
+          <a:lnRef idx="2">
+            <a:schemeClr val="dk1"/>
+          </a:lnRef>
+          <a:fillRef idx="0">
+            <a:schemeClr val="dk1"/>
+          </a:fillRef>
+          <a:effectRef idx="1">
+            <a:schemeClr val="dk1"/>
+          </a:effectRef>
+          <a:fontRef idx="minor">
+            <a:schemeClr val="tx1"/>
+          </a:fontRef>
+        </p:style>
+      </p:cxnSp>
+      <p:cxnSp>
+        <p:nvCxnSpPr>
+          <p:cNvPr id="173" name="直接连接符 172">
+            <a:extLst>
+              <a:ext uri="{FF2B5EF4-FFF2-40B4-BE49-F238E27FC236}">
+                <a16:creationId xmlns:a16="http://schemas.microsoft.com/office/drawing/2014/main" id="{5F1A2646-180F-B161-D5AC-41B9BB09C665}"/>
+              </a:ext>
+            </a:extLst>
+          </p:cNvPr>
+          <p:cNvCxnSpPr>
+            <a:cxnSpLocks/>
+          </p:cNvCxnSpPr>
+          <p:nvPr/>
+        </p:nvCxnSpPr>
+        <p:spPr>
+          <a:xfrm flipH="1">
+            <a:off x="3950856" y="3631947"/>
+            <a:ext cx="165949" cy="459469"/>
+          </a:xfrm>
+          <a:prstGeom prst="line">
+            <a:avLst/>
+          </a:prstGeom>
+        </p:spPr>
+        <p:style>
+          <a:lnRef idx="2">
+            <a:schemeClr val="dk1"/>
+          </a:lnRef>
+          <a:fillRef idx="0">
+            <a:schemeClr val="dk1"/>
+          </a:fillRef>
+          <a:effectRef idx="1">
+            <a:schemeClr val="dk1"/>
+          </a:effectRef>
+          <a:fontRef idx="minor">
+            <a:schemeClr val="tx1"/>
+          </a:fontRef>
+        </p:style>
+      </p:cxnSp>
+      <p:sp>
+        <p:nvSpPr>
+          <p:cNvPr id="174" name="文本框 173">
+            <a:extLst>
+              <a:ext uri="{FF2B5EF4-FFF2-40B4-BE49-F238E27FC236}">
+                <a16:creationId xmlns:a16="http://schemas.microsoft.com/office/drawing/2014/main" id="{823876C8-194E-3015-5EB0-7607BB9A9A24}"/>
+              </a:ext>
+            </a:extLst>
+          </p:cNvPr>
+          <p:cNvSpPr txBox="1"/>
+          <p:nvPr/>
+        </p:nvSpPr>
+        <p:spPr>
+          <a:xfrm>
+            <a:off x="3812036" y="3906750"/>
+            <a:ext cx="277640" cy="369332"/>
+          </a:xfrm>
+          <a:prstGeom prst="rect">
+            <a:avLst/>
+          </a:prstGeom>
+          <a:noFill/>
+        </p:spPr>
+        <p:txBody>
+          <a:bodyPr wrap="none" rtlCol="0">
+            <a:spAutoFit/>
+          </a:bodyPr>
+          <a:lstStyle/>
+          <a:p>
+            <a:r>
+              <a:rPr lang="en-US" altLang="zh-CN"/>
+              <a:t>•</a:t>
+            </a:r>
+            <a:endParaRPr lang="zh-CN" altLang="en-US"/>
+          </a:p>
+        </p:txBody>
+      </p:sp>
+      <p:cxnSp>
+        <p:nvCxnSpPr>
+          <p:cNvPr id="175" name="直接连接符 174">
+            <a:extLst>
+              <a:ext uri="{FF2B5EF4-FFF2-40B4-BE49-F238E27FC236}">
+                <a16:creationId xmlns:a16="http://schemas.microsoft.com/office/drawing/2014/main" id="{32A2424A-AA9D-E4FD-5FE3-896D10B41023}"/>
+              </a:ext>
+            </a:extLst>
+          </p:cNvPr>
+          <p:cNvCxnSpPr>
+            <a:cxnSpLocks/>
+          </p:cNvCxnSpPr>
+          <p:nvPr/>
+        </p:nvCxnSpPr>
+        <p:spPr>
+          <a:xfrm flipH="1">
+            <a:off x="8435176" y="2943231"/>
+            <a:ext cx="296475" cy="459469"/>
+          </a:xfrm>
+          <a:prstGeom prst="line">
+            <a:avLst/>
+          </a:prstGeom>
+        </p:spPr>
+        <p:style>
+          <a:lnRef idx="2">
+            <a:schemeClr val="dk1"/>
+          </a:lnRef>
+          <a:fillRef idx="0">
+            <a:schemeClr val="dk1"/>
+          </a:fillRef>
+          <a:effectRef idx="1">
+            <a:schemeClr val="dk1"/>
+          </a:effectRef>
+          <a:fontRef idx="minor">
+            <a:schemeClr val="tx1"/>
+          </a:fontRef>
+        </p:style>
+      </p:cxnSp>
+      <p:sp>
+        <p:nvSpPr>
+          <p:cNvPr id="176" name="文本框 175">
+            <a:extLst>
+              <a:ext uri="{FF2B5EF4-FFF2-40B4-BE49-F238E27FC236}">
+                <a16:creationId xmlns:a16="http://schemas.microsoft.com/office/drawing/2014/main" id="{B5219A7E-E6ED-93D4-E4F0-0639CEFA0B21}"/>
+              </a:ext>
+            </a:extLst>
+          </p:cNvPr>
+          <p:cNvSpPr txBox="1"/>
+          <p:nvPr/>
+        </p:nvSpPr>
+        <p:spPr>
+          <a:xfrm>
+            <a:off x="8296356" y="3230764"/>
+            <a:ext cx="277640" cy="369332"/>
+          </a:xfrm>
+          <a:prstGeom prst="rect">
+            <a:avLst/>
+          </a:prstGeom>
+          <a:noFill/>
+        </p:spPr>
+        <p:txBody>
+          <a:bodyPr wrap="none" rtlCol="0">
+            <a:spAutoFit/>
+          </a:bodyPr>
+          <a:lstStyle/>
+          <a:p>
+            <a:r>
+              <a:rPr lang="en-US" altLang="zh-CN"/>
+              <a:t>•</a:t>
+            </a:r>
+            <a:endParaRPr lang="zh-CN" altLang="en-US"/>
+          </a:p>
+        </p:txBody>
+      </p:sp>
+      <p:sp>
+        <p:nvSpPr>
+          <p:cNvPr id="177" name="文本框 176">
+            <a:extLst>
+              <a:ext uri="{FF2B5EF4-FFF2-40B4-BE49-F238E27FC236}">
+                <a16:creationId xmlns:a16="http://schemas.microsoft.com/office/drawing/2014/main" id="{CCE10F61-FCA1-B476-0628-66535EE9A63F}"/>
+              </a:ext>
+            </a:extLst>
+          </p:cNvPr>
+          <p:cNvSpPr txBox="1"/>
+          <p:nvPr/>
+        </p:nvSpPr>
+        <p:spPr>
+          <a:xfrm>
+            <a:off x="8870471" y="3218034"/>
+            <a:ext cx="277640" cy="369332"/>
+          </a:xfrm>
+          <a:prstGeom prst="rect">
+            <a:avLst/>
+          </a:prstGeom>
+          <a:noFill/>
+        </p:spPr>
+        <p:txBody>
+          <a:bodyPr wrap="none" rtlCol="0">
+            <a:spAutoFit/>
+          </a:bodyPr>
+          <a:lstStyle/>
+          <a:p>
+            <a:r>
+              <a:rPr lang="en-US" altLang="zh-CN"/>
+              <a:t>•</a:t>
+            </a:r>
+            <a:endParaRPr lang="zh-CN" altLang="en-US"/>
+          </a:p>
+        </p:txBody>
+      </p:sp>
+      <p:cxnSp>
+        <p:nvCxnSpPr>
+          <p:cNvPr id="178" name="直接连接符 177">
+            <a:extLst>
+              <a:ext uri="{FF2B5EF4-FFF2-40B4-BE49-F238E27FC236}">
+                <a16:creationId xmlns:a16="http://schemas.microsoft.com/office/drawing/2014/main" id="{B40FD0E3-6B54-D465-DC24-CA760393A43B}"/>
+              </a:ext>
+            </a:extLst>
+          </p:cNvPr>
+          <p:cNvCxnSpPr/>
+          <p:nvPr/>
+        </p:nvCxnSpPr>
+        <p:spPr>
+          <a:xfrm>
+            <a:off x="8731651" y="2943231"/>
+            <a:ext cx="277640" cy="459469"/>
+          </a:xfrm>
+          <a:prstGeom prst="line">
+            <a:avLst/>
+          </a:prstGeom>
+        </p:spPr>
+        <p:style>
+          <a:lnRef idx="2">
+            <a:schemeClr val="dk1"/>
+          </a:lnRef>
+          <a:fillRef idx="0">
+            <a:schemeClr val="dk1"/>
+          </a:fillRef>
+          <a:effectRef idx="1">
+            <a:schemeClr val="dk1"/>
+          </a:effectRef>
+          <a:fontRef idx="minor">
+            <a:schemeClr val="tx1"/>
+          </a:fontRef>
+        </p:style>
+      </p:cxnSp>
+      <p:cxnSp>
+        <p:nvCxnSpPr>
+          <p:cNvPr id="179" name="直接连接符 178">
+            <a:extLst>
+              <a:ext uri="{FF2B5EF4-FFF2-40B4-BE49-F238E27FC236}">
+                <a16:creationId xmlns:a16="http://schemas.microsoft.com/office/drawing/2014/main" id="{972E8348-C0C1-B2B7-9AB7-EB5F00EE3C92}"/>
+              </a:ext>
+            </a:extLst>
+          </p:cNvPr>
+          <p:cNvCxnSpPr>
+            <a:cxnSpLocks/>
+          </p:cNvCxnSpPr>
+          <p:nvPr/>
+        </p:nvCxnSpPr>
+        <p:spPr>
+          <a:xfrm flipH="1">
+            <a:off x="8277521" y="3418431"/>
+            <a:ext cx="165949" cy="459469"/>
+          </a:xfrm>
+          <a:prstGeom prst="line">
+            <a:avLst/>
+          </a:prstGeom>
+        </p:spPr>
+        <p:style>
+          <a:lnRef idx="2">
+            <a:schemeClr val="dk1"/>
+          </a:lnRef>
+          <a:fillRef idx="0">
+            <a:schemeClr val="dk1"/>
+          </a:fillRef>
+          <a:effectRef idx="1">
+            <a:schemeClr val="dk1"/>
+          </a:effectRef>
+          <a:fontRef idx="minor">
+            <a:schemeClr val="tx1"/>
+          </a:fontRef>
+        </p:style>
+      </p:cxnSp>
+      <p:sp>
+        <p:nvSpPr>
+          <p:cNvPr id="180" name="文本框 179">
+            <a:extLst>
+              <a:ext uri="{FF2B5EF4-FFF2-40B4-BE49-F238E27FC236}">
+                <a16:creationId xmlns:a16="http://schemas.microsoft.com/office/drawing/2014/main" id="{1D130EDC-830C-F1EA-D002-098FF65CAA53}"/>
+              </a:ext>
+            </a:extLst>
+          </p:cNvPr>
+          <p:cNvSpPr txBox="1"/>
+          <p:nvPr/>
+        </p:nvSpPr>
+        <p:spPr>
+          <a:xfrm>
+            <a:off x="8138701" y="3693234"/>
+            <a:ext cx="277640" cy="369332"/>
+          </a:xfrm>
+          <a:prstGeom prst="rect">
+            <a:avLst/>
+          </a:prstGeom>
+          <a:noFill/>
+        </p:spPr>
+        <p:txBody>
+          <a:bodyPr wrap="none" rtlCol="0">
+            <a:spAutoFit/>
+          </a:bodyPr>
+          <a:lstStyle/>
+          <a:p>
+            <a:r>
+              <a:rPr lang="en-US" altLang="zh-CN"/>
+              <a:t>•</a:t>
+            </a:r>
+            <a:endParaRPr lang="zh-CN" altLang="en-US"/>
+          </a:p>
+        </p:txBody>
+      </p:sp>
+      <p:sp>
+        <p:nvSpPr>
+          <p:cNvPr id="181" name="文本框 180">
+            <a:extLst>
+              <a:ext uri="{FF2B5EF4-FFF2-40B4-BE49-F238E27FC236}">
+                <a16:creationId xmlns:a16="http://schemas.microsoft.com/office/drawing/2014/main" id="{C6BE3E53-6A46-50AA-E7F1-AD78281457A8}"/>
+              </a:ext>
+            </a:extLst>
+          </p:cNvPr>
+          <p:cNvSpPr txBox="1"/>
+          <p:nvPr/>
+        </p:nvSpPr>
+        <p:spPr>
+          <a:xfrm>
+            <a:off x="8435176" y="3693234"/>
+            <a:ext cx="277640" cy="369332"/>
+          </a:xfrm>
+          <a:prstGeom prst="rect">
+            <a:avLst/>
+          </a:prstGeom>
+          <a:noFill/>
+        </p:spPr>
+        <p:txBody>
+          <a:bodyPr wrap="none" rtlCol="0">
+            <a:spAutoFit/>
+          </a:bodyPr>
+          <a:lstStyle/>
+          <a:p>
+            <a:r>
+              <a:rPr lang="en-US" altLang="zh-CN"/>
+              <a:t>•</a:t>
+            </a:r>
+            <a:endParaRPr lang="zh-CN" altLang="en-US"/>
+          </a:p>
+        </p:txBody>
+      </p:sp>
+      <p:cxnSp>
+        <p:nvCxnSpPr>
+          <p:cNvPr id="182" name="直接连接符 181">
+            <a:extLst>
+              <a:ext uri="{FF2B5EF4-FFF2-40B4-BE49-F238E27FC236}">
+                <a16:creationId xmlns:a16="http://schemas.microsoft.com/office/drawing/2014/main" id="{35112992-5BB7-9238-B943-D8DBCE9E6A27}"/>
+              </a:ext>
+            </a:extLst>
+          </p:cNvPr>
+          <p:cNvCxnSpPr>
+            <a:cxnSpLocks/>
+          </p:cNvCxnSpPr>
+          <p:nvPr/>
+        </p:nvCxnSpPr>
+        <p:spPr>
+          <a:xfrm>
+            <a:off x="8443470" y="3418431"/>
+            <a:ext cx="130526" cy="459469"/>
+          </a:xfrm>
+          <a:prstGeom prst="line">
+            <a:avLst/>
+          </a:prstGeom>
+        </p:spPr>
+        <p:style>
+          <a:lnRef idx="2">
+            <a:schemeClr val="dk1"/>
+          </a:lnRef>
+          <a:fillRef idx="0">
+            <a:schemeClr val="dk1"/>
+          </a:fillRef>
+          <a:effectRef idx="1">
+            <a:schemeClr val="dk1"/>
+          </a:effectRef>
+          <a:fontRef idx="minor">
+            <a:schemeClr val="tx1"/>
+          </a:fontRef>
+        </p:style>
+      </p:cxnSp>
+      <p:cxnSp>
+        <p:nvCxnSpPr>
+          <p:cNvPr id="183" name="直接连接符 182">
+            <a:extLst>
+              <a:ext uri="{FF2B5EF4-FFF2-40B4-BE49-F238E27FC236}">
+                <a16:creationId xmlns:a16="http://schemas.microsoft.com/office/drawing/2014/main" id="{27F83D5D-C6A9-8D0F-B1D5-58FA53DA01FF}"/>
+              </a:ext>
+            </a:extLst>
+          </p:cNvPr>
+          <p:cNvCxnSpPr>
+            <a:cxnSpLocks/>
+          </p:cNvCxnSpPr>
+          <p:nvPr/>
+        </p:nvCxnSpPr>
+        <p:spPr>
+          <a:xfrm flipH="1">
+            <a:off x="8843342" y="3419915"/>
+            <a:ext cx="165949" cy="459469"/>
+          </a:xfrm>
+          <a:prstGeom prst="line">
+            <a:avLst/>
+          </a:prstGeom>
+        </p:spPr>
+        <p:style>
+          <a:lnRef idx="2">
+            <a:schemeClr val="dk1"/>
+          </a:lnRef>
+          <a:fillRef idx="0">
+            <a:schemeClr val="dk1"/>
+          </a:fillRef>
+          <a:effectRef idx="1">
+            <a:schemeClr val="dk1"/>
+          </a:effectRef>
+          <a:fontRef idx="minor">
+            <a:schemeClr val="tx1"/>
+          </a:fontRef>
+        </p:style>
+      </p:cxnSp>
+      <p:sp>
+        <p:nvSpPr>
+          <p:cNvPr id="184" name="文本框 183">
+            <a:extLst>
+              <a:ext uri="{FF2B5EF4-FFF2-40B4-BE49-F238E27FC236}">
+                <a16:creationId xmlns:a16="http://schemas.microsoft.com/office/drawing/2014/main" id="{4D1C070F-CDF6-5C7D-A324-EA42D0ADA0AA}"/>
+              </a:ext>
+            </a:extLst>
+          </p:cNvPr>
+          <p:cNvSpPr txBox="1"/>
+          <p:nvPr/>
+        </p:nvSpPr>
+        <p:spPr>
+          <a:xfrm>
+            <a:off x="8704522" y="3694718"/>
+            <a:ext cx="277640" cy="369332"/>
+          </a:xfrm>
+          <a:prstGeom prst="rect">
+            <a:avLst/>
+          </a:prstGeom>
+          <a:noFill/>
+        </p:spPr>
+        <p:txBody>
+          <a:bodyPr wrap="none" rtlCol="0">
+            <a:spAutoFit/>
+          </a:bodyPr>
+          <a:lstStyle/>
+          <a:p>
+            <a:r>
+              <a:rPr lang="en-US" altLang="zh-CN"/>
+              <a:t>•</a:t>
+            </a:r>
+            <a:endParaRPr lang="zh-CN" altLang="en-US"/>
+          </a:p>
+        </p:txBody>
+      </p:sp>
+      <p:sp>
+        <p:nvSpPr>
+          <p:cNvPr id="185" name="文本框 184">
+            <a:extLst>
+              <a:ext uri="{FF2B5EF4-FFF2-40B4-BE49-F238E27FC236}">
+                <a16:creationId xmlns:a16="http://schemas.microsoft.com/office/drawing/2014/main" id="{D449BAA2-03DB-C63B-64EB-FC3B6C31FA52}"/>
+              </a:ext>
+            </a:extLst>
+          </p:cNvPr>
+          <p:cNvSpPr txBox="1"/>
+          <p:nvPr/>
+        </p:nvSpPr>
+        <p:spPr>
+          <a:xfrm>
+            <a:off x="9000997" y="3694718"/>
+            <a:ext cx="277640" cy="369332"/>
+          </a:xfrm>
+          <a:prstGeom prst="rect">
+            <a:avLst/>
+          </a:prstGeom>
+          <a:noFill/>
+        </p:spPr>
+        <p:txBody>
+          <a:bodyPr wrap="none" rtlCol="0">
+            <a:spAutoFit/>
+          </a:bodyPr>
+          <a:lstStyle/>
+          <a:p>
+            <a:r>
+              <a:rPr lang="en-US" altLang="zh-CN"/>
+              <a:t>•</a:t>
+            </a:r>
+            <a:endParaRPr lang="zh-CN" altLang="en-US"/>
+          </a:p>
+        </p:txBody>
+      </p:sp>
+      <p:cxnSp>
+        <p:nvCxnSpPr>
+          <p:cNvPr id="186" name="直接连接符 185">
+            <a:extLst>
+              <a:ext uri="{FF2B5EF4-FFF2-40B4-BE49-F238E27FC236}">
+                <a16:creationId xmlns:a16="http://schemas.microsoft.com/office/drawing/2014/main" id="{B018966E-07C0-0B19-9E2C-FFD981940C17}"/>
+              </a:ext>
+            </a:extLst>
+          </p:cNvPr>
+          <p:cNvCxnSpPr>
+            <a:cxnSpLocks/>
+          </p:cNvCxnSpPr>
+          <p:nvPr/>
+        </p:nvCxnSpPr>
+        <p:spPr>
+          <a:xfrm>
+            <a:off x="9009291" y="3419915"/>
+            <a:ext cx="130526" cy="459469"/>
+          </a:xfrm>
+          <a:prstGeom prst="line">
+            <a:avLst/>
+          </a:prstGeom>
+        </p:spPr>
+        <p:style>
+          <a:lnRef idx="2">
+            <a:schemeClr val="dk1"/>
+          </a:lnRef>
+          <a:fillRef idx="0">
+            <a:schemeClr val="dk1"/>
+          </a:fillRef>
+          <a:effectRef idx="1">
+            <a:schemeClr val="dk1"/>
+          </a:effectRef>
+          <a:fontRef idx="minor">
+            <a:schemeClr val="tx1"/>
+          </a:fontRef>
+        </p:style>
+      </p:cxnSp>
+      <p:cxnSp>
+        <p:nvCxnSpPr>
+          <p:cNvPr id="187" name="直接连接符 186">
+            <a:extLst>
+              <a:ext uri="{FF2B5EF4-FFF2-40B4-BE49-F238E27FC236}">
+                <a16:creationId xmlns:a16="http://schemas.microsoft.com/office/drawing/2014/main" id="{E9D0DDA0-D586-5D66-BFBF-D1495B6AEDB2}"/>
+              </a:ext>
+            </a:extLst>
+          </p:cNvPr>
+          <p:cNvCxnSpPr>
+            <a:cxnSpLocks/>
+          </p:cNvCxnSpPr>
+          <p:nvPr/>
+        </p:nvCxnSpPr>
+        <p:spPr>
+          <a:xfrm flipH="1">
+            <a:off x="8519757" y="3874899"/>
+            <a:ext cx="54239" cy="454984"/>
+          </a:xfrm>
+          <a:prstGeom prst="line">
+            <a:avLst/>
+          </a:prstGeom>
+        </p:spPr>
+        <p:style>
+          <a:lnRef idx="2">
+            <a:schemeClr val="dk1"/>
+          </a:lnRef>
+          <a:fillRef idx="0">
+            <a:schemeClr val="dk1"/>
+          </a:fillRef>
+          <a:effectRef idx="1">
+            <a:schemeClr val="dk1"/>
+          </a:effectRef>
+          <a:fontRef idx="minor">
+            <a:schemeClr val="tx1"/>
+          </a:fontRef>
+        </p:style>
+      </p:cxnSp>
+      <p:sp>
+        <p:nvSpPr>
+          <p:cNvPr id="188" name="文本框 187">
+            <a:extLst>
+              <a:ext uri="{FF2B5EF4-FFF2-40B4-BE49-F238E27FC236}">
+                <a16:creationId xmlns:a16="http://schemas.microsoft.com/office/drawing/2014/main" id="{E922B985-01A5-149C-2456-C48B66E7E5B0}"/>
+              </a:ext>
+            </a:extLst>
+          </p:cNvPr>
+          <p:cNvSpPr txBox="1"/>
+          <p:nvPr/>
+        </p:nvSpPr>
+        <p:spPr>
+          <a:xfrm>
+            <a:off x="8369913" y="4148218"/>
+            <a:ext cx="277640" cy="369332"/>
+          </a:xfrm>
+          <a:prstGeom prst="rect">
+            <a:avLst/>
+          </a:prstGeom>
+          <a:noFill/>
+        </p:spPr>
+        <p:txBody>
+          <a:bodyPr wrap="none" rtlCol="0">
+            <a:spAutoFit/>
+          </a:bodyPr>
+          <a:lstStyle/>
+          <a:p>
+            <a:r>
+              <a:rPr lang="en-US" altLang="zh-CN"/>
+              <a:t>•</a:t>
+            </a:r>
+            <a:endParaRPr lang="zh-CN" altLang="en-US"/>
+          </a:p>
+        </p:txBody>
+      </p:sp>
+      <p:cxnSp>
+        <p:nvCxnSpPr>
+          <p:cNvPr id="193" name="直接连接符 192">
+            <a:extLst>
+              <a:ext uri="{FF2B5EF4-FFF2-40B4-BE49-F238E27FC236}">
+                <a16:creationId xmlns:a16="http://schemas.microsoft.com/office/drawing/2014/main" id="{361556DF-ED65-51C6-C104-BAEB4A6408A6}"/>
+              </a:ext>
+            </a:extLst>
+          </p:cNvPr>
+          <p:cNvCxnSpPr>
+            <a:cxnSpLocks/>
+            <a:endCxn id="195" idx="1"/>
+          </p:cNvCxnSpPr>
+          <p:nvPr/>
+        </p:nvCxnSpPr>
+        <p:spPr>
+          <a:xfrm flipH="1">
+            <a:off x="8213149" y="3873399"/>
+            <a:ext cx="54239" cy="454984"/>
+          </a:xfrm>
+          <a:prstGeom prst="line">
+            <a:avLst/>
+          </a:prstGeom>
+        </p:spPr>
+        <p:style>
+          <a:lnRef idx="2">
+            <a:schemeClr val="dk1"/>
+          </a:lnRef>
+          <a:fillRef idx="0">
+            <a:schemeClr val="dk1"/>
+          </a:fillRef>
+          <a:effectRef idx="1">
+            <a:schemeClr val="dk1"/>
+          </a:effectRef>
+          <a:fontRef idx="minor">
+            <a:schemeClr val="tx1"/>
+          </a:fontRef>
+        </p:style>
+      </p:cxnSp>
+      <p:sp>
+        <p:nvSpPr>
+          <p:cNvPr id="194" name="文本框 193">
+            <a:extLst>
+              <a:ext uri="{FF2B5EF4-FFF2-40B4-BE49-F238E27FC236}">
+                <a16:creationId xmlns:a16="http://schemas.microsoft.com/office/drawing/2014/main" id="{47E76821-016B-FA0F-32FA-DD4E2F8E80A2}"/>
+              </a:ext>
+            </a:extLst>
+          </p:cNvPr>
+          <p:cNvSpPr txBox="1"/>
+          <p:nvPr/>
+        </p:nvSpPr>
+        <p:spPr>
+          <a:xfrm>
+            <a:off x="8063305" y="4146718"/>
+            <a:ext cx="277640" cy="369332"/>
+          </a:xfrm>
+          <a:prstGeom prst="rect">
+            <a:avLst/>
+          </a:prstGeom>
+          <a:noFill/>
+        </p:spPr>
+        <p:txBody>
+          <a:bodyPr wrap="none" rtlCol="0">
+            <a:spAutoFit/>
+          </a:bodyPr>
+          <a:lstStyle/>
+          <a:p>
+            <a:r>
+              <a:rPr lang="en-US" altLang="zh-CN"/>
+              <a:t>•</a:t>
+            </a:r>
+            <a:endParaRPr lang="zh-CN" altLang="en-US"/>
+          </a:p>
+        </p:txBody>
+      </p:sp>
+      <p:sp>
+        <p:nvSpPr>
+          <p:cNvPr id="195" name="文本框 194">
+            <a:extLst>
+              <a:ext uri="{FF2B5EF4-FFF2-40B4-BE49-F238E27FC236}">
+                <a16:creationId xmlns:a16="http://schemas.microsoft.com/office/drawing/2014/main" id="{4AC62F15-F564-6DBD-1368-9FA8977208DB}"/>
+              </a:ext>
+            </a:extLst>
+          </p:cNvPr>
+          <p:cNvSpPr txBox="1"/>
+          <p:nvPr/>
+        </p:nvSpPr>
+        <p:spPr>
+          <a:xfrm>
+            <a:off x="8213149" y="4143717"/>
+            <a:ext cx="277640" cy="369332"/>
+          </a:xfrm>
+          <a:prstGeom prst="rect">
+            <a:avLst/>
+          </a:prstGeom>
+          <a:noFill/>
+        </p:spPr>
+        <p:txBody>
+          <a:bodyPr wrap="none" rtlCol="0">
+            <a:spAutoFit/>
+          </a:bodyPr>
+          <a:lstStyle/>
+          <a:p>
+            <a:r>
+              <a:rPr lang="en-US" altLang="zh-CN"/>
+              <a:t>•</a:t>
+            </a:r>
+            <a:endParaRPr lang="zh-CN" altLang="en-US"/>
+          </a:p>
+        </p:txBody>
+      </p:sp>
+      <p:cxnSp>
+        <p:nvCxnSpPr>
+          <p:cNvPr id="196" name="直接连接符 195">
+            <a:extLst>
+              <a:ext uri="{FF2B5EF4-FFF2-40B4-BE49-F238E27FC236}">
+                <a16:creationId xmlns:a16="http://schemas.microsoft.com/office/drawing/2014/main" id="{C1D2D8EA-29B9-6D64-D2C8-72B80838A402}"/>
+              </a:ext>
+            </a:extLst>
+          </p:cNvPr>
+          <p:cNvCxnSpPr>
+            <a:cxnSpLocks/>
+          </p:cNvCxnSpPr>
+          <p:nvPr/>
+        </p:nvCxnSpPr>
+        <p:spPr>
+          <a:xfrm>
+            <a:off x="8267388" y="3873399"/>
+            <a:ext cx="73557" cy="454984"/>
+          </a:xfrm>
+          <a:prstGeom prst="line">
+            <a:avLst/>
+          </a:prstGeom>
+        </p:spPr>
+        <p:style>
+          <a:lnRef idx="2">
+            <a:schemeClr val="dk1"/>
+          </a:lnRef>
+          <a:fillRef idx="0">
+            <a:schemeClr val="dk1"/>
+          </a:fillRef>
+          <a:effectRef idx="1">
+            <a:schemeClr val="dk1"/>
+          </a:effectRef>
+          <a:fontRef idx="minor">
+            <a:schemeClr val="tx1"/>
+          </a:fontRef>
+        </p:style>
+      </p:cxnSp>
+      <p:sp>
+        <p:nvSpPr>
+          <p:cNvPr id="198" name="文本框 197">
+            <a:extLst>
+              <a:ext uri="{FF2B5EF4-FFF2-40B4-BE49-F238E27FC236}">
+                <a16:creationId xmlns:a16="http://schemas.microsoft.com/office/drawing/2014/main" id="{B37F8C3F-D310-95F9-7826-85F9942DCD9F}"/>
+              </a:ext>
+            </a:extLst>
+          </p:cNvPr>
+          <p:cNvSpPr txBox="1"/>
+          <p:nvPr/>
+        </p:nvSpPr>
+        <p:spPr>
+          <a:xfrm>
+            <a:off x="8611428" y="2737177"/>
+            <a:ext cx="277640" cy="369332"/>
+          </a:xfrm>
+          <a:prstGeom prst="rect">
+            <a:avLst/>
+          </a:prstGeom>
+          <a:noFill/>
+        </p:spPr>
+        <p:txBody>
+          <a:bodyPr wrap="none" rtlCol="0">
+            <a:spAutoFit/>
+          </a:bodyPr>
+          <a:lstStyle/>
+          <a:p>
+            <a:r>
+              <a:rPr lang="en-US" altLang="zh-CN"/>
+              <a:t>•</a:t>
+            </a:r>
+            <a:endParaRPr lang="zh-CN" altLang="en-US"/>
+          </a:p>
+        </p:txBody>
+      </p:sp>
     </p:spTree>
     <p:extLst>
       <p:ext uri="{BB962C8B-B14F-4D97-AF65-F5344CB8AC3E}">
@@ -7792,6 +12112,2815 @@
           <a:chExt cx="0" cy="0"/>
         </a:xfrm>
       </p:grpSpPr>
+      <p:sp>
+        <p:nvSpPr>
+          <p:cNvPr id="32" name="椭圆 31">
+            <a:extLst>
+              <a:ext uri="{FF2B5EF4-FFF2-40B4-BE49-F238E27FC236}">
+                <a16:creationId xmlns:a16="http://schemas.microsoft.com/office/drawing/2014/main" id="{CF1C76E7-2F98-BA88-9203-829E4EB1A084}"/>
+              </a:ext>
+            </a:extLst>
+          </p:cNvPr>
+          <p:cNvSpPr/>
+          <p:nvPr/>
+        </p:nvSpPr>
+        <p:spPr>
+          <a:xfrm>
+            <a:off x="5396313" y="773258"/>
+            <a:ext cx="333328" cy="333328"/>
+          </a:xfrm>
+          <a:prstGeom prst="ellipse">
+            <a:avLst/>
+          </a:prstGeom>
+        </p:spPr>
+        <p:style>
+          <a:lnRef idx="2">
+            <a:schemeClr val="dk1"/>
+          </a:lnRef>
+          <a:fillRef idx="1">
+            <a:schemeClr val="lt1"/>
+          </a:fillRef>
+          <a:effectRef idx="0">
+            <a:schemeClr val="dk1"/>
+          </a:effectRef>
+          <a:fontRef idx="minor">
+            <a:schemeClr val="dk1"/>
+          </a:fontRef>
+        </p:style>
+        <p:txBody>
+          <a:bodyPr rtlCol="0" anchor="ctr"/>
+          <a:lstStyle/>
+          <a:p>
+            <a:pPr algn="ctr"/>
+            <a:r>
+              <a:rPr lang="en-US" altLang="zh-CN" sz="1600"/>
+              <a:t>A</a:t>
+            </a:r>
+            <a:endParaRPr lang="zh-CN" altLang="en-US" sz="1600"/>
+          </a:p>
+        </p:txBody>
+      </p:sp>
+      <p:sp>
+        <p:nvSpPr>
+          <p:cNvPr id="33" name="椭圆 32">
+            <a:extLst>
+              <a:ext uri="{FF2B5EF4-FFF2-40B4-BE49-F238E27FC236}">
+                <a16:creationId xmlns:a16="http://schemas.microsoft.com/office/drawing/2014/main" id="{897F73F6-536B-7ED4-5B6C-5D3CFEE1E6EB}"/>
+              </a:ext>
+            </a:extLst>
+          </p:cNvPr>
+          <p:cNvSpPr/>
+          <p:nvPr/>
+        </p:nvSpPr>
+        <p:spPr>
+          <a:xfrm>
+            <a:off x="3713927" y="1195173"/>
+            <a:ext cx="333328" cy="333328"/>
+          </a:xfrm>
+          <a:prstGeom prst="ellipse">
+            <a:avLst/>
+          </a:prstGeom>
+        </p:spPr>
+        <p:style>
+          <a:lnRef idx="2">
+            <a:schemeClr val="dk1"/>
+          </a:lnRef>
+          <a:fillRef idx="1">
+            <a:schemeClr val="lt1"/>
+          </a:fillRef>
+          <a:effectRef idx="0">
+            <a:schemeClr val="dk1"/>
+          </a:effectRef>
+          <a:fontRef idx="minor">
+            <a:schemeClr val="dk1"/>
+          </a:fontRef>
+        </p:style>
+        <p:txBody>
+          <a:bodyPr rtlCol="0" anchor="ctr"/>
+          <a:lstStyle/>
+          <a:p>
+            <a:pPr algn="ctr"/>
+            <a:r>
+              <a:rPr lang="en-US" altLang="zh-CN" sz="1600"/>
+              <a:t>B</a:t>
+            </a:r>
+            <a:endParaRPr lang="zh-CN" altLang="en-US" sz="1600"/>
+          </a:p>
+        </p:txBody>
+      </p:sp>
+      <p:sp>
+        <p:nvSpPr>
+          <p:cNvPr id="34" name="椭圆 33">
+            <a:extLst>
+              <a:ext uri="{FF2B5EF4-FFF2-40B4-BE49-F238E27FC236}">
+                <a16:creationId xmlns:a16="http://schemas.microsoft.com/office/drawing/2014/main" id="{13127B2E-D5E3-4925-49E4-37C8983E61E3}"/>
+              </a:ext>
+            </a:extLst>
+          </p:cNvPr>
+          <p:cNvSpPr/>
+          <p:nvPr/>
+        </p:nvSpPr>
+        <p:spPr>
+          <a:xfrm>
+            <a:off x="6895537" y="1204934"/>
+            <a:ext cx="333328" cy="333328"/>
+          </a:xfrm>
+          <a:prstGeom prst="ellipse">
+            <a:avLst/>
+          </a:prstGeom>
+        </p:spPr>
+        <p:style>
+          <a:lnRef idx="2">
+            <a:schemeClr val="dk1"/>
+          </a:lnRef>
+          <a:fillRef idx="1">
+            <a:schemeClr val="lt1"/>
+          </a:fillRef>
+          <a:effectRef idx="0">
+            <a:schemeClr val="dk1"/>
+          </a:effectRef>
+          <a:fontRef idx="minor">
+            <a:schemeClr val="dk1"/>
+          </a:fontRef>
+        </p:style>
+        <p:txBody>
+          <a:bodyPr rtlCol="0" anchor="ctr"/>
+          <a:lstStyle/>
+          <a:p>
+            <a:pPr algn="ctr"/>
+            <a:r>
+              <a:rPr lang="en-US" altLang="zh-CN" sz="1600"/>
+              <a:t>C</a:t>
+            </a:r>
+            <a:endParaRPr lang="zh-CN" altLang="en-US" sz="1600"/>
+          </a:p>
+        </p:txBody>
+      </p:sp>
+      <p:cxnSp>
+        <p:nvCxnSpPr>
+          <p:cNvPr id="35" name="直接连接符 34">
+            <a:extLst>
+              <a:ext uri="{FF2B5EF4-FFF2-40B4-BE49-F238E27FC236}">
+                <a16:creationId xmlns:a16="http://schemas.microsoft.com/office/drawing/2014/main" id="{17A81ECD-D744-1C8E-EEA1-C6DAEB05844C}"/>
+              </a:ext>
+            </a:extLst>
+          </p:cNvPr>
+          <p:cNvCxnSpPr>
+            <a:cxnSpLocks/>
+            <a:stCxn id="32" idx="3"/>
+            <a:endCxn id="33" idx="7"/>
+          </p:cNvCxnSpPr>
+          <p:nvPr/>
+        </p:nvCxnSpPr>
+        <p:spPr>
+          <a:xfrm flipH="1">
+            <a:off x="3998440" y="1057771"/>
+            <a:ext cx="1446688" cy="186217"/>
+          </a:xfrm>
+          <a:prstGeom prst="line">
+            <a:avLst/>
+          </a:prstGeom>
+        </p:spPr>
+        <p:style>
+          <a:lnRef idx="2">
+            <a:schemeClr val="dk1"/>
+          </a:lnRef>
+          <a:fillRef idx="0">
+            <a:schemeClr val="dk1"/>
+          </a:fillRef>
+          <a:effectRef idx="1">
+            <a:schemeClr val="dk1"/>
+          </a:effectRef>
+          <a:fontRef idx="minor">
+            <a:schemeClr val="tx1"/>
+          </a:fontRef>
+        </p:style>
+      </p:cxnSp>
+      <p:cxnSp>
+        <p:nvCxnSpPr>
+          <p:cNvPr id="36" name="直接连接符 35">
+            <a:extLst>
+              <a:ext uri="{FF2B5EF4-FFF2-40B4-BE49-F238E27FC236}">
+                <a16:creationId xmlns:a16="http://schemas.microsoft.com/office/drawing/2014/main" id="{485BDEF5-18CB-7154-6E78-6B241EDDBB5A}"/>
+              </a:ext>
+            </a:extLst>
+          </p:cNvPr>
+          <p:cNvCxnSpPr>
+            <a:stCxn id="32" idx="5"/>
+            <a:endCxn id="34" idx="1"/>
+          </p:cNvCxnSpPr>
+          <p:nvPr/>
+        </p:nvCxnSpPr>
+        <p:spPr>
+          <a:xfrm>
+            <a:off x="5680826" y="1057771"/>
+            <a:ext cx="1263526" cy="195978"/>
+          </a:xfrm>
+          <a:prstGeom prst="line">
+            <a:avLst/>
+          </a:prstGeom>
+        </p:spPr>
+        <p:style>
+          <a:lnRef idx="2">
+            <a:schemeClr val="dk1"/>
+          </a:lnRef>
+          <a:fillRef idx="0">
+            <a:schemeClr val="dk1"/>
+          </a:fillRef>
+          <a:effectRef idx="1">
+            <a:schemeClr val="dk1"/>
+          </a:effectRef>
+          <a:fontRef idx="minor">
+            <a:schemeClr val="tx1"/>
+          </a:fontRef>
+        </p:style>
+      </p:cxnSp>
+      <p:sp>
+        <p:nvSpPr>
+          <p:cNvPr id="40" name="椭圆 39">
+            <a:extLst>
+              <a:ext uri="{FF2B5EF4-FFF2-40B4-BE49-F238E27FC236}">
+                <a16:creationId xmlns:a16="http://schemas.microsoft.com/office/drawing/2014/main" id="{0312F385-69AD-6CD4-D14C-D25F89767600}"/>
+              </a:ext>
+            </a:extLst>
+          </p:cNvPr>
+          <p:cNvSpPr/>
+          <p:nvPr/>
+        </p:nvSpPr>
+        <p:spPr>
+          <a:xfrm>
+            <a:off x="4488876" y="1802504"/>
+            <a:ext cx="333328" cy="333328"/>
+          </a:xfrm>
+          <a:prstGeom prst="ellipse">
+            <a:avLst/>
+          </a:prstGeom>
+        </p:spPr>
+        <p:style>
+          <a:lnRef idx="2">
+            <a:schemeClr val="dk1"/>
+          </a:lnRef>
+          <a:fillRef idx="1">
+            <a:schemeClr val="lt1"/>
+          </a:fillRef>
+          <a:effectRef idx="0">
+            <a:schemeClr val="dk1"/>
+          </a:effectRef>
+          <a:fontRef idx="minor">
+            <a:schemeClr val="dk1"/>
+          </a:fontRef>
+        </p:style>
+        <p:txBody>
+          <a:bodyPr rtlCol="0" anchor="ctr"/>
+          <a:lstStyle/>
+          <a:p>
+            <a:pPr algn="ctr"/>
+            <a:r>
+              <a:rPr lang="en-US" altLang="zh-CN" sz="1600"/>
+              <a:t>D</a:t>
+            </a:r>
+            <a:endParaRPr lang="zh-CN" altLang="en-US" sz="1600"/>
+          </a:p>
+        </p:txBody>
+      </p:sp>
+      <p:sp>
+        <p:nvSpPr>
+          <p:cNvPr id="42" name="椭圆 41">
+            <a:extLst>
+              <a:ext uri="{FF2B5EF4-FFF2-40B4-BE49-F238E27FC236}">
+                <a16:creationId xmlns:a16="http://schemas.microsoft.com/office/drawing/2014/main" id="{F23DC41F-8EA3-8759-E5C5-AB34FCC47822}"/>
+              </a:ext>
+            </a:extLst>
+          </p:cNvPr>
+          <p:cNvSpPr/>
+          <p:nvPr/>
+        </p:nvSpPr>
+        <p:spPr>
+          <a:xfrm>
+            <a:off x="7547960" y="1802504"/>
+            <a:ext cx="333328" cy="333328"/>
+          </a:xfrm>
+          <a:prstGeom prst="ellipse">
+            <a:avLst/>
+          </a:prstGeom>
+        </p:spPr>
+        <p:style>
+          <a:lnRef idx="2">
+            <a:schemeClr val="dk1"/>
+          </a:lnRef>
+          <a:fillRef idx="1">
+            <a:schemeClr val="lt1"/>
+          </a:fillRef>
+          <a:effectRef idx="0">
+            <a:schemeClr val="dk1"/>
+          </a:effectRef>
+          <a:fontRef idx="minor">
+            <a:schemeClr val="dk1"/>
+          </a:fontRef>
+        </p:style>
+        <p:txBody>
+          <a:bodyPr rtlCol="0" anchor="ctr"/>
+          <a:lstStyle/>
+          <a:p>
+            <a:pPr algn="ctr"/>
+            <a:r>
+              <a:rPr lang="en-US" altLang="zh-CN" sz="1600"/>
+              <a:t>E</a:t>
+            </a:r>
+            <a:endParaRPr lang="zh-CN" altLang="en-US" sz="1600"/>
+          </a:p>
+        </p:txBody>
+      </p:sp>
+      <p:sp>
+        <p:nvSpPr>
+          <p:cNvPr id="44" name="椭圆 43">
+            <a:extLst>
+              <a:ext uri="{FF2B5EF4-FFF2-40B4-BE49-F238E27FC236}">
+                <a16:creationId xmlns:a16="http://schemas.microsoft.com/office/drawing/2014/main" id="{88A900F8-F5E1-93A7-5B6F-98D5BC08732E}"/>
+              </a:ext>
+            </a:extLst>
+          </p:cNvPr>
+          <p:cNvSpPr/>
+          <p:nvPr/>
+        </p:nvSpPr>
+        <p:spPr>
+          <a:xfrm>
+            <a:off x="3969750" y="2528485"/>
+            <a:ext cx="333328" cy="333328"/>
+          </a:xfrm>
+          <a:prstGeom prst="ellipse">
+            <a:avLst/>
+          </a:prstGeom>
+        </p:spPr>
+        <p:style>
+          <a:lnRef idx="2">
+            <a:schemeClr val="dk1"/>
+          </a:lnRef>
+          <a:fillRef idx="1">
+            <a:schemeClr val="lt1"/>
+          </a:fillRef>
+          <a:effectRef idx="0">
+            <a:schemeClr val="dk1"/>
+          </a:effectRef>
+          <a:fontRef idx="minor">
+            <a:schemeClr val="dk1"/>
+          </a:fontRef>
+        </p:style>
+        <p:txBody>
+          <a:bodyPr rtlCol="0" anchor="ctr"/>
+          <a:lstStyle/>
+          <a:p>
+            <a:pPr algn="ctr"/>
+            <a:r>
+              <a:rPr lang="en-US" altLang="zh-CN" sz="1600"/>
+              <a:t>F</a:t>
+            </a:r>
+            <a:endParaRPr lang="zh-CN" altLang="en-US" sz="1600"/>
+          </a:p>
+        </p:txBody>
+      </p:sp>
+      <p:sp>
+        <p:nvSpPr>
+          <p:cNvPr id="46" name="椭圆 45">
+            <a:extLst>
+              <a:ext uri="{FF2B5EF4-FFF2-40B4-BE49-F238E27FC236}">
+                <a16:creationId xmlns:a16="http://schemas.microsoft.com/office/drawing/2014/main" id="{6CDF7AC5-DC4A-BE42-8991-49633435BDC9}"/>
+              </a:ext>
+            </a:extLst>
+          </p:cNvPr>
+          <p:cNvSpPr/>
+          <p:nvPr/>
+        </p:nvSpPr>
+        <p:spPr>
+          <a:xfrm>
+            <a:off x="7101261" y="2498457"/>
+            <a:ext cx="333328" cy="333328"/>
+          </a:xfrm>
+          <a:prstGeom prst="ellipse">
+            <a:avLst/>
+          </a:prstGeom>
+        </p:spPr>
+        <p:style>
+          <a:lnRef idx="2">
+            <a:schemeClr val="dk1"/>
+          </a:lnRef>
+          <a:fillRef idx="1">
+            <a:schemeClr val="lt1"/>
+          </a:fillRef>
+          <a:effectRef idx="0">
+            <a:schemeClr val="dk1"/>
+          </a:effectRef>
+          <a:fontRef idx="minor">
+            <a:schemeClr val="dk1"/>
+          </a:fontRef>
+        </p:style>
+        <p:txBody>
+          <a:bodyPr rtlCol="0" anchor="ctr"/>
+          <a:lstStyle/>
+          <a:p>
+            <a:pPr algn="ctr"/>
+            <a:r>
+              <a:rPr lang="en-US" altLang="zh-CN" sz="1600"/>
+              <a:t>G</a:t>
+            </a:r>
+            <a:endParaRPr lang="zh-CN" altLang="en-US" sz="1600"/>
+          </a:p>
+        </p:txBody>
+      </p:sp>
+      <p:sp>
+        <p:nvSpPr>
+          <p:cNvPr id="48" name="椭圆 47">
+            <a:extLst>
+              <a:ext uri="{FF2B5EF4-FFF2-40B4-BE49-F238E27FC236}">
+                <a16:creationId xmlns:a16="http://schemas.microsoft.com/office/drawing/2014/main" id="{AD468AE3-A8D5-5B71-D3F1-4237D88D1561}"/>
+              </a:ext>
+            </a:extLst>
+          </p:cNvPr>
+          <p:cNvSpPr/>
+          <p:nvPr/>
+        </p:nvSpPr>
+        <p:spPr>
+          <a:xfrm>
+            <a:off x="8029157" y="2498457"/>
+            <a:ext cx="333328" cy="333328"/>
+          </a:xfrm>
+          <a:prstGeom prst="ellipse">
+            <a:avLst/>
+          </a:prstGeom>
+        </p:spPr>
+        <p:style>
+          <a:lnRef idx="2">
+            <a:schemeClr val="dk1"/>
+          </a:lnRef>
+          <a:fillRef idx="1">
+            <a:schemeClr val="lt1"/>
+          </a:fillRef>
+          <a:effectRef idx="0">
+            <a:schemeClr val="dk1"/>
+          </a:effectRef>
+          <a:fontRef idx="minor">
+            <a:schemeClr val="dk1"/>
+          </a:fontRef>
+        </p:style>
+        <p:txBody>
+          <a:bodyPr rtlCol="0" anchor="ctr"/>
+          <a:lstStyle/>
+          <a:p>
+            <a:pPr algn="ctr"/>
+            <a:r>
+              <a:rPr lang="en-US" altLang="zh-CN" sz="1600"/>
+              <a:t>H</a:t>
+            </a:r>
+            <a:endParaRPr lang="zh-CN" altLang="en-US" sz="1600"/>
+          </a:p>
+        </p:txBody>
+      </p:sp>
+      <p:cxnSp>
+        <p:nvCxnSpPr>
+          <p:cNvPr id="50" name="直接连接符 49">
+            <a:extLst>
+              <a:ext uri="{FF2B5EF4-FFF2-40B4-BE49-F238E27FC236}">
+                <a16:creationId xmlns:a16="http://schemas.microsoft.com/office/drawing/2014/main" id="{DE053D32-9DBC-B27B-7B25-151F018A0473}"/>
+              </a:ext>
+            </a:extLst>
+          </p:cNvPr>
+          <p:cNvCxnSpPr>
+            <a:stCxn id="33" idx="5"/>
+            <a:endCxn id="40" idx="0"/>
+          </p:cNvCxnSpPr>
+          <p:nvPr/>
+        </p:nvCxnSpPr>
+        <p:spPr>
+          <a:xfrm>
+            <a:off x="3998440" y="1479686"/>
+            <a:ext cx="657100" cy="322818"/>
+          </a:xfrm>
+          <a:prstGeom prst="line">
+            <a:avLst/>
+          </a:prstGeom>
+        </p:spPr>
+        <p:style>
+          <a:lnRef idx="2">
+            <a:schemeClr val="dk1"/>
+          </a:lnRef>
+          <a:fillRef idx="0">
+            <a:schemeClr val="dk1"/>
+          </a:fillRef>
+          <a:effectRef idx="1">
+            <a:schemeClr val="dk1"/>
+          </a:effectRef>
+          <a:fontRef idx="minor">
+            <a:schemeClr val="tx1"/>
+          </a:fontRef>
+        </p:style>
+      </p:cxnSp>
+      <p:cxnSp>
+        <p:nvCxnSpPr>
+          <p:cNvPr id="52" name="直接连接符 51">
+            <a:extLst>
+              <a:ext uri="{FF2B5EF4-FFF2-40B4-BE49-F238E27FC236}">
+                <a16:creationId xmlns:a16="http://schemas.microsoft.com/office/drawing/2014/main" id="{51120C01-4AFC-9C3F-64E0-72C0F3CAAB1D}"/>
+              </a:ext>
+            </a:extLst>
+          </p:cNvPr>
+          <p:cNvCxnSpPr>
+            <a:stCxn id="34" idx="5"/>
+            <a:endCxn id="42" idx="1"/>
+          </p:cNvCxnSpPr>
+          <p:nvPr/>
+        </p:nvCxnSpPr>
+        <p:spPr>
+          <a:xfrm>
+            <a:off x="7180050" y="1489447"/>
+            <a:ext cx="416725" cy="361872"/>
+          </a:xfrm>
+          <a:prstGeom prst="line">
+            <a:avLst/>
+          </a:prstGeom>
+        </p:spPr>
+        <p:style>
+          <a:lnRef idx="2">
+            <a:schemeClr val="dk1"/>
+          </a:lnRef>
+          <a:fillRef idx="0">
+            <a:schemeClr val="dk1"/>
+          </a:fillRef>
+          <a:effectRef idx="1">
+            <a:schemeClr val="dk1"/>
+          </a:effectRef>
+          <a:fontRef idx="minor">
+            <a:schemeClr val="tx1"/>
+          </a:fontRef>
+        </p:style>
+      </p:cxnSp>
+      <p:cxnSp>
+        <p:nvCxnSpPr>
+          <p:cNvPr id="54" name="直接连接符 53">
+            <a:extLst>
+              <a:ext uri="{FF2B5EF4-FFF2-40B4-BE49-F238E27FC236}">
+                <a16:creationId xmlns:a16="http://schemas.microsoft.com/office/drawing/2014/main" id="{35D32ED5-640F-12AA-A31A-E0FCD6623FAE}"/>
+              </a:ext>
+            </a:extLst>
+          </p:cNvPr>
+          <p:cNvCxnSpPr>
+            <a:stCxn id="40" idx="3"/>
+            <a:endCxn id="44" idx="0"/>
+          </p:cNvCxnSpPr>
+          <p:nvPr/>
+        </p:nvCxnSpPr>
+        <p:spPr>
+          <a:xfrm flipH="1">
+            <a:off x="4136414" y="2087017"/>
+            <a:ext cx="401277" cy="441468"/>
+          </a:xfrm>
+          <a:prstGeom prst="line">
+            <a:avLst/>
+          </a:prstGeom>
+        </p:spPr>
+        <p:style>
+          <a:lnRef idx="2">
+            <a:schemeClr val="dk1"/>
+          </a:lnRef>
+          <a:fillRef idx="0">
+            <a:schemeClr val="dk1"/>
+          </a:fillRef>
+          <a:effectRef idx="1">
+            <a:schemeClr val="dk1"/>
+          </a:effectRef>
+          <a:fontRef idx="minor">
+            <a:schemeClr val="tx1"/>
+          </a:fontRef>
+        </p:style>
+      </p:cxnSp>
+      <p:cxnSp>
+        <p:nvCxnSpPr>
+          <p:cNvPr id="56" name="直接连接符 55">
+            <a:extLst>
+              <a:ext uri="{FF2B5EF4-FFF2-40B4-BE49-F238E27FC236}">
+                <a16:creationId xmlns:a16="http://schemas.microsoft.com/office/drawing/2014/main" id="{D2AA23C2-D66C-6862-8CE7-E81226B31E4F}"/>
+              </a:ext>
+            </a:extLst>
+          </p:cNvPr>
+          <p:cNvCxnSpPr>
+            <a:stCxn id="42" idx="3"/>
+            <a:endCxn id="46" idx="0"/>
+          </p:cNvCxnSpPr>
+          <p:nvPr/>
+        </p:nvCxnSpPr>
+        <p:spPr>
+          <a:xfrm flipH="1">
+            <a:off x="7267925" y="2087017"/>
+            <a:ext cx="328850" cy="411440"/>
+          </a:xfrm>
+          <a:prstGeom prst="line">
+            <a:avLst/>
+          </a:prstGeom>
+        </p:spPr>
+        <p:style>
+          <a:lnRef idx="2">
+            <a:schemeClr val="dk1"/>
+          </a:lnRef>
+          <a:fillRef idx="0">
+            <a:schemeClr val="dk1"/>
+          </a:fillRef>
+          <a:effectRef idx="1">
+            <a:schemeClr val="dk1"/>
+          </a:effectRef>
+          <a:fontRef idx="minor">
+            <a:schemeClr val="tx1"/>
+          </a:fontRef>
+        </p:style>
+      </p:cxnSp>
+      <p:cxnSp>
+        <p:nvCxnSpPr>
+          <p:cNvPr id="58" name="直接连接符 57">
+            <a:extLst>
+              <a:ext uri="{FF2B5EF4-FFF2-40B4-BE49-F238E27FC236}">
+                <a16:creationId xmlns:a16="http://schemas.microsoft.com/office/drawing/2014/main" id="{700DBF7B-413D-86A4-2728-8E2D020CC1F7}"/>
+              </a:ext>
+            </a:extLst>
+          </p:cNvPr>
+          <p:cNvCxnSpPr>
+            <a:stCxn id="42" idx="5"/>
+            <a:endCxn id="48" idx="0"/>
+          </p:cNvCxnSpPr>
+          <p:nvPr/>
+        </p:nvCxnSpPr>
+        <p:spPr>
+          <a:xfrm>
+            <a:off x="7832473" y="2087017"/>
+            <a:ext cx="363348" cy="411440"/>
+          </a:xfrm>
+          <a:prstGeom prst="line">
+            <a:avLst/>
+          </a:prstGeom>
+        </p:spPr>
+        <p:style>
+          <a:lnRef idx="2">
+            <a:schemeClr val="dk1"/>
+          </a:lnRef>
+          <a:fillRef idx="0">
+            <a:schemeClr val="dk1"/>
+          </a:fillRef>
+          <a:effectRef idx="1">
+            <a:schemeClr val="dk1"/>
+          </a:effectRef>
+          <a:fontRef idx="minor">
+            <a:schemeClr val="tx1"/>
+          </a:fontRef>
+        </p:style>
+      </p:cxnSp>
+      <p:sp>
+        <p:nvSpPr>
+          <p:cNvPr id="60" name="椭圆 59">
+            <a:extLst>
+              <a:ext uri="{FF2B5EF4-FFF2-40B4-BE49-F238E27FC236}">
+                <a16:creationId xmlns:a16="http://schemas.microsoft.com/office/drawing/2014/main" id="{3E31C59B-EC41-3F0C-B3B0-8BCDDF429780}"/>
+              </a:ext>
+            </a:extLst>
+          </p:cNvPr>
+          <p:cNvSpPr/>
+          <p:nvPr/>
+        </p:nvSpPr>
+        <p:spPr>
+          <a:xfrm>
+            <a:off x="2758591" y="1802504"/>
+            <a:ext cx="333328" cy="333328"/>
+          </a:xfrm>
+          <a:prstGeom prst="ellipse">
+            <a:avLst/>
+          </a:prstGeom>
+          <a:ln>
+            <a:prstDash val="sysDot"/>
+          </a:ln>
+        </p:spPr>
+        <p:style>
+          <a:lnRef idx="2">
+            <a:schemeClr val="dk1"/>
+          </a:lnRef>
+          <a:fillRef idx="1">
+            <a:schemeClr val="lt1"/>
+          </a:fillRef>
+          <a:effectRef idx="0">
+            <a:schemeClr val="dk1"/>
+          </a:effectRef>
+          <a:fontRef idx="minor">
+            <a:schemeClr val="dk1"/>
+          </a:fontRef>
+        </p:style>
+        <p:txBody>
+          <a:bodyPr rtlCol="0" anchor="ctr"/>
+          <a:lstStyle/>
+          <a:p>
+            <a:pPr algn="ctr"/>
+            <a:endParaRPr lang="zh-CN" altLang="en-US" sz="1600"/>
+          </a:p>
+        </p:txBody>
+      </p:sp>
+      <p:sp>
+        <p:nvSpPr>
+          <p:cNvPr id="62" name="椭圆 61">
+            <a:extLst>
+              <a:ext uri="{FF2B5EF4-FFF2-40B4-BE49-F238E27FC236}">
+                <a16:creationId xmlns:a16="http://schemas.microsoft.com/office/drawing/2014/main" id="{C666C697-D2E7-A382-0ECC-42D290D560AD}"/>
+              </a:ext>
+            </a:extLst>
+          </p:cNvPr>
+          <p:cNvSpPr/>
+          <p:nvPr/>
+        </p:nvSpPr>
+        <p:spPr>
+          <a:xfrm>
+            <a:off x="5979261" y="1804737"/>
+            <a:ext cx="333328" cy="333328"/>
+          </a:xfrm>
+          <a:prstGeom prst="ellipse">
+            <a:avLst/>
+          </a:prstGeom>
+          <a:ln>
+            <a:prstDash val="sysDot"/>
+          </a:ln>
+        </p:spPr>
+        <p:style>
+          <a:lnRef idx="2">
+            <a:schemeClr val="dk1"/>
+          </a:lnRef>
+          <a:fillRef idx="1">
+            <a:schemeClr val="lt1"/>
+          </a:fillRef>
+          <a:effectRef idx="0">
+            <a:schemeClr val="dk1"/>
+          </a:effectRef>
+          <a:fontRef idx="minor">
+            <a:schemeClr val="dk1"/>
+          </a:fontRef>
+        </p:style>
+        <p:txBody>
+          <a:bodyPr rtlCol="0" anchor="ctr"/>
+          <a:lstStyle/>
+          <a:p>
+            <a:pPr algn="ctr"/>
+            <a:endParaRPr lang="zh-CN" altLang="en-US" sz="1600"/>
+          </a:p>
+        </p:txBody>
+      </p:sp>
+      <p:sp>
+        <p:nvSpPr>
+          <p:cNvPr id="64" name="椭圆 63">
+            <a:extLst>
+              <a:ext uri="{FF2B5EF4-FFF2-40B4-BE49-F238E27FC236}">
+                <a16:creationId xmlns:a16="http://schemas.microsoft.com/office/drawing/2014/main" id="{30A38E00-1C79-261B-B4FE-F19B23C807A2}"/>
+              </a:ext>
+            </a:extLst>
+          </p:cNvPr>
+          <p:cNvSpPr/>
+          <p:nvPr/>
+        </p:nvSpPr>
+        <p:spPr>
+          <a:xfrm>
+            <a:off x="5666125" y="2498457"/>
+            <a:ext cx="333328" cy="333328"/>
+          </a:xfrm>
+          <a:prstGeom prst="ellipse">
+            <a:avLst/>
+          </a:prstGeom>
+          <a:ln>
+            <a:prstDash val="sysDot"/>
+          </a:ln>
+        </p:spPr>
+        <p:style>
+          <a:lnRef idx="2">
+            <a:schemeClr val="dk1"/>
+          </a:lnRef>
+          <a:fillRef idx="1">
+            <a:schemeClr val="lt1"/>
+          </a:fillRef>
+          <a:effectRef idx="0">
+            <a:schemeClr val="dk1"/>
+          </a:effectRef>
+          <a:fontRef idx="minor">
+            <a:schemeClr val="dk1"/>
+          </a:fontRef>
+        </p:style>
+        <p:txBody>
+          <a:bodyPr rtlCol="0" anchor="ctr"/>
+          <a:lstStyle/>
+          <a:p>
+            <a:pPr algn="ctr"/>
+            <a:endParaRPr lang="zh-CN" altLang="en-US" sz="1600"/>
+          </a:p>
+        </p:txBody>
+      </p:sp>
+      <p:sp>
+        <p:nvSpPr>
+          <p:cNvPr id="81" name="椭圆 80">
+            <a:extLst>
+              <a:ext uri="{FF2B5EF4-FFF2-40B4-BE49-F238E27FC236}">
+                <a16:creationId xmlns:a16="http://schemas.microsoft.com/office/drawing/2014/main" id="{D867C987-E180-D520-1D1A-539DDA40736F}"/>
+              </a:ext>
+            </a:extLst>
+          </p:cNvPr>
+          <p:cNvSpPr/>
+          <p:nvPr/>
+        </p:nvSpPr>
+        <p:spPr>
+          <a:xfrm>
+            <a:off x="2338601" y="2498457"/>
+            <a:ext cx="333328" cy="333328"/>
+          </a:xfrm>
+          <a:prstGeom prst="ellipse">
+            <a:avLst/>
+          </a:prstGeom>
+          <a:ln>
+            <a:prstDash val="sysDot"/>
+          </a:ln>
+        </p:spPr>
+        <p:style>
+          <a:lnRef idx="2">
+            <a:schemeClr val="dk1"/>
+          </a:lnRef>
+          <a:fillRef idx="1">
+            <a:schemeClr val="lt1"/>
+          </a:fillRef>
+          <a:effectRef idx="0">
+            <a:schemeClr val="dk1"/>
+          </a:effectRef>
+          <a:fontRef idx="minor">
+            <a:schemeClr val="dk1"/>
+          </a:fontRef>
+        </p:style>
+        <p:txBody>
+          <a:bodyPr rtlCol="0" anchor="ctr"/>
+          <a:lstStyle/>
+          <a:p>
+            <a:pPr algn="ctr"/>
+            <a:endParaRPr lang="zh-CN" altLang="en-US" sz="1600"/>
+          </a:p>
+        </p:txBody>
+      </p:sp>
+      <p:sp>
+        <p:nvSpPr>
+          <p:cNvPr id="83" name="椭圆 82">
+            <a:extLst>
+              <a:ext uri="{FF2B5EF4-FFF2-40B4-BE49-F238E27FC236}">
+                <a16:creationId xmlns:a16="http://schemas.microsoft.com/office/drawing/2014/main" id="{C2D65A6A-A3D5-1856-3A89-A45CBBFF267D}"/>
+              </a:ext>
+            </a:extLst>
+          </p:cNvPr>
+          <p:cNvSpPr/>
+          <p:nvPr/>
+        </p:nvSpPr>
+        <p:spPr>
+          <a:xfrm>
+            <a:off x="3062102" y="2498457"/>
+            <a:ext cx="333328" cy="333328"/>
+          </a:xfrm>
+          <a:prstGeom prst="ellipse">
+            <a:avLst/>
+          </a:prstGeom>
+          <a:ln>
+            <a:prstDash val="sysDot"/>
+          </a:ln>
+        </p:spPr>
+        <p:style>
+          <a:lnRef idx="2">
+            <a:schemeClr val="dk1"/>
+          </a:lnRef>
+          <a:fillRef idx="1">
+            <a:schemeClr val="lt1"/>
+          </a:fillRef>
+          <a:effectRef idx="0">
+            <a:schemeClr val="dk1"/>
+          </a:effectRef>
+          <a:fontRef idx="minor">
+            <a:schemeClr val="dk1"/>
+          </a:fontRef>
+        </p:style>
+        <p:txBody>
+          <a:bodyPr rtlCol="0" anchor="ctr"/>
+          <a:lstStyle/>
+          <a:p>
+            <a:pPr algn="ctr"/>
+            <a:endParaRPr lang="zh-CN" altLang="en-US" sz="1600"/>
+          </a:p>
+        </p:txBody>
+      </p:sp>
+      <p:sp>
+        <p:nvSpPr>
+          <p:cNvPr id="85" name="椭圆 84">
+            <a:extLst>
+              <a:ext uri="{FF2B5EF4-FFF2-40B4-BE49-F238E27FC236}">
+                <a16:creationId xmlns:a16="http://schemas.microsoft.com/office/drawing/2014/main" id="{667AAA02-540E-FF47-B9F8-B3C0586141A5}"/>
+              </a:ext>
+            </a:extLst>
+          </p:cNvPr>
+          <p:cNvSpPr/>
+          <p:nvPr/>
+        </p:nvSpPr>
+        <p:spPr>
+          <a:xfrm>
+            <a:off x="4933517" y="2498457"/>
+            <a:ext cx="333328" cy="333328"/>
+          </a:xfrm>
+          <a:prstGeom prst="ellipse">
+            <a:avLst/>
+          </a:prstGeom>
+          <a:ln>
+            <a:prstDash val="sysDot"/>
+          </a:ln>
+        </p:spPr>
+        <p:style>
+          <a:lnRef idx="2">
+            <a:schemeClr val="dk1"/>
+          </a:lnRef>
+          <a:fillRef idx="1">
+            <a:schemeClr val="lt1"/>
+          </a:fillRef>
+          <a:effectRef idx="0">
+            <a:schemeClr val="dk1"/>
+          </a:effectRef>
+          <a:fontRef idx="minor">
+            <a:schemeClr val="dk1"/>
+          </a:fontRef>
+        </p:style>
+        <p:txBody>
+          <a:bodyPr rtlCol="0" anchor="ctr"/>
+          <a:lstStyle/>
+          <a:p>
+            <a:pPr algn="ctr"/>
+            <a:endParaRPr lang="zh-CN" altLang="en-US" sz="1600"/>
+          </a:p>
+        </p:txBody>
+      </p:sp>
+      <p:sp>
+        <p:nvSpPr>
+          <p:cNvPr id="90" name="椭圆 89">
+            <a:extLst>
+              <a:ext uri="{FF2B5EF4-FFF2-40B4-BE49-F238E27FC236}">
+                <a16:creationId xmlns:a16="http://schemas.microsoft.com/office/drawing/2014/main" id="{4319A7B2-ACAE-EEBD-D7ED-B0B8532B02AD}"/>
+              </a:ext>
+            </a:extLst>
+          </p:cNvPr>
+          <p:cNvSpPr/>
+          <p:nvPr/>
+        </p:nvSpPr>
+        <p:spPr>
+          <a:xfrm>
+            <a:off x="6385078" y="2498457"/>
+            <a:ext cx="333328" cy="333328"/>
+          </a:xfrm>
+          <a:prstGeom prst="ellipse">
+            <a:avLst/>
+          </a:prstGeom>
+          <a:ln>
+            <a:prstDash val="sysDot"/>
+          </a:ln>
+        </p:spPr>
+        <p:style>
+          <a:lnRef idx="2">
+            <a:schemeClr val="dk1"/>
+          </a:lnRef>
+          <a:fillRef idx="1">
+            <a:schemeClr val="lt1"/>
+          </a:fillRef>
+          <a:effectRef idx="0">
+            <a:schemeClr val="dk1"/>
+          </a:effectRef>
+          <a:fontRef idx="minor">
+            <a:schemeClr val="dk1"/>
+          </a:fontRef>
+        </p:style>
+        <p:txBody>
+          <a:bodyPr rtlCol="0" anchor="ctr"/>
+          <a:lstStyle/>
+          <a:p>
+            <a:pPr algn="ctr"/>
+            <a:endParaRPr lang="zh-CN" altLang="en-US" sz="1600"/>
+          </a:p>
+        </p:txBody>
+      </p:sp>
+      <p:cxnSp>
+        <p:nvCxnSpPr>
+          <p:cNvPr id="92" name="直接连接符 91">
+            <a:extLst>
+              <a:ext uri="{FF2B5EF4-FFF2-40B4-BE49-F238E27FC236}">
+                <a16:creationId xmlns:a16="http://schemas.microsoft.com/office/drawing/2014/main" id="{4B287AD6-3320-B1BB-50BF-EA840773E605}"/>
+              </a:ext>
+            </a:extLst>
+          </p:cNvPr>
+          <p:cNvCxnSpPr>
+            <a:stCxn id="33" idx="3"/>
+            <a:endCxn id="60" idx="7"/>
+          </p:cNvCxnSpPr>
+          <p:nvPr/>
+        </p:nvCxnSpPr>
+        <p:spPr>
+          <a:xfrm flipH="1">
+            <a:off x="3043104" y="1479686"/>
+            <a:ext cx="719638" cy="371633"/>
+          </a:xfrm>
+          <a:prstGeom prst="line">
+            <a:avLst/>
+          </a:prstGeom>
+          <a:ln w="9525" cap="flat" cmpd="sng" algn="ctr">
+            <a:solidFill>
+              <a:schemeClr val="dk1"/>
+            </a:solidFill>
+            <a:prstDash val="dash"/>
+            <a:round/>
+            <a:headEnd type="none" w="med" len="med"/>
+            <a:tailEnd type="none" w="med" len="med"/>
+          </a:ln>
+        </p:spPr>
+        <p:style>
+          <a:lnRef idx="0">
+            <a:scrgbClr r="0" g="0" b="0"/>
+          </a:lnRef>
+          <a:fillRef idx="0">
+            <a:scrgbClr r="0" g="0" b="0"/>
+          </a:fillRef>
+          <a:effectRef idx="0">
+            <a:scrgbClr r="0" g="0" b="0"/>
+          </a:effectRef>
+          <a:fontRef idx="minor">
+            <a:schemeClr val="tx1"/>
+          </a:fontRef>
+        </p:style>
+      </p:cxnSp>
+      <p:cxnSp>
+        <p:nvCxnSpPr>
+          <p:cNvPr id="94" name="直接连接符 93">
+            <a:extLst>
+              <a:ext uri="{FF2B5EF4-FFF2-40B4-BE49-F238E27FC236}">
+                <a16:creationId xmlns:a16="http://schemas.microsoft.com/office/drawing/2014/main" id="{B48A71A1-0C04-8657-55F3-0BCC95DD48F0}"/>
+              </a:ext>
+            </a:extLst>
+          </p:cNvPr>
+          <p:cNvCxnSpPr>
+            <a:stCxn id="34" idx="3"/>
+            <a:endCxn id="62" idx="7"/>
+          </p:cNvCxnSpPr>
+          <p:nvPr/>
+        </p:nvCxnSpPr>
+        <p:spPr>
+          <a:xfrm flipH="1">
+            <a:off x="6263774" y="1489447"/>
+            <a:ext cx="680578" cy="364105"/>
+          </a:xfrm>
+          <a:prstGeom prst="line">
+            <a:avLst/>
+          </a:prstGeom>
+          <a:ln w="9525" cap="flat" cmpd="sng" algn="ctr">
+            <a:solidFill>
+              <a:schemeClr val="dk1"/>
+            </a:solidFill>
+            <a:prstDash val="dash"/>
+            <a:round/>
+            <a:headEnd type="none" w="med" len="med"/>
+            <a:tailEnd type="none" w="med" len="med"/>
+          </a:ln>
+        </p:spPr>
+        <p:style>
+          <a:lnRef idx="0">
+            <a:scrgbClr r="0" g="0" b="0"/>
+          </a:lnRef>
+          <a:fillRef idx="0">
+            <a:scrgbClr r="0" g="0" b="0"/>
+          </a:fillRef>
+          <a:effectRef idx="0">
+            <a:scrgbClr r="0" g="0" b="0"/>
+          </a:effectRef>
+          <a:fontRef idx="minor">
+            <a:schemeClr val="tx1"/>
+          </a:fontRef>
+        </p:style>
+      </p:cxnSp>
+      <p:cxnSp>
+        <p:nvCxnSpPr>
+          <p:cNvPr id="96" name="直接连接符 95">
+            <a:extLst>
+              <a:ext uri="{FF2B5EF4-FFF2-40B4-BE49-F238E27FC236}">
+                <a16:creationId xmlns:a16="http://schemas.microsoft.com/office/drawing/2014/main" id="{6FD3441B-252B-3C8E-F556-5F3709B482DA}"/>
+              </a:ext>
+            </a:extLst>
+          </p:cNvPr>
+          <p:cNvCxnSpPr>
+            <a:endCxn id="81" idx="0"/>
+          </p:cNvCxnSpPr>
+          <p:nvPr/>
+        </p:nvCxnSpPr>
+        <p:spPr>
+          <a:xfrm flipH="1">
+            <a:off x="2505265" y="2135832"/>
+            <a:ext cx="253326" cy="362625"/>
+          </a:xfrm>
+          <a:prstGeom prst="line">
+            <a:avLst/>
+          </a:prstGeom>
+          <a:ln w="9525" cap="flat" cmpd="sng" algn="ctr">
+            <a:solidFill>
+              <a:schemeClr val="dk1"/>
+            </a:solidFill>
+            <a:prstDash val="dash"/>
+            <a:round/>
+            <a:headEnd type="none" w="med" len="med"/>
+            <a:tailEnd type="none" w="med" len="med"/>
+          </a:ln>
+        </p:spPr>
+        <p:style>
+          <a:lnRef idx="0">
+            <a:scrgbClr r="0" g="0" b="0"/>
+          </a:lnRef>
+          <a:fillRef idx="0">
+            <a:scrgbClr r="0" g="0" b="0"/>
+          </a:fillRef>
+          <a:effectRef idx="0">
+            <a:scrgbClr r="0" g="0" b="0"/>
+          </a:effectRef>
+          <a:fontRef idx="minor">
+            <a:schemeClr val="tx1"/>
+          </a:fontRef>
+        </p:style>
+      </p:cxnSp>
+      <p:cxnSp>
+        <p:nvCxnSpPr>
+          <p:cNvPr id="98" name="直接连接符 97">
+            <a:extLst>
+              <a:ext uri="{FF2B5EF4-FFF2-40B4-BE49-F238E27FC236}">
+                <a16:creationId xmlns:a16="http://schemas.microsoft.com/office/drawing/2014/main" id="{C9D6C8EB-9D8A-F8EF-169C-9E212C980A5E}"/>
+              </a:ext>
+            </a:extLst>
+          </p:cNvPr>
+          <p:cNvCxnSpPr>
+            <a:stCxn id="60" idx="5"/>
+            <a:endCxn id="83" idx="0"/>
+          </p:cNvCxnSpPr>
+          <p:nvPr/>
+        </p:nvCxnSpPr>
+        <p:spPr>
+          <a:xfrm>
+            <a:off x="3043104" y="2087017"/>
+            <a:ext cx="185662" cy="411440"/>
+          </a:xfrm>
+          <a:prstGeom prst="line">
+            <a:avLst/>
+          </a:prstGeom>
+          <a:ln w="9525" cap="flat" cmpd="sng" algn="ctr">
+            <a:solidFill>
+              <a:schemeClr val="dk1"/>
+            </a:solidFill>
+            <a:prstDash val="dash"/>
+            <a:round/>
+            <a:headEnd type="none" w="med" len="med"/>
+            <a:tailEnd type="none" w="med" len="med"/>
+          </a:ln>
+        </p:spPr>
+        <p:style>
+          <a:lnRef idx="0">
+            <a:scrgbClr r="0" g="0" b="0"/>
+          </a:lnRef>
+          <a:fillRef idx="0">
+            <a:scrgbClr r="0" g="0" b="0"/>
+          </a:fillRef>
+          <a:effectRef idx="0">
+            <a:scrgbClr r="0" g="0" b="0"/>
+          </a:effectRef>
+          <a:fontRef idx="minor">
+            <a:schemeClr val="tx1"/>
+          </a:fontRef>
+        </p:style>
+      </p:cxnSp>
+      <p:cxnSp>
+        <p:nvCxnSpPr>
+          <p:cNvPr id="100" name="直接连接符 99">
+            <a:extLst>
+              <a:ext uri="{FF2B5EF4-FFF2-40B4-BE49-F238E27FC236}">
+                <a16:creationId xmlns:a16="http://schemas.microsoft.com/office/drawing/2014/main" id="{FCEEE18D-0605-7F85-FDA8-10E06559DFE7}"/>
+              </a:ext>
+            </a:extLst>
+          </p:cNvPr>
+          <p:cNvCxnSpPr>
+            <a:stCxn id="40" idx="5"/>
+            <a:endCxn id="85" idx="0"/>
+          </p:cNvCxnSpPr>
+          <p:nvPr/>
+        </p:nvCxnSpPr>
+        <p:spPr>
+          <a:xfrm>
+            <a:off x="4773389" y="2087017"/>
+            <a:ext cx="326792" cy="411440"/>
+          </a:xfrm>
+          <a:prstGeom prst="line">
+            <a:avLst/>
+          </a:prstGeom>
+          <a:ln w="9525" cap="flat" cmpd="sng" algn="ctr">
+            <a:solidFill>
+              <a:schemeClr val="dk1"/>
+            </a:solidFill>
+            <a:prstDash val="dash"/>
+            <a:round/>
+            <a:headEnd type="none" w="med" len="med"/>
+            <a:tailEnd type="none" w="med" len="med"/>
+          </a:ln>
+        </p:spPr>
+        <p:style>
+          <a:lnRef idx="0">
+            <a:scrgbClr r="0" g="0" b="0"/>
+          </a:lnRef>
+          <a:fillRef idx="0">
+            <a:scrgbClr r="0" g="0" b="0"/>
+          </a:fillRef>
+          <a:effectRef idx="0">
+            <a:scrgbClr r="0" g="0" b="0"/>
+          </a:effectRef>
+          <a:fontRef idx="minor">
+            <a:schemeClr val="tx1"/>
+          </a:fontRef>
+        </p:style>
+      </p:cxnSp>
+      <p:cxnSp>
+        <p:nvCxnSpPr>
+          <p:cNvPr id="102" name="直接连接符 101">
+            <a:extLst>
+              <a:ext uri="{FF2B5EF4-FFF2-40B4-BE49-F238E27FC236}">
+                <a16:creationId xmlns:a16="http://schemas.microsoft.com/office/drawing/2014/main" id="{59C1D8CA-6AEC-2381-0B96-568C0A37BEA7}"/>
+              </a:ext>
+            </a:extLst>
+          </p:cNvPr>
+          <p:cNvCxnSpPr>
+            <a:stCxn id="62" idx="3"/>
+            <a:endCxn id="64" idx="0"/>
+          </p:cNvCxnSpPr>
+          <p:nvPr/>
+        </p:nvCxnSpPr>
+        <p:spPr>
+          <a:xfrm flipH="1">
+            <a:off x="5832789" y="2089250"/>
+            <a:ext cx="195287" cy="409207"/>
+          </a:xfrm>
+          <a:prstGeom prst="line">
+            <a:avLst/>
+          </a:prstGeom>
+          <a:ln w="9525" cap="flat" cmpd="sng" algn="ctr">
+            <a:solidFill>
+              <a:schemeClr val="dk1"/>
+            </a:solidFill>
+            <a:prstDash val="dash"/>
+            <a:round/>
+            <a:headEnd type="none" w="med" len="med"/>
+            <a:tailEnd type="none" w="med" len="med"/>
+          </a:ln>
+        </p:spPr>
+        <p:style>
+          <a:lnRef idx="0">
+            <a:scrgbClr r="0" g="0" b="0"/>
+          </a:lnRef>
+          <a:fillRef idx="0">
+            <a:scrgbClr r="0" g="0" b="0"/>
+          </a:fillRef>
+          <a:effectRef idx="0">
+            <a:scrgbClr r="0" g="0" b="0"/>
+          </a:effectRef>
+          <a:fontRef idx="minor">
+            <a:schemeClr val="tx1"/>
+          </a:fontRef>
+        </p:style>
+      </p:cxnSp>
+      <p:cxnSp>
+        <p:nvCxnSpPr>
+          <p:cNvPr id="104" name="直接连接符 103">
+            <a:extLst>
+              <a:ext uri="{FF2B5EF4-FFF2-40B4-BE49-F238E27FC236}">
+                <a16:creationId xmlns:a16="http://schemas.microsoft.com/office/drawing/2014/main" id="{C076FDBF-6505-97F6-7BEB-CD3EBD158829}"/>
+              </a:ext>
+            </a:extLst>
+          </p:cNvPr>
+          <p:cNvCxnSpPr>
+            <a:stCxn id="62" idx="5"/>
+            <a:endCxn id="90" idx="0"/>
+          </p:cNvCxnSpPr>
+          <p:nvPr/>
+        </p:nvCxnSpPr>
+        <p:spPr>
+          <a:xfrm>
+            <a:off x="6263774" y="2089250"/>
+            <a:ext cx="287968" cy="409207"/>
+          </a:xfrm>
+          <a:prstGeom prst="line">
+            <a:avLst/>
+          </a:prstGeom>
+          <a:ln w="9525" cap="flat" cmpd="sng" algn="ctr">
+            <a:solidFill>
+              <a:schemeClr val="dk1"/>
+            </a:solidFill>
+            <a:prstDash val="dash"/>
+            <a:round/>
+            <a:headEnd type="none" w="med" len="med"/>
+            <a:tailEnd type="none" w="med" len="med"/>
+          </a:ln>
+        </p:spPr>
+        <p:style>
+          <a:lnRef idx="0">
+            <a:scrgbClr r="0" g="0" b="0"/>
+          </a:lnRef>
+          <a:fillRef idx="0">
+            <a:scrgbClr r="0" g="0" b="0"/>
+          </a:fillRef>
+          <a:effectRef idx="0">
+            <a:scrgbClr r="0" g="0" b="0"/>
+          </a:effectRef>
+          <a:fontRef idx="minor">
+            <a:schemeClr val="tx1"/>
+          </a:fontRef>
+        </p:style>
+      </p:cxnSp>
+      <p:sp>
+        <p:nvSpPr>
+          <p:cNvPr id="105" name="文本框 104">
+            <a:extLst>
+              <a:ext uri="{FF2B5EF4-FFF2-40B4-BE49-F238E27FC236}">
+                <a16:creationId xmlns:a16="http://schemas.microsoft.com/office/drawing/2014/main" id="{90AE19D3-7DC0-BEC9-074F-2F5ADDD1523C}"/>
+              </a:ext>
+            </a:extLst>
+          </p:cNvPr>
+          <p:cNvSpPr txBox="1"/>
+          <p:nvPr/>
+        </p:nvSpPr>
+        <p:spPr>
+          <a:xfrm>
+            <a:off x="5165884" y="581046"/>
+            <a:ext cx="279244" cy="307777"/>
+          </a:xfrm>
+          <a:prstGeom prst="rect">
+            <a:avLst/>
+          </a:prstGeom>
+          <a:noFill/>
+        </p:spPr>
+        <p:txBody>
+          <a:bodyPr wrap="none" rtlCol="0">
+            <a:spAutoFit/>
+          </a:bodyPr>
+          <a:lstStyle/>
+          <a:p>
+            <a:r>
+              <a:rPr lang="en-US" altLang="zh-CN" sz="1400"/>
+              <a:t>1</a:t>
+            </a:r>
+            <a:endParaRPr lang="zh-CN" altLang="en-US" sz="1400"/>
+          </a:p>
+        </p:txBody>
+      </p:sp>
+      <p:sp>
+        <p:nvSpPr>
+          <p:cNvPr id="107" name="文本框 106">
+            <a:extLst>
+              <a:ext uri="{FF2B5EF4-FFF2-40B4-BE49-F238E27FC236}">
+                <a16:creationId xmlns:a16="http://schemas.microsoft.com/office/drawing/2014/main" id="{18F6FDA2-E525-465E-A411-91680028A6FD}"/>
+              </a:ext>
+            </a:extLst>
+          </p:cNvPr>
+          <p:cNvSpPr txBox="1"/>
+          <p:nvPr/>
+        </p:nvSpPr>
+        <p:spPr>
+          <a:xfrm>
+            <a:off x="3490908" y="1057771"/>
+            <a:ext cx="279244" cy="307777"/>
+          </a:xfrm>
+          <a:prstGeom prst="rect">
+            <a:avLst/>
+          </a:prstGeom>
+          <a:noFill/>
+        </p:spPr>
+        <p:txBody>
+          <a:bodyPr wrap="none" rtlCol="0">
+            <a:spAutoFit/>
+          </a:bodyPr>
+          <a:lstStyle/>
+          <a:p>
+            <a:r>
+              <a:rPr lang="en-US" altLang="zh-CN" sz="1400"/>
+              <a:t>2</a:t>
+            </a:r>
+            <a:endParaRPr lang="zh-CN" altLang="en-US" sz="1400"/>
+          </a:p>
+        </p:txBody>
+      </p:sp>
+      <p:sp>
+        <p:nvSpPr>
+          <p:cNvPr id="109" name="文本框 108">
+            <a:extLst>
+              <a:ext uri="{FF2B5EF4-FFF2-40B4-BE49-F238E27FC236}">
+                <a16:creationId xmlns:a16="http://schemas.microsoft.com/office/drawing/2014/main" id="{522D7B32-40A1-F842-00A3-C20362C38509}"/>
+              </a:ext>
+            </a:extLst>
+          </p:cNvPr>
+          <p:cNvSpPr txBox="1"/>
+          <p:nvPr/>
+        </p:nvSpPr>
+        <p:spPr>
+          <a:xfrm>
+            <a:off x="7874525" y="1661390"/>
+            <a:ext cx="279244" cy="307777"/>
+          </a:xfrm>
+          <a:prstGeom prst="rect">
+            <a:avLst/>
+          </a:prstGeom>
+          <a:noFill/>
+        </p:spPr>
+        <p:txBody>
+          <a:bodyPr wrap="none" rtlCol="0">
+            <a:spAutoFit/>
+          </a:bodyPr>
+          <a:lstStyle/>
+          <a:p>
+            <a:r>
+              <a:rPr lang="en-US" altLang="zh-CN" sz="1400"/>
+              <a:t>7</a:t>
+            </a:r>
+            <a:endParaRPr lang="zh-CN" altLang="en-US" sz="1400"/>
+          </a:p>
+        </p:txBody>
+      </p:sp>
+      <p:sp>
+        <p:nvSpPr>
+          <p:cNvPr id="111" name="文本框 110">
+            <a:extLst>
+              <a:ext uri="{FF2B5EF4-FFF2-40B4-BE49-F238E27FC236}">
+                <a16:creationId xmlns:a16="http://schemas.microsoft.com/office/drawing/2014/main" id="{F55808E2-F74B-D975-89B5-0BDBA8AC583C}"/>
+              </a:ext>
+            </a:extLst>
+          </p:cNvPr>
+          <p:cNvSpPr txBox="1"/>
+          <p:nvPr/>
+        </p:nvSpPr>
+        <p:spPr>
+          <a:xfrm>
+            <a:off x="5706704" y="1661391"/>
+            <a:ext cx="279244" cy="307777"/>
+          </a:xfrm>
+          <a:prstGeom prst="rect">
+            <a:avLst/>
+          </a:prstGeom>
+          <a:noFill/>
+        </p:spPr>
+        <p:txBody>
+          <a:bodyPr wrap="none" rtlCol="0">
+            <a:spAutoFit/>
+          </a:bodyPr>
+          <a:lstStyle/>
+          <a:p>
+            <a:r>
+              <a:rPr lang="en-US" altLang="zh-CN" sz="1400"/>
+              <a:t>6</a:t>
+            </a:r>
+            <a:endParaRPr lang="zh-CN" altLang="en-US" sz="1400"/>
+          </a:p>
+        </p:txBody>
+      </p:sp>
+      <p:sp>
+        <p:nvSpPr>
+          <p:cNvPr id="113" name="文本框 112">
+            <a:extLst>
+              <a:ext uri="{FF2B5EF4-FFF2-40B4-BE49-F238E27FC236}">
+                <a16:creationId xmlns:a16="http://schemas.microsoft.com/office/drawing/2014/main" id="{7F98B493-2DE5-10BE-AD9A-EC8135895847}"/>
+              </a:ext>
+            </a:extLst>
+          </p:cNvPr>
+          <p:cNvSpPr txBox="1"/>
+          <p:nvPr/>
+        </p:nvSpPr>
+        <p:spPr>
+          <a:xfrm>
+            <a:off x="4254245" y="1685456"/>
+            <a:ext cx="279244" cy="307777"/>
+          </a:xfrm>
+          <a:prstGeom prst="rect">
+            <a:avLst/>
+          </a:prstGeom>
+          <a:noFill/>
+        </p:spPr>
+        <p:txBody>
+          <a:bodyPr wrap="none" rtlCol="0">
+            <a:spAutoFit/>
+          </a:bodyPr>
+          <a:lstStyle/>
+          <a:p>
+            <a:r>
+              <a:rPr lang="en-US" altLang="zh-CN" sz="1400"/>
+              <a:t>5</a:t>
+            </a:r>
+            <a:endParaRPr lang="zh-CN" altLang="en-US" sz="1400"/>
+          </a:p>
+        </p:txBody>
+      </p:sp>
+      <p:sp>
+        <p:nvSpPr>
+          <p:cNvPr id="115" name="文本框 114">
+            <a:extLst>
+              <a:ext uri="{FF2B5EF4-FFF2-40B4-BE49-F238E27FC236}">
+                <a16:creationId xmlns:a16="http://schemas.microsoft.com/office/drawing/2014/main" id="{2479C8E1-A573-B9B1-839B-AC16FABEBA46}"/>
+              </a:ext>
+            </a:extLst>
+          </p:cNvPr>
+          <p:cNvSpPr txBox="1"/>
+          <p:nvPr/>
+        </p:nvSpPr>
+        <p:spPr>
+          <a:xfrm>
+            <a:off x="2430822" y="1665502"/>
+            <a:ext cx="279244" cy="307777"/>
+          </a:xfrm>
+          <a:prstGeom prst="rect">
+            <a:avLst/>
+          </a:prstGeom>
+          <a:noFill/>
+        </p:spPr>
+        <p:txBody>
+          <a:bodyPr wrap="none" rtlCol="0">
+            <a:spAutoFit/>
+          </a:bodyPr>
+          <a:lstStyle/>
+          <a:p>
+            <a:r>
+              <a:rPr lang="en-US" altLang="zh-CN" sz="1400"/>
+              <a:t>4</a:t>
+            </a:r>
+            <a:endParaRPr lang="zh-CN" altLang="en-US" sz="1400"/>
+          </a:p>
+        </p:txBody>
+      </p:sp>
+      <p:sp>
+        <p:nvSpPr>
+          <p:cNvPr id="117" name="文本框 116">
+            <a:extLst>
+              <a:ext uri="{FF2B5EF4-FFF2-40B4-BE49-F238E27FC236}">
+                <a16:creationId xmlns:a16="http://schemas.microsoft.com/office/drawing/2014/main" id="{83FCD7F1-F948-7CF0-A9DE-4E9C62FF287F}"/>
+              </a:ext>
+            </a:extLst>
+          </p:cNvPr>
+          <p:cNvSpPr txBox="1"/>
+          <p:nvPr/>
+        </p:nvSpPr>
+        <p:spPr>
+          <a:xfrm>
+            <a:off x="7216180" y="1070538"/>
+            <a:ext cx="279244" cy="307777"/>
+          </a:xfrm>
+          <a:prstGeom prst="rect">
+            <a:avLst/>
+          </a:prstGeom>
+          <a:noFill/>
+        </p:spPr>
+        <p:txBody>
+          <a:bodyPr wrap="none" rtlCol="0">
+            <a:spAutoFit/>
+          </a:bodyPr>
+          <a:lstStyle/>
+          <a:p>
+            <a:r>
+              <a:rPr lang="en-US" altLang="zh-CN" sz="1400"/>
+              <a:t>3</a:t>
+            </a:r>
+            <a:endParaRPr lang="zh-CN" altLang="en-US" sz="1400"/>
+          </a:p>
+        </p:txBody>
+      </p:sp>
+      <p:sp>
+        <p:nvSpPr>
+          <p:cNvPr id="119" name="文本框 118">
+            <a:extLst>
+              <a:ext uri="{FF2B5EF4-FFF2-40B4-BE49-F238E27FC236}">
+                <a16:creationId xmlns:a16="http://schemas.microsoft.com/office/drawing/2014/main" id="{4094D95D-972D-5731-7795-C86E213D9336}"/>
+              </a:ext>
+            </a:extLst>
+          </p:cNvPr>
+          <p:cNvSpPr txBox="1"/>
+          <p:nvPr/>
+        </p:nvSpPr>
+        <p:spPr>
+          <a:xfrm>
+            <a:off x="4771331" y="2824972"/>
+            <a:ext cx="373820" cy="307777"/>
+          </a:xfrm>
+          <a:prstGeom prst="rect">
+            <a:avLst/>
+          </a:prstGeom>
+          <a:noFill/>
+        </p:spPr>
+        <p:txBody>
+          <a:bodyPr wrap="none" rtlCol="0">
+            <a:spAutoFit/>
+          </a:bodyPr>
+          <a:lstStyle/>
+          <a:p>
+            <a:r>
+              <a:rPr lang="en-US" altLang="zh-CN" sz="1400"/>
+              <a:t>11</a:t>
+            </a:r>
+            <a:endParaRPr lang="zh-CN" altLang="en-US" sz="1400"/>
+          </a:p>
+        </p:txBody>
+      </p:sp>
+      <p:sp>
+        <p:nvSpPr>
+          <p:cNvPr id="121" name="文本框 120">
+            <a:extLst>
+              <a:ext uri="{FF2B5EF4-FFF2-40B4-BE49-F238E27FC236}">
+                <a16:creationId xmlns:a16="http://schemas.microsoft.com/office/drawing/2014/main" id="{AE455C30-A97E-5860-B4DD-16C94FDF3C48}"/>
+              </a:ext>
+            </a:extLst>
+          </p:cNvPr>
+          <p:cNvSpPr txBox="1"/>
+          <p:nvPr/>
+        </p:nvSpPr>
+        <p:spPr>
+          <a:xfrm>
+            <a:off x="3777761" y="2837818"/>
+            <a:ext cx="373820" cy="307777"/>
+          </a:xfrm>
+          <a:prstGeom prst="rect">
+            <a:avLst/>
+          </a:prstGeom>
+          <a:noFill/>
+        </p:spPr>
+        <p:txBody>
+          <a:bodyPr wrap="none" rtlCol="0">
+            <a:spAutoFit/>
+          </a:bodyPr>
+          <a:lstStyle/>
+          <a:p>
+            <a:r>
+              <a:rPr lang="en-US" altLang="zh-CN" sz="1400"/>
+              <a:t>10</a:t>
+            </a:r>
+            <a:endParaRPr lang="zh-CN" altLang="en-US" sz="1400"/>
+          </a:p>
+        </p:txBody>
+      </p:sp>
+      <p:sp>
+        <p:nvSpPr>
+          <p:cNvPr id="123" name="文本框 122">
+            <a:extLst>
+              <a:ext uri="{FF2B5EF4-FFF2-40B4-BE49-F238E27FC236}">
+                <a16:creationId xmlns:a16="http://schemas.microsoft.com/office/drawing/2014/main" id="{527AF0F8-C013-9D03-4625-607D0A2EBBDB}"/>
+              </a:ext>
+            </a:extLst>
+          </p:cNvPr>
+          <p:cNvSpPr txBox="1"/>
+          <p:nvPr/>
+        </p:nvSpPr>
+        <p:spPr>
+          <a:xfrm>
+            <a:off x="3028931" y="2837818"/>
+            <a:ext cx="279244" cy="307777"/>
+          </a:xfrm>
+          <a:prstGeom prst="rect">
+            <a:avLst/>
+          </a:prstGeom>
+          <a:noFill/>
+        </p:spPr>
+        <p:txBody>
+          <a:bodyPr wrap="none" rtlCol="0">
+            <a:spAutoFit/>
+          </a:bodyPr>
+          <a:lstStyle/>
+          <a:p>
+            <a:r>
+              <a:rPr lang="en-US" altLang="zh-CN" sz="1400"/>
+              <a:t>9</a:t>
+            </a:r>
+            <a:endParaRPr lang="zh-CN" altLang="en-US" sz="1400"/>
+          </a:p>
+        </p:txBody>
+      </p:sp>
+      <p:sp>
+        <p:nvSpPr>
+          <p:cNvPr id="125" name="文本框 124">
+            <a:extLst>
+              <a:ext uri="{FF2B5EF4-FFF2-40B4-BE49-F238E27FC236}">
+                <a16:creationId xmlns:a16="http://schemas.microsoft.com/office/drawing/2014/main" id="{CBF19327-ABA1-B61C-103F-0EDC76CEFEDE}"/>
+              </a:ext>
+            </a:extLst>
+          </p:cNvPr>
+          <p:cNvSpPr txBox="1"/>
+          <p:nvPr/>
+        </p:nvSpPr>
+        <p:spPr>
+          <a:xfrm>
+            <a:off x="2020034" y="2829512"/>
+            <a:ext cx="279244" cy="307777"/>
+          </a:xfrm>
+          <a:prstGeom prst="rect">
+            <a:avLst/>
+          </a:prstGeom>
+          <a:noFill/>
+        </p:spPr>
+        <p:txBody>
+          <a:bodyPr wrap="none" rtlCol="0">
+            <a:spAutoFit/>
+          </a:bodyPr>
+          <a:lstStyle/>
+          <a:p>
+            <a:r>
+              <a:rPr lang="en-US" altLang="zh-CN" sz="1400"/>
+              <a:t>8</a:t>
+            </a:r>
+            <a:endParaRPr lang="zh-CN" altLang="en-US" sz="1400"/>
+          </a:p>
+        </p:txBody>
+      </p:sp>
+      <p:sp>
+        <p:nvSpPr>
+          <p:cNvPr id="127" name="文本框 126">
+            <a:extLst>
+              <a:ext uri="{FF2B5EF4-FFF2-40B4-BE49-F238E27FC236}">
+                <a16:creationId xmlns:a16="http://schemas.microsoft.com/office/drawing/2014/main" id="{DE35FD23-9CFD-D30F-26A5-A2B3A16C3D25}"/>
+              </a:ext>
+            </a:extLst>
+          </p:cNvPr>
+          <p:cNvSpPr txBox="1"/>
+          <p:nvPr/>
+        </p:nvSpPr>
+        <p:spPr>
+          <a:xfrm>
+            <a:off x="7060951" y="2837817"/>
+            <a:ext cx="373820" cy="307777"/>
+          </a:xfrm>
+          <a:prstGeom prst="rect">
+            <a:avLst/>
+          </a:prstGeom>
+          <a:noFill/>
+        </p:spPr>
+        <p:txBody>
+          <a:bodyPr wrap="none" rtlCol="0">
+            <a:spAutoFit/>
+          </a:bodyPr>
+          <a:lstStyle/>
+          <a:p>
+            <a:r>
+              <a:rPr lang="en-US" altLang="zh-CN" sz="1400"/>
+              <a:t>14</a:t>
+            </a:r>
+            <a:endParaRPr lang="zh-CN" altLang="en-US" sz="1400"/>
+          </a:p>
+        </p:txBody>
+      </p:sp>
+      <p:sp>
+        <p:nvSpPr>
+          <p:cNvPr id="129" name="文本框 128">
+            <a:extLst>
+              <a:ext uri="{FF2B5EF4-FFF2-40B4-BE49-F238E27FC236}">
+                <a16:creationId xmlns:a16="http://schemas.microsoft.com/office/drawing/2014/main" id="{DA63B433-0AA8-ECEB-FFA3-B80134055ECF}"/>
+              </a:ext>
+            </a:extLst>
+          </p:cNvPr>
+          <p:cNvSpPr txBox="1"/>
+          <p:nvPr/>
+        </p:nvSpPr>
+        <p:spPr>
+          <a:xfrm>
+            <a:off x="6326761" y="2824970"/>
+            <a:ext cx="373820" cy="307777"/>
+          </a:xfrm>
+          <a:prstGeom prst="rect">
+            <a:avLst/>
+          </a:prstGeom>
+          <a:noFill/>
+        </p:spPr>
+        <p:txBody>
+          <a:bodyPr wrap="none" rtlCol="0">
+            <a:spAutoFit/>
+          </a:bodyPr>
+          <a:lstStyle/>
+          <a:p>
+            <a:r>
+              <a:rPr lang="en-US" altLang="zh-CN" sz="1400"/>
+              <a:t>13</a:t>
+            </a:r>
+            <a:endParaRPr lang="zh-CN" altLang="en-US" sz="1400"/>
+          </a:p>
+        </p:txBody>
+      </p:sp>
+      <p:sp>
+        <p:nvSpPr>
+          <p:cNvPr id="131" name="文本框 130">
+            <a:extLst>
+              <a:ext uri="{FF2B5EF4-FFF2-40B4-BE49-F238E27FC236}">
+                <a16:creationId xmlns:a16="http://schemas.microsoft.com/office/drawing/2014/main" id="{E3A8D3DC-E427-90F2-215A-C76BC4D9F3D1}"/>
+              </a:ext>
+            </a:extLst>
+          </p:cNvPr>
+          <p:cNvSpPr txBox="1"/>
+          <p:nvPr/>
+        </p:nvSpPr>
+        <p:spPr>
+          <a:xfrm>
+            <a:off x="5592571" y="2824971"/>
+            <a:ext cx="373820" cy="307777"/>
+          </a:xfrm>
+          <a:prstGeom prst="rect">
+            <a:avLst/>
+          </a:prstGeom>
+          <a:noFill/>
+        </p:spPr>
+        <p:txBody>
+          <a:bodyPr wrap="none" rtlCol="0">
+            <a:spAutoFit/>
+          </a:bodyPr>
+          <a:lstStyle/>
+          <a:p>
+            <a:r>
+              <a:rPr lang="en-US" altLang="zh-CN" sz="1400"/>
+              <a:t>12</a:t>
+            </a:r>
+            <a:endParaRPr lang="zh-CN" altLang="en-US" sz="1400"/>
+          </a:p>
+        </p:txBody>
+      </p:sp>
+      <p:sp>
+        <p:nvSpPr>
+          <p:cNvPr id="133" name="文本框 132">
+            <a:extLst>
+              <a:ext uri="{FF2B5EF4-FFF2-40B4-BE49-F238E27FC236}">
+                <a16:creationId xmlns:a16="http://schemas.microsoft.com/office/drawing/2014/main" id="{DA32FC20-B3F1-ED22-BFEC-3D4BD24DE18F}"/>
+              </a:ext>
+            </a:extLst>
+          </p:cNvPr>
+          <p:cNvSpPr txBox="1"/>
+          <p:nvPr/>
+        </p:nvSpPr>
+        <p:spPr>
+          <a:xfrm>
+            <a:off x="7995375" y="2837817"/>
+            <a:ext cx="373820" cy="307777"/>
+          </a:xfrm>
+          <a:prstGeom prst="rect">
+            <a:avLst/>
+          </a:prstGeom>
+          <a:noFill/>
+        </p:spPr>
+        <p:txBody>
+          <a:bodyPr wrap="none" rtlCol="0">
+            <a:spAutoFit/>
+          </a:bodyPr>
+          <a:lstStyle/>
+          <a:p>
+            <a:r>
+              <a:rPr lang="en-US" altLang="zh-CN" sz="1400"/>
+              <a:t>15</a:t>
+            </a:r>
+            <a:endParaRPr lang="zh-CN" altLang="en-US" sz="1400"/>
+          </a:p>
+        </p:txBody>
+      </p:sp>
+      <p:sp>
+        <p:nvSpPr>
+          <p:cNvPr id="134" name="文本框 133">
+            <a:extLst>
+              <a:ext uri="{FF2B5EF4-FFF2-40B4-BE49-F238E27FC236}">
+                <a16:creationId xmlns:a16="http://schemas.microsoft.com/office/drawing/2014/main" id="{4F4156E8-C013-B9FD-642C-03D88A8E9462}"/>
+              </a:ext>
+            </a:extLst>
+          </p:cNvPr>
+          <p:cNvSpPr txBox="1"/>
+          <p:nvPr/>
+        </p:nvSpPr>
+        <p:spPr>
+          <a:xfrm>
+            <a:off x="831076" y="3508221"/>
+            <a:ext cx="840295" cy="338554"/>
+          </a:xfrm>
+          <a:prstGeom prst="rect">
+            <a:avLst/>
+          </a:prstGeom>
+          <a:noFill/>
+        </p:spPr>
+        <p:txBody>
+          <a:bodyPr wrap="none" rtlCol="0">
+            <a:spAutoFit/>
+          </a:bodyPr>
+          <a:lstStyle/>
+          <a:p>
+            <a:r>
+              <a:rPr lang="en-US" altLang="zh-CN" sz="1600"/>
+              <a:t>nodes[]</a:t>
+            </a:r>
+            <a:endParaRPr lang="zh-CN" altLang="en-US" sz="1600"/>
+          </a:p>
+        </p:txBody>
+      </p:sp>
+      <p:grpSp>
+        <p:nvGrpSpPr>
+          <p:cNvPr id="142" name="组合 141">
+            <a:extLst>
+              <a:ext uri="{FF2B5EF4-FFF2-40B4-BE49-F238E27FC236}">
+                <a16:creationId xmlns:a16="http://schemas.microsoft.com/office/drawing/2014/main" id="{2C78CEB1-BD8E-71A6-A961-151B80A5A36B}"/>
+              </a:ext>
+            </a:extLst>
+          </p:cNvPr>
+          <p:cNvGrpSpPr/>
+          <p:nvPr/>
+        </p:nvGrpSpPr>
+        <p:grpSpPr>
+          <a:xfrm>
+            <a:off x="1772018" y="3539804"/>
+            <a:ext cx="1973146" cy="307777"/>
+            <a:chOff x="1875722" y="3531498"/>
+            <a:chExt cx="1973146" cy="307777"/>
+          </a:xfrm>
+        </p:grpSpPr>
+        <p:sp>
+          <p:nvSpPr>
+            <p:cNvPr id="135" name="矩形 134">
+              <a:extLst>
+                <a:ext uri="{FF2B5EF4-FFF2-40B4-BE49-F238E27FC236}">
+                  <a16:creationId xmlns:a16="http://schemas.microsoft.com/office/drawing/2014/main" id="{96AFBE68-4148-B4E5-5983-77CBB02A5CF9}"/>
+                </a:ext>
+              </a:extLst>
+            </p:cNvPr>
+            <p:cNvSpPr/>
+            <p:nvPr/>
+          </p:nvSpPr>
+          <p:spPr>
+            <a:xfrm>
+              <a:off x="1875722" y="3531498"/>
+              <a:ext cx="493610" cy="307777"/>
+            </a:xfrm>
+            <a:prstGeom prst="rect">
+              <a:avLst/>
+            </a:prstGeom>
+          </p:spPr>
+          <p:style>
+            <a:lnRef idx="2">
+              <a:schemeClr val="dk1"/>
+            </a:lnRef>
+            <a:fillRef idx="1">
+              <a:schemeClr val="lt1"/>
+            </a:fillRef>
+            <a:effectRef idx="0">
+              <a:schemeClr val="dk1"/>
+            </a:effectRef>
+            <a:fontRef idx="minor">
+              <a:schemeClr val="dk1"/>
+            </a:fontRef>
+          </p:style>
+          <p:txBody>
+            <a:bodyPr rtlCol="0" anchor="ctr"/>
+            <a:lstStyle/>
+            <a:p>
+              <a:pPr algn="ctr"/>
+              <a:r>
+                <a:rPr lang="en-US" altLang="zh-CN"/>
+                <a:t>- -</a:t>
+              </a:r>
+              <a:endParaRPr lang="zh-CN" altLang="en-US"/>
+            </a:p>
+          </p:txBody>
+        </p:sp>
+        <p:sp>
+          <p:nvSpPr>
+            <p:cNvPr id="137" name="矩形 136">
+              <a:extLst>
+                <a:ext uri="{FF2B5EF4-FFF2-40B4-BE49-F238E27FC236}">
+                  <a16:creationId xmlns:a16="http://schemas.microsoft.com/office/drawing/2014/main" id="{0A0D33D4-C378-E8CF-C22D-F65B55C23205}"/>
+                </a:ext>
+              </a:extLst>
+            </p:cNvPr>
+            <p:cNvSpPr/>
+            <p:nvPr/>
+          </p:nvSpPr>
+          <p:spPr>
+            <a:xfrm>
+              <a:off x="2368419" y="3531498"/>
+              <a:ext cx="493610" cy="307777"/>
+            </a:xfrm>
+            <a:prstGeom prst="rect">
+              <a:avLst/>
+            </a:prstGeom>
+          </p:spPr>
+          <p:style>
+            <a:lnRef idx="2">
+              <a:schemeClr val="dk1"/>
+            </a:lnRef>
+            <a:fillRef idx="1">
+              <a:schemeClr val="lt1"/>
+            </a:fillRef>
+            <a:effectRef idx="0">
+              <a:schemeClr val="dk1"/>
+            </a:effectRef>
+            <a:fontRef idx="minor">
+              <a:schemeClr val="dk1"/>
+            </a:fontRef>
+          </p:style>
+          <p:txBody>
+            <a:bodyPr rtlCol="0" anchor="ctr"/>
+            <a:lstStyle/>
+            <a:p>
+              <a:pPr algn="ctr"/>
+              <a:r>
+                <a:rPr lang="en-US" altLang="zh-CN"/>
+                <a:t>A</a:t>
+              </a:r>
+              <a:endParaRPr lang="zh-CN" altLang="en-US"/>
+            </a:p>
+          </p:txBody>
+        </p:sp>
+        <p:sp>
+          <p:nvSpPr>
+            <p:cNvPr id="139" name="矩形 138">
+              <a:extLst>
+                <a:ext uri="{FF2B5EF4-FFF2-40B4-BE49-F238E27FC236}">
+                  <a16:creationId xmlns:a16="http://schemas.microsoft.com/office/drawing/2014/main" id="{3DEEB16A-A16D-8099-A686-78945E90F331}"/>
+                </a:ext>
+              </a:extLst>
+            </p:cNvPr>
+            <p:cNvSpPr/>
+            <p:nvPr/>
+          </p:nvSpPr>
+          <p:spPr>
+            <a:xfrm>
+              <a:off x="2862561" y="3531498"/>
+              <a:ext cx="493610" cy="307777"/>
+            </a:xfrm>
+            <a:prstGeom prst="rect">
+              <a:avLst/>
+            </a:prstGeom>
+          </p:spPr>
+          <p:style>
+            <a:lnRef idx="2">
+              <a:schemeClr val="dk1"/>
+            </a:lnRef>
+            <a:fillRef idx="1">
+              <a:schemeClr val="lt1"/>
+            </a:fillRef>
+            <a:effectRef idx="0">
+              <a:schemeClr val="dk1"/>
+            </a:effectRef>
+            <a:fontRef idx="minor">
+              <a:schemeClr val="dk1"/>
+            </a:fontRef>
+          </p:style>
+          <p:txBody>
+            <a:bodyPr rtlCol="0" anchor="ctr"/>
+            <a:lstStyle/>
+            <a:p>
+              <a:pPr algn="ctr"/>
+              <a:r>
+                <a:rPr lang="en-US" altLang="zh-CN"/>
+                <a:t>B</a:t>
+              </a:r>
+              <a:endParaRPr lang="zh-CN" altLang="en-US"/>
+            </a:p>
+          </p:txBody>
+        </p:sp>
+        <p:sp>
+          <p:nvSpPr>
+            <p:cNvPr id="141" name="矩形 140">
+              <a:extLst>
+                <a:ext uri="{FF2B5EF4-FFF2-40B4-BE49-F238E27FC236}">
+                  <a16:creationId xmlns:a16="http://schemas.microsoft.com/office/drawing/2014/main" id="{2CBF1727-234A-2756-9C8B-031B4F6FB32F}"/>
+                </a:ext>
+              </a:extLst>
+            </p:cNvPr>
+            <p:cNvSpPr/>
+            <p:nvPr/>
+          </p:nvSpPr>
+          <p:spPr>
+            <a:xfrm>
+              <a:off x="3355258" y="3531498"/>
+              <a:ext cx="493610" cy="307777"/>
+            </a:xfrm>
+            <a:prstGeom prst="rect">
+              <a:avLst/>
+            </a:prstGeom>
+          </p:spPr>
+          <p:style>
+            <a:lnRef idx="2">
+              <a:schemeClr val="dk1"/>
+            </a:lnRef>
+            <a:fillRef idx="1">
+              <a:schemeClr val="lt1"/>
+            </a:fillRef>
+            <a:effectRef idx="0">
+              <a:schemeClr val="dk1"/>
+            </a:effectRef>
+            <a:fontRef idx="minor">
+              <a:schemeClr val="dk1"/>
+            </a:fontRef>
+          </p:style>
+          <p:txBody>
+            <a:bodyPr rtlCol="0" anchor="ctr"/>
+            <a:lstStyle/>
+            <a:p>
+              <a:pPr algn="ctr"/>
+              <a:r>
+                <a:rPr lang="en-US" altLang="zh-CN"/>
+                <a:t>C</a:t>
+              </a:r>
+              <a:endParaRPr lang="zh-CN" altLang="en-US"/>
+            </a:p>
+          </p:txBody>
+        </p:sp>
+      </p:grpSp>
+      <p:grpSp>
+        <p:nvGrpSpPr>
+          <p:cNvPr id="143" name="组合 142">
+            <a:extLst>
+              <a:ext uri="{FF2B5EF4-FFF2-40B4-BE49-F238E27FC236}">
+                <a16:creationId xmlns:a16="http://schemas.microsoft.com/office/drawing/2014/main" id="{401A9813-3407-063D-40FA-F538F02588CA}"/>
+              </a:ext>
+            </a:extLst>
+          </p:cNvPr>
+          <p:cNvGrpSpPr/>
+          <p:nvPr/>
+        </p:nvGrpSpPr>
+        <p:grpSpPr>
+          <a:xfrm>
+            <a:off x="3745164" y="3539803"/>
+            <a:ext cx="1973146" cy="307777"/>
+            <a:chOff x="1875722" y="3531498"/>
+            <a:chExt cx="1973146" cy="307777"/>
+          </a:xfrm>
+        </p:grpSpPr>
+        <p:sp>
+          <p:nvSpPr>
+            <p:cNvPr id="144" name="矩形 143">
+              <a:extLst>
+                <a:ext uri="{FF2B5EF4-FFF2-40B4-BE49-F238E27FC236}">
+                  <a16:creationId xmlns:a16="http://schemas.microsoft.com/office/drawing/2014/main" id="{4B8B0CD7-3D2B-0480-1E50-8877FF92F30A}"/>
+                </a:ext>
+              </a:extLst>
+            </p:cNvPr>
+            <p:cNvSpPr/>
+            <p:nvPr/>
+          </p:nvSpPr>
+          <p:spPr>
+            <a:xfrm>
+              <a:off x="1875722" y="3531498"/>
+              <a:ext cx="493610" cy="307777"/>
+            </a:xfrm>
+            <a:prstGeom prst="rect">
+              <a:avLst/>
+            </a:prstGeom>
+          </p:spPr>
+          <p:style>
+            <a:lnRef idx="2">
+              <a:schemeClr val="dk1"/>
+            </a:lnRef>
+            <a:fillRef idx="1">
+              <a:schemeClr val="lt1"/>
+            </a:fillRef>
+            <a:effectRef idx="0">
+              <a:schemeClr val="dk1"/>
+            </a:effectRef>
+            <a:fontRef idx="minor">
+              <a:schemeClr val="dk1"/>
+            </a:fontRef>
+          </p:style>
+          <p:txBody>
+            <a:bodyPr rtlCol="0" anchor="ctr"/>
+            <a:lstStyle/>
+            <a:p>
+              <a:pPr algn="ctr"/>
+              <a:r>
+                <a:rPr lang="en-US" altLang="zh-CN"/>
+                <a:t>- -</a:t>
+              </a:r>
+              <a:endParaRPr lang="zh-CN" altLang="en-US"/>
+            </a:p>
+          </p:txBody>
+        </p:sp>
+        <p:sp>
+          <p:nvSpPr>
+            <p:cNvPr id="145" name="矩形 144">
+              <a:extLst>
+                <a:ext uri="{FF2B5EF4-FFF2-40B4-BE49-F238E27FC236}">
+                  <a16:creationId xmlns:a16="http://schemas.microsoft.com/office/drawing/2014/main" id="{92B2A43B-03AE-6AC1-07CC-97A8D6E7F36E}"/>
+                </a:ext>
+              </a:extLst>
+            </p:cNvPr>
+            <p:cNvSpPr/>
+            <p:nvPr/>
+          </p:nvSpPr>
+          <p:spPr>
+            <a:xfrm>
+              <a:off x="2368419" y="3531498"/>
+              <a:ext cx="493610" cy="307777"/>
+            </a:xfrm>
+            <a:prstGeom prst="rect">
+              <a:avLst/>
+            </a:prstGeom>
+          </p:spPr>
+          <p:style>
+            <a:lnRef idx="2">
+              <a:schemeClr val="dk1"/>
+            </a:lnRef>
+            <a:fillRef idx="1">
+              <a:schemeClr val="lt1"/>
+            </a:fillRef>
+            <a:effectRef idx="0">
+              <a:schemeClr val="dk1"/>
+            </a:effectRef>
+            <a:fontRef idx="minor">
+              <a:schemeClr val="dk1"/>
+            </a:fontRef>
+          </p:style>
+          <p:txBody>
+            <a:bodyPr rtlCol="0" anchor="ctr"/>
+            <a:lstStyle/>
+            <a:p>
+              <a:pPr algn="ctr"/>
+              <a:r>
+                <a:rPr lang="en-US" altLang="zh-CN"/>
+                <a:t>D</a:t>
+              </a:r>
+              <a:endParaRPr lang="zh-CN" altLang="en-US"/>
+            </a:p>
+          </p:txBody>
+        </p:sp>
+        <p:sp>
+          <p:nvSpPr>
+            <p:cNvPr id="146" name="矩形 145">
+              <a:extLst>
+                <a:ext uri="{FF2B5EF4-FFF2-40B4-BE49-F238E27FC236}">
+                  <a16:creationId xmlns:a16="http://schemas.microsoft.com/office/drawing/2014/main" id="{76B58572-F44D-4955-29AF-F8053A2BC8ED}"/>
+                </a:ext>
+              </a:extLst>
+            </p:cNvPr>
+            <p:cNvSpPr/>
+            <p:nvPr/>
+          </p:nvSpPr>
+          <p:spPr>
+            <a:xfrm>
+              <a:off x="2862561" y="3531498"/>
+              <a:ext cx="493610" cy="307777"/>
+            </a:xfrm>
+            <a:prstGeom prst="rect">
+              <a:avLst/>
+            </a:prstGeom>
+          </p:spPr>
+          <p:style>
+            <a:lnRef idx="2">
+              <a:schemeClr val="dk1"/>
+            </a:lnRef>
+            <a:fillRef idx="1">
+              <a:schemeClr val="lt1"/>
+            </a:fillRef>
+            <a:effectRef idx="0">
+              <a:schemeClr val="dk1"/>
+            </a:effectRef>
+            <a:fontRef idx="minor">
+              <a:schemeClr val="dk1"/>
+            </a:fontRef>
+          </p:style>
+          <p:txBody>
+            <a:bodyPr rtlCol="0" anchor="ctr"/>
+            <a:lstStyle/>
+            <a:p>
+              <a:pPr algn="ctr"/>
+              <a:r>
+                <a:rPr lang="en-US" altLang="zh-CN"/>
+                <a:t>- -</a:t>
+              </a:r>
+              <a:endParaRPr lang="zh-CN" altLang="en-US"/>
+            </a:p>
+          </p:txBody>
+        </p:sp>
+        <p:sp>
+          <p:nvSpPr>
+            <p:cNvPr id="147" name="矩形 146">
+              <a:extLst>
+                <a:ext uri="{FF2B5EF4-FFF2-40B4-BE49-F238E27FC236}">
+                  <a16:creationId xmlns:a16="http://schemas.microsoft.com/office/drawing/2014/main" id="{99E9C33E-1E7E-149E-315B-005B37C2EF25}"/>
+                </a:ext>
+              </a:extLst>
+            </p:cNvPr>
+            <p:cNvSpPr/>
+            <p:nvPr/>
+          </p:nvSpPr>
+          <p:spPr>
+            <a:xfrm>
+              <a:off x="3355258" y="3531498"/>
+              <a:ext cx="493610" cy="307777"/>
+            </a:xfrm>
+            <a:prstGeom prst="rect">
+              <a:avLst/>
+            </a:prstGeom>
+          </p:spPr>
+          <p:style>
+            <a:lnRef idx="2">
+              <a:schemeClr val="dk1"/>
+            </a:lnRef>
+            <a:fillRef idx="1">
+              <a:schemeClr val="lt1"/>
+            </a:fillRef>
+            <a:effectRef idx="0">
+              <a:schemeClr val="dk1"/>
+            </a:effectRef>
+            <a:fontRef idx="minor">
+              <a:schemeClr val="dk1"/>
+            </a:fontRef>
+          </p:style>
+          <p:txBody>
+            <a:bodyPr rtlCol="0" anchor="ctr"/>
+            <a:lstStyle/>
+            <a:p>
+              <a:pPr algn="ctr"/>
+              <a:r>
+                <a:rPr lang="en-US" altLang="zh-CN"/>
+                <a:t>E</a:t>
+              </a:r>
+              <a:endParaRPr lang="zh-CN" altLang="en-US"/>
+            </a:p>
+          </p:txBody>
+        </p:sp>
+      </p:grpSp>
+      <p:grpSp>
+        <p:nvGrpSpPr>
+          <p:cNvPr id="148" name="组合 147">
+            <a:extLst>
+              <a:ext uri="{FF2B5EF4-FFF2-40B4-BE49-F238E27FC236}">
+                <a16:creationId xmlns:a16="http://schemas.microsoft.com/office/drawing/2014/main" id="{DF858896-2DC1-49FF-85FF-9F8502D15106}"/>
+              </a:ext>
+            </a:extLst>
+          </p:cNvPr>
+          <p:cNvGrpSpPr/>
+          <p:nvPr/>
+        </p:nvGrpSpPr>
+        <p:grpSpPr>
+          <a:xfrm>
+            <a:off x="5718310" y="3539803"/>
+            <a:ext cx="1973146" cy="307777"/>
+            <a:chOff x="1875722" y="3531498"/>
+            <a:chExt cx="1973146" cy="307777"/>
+          </a:xfrm>
+        </p:grpSpPr>
+        <p:sp>
+          <p:nvSpPr>
+            <p:cNvPr id="149" name="矩形 148">
+              <a:extLst>
+                <a:ext uri="{FF2B5EF4-FFF2-40B4-BE49-F238E27FC236}">
+                  <a16:creationId xmlns:a16="http://schemas.microsoft.com/office/drawing/2014/main" id="{0B93DF9C-E80F-A2D2-88C8-0512467ABCEA}"/>
+                </a:ext>
+              </a:extLst>
+            </p:cNvPr>
+            <p:cNvSpPr/>
+            <p:nvPr/>
+          </p:nvSpPr>
+          <p:spPr>
+            <a:xfrm>
+              <a:off x="1875722" y="3531498"/>
+              <a:ext cx="493610" cy="307777"/>
+            </a:xfrm>
+            <a:prstGeom prst="rect">
+              <a:avLst/>
+            </a:prstGeom>
+          </p:spPr>
+          <p:style>
+            <a:lnRef idx="2">
+              <a:schemeClr val="dk1"/>
+            </a:lnRef>
+            <a:fillRef idx="1">
+              <a:schemeClr val="lt1"/>
+            </a:fillRef>
+            <a:effectRef idx="0">
+              <a:schemeClr val="dk1"/>
+            </a:effectRef>
+            <a:fontRef idx="minor">
+              <a:schemeClr val="dk1"/>
+            </a:fontRef>
+          </p:style>
+          <p:txBody>
+            <a:bodyPr rtlCol="0" anchor="ctr"/>
+            <a:lstStyle/>
+            <a:p>
+              <a:pPr algn="ctr"/>
+              <a:r>
+                <a:rPr lang="en-US" altLang="zh-CN"/>
+                <a:t>- -</a:t>
+              </a:r>
+              <a:endParaRPr lang="zh-CN" altLang="en-US"/>
+            </a:p>
+          </p:txBody>
+        </p:sp>
+        <p:sp>
+          <p:nvSpPr>
+            <p:cNvPr id="150" name="矩形 149">
+              <a:extLst>
+                <a:ext uri="{FF2B5EF4-FFF2-40B4-BE49-F238E27FC236}">
+                  <a16:creationId xmlns:a16="http://schemas.microsoft.com/office/drawing/2014/main" id="{542D1DBB-1D02-D280-BE30-AD1C22C69960}"/>
+                </a:ext>
+              </a:extLst>
+            </p:cNvPr>
+            <p:cNvSpPr/>
+            <p:nvPr/>
+          </p:nvSpPr>
+          <p:spPr>
+            <a:xfrm>
+              <a:off x="2368419" y="3531498"/>
+              <a:ext cx="493610" cy="307777"/>
+            </a:xfrm>
+            <a:prstGeom prst="rect">
+              <a:avLst/>
+            </a:prstGeom>
+          </p:spPr>
+          <p:style>
+            <a:lnRef idx="2">
+              <a:schemeClr val="dk1"/>
+            </a:lnRef>
+            <a:fillRef idx="1">
+              <a:schemeClr val="lt1"/>
+            </a:fillRef>
+            <a:effectRef idx="0">
+              <a:schemeClr val="dk1"/>
+            </a:effectRef>
+            <a:fontRef idx="minor">
+              <a:schemeClr val="dk1"/>
+            </a:fontRef>
+          </p:style>
+          <p:txBody>
+            <a:bodyPr rtlCol="0" anchor="ctr"/>
+            <a:lstStyle/>
+            <a:p>
+              <a:pPr algn="ctr"/>
+              <a:r>
+                <a:rPr lang="en-US" altLang="zh-CN"/>
+                <a:t>- -</a:t>
+              </a:r>
+              <a:endParaRPr lang="zh-CN" altLang="en-US"/>
+            </a:p>
+          </p:txBody>
+        </p:sp>
+        <p:sp>
+          <p:nvSpPr>
+            <p:cNvPr id="151" name="矩形 150">
+              <a:extLst>
+                <a:ext uri="{FF2B5EF4-FFF2-40B4-BE49-F238E27FC236}">
+                  <a16:creationId xmlns:a16="http://schemas.microsoft.com/office/drawing/2014/main" id="{9F682076-059E-E4ED-9087-501DA5B83740}"/>
+                </a:ext>
+              </a:extLst>
+            </p:cNvPr>
+            <p:cNvSpPr/>
+            <p:nvPr/>
+          </p:nvSpPr>
+          <p:spPr>
+            <a:xfrm>
+              <a:off x="2862561" y="3531498"/>
+              <a:ext cx="493610" cy="307777"/>
+            </a:xfrm>
+            <a:prstGeom prst="rect">
+              <a:avLst/>
+            </a:prstGeom>
+          </p:spPr>
+          <p:style>
+            <a:lnRef idx="2">
+              <a:schemeClr val="dk1"/>
+            </a:lnRef>
+            <a:fillRef idx="1">
+              <a:schemeClr val="lt1"/>
+            </a:fillRef>
+            <a:effectRef idx="0">
+              <a:schemeClr val="dk1"/>
+            </a:effectRef>
+            <a:fontRef idx="minor">
+              <a:schemeClr val="dk1"/>
+            </a:fontRef>
+          </p:style>
+          <p:txBody>
+            <a:bodyPr rtlCol="0" anchor="ctr"/>
+            <a:lstStyle/>
+            <a:p>
+              <a:pPr algn="ctr"/>
+              <a:r>
+                <a:rPr lang="en-US" altLang="zh-CN"/>
+                <a:t>F</a:t>
+              </a:r>
+              <a:endParaRPr lang="zh-CN" altLang="en-US"/>
+            </a:p>
+          </p:txBody>
+        </p:sp>
+        <p:sp>
+          <p:nvSpPr>
+            <p:cNvPr id="152" name="矩形 151">
+              <a:extLst>
+                <a:ext uri="{FF2B5EF4-FFF2-40B4-BE49-F238E27FC236}">
+                  <a16:creationId xmlns:a16="http://schemas.microsoft.com/office/drawing/2014/main" id="{97BC92FB-DD2A-AC51-1887-30968CD55D76}"/>
+                </a:ext>
+              </a:extLst>
+            </p:cNvPr>
+            <p:cNvSpPr/>
+            <p:nvPr/>
+          </p:nvSpPr>
+          <p:spPr>
+            <a:xfrm>
+              <a:off x="3355258" y="3531498"/>
+              <a:ext cx="493610" cy="307777"/>
+            </a:xfrm>
+            <a:prstGeom prst="rect">
+              <a:avLst/>
+            </a:prstGeom>
+          </p:spPr>
+          <p:style>
+            <a:lnRef idx="2">
+              <a:schemeClr val="dk1"/>
+            </a:lnRef>
+            <a:fillRef idx="1">
+              <a:schemeClr val="lt1"/>
+            </a:fillRef>
+            <a:effectRef idx="0">
+              <a:schemeClr val="dk1"/>
+            </a:effectRef>
+            <a:fontRef idx="minor">
+              <a:schemeClr val="dk1"/>
+            </a:fontRef>
+          </p:style>
+          <p:txBody>
+            <a:bodyPr rtlCol="0" anchor="ctr"/>
+            <a:lstStyle/>
+            <a:p>
+              <a:pPr algn="ctr"/>
+              <a:r>
+                <a:rPr lang="en-US" altLang="zh-CN"/>
+                <a:t>- -</a:t>
+              </a:r>
+              <a:endParaRPr lang="zh-CN" altLang="en-US"/>
+            </a:p>
+          </p:txBody>
+        </p:sp>
+      </p:grpSp>
+      <p:sp>
+        <p:nvSpPr>
+          <p:cNvPr id="153" name="矩形 152">
+            <a:extLst>
+              <a:ext uri="{FF2B5EF4-FFF2-40B4-BE49-F238E27FC236}">
+                <a16:creationId xmlns:a16="http://schemas.microsoft.com/office/drawing/2014/main" id="{2507EB55-463B-F124-5F2B-2F1F3646D443}"/>
+              </a:ext>
+            </a:extLst>
+          </p:cNvPr>
+          <p:cNvSpPr/>
+          <p:nvPr/>
+        </p:nvSpPr>
+        <p:spPr>
+          <a:xfrm>
+            <a:off x="7689587" y="3539803"/>
+            <a:ext cx="492698" cy="300925"/>
+          </a:xfrm>
+          <a:prstGeom prst="rect">
+            <a:avLst/>
+          </a:prstGeom>
+        </p:spPr>
+        <p:style>
+          <a:lnRef idx="2">
+            <a:schemeClr val="dk1"/>
+          </a:lnRef>
+          <a:fillRef idx="1">
+            <a:schemeClr val="lt1"/>
+          </a:fillRef>
+          <a:effectRef idx="0">
+            <a:schemeClr val="dk1"/>
+          </a:effectRef>
+          <a:fontRef idx="minor">
+            <a:schemeClr val="dk1"/>
+          </a:fontRef>
+        </p:style>
+        <p:txBody>
+          <a:bodyPr rtlCol="0" anchor="ctr"/>
+          <a:lstStyle/>
+          <a:p>
+            <a:pPr algn="ctr"/>
+            <a:r>
+              <a:rPr lang="en-US" altLang="zh-CN"/>
+              <a:t>- -</a:t>
+            </a:r>
+            <a:endParaRPr lang="zh-CN" altLang="en-US"/>
+          </a:p>
+        </p:txBody>
+      </p:sp>
+      <p:sp>
+        <p:nvSpPr>
+          <p:cNvPr id="160" name="矩形 159">
+            <a:extLst>
+              <a:ext uri="{FF2B5EF4-FFF2-40B4-BE49-F238E27FC236}">
+                <a16:creationId xmlns:a16="http://schemas.microsoft.com/office/drawing/2014/main" id="{286C94EA-480C-CB04-C7F6-457384E092F1}"/>
+              </a:ext>
+            </a:extLst>
+          </p:cNvPr>
+          <p:cNvSpPr/>
+          <p:nvPr/>
+        </p:nvSpPr>
+        <p:spPr>
+          <a:xfrm>
+            <a:off x="8180415" y="3539802"/>
+            <a:ext cx="492698" cy="300925"/>
+          </a:xfrm>
+          <a:prstGeom prst="rect">
+            <a:avLst/>
+          </a:prstGeom>
+        </p:spPr>
+        <p:style>
+          <a:lnRef idx="2">
+            <a:schemeClr val="dk1"/>
+          </a:lnRef>
+          <a:fillRef idx="1">
+            <a:schemeClr val="lt1"/>
+          </a:fillRef>
+          <a:effectRef idx="0">
+            <a:schemeClr val="dk1"/>
+          </a:effectRef>
+          <a:fontRef idx="minor">
+            <a:schemeClr val="dk1"/>
+          </a:fontRef>
+        </p:style>
+        <p:txBody>
+          <a:bodyPr rtlCol="0" anchor="ctr"/>
+          <a:lstStyle/>
+          <a:p>
+            <a:pPr algn="ctr"/>
+            <a:r>
+              <a:rPr lang="en-US" altLang="zh-CN"/>
+              <a:t>- -</a:t>
+            </a:r>
+            <a:endParaRPr lang="zh-CN" altLang="en-US"/>
+          </a:p>
+        </p:txBody>
+      </p:sp>
+      <p:sp>
+        <p:nvSpPr>
+          <p:cNvPr id="161" name="文本框 160">
+            <a:extLst>
+              <a:ext uri="{FF2B5EF4-FFF2-40B4-BE49-F238E27FC236}">
+                <a16:creationId xmlns:a16="http://schemas.microsoft.com/office/drawing/2014/main" id="{7461082D-B854-B345-8089-2E332167DC28}"/>
+              </a:ext>
+            </a:extLst>
+          </p:cNvPr>
+          <p:cNvSpPr txBox="1"/>
+          <p:nvPr/>
+        </p:nvSpPr>
+        <p:spPr>
+          <a:xfrm>
+            <a:off x="1772018" y="3840727"/>
+            <a:ext cx="8499443" cy="338554"/>
+          </a:xfrm>
+          <a:prstGeom prst="rect">
+            <a:avLst/>
+          </a:prstGeom>
+          <a:noFill/>
+        </p:spPr>
+        <p:txBody>
+          <a:bodyPr wrap="none" rtlCol="0">
+            <a:spAutoFit/>
+          </a:bodyPr>
+          <a:lstStyle/>
+          <a:p>
+            <a:r>
+              <a:rPr lang="en-US" altLang="zh-CN" sz="1600"/>
+              <a:t>0        1	   2       3	    4        5       6       7       8      9      10     11     12     13     14     15     16</a:t>
+            </a:r>
+            <a:endParaRPr lang="zh-CN" altLang="en-US" sz="1600"/>
+          </a:p>
+        </p:txBody>
+      </p:sp>
+      <p:sp>
+        <p:nvSpPr>
+          <p:cNvPr id="163" name="矩形 162">
+            <a:extLst>
+              <a:ext uri="{FF2B5EF4-FFF2-40B4-BE49-F238E27FC236}">
+                <a16:creationId xmlns:a16="http://schemas.microsoft.com/office/drawing/2014/main" id="{BA93C04D-E8E2-3573-B61E-0D5E57AC7AA3}"/>
+              </a:ext>
+            </a:extLst>
+          </p:cNvPr>
+          <p:cNvSpPr/>
+          <p:nvPr/>
+        </p:nvSpPr>
+        <p:spPr>
+          <a:xfrm>
+            <a:off x="8671244" y="3539801"/>
+            <a:ext cx="492698" cy="300925"/>
+          </a:xfrm>
+          <a:prstGeom prst="rect">
+            <a:avLst/>
+          </a:prstGeom>
+        </p:spPr>
+        <p:style>
+          <a:lnRef idx="2">
+            <a:schemeClr val="dk1"/>
+          </a:lnRef>
+          <a:fillRef idx="1">
+            <a:schemeClr val="lt1"/>
+          </a:fillRef>
+          <a:effectRef idx="0">
+            <a:schemeClr val="dk1"/>
+          </a:effectRef>
+          <a:fontRef idx="minor">
+            <a:schemeClr val="dk1"/>
+          </a:fontRef>
+        </p:style>
+        <p:txBody>
+          <a:bodyPr rtlCol="0" anchor="ctr"/>
+          <a:lstStyle/>
+          <a:p>
+            <a:pPr algn="ctr"/>
+            <a:r>
+              <a:rPr lang="en-US" altLang="zh-CN"/>
+              <a:t>G</a:t>
+            </a:r>
+            <a:endParaRPr lang="zh-CN" altLang="en-US"/>
+          </a:p>
+        </p:txBody>
+      </p:sp>
+      <p:sp>
+        <p:nvSpPr>
+          <p:cNvPr id="165" name="矩形 164">
+            <a:extLst>
+              <a:ext uri="{FF2B5EF4-FFF2-40B4-BE49-F238E27FC236}">
+                <a16:creationId xmlns:a16="http://schemas.microsoft.com/office/drawing/2014/main" id="{9F711252-2CD4-28ED-04F9-2398186A37D7}"/>
+              </a:ext>
+            </a:extLst>
+          </p:cNvPr>
+          <p:cNvSpPr/>
+          <p:nvPr/>
+        </p:nvSpPr>
+        <p:spPr>
+          <a:xfrm>
+            <a:off x="9166721" y="3539800"/>
+            <a:ext cx="492698" cy="300925"/>
+          </a:xfrm>
+          <a:prstGeom prst="rect">
+            <a:avLst/>
+          </a:prstGeom>
+        </p:spPr>
+        <p:style>
+          <a:lnRef idx="2">
+            <a:schemeClr val="dk1"/>
+          </a:lnRef>
+          <a:fillRef idx="1">
+            <a:schemeClr val="lt1"/>
+          </a:fillRef>
+          <a:effectRef idx="0">
+            <a:schemeClr val="dk1"/>
+          </a:effectRef>
+          <a:fontRef idx="minor">
+            <a:schemeClr val="dk1"/>
+          </a:fontRef>
+        </p:style>
+        <p:txBody>
+          <a:bodyPr rtlCol="0" anchor="ctr"/>
+          <a:lstStyle/>
+          <a:p>
+            <a:pPr algn="ctr"/>
+            <a:r>
+              <a:rPr lang="en-US" altLang="zh-CN"/>
+              <a:t>H</a:t>
+            </a:r>
+            <a:endParaRPr lang="zh-CN" altLang="en-US"/>
+          </a:p>
+        </p:txBody>
+      </p:sp>
+      <p:sp>
+        <p:nvSpPr>
+          <p:cNvPr id="167" name="矩形 166">
+            <a:extLst>
+              <a:ext uri="{FF2B5EF4-FFF2-40B4-BE49-F238E27FC236}">
+                <a16:creationId xmlns:a16="http://schemas.microsoft.com/office/drawing/2014/main" id="{61482164-D2B3-8E73-356E-C771011D554C}"/>
+              </a:ext>
+            </a:extLst>
+          </p:cNvPr>
+          <p:cNvSpPr/>
+          <p:nvPr/>
+        </p:nvSpPr>
+        <p:spPr>
+          <a:xfrm>
+            <a:off x="9659418" y="3539799"/>
+            <a:ext cx="492698" cy="300925"/>
+          </a:xfrm>
+          <a:prstGeom prst="rect">
+            <a:avLst/>
+          </a:prstGeom>
+        </p:spPr>
+        <p:style>
+          <a:lnRef idx="2">
+            <a:schemeClr val="dk1"/>
+          </a:lnRef>
+          <a:fillRef idx="1">
+            <a:schemeClr val="lt1"/>
+          </a:fillRef>
+          <a:effectRef idx="0">
+            <a:schemeClr val="dk1"/>
+          </a:effectRef>
+          <a:fontRef idx="minor">
+            <a:schemeClr val="dk1"/>
+          </a:fontRef>
+        </p:style>
+        <p:txBody>
+          <a:bodyPr rtlCol="0" anchor="ctr"/>
+          <a:lstStyle/>
+          <a:p>
+            <a:pPr algn="ctr"/>
+            <a:endParaRPr lang="zh-CN" altLang="en-US"/>
+          </a:p>
+        </p:txBody>
+      </p:sp>
     </p:spTree>
     <p:extLst>
       <p:ext uri="{BB962C8B-B14F-4D97-AF65-F5344CB8AC3E}">
@@ -7828,6 +14957,862 @@
           <a:chExt cx="0" cy="0"/>
         </a:xfrm>
       </p:grpSpPr>
+      <p:sp>
+        <p:nvSpPr>
+          <p:cNvPr id="2" name="椭圆 1">
+            <a:extLst>
+              <a:ext uri="{FF2B5EF4-FFF2-40B4-BE49-F238E27FC236}">
+                <a16:creationId xmlns:a16="http://schemas.microsoft.com/office/drawing/2014/main" id="{D0F20A58-5BF6-CE71-6796-5BFCA6544334}"/>
+              </a:ext>
+            </a:extLst>
+          </p:cNvPr>
+          <p:cNvSpPr/>
+          <p:nvPr/>
+        </p:nvSpPr>
+        <p:spPr>
+          <a:xfrm>
+            <a:off x="5396313" y="773258"/>
+            <a:ext cx="333328" cy="333328"/>
+          </a:xfrm>
+          <a:prstGeom prst="ellipse">
+            <a:avLst/>
+          </a:prstGeom>
+        </p:spPr>
+        <p:style>
+          <a:lnRef idx="2">
+            <a:schemeClr val="dk1"/>
+          </a:lnRef>
+          <a:fillRef idx="1">
+            <a:schemeClr val="lt1"/>
+          </a:fillRef>
+          <a:effectRef idx="0">
+            <a:schemeClr val="dk1"/>
+          </a:effectRef>
+          <a:fontRef idx="minor">
+            <a:schemeClr val="dk1"/>
+          </a:fontRef>
+        </p:style>
+        <p:txBody>
+          <a:bodyPr rtlCol="0" anchor="ctr"/>
+          <a:lstStyle/>
+          <a:p>
+            <a:pPr algn="ctr"/>
+            <a:r>
+              <a:rPr lang="en-US" altLang="zh-CN" sz="1600"/>
+              <a:t>A</a:t>
+            </a:r>
+            <a:endParaRPr lang="zh-CN" altLang="en-US" sz="1600"/>
+          </a:p>
+        </p:txBody>
+      </p:sp>
+      <p:sp>
+        <p:nvSpPr>
+          <p:cNvPr id="3" name="椭圆 2">
+            <a:extLst>
+              <a:ext uri="{FF2B5EF4-FFF2-40B4-BE49-F238E27FC236}">
+                <a16:creationId xmlns:a16="http://schemas.microsoft.com/office/drawing/2014/main" id="{8593E2DB-3EC0-8F0F-67BE-B68A1D541404}"/>
+              </a:ext>
+            </a:extLst>
+          </p:cNvPr>
+          <p:cNvSpPr/>
+          <p:nvPr/>
+        </p:nvSpPr>
+        <p:spPr>
+          <a:xfrm>
+            <a:off x="3713927" y="1195173"/>
+            <a:ext cx="333328" cy="333328"/>
+          </a:xfrm>
+          <a:prstGeom prst="ellipse">
+            <a:avLst/>
+          </a:prstGeom>
+        </p:spPr>
+        <p:style>
+          <a:lnRef idx="2">
+            <a:schemeClr val="dk1"/>
+          </a:lnRef>
+          <a:fillRef idx="1">
+            <a:schemeClr val="lt1"/>
+          </a:fillRef>
+          <a:effectRef idx="0">
+            <a:schemeClr val="dk1"/>
+          </a:effectRef>
+          <a:fontRef idx="minor">
+            <a:schemeClr val="dk1"/>
+          </a:fontRef>
+        </p:style>
+        <p:txBody>
+          <a:bodyPr rtlCol="0" anchor="ctr"/>
+          <a:lstStyle/>
+          <a:p>
+            <a:pPr algn="ctr"/>
+            <a:r>
+              <a:rPr lang="en-US" altLang="zh-CN" sz="1600"/>
+              <a:t>B</a:t>
+            </a:r>
+            <a:endParaRPr lang="zh-CN" altLang="en-US" sz="1600"/>
+          </a:p>
+        </p:txBody>
+      </p:sp>
+      <p:sp>
+        <p:nvSpPr>
+          <p:cNvPr id="4" name="椭圆 3">
+            <a:extLst>
+              <a:ext uri="{FF2B5EF4-FFF2-40B4-BE49-F238E27FC236}">
+                <a16:creationId xmlns:a16="http://schemas.microsoft.com/office/drawing/2014/main" id="{57FA067B-86C7-1F9F-BF96-BF151F1F21B5}"/>
+              </a:ext>
+            </a:extLst>
+          </p:cNvPr>
+          <p:cNvSpPr/>
+          <p:nvPr/>
+        </p:nvSpPr>
+        <p:spPr>
+          <a:xfrm>
+            <a:off x="6895537" y="1204934"/>
+            <a:ext cx="333328" cy="333328"/>
+          </a:xfrm>
+          <a:prstGeom prst="ellipse">
+            <a:avLst/>
+          </a:prstGeom>
+        </p:spPr>
+        <p:style>
+          <a:lnRef idx="2">
+            <a:schemeClr val="dk1"/>
+          </a:lnRef>
+          <a:fillRef idx="1">
+            <a:schemeClr val="lt1"/>
+          </a:fillRef>
+          <a:effectRef idx="0">
+            <a:schemeClr val="dk1"/>
+          </a:effectRef>
+          <a:fontRef idx="minor">
+            <a:schemeClr val="dk1"/>
+          </a:fontRef>
+        </p:style>
+        <p:txBody>
+          <a:bodyPr rtlCol="0" anchor="ctr"/>
+          <a:lstStyle/>
+          <a:p>
+            <a:pPr algn="ctr"/>
+            <a:r>
+              <a:rPr lang="en-US" altLang="zh-CN" sz="1600"/>
+              <a:t>C</a:t>
+            </a:r>
+            <a:endParaRPr lang="zh-CN" altLang="en-US" sz="1600"/>
+          </a:p>
+        </p:txBody>
+      </p:sp>
+      <p:cxnSp>
+        <p:nvCxnSpPr>
+          <p:cNvPr id="5" name="直接连接符 4">
+            <a:extLst>
+              <a:ext uri="{FF2B5EF4-FFF2-40B4-BE49-F238E27FC236}">
+                <a16:creationId xmlns:a16="http://schemas.microsoft.com/office/drawing/2014/main" id="{DC868E1A-68B9-8051-000F-5784317AF838}"/>
+              </a:ext>
+            </a:extLst>
+          </p:cNvPr>
+          <p:cNvCxnSpPr>
+            <a:cxnSpLocks/>
+            <a:stCxn id="2" idx="3"/>
+            <a:endCxn id="3" idx="7"/>
+          </p:cNvCxnSpPr>
+          <p:nvPr/>
+        </p:nvCxnSpPr>
+        <p:spPr>
+          <a:xfrm flipH="1">
+            <a:off x="3998440" y="1057771"/>
+            <a:ext cx="1446688" cy="186217"/>
+          </a:xfrm>
+          <a:prstGeom prst="line">
+            <a:avLst/>
+          </a:prstGeom>
+        </p:spPr>
+        <p:style>
+          <a:lnRef idx="2">
+            <a:schemeClr val="dk1"/>
+          </a:lnRef>
+          <a:fillRef idx="0">
+            <a:schemeClr val="dk1"/>
+          </a:fillRef>
+          <a:effectRef idx="1">
+            <a:schemeClr val="dk1"/>
+          </a:effectRef>
+          <a:fontRef idx="minor">
+            <a:schemeClr val="tx1"/>
+          </a:fontRef>
+        </p:style>
+      </p:cxnSp>
+      <p:cxnSp>
+        <p:nvCxnSpPr>
+          <p:cNvPr id="6" name="直接连接符 5">
+            <a:extLst>
+              <a:ext uri="{FF2B5EF4-FFF2-40B4-BE49-F238E27FC236}">
+                <a16:creationId xmlns:a16="http://schemas.microsoft.com/office/drawing/2014/main" id="{BCECEF07-2E37-04B0-F179-8D40E550C8B4}"/>
+              </a:ext>
+            </a:extLst>
+          </p:cNvPr>
+          <p:cNvCxnSpPr>
+            <a:stCxn id="2" idx="5"/>
+            <a:endCxn id="4" idx="1"/>
+          </p:cNvCxnSpPr>
+          <p:nvPr/>
+        </p:nvCxnSpPr>
+        <p:spPr>
+          <a:xfrm>
+            <a:off x="5680826" y="1057771"/>
+            <a:ext cx="1263526" cy="195978"/>
+          </a:xfrm>
+          <a:prstGeom prst="line">
+            <a:avLst/>
+          </a:prstGeom>
+        </p:spPr>
+        <p:style>
+          <a:lnRef idx="2">
+            <a:schemeClr val="dk1"/>
+          </a:lnRef>
+          <a:fillRef idx="0">
+            <a:schemeClr val="dk1"/>
+          </a:fillRef>
+          <a:effectRef idx="1">
+            <a:schemeClr val="dk1"/>
+          </a:effectRef>
+          <a:fontRef idx="minor">
+            <a:schemeClr val="tx1"/>
+          </a:fontRef>
+        </p:style>
+      </p:cxnSp>
+      <p:sp>
+        <p:nvSpPr>
+          <p:cNvPr id="7" name="椭圆 6">
+            <a:extLst>
+              <a:ext uri="{FF2B5EF4-FFF2-40B4-BE49-F238E27FC236}">
+                <a16:creationId xmlns:a16="http://schemas.microsoft.com/office/drawing/2014/main" id="{5B21A3AC-928C-3F75-5F7D-96B4D59CBA2B}"/>
+              </a:ext>
+            </a:extLst>
+          </p:cNvPr>
+          <p:cNvSpPr/>
+          <p:nvPr/>
+        </p:nvSpPr>
+        <p:spPr>
+          <a:xfrm>
+            <a:off x="4488876" y="1802504"/>
+            <a:ext cx="333328" cy="333328"/>
+          </a:xfrm>
+          <a:prstGeom prst="ellipse">
+            <a:avLst/>
+          </a:prstGeom>
+        </p:spPr>
+        <p:style>
+          <a:lnRef idx="2">
+            <a:schemeClr val="dk1"/>
+          </a:lnRef>
+          <a:fillRef idx="1">
+            <a:schemeClr val="lt1"/>
+          </a:fillRef>
+          <a:effectRef idx="0">
+            <a:schemeClr val="dk1"/>
+          </a:effectRef>
+          <a:fontRef idx="minor">
+            <a:schemeClr val="dk1"/>
+          </a:fontRef>
+        </p:style>
+        <p:txBody>
+          <a:bodyPr rtlCol="0" anchor="ctr"/>
+          <a:lstStyle/>
+          <a:p>
+            <a:pPr algn="ctr"/>
+            <a:r>
+              <a:rPr lang="en-US" altLang="zh-CN" sz="1600"/>
+              <a:t>E</a:t>
+            </a:r>
+            <a:endParaRPr lang="zh-CN" altLang="en-US" sz="1600"/>
+          </a:p>
+        </p:txBody>
+      </p:sp>
+      <p:sp>
+        <p:nvSpPr>
+          <p:cNvPr id="8" name="椭圆 7">
+            <a:extLst>
+              <a:ext uri="{FF2B5EF4-FFF2-40B4-BE49-F238E27FC236}">
+                <a16:creationId xmlns:a16="http://schemas.microsoft.com/office/drawing/2014/main" id="{D5E16377-CD4F-6D61-0FAB-9A593A877D30}"/>
+              </a:ext>
+            </a:extLst>
+          </p:cNvPr>
+          <p:cNvSpPr/>
+          <p:nvPr/>
+        </p:nvSpPr>
+        <p:spPr>
+          <a:xfrm>
+            <a:off x="7547960" y="1802504"/>
+            <a:ext cx="333328" cy="333328"/>
+          </a:xfrm>
+          <a:prstGeom prst="ellipse">
+            <a:avLst/>
+          </a:prstGeom>
+        </p:spPr>
+        <p:style>
+          <a:lnRef idx="2">
+            <a:schemeClr val="dk1"/>
+          </a:lnRef>
+          <a:fillRef idx="1">
+            <a:schemeClr val="lt1"/>
+          </a:fillRef>
+          <a:effectRef idx="0">
+            <a:schemeClr val="dk1"/>
+          </a:effectRef>
+          <a:fontRef idx="minor">
+            <a:schemeClr val="dk1"/>
+          </a:fontRef>
+        </p:style>
+        <p:txBody>
+          <a:bodyPr rtlCol="0" anchor="ctr"/>
+          <a:lstStyle/>
+          <a:p>
+            <a:pPr algn="ctr"/>
+            <a:r>
+              <a:rPr lang="en-US" altLang="zh-CN" sz="1600"/>
+              <a:t>F</a:t>
+            </a:r>
+            <a:endParaRPr lang="zh-CN" altLang="en-US" sz="1600"/>
+          </a:p>
+        </p:txBody>
+      </p:sp>
+      <p:sp>
+        <p:nvSpPr>
+          <p:cNvPr id="9" name="椭圆 8">
+            <a:extLst>
+              <a:ext uri="{FF2B5EF4-FFF2-40B4-BE49-F238E27FC236}">
+                <a16:creationId xmlns:a16="http://schemas.microsoft.com/office/drawing/2014/main" id="{BD11D6D1-7A5A-22EF-986D-BBD06FBAEA37}"/>
+              </a:ext>
+            </a:extLst>
+          </p:cNvPr>
+          <p:cNvSpPr/>
+          <p:nvPr/>
+        </p:nvSpPr>
+        <p:spPr>
+          <a:xfrm>
+            <a:off x="3993662" y="2498457"/>
+            <a:ext cx="333328" cy="333328"/>
+          </a:xfrm>
+          <a:prstGeom prst="ellipse">
+            <a:avLst/>
+          </a:prstGeom>
+        </p:spPr>
+        <p:style>
+          <a:lnRef idx="2">
+            <a:schemeClr val="dk1"/>
+          </a:lnRef>
+          <a:fillRef idx="1">
+            <a:schemeClr val="lt1"/>
+          </a:fillRef>
+          <a:effectRef idx="0">
+            <a:schemeClr val="dk1"/>
+          </a:effectRef>
+          <a:fontRef idx="minor">
+            <a:schemeClr val="dk1"/>
+          </a:fontRef>
+        </p:style>
+        <p:txBody>
+          <a:bodyPr rtlCol="0" anchor="ctr"/>
+          <a:lstStyle/>
+          <a:p>
+            <a:pPr algn="ctr"/>
+            <a:r>
+              <a:rPr lang="en-US" altLang="zh-CN" sz="1600"/>
+              <a:t>H</a:t>
+            </a:r>
+            <a:endParaRPr lang="zh-CN" altLang="en-US" sz="1600"/>
+          </a:p>
+        </p:txBody>
+      </p:sp>
+      <p:sp>
+        <p:nvSpPr>
+          <p:cNvPr id="10" name="椭圆 9">
+            <a:extLst>
+              <a:ext uri="{FF2B5EF4-FFF2-40B4-BE49-F238E27FC236}">
+                <a16:creationId xmlns:a16="http://schemas.microsoft.com/office/drawing/2014/main" id="{26E3CA8A-30C0-C866-89AA-FBB0BF6B1475}"/>
+              </a:ext>
+            </a:extLst>
+          </p:cNvPr>
+          <p:cNvSpPr/>
+          <p:nvPr/>
+        </p:nvSpPr>
+        <p:spPr>
+          <a:xfrm>
+            <a:off x="7101261" y="2498457"/>
+            <a:ext cx="333328" cy="333328"/>
+          </a:xfrm>
+          <a:prstGeom prst="ellipse">
+            <a:avLst/>
+          </a:prstGeom>
+        </p:spPr>
+        <p:style>
+          <a:lnRef idx="2">
+            <a:schemeClr val="dk1"/>
+          </a:lnRef>
+          <a:fillRef idx="1">
+            <a:schemeClr val="lt1"/>
+          </a:fillRef>
+          <a:effectRef idx="0">
+            <a:schemeClr val="dk1"/>
+          </a:effectRef>
+          <a:fontRef idx="minor">
+            <a:schemeClr val="dk1"/>
+          </a:fontRef>
+        </p:style>
+        <p:txBody>
+          <a:bodyPr rtlCol="0" anchor="ctr"/>
+          <a:lstStyle/>
+          <a:p>
+            <a:pPr algn="ctr"/>
+            <a:r>
+              <a:rPr lang="en-US" altLang="zh-CN" sz="1600"/>
+              <a:t>I</a:t>
+            </a:r>
+            <a:endParaRPr lang="zh-CN" altLang="en-US" sz="1600"/>
+          </a:p>
+        </p:txBody>
+      </p:sp>
+      <p:sp>
+        <p:nvSpPr>
+          <p:cNvPr id="11" name="椭圆 10">
+            <a:extLst>
+              <a:ext uri="{FF2B5EF4-FFF2-40B4-BE49-F238E27FC236}">
+                <a16:creationId xmlns:a16="http://schemas.microsoft.com/office/drawing/2014/main" id="{6C1D231A-1734-1AA5-80FC-8BA4F151B904}"/>
+              </a:ext>
+            </a:extLst>
+          </p:cNvPr>
+          <p:cNvSpPr/>
+          <p:nvPr/>
+        </p:nvSpPr>
+        <p:spPr>
+          <a:xfrm>
+            <a:off x="8029157" y="2498457"/>
+            <a:ext cx="333328" cy="333328"/>
+          </a:xfrm>
+          <a:prstGeom prst="ellipse">
+            <a:avLst/>
+          </a:prstGeom>
+        </p:spPr>
+        <p:style>
+          <a:lnRef idx="2">
+            <a:schemeClr val="dk1"/>
+          </a:lnRef>
+          <a:fillRef idx="1">
+            <a:schemeClr val="lt1"/>
+          </a:fillRef>
+          <a:effectRef idx="0">
+            <a:schemeClr val="dk1"/>
+          </a:effectRef>
+          <a:fontRef idx="minor">
+            <a:schemeClr val="dk1"/>
+          </a:fontRef>
+        </p:style>
+        <p:txBody>
+          <a:bodyPr rtlCol="0" anchor="ctr"/>
+          <a:lstStyle/>
+          <a:p>
+            <a:pPr algn="ctr"/>
+            <a:r>
+              <a:rPr lang="en-US" altLang="zh-CN" sz="1600"/>
+              <a:t>J</a:t>
+            </a:r>
+            <a:endParaRPr lang="zh-CN" altLang="en-US" sz="1600"/>
+          </a:p>
+        </p:txBody>
+      </p:sp>
+      <p:cxnSp>
+        <p:nvCxnSpPr>
+          <p:cNvPr id="12" name="直接连接符 11">
+            <a:extLst>
+              <a:ext uri="{FF2B5EF4-FFF2-40B4-BE49-F238E27FC236}">
+                <a16:creationId xmlns:a16="http://schemas.microsoft.com/office/drawing/2014/main" id="{D8F5A898-89A6-D466-3587-CB1AC186FE03}"/>
+              </a:ext>
+            </a:extLst>
+          </p:cNvPr>
+          <p:cNvCxnSpPr>
+            <a:stCxn id="3" idx="5"/>
+            <a:endCxn id="7" idx="0"/>
+          </p:cNvCxnSpPr>
+          <p:nvPr/>
+        </p:nvCxnSpPr>
+        <p:spPr>
+          <a:xfrm>
+            <a:off x="3998440" y="1479686"/>
+            <a:ext cx="657100" cy="322818"/>
+          </a:xfrm>
+          <a:prstGeom prst="line">
+            <a:avLst/>
+          </a:prstGeom>
+        </p:spPr>
+        <p:style>
+          <a:lnRef idx="2">
+            <a:schemeClr val="dk1"/>
+          </a:lnRef>
+          <a:fillRef idx="0">
+            <a:schemeClr val="dk1"/>
+          </a:fillRef>
+          <a:effectRef idx="1">
+            <a:schemeClr val="dk1"/>
+          </a:effectRef>
+          <a:fontRef idx="minor">
+            <a:schemeClr val="tx1"/>
+          </a:fontRef>
+        </p:style>
+      </p:cxnSp>
+      <p:cxnSp>
+        <p:nvCxnSpPr>
+          <p:cNvPr id="13" name="直接连接符 12">
+            <a:extLst>
+              <a:ext uri="{FF2B5EF4-FFF2-40B4-BE49-F238E27FC236}">
+                <a16:creationId xmlns:a16="http://schemas.microsoft.com/office/drawing/2014/main" id="{5966CE95-D656-0ADC-9865-B221C943EC2E}"/>
+              </a:ext>
+            </a:extLst>
+          </p:cNvPr>
+          <p:cNvCxnSpPr>
+            <a:stCxn id="4" idx="5"/>
+            <a:endCxn id="8" idx="1"/>
+          </p:cNvCxnSpPr>
+          <p:nvPr/>
+        </p:nvCxnSpPr>
+        <p:spPr>
+          <a:xfrm>
+            <a:off x="7180050" y="1489447"/>
+            <a:ext cx="416725" cy="361872"/>
+          </a:xfrm>
+          <a:prstGeom prst="line">
+            <a:avLst/>
+          </a:prstGeom>
+        </p:spPr>
+        <p:style>
+          <a:lnRef idx="2">
+            <a:schemeClr val="dk1"/>
+          </a:lnRef>
+          <a:fillRef idx="0">
+            <a:schemeClr val="dk1"/>
+          </a:fillRef>
+          <a:effectRef idx="1">
+            <a:schemeClr val="dk1"/>
+          </a:effectRef>
+          <a:fontRef idx="minor">
+            <a:schemeClr val="tx1"/>
+          </a:fontRef>
+        </p:style>
+      </p:cxnSp>
+      <p:cxnSp>
+        <p:nvCxnSpPr>
+          <p:cNvPr id="14" name="直接连接符 13">
+            <a:extLst>
+              <a:ext uri="{FF2B5EF4-FFF2-40B4-BE49-F238E27FC236}">
+                <a16:creationId xmlns:a16="http://schemas.microsoft.com/office/drawing/2014/main" id="{4FA0F278-2612-C6A3-D023-8053168C632E}"/>
+              </a:ext>
+            </a:extLst>
+          </p:cNvPr>
+          <p:cNvCxnSpPr>
+            <a:stCxn id="7" idx="3"/>
+            <a:endCxn id="9" idx="0"/>
+          </p:cNvCxnSpPr>
+          <p:nvPr/>
+        </p:nvCxnSpPr>
+        <p:spPr>
+          <a:xfrm flipH="1">
+            <a:off x="4160326" y="2087017"/>
+            <a:ext cx="377365" cy="411440"/>
+          </a:xfrm>
+          <a:prstGeom prst="line">
+            <a:avLst/>
+          </a:prstGeom>
+        </p:spPr>
+        <p:style>
+          <a:lnRef idx="2">
+            <a:schemeClr val="dk1"/>
+          </a:lnRef>
+          <a:fillRef idx="0">
+            <a:schemeClr val="dk1"/>
+          </a:fillRef>
+          <a:effectRef idx="1">
+            <a:schemeClr val="dk1"/>
+          </a:effectRef>
+          <a:fontRef idx="minor">
+            <a:schemeClr val="tx1"/>
+          </a:fontRef>
+        </p:style>
+      </p:cxnSp>
+      <p:cxnSp>
+        <p:nvCxnSpPr>
+          <p:cNvPr id="15" name="直接连接符 14">
+            <a:extLst>
+              <a:ext uri="{FF2B5EF4-FFF2-40B4-BE49-F238E27FC236}">
+                <a16:creationId xmlns:a16="http://schemas.microsoft.com/office/drawing/2014/main" id="{754F2207-6E58-6683-F1EF-E3670E390FFE}"/>
+              </a:ext>
+            </a:extLst>
+          </p:cNvPr>
+          <p:cNvCxnSpPr>
+            <a:stCxn id="8" idx="3"/>
+            <a:endCxn id="10" idx="0"/>
+          </p:cNvCxnSpPr>
+          <p:nvPr/>
+        </p:nvCxnSpPr>
+        <p:spPr>
+          <a:xfrm flipH="1">
+            <a:off x="7267925" y="2087017"/>
+            <a:ext cx="328850" cy="411440"/>
+          </a:xfrm>
+          <a:prstGeom prst="line">
+            <a:avLst/>
+          </a:prstGeom>
+        </p:spPr>
+        <p:style>
+          <a:lnRef idx="2">
+            <a:schemeClr val="dk1"/>
+          </a:lnRef>
+          <a:fillRef idx="0">
+            <a:schemeClr val="dk1"/>
+          </a:fillRef>
+          <a:effectRef idx="1">
+            <a:schemeClr val="dk1"/>
+          </a:effectRef>
+          <a:fontRef idx="minor">
+            <a:schemeClr val="tx1"/>
+          </a:fontRef>
+        </p:style>
+      </p:cxnSp>
+      <p:cxnSp>
+        <p:nvCxnSpPr>
+          <p:cNvPr id="16" name="直接连接符 15">
+            <a:extLst>
+              <a:ext uri="{FF2B5EF4-FFF2-40B4-BE49-F238E27FC236}">
+                <a16:creationId xmlns:a16="http://schemas.microsoft.com/office/drawing/2014/main" id="{4097CDAA-998A-5DF4-EDF2-FC514E996CA6}"/>
+              </a:ext>
+            </a:extLst>
+          </p:cNvPr>
+          <p:cNvCxnSpPr>
+            <a:stCxn id="8" idx="5"/>
+            <a:endCxn id="11" idx="0"/>
+          </p:cNvCxnSpPr>
+          <p:nvPr/>
+        </p:nvCxnSpPr>
+        <p:spPr>
+          <a:xfrm>
+            <a:off x="7832473" y="2087017"/>
+            <a:ext cx="363348" cy="411440"/>
+          </a:xfrm>
+          <a:prstGeom prst="line">
+            <a:avLst/>
+          </a:prstGeom>
+        </p:spPr>
+        <p:style>
+          <a:lnRef idx="2">
+            <a:schemeClr val="dk1"/>
+          </a:lnRef>
+          <a:fillRef idx="0">
+            <a:schemeClr val="dk1"/>
+          </a:fillRef>
+          <a:effectRef idx="1">
+            <a:schemeClr val="dk1"/>
+          </a:effectRef>
+          <a:fontRef idx="minor">
+            <a:schemeClr val="tx1"/>
+          </a:fontRef>
+        </p:style>
+      </p:cxnSp>
+      <p:sp>
+        <p:nvSpPr>
+          <p:cNvPr id="17" name="椭圆 16">
+            <a:extLst>
+              <a:ext uri="{FF2B5EF4-FFF2-40B4-BE49-F238E27FC236}">
+                <a16:creationId xmlns:a16="http://schemas.microsoft.com/office/drawing/2014/main" id="{7F958365-5739-9D50-F8D6-4844FED35E59}"/>
+              </a:ext>
+            </a:extLst>
+          </p:cNvPr>
+          <p:cNvSpPr/>
+          <p:nvPr/>
+        </p:nvSpPr>
+        <p:spPr>
+          <a:xfrm>
+            <a:off x="2758591" y="1802504"/>
+            <a:ext cx="333328" cy="333328"/>
+          </a:xfrm>
+          <a:prstGeom prst="ellipse">
+            <a:avLst/>
+          </a:prstGeom>
+          <a:ln>
+            <a:prstDash val="solid"/>
+          </a:ln>
+        </p:spPr>
+        <p:style>
+          <a:lnRef idx="2">
+            <a:schemeClr val="dk1"/>
+          </a:lnRef>
+          <a:fillRef idx="1">
+            <a:schemeClr val="lt1"/>
+          </a:fillRef>
+          <a:effectRef idx="0">
+            <a:schemeClr val="dk1"/>
+          </a:effectRef>
+          <a:fontRef idx="minor">
+            <a:schemeClr val="dk1"/>
+          </a:fontRef>
+        </p:style>
+        <p:txBody>
+          <a:bodyPr rtlCol="0" anchor="ctr"/>
+          <a:lstStyle/>
+          <a:p>
+            <a:pPr algn="ctr"/>
+            <a:r>
+              <a:rPr lang="en-US" altLang="zh-CN" sz="1600"/>
+              <a:t>D</a:t>
+            </a:r>
+            <a:endParaRPr lang="zh-CN" altLang="en-US" sz="1600"/>
+          </a:p>
+        </p:txBody>
+      </p:sp>
+      <p:sp>
+        <p:nvSpPr>
+          <p:cNvPr id="21" name="椭圆 20">
+            <a:extLst>
+              <a:ext uri="{FF2B5EF4-FFF2-40B4-BE49-F238E27FC236}">
+                <a16:creationId xmlns:a16="http://schemas.microsoft.com/office/drawing/2014/main" id="{0F831AC9-CDB5-7D49-5ADC-443AA595EFC5}"/>
+              </a:ext>
+            </a:extLst>
+          </p:cNvPr>
+          <p:cNvSpPr/>
+          <p:nvPr/>
+        </p:nvSpPr>
+        <p:spPr>
+          <a:xfrm>
+            <a:off x="3090670" y="2498457"/>
+            <a:ext cx="333328" cy="333328"/>
+          </a:xfrm>
+          <a:prstGeom prst="ellipse">
+            <a:avLst/>
+          </a:prstGeom>
+          <a:ln>
+            <a:prstDash val="solid"/>
+          </a:ln>
+        </p:spPr>
+        <p:style>
+          <a:lnRef idx="2">
+            <a:schemeClr val="dk1"/>
+          </a:lnRef>
+          <a:fillRef idx="1">
+            <a:schemeClr val="lt1"/>
+          </a:fillRef>
+          <a:effectRef idx="0">
+            <a:schemeClr val="dk1"/>
+          </a:effectRef>
+          <a:fontRef idx="minor">
+            <a:schemeClr val="dk1"/>
+          </a:fontRef>
+        </p:style>
+        <p:txBody>
+          <a:bodyPr rtlCol="0" anchor="ctr"/>
+          <a:lstStyle/>
+          <a:p>
+            <a:pPr algn="ctr"/>
+            <a:r>
+              <a:rPr lang="en-US" altLang="zh-CN" sz="1600"/>
+              <a:t>G</a:t>
+            </a:r>
+            <a:endParaRPr lang="zh-CN" altLang="en-US" sz="1600"/>
+          </a:p>
+        </p:txBody>
+      </p:sp>
+      <p:cxnSp>
+        <p:nvCxnSpPr>
+          <p:cNvPr id="24" name="直接连接符 23">
+            <a:extLst>
+              <a:ext uri="{FF2B5EF4-FFF2-40B4-BE49-F238E27FC236}">
+                <a16:creationId xmlns:a16="http://schemas.microsoft.com/office/drawing/2014/main" id="{A66D8DB3-1F1C-68B0-657E-30B19693CBA2}"/>
+              </a:ext>
+            </a:extLst>
+          </p:cNvPr>
+          <p:cNvCxnSpPr>
+            <a:stCxn id="3" idx="3"/>
+            <a:endCxn id="17" idx="7"/>
+          </p:cNvCxnSpPr>
+          <p:nvPr/>
+        </p:nvCxnSpPr>
+        <p:spPr>
+          <a:xfrm flipH="1">
+            <a:off x="3043104" y="1479686"/>
+            <a:ext cx="719638" cy="371633"/>
+          </a:xfrm>
+          <a:prstGeom prst="line">
+            <a:avLst/>
+          </a:prstGeom>
+          <a:ln w="9525" cap="flat" cmpd="sng" algn="ctr">
+            <a:solidFill>
+              <a:schemeClr val="dk1"/>
+            </a:solidFill>
+            <a:prstDash val="solid"/>
+            <a:round/>
+            <a:headEnd type="none" w="med" len="med"/>
+            <a:tailEnd type="none" w="med" len="med"/>
+          </a:ln>
+        </p:spPr>
+        <p:style>
+          <a:lnRef idx="0">
+            <a:scrgbClr r="0" g="0" b="0"/>
+          </a:lnRef>
+          <a:fillRef idx="0">
+            <a:scrgbClr r="0" g="0" b="0"/>
+          </a:fillRef>
+          <a:effectRef idx="0">
+            <a:scrgbClr r="0" g="0" b="0"/>
+          </a:effectRef>
+          <a:fontRef idx="minor">
+            <a:schemeClr val="tx1"/>
+          </a:fontRef>
+        </p:style>
+      </p:cxnSp>
+      <p:cxnSp>
+        <p:nvCxnSpPr>
+          <p:cNvPr id="27" name="直接连接符 26">
+            <a:extLst>
+              <a:ext uri="{FF2B5EF4-FFF2-40B4-BE49-F238E27FC236}">
+                <a16:creationId xmlns:a16="http://schemas.microsoft.com/office/drawing/2014/main" id="{FDF9098D-3373-EEED-0119-45606001A078}"/>
+              </a:ext>
+            </a:extLst>
+          </p:cNvPr>
+          <p:cNvCxnSpPr>
+            <a:stCxn id="17" idx="5"/>
+            <a:endCxn id="21" idx="0"/>
+          </p:cNvCxnSpPr>
+          <p:nvPr/>
+        </p:nvCxnSpPr>
+        <p:spPr>
+          <a:xfrm>
+            <a:off x="3043104" y="2087017"/>
+            <a:ext cx="214230" cy="411440"/>
+          </a:xfrm>
+          <a:prstGeom prst="line">
+            <a:avLst/>
+          </a:prstGeom>
+          <a:ln w="9525" cap="flat" cmpd="sng" algn="ctr">
+            <a:solidFill>
+              <a:schemeClr val="dk1"/>
+            </a:solidFill>
+            <a:prstDash val="solid"/>
+            <a:round/>
+            <a:headEnd type="none" w="med" len="med"/>
+            <a:tailEnd type="none" w="med" len="med"/>
+          </a:ln>
+        </p:spPr>
+        <p:style>
+          <a:lnRef idx="0">
+            <a:scrgbClr r="0" g="0" b="0"/>
+          </a:lnRef>
+          <a:fillRef idx="0">
+            <a:scrgbClr r="0" g="0" b="0"/>
+          </a:fillRef>
+          <a:effectRef idx="0">
+            <a:scrgbClr r="0" g="0" b="0"/>
+          </a:effectRef>
+          <a:fontRef idx="minor">
+            <a:schemeClr val="tx1"/>
+          </a:fontRef>
+        </p:style>
+      </p:cxnSp>
     </p:spTree>
     <p:extLst>
       <p:ext uri="{BB962C8B-B14F-4D97-AF65-F5344CB8AC3E}">

--- a/data_structure/assets/pics_and_ppts/ch4/画图用.pptx
+++ b/data_structure/assets/pics_and_ppts/ch4/画图用.pptx
@@ -5,7 +5,7 @@
     <p:sldMasterId id="2147483648" r:id="rId1"/>
   </p:sldMasterIdLst>
   <p:notesMasterIdLst>
-    <p:notesMasterId r:id="rId19"/>
+    <p:notesMasterId r:id="rId25"/>
   </p:notesMasterIdLst>
   <p:sldIdLst>
     <p:sldId id="256" r:id="rId2"/>
@@ -21,10 +21,16 @@
     <p:sldId id="265" r:id="rId12"/>
     <p:sldId id="272" r:id="rId13"/>
     <p:sldId id="266" r:id="rId14"/>
-    <p:sldId id="267" r:id="rId15"/>
-    <p:sldId id="268" r:id="rId16"/>
-    <p:sldId id="269" r:id="rId17"/>
-    <p:sldId id="270" r:id="rId18"/>
+    <p:sldId id="273" r:id="rId15"/>
+    <p:sldId id="267" r:id="rId16"/>
+    <p:sldId id="268" r:id="rId17"/>
+    <p:sldId id="269" r:id="rId18"/>
+    <p:sldId id="278" r:id="rId19"/>
+    <p:sldId id="274" r:id="rId20"/>
+    <p:sldId id="275" r:id="rId21"/>
+    <p:sldId id="276" r:id="rId22"/>
+    <p:sldId id="277" r:id="rId23"/>
+    <p:sldId id="270" r:id="rId24"/>
   </p:sldIdLst>
   <p:sldSz cx="12192000" cy="6858000"/>
   <p:notesSz cx="6858000" cy="9144000"/>
@@ -213,7 +219,7 @@
           <a:p>
             <a:fld id="{4265347F-0490-42B1-9604-2668F30EEAC5}" type="datetimeFigureOut">
               <a:rPr lang="zh-CN" altLang="en-US" smtClean="0"/>
-              <a:t>2026/10/10</a:t>
+              <a:t>2026/10/11</a:t>
             </a:fld>
             <a:endParaRPr lang="zh-CN" altLang="en-US"/>
           </a:p>
@@ -711,7 +717,7 @@
           <a:p>
             <a:fld id="{0617A84F-C5EA-4D1F-9163-CC9D70D46673}" type="datetimeFigureOut">
               <a:rPr lang="zh-CN" altLang="en-US" smtClean="0"/>
-              <a:t>2026/10/10</a:t>
+              <a:t>2026/10/11</a:t>
             </a:fld>
             <a:endParaRPr lang="zh-CN" altLang="en-US"/>
           </a:p>
@@ -909,7 +915,7 @@
           <a:p>
             <a:fld id="{0617A84F-C5EA-4D1F-9163-CC9D70D46673}" type="datetimeFigureOut">
               <a:rPr lang="zh-CN" altLang="en-US" smtClean="0"/>
-              <a:t>2026/10/10</a:t>
+              <a:t>2026/10/11</a:t>
             </a:fld>
             <a:endParaRPr lang="zh-CN" altLang="en-US"/>
           </a:p>
@@ -1117,7 +1123,7 @@
           <a:p>
             <a:fld id="{0617A84F-C5EA-4D1F-9163-CC9D70D46673}" type="datetimeFigureOut">
               <a:rPr lang="zh-CN" altLang="en-US" smtClean="0"/>
-              <a:t>2026/10/10</a:t>
+              <a:t>2026/10/11</a:t>
             </a:fld>
             <a:endParaRPr lang="zh-CN" altLang="en-US"/>
           </a:p>
@@ -1315,7 +1321,7 @@
           <a:p>
             <a:fld id="{0617A84F-C5EA-4D1F-9163-CC9D70D46673}" type="datetimeFigureOut">
               <a:rPr lang="zh-CN" altLang="en-US" smtClean="0"/>
-              <a:t>2026/10/10</a:t>
+              <a:t>2026/10/11</a:t>
             </a:fld>
             <a:endParaRPr lang="zh-CN" altLang="en-US"/>
           </a:p>
@@ -1590,7 +1596,7 @@
           <a:p>
             <a:fld id="{0617A84F-C5EA-4D1F-9163-CC9D70D46673}" type="datetimeFigureOut">
               <a:rPr lang="zh-CN" altLang="en-US" smtClean="0"/>
-              <a:t>2026/10/10</a:t>
+              <a:t>2026/10/11</a:t>
             </a:fld>
             <a:endParaRPr lang="zh-CN" altLang="en-US"/>
           </a:p>
@@ -1855,7 +1861,7 @@
           <a:p>
             <a:fld id="{0617A84F-C5EA-4D1F-9163-CC9D70D46673}" type="datetimeFigureOut">
               <a:rPr lang="zh-CN" altLang="en-US" smtClean="0"/>
-              <a:t>2026/10/10</a:t>
+              <a:t>2026/10/11</a:t>
             </a:fld>
             <a:endParaRPr lang="zh-CN" altLang="en-US"/>
           </a:p>
@@ -2267,7 +2273,7 @@
           <a:p>
             <a:fld id="{0617A84F-C5EA-4D1F-9163-CC9D70D46673}" type="datetimeFigureOut">
               <a:rPr lang="zh-CN" altLang="en-US" smtClean="0"/>
-              <a:t>2026/10/10</a:t>
+              <a:t>2026/10/11</a:t>
             </a:fld>
             <a:endParaRPr lang="zh-CN" altLang="en-US"/>
           </a:p>
@@ -2408,7 +2414,7 @@
           <a:p>
             <a:fld id="{0617A84F-C5EA-4D1F-9163-CC9D70D46673}" type="datetimeFigureOut">
               <a:rPr lang="zh-CN" altLang="en-US" smtClean="0"/>
-              <a:t>2026/10/10</a:t>
+              <a:t>2026/10/11</a:t>
             </a:fld>
             <a:endParaRPr lang="zh-CN" altLang="en-US"/>
           </a:p>
@@ -2521,7 +2527,7 @@
           <a:p>
             <a:fld id="{0617A84F-C5EA-4D1F-9163-CC9D70D46673}" type="datetimeFigureOut">
               <a:rPr lang="zh-CN" altLang="en-US" smtClean="0"/>
-              <a:t>2026/10/10</a:t>
+              <a:t>2026/10/11</a:t>
             </a:fld>
             <a:endParaRPr lang="zh-CN" altLang="en-US"/>
           </a:p>
@@ -2832,7 +2838,7 @@
           <a:p>
             <a:fld id="{0617A84F-C5EA-4D1F-9163-CC9D70D46673}" type="datetimeFigureOut">
               <a:rPr lang="zh-CN" altLang="en-US" smtClean="0"/>
-              <a:t>2026/10/10</a:t>
+              <a:t>2026/10/11</a:t>
             </a:fld>
             <a:endParaRPr lang="zh-CN" altLang="en-US"/>
           </a:p>
@@ -3120,7 +3126,7 @@
           <a:p>
             <a:fld id="{0617A84F-C5EA-4D1F-9163-CC9D70D46673}" type="datetimeFigureOut">
               <a:rPr lang="zh-CN" altLang="en-US" smtClean="0"/>
-              <a:t>2026/10/10</a:t>
+              <a:t>2026/10/11</a:t>
             </a:fld>
             <a:endParaRPr lang="zh-CN" altLang="en-US"/>
           </a:p>
@@ -3361,7 +3367,7 @@
           <a:p>
             <a:fld id="{0617A84F-C5EA-4D1F-9163-CC9D70D46673}" type="datetimeFigureOut">
               <a:rPr lang="zh-CN" altLang="en-US" smtClean="0"/>
-              <a:t>2026/10/10</a:t>
+              <a:t>2026/10/11</a:t>
             </a:fld>
             <a:endParaRPr lang="zh-CN" altLang="en-US"/>
           </a:p>
@@ -14774,6 +14780,1352 @@
           <a:chExt cx="0" cy="0"/>
         </a:xfrm>
       </p:grpSpPr>
+      <p:sp>
+        <p:nvSpPr>
+          <p:cNvPr id="15" name="文本框 14">
+            <a:extLst>
+              <a:ext uri="{FF2B5EF4-FFF2-40B4-BE49-F238E27FC236}">
+                <a16:creationId xmlns:a16="http://schemas.microsoft.com/office/drawing/2014/main" id="{6FDB5C2D-2C3E-93C0-FD82-F8CEA67889F3}"/>
+              </a:ext>
+            </a:extLst>
+          </p:cNvPr>
+          <p:cNvSpPr txBox="1"/>
+          <p:nvPr/>
+        </p:nvSpPr>
+        <p:spPr>
+          <a:xfrm>
+            <a:off x="3937757" y="2783066"/>
+            <a:ext cx="277640" cy="369332"/>
+          </a:xfrm>
+          <a:prstGeom prst="rect">
+            <a:avLst/>
+          </a:prstGeom>
+          <a:noFill/>
+        </p:spPr>
+        <p:txBody>
+          <a:bodyPr wrap="none" rtlCol="0">
+            <a:spAutoFit/>
+          </a:bodyPr>
+          <a:lstStyle/>
+          <a:p>
+            <a:r>
+              <a:rPr lang="en-US" altLang="zh-CN"/>
+              <a:t>•</a:t>
+            </a:r>
+            <a:endParaRPr lang="zh-CN" altLang="en-US"/>
+          </a:p>
+        </p:txBody>
+      </p:sp>
+      <p:sp>
+        <p:nvSpPr>
+          <p:cNvPr id="17" name="文本框 16">
+            <a:extLst>
+              <a:ext uri="{FF2B5EF4-FFF2-40B4-BE49-F238E27FC236}">
+                <a16:creationId xmlns:a16="http://schemas.microsoft.com/office/drawing/2014/main" id="{149C43ED-3AAA-94F0-F676-AC5A81298C32}"/>
+              </a:ext>
+            </a:extLst>
+          </p:cNvPr>
+          <p:cNvSpPr txBox="1"/>
+          <p:nvPr/>
+        </p:nvSpPr>
+        <p:spPr>
+          <a:xfrm>
+            <a:off x="2778047" y="2756712"/>
+            <a:ext cx="277640" cy="369332"/>
+          </a:xfrm>
+          <a:prstGeom prst="rect">
+            <a:avLst/>
+          </a:prstGeom>
+          <a:noFill/>
+        </p:spPr>
+        <p:txBody>
+          <a:bodyPr wrap="none" rtlCol="0">
+            <a:spAutoFit/>
+          </a:bodyPr>
+          <a:lstStyle/>
+          <a:p>
+            <a:r>
+              <a:rPr lang="en-US" altLang="zh-CN"/>
+              <a:t>•</a:t>
+            </a:r>
+            <a:endParaRPr lang="zh-CN" altLang="en-US"/>
+          </a:p>
+        </p:txBody>
+      </p:sp>
+      <p:sp>
+        <p:nvSpPr>
+          <p:cNvPr id="18" name="文本框 17">
+            <a:extLst>
+              <a:ext uri="{FF2B5EF4-FFF2-40B4-BE49-F238E27FC236}">
+                <a16:creationId xmlns:a16="http://schemas.microsoft.com/office/drawing/2014/main" id="{85B18242-29DD-056F-EBDD-87A14DCCC240}"/>
+              </a:ext>
+            </a:extLst>
+          </p:cNvPr>
+          <p:cNvSpPr txBox="1"/>
+          <p:nvPr/>
+        </p:nvSpPr>
+        <p:spPr>
+          <a:xfrm>
+            <a:off x="3331441" y="2783066"/>
+            <a:ext cx="277640" cy="369332"/>
+          </a:xfrm>
+          <a:prstGeom prst="rect">
+            <a:avLst/>
+          </a:prstGeom>
+          <a:noFill/>
+        </p:spPr>
+        <p:txBody>
+          <a:bodyPr wrap="square" rtlCol="0">
+            <a:spAutoFit/>
+          </a:bodyPr>
+          <a:lstStyle/>
+          <a:p>
+            <a:r>
+              <a:rPr lang="en-US" altLang="zh-CN"/>
+              <a:t>•</a:t>
+            </a:r>
+            <a:endParaRPr lang="zh-CN" altLang="en-US"/>
+          </a:p>
+        </p:txBody>
+      </p:sp>
+      <p:sp>
+        <p:nvSpPr>
+          <p:cNvPr id="21" name="文本框 20">
+            <a:extLst>
+              <a:ext uri="{FF2B5EF4-FFF2-40B4-BE49-F238E27FC236}">
+                <a16:creationId xmlns:a16="http://schemas.microsoft.com/office/drawing/2014/main" id="{45B44901-7870-69DB-505D-5493D502C1E1}"/>
+              </a:ext>
+            </a:extLst>
+          </p:cNvPr>
+          <p:cNvSpPr txBox="1"/>
+          <p:nvPr/>
+        </p:nvSpPr>
+        <p:spPr>
+          <a:xfrm>
+            <a:off x="5360824" y="2783066"/>
+            <a:ext cx="277640" cy="369332"/>
+          </a:xfrm>
+          <a:prstGeom prst="rect">
+            <a:avLst/>
+          </a:prstGeom>
+          <a:noFill/>
+        </p:spPr>
+        <p:txBody>
+          <a:bodyPr wrap="square" rtlCol="0">
+            <a:spAutoFit/>
+          </a:bodyPr>
+          <a:lstStyle/>
+          <a:p>
+            <a:r>
+              <a:rPr lang="en-US" altLang="zh-CN"/>
+              <a:t>•</a:t>
+            </a:r>
+            <a:endParaRPr lang="zh-CN" altLang="en-US"/>
+          </a:p>
+        </p:txBody>
+      </p:sp>
+      <p:sp>
+        <p:nvSpPr>
+          <p:cNvPr id="23" name="文本框 22">
+            <a:extLst>
+              <a:ext uri="{FF2B5EF4-FFF2-40B4-BE49-F238E27FC236}">
+                <a16:creationId xmlns:a16="http://schemas.microsoft.com/office/drawing/2014/main" id="{263BD97E-0768-CDC4-2F3F-DC3C6F70C5A4}"/>
+              </a:ext>
+            </a:extLst>
+          </p:cNvPr>
+          <p:cNvSpPr txBox="1"/>
+          <p:nvPr/>
+        </p:nvSpPr>
+        <p:spPr>
+          <a:xfrm>
+            <a:off x="5705100" y="2798788"/>
+            <a:ext cx="277640" cy="369332"/>
+          </a:xfrm>
+          <a:prstGeom prst="rect">
+            <a:avLst/>
+          </a:prstGeom>
+          <a:noFill/>
+        </p:spPr>
+        <p:txBody>
+          <a:bodyPr wrap="none" rtlCol="0">
+            <a:spAutoFit/>
+          </a:bodyPr>
+          <a:lstStyle/>
+          <a:p>
+            <a:r>
+              <a:rPr lang="en-US" altLang="zh-CN"/>
+              <a:t>•</a:t>
+            </a:r>
+            <a:endParaRPr lang="zh-CN" altLang="en-US"/>
+          </a:p>
+        </p:txBody>
+      </p:sp>
+      <p:sp>
+        <p:nvSpPr>
+          <p:cNvPr id="25" name="文本框 24">
+            <a:extLst>
+              <a:ext uri="{FF2B5EF4-FFF2-40B4-BE49-F238E27FC236}">
+                <a16:creationId xmlns:a16="http://schemas.microsoft.com/office/drawing/2014/main" id="{A5AF3E09-2B6B-3587-ABF3-1E8968526779}"/>
+              </a:ext>
+            </a:extLst>
+          </p:cNvPr>
+          <p:cNvSpPr txBox="1"/>
+          <p:nvPr/>
+        </p:nvSpPr>
+        <p:spPr>
+          <a:xfrm>
+            <a:off x="6327016" y="2798788"/>
+            <a:ext cx="277640" cy="369332"/>
+          </a:xfrm>
+          <a:prstGeom prst="rect">
+            <a:avLst/>
+          </a:prstGeom>
+          <a:noFill/>
+        </p:spPr>
+        <p:txBody>
+          <a:bodyPr wrap="square" rtlCol="0">
+            <a:spAutoFit/>
+          </a:bodyPr>
+          <a:lstStyle/>
+          <a:p>
+            <a:r>
+              <a:rPr lang="en-US" altLang="zh-CN"/>
+              <a:t>•</a:t>
+            </a:r>
+            <a:endParaRPr lang="zh-CN" altLang="en-US"/>
+          </a:p>
+        </p:txBody>
+      </p:sp>
+      <p:sp>
+        <p:nvSpPr>
+          <p:cNvPr id="27" name="文本框 26">
+            <a:extLst>
+              <a:ext uri="{FF2B5EF4-FFF2-40B4-BE49-F238E27FC236}">
+                <a16:creationId xmlns:a16="http://schemas.microsoft.com/office/drawing/2014/main" id="{E10A91E3-9556-F8C6-D369-E574D0998064}"/>
+              </a:ext>
+            </a:extLst>
+          </p:cNvPr>
+          <p:cNvSpPr txBox="1"/>
+          <p:nvPr/>
+        </p:nvSpPr>
+        <p:spPr>
+          <a:xfrm>
+            <a:off x="6645071" y="2798788"/>
+            <a:ext cx="277640" cy="369332"/>
+          </a:xfrm>
+          <a:prstGeom prst="rect">
+            <a:avLst/>
+          </a:prstGeom>
+          <a:noFill/>
+        </p:spPr>
+        <p:txBody>
+          <a:bodyPr wrap="none" rtlCol="0">
+            <a:spAutoFit/>
+          </a:bodyPr>
+          <a:lstStyle/>
+          <a:p>
+            <a:r>
+              <a:rPr lang="en-US" altLang="zh-CN"/>
+              <a:t>•</a:t>
+            </a:r>
+            <a:endParaRPr lang="zh-CN" altLang="en-US"/>
+          </a:p>
+        </p:txBody>
+      </p:sp>
+      <p:sp>
+        <p:nvSpPr>
+          <p:cNvPr id="29" name="文本框 28">
+            <a:extLst>
+              <a:ext uri="{FF2B5EF4-FFF2-40B4-BE49-F238E27FC236}">
+                <a16:creationId xmlns:a16="http://schemas.microsoft.com/office/drawing/2014/main" id="{2FE94AF4-AE35-8622-1DF5-5F4C1179BF7F}"/>
+              </a:ext>
+            </a:extLst>
+          </p:cNvPr>
+          <p:cNvSpPr txBox="1"/>
+          <p:nvPr/>
+        </p:nvSpPr>
+        <p:spPr>
+          <a:xfrm>
+            <a:off x="7231255" y="2802624"/>
+            <a:ext cx="277640" cy="369332"/>
+          </a:xfrm>
+          <a:prstGeom prst="rect">
+            <a:avLst/>
+          </a:prstGeom>
+          <a:noFill/>
+        </p:spPr>
+        <p:txBody>
+          <a:bodyPr wrap="square" rtlCol="0">
+            <a:spAutoFit/>
+          </a:bodyPr>
+          <a:lstStyle/>
+          <a:p>
+            <a:r>
+              <a:rPr lang="en-US" altLang="zh-CN"/>
+              <a:t>•</a:t>
+            </a:r>
+            <a:endParaRPr lang="zh-CN" altLang="en-US"/>
+          </a:p>
+        </p:txBody>
+      </p:sp>
+      <p:cxnSp>
+        <p:nvCxnSpPr>
+          <p:cNvPr id="30" name="直接连接符 29">
+            <a:extLst>
+              <a:ext uri="{FF2B5EF4-FFF2-40B4-BE49-F238E27FC236}">
+                <a16:creationId xmlns:a16="http://schemas.microsoft.com/office/drawing/2014/main" id="{1DDDB4C7-0EF0-E872-1A50-527D5AD7F8F7}"/>
+              </a:ext>
+            </a:extLst>
+          </p:cNvPr>
+          <p:cNvCxnSpPr>
+            <a:cxnSpLocks/>
+            <a:endCxn id="31" idx="1"/>
+          </p:cNvCxnSpPr>
+          <p:nvPr/>
+        </p:nvCxnSpPr>
+        <p:spPr>
+          <a:xfrm flipH="1">
+            <a:off x="3410554" y="2957257"/>
+            <a:ext cx="54239" cy="454984"/>
+          </a:xfrm>
+          <a:prstGeom prst="line">
+            <a:avLst/>
+          </a:prstGeom>
+        </p:spPr>
+        <p:style>
+          <a:lnRef idx="2">
+            <a:schemeClr val="dk1"/>
+          </a:lnRef>
+          <a:fillRef idx="0">
+            <a:schemeClr val="dk1"/>
+          </a:fillRef>
+          <a:effectRef idx="1">
+            <a:schemeClr val="dk1"/>
+          </a:effectRef>
+          <a:fontRef idx="minor">
+            <a:schemeClr val="tx1"/>
+          </a:fontRef>
+        </p:style>
+      </p:cxnSp>
+      <p:sp>
+        <p:nvSpPr>
+          <p:cNvPr id="31" name="文本框 30">
+            <a:extLst>
+              <a:ext uri="{FF2B5EF4-FFF2-40B4-BE49-F238E27FC236}">
+                <a16:creationId xmlns:a16="http://schemas.microsoft.com/office/drawing/2014/main" id="{633F07D4-0114-412E-A2BB-A71E8E3C5F8F}"/>
+              </a:ext>
+            </a:extLst>
+          </p:cNvPr>
+          <p:cNvSpPr txBox="1"/>
+          <p:nvPr/>
+        </p:nvSpPr>
+        <p:spPr>
+          <a:xfrm>
+            <a:off x="3410554" y="3227575"/>
+            <a:ext cx="277640" cy="369332"/>
+          </a:xfrm>
+          <a:prstGeom prst="rect">
+            <a:avLst/>
+          </a:prstGeom>
+          <a:noFill/>
+        </p:spPr>
+        <p:txBody>
+          <a:bodyPr wrap="none" rtlCol="0">
+            <a:spAutoFit/>
+          </a:bodyPr>
+          <a:lstStyle/>
+          <a:p>
+            <a:r>
+              <a:rPr lang="en-US" altLang="zh-CN"/>
+              <a:t>•</a:t>
+            </a:r>
+            <a:endParaRPr lang="zh-CN" altLang="en-US"/>
+          </a:p>
+        </p:txBody>
+      </p:sp>
+      <p:cxnSp>
+        <p:nvCxnSpPr>
+          <p:cNvPr id="32" name="直接连接符 31">
+            <a:extLst>
+              <a:ext uri="{FF2B5EF4-FFF2-40B4-BE49-F238E27FC236}">
+                <a16:creationId xmlns:a16="http://schemas.microsoft.com/office/drawing/2014/main" id="{E6F3E6C1-B4C2-BBCA-45FF-C99D91C1806A}"/>
+              </a:ext>
+            </a:extLst>
+          </p:cNvPr>
+          <p:cNvCxnSpPr>
+            <a:cxnSpLocks/>
+          </p:cNvCxnSpPr>
+          <p:nvPr/>
+        </p:nvCxnSpPr>
+        <p:spPr>
+          <a:xfrm>
+            <a:off x="3464793" y="2957257"/>
+            <a:ext cx="73557" cy="454984"/>
+          </a:xfrm>
+          <a:prstGeom prst="line">
+            <a:avLst/>
+          </a:prstGeom>
+        </p:spPr>
+        <p:style>
+          <a:lnRef idx="2">
+            <a:schemeClr val="dk1"/>
+          </a:lnRef>
+          <a:fillRef idx="0">
+            <a:schemeClr val="dk1"/>
+          </a:fillRef>
+          <a:effectRef idx="1">
+            <a:schemeClr val="dk1"/>
+          </a:effectRef>
+          <a:fontRef idx="minor">
+            <a:schemeClr val="tx1"/>
+          </a:fontRef>
+        </p:style>
+      </p:cxnSp>
+      <p:sp>
+        <p:nvSpPr>
+          <p:cNvPr id="33" name="文本框 32">
+            <a:extLst>
+              <a:ext uri="{FF2B5EF4-FFF2-40B4-BE49-F238E27FC236}">
+                <a16:creationId xmlns:a16="http://schemas.microsoft.com/office/drawing/2014/main" id="{2B20AEA2-FB7E-BC65-8A5A-82ED3A67DC9A}"/>
+              </a:ext>
+            </a:extLst>
+          </p:cNvPr>
+          <p:cNvSpPr txBox="1"/>
+          <p:nvPr/>
+        </p:nvSpPr>
+        <p:spPr>
+          <a:xfrm>
+            <a:off x="3271425" y="3244089"/>
+            <a:ext cx="277640" cy="369332"/>
+          </a:xfrm>
+          <a:prstGeom prst="rect">
+            <a:avLst/>
+          </a:prstGeom>
+          <a:noFill/>
+        </p:spPr>
+        <p:txBody>
+          <a:bodyPr wrap="none" rtlCol="0">
+            <a:spAutoFit/>
+          </a:bodyPr>
+          <a:lstStyle/>
+          <a:p>
+            <a:r>
+              <a:rPr lang="en-US" altLang="zh-CN"/>
+              <a:t>•</a:t>
+            </a:r>
+            <a:endParaRPr lang="zh-CN" altLang="en-US"/>
+          </a:p>
+        </p:txBody>
+      </p:sp>
+      <p:cxnSp>
+        <p:nvCxnSpPr>
+          <p:cNvPr id="34" name="直接连接符 33">
+            <a:extLst>
+              <a:ext uri="{FF2B5EF4-FFF2-40B4-BE49-F238E27FC236}">
+                <a16:creationId xmlns:a16="http://schemas.microsoft.com/office/drawing/2014/main" id="{07A5507C-1DD6-ECCC-BBA1-EC08CB5B143F}"/>
+              </a:ext>
+            </a:extLst>
+          </p:cNvPr>
+          <p:cNvCxnSpPr>
+            <a:cxnSpLocks/>
+            <a:endCxn id="36" idx="1"/>
+          </p:cNvCxnSpPr>
+          <p:nvPr/>
+        </p:nvCxnSpPr>
+        <p:spPr>
+          <a:xfrm flipH="1">
+            <a:off x="2866772" y="2967732"/>
+            <a:ext cx="54239" cy="454984"/>
+          </a:xfrm>
+          <a:prstGeom prst="line">
+            <a:avLst/>
+          </a:prstGeom>
+        </p:spPr>
+        <p:style>
+          <a:lnRef idx="2">
+            <a:schemeClr val="dk1"/>
+          </a:lnRef>
+          <a:fillRef idx="0">
+            <a:schemeClr val="dk1"/>
+          </a:fillRef>
+          <a:effectRef idx="1">
+            <a:schemeClr val="dk1"/>
+          </a:effectRef>
+          <a:fontRef idx="minor">
+            <a:schemeClr val="tx1"/>
+          </a:fontRef>
+        </p:style>
+      </p:cxnSp>
+      <p:sp>
+        <p:nvSpPr>
+          <p:cNvPr id="35" name="文本框 34">
+            <a:extLst>
+              <a:ext uri="{FF2B5EF4-FFF2-40B4-BE49-F238E27FC236}">
+                <a16:creationId xmlns:a16="http://schemas.microsoft.com/office/drawing/2014/main" id="{B0F90E02-5A59-A4FE-4A82-0D12942DC054}"/>
+              </a:ext>
+            </a:extLst>
+          </p:cNvPr>
+          <p:cNvSpPr txBox="1"/>
+          <p:nvPr/>
+        </p:nvSpPr>
+        <p:spPr>
+          <a:xfrm>
+            <a:off x="2716928" y="3241051"/>
+            <a:ext cx="277640" cy="369332"/>
+          </a:xfrm>
+          <a:prstGeom prst="rect">
+            <a:avLst/>
+          </a:prstGeom>
+          <a:noFill/>
+        </p:spPr>
+        <p:txBody>
+          <a:bodyPr wrap="none" rtlCol="0">
+            <a:spAutoFit/>
+          </a:bodyPr>
+          <a:lstStyle/>
+          <a:p>
+            <a:r>
+              <a:rPr lang="en-US" altLang="zh-CN"/>
+              <a:t>•</a:t>
+            </a:r>
+            <a:endParaRPr lang="zh-CN" altLang="en-US"/>
+          </a:p>
+        </p:txBody>
+      </p:sp>
+      <p:sp>
+        <p:nvSpPr>
+          <p:cNvPr id="36" name="文本框 35">
+            <a:extLst>
+              <a:ext uri="{FF2B5EF4-FFF2-40B4-BE49-F238E27FC236}">
+                <a16:creationId xmlns:a16="http://schemas.microsoft.com/office/drawing/2014/main" id="{5A74A245-D17F-A62F-07A4-6F1E81C87992}"/>
+              </a:ext>
+            </a:extLst>
+          </p:cNvPr>
+          <p:cNvSpPr txBox="1"/>
+          <p:nvPr/>
+        </p:nvSpPr>
+        <p:spPr>
+          <a:xfrm>
+            <a:off x="2866772" y="3238050"/>
+            <a:ext cx="277640" cy="369332"/>
+          </a:xfrm>
+          <a:prstGeom prst="rect">
+            <a:avLst/>
+          </a:prstGeom>
+          <a:noFill/>
+        </p:spPr>
+        <p:txBody>
+          <a:bodyPr wrap="none" rtlCol="0">
+            <a:spAutoFit/>
+          </a:bodyPr>
+          <a:lstStyle/>
+          <a:p>
+            <a:r>
+              <a:rPr lang="en-US" altLang="zh-CN"/>
+              <a:t>•</a:t>
+            </a:r>
+            <a:endParaRPr lang="zh-CN" altLang="en-US"/>
+          </a:p>
+        </p:txBody>
+      </p:sp>
+      <p:cxnSp>
+        <p:nvCxnSpPr>
+          <p:cNvPr id="37" name="直接连接符 36">
+            <a:extLst>
+              <a:ext uri="{FF2B5EF4-FFF2-40B4-BE49-F238E27FC236}">
+                <a16:creationId xmlns:a16="http://schemas.microsoft.com/office/drawing/2014/main" id="{61AB97AC-7962-5CE0-71DE-48AE36F2A3FC}"/>
+              </a:ext>
+            </a:extLst>
+          </p:cNvPr>
+          <p:cNvCxnSpPr>
+            <a:cxnSpLocks/>
+          </p:cNvCxnSpPr>
+          <p:nvPr/>
+        </p:nvCxnSpPr>
+        <p:spPr>
+          <a:xfrm>
+            <a:off x="2921011" y="2967732"/>
+            <a:ext cx="73557" cy="454984"/>
+          </a:xfrm>
+          <a:prstGeom prst="line">
+            <a:avLst/>
+          </a:prstGeom>
+        </p:spPr>
+        <p:style>
+          <a:lnRef idx="2">
+            <a:schemeClr val="dk1"/>
+          </a:lnRef>
+          <a:fillRef idx="0">
+            <a:schemeClr val="dk1"/>
+          </a:fillRef>
+          <a:effectRef idx="1">
+            <a:schemeClr val="dk1"/>
+          </a:effectRef>
+          <a:fontRef idx="minor">
+            <a:schemeClr val="tx1"/>
+          </a:fontRef>
+        </p:style>
+      </p:cxnSp>
+      <p:cxnSp>
+        <p:nvCxnSpPr>
+          <p:cNvPr id="38" name="直接连接符 37">
+            <a:extLst>
+              <a:ext uri="{FF2B5EF4-FFF2-40B4-BE49-F238E27FC236}">
+                <a16:creationId xmlns:a16="http://schemas.microsoft.com/office/drawing/2014/main" id="{7E32F473-CA3C-EB4E-9411-3ADB4C8A9109}"/>
+              </a:ext>
+            </a:extLst>
+          </p:cNvPr>
+          <p:cNvCxnSpPr>
+            <a:cxnSpLocks/>
+            <a:endCxn id="40" idx="1"/>
+          </p:cNvCxnSpPr>
+          <p:nvPr/>
+        </p:nvCxnSpPr>
+        <p:spPr>
+          <a:xfrm flipH="1">
+            <a:off x="4022338" y="2935450"/>
+            <a:ext cx="54239" cy="454984"/>
+          </a:xfrm>
+          <a:prstGeom prst="line">
+            <a:avLst/>
+          </a:prstGeom>
+        </p:spPr>
+        <p:style>
+          <a:lnRef idx="2">
+            <a:schemeClr val="dk1"/>
+          </a:lnRef>
+          <a:fillRef idx="0">
+            <a:schemeClr val="dk1"/>
+          </a:fillRef>
+          <a:effectRef idx="1">
+            <a:schemeClr val="dk1"/>
+          </a:effectRef>
+          <a:fontRef idx="minor">
+            <a:schemeClr val="tx1"/>
+          </a:fontRef>
+        </p:style>
+      </p:cxnSp>
+      <p:sp>
+        <p:nvSpPr>
+          <p:cNvPr id="39" name="文本框 38">
+            <a:extLst>
+              <a:ext uri="{FF2B5EF4-FFF2-40B4-BE49-F238E27FC236}">
+                <a16:creationId xmlns:a16="http://schemas.microsoft.com/office/drawing/2014/main" id="{887BF02E-A865-C5B7-A43E-65B73E310AA8}"/>
+              </a:ext>
+            </a:extLst>
+          </p:cNvPr>
+          <p:cNvSpPr txBox="1"/>
+          <p:nvPr/>
+        </p:nvSpPr>
+        <p:spPr>
+          <a:xfrm>
+            <a:off x="3872494" y="3208769"/>
+            <a:ext cx="277640" cy="369332"/>
+          </a:xfrm>
+          <a:prstGeom prst="rect">
+            <a:avLst/>
+          </a:prstGeom>
+          <a:noFill/>
+        </p:spPr>
+        <p:txBody>
+          <a:bodyPr wrap="none" rtlCol="0">
+            <a:spAutoFit/>
+          </a:bodyPr>
+          <a:lstStyle/>
+          <a:p>
+            <a:r>
+              <a:rPr lang="en-US" altLang="zh-CN"/>
+              <a:t>•</a:t>
+            </a:r>
+            <a:endParaRPr lang="zh-CN" altLang="en-US"/>
+          </a:p>
+        </p:txBody>
+      </p:sp>
+      <p:sp>
+        <p:nvSpPr>
+          <p:cNvPr id="40" name="文本框 39">
+            <a:extLst>
+              <a:ext uri="{FF2B5EF4-FFF2-40B4-BE49-F238E27FC236}">
+                <a16:creationId xmlns:a16="http://schemas.microsoft.com/office/drawing/2014/main" id="{8AD171F2-E81E-8588-FA0E-EE2BD4A2D141}"/>
+              </a:ext>
+            </a:extLst>
+          </p:cNvPr>
+          <p:cNvSpPr txBox="1"/>
+          <p:nvPr/>
+        </p:nvSpPr>
+        <p:spPr>
+          <a:xfrm>
+            <a:off x="4022338" y="3205768"/>
+            <a:ext cx="277640" cy="369332"/>
+          </a:xfrm>
+          <a:prstGeom prst="rect">
+            <a:avLst/>
+          </a:prstGeom>
+          <a:noFill/>
+        </p:spPr>
+        <p:txBody>
+          <a:bodyPr wrap="none" rtlCol="0">
+            <a:spAutoFit/>
+          </a:bodyPr>
+          <a:lstStyle/>
+          <a:p>
+            <a:r>
+              <a:rPr lang="en-US" altLang="zh-CN"/>
+              <a:t>•</a:t>
+            </a:r>
+            <a:endParaRPr lang="zh-CN" altLang="en-US"/>
+          </a:p>
+        </p:txBody>
+      </p:sp>
+      <p:cxnSp>
+        <p:nvCxnSpPr>
+          <p:cNvPr id="41" name="直接连接符 40">
+            <a:extLst>
+              <a:ext uri="{FF2B5EF4-FFF2-40B4-BE49-F238E27FC236}">
+                <a16:creationId xmlns:a16="http://schemas.microsoft.com/office/drawing/2014/main" id="{38BA6931-D546-DF5E-CB61-521C0F2E5B5B}"/>
+              </a:ext>
+            </a:extLst>
+          </p:cNvPr>
+          <p:cNvCxnSpPr>
+            <a:cxnSpLocks/>
+          </p:cNvCxnSpPr>
+          <p:nvPr/>
+        </p:nvCxnSpPr>
+        <p:spPr>
+          <a:xfrm>
+            <a:off x="4076577" y="2935450"/>
+            <a:ext cx="73557" cy="454984"/>
+          </a:xfrm>
+          <a:prstGeom prst="line">
+            <a:avLst/>
+          </a:prstGeom>
+        </p:spPr>
+        <p:style>
+          <a:lnRef idx="2">
+            <a:schemeClr val="dk1"/>
+          </a:lnRef>
+          <a:fillRef idx="0">
+            <a:schemeClr val="dk1"/>
+          </a:fillRef>
+          <a:effectRef idx="1">
+            <a:schemeClr val="dk1"/>
+          </a:effectRef>
+          <a:fontRef idx="minor">
+            <a:schemeClr val="tx1"/>
+          </a:fontRef>
+        </p:style>
+      </p:cxnSp>
+      <p:sp>
+        <p:nvSpPr>
+          <p:cNvPr id="43" name="文本框 42">
+            <a:extLst>
+              <a:ext uri="{FF2B5EF4-FFF2-40B4-BE49-F238E27FC236}">
+                <a16:creationId xmlns:a16="http://schemas.microsoft.com/office/drawing/2014/main" id="{C0874E38-37D9-FF19-68B5-3F9CDAB58A22}"/>
+              </a:ext>
+            </a:extLst>
+          </p:cNvPr>
+          <p:cNvSpPr txBox="1"/>
+          <p:nvPr/>
+        </p:nvSpPr>
+        <p:spPr>
+          <a:xfrm>
+            <a:off x="6953615" y="2802624"/>
+            <a:ext cx="277640" cy="369332"/>
+          </a:xfrm>
+          <a:prstGeom prst="rect">
+            <a:avLst/>
+          </a:prstGeom>
+          <a:noFill/>
+        </p:spPr>
+        <p:txBody>
+          <a:bodyPr wrap="none" rtlCol="0">
+            <a:spAutoFit/>
+          </a:bodyPr>
+          <a:lstStyle/>
+          <a:p>
+            <a:r>
+              <a:rPr lang="en-US" altLang="zh-CN"/>
+              <a:t>•</a:t>
+            </a:r>
+            <a:endParaRPr lang="zh-CN" altLang="en-US"/>
+          </a:p>
+        </p:txBody>
+      </p:sp>
+      <p:sp>
+        <p:nvSpPr>
+          <p:cNvPr id="44" name="文本框 43">
+            <a:extLst>
+              <a:ext uri="{FF2B5EF4-FFF2-40B4-BE49-F238E27FC236}">
+                <a16:creationId xmlns:a16="http://schemas.microsoft.com/office/drawing/2014/main" id="{6544E3A9-F2FB-0CE2-DDA4-82D14D6B6A0F}"/>
+              </a:ext>
+            </a:extLst>
+          </p:cNvPr>
+          <p:cNvSpPr txBox="1"/>
+          <p:nvPr/>
+        </p:nvSpPr>
+        <p:spPr>
+          <a:xfrm>
+            <a:off x="6016419" y="2798788"/>
+            <a:ext cx="277640" cy="369332"/>
+          </a:xfrm>
+          <a:prstGeom prst="rect">
+            <a:avLst/>
+          </a:prstGeom>
+          <a:noFill/>
+        </p:spPr>
+        <p:txBody>
+          <a:bodyPr wrap="none" rtlCol="0">
+            <a:spAutoFit/>
+          </a:bodyPr>
+          <a:lstStyle/>
+          <a:p>
+            <a:r>
+              <a:rPr lang="en-US" altLang="zh-CN"/>
+              <a:t>•</a:t>
+            </a:r>
+            <a:endParaRPr lang="zh-CN" altLang="en-US"/>
+          </a:p>
+        </p:txBody>
+      </p:sp>
+      <p:sp>
+        <p:nvSpPr>
+          <p:cNvPr id="62" name="左大括号 61">
+            <a:extLst>
+              <a:ext uri="{FF2B5EF4-FFF2-40B4-BE49-F238E27FC236}">
+                <a16:creationId xmlns:a16="http://schemas.microsoft.com/office/drawing/2014/main" id="{94B7B801-A9CB-6469-854C-B160692C0AD6}"/>
+              </a:ext>
+            </a:extLst>
+          </p:cNvPr>
+          <p:cNvSpPr/>
+          <p:nvPr/>
+        </p:nvSpPr>
+        <p:spPr>
+          <a:xfrm>
+            <a:off x="2310679" y="612603"/>
+            <a:ext cx="346148" cy="1954922"/>
+          </a:xfrm>
+          <a:prstGeom prst="leftBrace">
+            <a:avLst>
+              <a:gd name="adj1" fmla="val 38263"/>
+              <a:gd name="adj2" fmla="val 50000"/>
+            </a:avLst>
+          </a:prstGeom>
+        </p:spPr>
+        <p:style>
+          <a:lnRef idx="2">
+            <a:schemeClr val="dk1"/>
+          </a:lnRef>
+          <a:fillRef idx="0">
+            <a:schemeClr val="dk1"/>
+          </a:fillRef>
+          <a:effectRef idx="1">
+            <a:schemeClr val="dk1"/>
+          </a:effectRef>
+          <a:fontRef idx="minor">
+            <a:schemeClr val="tx1"/>
+          </a:fontRef>
+        </p:style>
+        <p:txBody>
+          <a:bodyPr rtlCol="0" anchor="ctr"/>
+          <a:lstStyle/>
+          <a:p>
+            <a:pPr algn="ctr"/>
+            <a:endParaRPr lang="zh-CN" altLang="en-US"/>
+          </a:p>
+        </p:txBody>
+      </p:sp>
+      <p:sp>
+        <p:nvSpPr>
+          <p:cNvPr id="63" name="文本框 62">
+            <a:extLst>
+              <a:ext uri="{FF2B5EF4-FFF2-40B4-BE49-F238E27FC236}">
+                <a16:creationId xmlns:a16="http://schemas.microsoft.com/office/drawing/2014/main" id="{DB27E2D1-C5E2-5742-A835-6469B39F49CB}"/>
+              </a:ext>
+            </a:extLst>
+          </p:cNvPr>
+          <p:cNvSpPr txBox="1"/>
+          <p:nvPr/>
+        </p:nvSpPr>
+        <p:spPr>
+          <a:xfrm>
+            <a:off x="1202683" y="1538278"/>
+            <a:ext cx="1005403" cy="338554"/>
+          </a:xfrm>
+          <a:prstGeom prst="rect">
+            <a:avLst/>
+          </a:prstGeom>
+          <a:noFill/>
+        </p:spPr>
+        <p:txBody>
+          <a:bodyPr wrap="none" rtlCol="0">
+            <a:spAutoFit/>
+          </a:bodyPr>
+          <a:lstStyle/>
+          <a:p>
+            <a:r>
+              <a:rPr lang="zh-CN" altLang="en-US" sz="1600"/>
+              <a:t>前五层满</a:t>
+            </a:r>
+          </a:p>
+        </p:txBody>
+      </p:sp>
+      <p:sp>
+        <p:nvSpPr>
+          <p:cNvPr id="64" name="文本框 63">
+            <a:extLst>
+              <a:ext uri="{FF2B5EF4-FFF2-40B4-BE49-F238E27FC236}">
+                <a16:creationId xmlns:a16="http://schemas.microsoft.com/office/drawing/2014/main" id="{D9A77D40-6F39-91EC-FA50-F12BBFEB68D5}"/>
+              </a:ext>
+            </a:extLst>
+          </p:cNvPr>
+          <p:cNvSpPr txBox="1"/>
+          <p:nvPr/>
+        </p:nvSpPr>
+        <p:spPr>
+          <a:xfrm>
+            <a:off x="4571632" y="2836436"/>
+            <a:ext cx="346570" cy="369332"/>
+          </a:xfrm>
+          <a:prstGeom prst="rect">
+            <a:avLst/>
+          </a:prstGeom>
+          <a:noFill/>
+        </p:spPr>
+        <p:txBody>
+          <a:bodyPr wrap="none" rtlCol="0">
+            <a:spAutoFit/>
+          </a:bodyPr>
+          <a:lstStyle/>
+          <a:p>
+            <a:r>
+              <a:rPr lang="en-US" altLang="zh-CN"/>
+              <a:t>…</a:t>
+            </a:r>
+            <a:endParaRPr lang="zh-CN" altLang="en-US"/>
+          </a:p>
+        </p:txBody>
+      </p:sp>
+      <p:sp>
+        <p:nvSpPr>
+          <p:cNvPr id="65" name="文本框 64">
+            <a:extLst>
+              <a:ext uri="{FF2B5EF4-FFF2-40B4-BE49-F238E27FC236}">
+                <a16:creationId xmlns:a16="http://schemas.microsoft.com/office/drawing/2014/main" id="{45DB421C-C852-EBF3-F60A-5BC0484EEA5B}"/>
+              </a:ext>
+            </a:extLst>
+          </p:cNvPr>
+          <p:cNvSpPr txBox="1"/>
+          <p:nvPr/>
+        </p:nvSpPr>
+        <p:spPr>
+          <a:xfrm>
+            <a:off x="593453" y="2783066"/>
+            <a:ext cx="2031325" cy="338554"/>
+          </a:xfrm>
+          <a:prstGeom prst="rect">
+            <a:avLst/>
+          </a:prstGeom>
+          <a:noFill/>
+        </p:spPr>
+        <p:txBody>
+          <a:bodyPr wrap="none" rtlCol="0">
+            <a:spAutoFit/>
+          </a:bodyPr>
+          <a:lstStyle/>
+          <a:p>
+            <a:r>
+              <a:rPr lang="zh-CN" altLang="en-US" sz="1600"/>
+              <a:t>第六层（也是满的）</a:t>
+            </a:r>
+          </a:p>
+        </p:txBody>
+      </p:sp>
+      <p:sp>
+        <p:nvSpPr>
+          <p:cNvPr id="66" name="文本框 65">
+            <a:extLst>
+              <a:ext uri="{FF2B5EF4-FFF2-40B4-BE49-F238E27FC236}">
+                <a16:creationId xmlns:a16="http://schemas.microsoft.com/office/drawing/2014/main" id="{EE0CF29B-F6FB-45F6-7F5E-5B4A6FE03A28}"/>
+              </a:ext>
+            </a:extLst>
+          </p:cNvPr>
+          <p:cNvSpPr txBox="1"/>
+          <p:nvPr/>
+        </p:nvSpPr>
+        <p:spPr>
+          <a:xfrm>
+            <a:off x="1746642" y="3258353"/>
+            <a:ext cx="800219" cy="338554"/>
+          </a:xfrm>
+          <a:prstGeom prst="rect">
+            <a:avLst/>
+          </a:prstGeom>
+          <a:noFill/>
+        </p:spPr>
+        <p:txBody>
+          <a:bodyPr wrap="none" rtlCol="0">
+            <a:spAutoFit/>
+          </a:bodyPr>
+          <a:lstStyle/>
+          <a:p>
+            <a:r>
+              <a:rPr lang="zh-CN" altLang="en-US" sz="1600"/>
+              <a:t>第七层</a:t>
+            </a:r>
+          </a:p>
+        </p:txBody>
+      </p:sp>
+      <p:sp>
+        <p:nvSpPr>
+          <p:cNvPr id="68" name="文本框 67">
+            <a:extLst>
+              <a:ext uri="{FF2B5EF4-FFF2-40B4-BE49-F238E27FC236}">
+                <a16:creationId xmlns:a16="http://schemas.microsoft.com/office/drawing/2014/main" id="{39C0B37A-EE50-23E0-5810-07B84F936800}"/>
+              </a:ext>
+            </a:extLst>
+          </p:cNvPr>
+          <p:cNvSpPr txBox="1"/>
+          <p:nvPr/>
+        </p:nvSpPr>
+        <p:spPr>
+          <a:xfrm>
+            <a:off x="7575531" y="2797477"/>
+            <a:ext cx="277640" cy="369332"/>
+          </a:xfrm>
+          <a:prstGeom prst="rect">
+            <a:avLst/>
+          </a:prstGeom>
+          <a:noFill/>
+        </p:spPr>
+        <p:txBody>
+          <a:bodyPr wrap="square" rtlCol="0">
+            <a:spAutoFit/>
+          </a:bodyPr>
+          <a:lstStyle/>
+          <a:p>
+            <a:r>
+              <a:rPr lang="en-US" altLang="zh-CN"/>
+              <a:t>•</a:t>
+            </a:r>
+            <a:endParaRPr lang="zh-CN" altLang="en-US"/>
+          </a:p>
+        </p:txBody>
+      </p:sp>
+      <p:sp>
+        <p:nvSpPr>
+          <p:cNvPr id="69" name="左大括号 68">
+            <a:extLst>
+              <a:ext uri="{FF2B5EF4-FFF2-40B4-BE49-F238E27FC236}">
+                <a16:creationId xmlns:a16="http://schemas.microsoft.com/office/drawing/2014/main" id="{9A29E390-ACBA-B6F0-1638-144F184FC792}"/>
+              </a:ext>
+            </a:extLst>
+          </p:cNvPr>
+          <p:cNvSpPr/>
+          <p:nvPr/>
+        </p:nvSpPr>
+        <p:spPr>
+          <a:xfrm rot="16200000">
+            <a:off x="6515369" y="2086461"/>
+            <a:ext cx="183258" cy="2336220"/>
+          </a:xfrm>
+          <a:prstGeom prst="leftBrace">
+            <a:avLst>
+              <a:gd name="adj1" fmla="val 35606"/>
+              <a:gd name="adj2" fmla="val 48644"/>
+            </a:avLst>
+          </a:prstGeom>
+        </p:spPr>
+        <p:style>
+          <a:lnRef idx="2">
+            <a:schemeClr val="dk1"/>
+          </a:lnRef>
+          <a:fillRef idx="0">
+            <a:schemeClr val="dk1"/>
+          </a:fillRef>
+          <a:effectRef idx="1">
+            <a:schemeClr val="dk1"/>
+          </a:effectRef>
+          <a:fontRef idx="minor">
+            <a:schemeClr val="tx1"/>
+          </a:fontRef>
+        </p:style>
+        <p:txBody>
+          <a:bodyPr rtlCol="0" anchor="ctr"/>
+          <a:lstStyle/>
+          <a:p>
+            <a:pPr algn="ctr"/>
+            <a:endParaRPr lang="zh-CN" altLang="en-US"/>
+          </a:p>
+        </p:txBody>
+      </p:sp>
+      <p:sp>
+        <p:nvSpPr>
+          <p:cNvPr id="70" name="文本框 69">
+            <a:extLst>
+              <a:ext uri="{FF2B5EF4-FFF2-40B4-BE49-F238E27FC236}">
+                <a16:creationId xmlns:a16="http://schemas.microsoft.com/office/drawing/2014/main" id="{9B3795A6-49C5-23EF-4EA7-8F3EF7F63D9D}"/>
+              </a:ext>
+            </a:extLst>
+          </p:cNvPr>
+          <p:cNvSpPr txBox="1"/>
+          <p:nvPr/>
+        </p:nvSpPr>
+        <p:spPr>
+          <a:xfrm>
+            <a:off x="5383158" y="3427630"/>
+            <a:ext cx="2549096" cy="338554"/>
+          </a:xfrm>
+          <a:prstGeom prst="rect">
+            <a:avLst/>
+          </a:prstGeom>
+          <a:noFill/>
+        </p:spPr>
+        <p:txBody>
+          <a:bodyPr wrap="none" rtlCol="0">
+            <a:spAutoFit/>
+          </a:bodyPr>
+          <a:lstStyle/>
+          <a:p>
+            <a:r>
+              <a:rPr lang="en-US" altLang="zh-CN" sz="1600"/>
+              <a:t>8</a:t>
+            </a:r>
+            <a:r>
+              <a:rPr lang="zh-CN" altLang="en-US" sz="1600"/>
+              <a:t>个叶节点，一定在最右边</a:t>
+            </a:r>
+          </a:p>
+        </p:txBody>
+      </p:sp>
+      <p:sp>
+        <p:nvSpPr>
+          <p:cNvPr id="73" name="云形 72">
+            <a:extLst>
+              <a:ext uri="{FF2B5EF4-FFF2-40B4-BE49-F238E27FC236}">
+                <a16:creationId xmlns:a16="http://schemas.microsoft.com/office/drawing/2014/main" id="{505C86E6-F75D-479B-461D-112D3CA2FE7F}"/>
+              </a:ext>
+            </a:extLst>
+          </p:cNvPr>
+          <p:cNvSpPr/>
+          <p:nvPr/>
+        </p:nvSpPr>
+        <p:spPr>
+          <a:xfrm>
+            <a:off x="2994568" y="286610"/>
+            <a:ext cx="3809203" cy="2367750"/>
+          </a:xfrm>
+          <a:prstGeom prst="cloud">
+            <a:avLst/>
+          </a:prstGeom>
+        </p:spPr>
+        <p:style>
+          <a:lnRef idx="2">
+            <a:schemeClr val="dk1"/>
+          </a:lnRef>
+          <a:fillRef idx="1">
+            <a:schemeClr val="lt1"/>
+          </a:fillRef>
+          <a:effectRef idx="0">
+            <a:schemeClr val="dk1"/>
+          </a:effectRef>
+          <a:fontRef idx="minor">
+            <a:schemeClr val="dk1"/>
+          </a:fontRef>
+        </p:style>
+        <p:txBody>
+          <a:bodyPr rtlCol="0" anchor="ctr"/>
+          <a:lstStyle/>
+          <a:p>
+            <a:pPr algn="ctr"/>
+            <a:endParaRPr lang="zh-CN" altLang="en-US"/>
+          </a:p>
+        </p:txBody>
+      </p:sp>
+      <p:cxnSp>
+        <p:nvCxnSpPr>
+          <p:cNvPr id="76" name="直接连接符 75">
+            <a:extLst>
+              <a:ext uri="{FF2B5EF4-FFF2-40B4-BE49-F238E27FC236}">
+                <a16:creationId xmlns:a16="http://schemas.microsoft.com/office/drawing/2014/main" id="{B208FAA9-CB94-24C7-06FB-C779C49D023B}"/>
+              </a:ext>
+            </a:extLst>
+          </p:cNvPr>
+          <p:cNvCxnSpPr>
+            <a:cxnSpLocks/>
+            <a:endCxn id="18" idx="0"/>
+          </p:cNvCxnSpPr>
+          <p:nvPr/>
+        </p:nvCxnSpPr>
+        <p:spPr>
+          <a:xfrm flipH="1">
+            <a:off x="3470261" y="2180146"/>
+            <a:ext cx="400860" cy="602920"/>
+          </a:xfrm>
+          <a:prstGeom prst="line">
+            <a:avLst/>
+          </a:prstGeom>
+          <a:ln w="76200"/>
+        </p:spPr>
+        <p:style>
+          <a:lnRef idx="3">
+            <a:schemeClr val="dk1"/>
+          </a:lnRef>
+          <a:fillRef idx="0">
+            <a:schemeClr val="dk1"/>
+          </a:fillRef>
+          <a:effectRef idx="2">
+            <a:schemeClr val="dk1"/>
+          </a:effectRef>
+          <a:fontRef idx="minor">
+            <a:schemeClr val="tx1"/>
+          </a:fontRef>
+        </p:style>
+      </p:cxnSp>
+      <p:cxnSp>
+        <p:nvCxnSpPr>
+          <p:cNvPr id="79" name="直接连接符 78">
+            <a:extLst>
+              <a:ext uri="{FF2B5EF4-FFF2-40B4-BE49-F238E27FC236}">
+                <a16:creationId xmlns:a16="http://schemas.microsoft.com/office/drawing/2014/main" id="{2D1C45F8-836C-EAEF-4C7E-912B95B5A242}"/>
+              </a:ext>
+            </a:extLst>
+          </p:cNvPr>
+          <p:cNvCxnSpPr>
+            <a:cxnSpLocks/>
+          </p:cNvCxnSpPr>
+          <p:nvPr/>
+        </p:nvCxnSpPr>
+        <p:spPr>
+          <a:xfrm>
+            <a:off x="6081086" y="2180146"/>
+            <a:ext cx="523570" cy="656290"/>
+          </a:xfrm>
+          <a:prstGeom prst="line">
+            <a:avLst/>
+          </a:prstGeom>
+          <a:ln w="76200"/>
+        </p:spPr>
+        <p:style>
+          <a:lnRef idx="3">
+            <a:schemeClr val="dk1"/>
+          </a:lnRef>
+          <a:fillRef idx="0">
+            <a:schemeClr val="dk1"/>
+          </a:fillRef>
+          <a:effectRef idx="2">
+            <a:schemeClr val="dk1"/>
+          </a:effectRef>
+          <a:fontRef idx="minor">
+            <a:schemeClr val="tx1"/>
+          </a:fontRef>
+        </p:style>
+      </p:cxnSp>
+      <p:sp>
+        <p:nvSpPr>
+          <p:cNvPr id="84" name="左大括号 83">
+            <a:extLst>
+              <a:ext uri="{FF2B5EF4-FFF2-40B4-BE49-F238E27FC236}">
+                <a16:creationId xmlns:a16="http://schemas.microsoft.com/office/drawing/2014/main" id="{F91FC4B6-1F24-ABBC-4A83-53E9B3FCE9EB}"/>
+              </a:ext>
+            </a:extLst>
+          </p:cNvPr>
+          <p:cNvSpPr/>
+          <p:nvPr/>
+        </p:nvSpPr>
+        <p:spPr>
+          <a:xfrm rot="16200000">
+            <a:off x="3762227" y="2730282"/>
+            <a:ext cx="222454" cy="2051431"/>
+          </a:xfrm>
+          <a:prstGeom prst="leftBrace">
+            <a:avLst>
+              <a:gd name="adj1" fmla="val 35606"/>
+              <a:gd name="adj2" fmla="val 48644"/>
+            </a:avLst>
+          </a:prstGeom>
+        </p:spPr>
+        <p:style>
+          <a:lnRef idx="2">
+            <a:schemeClr val="dk1"/>
+          </a:lnRef>
+          <a:fillRef idx="0">
+            <a:schemeClr val="dk1"/>
+          </a:fillRef>
+          <a:effectRef idx="1">
+            <a:schemeClr val="dk1"/>
+          </a:effectRef>
+          <a:fontRef idx="minor">
+            <a:schemeClr val="tx1"/>
+          </a:fontRef>
+        </p:style>
+        <p:txBody>
+          <a:bodyPr rtlCol="0" anchor="ctr"/>
+          <a:lstStyle/>
+          <a:p>
+            <a:pPr algn="ctr"/>
+            <a:endParaRPr lang="zh-CN" altLang="en-US"/>
+          </a:p>
+        </p:txBody>
+      </p:sp>
+      <p:sp>
+        <p:nvSpPr>
+          <p:cNvPr id="85" name="文本框 84">
+            <a:extLst>
+              <a:ext uri="{FF2B5EF4-FFF2-40B4-BE49-F238E27FC236}">
+                <a16:creationId xmlns:a16="http://schemas.microsoft.com/office/drawing/2014/main" id="{0FA3EA53-237D-1E43-17AB-912D18219572}"/>
+              </a:ext>
+            </a:extLst>
+          </p:cNvPr>
+          <p:cNvSpPr txBox="1"/>
+          <p:nvPr/>
+        </p:nvSpPr>
+        <p:spPr>
+          <a:xfrm>
+            <a:off x="2916866" y="4003804"/>
+            <a:ext cx="1982303" cy="738664"/>
+          </a:xfrm>
+          <a:prstGeom prst="rect">
+            <a:avLst/>
+          </a:prstGeom>
+          <a:noFill/>
+        </p:spPr>
+        <p:txBody>
+          <a:bodyPr wrap="square" rtlCol="0">
+            <a:spAutoFit/>
+          </a:bodyPr>
+          <a:lstStyle/>
+          <a:p>
+            <a:r>
+              <a:rPr lang="zh-CN" altLang="en-US" sz="1400"/>
+              <a:t>第六层的前</a:t>
+            </a:r>
+            <a:r>
+              <a:rPr lang="en-US" altLang="zh-CN" sz="1400"/>
+              <a:t>24</a:t>
+            </a:r>
+            <a:r>
+              <a:rPr lang="zh-CN" altLang="en-US" sz="1400"/>
+              <a:t>个节点均有</a:t>
+            </a:r>
+            <a:r>
+              <a:rPr lang="en-US" altLang="zh-CN" sz="1400"/>
+              <a:t>2</a:t>
+            </a:r>
+            <a:r>
+              <a:rPr lang="zh-CN" altLang="en-US" sz="1400"/>
+              <a:t>个孩子，因此第七层最大达到</a:t>
+            </a:r>
+            <a:r>
+              <a:rPr lang="en-US" altLang="zh-CN" sz="1400"/>
+              <a:t>48</a:t>
+            </a:r>
+            <a:r>
+              <a:rPr lang="zh-CN" altLang="en-US" sz="1400"/>
+              <a:t>个节点</a:t>
+            </a:r>
+          </a:p>
+        </p:txBody>
+      </p:sp>
     </p:spTree>
     <p:extLst>
       <p:ext uri="{BB962C8B-B14F-4D97-AF65-F5344CB8AC3E}">
@@ -14788,6 +16140,1263 @@
 </file>
 
 <file path=ppt/slides/slide14.xml><?xml version="1.0" encoding="utf-8"?>
+<p:sld xmlns:a="http://schemas.openxmlformats.org/drawingml/2006/main" xmlns:r="http://schemas.openxmlformats.org/officeDocument/2006/relationships" xmlns:p="http://schemas.openxmlformats.org/presentationml/2006/main">
+  <p:cSld>
+    <p:spTree>
+      <p:nvGrpSpPr>
+        <p:cNvPr id="1" name="">
+          <a:extLst>
+            <a:ext uri="{FF2B5EF4-FFF2-40B4-BE49-F238E27FC236}">
+              <a16:creationId xmlns:a16="http://schemas.microsoft.com/office/drawing/2014/main" id="{D0EC399D-A98F-1005-2142-5F770FDC87AA}"/>
+            </a:ext>
+          </a:extLst>
+        </p:cNvPr>
+        <p:cNvGrpSpPr/>
+        <p:nvPr/>
+      </p:nvGrpSpPr>
+      <p:grpSpPr>
+        <a:xfrm>
+          <a:off x="0" y="0"/>
+          <a:ext cx="0" cy="0"/>
+          <a:chOff x="0" y="0"/>
+          <a:chExt cx="0" cy="0"/>
+        </a:xfrm>
+      </p:grpSpPr>
+      <p:sp>
+        <p:nvSpPr>
+          <p:cNvPr id="3" name="椭圆 2">
+            <a:extLst>
+              <a:ext uri="{FF2B5EF4-FFF2-40B4-BE49-F238E27FC236}">
+                <a16:creationId xmlns:a16="http://schemas.microsoft.com/office/drawing/2014/main" id="{D4550DD3-A723-F089-6F02-5EE0865B7972}"/>
+              </a:ext>
+            </a:extLst>
+          </p:cNvPr>
+          <p:cNvSpPr/>
+          <p:nvPr/>
+        </p:nvSpPr>
+        <p:spPr>
+          <a:xfrm>
+            <a:off x="5014879" y="2159514"/>
+            <a:ext cx="333328" cy="333328"/>
+          </a:xfrm>
+          <a:prstGeom prst="ellipse">
+            <a:avLst/>
+          </a:prstGeom>
+        </p:spPr>
+        <p:style>
+          <a:lnRef idx="2">
+            <a:schemeClr val="dk1"/>
+          </a:lnRef>
+          <a:fillRef idx="1">
+            <a:schemeClr val="lt1"/>
+          </a:fillRef>
+          <a:effectRef idx="0">
+            <a:schemeClr val="dk1"/>
+          </a:effectRef>
+          <a:fontRef idx="minor">
+            <a:schemeClr val="dk1"/>
+          </a:fontRef>
+        </p:style>
+        <p:txBody>
+          <a:bodyPr rtlCol="0" anchor="ctr"/>
+          <a:lstStyle/>
+          <a:p>
+            <a:pPr algn="ctr"/>
+            <a:endParaRPr lang="zh-CN" altLang="en-US" sz="1600"/>
+          </a:p>
+        </p:txBody>
+      </p:sp>
+      <p:sp>
+        <p:nvSpPr>
+          <p:cNvPr id="5" name="椭圆 4">
+            <a:extLst>
+              <a:ext uri="{FF2B5EF4-FFF2-40B4-BE49-F238E27FC236}">
+                <a16:creationId xmlns:a16="http://schemas.microsoft.com/office/drawing/2014/main" id="{C0D7E922-B173-FEFB-6E48-8B7D48AA7A32}"/>
+              </a:ext>
+            </a:extLst>
+          </p:cNvPr>
+          <p:cNvSpPr/>
+          <p:nvPr/>
+        </p:nvSpPr>
+        <p:spPr>
+          <a:xfrm>
+            <a:off x="4501374" y="2735329"/>
+            <a:ext cx="333328" cy="333328"/>
+          </a:xfrm>
+          <a:prstGeom prst="ellipse">
+            <a:avLst/>
+          </a:prstGeom>
+        </p:spPr>
+        <p:style>
+          <a:lnRef idx="2">
+            <a:schemeClr val="dk1"/>
+          </a:lnRef>
+          <a:fillRef idx="1">
+            <a:schemeClr val="lt1"/>
+          </a:fillRef>
+          <a:effectRef idx="0">
+            <a:schemeClr val="dk1"/>
+          </a:effectRef>
+          <a:fontRef idx="minor">
+            <a:schemeClr val="dk1"/>
+          </a:fontRef>
+        </p:style>
+        <p:txBody>
+          <a:bodyPr rtlCol="0" anchor="ctr"/>
+          <a:lstStyle/>
+          <a:p>
+            <a:pPr algn="ctr"/>
+            <a:endParaRPr lang="zh-CN" altLang="en-US" sz="1600"/>
+          </a:p>
+        </p:txBody>
+      </p:sp>
+      <p:sp>
+        <p:nvSpPr>
+          <p:cNvPr id="7" name="椭圆 6">
+            <a:extLst>
+              <a:ext uri="{FF2B5EF4-FFF2-40B4-BE49-F238E27FC236}">
+                <a16:creationId xmlns:a16="http://schemas.microsoft.com/office/drawing/2014/main" id="{EBC4FE86-342D-AD4A-B82E-F6CA3E125FF2}"/>
+              </a:ext>
+            </a:extLst>
+          </p:cNvPr>
+          <p:cNvSpPr/>
+          <p:nvPr/>
+        </p:nvSpPr>
+        <p:spPr>
+          <a:xfrm>
+            <a:off x="5515622" y="2735329"/>
+            <a:ext cx="333328" cy="333328"/>
+          </a:xfrm>
+          <a:prstGeom prst="ellipse">
+            <a:avLst/>
+          </a:prstGeom>
+        </p:spPr>
+        <p:style>
+          <a:lnRef idx="2">
+            <a:schemeClr val="dk1"/>
+          </a:lnRef>
+          <a:fillRef idx="1">
+            <a:schemeClr val="lt1"/>
+          </a:fillRef>
+          <a:effectRef idx="0">
+            <a:schemeClr val="dk1"/>
+          </a:effectRef>
+          <a:fontRef idx="minor">
+            <a:schemeClr val="dk1"/>
+          </a:fontRef>
+        </p:style>
+        <p:txBody>
+          <a:bodyPr rtlCol="0" anchor="ctr"/>
+          <a:lstStyle/>
+          <a:p>
+            <a:pPr algn="ctr"/>
+            <a:endParaRPr lang="zh-CN" altLang="en-US" sz="1600"/>
+          </a:p>
+        </p:txBody>
+      </p:sp>
+      <p:cxnSp>
+        <p:nvCxnSpPr>
+          <p:cNvPr id="9" name="直接连接符 8">
+            <a:extLst>
+              <a:ext uri="{FF2B5EF4-FFF2-40B4-BE49-F238E27FC236}">
+                <a16:creationId xmlns:a16="http://schemas.microsoft.com/office/drawing/2014/main" id="{7D2E41C3-0531-4D72-65F7-B0DF3DAB9669}"/>
+              </a:ext>
+            </a:extLst>
+          </p:cNvPr>
+          <p:cNvCxnSpPr>
+            <a:stCxn id="3" idx="3"/>
+            <a:endCxn id="5" idx="7"/>
+          </p:cNvCxnSpPr>
+          <p:nvPr/>
+        </p:nvCxnSpPr>
+        <p:spPr>
+          <a:xfrm flipH="1">
+            <a:off x="4785887" y="2444027"/>
+            <a:ext cx="277807" cy="340117"/>
+          </a:xfrm>
+          <a:prstGeom prst="line">
+            <a:avLst/>
+          </a:prstGeom>
+        </p:spPr>
+        <p:style>
+          <a:lnRef idx="2">
+            <a:schemeClr val="dk1"/>
+          </a:lnRef>
+          <a:fillRef idx="0">
+            <a:schemeClr val="dk1"/>
+          </a:fillRef>
+          <a:effectRef idx="1">
+            <a:schemeClr val="dk1"/>
+          </a:effectRef>
+          <a:fontRef idx="minor">
+            <a:schemeClr val="tx1"/>
+          </a:fontRef>
+        </p:style>
+      </p:cxnSp>
+      <p:cxnSp>
+        <p:nvCxnSpPr>
+          <p:cNvPr id="11" name="直接连接符 10">
+            <a:extLst>
+              <a:ext uri="{FF2B5EF4-FFF2-40B4-BE49-F238E27FC236}">
+                <a16:creationId xmlns:a16="http://schemas.microsoft.com/office/drawing/2014/main" id="{BACC91B9-C8A1-509B-728D-08C01205438D}"/>
+              </a:ext>
+            </a:extLst>
+          </p:cNvPr>
+          <p:cNvCxnSpPr>
+            <a:stCxn id="3" idx="5"/>
+            <a:endCxn id="7" idx="1"/>
+          </p:cNvCxnSpPr>
+          <p:nvPr/>
+        </p:nvCxnSpPr>
+        <p:spPr>
+          <a:xfrm>
+            <a:off x="5299392" y="2444027"/>
+            <a:ext cx="265045" cy="340117"/>
+          </a:xfrm>
+          <a:prstGeom prst="line">
+            <a:avLst/>
+          </a:prstGeom>
+          <a:ln w="38100"/>
+        </p:spPr>
+        <p:style>
+          <a:lnRef idx="2">
+            <a:schemeClr val="dk1"/>
+          </a:lnRef>
+          <a:fillRef idx="0">
+            <a:schemeClr val="dk1"/>
+          </a:fillRef>
+          <a:effectRef idx="1">
+            <a:schemeClr val="dk1"/>
+          </a:effectRef>
+          <a:fontRef idx="minor">
+            <a:schemeClr val="tx1"/>
+          </a:fontRef>
+        </p:style>
+      </p:cxnSp>
+      <p:sp>
+        <p:nvSpPr>
+          <p:cNvPr id="12" name="椭圆 11">
+            <a:extLst>
+              <a:ext uri="{FF2B5EF4-FFF2-40B4-BE49-F238E27FC236}">
+                <a16:creationId xmlns:a16="http://schemas.microsoft.com/office/drawing/2014/main" id="{2109DC29-3957-630D-8A01-A974DFC19538}"/>
+              </a:ext>
+            </a:extLst>
+          </p:cNvPr>
+          <p:cNvSpPr/>
+          <p:nvPr/>
+        </p:nvSpPr>
+        <p:spPr>
+          <a:xfrm>
+            <a:off x="7532750" y="2156900"/>
+            <a:ext cx="333328" cy="333328"/>
+          </a:xfrm>
+          <a:prstGeom prst="ellipse">
+            <a:avLst/>
+          </a:prstGeom>
+        </p:spPr>
+        <p:style>
+          <a:lnRef idx="2">
+            <a:schemeClr val="dk1"/>
+          </a:lnRef>
+          <a:fillRef idx="1">
+            <a:schemeClr val="lt1"/>
+          </a:fillRef>
+          <a:effectRef idx="0">
+            <a:schemeClr val="dk1"/>
+          </a:effectRef>
+          <a:fontRef idx="minor">
+            <a:schemeClr val="dk1"/>
+          </a:fontRef>
+        </p:style>
+        <p:txBody>
+          <a:bodyPr rtlCol="0" anchor="ctr"/>
+          <a:lstStyle/>
+          <a:p>
+            <a:pPr algn="ctr"/>
+            <a:endParaRPr lang="zh-CN" altLang="en-US" sz="1600"/>
+          </a:p>
+        </p:txBody>
+      </p:sp>
+      <p:sp>
+        <p:nvSpPr>
+          <p:cNvPr id="13" name="椭圆 12">
+            <a:extLst>
+              <a:ext uri="{FF2B5EF4-FFF2-40B4-BE49-F238E27FC236}">
+                <a16:creationId xmlns:a16="http://schemas.microsoft.com/office/drawing/2014/main" id="{5B19284C-C95F-487C-F7CD-9E053B99D8AA}"/>
+              </a:ext>
+            </a:extLst>
+          </p:cNvPr>
+          <p:cNvSpPr/>
+          <p:nvPr/>
+        </p:nvSpPr>
+        <p:spPr>
+          <a:xfrm>
+            <a:off x="7019245" y="2732715"/>
+            <a:ext cx="333328" cy="333328"/>
+          </a:xfrm>
+          <a:prstGeom prst="ellipse">
+            <a:avLst/>
+          </a:prstGeom>
+        </p:spPr>
+        <p:style>
+          <a:lnRef idx="2">
+            <a:schemeClr val="dk1"/>
+          </a:lnRef>
+          <a:fillRef idx="1">
+            <a:schemeClr val="lt1"/>
+          </a:fillRef>
+          <a:effectRef idx="0">
+            <a:schemeClr val="dk1"/>
+          </a:effectRef>
+          <a:fontRef idx="minor">
+            <a:schemeClr val="dk1"/>
+          </a:fontRef>
+        </p:style>
+        <p:txBody>
+          <a:bodyPr rtlCol="0" anchor="ctr"/>
+          <a:lstStyle/>
+          <a:p>
+            <a:pPr algn="ctr"/>
+            <a:endParaRPr lang="zh-CN" altLang="en-US" sz="1600"/>
+          </a:p>
+        </p:txBody>
+      </p:sp>
+      <p:sp>
+        <p:nvSpPr>
+          <p:cNvPr id="14" name="椭圆 13">
+            <a:extLst>
+              <a:ext uri="{FF2B5EF4-FFF2-40B4-BE49-F238E27FC236}">
+                <a16:creationId xmlns:a16="http://schemas.microsoft.com/office/drawing/2014/main" id="{558CA6A0-B72F-1679-3E38-9B9FD0927B43}"/>
+              </a:ext>
+            </a:extLst>
+          </p:cNvPr>
+          <p:cNvSpPr/>
+          <p:nvPr/>
+        </p:nvSpPr>
+        <p:spPr>
+          <a:xfrm>
+            <a:off x="8033493" y="2732715"/>
+            <a:ext cx="333328" cy="333328"/>
+          </a:xfrm>
+          <a:prstGeom prst="ellipse">
+            <a:avLst/>
+          </a:prstGeom>
+        </p:spPr>
+        <p:style>
+          <a:lnRef idx="2">
+            <a:schemeClr val="dk1"/>
+          </a:lnRef>
+          <a:fillRef idx="1">
+            <a:schemeClr val="lt1"/>
+          </a:fillRef>
+          <a:effectRef idx="0">
+            <a:schemeClr val="dk1"/>
+          </a:effectRef>
+          <a:fontRef idx="minor">
+            <a:schemeClr val="dk1"/>
+          </a:fontRef>
+        </p:style>
+        <p:txBody>
+          <a:bodyPr rtlCol="0" anchor="ctr"/>
+          <a:lstStyle/>
+          <a:p>
+            <a:pPr algn="ctr"/>
+            <a:endParaRPr lang="zh-CN" altLang="en-US" sz="1600"/>
+          </a:p>
+        </p:txBody>
+      </p:sp>
+      <p:cxnSp>
+        <p:nvCxnSpPr>
+          <p:cNvPr id="15" name="直接连接符 14">
+            <a:extLst>
+              <a:ext uri="{FF2B5EF4-FFF2-40B4-BE49-F238E27FC236}">
+                <a16:creationId xmlns:a16="http://schemas.microsoft.com/office/drawing/2014/main" id="{A2FED499-2EE0-70AB-8530-40031005EF89}"/>
+              </a:ext>
+            </a:extLst>
+          </p:cNvPr>
+          <p:cNvCxnSpPr>
+            <a:stCxn id="12" idx="3"/>
+            <a:endCxn id="13" idx="7"/>
+          </p:cNvCxnSpPr>
+          <p:nvPr/>
+        </p:nvCxnSpPr>
+        <p:spPr>
+          <a:xfrm flipH="1">
+            <a:off x="7303758" y="2441413"/>
+            <a:ext cx="277807" cy="340117"/>
+          </a:xfrm>
+          <a:prstGeom prst="line">
+            <a:avLst/>
+          </a:prstGeom>
+        </p:spPr>
+        <p:style>
+          <a:lnRef idx="2">
+            <a:schemeClr val="dk1"/>
+          </a:lnRef>
+          <a:fillRef idx="0">
+            <a:schemeClr val="dk1"/>
+          </a:fillRef>
+          <a:effectRef idx="1">
+            <a:schemeClr val="dk1"/>
+          </a:effectRef>
+          <a:fontRef idx="minor">
+            <a:schemeClr val="tx1"/>
+          </a:fontRef>
+        </p:style>
+      </p:cxnSp>
+      <p:cxnSp>
+        <p:nvCxnSpPr>
+          <p:cNvPr id="16" name="直接连接符 15">
+            <a:extLst>
+              <a:ext uri="{FF2B5EF4-FFF2-40B4-BE49-F238E27FC236}">
+                <a16:creationId xmlns:a16="http://schemas.microsoft.com/office/drawing/2014/main" id="{FED92B66-EAB2-FB46-796A-6F01E5C107BF}"/>
+              </a:ext>
+            </a:extLst>
+          </p:cNvPr>
+          <p:cNvCxnSpPr>
+            <a:stCxn id="12" idx="5"/>
+            <a:endCxn id="14" idx="1"/>
+          </p:cNvCxnSpPr>
+          <p:nvPr/>
+        </p:nvCxnSpPr>
+        <p:spPr>
+          <a:xfrm>
+            <a:off x="7817263" y="2441413"/>
+            <a:ext cx="265045" cy="340117"/>
+          </a:xfrm>
+          <a:prstGeom prst="line">
+            <a:avLst/>
+          </a:prstGeom>
+        </p:spPr>
+        <p:style>
+          <a:lnRef idx="2">
+            <a:schemeClr val="dk1"/>
+          </a:lnRef>
+          <a:fillRef idx="0">
+            <a:schemeClr val="dk1"/>
+          </a:fillRef>
+          <a:effectRef idx="1">
+            <a:schemeClr val="dk1"/>
+          </a:effectRef>
+          <a:fontRef idx="minor">
+            <a:schemeClr val="tx1"/>
+          </a:fontRef>
+        </p:style>
+      </p:cxnSp>
+      <p:sp>
+        <p:nvSpPr>
+          <p:cNvPr id="18" name="椭圆 17">
+            <a:extLst>
+              <a:ext uri="{FF2B5EF4-FFF2-40B4-BE49-F238E27FC236}">
+                <a16:creationId xmlns:a16="http://schemas.microsoft.com/office/drawing/2014/main" id="{790FDA3A-42A7-062D-785C-A66377D14945}"/>
+              </a:ext>
+            </a:extLst>
+          </p:cNvPr>
+          <p:cNvSpPr/>
+          <p:nvPr/>
+        </p:nvSpPr>
+        <p:spPr>
+          <a:xfrm>
+            <a:off x="6488456" y="3335545"/>
+            <a:ext cx="333328" cy="333328"/>
+          </a:xfrm>
+          <a:prstGeom prst="ellipse">
+            <a:avLst/>
+          </a:prstGeom>
+        </p:spPr>
+        <p:style>
+          <a:lnRef idx="2">
+            <a:schemeClr val="dk1"/>
+          </a:lnRef>
+          <a:fillRef idx="1">
+            <a:schemeClr val="lt1"/>
+          </a:fillRef>
+          <a:effectRef idx="0">
+            <a:schemeClr val="dk1"/>
+          </a:effectRef>
+          <a:fontRef idx="minor">
+            <a:schemeClr val="dk1"/>
+          </a:fontRef>
+        </p:style>
+        <p:txBody>
+          <a:bodyPr rtlCol="0" anchor="ctr"/>
+          <a:lstStyle/>
+          <a:p>
+            <a:pPr algn="ctr"/>
+            <a:endParaRPr lang="zh-CN" altLang="en-US" sz="1600"/>
+          </a:p>
+        </p:txBody>
+      </p:sp>
+      <p:cxnSp>
+        <p:nvCxnSpPr>
+          <p:cNvPr id="20" name="直接连接符 19">
+            <a:extLst>
+              <a:ext uri="{FF2B5EF4-FFF2-40B4-BE49-F238E27FC236}">
+                <a16:creationId xmlns:a16="http://schemas.microsoft.com/office/drawing/2014/main" id="{3A7835DE-44DE-30BB-F680-C38654CD9084}"/>
+              </a:ext>
+            </a:extLst>
+          </p:cNvPr>
+          <p:cNvCxnSpPr>
+            <a:stCxn id="13" idx="3"/>
+            <a:endCxn id="18" idx="7"/>
+          </p:cNvCxnSpPr>
+          <p:nvPr/>
+        </p:nvCxnSpPr>
+        <p:spPr>
+          <a:xfrm flipH="1">
+            <a:off x="6772969" y="3017228"/>
+            <a:ext cx="295091" cy="367132"/>
+          </a:xfrm>
+          <a:prstGeom prst="line">
+            <a:avLst/>
+          </a:prstGeom>
+          <a:ln w="38100"/>
+        </p:spPr>
+        <p:style>
+          <a:lnRef idx="2">
+            <a:schemeClr val="dk1"/>
+          </a:lnRef>
+          <a:fillRef idx="0">
+            <a:schemeClr val="dk1"/>
+          </a:fillRef>
+          <a:effectRef idx="1">
+            <a:schemeClr val="dk1"/>
+          </a:effectRef>
+          <a:fontRef idx="minor">
+            <a:schemeClr val="tx1"/>
+          </a:fontRef>
+        </p:style>
+      </p:cxnSp>
+      <p:sp>
+        <p:nvSpPr>
+          <p:cNvPr id="52" name="椭圆 51">
+            <a:extLst>
+              <a:ext uri="{FF2B5EF4-FFF2-40B4-BE49-F238E27FC236}">
+                <a16:creationId xmlns:a16="http://schemas.microsoft.com/office/drawing/2014/main" id="{8CECC96A-5565-B94E-1D12-A4BEF1C2AD1E}"/>
+              </a:ext>
+            </a:extLst>
+          </p:cNvPr>
+          <p:cNvSpPr/>
+          <p:nvPr/>
+        </p:nvSpPr>
+        <p:spPr>
+          <a:xfrm>
+            <a:off x="9959226" y="2156900"/>
+            <a:ext cx="333328" cy="333328"/>
+          </a:xfrm>
+          <a:prstGeom prst="ellipse">
+            <a:avLst/>
+          </a:prstGeom>
+        </p:spPr>
+        <p:style>
+          <a:lnRef idx="2">
+            <a:schemeClr val="dk1"/>
+          </a:lnRef>
+          <a:fillRef idx="1">
+            <a:schemeClr val="lt1"/>
+          </a:fillRef>
+          <a:effectRef idx="0">
+            <a:schemeClr val="dk1"/>
+          </a:effectRef>
+          <a:fontRef idx="minor">
+            <a:schemeClr val="dk1"/>
+          </a:fontRef>
+        </p:style>
+        <p:txBody>
+          <a:bodyPr rtlCol="0" anchor="ctr"/>
+          <a:lstStyle/>
+          <a:p>
+            <a:pPr algn="ctr"/>
+            <a:endParaRPr lang="zh-CN" altLang="en-US" sz="1600"/>
+          </a:p>
+        </p:txBody>
+      </p:sp>
+      <p:sp>
+        <p:nvSpPr>
+          <p:cNvPr id="53" name="椭圆 52">
+            <a:extLst>
+              <a:ext uri="{FF2B5EF4-FFF2-40B4-BE49-F238E27FC236}">
+                <a16:creationId xmlns:a16="http://schemas.microsoft.com/office/drawing/2014/main" id="{C34110DE-7D94-7222-B4A9-D3B650FA06B2}"/>
+              </a:ext>
+            </a:extLst>
+          </p:cNvPr>
+          <p:cNvSpPr/>
+          <p:nvPr/>
+        </p:nvSpPr>
+        <p:spPr>
+          <a:xfrm>
+            <a:off x="9309099" y="2703056"/>
+            <a:ext cx="333328" cy="333328"/>
+          </a:xfrm>
+          <a:prstGeom prst="ellipse">
+            <a:avLst/>
+          </a:prstGeom>
+        </p:spPr>
+        <p:style>
+          <a:lnRef idx="2">
+            <a:schemeClr val="dk1"/>
+          </a:lnRef>
+          <a:fillRef idx="1">
+            <a:schemeClr val="lt1"/>
+          </a:fillRef>
+          <a:effectRef idx="0">
+            <a:schemeClr val="dk1"/>
+          </a:effectRef>
+          <a:fontRef idx="minor">
+            <a:schemeClr val="dk1"/>
+          </a:fontRef>
+        </p:style>
+        <p:txBody>
+          <a:bodyPr rtlCol="0" anchor="ctr"/>
+          <a:lstStyle/>
+          <a:p>
+            <a:pPr algn="ctr"/>
+            <a:endParaRPr lang="zh-CN" altLang="en-US" sz="1600"/>
+          </a:p>
+        </p:txBody>
+      </p:sp>
+      <p:sp>
+        <p:nvSpPr>
+          <p:cNvPr id="54" name="椭圆 53">
+            <a:extLst>
+              <a:ext uri="{FF2B5EF4-FFF2-40B4-BE49-F238E27FC236}">
+                <a16:creationId xmlns:a16="http://schemas.microsoft.com/office/drawing/2014/main" id="{86CF8F56-8EED-231E-576F-3F7C08AFE0E6}"/>
+              </a:ext>
+            </a:extLst>
+          </p:cNvPr>
+          <p:cNvSpPr/>
+          <p:nvPr/>
+        </p:nvSpPr>
+        <p:spPr>
+          <a:xfrm>
+            <a:off x="10608275" y="2703056"/>
+            <a:ext cx="333328" cy="333328"/>
+          </a:xfrm>
+          <a:prstGeom prst="ellipse">
+            <a:avLst/>
+          </a:prstGeom>
+        </p:spPr>
+        <p:style>
+          <a:lnRef idx="2">
+            <a:schemeClr val="dk1"/>
+          </a:lnRef>
+          <a:fillRef idx="1">
+            <a:schemeClr val="lt1"/>
+          </a:fillRef>
+          <a:effectRef idx="0">
+            <a:schemeClr val="dk1"/>
+          </a:effectRef>
+          <a:fontRef idx="minor">
+            <a:schemeClr val="dk1"/>
+          </a:fontRef>
+        </p:style>
+        <p:txBody>
+          <a:bodyPr rtlCol="0" anchor="ctr"/>
+          <a:lstStyle/>
+          <a:p>
+            <a:pPr algn="ctr"/>
+            <a:endParaRPr lang="zh-CN" altLang="en-US" sz="1600"/>
+          </a:p>
+        </p:txBody>
+      </p:sp>
+      <p:cxnSp>
+        <p:nvCxnSpPr>
+          <p:cNvPr id="55" name="直接连接符 54">
+            <a:extLst>
+              <a:ext uri="{FF2B5EF4-FFF2-40B4-BE49-F238E27FC236}">
+                <a16:creationId xmlns:a16="http://schemas.microsoft.com/office/drawing/2014/main" id="{20A38322-C324-0BF4-ECDD-48477E9B3A8F}"/>
+              </a:ext>
+            </a:extLst>
+          </p:cNvPr>
+          <p:cNvCxnSpPr>
+            <a:stCxn id="52" idx="3"/>
+            <a:endCxn id="53" idx="7"/>
+          </p:cNvCxnSpPr>
+          <p:nvPr/>
+        </p:nvCxnSpPr>
+        <p:spPr>
+          <a:xfrm flipH="1">
+            <a:off x="9593612" y="2441413"/>
+            <a:ext cx="414429" cy="310458"/>
+          </a:xfrm>
+          <a:prstGeom prst="line">
+            <a:avLst/>
+          </a:prstGeom>
+        </p:spPr>
+        <p:style>
+          <a:lnRef idx="2">
+            <a:schemeClr val="dk1"/>
+          </a:lnRef>
+          <a:fillRef idx="0">
+            <a:schemeClr val="dk1"/>
+          </a:fillRef>
+          <a:effectRef idx="1">
+            <a:schemeClr val="dk1"/>
+          </a:effectRef>
+          <a:fontRef idx="minor">
+            <a:schemeClr val="tx1"/>
+          </a:fontRef>
+        </p:style>
+      </p:cxnSp>
+      <p:cxnSp>
+        <p:nvCxnSpPr>
+          <p:cNvPr id="56" name="直接连接符 55">
+            <a:extLst>
+              <a:ext uri="{FF2B5EF4-FFF2-40B4-BE49-F238E27FC236}">
+                <a16:creationId xmlns:a16="http://schemas.microsoft.com/office/drawing/2014/main" id="{46827FB1-87F5-1BDA-DAEC-431403854470}"/>
+              </a:ext>
+            </a:extLst>
+          </p:cNvPr>
+          <p:cNvCxnSpPr>
+            <a:stCxn id="52" idx="5"/>
+            <a:endCxn id="54" idx="1"/>
+          </p:cNvCxnSpPr>
+          <p:nvPr/>
+        </p:nvCxnSpPr>
+        <p:spPr>
+          <a:xfrm>
+            <a:off x="10243739" y="2441413"/>
+            <a:ext cx="413351" cy="310458"/>
+          </a:xfrm>
+          <a:prstGeom prst="line">
+            <a:avLst/>
+          </a:prstGeom>
+        </p:spPr>
+        <p:style>
+          <a:lnRef idx="2">
+            <a:schemeClr val="dk1"/>
+          </a:lnRef>
+          <a:fillRef idx="0">
+            <a:schemeClr val="dk1"/>
+          </a:fillRef>
+          <a:effectRef idx="1">
+            <a:schemeClr val="dk1"/>
+          </a:effectRef>
+          <a:fontRef idx="minor">
+            <a:schemeClr val="tx1"/>
+          </a:fontRef>
+        </p:style>
+      </p:cxnSp>
+      <p:sp>
+        <p:nvSpPr>
+          <p:cNvPr id="57" name="椭圆 56">
+            <a:extLst>
+              <a:ext uri="{FF2B5EF4-FFF2-40B4-BE49-F238E27FC236}">
+                <a16:creationId xmlns:a16="http://schemas.microsoft.com/office/drawing/2014/main" id="{420F98E1-2A9D-AADD-37A4-0A4D04B42335}"/>
+              </a:ext>
+            </a:extLst>
+          </p:cNvPr>
+          <p:cNvSpPr/>
+          <p:nvPr/>
+        </p:nvSpPr>
+        <p:spPr>
+          <a:xfrm>
+            <a:off x="8836537" y="3322805"/>
+            <a:ext cx="333328" cy="333328"/>
+          </a:xfrm>
+          <a:prstGeom prst="ellipse">
+            <a:avLst/>
+          </a:prstGeom>
+        </p:spPr>
+        <p:style>
+          <a:lnRef idx="2">
+            <a:schemeClr val="dk1"/>
+          </a:lnRef>
+          <a:fillRef idx="1">
+            <a:schemeClr val="lt1"/>
+          </a:fillRef>
+          <a:effectRef idx="0">
+            <a:schemeClr val="dk1"/>
+          </a:effectRef>
+          <a:fontRef idx="minor">
+            <a:schemeClr val="dk1"/>
+          </a:fontRef>
+        </p:style>
+        <p:txBody>
+          <a:bodyPr rtlCol="0" anchor="ctr"/>
+          <a:lstStyle/>
+          <a:p>
+            <a:pPr algn="ctr"/>
+            <a:endParaRPr lang="zh-CN" altLang="en-US" sz="1600"/>
+          </a:p>
+        </p:txBody>
+      </p:sp>
+      <p:cxnSp>
+        <p:nvCxnSpPr>
+          <p:cNvPr id="58" name="直接连接符 57">
+            <a:extLst>
+              <a:ext uri="{FF2B5EF4-FFF2-40B4-BE49-F238E27FC236}">
+                <a16:creationId xmlns:a16="http://schemas.microsoft.com/office/drawing/2014/main" id="{6EF3B44A-E6A2-1EC0-8AF4-05AE4C722270}"/>
+              </a:ext>
+            </a:extLst>
+          </p:cNvPr>
+          <p:cNvCxnSpPr>
+            <a:stCxn id="53" idx="3"/>
+            <a:endCxn id="57" idx="7"/>
+          </p:cNvCxnSpPr>
+          <p:nvPr/>
+        </p:nvCxnSpPr>
+        <p:spPr>
+          <a:xfrm flipH="1">
+            <a:off x="9121050" y="2987569"/>
+            <a:ext cx="236864" cy="384051"/>
+          </a:xfrm>
+          <a:prstGeom prst="line">
+            <a:avLst/>
+          </a:prstGeom>
+        </p:spPr>
+        <p:style>
+          <a:lnRef idx="2">
+            <a:schemeClr val="dk1"/>
+          </a:lnRef>
+          <a:fillRef idx="0">
+            <a:schemeClr val="dk1"/>
+          </a:fillRef>
+          <a:effectRef idx="1">
+            <a:schemeClr val="dk1"/>
+          </a:effectRef>
+          <a:fontRef idx="minor">
+            <a:schemeClr val="tx1"/>
+          </a:fontRef>
+        </p:style>
+      </p:cxnSp>
+      <p:sp>
+        <p:nvSpPr>
+          <p:cNvPr id="60" name="椭圆 59">
+            <a:extLst>
+              <a:ext uri="{FF2B5EF4-FFF2-40B4-BE49-F238E27FC236}">
+                <a16:creationId xmlns:a16="http://schemas.microsoft.com/office/drawing/2014/main" id="{CDEA2770-DE27-4F02-89FD-1E500ECEB1F1}"/>
+              </a:ext>
+            </a:extLst>
+          </p:cNvPr>
+          <p:cNvSpPr/>
+          <p:nvPr/>
+        </p:nvSpPr>
+        <p:spPr>
+          <a:xfrm>
+            <a:off x="7418135" y="3341225"/>
+            <a:ext cx="333328" cy="333328"/>
+          </a:xfrm>
+          <a:prstGeom prst="ellipse">
+            <a:avLst/>
+          </a:prstGeom>
+        </p:spPr>
+        <p:style>
+          <a:lnRef idx="2">
+            <a:schemeClr val="dk1"/>
+          </a:lnRef>
+          <a:fillRef idx="1">
+            <a:schemeClr val="lt1"/>
+          </a:fillRef>
+          <a:effectRef idx="0">
+            <a:schemeClr val="dk1"/>
+          </a:effectRef>
+          <a:fontRef idx="minor">
+            <a:schemeClr val="dk1"/>
+          </a:fontRef>
+        </p:style>
+        <p:txBody>
+          <a:bodyPr rtlCol="0" anchor="ctr"/>
+          <a:lstStyle/>
+          <a:p>
+            <a:pPr algn="ctr"/>
+            <a:endParaRPr lang="zh-CN" altLang="en-US" sz="1600"/>
+          </a:p>
+        </p:txBody>
+      </p:sp>
+      <p:cxnSp>
+        <p:nvCxnSpPr>
+          <p:cNvPr id="62" name="直接连接符 61">
+            <a:extLst>
+              <a:ext uri="{FF2B5EF4-FFF2-40B4-BE49-F238E27FC236}">
+                <a16:creationId xmlns:a16="http://schemas.microsoft.com/office/drawing/2014/main" id="{1F8E4B0C-CE0F-4FEB-17C7-E5A2C615D949}"/>
+              </a:ext>
+            </a:extLst>
+          </p:cNvPr>
+          <p:cNvCxnSpPr>
+            <a:stCxn id="13" idx="5"/>
+            <a:endCxn id="60" idx="0"/>
+          </p:cNvCxnSpPr>
+          <p:nvPr/>
+        </p:nvCxnSpPr>
+        <p:spPr>
+          <a:xfrm>
+            <a:off x="7303758" y="3017228"/>
+            <a:ext cx="281041" cy="323997"/>
+          </a:xfrm>
+          <a:prstGeom prst="line">
+            <a:avLst/>
+          </a:prstGeom>
+          <a:ln w="38100"/>
+        </p:spPr>
+        <p:style>
+          <a:lnRef idx="2">
+            <a:schemeClr val="dk1"/>
+          </a:lnRef>
+          <a:fillRef idx="0">
+            <a:schemeClr val="dk1"/>
+          </a:fillRef>
+          <a:effectRef idx="1">
+            <a:schemeClr val="dk1"/>
+          </a:effectRef>
+          <a:fontRef idx="minor">
+            <a:schemeClr val="tx1"/>
+          </a:fontRef>
+        </p:style>
+      </p:cxnSp>
+      <p:sp>
+        <p:nvSpPr>
+          <p:cNvPr id="71" name="椭圆 70">
+            <a:extLst>
+              <a:ext uri="{FF2B5EF4-FFF2-40B4-BE49-F238E27FC236}">
+                <a16:creationId xmlns:a16="http://schemas.microsoft.com/office/drawing/2014/main" id="{194E2476-5DDC-F3F4-A37A-CB343675DA44}"/>
+              </a:ext>
+            </a:extLst>
+          </p:cNvPr>
+          <p:cNvSpPr/>
+          <p:nvPr/>
+        </p:nvSpPr>
+        <p:spPr>
+          <a:xfrm>
+            <a:off x="9652173" y="3322805"/>
+            <a:ext cx="333328" cy="333328"/>
+          </a:xfrm>
+          <a:prstGeom prst="ellipse">
+            <a:avLst/>
+          </a:prstGeom>
+        </p:spPr>
+        <p:style>
+          <a:lnRef idx="2">
+            <a:schemeClr val="dk1"/>
+          </a:lnRef>
+          <a:fillRef idx="1">
+            <a:schemeClr val="lt1"/>
+          </a:fillRef>
+          <a:effectRef idx="0">
+            <a:schemeClr val="dk1"/>
+          </a:effectRef>
+          <a:fontRef idx="minor">
+            <a:schemeClr val="dk1"/>
+          </a:fontRef>
+        </p:style>
+        <p:txBody>
+          <a:bodyPr rtlCol="0" anchor="ctr"/>
+          <a:lstStyle/>
+          <a:p>
+            <a:pPr algn="ctr"/>
+            <a:endParaRPr lang="zh-CN" altLang="en-US" sz="1600"/>
+          </a:p>
+        </p:txBody>
+      </p:sp>
+      <p:cxnSp>
+        <p:nvCxnSpPr>
+          <p:cNvPr id="73" name="直接连接符 72">
+            <a:extLst>
+              <a:ext uri="{FF2B5EF4-FFF2-40B4-BE49-F238E27FC236}">
+                <a16:creationId xmlns:a16="http://schemas.microsoft.com/office/drawing/2014/main" id="{528C96B9-31EE-1BB6-DFFF-E22ECEB0E86E}"/>
+              </a:ext>
+            </a:extLst>
+          </p:cNvPr>
+          <p:cNvCxnSpPr>
+            <a:stCxn id="53" idx="5"/>
+            <a:endCxn id="71" idx="0"/>
+          </p:cNvCxnSpPr>
+          <p:nvPr/>
+        </p:nvCxnSpPr>
+        <p:spPr>
+          <a:xfrm>
+            <a:off x="9593612" y="2987569"/>
+            <a:ext cx="225225" cy="335236"/>
+          </a:xfrm>
+          <a:prstGeom prst="line">
+            <a:avLst/>
+          </a:prstGeom>
+        </p:spPr>
+        <p:style>
+          <a:lnRef idx="2">
+            <a:schemeClr val="dk1"/>
+          </a:lnRef>
+          <a:fillRef idx="0">
+            <a:schemeClr val="dk1"/>
+          </a:fillRef>
+          <a:effectRef idx="1">
+            <a:schemeClr val="dk1"/>
+          </a:effectRef>
+          <a:fontRef idx="minor">
+            <a:schemeClr val="tx1"/>
+          </a:fontRef>
+        </p:style>
+      </p:cxnSp>
+      <p:sp>
+        <p:nvSpPr>
+          <p:cNvPr id="75" name="椭圆 74">
+            <a:extLst>
+              <a:ext uri="{FF2B5EF4-FFF2-40B4-BE49-F238E27FC236}">
+                <a16:creationId xmlns:a16="http://schemas.microsoft.com/office/drawing/2014/main" id="{9F35F3BB-8A49-EFE5-2A81-BB562DB00263}"/>
+              </a:ext>
+            </a:extLst>
+          </p:cNvPr>
+          <p:cNvSpPr/>
+          <p:nvPr/>
+        </p:nvSpPr>
+        <p:spPr>
+          <a:xfrm>
+            <a:off x="10312123" y="3322805"/>
+            <a:ext cx="333328" cy="333328"/>
+          </a:xfrm>
+          <a:prstGeom prst="ellipse">
+            <a:avLst/>
+          </a:prstGeom>
+        </p:spPr>
+        <p:style>
+          <a:lnRef idx="2">
+            <a:schemeClr val="dk1"/>
+          </a:lnRef>
+          <a:fillRef idx="1">
+            <a:schemeClr val="lt1"/>
+          </a:fillRef>
+          <a:effectRef idx="0">
+            <a:schemeClr val="dk1"/>
+          </a:effectRef>
+          <a:fontRef idx="minor">
+            <a:schemeClr val="dk1"/>
+          </a:fontRef>
+        </p:style>
+        <p:txBody>
+          <a:bodyPr rtlCol="0" anchor="ctr"/>
+          <a:lstStyle/>
+          <a:p>
+            <a:pPr algn="ctr"/>
+            <a:endParaRPr lang="zh-CN" altLang="en-US" sz="1600"/>
+          </a:p>
+        </p:txBody>
+      </p:sp>
+      <p:cxnSp>
+        <p:nvCxnSpPr>
+          <p:cNvPr id="83" name="直接连接符 82">
+            <a:extLst>
+              <a:ext uri="{FF2B5EF4-FFF2-40B4-BE49-F238E27FC236}">
+                <a16:creationId xmlns:a16="http://schemas.microsoft.com/office/drawing/2014/main" id="{B804F0E9-D24E-15C6-25C0-CB8E88A04772}"/>
+              </a:ext>
+            </a:extLst>
+          </p:cNvPr>
+          <p:cNvCxnSpPr>
+            <a:stCxn id="54" idx="3"/>
+            <a:endCxn id="75" idx="0"/>
+          </p:cNvCxnSpPr>
+          <p:nvPr/>
+        </p:nvCxnSpPr>
+        <p:spPr>
+          <a:xfrm flipH="1">
+            <a:off x="10478787" y="2987569"/>
+            <a:ext cx="178303" cy="335236"/>
+          </a:xfrm>
+          <a:prstGeom prst="line">
+            <a:avLst/>
+          </a:prstGeom>
+          <a:ln w="38100"/>
+        </p:spPr>
+        <p:style>
+          <a:lnRef idx="2">
+            <a:schemeClr val="dk1"/>
+          </a:lnRef>
+          <a:fillRef idx="0">
+            <a:schemeClr val="dk1"/>
+          </a:fillRef>
+          <a:effectRef idx="1">
+            <a:schemeClr val="dk1"/>
+          </a:effectRef>
+          <a:fontRef idx="minor">
+            <a:schemeClr val="tx1"/>
+          </a:fontRef>
+        </p:style>
+      </p:cxnSp>
+      <p:sp>
+        <p:nvSpPr>
+          <p:cNvPr id="8" name="椭圆 7">
+            <a:extLst>
+              <a:ext uri="{FF2B5EF4-FFF2-40B4-BE49-F238E27FC236}">
+                <a16:creationId xmlns:a16="http://schemas.microsoft.com/office/drawing/2014/main" id="{E04F2545-F007-59F7-5B92-F42B4E8B64B9}"/>
+              </a:ext>
+            </a:extLst>
+          </p:cNvPr>
+          <p:cNvSpPr/>
+          <p:nvPr/>
+        </p:nvSpPr>
+        <p:spPr>
+          <a:xfrm>
+            <a:off x="980623" y="2156900"/>
+            <a:ext cx="333328" cy="333328"/>
+          </a:xfrm>
+          <a:prstGeom prst="ellipse">
+            <a:avLst/>
+          </a:prstGeom>
+        </p:spPr>
+        <p:style>
+          <a:lnRef idx="2">
+            <a:schemeClr val="dk1"/>
+          </a:lnRef>
+          <a:fillRef idx="1">
+            <a:schemeClr val="lt1"/>
+          </a:fillRef>
+          <a:effectRef idx="0">
+            <a:schemeClr val="dk1"/>
+          </a:effectRef>
+          <a:fontRef idx="minor">
+            <a:schemeClr val="dk1"/>
+          </a:fontRef>
+        </p:style>
+        <p:txBody>
+          <a:bodyPr rtlCol="0" anchor="ctr"/>
+          <a:lstStyle/>
+          <a:p>
+            <a:pPr algn="ctr"/>
+            <a:endParaRPr lang="zh-CN" altLang="en-US" sz="1600"/>
+          </a:p>
+        </p:txBody>
+      </p:sp>
+      <p:sp>
+        <p:nvSpPr>
+          <p:cNvPr id="10" name="椭圆 9">
+            <a:extLst>
+              <a:ext uri="{FF2B5EF4-FFF2-40B4-BE49-F238E27FC236}">
+                <a16:creationId xmlns:a16="http://schemas.microsoft.com/office/drawing/2014/main" id="{301E8753-3202-653C-F959-8B67008EEE5D}"/>
+              </a:ext>
+            </a:extLst>
+          </p:cNvPr>
+          <p:cNvSpPr/>
+          <p:nvPr/>
+        </p:nvSpPr>
+        <p:spPr>
+          <a:xfrm>
+            <a:off x="2997751" y="2156900"/>
+            <a:ext cx="333328" cy="333328"/>
+          </a:xfrm>
+          <a:prstGeom prst="ellipse">
+            <a:avLst/>
+          </a:prstGeom>
+        </p:spPr>
+        <p:style>
+          <a:lnRef idx="2">
+            <a:schemeClr val="dk1"/>
+          </a:lnRef>
+          <a:fillRef idx="1">
+            <a:schemeClr val="lt1"/>
+          </a:fillRef>
+          <a:effectRef idx="0">
+            <a:schemeClr val="dk1"/>
+          </a:effectRef>
+          <a:fontRef idx="minor">
+            <a:schemeClr val="dk1"/>
+          </a:fontRef>
+        </p:style>
+        <p:txBody>
+          <a:bodyPr rtlCol="0" anchor="ctr"/>
+          <a:lstStyle/>
+          <a:p>
+            <a:pPr algn="ctr"/>
+            <a:endParaRPr lang="zh-CN" altLang="en-US" sz="1600"/>
+          </a:p>
+        </p:txBody>
+      </p:sp>
+      <p:sp>
+        <p:nvSpPr>
+          <p:cNvPr id="17" name="椭圆 16">
+            <a:extLst>
+              <a:ext uri="{FF2B5EF4-FFF2-40B4-BE49-F238E27FC236}">
+                <a16:creationId xmlns:a16="http://schemas.microsoft.com/office/drawing/2014/main" id="{757278EA-AA0D-763B-6894-91064554C223}"/>
+              </a:ext>
+            </a:extLst>
+          </p:cNvPr>
+          <p:cNvSpPr/>
+          <p:nvPr/>
+        </p:nvSpPr>
+        <p:spPr>
+          <a:xfrm>
+            <a:off x="2484246" y="2732715"/>
+            <a:ext cx="333328" cy="333328"/>
+          </a:xfrm>
+          <a:prstGeom prst="ellipse">
+            <a:avLst/>
+          </a:prstGeom>
+        </p:spPr>
+        <p:style>
+          <a:lnRef idx="2">
+            <a:schemeClr val="dk1"/>
+          </a:lnRef>
+          <a:fillRef idx="1">
+            <a:schemeClr val="lt1"/>
+          </a:fillRef>
+          <a:effectRef idx="0">
+            <a:schemeClr val="dk1"/>
+          </a:effectRef>
+          <a:fontRef idx="minor">
+            <a:schemeClr val="dk1"/>
+          </a:fontRef>
+        </p:style>
+        <p:txBody>
+          <a:bodyPr rtlCol="0" anchor="ctr"/>
+          <a:lstStyle/>
+          <a:p>
+            <a:pPr algn="ctr"/>
+            <a:endParaRPr lang="zh-CN" altLang="en-US" sz="1600"/>
+          </a:p>
+        </p:txBody>
+      </p:sp>
+      <p:cxnSp>
+        <p:nvCxnSpPr>
+          <p:cNvPr id="19" name="直接连接符 18">
+            <a:extLst>
+              <a:ext uri="{FF2B5EF4-FFF2-40B4-BE49-F238E27FC236}">
+                <a16:creationId xmlns:a16="http://schemas.microsoft.com/office/drawing/2014/main" id="{39B87D29-9112-DDEF-C20D-5796BE035907}"/>
+              </a:ext>
+            </a:extLst>
+          </p:cNvPr>
+          <p:cNvCxnSpPr>
+            <a:stCxn id="10" idx="3"/>
+            <a:endCxn id="17" idx="7"/>
+          </p:cNvCxnSpPr>
+          <p:nvPr/>
+        </p:nvCxnSpPr>
+        <p:spPr>
+          <a:xfrm flipH="1">
+            <a:off x="2768759" y="2441413"/>
+            <a:ext cx="277807" cy="340117"/>
+          </a:xfrm>
+          <a:prstGeom prst="line">
+            <a:avLst/>
+          </a:prstGeom>
+          <a:ln w="38100"/>
+        </p:spPr>
+        <p:style>
+          <a:lnRef idx="3">
+            <a:schemeClr val="dk1"/>
+          </a:lnRef>
+          <a:fillRef idx="0">
+            <a:schemeClr val="dk1"/>
+          </a:fillRef>
+          <a:effectRef idx="2">
+            <a:schemeClr val="dk1"/>
+          </a:effectRef>
+          <a:fontRef idx="minor">
+            <a:schemeClr val="tx1"/>
+          </a:fontRef>
+        </p:style>
+      </p:cxnSp>
+    </p:spTree>
+    <p:extLst>
+      <p:ext uri="{BB962C8B-B14F-4D97-AF65-F5344CB8AC3E}">
+        <p14:creationId xmlns:p14="http://schemas.microsoft.com/office/powerpoint/2010/main" val="4085544930"/>
+      </p:ext>
+    </p:extLst>
+  </p:cSld>
+  <p:clrMapOvr>
+    <a:masterClrMapping/>
+  </p:clrMapOvr>
+</p:sld>
+</file>
+
+<file path=ppt/slides/slide15.xml><?xml version="1.0" encoding="utf-8"?>
 <p:sld xmlns:a="http://schemas.openxmlformats.org/drawingml/2006/main" xmlns:r="http://schemas.openxmlformats.org/officeDocument/2006/relationships" xmlns:p="http://schemas.openxmlformats.org/presentationml/2006/main">
   <p:cSld>
     <p:spTree>
@@ -14810,6 +17419,1212 @@
           <a:chExt cx="0" cy="0"/>
         </a:xfrm>
       </p:grpSpPr>
+      <p:sp>
+        <p:nvSpPr>
+          <p:cNvPr id="2" name="椭圆 1">
+            <a:extLst>
+              <a:ext uri="{FF2B5EF4-FFF2-40B4-BE49-F238E27FC236}">
+                <a16:creationId xmlns:a16="http://schemas.microsoft.com/office/drawing/2014/main" id="{6F9A5437-8154-D68C-5D3E-C9918B79E430}"/>
+              </a:ext>
+            </a:extLst>
+          </p:cNvPr>
+          <p:cNvSpPr/>
+          <p:nvPr/>
+        </p:nvSpPr>
+        <p:spPr>
+          <a:xfrm>
+            <a:off x="8318311" y="1195173"/>
+            <a:ext cx="333328" cy="333328"/>
+          </a:xfrm>
+          <a:prstGeom prst="ellipse">
+            <a:avLst/>
+          </a:prstGeom>
+        </p:spPr>
+        <p:style>
+          <a:lnRef idx="2">
+            <a:schemeClr val="dk1"/>
+          </a:lnRef>
+          <a:fillRef idx="1">
+            <a:schemeClr val="lt1"/>
+          </a:fillRef>
+          <a:effectRef idx="0">
+            <a:schemeClr val="dk1"/>
+          </a:effectRef>
+          <a:fontRef idx="minor">
+            <a:schemeClr val="dk1"/>
+          </a:fontRef>
+        </p:style>
+        <p:txBody>
+          <a:bodyPr rtlCol="0" anchor="ctr"/>
+          <a:lstStyle/>
+          <a:p>
+            <a:pPr algn="ctr"/>
+            <a:r>
+              <a:rPr lang="en-US" altLang="zh-CN" sz="1600"/>
+              <a:t>d</a:t>
+            </a:r>
+            <a:endParaRPr lang="zh-CN" altLang="en-US" sz="1600"/>
+          </a:p>
+        </p:txBody>
+      </p:sp>
+      <p:sp>
+        <p:nvSpPr>
+          <p:cNvPr id="3" name="椭圆 2">
+            <a:extLst>
+              <a:ext uri="{FF2B5EF4-FFF2-40B4-BE49-F238E27FC236}">
+                <a16:creationId xmlns:a16="http://schemas.microsoft.com/office/drawing/2014/main" id="{42B4B191-E28F-5DF9-A159-0E267E33F298}"/>
+              </a:ext>
+            </a:extLst>
+          </p:cNvPr>
+          <p:cNvSpPr/>
+          <p:nvPr/>
+        </p:nvSpPr>
+        <p:spPr>
+          <a:xfrm>
+            <a:off x="3713927" y="1195173"/>
+            <a:ext cx="333328" cy="333328"/>
+          </a:xfrm>
+          <a:prstGeom prst="ellipse">
+            <a:avLst/>
+          </a:prstGeom>
+        </p:spPr>
+        <p:style>
+          <a:lnRef idx="2">
+            <a:schemeClr val="dk1"/>
+          </a:lnRef>
+          <a:fillRef idx="1">
+            <a:schemeClr val="lt1"/>
+          </a:fillRef>
+          <a:effectRef idx="0">
+            <a:schemeClr val="dk1"/>
+          </a:effectRef>
+          <a:fontRef idx="minor">
+            <a:schemeClr val="dk1"/>
+          </a:fontRef>
+        </p:style>
+        <p:txBody>
+          <a:bodyPr rtlCol="0" anchor="ctr"/>
+          <a:lstStyle/>
+          <a:p>
+            <a:pPr algn="ctr"/>
+            <a:r>
+              <a:rPr lang="en-US" altLang="zh-CN" sz="1600"/>
+              <a:t>p</a:t>
+            </a:r>
+            <a:endParaRPr lang="zh-CN" altLang="en-US" sz="1600"/>
+          </a:p>
+        </p:txBody>
+      </p:sp>
+      <p:sp>
+        <p:nvSpPr>
+          <p:cNvPr id="4" name="椭圆 3">
+            <a:extLst>
+              <a:ext uri="{FF2B5EF4-FFF2-40B4-BE49-F238E27FC236}">
+                <a16:creationId xmlns:a16="http://schemas.microsoft.com/office/drawing/2014/main" id="{23E56719-D1FC-E787-7FFF-7145E5041EEE}"/>
+              </a:ext>
+            </a:extLst>
+          </p:cNvPr>
+          <p:cNvSpPr/>
+          <p:nvPr/>
+        </p:nvSpPr>
+        <p:spPr>
+          <a:xfrm>
+            <a:off x="9817535" y="1626849"/>
+            <a:ext cx="333328" cy="333328"/>
+          </a:xfrm>
+          <a:prstGeom prst="ellipse">
+            <a:avLst/>
+          </a:prstGeom>
+        </p:spPr>
+        <p:style>
+          <a:lnRef idx="2">
+            <a:schemeClr val="dk1"/>
+          </a:lnRef>
+          <a:fillRef idx="1">
+            <a:schemeClr val="lt1"/>
+          </a:fillRef>
+          <a:effectRef idx="0">
+            <a:schemeClr val="dk1"/>
+          </a:effectRef>
+          <a:fontRef idx="minor">
+            <a:schemeClr val="dk1"/>
+          </a:fontRef>
+        </p:style>
+        <p:txBody>
+          <a:bodyPr rtlCol="0" anchor="ctr"/>
+          <a:lstStyle/>
+          <a:p>
+            <a:pPr algn="ctr"/>
+            <a:r>
+              <a:rPr lang="en-US" altLang="zh-CN" sz="1600"/>
+              <a:t>o</a:t>
+            </a:r>
+            <a:endParaRPr lang="zh-CN" altLang="en-US" sz="1600"/>
+          </a:p>
+        </p:txBody>
+      </p:sp>
+      <p:cxnSp>
+        <p:nvCxnSpPr>
+          <p:cNvPr id="5" name="直接连接符 4">
+            <a:extLst>
+              <a:ext uri="{FF2B5EF4-FFF2-40B4-BE49-F238E27FC236}">
+                <a16:creationId xmlns:a16="http://schemas.microsoft.com/office/drawing/2014/main" id="{27D9903E-9712-768E-D466-C76B854CFBDC}"/>
+              </a:ext>
+            </a:extLst>
+          </p:cNvPr>
+          <p:cNvCxnSpPr>
+            <a:cxnSpLocks/>
+            <a:stCxn id="2" idx="3"/>
+          </p:cNvCxnSpPr>
+          <p:nvPr/>
+        </p:nvCxnSpPr>
+        <p:spPr>
+          <a:xfrm flipH="1">
+            <a:off x="6920438" y="1479686"/>
+            <a:ext cx="1446688" cy="186217"/>
+          </a:xfrm>
+          <a:prstGeom prst="line">
+            <a:avLst/>
+          </a:prstGeom>
+        </p:spPr>
+        <p:style>
+          <a:lnRef idx="2">
+            <a:schemeClr val="dk1"/>
+          </a:lnRef>
+          <a:fillRef idx="0">
+            <a:schemeClr val="dk1"/>
+          </a:fillRef>
+          <a:effectRef idx="1">
+            <a:schemeClr val="dk1"/>
+          </a:effectRef>
+          <a:fontRef idx="minor">
+            <a:schemeClr val="tx1"/>
+          </a:fontRef>
+        </p:style>
+      </p:cxnSp>
+      <p:cxnSp>
+        <p:nvCxnSpPr>
+          <p:cNvPr id="6" name="直接连接符 5">
+            <a:extLst>
+              <a:ext uri="{FF2B5EF4-FFF2-40B4-BE49-F238E27FC236}">
+                <a16:creationId xmlns:a16="http://schemas.microsoft.com/office/drawing/2014/main" id="{02D3D5A0-F7AD-26C4-748D-A486BB63C9FC}"/>
+              </a:ext>
+            </a:extLst>
+          </p:cNvPr>
+          <p:cNvCxnSpPr>
+            <a:stCxn id="2" idx="5"/>
+            <a:endCxn id="4" idx="1"/>
+          </p:cNvCxnSpPr>
+          <p:nvPr/>
+        </p:nvCxnSpPr>
+        <p:spPr>
+          <a:xfrm>
+            <a:off x="8602824" y="1479686"/>
+            <a:ext cx="1263526" cy="195978"/>
+          </a:xfrm>
+          <a:prstGeom prst="line">
+            <a:avLst/>
+          </a:prstGeom>
+        </p:spPr>
+        <p:style>
+          <a:lnRef idx="2">
+            <a:schemeClr val="dk1"/>
+          </a:lnRef>
+          <a:fillRef idx="0">
+            <a:schemeClr val="dk1"/>
+          </a:fillRef>
+          <a:effectRef idx="1">
+            <a:schemeClr val="dk1"/>
+          </a:effectRef>
+          <a:fontRef idx="minor">
+            <a:schemeClr val="tx1"/>
+          </a:fontRef>
+        </p:style>
+      </p:cxnSp>
+      <p:sp>
+        <p:nvSpPr>
+          <p:cNvPr id="7" name="椭圆 6">
+            <a:extLst>
+              <a:ext uri="{FF2B5EF4-FFF2-40B4-BE49-F238E27FC236}">
+                <a16:creationId xmlns:a16="http://schemas.microsoft.com/office/drawing/2014/main" id="{3FF34C33-A2CA-AC30-A552-F63191863F40}"/>
+              </a:ext>
+            </a:extLst>
+          </p:cNvPr>
+          <p:cNvSpPr/>
+          <p:nvPr/>
+        </p:nvSpPr>
+        <p:spPr>
+          <a:xfrm>
+            <a:off x="4488876" y="1802504"/>
+            <a:ext cx="333328" cy="333328"/>
+          </a:xfrm>
+          <a:prstGeom prst="ellipse">
+            <a:avLst/>
+          </a:prstGeom>
+        </p:spPr>
+        <p:style>
+          <a:lnRef idx="2">
+            <a:schemeClr val="dk1"/>
+          </a:lnRef>
+          <a:fillRef idx="1">
+            <a:schemeClr val="lt1"/>
+          </a:fillRef>
+          <a:effectRef idx="0">
+            <a:schemeClr val="dk1"/>
+          </a:effectRef>
+          <a:fontRef idx="minor">
+            <a:schemeClr val="dk1"/>
+          </a:fontRef>
+        </p:style>
+        <p:txBody>
+          <a:bodyPr rtlCol="0" anchor="ctr"/>
+          <a:lstStyle/>
+          <a:p>
+            <a:pPr algn="ctr"/>
+            <a:r>
+              <a:rPr lang="en-US" altLang="zh-CN" sz="1600"/>
+              <a:t>o</a:t>
+            </a:r>
+            <a:endParaRPr lang="zh-CN" altLang="en-US" sz="1600"/>
+          </a:p>
+        </p:txBody>
+      </p:sp>
+      <p:sp>
+        <p:nvSpPr>
+          <p:cNvPr id="8" name="椭圆 7">
+            <a:extLst>
+              <a:ext uri="{FF2B5EF4-FFF2-40B4-BE49-F238E27FC236}">
+                <a16:creationId xmlns:a16="http://schemas.microsoft.com/office/drawing/2014/main" id="{9FEE2BFD-6D94-E0FE-FD5C-7FE002BA773B}"/>
+              </a:ext>
+            </a:extLst>
+          </p:cNvPr>
+          <p:cNvSpPr/>
+          <p:nvPr/>
+        </p:nvSpPr>
+        <p:spPr>
+          <a:xfrm>
+            <a:off x="10469958" y="2224419"/>
+            <a:ext cx="333328" cy="333328"/>
+          </a:xfrm>
+          <a:prstGeom prst="ellipse">
+            <a:avLst/>
+          </a:prstGeom>
+        </p:spPr>
+        <p:style>
+          <a:lnRef idx="2">
+            <a:schemeClr val="dk1"/>
+          </a:lnRef>
+          <a:fillRef idx="1">
+            <a:schemeClr val="lt1"/>
+          </a:fillRef>
+          <a:effectRef idx="0">
+            <a:schemeClr val="dk1"/>
+          </a:effectRef>
+          <a:fontRef idx="minor">
+            <a:schemeClr val="dk1"/>
+          </a:fontRef>
+        </p:style>
+        <p:txBody>
+          <a:bodyPr rtlCol="0" anchor="ctr"/>
+          <a:lstStyle/>
+          <a:p>
+            <a:pPr algn="ctr"/>
+            <a:r>
+              <a:rPr lang="en-US" altLang="zh-CN" sz="1600"/>
+              <a:t>o</a:t>
+            </a:r>
+            <a:endParaRPr lang="zh-CN" altLang="en-US" sz="1600"/>
+          </a:p>
+        </p:txBody>
+      </p:sp>
+      <p:sp>
+        <p:nvSpPr>
+          <p:cNvPr id="9" name="椭圆 8">
+            <a:extLst>
+              <a:ext uri="{FF2B5EF4-FFF2-40B4-BE49-F238E27FC236}">
+                <a16:creationId xmlns:a16="http://schemas.microsoft.com/office/drawing/2014/main" id="{BD8CA3B8-DFB4-75F8-38AF-FFC6DDF8060F}"/>
+              </a:ext>
+            </a:extLst>
+          </p:cNvPr>
+          <p:cNvSpPr/>
+          <p:nvPr/>
+        </p:nvSpPr>
+        <p:spPr>
+          <a:xfrm>
+            <a:off x="3314813" y="2465422"/>
+            <a:ext cx="333328" cy="333328"/>
+          </a:xfrm>
+          <a:prstGeom prst="ellipse">
+            <a:avLst/>
+          </a:prstGeom>
+        </p:spPr>
+        <p:style>
+          <a:lnRef idx="2">
+            <a:schemeClr val="dk1"/>
+          </a:lnRef>
+          <a:fillRef idx="1">
+            <a:schemeClr val="lt1"/>
+          </a:fillRef>
+          <a:effectRef idx="0">
+            <a:schemeClr val="dk1"/>
+          </a:effectRef>
+          <a:fontRef idx="minor">
+            <a:schemeClr val="dk1"/>
+          </a:fontRef>
+        </p:style>
+        <p:txBody>
+          <a:bodyPr rtlCol="0" anchor="ctr"/>
+          <a:lstStyle/>
+          <a:p>
+            <a:pPr algn="ctr"/>
+            <a:r>
+              <a:rPr lang="en-US" altLang="zh-CN" sz="1600"/>
+              <a:t>e</a:t>
+            </a:r>
+            <a:endParaRPr lang="zh-CN" altLang="en-US" sz="1600"/>
+          </a:p>
+        </p:txBody>
+      </p:sp>
+      <p:sp>
+        <p:nvSpPr>
+          <p:cNvPr id="10" name="椭圆 9">
+            <a:extLst>
+              <a:ext uri="{FF2B5EF4-FFF2-40B4-BE49-F238E27FC236}">
+                <a16:creationId xmlns:a16="http://schemas.microsoft.com/office/drawing/2014/main" id="{1E489726-E87B-4014-6FFB-3635D5E54823}"/>
+              </a:ext>
+            </a:extLst>
+          </p:cNvPr>
+          <p:cNvSpPr/>
+          <p:nvPr/>
+        </p:nvSpPr>
+        <p:spPr>
+          <a:xfrm>
+            <a:off x="10023259" y="2920372"/>
+            <a:ext cx="333328" cy="333328"/>
+          </a:xfrm>
+          <a:prstGeom prst="ellipse">
+            <a:avLst/>
+          </a:prstGeom>
+        </p:spPr>
+        <p:style>
+          <a:lnRef idx="2">
+            <a:schemeClr val="dk1"/>
+          </a:lnRef>
+          <a:fillRef idx="1">
+            <a:schemeClr val="lt1"/>
+          </a:fillRef>
+          <a:effectRef idx="0">
+            <a:schemeClr val="dk1"/>
+          </a:effectRef>
+          <a:fontRef idx="minor">
+            <a:schemeClr val="dk1"/>
+          </a:fontRef>
+        </p:style>
+        <p:txBody>
+          <a:bodyPr rtlCol="0" anchor="ctr"/>
+          <a:lstStyle/>
+          <a:p>
+            <a:pPr algn="ctr"/>
+            <a:r>
+              <a:rPr lang="en-US" altLang="zh-CN" sz="1600"/>
+              <a:t>I</a:t>
+            </a:r>
+            <a:endParaRPr lang="zh-CN" altLang="en-US" sz="1600"/>
+          </a:p>
+        </p:txBody>
+      </p:sp>
+      <p:sp>
+        <p:nvSpPr>
+          <p:cNvPr id="11" name="椭圆 10">
+            <a:extLst>
+              <a:ext uri="{FF2B5EF4-FFF2-40B4-BE49-F238E27FC236}">
+                <a16:creationId xmlns:a16="http://schemas.microsoft.com/office/drawing/2014/main" id="{A0B838DC-7A68-0C06-5B09-61C0EBBEF5A7}"/>
+              </a:ext>
+            </a:extLst>
+          </p:cNvPr>
+          <p:cNvSpPr/>
+          <p:nvPr/>
+        </p:nvSpPr>
+        <p:spPr>
+          <a:xfrm>
+            <a:off x="10951155" y="2920372"/>
+            <a:ext cx="333328" cy="333328"/>
+          </a:xfrm>
+          <a:prstGeom prst="ellipse">
+            <a:avLst/>
+          </a:prstGeom>
+        </p:spPr>
+        <p:style>
+          <a:lnRef idx="2">
+            <a:schemeClr val="dk1"/>
+          </a:lnRef>
+          <a:fillRef idx="1">
+            <a:schemeClr val="lt1"/>
+          </a:fillRef>
+          <a:effectRef idx="0">
+            <a:schemeClr val="dk1"/>
+          </a:effectRef>
+          <a:fontRef idx="minor">
+            <a:schemeClr val="dk1"/>
+          </a:fontRef>
+        </p:style>
+        <p:txBody>
+          <a:bodyPr rtlCol="0" anchor="ctr"/>
+          <a:lstStyle/>
+          <a:p>
+            <a:pPr algn="ctr"/>
+            <a:r>
+              <a:rPr lang="en-US" altLang="zh-CN" sz="1600"/>
+              <a:t>G</a:t>
+            </a:r>
+            <a:endParaRPr lang="zh-CN" altLang="en-US" sz="1600"/>
+          </a:p>
+        </p:txBody>
+      </p:sp>
+      <p:cxnSp>
+        <p:nvCxnSpPr>
+          <p:cNvPr id="12" name="直接连接符 11">
+            <a:extLst>
+              <a:ext uri="{FF2B5EF4-FFF2-40B4-BE49-F238E27FC236}">
+                <a16:creationId xmlns:a16="http://schemas.microsoft.com/office/drawing/2014/main" id="{823A5D44-8FED-DADC-B94F-11394AC4C7F7}"/>
+              </a:ext>
+            </a:extLst>
+          </p:cNvPr>
+          <p:cNvCxnSpPr>
+            <a:stCxn id="3" idx="5"/>
+            <a:endCxn id="7" idx="0"/>
+          </p:cNvCxnSpPr>
+          <p:nvPr/>
+        </p:nvCxnSpPr>
+        <p:spPr>
+          <a:xfrm>
+            <a:off x="3998440" y="1479686"/>
+            <a:ext cx="657100" cy="322818"/>
+          </a:xfrm>
+          <a:prstGeom prst="line">
+            <a:avLst/>
+          </a:prstGeom>
+        </p:spPr>
+        <p:style>
+          <a:lnRef idx="2">
+            <a:schemeClr val="dk1"/>
+          </a:lnRef>
+          <a:fillRef idx="0">
+            <a:schemeClr val="dk1"/>
+          </a:fillRef>
+          <a:effectRef idx="1">
+            <a:schemeClr val="dk1"/>
+          </a:effectRef>
+          <a:fontRef idx="minor">
+            <a:schemeClr val="tx1"/>
+          </a:fontRef>
+        </p:style>
+      </p:cxnSp>
+      <p:cxnSp>
+        <p:nvCxnSpPr>
+          <p:cNvPr id="13" name="直接连接符 12">
+            <a:extLst>
+              <a:ext uri="{FF2B5EF4-FFF2-40B4-BE49-F238E27FC236}">
+                <a16:creationId xmlns:a16="http://schemas.microsoft.com/office/drawing/2014/main" id="{C7FE8D77-B7BC-869B-7BCD-19BCB689149D}"/>
+              </a:ext>
+            </a:extLst>
+          </p:cNvPr>
+          <p:cNvCxnSpPr>
+            <a:stCxn id="4" idx="5"/>
+            <a:endCxn id="8" idx="1"/>
+          </p:cNvCxnSpPr>
+          <p:nvPr/>
+        </p:nvCxnSpPr>
+        <p:spPr>
+          <a:xfrm>
+            <a:off x="10102048" y="1911362"/>
+            <a:ext cx="416725" cy="361872"/>
+          </a:xfrm>
+          <a:prstGeom prst="line">
+            <a:avLst/>
+          </a:prstGeom>
+        </p:spPr>
+        <p:style>
+          <a:lnRef idx="2">
+            <a:schemeClr val="dk1"/>
+          </a:lnRef>
+          <a:fillRef idx="0">
+            <a:schemeClr val="dk1"/>
+          </a:fillRef>
+          <a:effectRef idx="1">
+            <a:schemeClr val="dk1"/>
+          </a:effectRef>
+          <a:fontRef idx="minor">
+            <a:schemeClr val="tx1"/>
+          </a:fontRef>
+        </p:style>
+      </p:cxnSp>
+      <p:cxnSp>
+        <p:nvCxnSpPr>
+          <p:cNvPr id="14" name="直接连接符 13">
+            <a:extLst>
+              <a:ext uri="{FF2B5EF4-FFF2-40B4-BE49-F238E27FC236}">
+                <a16:creationId xmlns:a16="http://schemas.microsoft.com/office/drawing/2014/main" id="{65A4FB2B-93A1-F631-DFFC-C2102684434A}"/>
+              </a:ext>
+            </a:extLst>
+          </p:cNvPr>
+          <p:cNvCxnSpPr>
+            <a:cxnSpLocks/>
+            <a:stCxn id="17" idx="5"/>
+            <a:endCxn id="9" idx="0"/>
+          </p:cNvCxnSpPr>
+          <p:nvPr/>
+        </p:nvCxnSpPr>
+        <p:spPr>
+          <a:xfrm>
+            <a:off x="3043104" y="2087017"/>
+            <a:ext cx="438373" cy="378405"/>
+          </a:xfrm>
+          <a:prstGeom prst="line">
+            <a:avLst/>
+          </a:prstGeom>
+        </p:spPr>
+        <p:style>
+          <a:lnRef idx="2">
+            <a:schemeClr val="dk1"/>
+          </a:lnRef>
+          <a:fillRef idx="0">
+            <a:schemeClr val="dk1"/>
+          </a:fillRef>
+          <a:effectRef idx="1">
+            <a:schemeClr val="dk1"/>
+          </a:effectRef>
+          <a:fontRef idx="minor">
+            <a:schemeClr val="tx1"/>
+          </a:fontRef>
+        </p:style>
+      </p:cxnSp>
+      <p:cxnSp>
+        <p:nvCxnSpPr>
+          <p:cNvPr id="15" name="直接连接符 14">
+            <a:extLst>
+              <a:ext uri="{FF2B5EF4-FFF2-40B4-BE49-F238E27FC236}">
+                <a16:creationId xmlns:a16="http://schemas.microsoft.com/office/drawing/2014/main" id="{598DE732-1FBD-F457-3A77-2ED83A10AB75}"/>
+              </a:ext>
+            </a:extLst>
+          </p:cNvPr>
+          <p:cNvCxnSpPr>
+            <a:stCxn id="8" idx="3"/>
+            <a:endCxn id="10" idx="0"/>
+          </p:cNvCxnSpPr>
+          <p:nvPr/>
+        </p:nvCxnSpPr>
+        <p:spPr>
+          <a:xfrm flipH="1">
+            <a:off x="10189923" y="2508932"/>
+            <a:ext cx="328850" cy="411440"/>
+          </a:xfrm>
+          <a:prstGeom prst="line">
+            <a:avLst/>
+          </a:prstGeom>
+        </p:spPr>
+        <p:style>
+          <a:lnRef idx="2">
+            <a:schemeClr val="dk1"/>
+          </a:lnRef>
+          <a:fillRef idx="0">
+            <a:schemeClr val="dk1"/>
+          </a:fillRef>
+          <a:effectRef idx="1">
+            <a:schemeClr val="dk1"/>
+          </a:effectRef>
+          <a:fontRef idx="minor">
+            <a:schemeClr val="tx1"/>
+          </a:fontRef>
+        </p:style>
+      </p:cxnSp>
+      <p:cxnSp>
+        <p:nvCxnSpPr>
+          <p:cNvPr id="16" name="直接连接符 15">
+            <a:extLst>
+              <a:ext uri="{FF2B5EF4-FFF2-40B4-BE49-F238E27FC236}">
+                <a16:creationId xmlns:a16="http://schemas.microsoft.com/office/drawing/2014/main" id="{6037CE08-5F70-9D67-FABE-B1360C630F10}"/>
+              </a:ext>
+            </a:extLst>
+          </p:cNvPr>
+          <p:cNvCxnSpPr>
+            <a:stCxn id="8" idx="5"/>
+            <a:endCxn id="11" idx="0"/>
+          </p:cNvCxnSpPr>
+          <p:nvPr/>
+        </p:nvCxnSpPr>
+        <p:spPr>
+          <a:xfrm>
+            <a:off x="10754471" y="2508932"/>
+            <a:ext cx="363348" cy="411440"/>
+          </a:xfrm>
+          <a:prstGeom prst="line">
+            <a:avLst/>
+          </a:prstGeom>
+        </p:spPr>
+        <p:style>
+          <a:lnRef idx="2">
+            <a:schemeClr val="dk1"/>
+          </a:lnRef>
+          <a:fillRef idx="0">
+            <a:schemeClr val="dk1"/>
+          </a:fillRef>
+          <a:effectRef idx="1">
+            <a:schemeClr val="dk1"/>
+          </a:effectRef>
+          <a:fontRef idx="minor">
+            <a:schemeClr val="tx1"/>
+          </a:fontRef>
+        </p:style>
+      </p:cxnSp>
+      <p:sp>
+        <p:nvSpPr>
+          <p:cNvPr id="17" name="椭圆 16">
+            <a:extLst>
+              <a:ext uri="{FF2B5EF4-FFF2-40B4-BE49-F238E27FC236}">
+                <a16:creationId xmlns:a16="http://schemas.microsoft.com/office/drawing/2014/main" id="{AFADFB61-84CF-A181-DF64-E439AAAFA187}"/>
+              </a:ext>
+            </a:extLst>
+          </p:cNvPr>
+          <p:cNvSpPr/>
+          <p:nvPr/>
+        </p:nvSpPr>
+        <p:spPr>
+          <a:xfrm>
+            <a:off x="2758591" y="1802504"/>
+            <a:ext cx="333328" cy="333328"/>
+          </a:xfrm>
+          <a:prstGeom prst="ellipse">
+            <a:avLst/>
+          </a:prstGeom>
+          <a:ln>
+            <a:prstDash val="solid"/>
+          </a:ln>
+        </p:spPr>
+        <p:style>
+          <a:lnRef idx="2">
+            <a:schemeClr val="dk1"/>
+          </a:lnRef>
+          <a:fillRef idx="1">
+            <a:schemeClr val="lt1"/>
+          </a:fillRef>
+          <a:effectRef idx="0">
+            <a:schemeClr val="dk1"/>
+          </a:effectRef>
+          <a:fontRef idx="minor">
+            <a:schemeClr val="dk1"/>
+          </a:fontRef>
+        </p:style>
+        <p:txBody>
+          <a:bodyPr rtlCol="0" anchor="ctr"/>
+          <a:lstStyle/>
+          <a:p>
+            <a:pPr algn="ctr"/>
+            <a:r>
+              <a:rPr lang="en-US" altLang="zh-CN" sz="1600"/>
+              <a:t>L</a:t>
+            </a:r>
+            <a:endParaRPr lang="zh-CN" altLang="en-US" sz="1600"/>
+          </a:p>
+        </p:txBody>
+      </p:sp>
+      <p:sp>
+        <p:nvSpPr>
+          <p:cNvPr id="18" name="椭圆 17">
+            <a:extLst>
+              <a:ext uri="{FF2B5EF4-FFF2-40B4-BE49-F238E27FC236}">
+                <a16:creationId xmlns:a16="http://schemas.microsoft.com/office/drawing/2014/main" id="{A97D681F-615E-9AF1-6056-624E709604FB}"/>
+              </a:ext>
+            </a:extLst>
+          </p:cNvPr>
+          <p:cNvSpPr/>
+          <p:nvPr/>
+        </p:nvSpPr>
+        <p:spPr>
+          <a:xfrm>
+            <a:off x="2041137" y="2466926"/>
+            <a:ext cx="333328" cy="333328"/>
+          </a:xfrm>
+          <a:prstGeom prst="ellipse">
+            <a:avLst/>
+          </a:prstGeom>
+          <a:ln>
+            <a:prstDash val="solid"/>
+          </a:ln>
+        </p:spPr>
+        <p:style>
+          <a:lnRef idx="2">
+            <a:schemeClr val="dk1"/>
+          </a:lnRef>
+          <a:fillRef idx="1">
+            <a:schemeClr val="lt1"/>
+          </a:fillRef>
+          <a:effectRef idx="0">
+            <a:schemeClr val="dk1"/>
+          </a:effectRef>
+          <a:fontRef idx="minor">
+            <a:schemeClr val="dk1"/>
+          </a:fontRef>
+        </p:style>
+        <p:txBody>
+          <a:bodyPr rtlCol="0" anchor="ctr"/>
+          <a:lstStyle/>
+          <a:p>
+            <a:pPr algn="ctr"/>
+            <a:r>
+              <a:rPr lang="en-US" altLang="zh-CN" sz="1600"/>
+              <a:t>C</a:t>
+            </a:r>
+            <a:endParaRPr lang="zh-CN" altLang="en-US" sz="1600"/>
+          </a:p>
+        </p:txBody>
+      </p:sp>
+      <p:cxnSp>
+        <p:nvCxnSpPr>
+          <p:cNvPr id="19" name="直接连接符 18">
+            <a:extLst>
+              <a:ext uri="{FF2B5EF4-FFF2-40B4-BE49-F238E27FC236}">
+                <a16:creationId xmlns:a16="http://schemas.microsoft.com/office/drawing/2014/main" id="{59BE00D2-E6DF-B0B8-10E4-D0432B8C3249}"/>
+              </a:ext>
+            </a:extLst>
+          </p:cNvPr>
+          <p:cNvCxnSpPr>
+            <a:stCxn id="3" idx="3"/>
+            <a:endCxn id="17" idx="7"/>
+          </p:cNvCxnSpPr>
+          <p:nvPr/>
+        </p:nvCxnSpPr>
+        <p:spPr>
+          <a:xfrm flipH="1">
+            <a:off x="3043104" y="1479686"/>
+            <a:ext cx="719638" cy="371633"/>
+          </a:xfrm>
+          <a:prstGeom prst="line">
+            <a:avLst/>
+          </a:prstGeom>
+          <a:ln w="9525" cap="flat" cmpd="sng" algn="ctr">
+            <a:solidFill>
+              <a:schemeClr val="dk1"/>
+            </a:solidFill>
+            <a:prstDash val="solid"/>
+            <a:round/>
+            <a:headEnd type="none" w="med" len="med"/>
+            <a:tailEnd type="none" w="med" len="med"/>
+          </a:ln>
+        </p:spPr>
+        <p:style>
+          <a:lnRef idx="0">
+            <a:scrgbClr r="0" g="0" b="0"/>
+          </a:lnRef>
+          <a:fillRef idx="0">
+            <a:scrgbClr r="0" g="0" b="0"/>
+          </a:fillRef>
+          <a:effectRef idx="0">
+            <a:scrgbClr r="0" g="0" b="0"/>
+          </a:effectRef>
+          <a:fontRef idx="minor">
+            <a:schemeClr val="tx1"/>
+          </a:fontRef>
+        </p:style>
+      </p:cxnSp>
+      <p:cxnSp>
+        <p:nvCxnSpPr>
+          <p:cNvPr id="20" name="直接连接符 19">
+            <a:extLst>
+              <a:ext uri="{FF2B5EF4-FFF2-40B4-BE49-F238E27FC236}">
+                <a16:creationId xmlns:a16="http://schemas.microsoft.com/office/drawing/2014/main" id="{5B79144F-B9C0-29B7-89EA-6CB0A5D8DA35}"/>
+              </a:ext>
+            </a:extLst>
+          </p:cNvPr>
+          <p:cNvCxnSpPr>
+            <a:cxnSpLocks/>
+            <a:stCxn id="17" idx="3"/>
+            <a:endCxn id="18" idx="7"/>
+          </p:cNvCxnSpPr>
+          <p:nvPr/>
+        </p:nvCxnSpPr>
+        <p:spPr>
+          <a:xfrm flipH="1">
+            <a:off x="2325650" y="2087017"/>
+            <a:ext cx="481756" cy="428724"/>
+          </a:xfrm>
+          <a:prstGeom prst="line">
+            <a:avLst/>
+          </a:prstGeom>
+          <a:ln w="9525" cap="flat" cmpd="sng" algn="ctr">
+            <a:solidFill>
+              <a:schemeClr val="dk1"/>
+            </a:solidFill>
+            <a:prstDash val="solid"/>
+            <a:round/>
+            <a:headEnd type="none" w="med" len="med"/>
+            <a:tailEnd type="none" w="med" len="med"/>
+          </a:ln>
+        </p:spPr>
+        <p:style>
+          <a:lnRef idx="0">
+            <a:scrgbClr r="0" g="0" b="0"/>
+          </a:lnRef>
+          <a:fillRef idx="0">
+            <a:scrgbClr r="0" g="0" b="0"/>
+          </a:fillRef>
+          <a:effectRef idx="0">
+            <a:scrgbClr r="0" g="0" b="0"/>
+          </a:effectRef>
+          <a:fontRef idx="minor">
+            <a:schemeClr val="tx1"/>
+          </a:fontRef>
+        </p:style>
+      </p:cxnSp>
+      <p:sp>
+        <p:nvSpPr>
+          <p:cNvPr id="29" name="椭圆 28">
+            <a:extLst>
+              <a:ext uri="{FF2B5EF4-FFF2-40B4-BE49-F238E27FC236}">
+                <a16:creationId xmlns:a16="http://schemas.microsoft.com/office/drawing/2014/main" id="{BCFC9C5A-7DC9-AD15-C2FB-E0824F2BE004}"/>
+              </a:ext>
+            </a:extLst>
+          </p:cNvPr>
+          <p:cNvSpPr/>
+          <p:nvPr/>
+        </p:nvSpPr>
+        <p:spPr>
+          <a:xfrm>
+            <a:off x="3713927" y="3203403"/>
+            <a:ext cx="333328" cy="333328"/>
+          </a:xfrm>
+          <a:prstGeom prst="ellipse">
+            <a:avLst/>
+          </a:prstGeom>
+        </p:spPr>
+        <p:style>
+          <a:lnRef idx="2">
+            <a:schemeClr val="dk1"/>
+          </a:lnRef>
+          <a:fillRef idx="1">
+            <a:schemeClr val="lt1"/>
+          </a:fillRef>
+          <a:effectRef idx="0">
+            <a:schemeClr val="dk1"/>
+          </a:effectRef>
+          <a:fontRef idx="minor">
+            <a:schemeClr val="dk1"/>
+          </a:fontRef>
+        </p:style>
+        <p:txBody>
+          <a:bodyPr rtlCol="0" anchor="ctr"/>
+          <a:lstStyle/>
+          <a:p>
+            <a:pPr algn="ctr"/>
+            <a:r>
+              <a:rPr lang="en-US" altLang="zh-CN" sz="1600"/>
+              <a:t>r</a:t>
+            </a:r>
+            <a:endParaRPr lang="zh-CN" altLang="en-US" sz="1600"/>
+          </a:p>
+        </p:txBody>
+      </p:sp>
+      <p:sp>
+        <p:nvSpPr>
+          <p:cNvPr id="31" name="椭圆 30">
+            <a:extLst>
+              <a:ext uri="{FF2B5EF4-FFF2-40B4-BE49-F238E27FC236}">
+                <a16:creationId xmlns:a16="http://schemas.microsoft.com/office/drawing/2014/main" id="{78FB1153-3916-40D6-327D-199F62256A74}"/>
+              </a:ext>
+            </a:extLst>
+          </p:cNvPr>
+          <p:cNvSpPr/>
+          <p:nvPr/>
+        </p:nvSpPr>
+        <p:spPr>
+          <a:xfrm>
+            <a:off x="2876440" y="3203403"/>
+            <a:ext cx="333328" cy="333328"/>
+          </a:xfrm>
+          <a:prstGeom prst="ellipse">
+            <a:avLst/>
+          </a:prstGeom>
+        </p:spPr>
+        <p:style>
+          <a:lnRef idx="2">
+            <a:schemeClr val="dk1"/>
+          </a:lnRef>
+          <a:fillRef idx="1">
+            <a:schemeClr val="lt1"/>
+          </a:fillRef>
+          <a:effectRef idx="0">
+            <a:schemeClr val="dk1"/>
+          </a:effectRef>
+          <a:fontRef idx="minor">
+            <a:schemeClr val="dk1"/>
+          </a:fontRef>
+        </p:style>
+        <p:txBody>
+          <a:bodyPr rtlCol="0" anchor="ctr"/>
+          <a:lstStyle/>
+          <a:p>
+            <a:pPr algn="ctr"/>
+            <a:r>
+              <a:rPr lang="en-US" altLang="zh-CN" sz="1600"/>
+              <a:t>o</a:t>
+            </a:r>
+            <a:endParaRPr lang="zh-CN" altLang="en-US" sz="1600"/>
+          </a:p>
+        </p:txBody>
+      </p:sp>
+      <p:sp>
+        <p:nvSpPr>
+          <p:cNvPr id="33" name="椭圆 32">
+            <a:extLst>
+              <a:ext uri="{FF2B5EF4-FFF2-40B4-BE49-F238E27FC236}">
+                <a16:creationId xmlns:a16="http://schemas.microsoft.com/office/drawing/2014/main" id="{2F731FAF-A153-5872-A0D6-70CB905B2061}"/>
+              </a:ext>
+            </a:extLst>
+          </p:cNvPr>
+          <p:cNvSpPr/>
+          <p:nvPr/>
+        </p:nvSpPr>
+        <p:spPr>
+          <a:xfrm>
+            <a:off x="5062985" y="2498457"/>
+            <a:ext cx="333328" cy="333328"/>
+          </a:xfrm>
+          <a:prstGeom prst="ellipse">
+            <a:avLst/>
+          </a:prstGeom>
+        </p:spPr>
+        <p:style>
+          <a:lnRef idx="2">
+            <a:schemeClr val="dk1"/>
+          </a:lnRef>
+          <a:fillRef idx="1">
+            <a:schemeClr val="lt1"/>
+          </a:fillRef>
+          <a:effectRef idx="0">
+            <a:schemeClr val="dk1"/>
+          </a:effectRef>
+          <a:fontRef idx="minor">
+            <a:schemeClr val="dk1"/>
+          </a:fontRef>
+        </p:style>
+        <p:txBody>
+          <a:bodyPr rtlCol="0" anchor="ctr"/>
+          <a:lstStyle/>
+          <a:p>
+            <a:pPr algn="ctr"/>
+            <a:r>
+              <a:rPr lang="en-US" altLang="zh-CN" sz="1600"/>
+              <a:t>o</a:t>
+            </a:r>
+            <a:endParaRPr lang="zh-CN" altLang="en-US" sz="1600"/>
+          </a:p>
+        </p:txBody>
+      </p:sp>
+      <p:cxnSp>
+        <p:nvCxnSpPr>
+          <p:cNvPr id="35" name="直接连接符 34">
+            <a:extLst>
+              <a:ext uri="{FF2B5EF4-FFF2-40B4-BE49-F238E27FC236}">
+                <a16:creationId xmlns:a16="http://schemas.microsoft.com/office/drawing/2014/main" id="{746912A3-CB1B-6C8C-B31F-11165D12ED68}"/>
+              </a:ext>
+            </a:extLst>
+          </p:cNvPr>
+          <p:cNvCxnSpPr>
+            <a:cxnSpLocks/>
+            <a:stCxn id="9" idx="3"/>
+            <a:endCxn id="31" idx="0"/>
+          </p:cNvCxnSpPr>
+          <p:nvPr/>
+        </p:nvCxnSpPr>
+        <p:spPr>
+          <a:xfrm flipH="1">
+            <a:off x="3043104" y="2749935"/>
+            <a:ext cx="320524" cy="453468"/>
+          </a:xfrm>
+          <a:prstGeom prst="line">
+            <a:avLst/>
+          </a:prstGeom>
+        </p:spPr>
+        <p:style>
+          <a:lnRef idx="2">
+            <a:schemeClr val="dk1"/>
+          </a:lnRef>
+          <a:fillRef idx="0">
+            <a:schemeClr val="dk1"/>
+          </a:fillRef>
+          <a:effectRef idx="1">
+            <a:schemeClr val="dk1"/>
+          </a:effectRef>
+          <a:fontRef idx="minor">
+            <a:schemeClr val="tx1"/>
+          </a:fontRef>
+        </p:style>
+      </p:cxnSp>
+      <p:cxnSp>
+        <p:nvCxnSpPr>
+          <p:cNvPr id="38" name="直接连接符 37">
+            <a:extLst>
+              <a:ext uri="{FF2B5EF4-FFF2-40B4-BE49-F238E27FC236}">
+                <a16:creationId xmlns:a16="http://schemas.microsoft.com/office/drawing/2014/main" id="{FE73BB94-733D-394F-86E0-9D1AD9F611A0}"/>
+              </a:ext>
+            </a:extLst>
+          </p:cNvPr>
+          <p:cNvCxnSpPr>
+            <a:stCxn id="9" idx="5"/>
+            <a:endCxn id="29" idx="0"/>
+          </p:cNvCxnSpPr>
+          <p:nvPr/>
+        </p:nvCxnSpPr>
+        <p:spPr>
+          <a:xfrm>
+            <a:off x="3599326" y="2749935"/>
+            <a:ext cx="281265" cy="453468"/>
+          </a:xfrm>
+          <a:prstGeom prst="line">
+            <a:avLst/>
+          </a:prstGeom>
+        </p:spPr>
+        <p:style>
+          <a:lnRef idx="2">
+            <a:schemeClr val="dk1"/>
+          </a:lnRef>
+          <a:fillRef idx="0">
+            <a:schemeClr val="dk1"/>
+          </a:fillRef>
+          <a:effectRef idx="1">
+            <a:schemeClr val="dk1"/>
+          </a:effectRef>
+          <a:fontRef idx="minor">
+            <a:schemeClr val="tx1"/>
+          </a:fontRef>
+        </p:style>
+      </p:cxnSp>
+      <p:cxnSp>
+        <p:nvCxnSpPr>
+          <p:cNvPr id="42" name="直接连接符 41">
+            <a:extLst>
+              <a:ext uri="{FF2B5EF4-FFF2-40B4-BE49-F238E27FC236}">
+                <a16:creationId xmlns:a16="http://schemas.microsoft.com/office/drawing/2014/main" id="{16F32C73-4CF6-FC18-734A-3F127F1559A2}"/>
+              </a:ext>
+            </a:extLst>
+          </p:cNvPr>
+          <p:cNvCxnSpPr>
+            <a:stCxn id="7" idx="5"/>
+            <a:endCxn id="33" idx="1"/>
+          </p:cNvCxnSpPr>
+          <p:nvPr/>
+        </p:nvCxnSpPr>
+        <p:spPr>
+          <a:xfrm>
+            <a:off x="4773389" y="2087017"/>
+            <a:ext cx="338411" cy="460255"/>
+          </a:xfrm>
+          <a:prstGeom prst="line">
+            <a:avLst/>
+          </a:prstGeom>
+        </p:spPr>
+        <p:style>
+          <a:lnRef idx="2">
+            <a:schemeClr val="dk1"/>
+          </a:lnRef>
+          <a:fillRef idx="0">
+            <a:schemeClr val="dk1"/>
+          </a:fillRef>
+          <a:effectRef idx="1">
+            <a:schemeClr val="dk1"/>
+          </a:effectRef>
+          <a:fontRef idx="minor">
+            <a:schemeClr val="tx1"/>
+          </a:fontRef>
+        </p:style>
+      </p:cxnSp>
+      <p:sp>
+        <p:nvSpPr>
+          <p:cNvPr id="44" name="椭圆 43">
+            <a:extLst>
+              <a:ext uri="{FF2B5EF4-FFF2-40B4-BE49-F238E27FC236}">
+                <a16:creationId xmlns:a16="http://schemas.microsoft.com/office/drawing/2014/main" id="{9A08A87F-5D89-34EA-3BEE-9E5FB1699B48}"/>
+              </a:ext>
+            </a:extLst>
+          </p:cNvPr>
+          <p:cNvSpPr/>
+          <p:nvPr/>
+        </p:nvSpPr>
+        <p:spPr>
+          <a:xfrm>
+            <a:off x="11535998" y="3625318"/>
+            <a:ext cx="333328" cy="333328"/>
+          </a:xfrm>
+          <a:prstGeom prst="ellipse">
+            <a:avLst/>
+          </a:prstGeom>
+        </p:spPr>
+        <p:style>
+          <a:lnRef idx="2">
+            <a:schemeClr val="dk1"/>
+          </a:lnRef>
+          <a:fillRef idx="1">
+            <a:schemeClr val="lt1"/>
+          </a:fillRef>
+          <a:effectRef idx="0">
+            <a:schemeClr val="dk1"/>
+          </a:effectRef>
+          <a:fontRef idx="minor">
+            <a:schemeClr val="dk1"/>
+          </a:fontRef>
+        </p:style>
+        <p:txBody>
+          <a:bodyPr rtlCol="0" anchor="ctr"/>
+          <a:lstStyle/>
+          <a:p>
+            <a:pPr algn="ctr"/>
+            <a:r>
+              <a:rPr lang="en-US" altLang="zh-CN" sz="1600"/>
+              <a:t>s</a:t>
+            </a:r>
+            <a:endParaRPr lang="zh-CN" altLang="en-US" sz="1600"/>
+          </a:p>
+        </p:txBody>
+      </p:sp>
+      <p:cxnSp>
+        <p:nvCxnSpPr>
+          <p:cNvPr id="46" name="直接连接符 45">
+            <a:extLst>
+              <a:ext uri="{FF2B5EF4-FFF2-40B4-BE49-F238E27FC236}">
+                <a16:creationId xmlns:a16="http://schemas.microsoft.com/office/drawing/2014/main" id="{85A846AB-D259-CD01-FC6A-79239B6C86E2}"/>
+              </a:ext>
+            </a:extLst>
+          </p:cNvPr>
+          <p:cNvCxnSpPr>
+            <a:stCxn id="11" idx="5"/>
+            <a:endCxn id="44" idx="1"/>
+          </p:cNvCxnSpPr>
+          <p:nvPr/>
+        </p:nvCxnSpPr>
+        <p:spPr>
+          <a:xfrm>
+            <a:off x="11235668" y="3204885"/>
+            <a:ext cx="349145" cy="469248"/>
+          </a:xfrm>
+          <a:prstGeom prst="line">
+            <a:avLst/>
+          </a:prstGeom>
+        </p:spPr>
+        <p:style>
+          <a:lnRef idx="2">
+            <a:schemeClr val="dk1"/>
+          </a:lnRef>
+          <a:fillRef idx="0">
+            <a:schemeClr val="dk1"/>
+          </a:fillRef>
+          <a:effectRef idx="1">
+            <a:schemeClr val="dk1"/>
+          </a:effectRef>
+          <a:fontRef idx="minor">
+            <a:schemeClr val="tx1"/>
+          </a:fontRef>
+        </p:style>
+      </p:cxnSp>
     </p:spTree>
     <p:extLst>
       <p:ext uri="{BB962C8B-B14F-4D97-AF65-F5344CB8AC3E}">
@@ -14823,7 +18638,7 @@
 </p:sld>
 </file>
 
-<file path=ppt/slides/slide15.xml><?xml version="1.0" encoding="utf-8"?>
+<file path=ppt/slides/slide16.xml><?xml version="1.0" encoding="utf-8"?>
 <p:sld xmlns:a="http://schemas.openxmlformats.org/drawingml/2006/main" xmlns:r="http://schemas.openxmlformats.org/officeDocument/2006/relationships" xmlns:p="http://schemas.openxmlformats.org/presentationml/2006/main">
   <p:cSld>
     <p:spTree>
@@ -14846,6 +18661,931 @@
           <a:chExt cx="0" cy="0"/>
         </a:xfrm>
       </p:grpSpPr>
+      <p:sp>
+        <p:nvSpPr>
+          <p:cNvPr id="2" name="椭圆 1">
+            <a:extLst>
+              <a:ext uri="{FF2B5EF4-FFF2-40B4-BE49-F238E27FC236}">
+                <a16:creationId xmlns:a16="http://schemas.microsoft.com/office/drawing/2014/main" id="{D0042DD8-BDFA-797F-D7FC-A03D6604C9AA}"/>
+              </a:ext>
+            </a:extLst>
+          </p:cNvPr>
+          <p:cNvSpPr/>
+          <p:nvPr/>
+        </p:nvSpPr>
+        <p:spPr>
+          <a:xfrm>
+            <a:off x="4380583" y="650136"/>
+            <a:ext cx="333328" cy="333328"/>
+          </a:xfrm>
+          <a:prstGeom prst="ellipse">
+            <a:avLst/>
+          </a:prstGeom>
+        </p:spPr>
+        <p:style>
+          <a:lnRef idx="2">
+            <a:schemeClr val="dk1"/>
+          </a:lnRef>
+          <a:fillRef idx="1">
+            <a:schemeClr val="lt1"/>
+          </a:fillRef>
+          <a:effectRef idx="0">
+            <a:schemeClr val="dk1"/>
+          </a:effectRef>
+          <a:fontRef idx="minor">
+            <a:schemeClr val="dk1"/>
+          </a:fontRef>
+        </p:style>
+        <p:txBody>
+          <a:bodyPr rtlCol="0" anchor="ctr"/>
+          <a:lstStyle/>
+          <a:p>
+            <a:pPr algn="ctr"/>
+            <a:r>
+              <a:rPr lang="en-US" altLang="zh-CN" sz="1600"/>
+              <a:t>8</a:t>
+            </a:r>
+            <a:endParaRPr lang="zh-CN" altLang="en-US" sz="1600"/>
+          </a:p>
+        </p:txBody>
+      </p:sp>
+      <p:sp>
+        <p:nvSpPr>
+          <p:cNvPr id="3" name="椭圆 2">
+            <a:extLst>
+              <a:ext uri="{FF2B5EF4-FFF2-40B4-BE49-F238E27FC236}">
+                <a16:creationId xmlns:a16="http://schemas.microsoft.com/office/drawing/2014/main" id="{E5874811-4A3F-AB90-97E3-E93A941906C5}"/>
+              </a:ext>
+            </a:extLst>
+          </p:cNvPr>
+          <p:cNvSpPr/>
+          <p:nvPr/>
+        </p:nvSpPr>
+        <p:spPr>
+          <a:xfrm>
+            <a:off x="5155532" y="1257467"/>
+            <a:ext cx="333328" cy="333328"/>
+          </a:xfrm>
+          <a:prstGeom prst="ellipse">
+            <a:avLst/>
+          </a:prstGeom>
+        </p:spPr>
+        <p:style>
+          <a:lnRef idx="2">
+            <a:schemeClr val="dk1"/>
+          </a:lnRef>
+          <a:fillRef idx="1">
+            <a:schemeClr val="lt1"/>
+          </a:fillRef>
+          <a:effectRef idx="0">
+            <a:schemeClr val="dk1"/>
+          </a:effectRef>
+          <a:fontRef idx="minor">
+            <a:schemeClr val="dk1"/>
+          </a:fontRef>
+        </p:style>
+        <p:txBody>
+          <a:bodyPr rtlCol="0" anchor="ctr"/>
+          <a:lstStyle/>
+          <a:p>
+            <a:pPr algn="ctr"/>
+            <a:r>
+              <a:rPr lang="en-US" altLang="zh-CN" sz="1600"/>
+              <a:t>9</a:t>
+            </a:r>
+            <a:endParaRPr lang="zh-CN" altLang="en-US" sz="1600"/>
+          </a:p>
+        </p:txBody>
+      </p:sp>
+      <p:sp>
+        <p:nvSpPr>
+          <p:cNvPr id="4" name="椭圆 3">
+            <a:extLst>
+              <a:ext uri="{FF2B5EF4-FFF2-40B4-BE49-F238E27FC236}">
+                <a16:creationId xmlns:a16="http://schemas.microsoft.com/office/drawing/2014/main" id="{58044B52-4243-7ECA-F535-1254808538B7}"/>
+              </a:ext>
+            </a:extLst>
+          </p:cNvPr>
+          <p:cNvSpPr/>
+          <p:nvPr/>
+        </p:nvSpPr>
+        <p:spPr>
+          <a:xfrm>
+            <a:off x="3981469" y="1920385"/>
+            <a:ext cx="333328" cy="333328"/>
+          </a:xfrm>
+          <a:prstGeom prst="ellipse">
+            <a:avLst/>
+          </a:prstGeom>
+        </p:spPr>
+        <p:style>
+          <a:lnRef idx="2">
+            <a:schemeClr val="dk1"/>
+          </a:lnRef>
+          <a:fillRef idx="1">
+            <a:schemeClr val="lt1"/>
+          </a:fillRef>
+          <a:effectRef idx="0">
+            <a:schemeClr val="dk1"/>
+          </a:effectRef>
+          <a:fontRef idx="minor">
+            <a:schemeClr val="dk1"/>
+          </a:fontRef>
+        </p:style>
+        <p:txBody>
+          <a:bodyPr rtlCol="0" anchor="ctr"/>
+          <a:lstStyle/>
+          <a:p>
+            <a:pPr algn="ctr"/>
+            <a:r>
+              <a:rPr lang="en-US" altLang="zh-CN" sz="1600"/>
+              <a:t>6</a:t>
+            </a:r>
+            <a:endParaRPr lang="zh-CN" altLang="en-US" sz="1600"/>
+          </a:p>
+        </p:txBody>
+      </p:sp>
+      <p:cxnSp>
+        <p:nvCxnSpPr>
+          <p:cNvPr id="5" name="直接连接符 4">
+            <a:extLst>
+              <a:ext uri="{FF2B5EF4-FFF2-40B4-BE49-F238E27FC236}">
+                <a16:creationId xmlns:a16="http://schemas.microsoft.com/office/drawing/2014/main" id="{448635EA-B543-95F4-5B41-0BAF3B97B14B}"/>
+              </a:ext>
+            </a:extLst>
+          </p:cNvPr>
+          <p:cNvCxnSpPr>
+            <a:cxnSpLocks/>
+            <a:stCxn id="2" idx="5"/>
+            <a:endCxn id="3" idx="1"/>
+          </p:cNvCxnSpPr>
+          <p:nvPr/>
+        </p:nvCxnSpPr>
+        <p:spPr>
+          <a:xfrm>
+            <a:off x="4665096" y="934649"/>
+            <a:ext cx="539251" cy="371633"/>
+          </a:xfrm>
+          <a:prstGeom prst="line">
+            <a:avLst/>
+          </a:prstGeom>
+        </p:spPr>
+        <p:style>
+          <a:lnRef idx="2">
+            <a:schemeClr val="dk1"/>
+          </a:lnRef>
+          <a:fillRef idx="0">
+            <a:schemeClr val="dk1"/>
+          </a:fillRef>
+          <a:effectRef idx="1">
+            <a:schemeClr val="dk1"/>
+          </a:effectRef>
+          <a:fontRef idx="minor">
+            <a:schemeClr val="tx1"/>
+          </a:fontRef>
+        </p:style>
+      </p:cxnSp>
+      <p:cxnSp>
+        <p:nvCxnSpPr>
+          <p:cNvPr id="6" name="直接连接符 5">
+            <a:extLst>
+              <a:ext uri="{FF2B5EF4-FFF2-40B4-BE49-F238E27FC236}">
+                <a16:creationId xmlns:a16="http://schemas.microsoft.com/office/drawing/2014/main" id="{0C9009AF-E7CB-3B8F-F4B8-52F0EFE1EE4D}"/>
+              </a:ext>
+            </a:extLst>
+          </p:cNvPr>
+          <p:cNvCxnSpPr>
+            <a:cxnSpLocks/>
+            <a:stCxn id="7" idx="5"/>
+            <a:endCxn id="4" idx="0"/>
+          </p:cNvCxnSpPr>
+          <p:nvPr/>
+        </p:nvCxnSpPr>
+        <p:spPr>
+          <a:xfrm>
+            <a:off x="3714708" y="1541980"/>
+            <a:ext cx="433425" cy="378405"/>
+          </a:xfrm>
+          <a:prstGeom prst="line">
+            <a:avLst/>
+          </a:prstGeom>
+        </p:spPr>
+        <p:style>
+          <a:lnRef idx="2">
+            <a:schemeClr val="dk1"/>
+          </a:lnRef>
+          <a:fillRef idx="0">
+            <a:schemeClr val="dk1"/>
+          </a:fillRef>
+          <a:effectRef idx="1">
+            <a:schemeClr val="dk1"/>
+          </a:effectRef>
+          <a:fontRef idx="minor">
+            <a:schemeClr val="tx1"/>
+          </a:fontRef>
+        </p:style>
+      </p:cxnSp>
+      <p:sp>
+        <p:nvSpPr>
+          <p:cNvPr id="7" name="椭圆 6">
+            <a:extLst>
+              <a:ext uri="{FF2B5EF4-FFF2-40B4-BE49-F238E27FC236}">
+                <a16:creationId xmlns:a16="http://schemas.microsoft.com/office/drawing/2014/main" id="{CEFBAAD3-0E2E-F29E-3809-3CD00AE5A9DB}"/>
+              </a:ext>
+            </a:extLst>
+          </p:cNvPr>
+          <p:cNvSpPr/>
+          <p:nvPr/>
+        </p:nvSpPr>
+        <p:spPr>
+          <a:xfrm>
+            <a:off x="3430195" y="1257467"/>
+            <a:ext cx="333328" cy="333328"/>
+          </a:xfrm>
+          <a:prstGeom prst="ellipse">
+            <a:avLst/>
+          </a:prstGeom>
+          <a:ln>
+            <a:prstDash val="solid"/>
+          </a:ln>
+        </p:spPr>
+        <p:style>
+          <a:lnRef idx="2">
+            <a:schemeClr val="dk1"/>
+          </a:lnRef>
+          <a:fillRef idx="1">
+            <a:schemeClr val="lt1"/>
+          </a:fillRef>
+          <a:effectRef idx="0">
+            <a:schemeClr val="dk1"/>
+          </a:effectRef>
+          <a:fontRef idx="minor">
+            <a:schemeClr val="dk1"/>
+          </a:fontRef>
+        </p:style>
+        <p:txBody>
+          <a:bodyPr rtlCol="0" anchor="ctr"/>
+          <a:lstStyle/>
+          <a:p>
+            <a:pPr algn="ctr"/>
+            <a:r>
+              <a:rPr lang="en-US" altLang="zh-CN" sz="1600"/>
+              <a:t>4</a:t>
+            </a:r>
+            <a:endParaRPr lang="zh-CN" altLang="en-US" sz="1600"/>
+          </a:p>
+        </p:txBody>
+      </p:sp>
+      <p:sp>
+        <p:nvSpPr>
+          <p:cNvPr id="8" name="椭圆 7">
+            <a:extLst>
+              <a:ext uri="{FF2B5EF4-FFF2-40B4-BE49-F238E27FC236}">
+                <a16:creationId xmlns:a16="http://schemas.microsoft.com/office/drawing/2014/main" id="{7ADE46A9-CAF0-87D3-4A5A-AD7CE88C82A3}"/>
+              </a:ext>
+            </a:extLst>
+          </p:cNvPr>
+          <p:cNvSpPr/>
+          <p:nvPr/>
+        </p:nvSpPr>
+        <p:spPr>
+          <a:xfrm>
+            <a:off x="2707793" y="1921889"/>
+            <a:ext cx="333328" cy="333328"/>
+          </a:xfrm>
+          <a:prstGeom prst="ellipse">
+            <a:avLst/>
+          </a:prstGeom>
+          <a:ln>
+            <a:prstDash val="solid"/>
+          </a:ln>
+        </p:spPr>
+        <p:style>
+          <a:lnRef idx="2">
+            <a:schemeClr val="dk1"/>
+          </a:lnRef>
+          <a:fillRef idx="1">
+            <a:schemeClr val="lt1"/>
+          </a:fillRef>
+          <a:effectRef idx="0">
+            <a:schemeClr val="dk1"/>
+          </a:effectRef>
+          <a:fontRef idx="minor">
+            <a:schemeClr val="dk1"/>
+          </a:fontRef>
+        </p:style>
+        <p:txBody>
+          <a:bodyPr rtlCol="0" anchor="ctr"/>
+          <a:lstStyle/>
+          <a:p>
+            <a:pPr algn="ctr"/>
+            <a:r>
+              <a:rPr lang="en-US" altLang="zh-CN" sz="1600"/>
+              <a:t>4</a:t>
+            </a:r>
+            <a:endParaRPr lang="zh-CN" altLang="en-US" sz="1600"/>
+          </a:p>
+        </p:txBody>
+      </p:sp>
+      <p:cxnSp>
+        <p:nvCxnSpPr>
+          <p:cNvPr id="9" name="直接连接符 8">
+            <a:extLst>
+              <a:ext uri="{FF2B5EF4-FFF2-40B4-BE49-F238E27FC236}">
+                <a16:creationId xmlns:a16="http://schemas.microsoft.com/office/drawing/2014/main" id="{984AE81F-A28E-37C1-3601-4125B29E39A4}"/>
+              </a:ext>
+            </a:extLst>
+          </p:cNvPr>
+          <p:cNvCxnSpPr>
+            <a:stCxn id="2" idx="3"/>
+            <a:endCxn id="7" idx="7"/>
+          </p:cNvCxnSpPr>
+          <p:nvPr/>
+        </p:nvCxnSpPr>
+        <p:spPr>
+          <a:xfrm flipH="1">
+            <a:off x="3714708" y="934649"/>
+            <a:ext cx="714690" cy="371633"/>
+          </a:xfrm>
+          <a:prstGeom prst="line">
+            <a:avLst/>
+          </a:prstGeom>
+          <a:ln w="9525" cap="flat" cmpd="sng" algn="ctr">
+            <a:solidFill>
+              <a:schemeClr val="dk1"/>
+            </a:solidFill>
+            <a:prstDash val="solid"/>
+            <a:round/>
+            <a:headEnd type="none" w="med" len="med"/>
+            <a:tailEnd type="none" w="med" len="med"/>
+          </a:ln>
+        </p:spPr>
+        <p:style>
+          <a:lnRef idx="0">
+            <a:scrgbClr r="0" g="0" b="0"/>
+          </a:lnRef>
+          <a:fillRef idx="0">
+            <a:scrgbClr r="0" g="0" b="0"/>
+          </a:fillRef>
+          <a:effectRef idx="0">
+            <a:scrgbClr r="0" g="0" b="0"/>
+          </a:effectRef>
+          <a:fontRef idx="minor">
+            <a:schemeClr val="tx1"/>
+          </a:fontRef>
+        </p:style>
+      </p:cxnSp>
+      <p:cxnSp>
+        <p:nvCxnSpPr>
+          <p:cNvPr id="10" name="直接连接符 9">
+            <a:extLst>
+              <a:ext uri="{FF2B5EF4-FFF2-40B4-BE49-F238E27FC236}">
+                <a16:creationId xmlns:a16="http://schemas.microsoft.com/office/drawing/2014/main" id="{25310FDC-887C-692C-4382-C10743D9B2B3}"/>
+              </a:ext>
+            </a:extLst>
+          </p:cNvPr>
+          <p:cNvCxnSpPr>
+            <a:cxnSpLocks/>
+            <a:stCxn id="7" idx="3"/>
+            <a:endCxn id="8" idx="7"/>
+          </p:cNvCxnSpPr>
+          <p:nvPr/>
+        </p:nvCxnSpPr>
+        <p:spPr>
+          <a:xfrm flipH="1">
+            <a:off x="2992306" y="1541980"/>
+            <a:ext cx="486704" cy="428724"/>
+          </a:xfrm>
+          <a:prstGeom prst="line">
+            <a:avLst/>
+          </a:prstGeom>
+          <a:ln w="9525" cap="flat" cmpd="sng" algn="ctr">
+            <a:solidFill>
+              <a:schemeClr val="dk1"/>
+            </a:solidFill>
+            <a:prstDash val="solid"/>
+            <a:round/>
+            <a:headEnd type="none" w="med" len="med"/>
+            <a:tailEnd type="none" w="med" len="med"/>
+          </a:ln>
+        </p:spPr>
+        <p:style>
+          <a:lnRef idx="0">
+            <a:scrgbClr r="0" g="0" b="0"/>
+          </a:lnRef>
+          <a:fillRef idx="0">
+            <a:scrgbClr r="0" g="0" b="0"/>
+          </a:fillRef>
+          <a:effectRef idx="0">
+            <a:scrgbClr r="0" g="0" b="0"/>
+          </a:effectRef>
+          <a:fontRef idx="minor">
+            <a:schemeClr val="tx1"/>
+          </a:fontRef>
+        </p:style>
+      </p:cxnSp>
+      <p:sp>
+        <p:nvSpPr>
+          <p:cNvPr id="11" name="椭圆 10">
+            <a:extLst>
+              <a:ext uri="{FF2B5EF4-FFF2-40B4-BE49-F238E27FC236}">
+                <a16:creationId xmlns:a16="http://schemas.microsoft.com/office/drawing/2014/main" id="{4BA6FA42-1E36-1209-BE61-2DF26AD47FE2}"/>
+              </a:ext>
+            </a:extLst>
+          </p:cNvPr>
+          <p:cNvSpPr/>
+          <p:nvPr/>
+        </p:nvSpPr>
+        <p:spPr>
+          <a:xfrm>
+            <a:off x="4380583" y="2658366"/>
+            <a:ext cx="333328" cy="333328"/>
+          </a:xfrm>
+          <a:prstGeom prst="ellipse">
+            <a:avLst/>
+          </a:prstGeom>
+        </p:spPr>
+        <p:style>
+          <a:lnRef idx="2">
+            <a:schemeClr val="dk1"/>
+          </a:lnRef>
+          <a:fillRef idx="1">
+            <a:schemeClr val="lt1"/>
+          </a:fillRef>
+          <a:effectRef idx="0">
+            <a:schemeClr val="dk1"/>
+          </a:effectRef>
+          <a:fontRef idx="minor">
+            <a:schemeClr val="dk1"/>
+          </a:fontRef>
+        </p:style>
+        <p:txBody>
+          <a:bodyPr rtlCol="0" anchor="ctr"/>
+          <a:lstStyle/>
+          <a:p>
+            <a:pPr algn="ctr"/>
+            <a:r>
+              <a:rPr lang="en-US" altLang="zh-CN" sz="1600"/>
+              <a:t>7</a:t>
+            </a:r>
+            <a:endParaRPr lang="zh-CN" altLang="en-US" sz="1600"/>
+          </a:p>
+        </p:txBody>
+      </p:sp>
+      <p:sp>
+        <p:nvSpPr>
+          <p:cNvPr id="12" name="椭圆 11">
+            <a:extLst>
+              <a:ext uri="{FF2B5EF4-FFF2-40B4-BE49-F238E27FC236}">
+                <a16:creationId xmlns:a16="http://schemas.microsoft.com/office/drawing/2014/main" id="{0FB939A6-2C34-ED34-4178-0B22CA2D81F4}"/>
+              </a:ext>
+            </a:extLst>
+          </p:cNvPr>
+          <p:cNvSpPr/>
+          <p:nvPr/>
+        </p:nvSpPr>
+        <p:spPr>
+          <a:xfrm>
+            <a:off x="3543096" y="2658366"/>
+            <a:ext cx="333328" cy="333328"/>
+          </a:xfrm>
+          <a:prstGeom prst="ellipse">
+            <a:avLst/>
+          </a:prstGeom>
+        </p:spPr>
+        <p:style>
+          <a:lnRef idx="2">
+            <a:schemeClr val="dk1"/>
+          </a:lnRef>
+          <a:fillRef idx="1">
+            <a:schemeClr val="lt1"/>
+          </a:fillRef>
+          <a:effectRef idx="0">
+            <a:schemeClr val="dk1"/>
+          </a:effectRef>
+          <a:fontRef idx="minor">
+            <a:schemeClr val="dk1"/>
+          </a:fontRef>
+        </p:style>
+        <p:txBody>
+          <a:bodyPr rtlCol="0" anchor="ctr"/>
+          <a:lstStyle/>
+          <a:p>
+            <a:pPr algn="ctr"/>
+            <a:r>
+              <a:rPr lang="en-US" altLang="zh-CN" sz="1600"/>
+              <a:t>5</a:t>
+            </a:r>
+            <a:endParaRPr lang="zh-CN" altLang="en-US" sz="1600"/>
+          </a:p>
+        </p:txBody>
+      </p:sp>
+      <p:sp>
+        <p:nvSpPr>
+          <p:cNvPr id="13" name="椭圆 12">
+            <a:extLst>
+              <a:ext uri="{FF2B5EF4-FFF2-40B4-BE49-F238E27FC236}">
+                <a16:creationId xmlns:a16="http://schemas.microsoft.com/office/drawing/2014/main" id="{5A52E561-FA27-4B41-1E40-0E1A11E6893B}"/>
+              </a:ext>
+            </a:extLst>
+          </p:cNvPr>
+          <p:cNvSpPr/>
+          <p:nvPr/>
+        </p:nvSpPr>
+        <p:spPr>
+          <a:xfrm>
+            <a:off x="5729641" y="1953420"/>
+            <a:ext cx="333328" cy="333328"/>
+          </a:xfrm>
+          <a:prstGeom prst="ellipse">
+            <a:avLst/>
+          </a:prstGeom>
+        </p:spPr>
+        <p:style>
+          <a:lnRef idx="2">
+            <a:schemeClr val="dk1"/>
+          </a:lnRef>
+          <a:fillRef idx="1">
+            <a:schemeClr val="lt1"/>
+          </a:fillRef>
+          <a:effectRef idx="0">
+            <a:schemeClr val="dk1"/>
+          </a:effectRef>
+          <a:fontRef idx="minor">
+            <a:schemeClr val="dk1"/>
+          </a:fontRef>
+        </p:style>
+        <p:txBody>
+          <a:bodyPr rtlCol="0" anchor="ctr"/>
+          <a:lstStyle/>
+          <a:p>
+            <a:pPr algn="ctr"/>
+            <a:endParaRPr lang="zh-CN" altLang="en-US" sz="1400"/>
+          </a:p>
+        </p:txBody>
+      </p:sp>
+      <p:cxnSp>
+        <p:nvCxnSpPr>
+          <p:cNvPr id="14" name="直接连接符 13">
+            <a:extLst>
+              <a:ext uri="{FF2B5EF4-FFF2-40B4-BE49-F238E27FC236}">
+                <a16:creationId xmlns:a16="http://schemas.microsoft.com/office/drawing/2014/main" id="{3669100E-401C-2A7D-3CF1-DE8F3B8FA59D}"/>
+              </a:ext>
+            </a:extLst>
+          </p:cNvPr>
+          <p:cNvCxnSpPr>
+            <a:cxnSpLocks/>
+            <a:stCxn id="4" idx="3"/>
+            <a:endCxn id="12" idx="0"/>
+          </p:cNvCxnSpPr>
+          <p:nvPr/>
+        </p:nvCxnSpPr>
+        <p:spPr>
+          <a:xfrm flipH="1">
+            <a:off x="3709760" y="2204898"/>
+            <a:ext cx="320524" cy="453468"/>
+          </a:xfrm>
+          <a:prstGeom prst="line">
+            <a:avLst/>
+          </a:prstGeom>
+        </p:spPr>
+        <p:style>
+          <a:lnRef idx="2">
+            <a:schemeClr val="dk1"/>
+          </a:lnRef>
+          <a:fillRef idx="0">
+            <a:schemeClr val="dk1"/>
+          </a:fillRef>
+          <a:effectRef idx="1">
+            <a:schemeClr val="dk1"/>
+          </a:effectRef>
+          <a:fontRef idx="minor">
+            <a:schemeClr val="tx1"/>
+          </a:fontRef>
+        </p:style>
+      </p:cxnSp>
+      <p:cxnSp>
+        <p:nvCxnSpPr>
+          <p:cNvPr id="15" name="直接连接符 14">
+            <a:extLst>
+              <a:ext uri="{FF2B5EF4-FFF2-40B4-BE49-F238E27FC236}">
+                <a16:creationId xmlns:a16="http://schemas.microsoft.com/office/drawing/2014/main" id="{15BA6AF8-727A-B663-EBF8-5FCC15FEE36C}"/>
+              </a:ext>
+            </a:extLst>
+          </p:cNvPr>
+          <p:cNvCxnSpPr>
+            <a:stCxn id="4" idx="5"/>
+            <a:endCxn id="11" idx="0"/>
+          </p:cNvCxnSpPr>
+          <p:nvPr/>
+        </p:nvCxnSpPr>
+        <p:spPr>
+          <a:xfrm>
+            <a:off x="4265982" y="2204898"/>
+            <a:ext cx="281265" cy="453468"/>
+          </a:xfrm>
+          <a:prstGeom prst="line">
+            <a:avLst/>
+          </a:prstGeom>
+        </p:spPr>
+        <p:style>
+          <a:lnRef idx="2">
+            <a:schemeClr val="dk1"/>
+          </a:lnRef>
+          <a:fillRef idx="0">
+            <a:schemeClr val="dk1"/>
+          </a:fillRef>
+          <a:effectRef idx="1">
+            <a:schemeClr val="dk1"/>
+          </a:effectRef>
+          <a:fontRef idx="minor">
+            <a:schemeClr val="tx1"/>
+          </a:fontRef>
+        </p:style>
+      </p:cxnSp>
+      <p:cxnSp>
+        <p:nvCxnSpPr>
+          <p:cNvPr id="16" name="直接连接符 15">
+            <a:extLst>
+              <a:ext uri="{FF2B5EF4-FFF2-40B4-BE49-F238E27FC236}">
+                <a16:creationId xmlns:a16="http://schemas.microsoft.com/office/drawing/2014/main" id="{5241C900-6BF5-8305-3DA5-C940614BDB33}"/>
+              </a:ext>
+            </a:extLst>
+          </p:cNvPr>
+          <p:cNvCxnSpPr>
+            <a:stCxn id="3" idx="5"/>
+            <a:endCxn id="13" idx="1"/>
+          </p:cNvCxnSpPr>
+          <p:nvPr/>
+        </p:nvCxnSpPr>
+        <p:spPr>
+          <a:xfrm>
+            <a:off x="5440045" y="1541980"/>
+            <a:ext cx="338411" cy="460255"/>
+          </a:xfrm>
+          <a:prstGeom prst="line">
+            <a:avLst/>
+          </a:prstGeom>
+        </p:spPr>
+        <p:style>
+          <a:lnRef idx="2">
+            <a:schemeClr val="dk1"/>
+          </a:lnRef>
+          <a:fillRef idx="0">
+            <a:schemeClr val="dk1"/>
+          </a:fillRef>
+          <a:effectRef idx="1">
+            <a:schemeClr val="dk1"/>
+          </a:effectRef>
+          <a:fontRef idx="minor">
+            <a:schemeClr val="tx1"/>
+          </a:fontRef>
+        </p:style>
+      </p:cxnSp>
+      <p:sp>
+        <p:nvSpPr>
+          <p:cNvPr id="18" name="椭圆 17">
+            <a:extLst>
+              <a:ext uri="{FF2B5EF4-FFF2-40B4-BE49-F238E27FC236}">
+                <a16:creationId xmlns:a16="http://schemas.microsoft.com/office/drawing/2014/main" id="{2C5DD719-D858-D88C-221E-9C8A7B9C0A8E}"/>
+              </a:ext>
+            </a:extLst>
+          </p:cNvPr>
+          <p:cNvSpPr/>
+          <p:nvPr/>
+        </p:nvSpPr>
+        <p:spPr>
+          <a:xfrm>
+            <a:off x="2143988" y="2658366"/>
+            <a:ext cx="333328" cy="333328"/>
+          </a:xfrm>
+          <a:prstGeom prst="ellipse">
+            <a:avLst/>
+          </a:prstGeom>
+          <a:ln>
+            <a:prstDash val="solid"/>
+          </a:ln>
+        </p:spPr>
+        <p:style>
+          <a:lnRef idx="2">
+            <a:schemeClr val="dk1"/>
+          </a:lnRef>
+          <a:fillRef idx="1">
+            <a:schemeClr val="lt1"/>
+          </a:fillRef>
+          <a:effectRef idx="0">
+            <a:schemeClr val="dk1"/>
+          </a:effectRef>
+          <a:fontRef idx="minor">
+            <a:schemeClr val="dk1"/>
+          </a:fontRef>
+        </p:style>
+        <p:txBody>
+          <a:bodyPr rtlCol="0" anchor="ctr"/>
+          <a:lstStyle/>
+          <a:p>
+            <a:pPr algn="ctr"/>
+            <a:r>
+              <a:rPr lang="en-US" altLang="zh-CN" sz="1600"/>
+              <a:t>1</a:t>
+            </a:r>
+            <a:endParaRPr lang="zh-CN" altLang="en-US" sz="1600"/>
+          </a:p>
+        </p:txBody>
+      </p:sp>
+      <p:cxnSp>
+        <p:nvCxnSpPr>
+          <p:cNvPr id="20" name="直接连接符 19">
+            <a:extLst>
+              <a:ext uri="{FF2B5EF4-FFF2-40B4-BE49-F238E27FC236}">
+                <a16:creationId xmlns:a16="http://schemas.microsoft.com/office/drawing/2014/main" id="{9AB6FA1C-0ED9-1347-EDBE-3DBE22EBD4BE}"/>
+              </a:ext>
+            </a:extLst>
+          </p:cNvPr>
+          <p:cNvCxnSpPr>
+            <a:stCxn id="8" idx="3"/>
+            <a:endCxn id="18" idx="0"/>
+          </p:cNvCxnSpPr>
+          <p:nvPr/>
+        </p:nvCxnSpPr>
+        <p:spPr>
+          <a:xfrm flipH="1">
+            <a:off x="2310652" y="2206402"/>
+            <a:ext cx="445956" cy="451964"/>
+          </a:xfrm>
+          <a:prstGeom prst="line">
+            <a:avLst/>
+          </a:prstGeom>
+        </p:spPr>
+        <p:style>
+          <a:lnRef idx="2">
+            <a:schemeClr val="dk1"/>
+          </a:lnRef>
+          <a:fillRef idx="0">
+            <a:schemeClr val="dk1"/>
+          </a:fillRef>
+          <a:effectRef idx="1">
+            <a:schemeClr val="dk1"/>
+          </a:effectRef>
+          <a:fontRef idx="minor">
+            <a:schemeClr val="tx1"/>
+          </a:fontRef>
+        </p:style>
+      </p:cxnSp>
+      <p:sp>
+        <p:nvSpPr>
+          <p:cNvPr id="24" name="文本框 23">
+            <a:extLst>
+              <a:ext uri="{FF2B5EF4-FFF2-40B4-BE49-F238E27FC236}">
+                <a16:creationId xmlns:a16="http://schemas.microsoft.com/office/drawing/2014/main" id="{D0A15CA8-3FA6-401A-CAE7-220BCF43D125}"/>
+              </a:ext>
+            </a:extLst>
+          </p:cNvPr>
+          <p:cNvSpPr txBox="1"/>
+          <p:nvPr/>
+        </p:nvSpPr>
+        <p:spPr>
+          <a:xfrm>
+            <a:off x="5696571" y="1953420"/>
+            <a:ext cx="399468" cy="338554"/>
+          </a:xfrm>
+          <a:prstGeom prst="rect">
+            <a:avLst/>
+          </a:prstGeom>
+          <a:noFill/>
+        </p:spPr>
+        <p:txBody>
+          <a:bodyPr wrap="none" rtlCol="0">
+            <a:spAutoFit/>
+          </a:bodyPr>
+          <a:lstStyle/>
+          <a:p>
+            <a:r>
+              <a:rPr lang="en-US" altLang="zh-CN" sz="1600"/>
+              <a:t>10</a:t>
+            </a:r>
+            <a:endParaRPr lang="zh-CN" altLang="en-US" sz="1600"/>
+          </a:p>
+        </p:txBody>
+      </p:sp>
+      <p:sp>
+        <p:nvSpPr>
+          <p:cNvPr id="29" name="椭圆 28">
+            <a:extLst>
+              <a:ext uri="{FF2B5EF4-FFF2-40B4-BE49-F238E27FC236}">
+                <a16:creationId xmlns:a16="http://schemas.microsoft.com/office/drawing/2014/main" id="{BFF7180F-8BB5-BD96-3700-F5CC4FA8E4E0}"/>
+              </a:ext>
+            </a:extLst>
+          </p:cNvPr>
+          <p:cNvSpPr/>
+          <p:nvPr/>
+        </p:nvSpPr>
+        <p:spPr>
+          <a:xfrm>
+            <a:off x="5237417" y="2653140"/>
+            <a:ext cx="333328" cy="333328"/>
+          </a:xfrm>
+          <a:prstGeom prst="ellipse">
+            <a:avLst/>
+          </a:prstGeom>
+        </p:spPr>
+        <p:style>
+          <a:lnRef idx="2">
+            <a:schemeClr val="dk1"/>
+          </a:lnRef>
+          <a:fillRef idx="1">
+            <a:schemeClr val="lt1"/>
+          </a:fillRef>
+          <a:effectRef idx="0">
+            <a:schemeClr val="dk1"/>
+          </a:effectRef>
+          <a:fontRef idx="minor">
+            <a:schemeClr val="dk1"/>
+          </a:fontRef>
+        </p:style>
+        <p:txBody>
+          <a:bodyPr rtlCol="0" anchor="ctr"/>
+          <a:lstStyle/>
+          <a:p>
+            <a:pPr algn="ctr"/>
+            <a:endParaRPr lang="zh-CN" altLang="en-US" sz="1400"/>
+          </a:p>
+        </p:txBody>
+      </p:sp>
+      <p:sp>
+        <p:nvSpPr>
+          <p:cNvPr id="31" name="文本框 30">
+            <a:extLst>
+              <a:ext uri="{FF2B5EF4-FFF2-40B4-BE49-F238E27FC236}">
+                <a16:creationId xmlns:a16="http://schemas.microsoft.com/office/drawing/2014/main" id="{6C3C28D6-181E-1C71-5E40-1A61F0DDDD45}"/>
+              </a:ext>
+            </a:extLst>
+          </p:cNvPr>
+          <p:cNvSpPr txBox="1"/>
+          <p:nvPr/>
+        </p:nvSpPr>
+        <p:spPr>
+          <a:xfrm>
+            <a:off x="5204347" y="2653140"/>
+            <a:ext cx="399468" cy="338554"/>
+          </a:xfrm>
+          <a:prstGeom prst="rect">
+            <a:avLst/>
+          </a:prstGeom>
+          <a:noFill/>
+        </p:spPr>
+        <p:txBody>
+          <a:bodyPr wrap="none" rtlCol="0">
+            <a:spAutoFit/>
+          </a:bodyPr>
+          <a:lstStyle/>
+          <a:p>
+            <a:r>
+              <a:rPr lang="en-US" altLang="zh-CN" sz="1600"/>
+              <a:t>10</a:t>
+            </a:r>
+            <a:endParaRPr lang="zh-CN" altLang="en-US" sz="1600"/>
+          </a:p>
+        </p:txBody>
+      </p:sp>
+      <p:cxnSp>
+        <p:nvCxnSpPr>
+          <p:cNvPr id="33" name="直接连接符 32">
+            <a:extLst>
+              <a:ext uri="{FF2B5EF4-FFF2-40B4-BE49-F238E27FC236}">
+                <a16:creationId xmlns:a16="http://schemas.microsoft.com/office/drawing/2014/main" id="{664117FA-587D-8A9C-CEB5-6F036A63991E}"/>
+              </a:ext>
+            </a:extLst>
+          </p:cNvPr>
+          <p:cNvCxnSpPr>
+            <a:endCxn id="31" idx="0"/>
+          </p:cNvCxnSpPr>
+          <p:nvPr/>
+        </p:nvCxnSpPr>
+        <p:spPr>
+          <a:xfrm flipH="1">
+            <a:off x="5404081" y="2253713"/>
+            <a:ext cx="374375" cy="399427"/>
+          </a:xfrm>
+          <a:prstGeom prst="line">
+            <a:avLst/>
+          </a:prstGeom>
+        </p:spPr>
+        <p:style>
+          <a:lnRef idx="2">
+            <a:schemeClr val="dk1"/>
+          </a:lnRef>
+          <a:fillRef idx="0">
+            <a:schemeClr val="dk1"/>
+          </a:fillRef>
+          <a:effectRef idx="1">
+            <a:schemeClr val="dk1"/>
+          </a:effectRef>
+          <a:fontRef idx="minor">
+            <a:schemeClr val="tx1"/>
+          </a:fontRef>
+        </p:style>
+      </p:cxnSp>
     </p:spTree>
     <p:extLst>
       <p:ext uri="{BB962C8B-B14F-4D97-AF65-F5344CB8AC3E}">
@@ -14859,7 +19599,7 @@
 </p:sld>
 </file>
 
-<file path=ppt/slides/slide16.xml><?xml version="1.0" encoding="utf-8"?>
+<file path=ppt/slides/slide17.xml><?xml version="1.0" encoding="utf-8"?>
 <p:sld xmlns:a="http://schemas.openxmlformats.org/drawingml/2006/main" xmlns:r="http://schemas.openxmlformats.org/officeDocument/2006/relationships" xmlns:p="http://schemas.openxmlformats.org/presentationml/2006/main">
   <p:cSld>
     <p:spTree>
@@ -14882,6 +19622,642 @@
           <a:chExt cx="0" cy="0"/>
         </a:xfrm>
       </p:grpSpPr>
+      <p:sp>
+        <p:nvSpPr>
+          <p:cNvPr id="2" name="文本框 1">
+            <a:extLst>
+              <a:ext uri="{FF2B5EF4-FFF2-40B4-BE49-F238E27FC236}">
+                <a16:creationId xmlns:a16="http://schemas.microsoft.com/office/drawing/2014/main" id="{33C1CF62-E81E-38B3-498E-D1DF7C43C55F}"/>
+              </a:ext>
+            </a:extLst>
+          </p:cNvPr>
+          <p:cNvSpPr txBox="1"/>
+          <p:nvPr/>
+        </p:nvSpPr>
+        <p:spPr>
+          <a:xfrm>
+            <a:off x="3183786" y="612603"/>
+            <a:ext cx="306494" cy="369332"/>
+          </a:xfrm>
+          <a:prstGeom prst="rect">
+            <a:avLst/>
+          </a:prstGeom>
+          <a:noFill/>
+        </p:spPr>
+        <p:txBody>
+          <a:bodyPr wrap="none" rtlCol="0">
+            <a:spAutoFit/>
+          </a:bodyPr>
+          <a:lstStyle/>
+          <a:p>
+            <a:r>
+              <a:rPr lang="en-US" altLang="zh-CN"/>
+              <a:t>3</a:t>
+            </a:r>
+            <a:endParaRPr lang="zh-CN" altLang="en-US"/>
+          </a:p>
+        </p:txBody>
+      </p:sp>
+      <p:sp>
+        <p:nvSpPr>
+          <p:cNvPr id="3" name="文本框 2">
+            <a:extLst>
+              <a:ext uri="{FF2B5EF4-FFF2-40B4-BE49-F238E27FC236}">
+                <a16:creationId xmlns:a16="http://schemas.microsoft.com/office/drawing/2014/main" id="{95BB6293-F9FA-64C0-0EB2-4D8DF135A151}"/>
+              </a:ext>
+            </a:extLst>
+          </p:cNvPr>
+          <p:cNvSpPr txBox="1"/>
+          <p:nvPr/>
+        </p:nvSpPr>
+        <p:spPr>
+          <a:xfrm>
+            <a:off x="4107197" y="612603"/>
+            <a:ext cx="306494" cy="369332"/>
+          </a:xfrm>
+          <a:prstGeom prst="rect">
+            <a:avLst/>
+          </a:prstGeom>
+          <a:noFill/>
+        </p:spPr>
+        <p:txBody>
+          <a:bodyPr wrap="none" rtlCol="0">
+            <a:spAutoFit/>
+          </a:bodyPr>
+          <a:lstStyle/>
+          <a:p>
+            <a:r>
+              <a:rPr lang="en-US" altLang="zh-CN"/>
+              <a:t>6</a:t>
+            </a:r>
+            <a:endParaRPr lang="zh-CN" altLang="en-US"/>
+          </a:p>
+        </p:txBody>
+      </p:sp>
+      <p:sp>
+        <p:nvSpPr>
+          <p:cNvPr id="4" name="文本框 3">
+            <a:extLst>
+              <a:ext uri="{FF2B5EF4-FFF2-40B4-BE49-F238E27FC236}">
+                <a16:creationId xmlns:a16="http://schemas.microsoft.com/office/drawing/2014/main" id="{8ED02162-3213-08F4-1F42-16D615B798EE}"/>
+              </a:ext>
+            </a:extLst>
+          </p:cNvPr>
+          <p:cNvSpPr txBox="1"/>
+          <p:nvPr/>
+        </p:nvSpPr>
+        <p:spPr>
+          <a:xfrm>
+            <a:off x="4967449" y="612603"/>
+            <a:ext cx="306494" cy="369332"/>
+          </a:xfrm>
+          <a:prstGeom prst="rect">
+            <a:avLst/>
+          </a:prstGeom>
+          <a:noFill/>
+        </p:spPr>
+        <p:txBody>
+          <a:bodyPr wrap="none" rtlCol="0">
+            <a:spAutoFit/>
+          </a:bodyPr>
+          <a:lstStyle/>
+          <a:p>
+            <a:r>
+              <a:rPr lang="en-US" altLang="zh-CN"/>
+              <a:t>2</a:t>
+            </a:r>
+            <a:endParaRPr lang="zh-CN" altLang="en-US"/>
+          </a:p>
+        </p:txBody>
+      </p:sp>
+      <p:sp>
+        <p:nvSpPr>
+          <p:cNvPr id="5" name="文本框 4">
+            <a:extLst>
+              <a:ext uri="{FF2B5EF4-FFF2-40B4-BE49-F238E27FC236}">
+                <a16:creationId xmlns:a16="http://schemas.microsoft.com/office/drawing/2014/main" id="{F23A6A3E-2A75-0F10-F7CF-235D31E6F2FD}"/>
+              </a:ext>
+            </a:extLst>
+          </p:cNvPr>
+          <p:cNvSpPr txBox="1"/>
+          <p:nvPr/>
+        </p:nvSpPr>
+        <p:spPr>
+          <a:xfrm>
+            <a:off x="5789506" y="612603"/>
+            <a:ext cx="306494" cy="369332"/>
+          </a:xfrm>
+          <a:prstGeom prst="rect">
+            <a:avLst/>
+          </a:prstGeom>
+          <a:noFill/>
+        </p:spPr>
+        <p:txBody>
+          <a:bodyPr wrap="none" rtlCol="0">
+            <a:spAutoFit/>
+          </a:bodyPr>
+          <a:lstStyle/>
+          <a:p>
+            <a:r>
+              <a:rPr lang="en-US" altLang="zh-CN"/>
+              <a:t>3</a:t>
+            </a:r>
+            <a:endParaRPr lang="zh-CN" altLang="en-US"/>
+          </a:p>
+        </p:txBody>
+      </p:sp>
+      <p:sp>
+        <p:nvSpPr>
+          <p:cNvPr id="6" name="文本框 5">
+            <a:extLst>
+              <a:ext uri="{FF2B5EF4-FFF2-40B4-BE49-F238E27FC236}">
+                <a16:creationId xmlns:a16="http://schemas.microsoft.com/office/drawing/2014/main" id="{CE8E1711-4CA1-6001-0C24-033F555EA0E2}"/>
+              </a:ext>
+            </a:extLst>
+          </p:cNvPr>
+          <p:cNvSpPr txBox="1"/>
+          <p:nvPr/>
+        </p:nvSpPr>
+        <p:spPr>
+          <a:xfrm>
+            <a:off x="6760308" y="612603"/>
+            <a:ext cx="306494" cy="369332"/>
+          </a:xfrm>
+          <a:prstGeom prst="rect">
+            <a:avLst/>
+          </a:prstGeom>
+          <a:noFill/>
+        </p:spPr>
+        <p:txBody>
+          <a:bodyPr wrap="none" rtlCol="0">
+            <a:spAutoFit/>
+          </a:bodyPr>
+          <a:lstStyle/>
+          <a:p>
+            <a:r>
+              <a:rPr lang="en-US" altLang="zh-CN"/>
+              <a:t>4</a:t>
+            </a:r>
+            <a:endParaRPr lang="zh-CN" altLang="en-US"/>
+          </a:p>
+        </p:txBody>
+      </p:sp>
+      <p:sp>
+        <p:nvSpPr>
+          <p:cNvPr id="7" name="文本框 6">
+            <a:extLst>
+              <a:ext uri="{FF2B5EF4-FFF2-40B4-BE49-F238E27FC236}">
+                <a16:creationId xmlns:a16="http://schemas.microsoft.com/office/drawing/2014/main" id="{83AC8936-31F2-0339-FA73-DE67B0DD5939}"/>
+              </a:ext>
+            </a:extLst>
+          </p:cNvPr>
+          <p:cNvSpPr txBox="1"/>
+          <p:nvPr/>
+        </p:nvSpPr>
+        <p:spPr>
+          <a:xfrm>
+            <a:off x="3638736" y="1427904"/>
+            <a:ext cx="306494" cy="369332"/>
+          </a:xfrm>
+          <a:prstGeom prst="rect">
+            <a:avLst/>
+          </a:prstGeom>
+          <a:noFill/>
+        </p:spPr>
+        <p:txBody>
+          <a:bodyPr wrap="none" rtlCol="0">
+            <a:spAutoFit/>
+          </a:bodyPr>
+          <a:lstStyle/>
+          <a:p>
+            <a:r>
+              <a:rPr lang="en-US" altLang="zh-CN"/>
+              <a:t>9</a:t>
+            </a:r>
+            <a:endParaRPr lang="zh-CN" altLang="en-US"/>
+          </a:p>
+        </p:txBody>
+      </p:sp>
+      <p:sp>
+        <p:nvSpPr>
+          <p:cNvPr id="8" name="文本框 7">
+            <a:extLst>
+              <a:ext uri="{FF2B5EF4-FFF2-40B4-BE49-F238E27FC236}">
+                <a16:creationId xmlns:a16="http://schemas.microsoft.com/office/drawing/2014/main" id="{1C234FB0-D623-313D-E6FF-517E7FEAA2D1}"/>
+              </a:ext>
+            </a:extLst>
+          </p:cNvPr>
+          <p:cNvSpPr txBox="1"/>
+          <p:nvPr/>
+        </p:nvSpPr>
+        <p:spPr>
+          <a:xfrm>
+            <a:off x="4341428" y="2076544"/>
+            <a:ext cx="428322" cy="369332"/>
+          </a:xfrm>
+          <a:prstGeom prst="rect">
+            <a:avLst/>
+          </a:prstGeom>
+          <a:noFill/>
+        </p:spPr>
+        <p:txBody>
+          <a:bodyPr wrap="none" rtlCol="0">
+            <a:spAutoFit/>
+          </a:bodyPr>
+          <a:lstStyle/>
+          <a:p>
+            <a:r>
+              <a:rPr lang="en-US" altLang="zh-CN"/>
+              <a:t>11</a:t>
+            </a:r>
+            <a:endParaRPr lang="zh-CN" altLang="en-US"/>
+          </a:p>
+        </p:txBody>
+      </p:sp>
+      <p:sp>
+        <p:nvSpPr>
+          <p:cNvPr id="9" name="文本框 8">
+            <a:extLst>
+              <a:ext uri="{FF2B5EF4-FFF2-40B4-BE49-F238E27FC236}">
+                <a16:creationId xmlns:a16="http://schemas.microsoft.com/office/drawing/2014/main" id="{EA3A1054-0C76-2034-81A8-2B50E7CEA703}"/>
+              </a:ext>
+            </a:extLst>
+          </p:cNvPr>
+          <p:cNvSpPr txBox="1"/>
+          <p:nvPr/>
+        </p:nvSpPr>
+        <p:spPr>
+          <a:xfrm>
+            <a:off x="5071145" y="2847928"/>
+            <a:ext cx="428322" cy="369332"/>
+          </a:xfrm>
+          <a:prstGeom prst="rect">
+            <a:avLst/>
+          </a:prstGeom>
+          <a:noFill/>
+        </p:spPr>
+        <p:txBody>
+          <a:bodyPr wrap="none" rtlCol="0">
+            <a:spAutoFit/>
+          </a:bodyPr>
+          <a:lstStyle/>
+          <a:p>
+            <a:r>
+              <a:rPr lang="en-US" altLang="zh-CN"/>
+              <a:t>14</a:t>
+            </a:r>
+            <a:endParaRPr lang="zh-CN" altLang="en-US"/>
+          </a:p>
+        </p:txBody>
+      </p:sp>
+      <p:sp>
+        <p:nvSpPr>
+          <p:cNvPr id="10" name="文本框 9">
+            <a:extLst>
+              <a:ext uri="{FF2B5EF4-FFF2-40B4-BE49-F238E27FC236}">
+                <a16:creationId xmlns:a16="http://schemas.microsoft.com/office/drawing/2014/main" id="{8922D55C-42F6-584F-B0BF-A134395FBFFE}"/>
+              </a:ext>
+            </a:extLst>
+          </p:cNvPr>
+          <p:cNvSpPr txBox="1"/>
+          <p:nvPr/>
+        </p:nvSpPr>
+        <p:spPr>
+          <a:xfrm>
+            <a:off x="5881839" y="3526972"/>
+            <a:ext cx="428322" cy="369332"/>
+          </a:xfrm>
+          <a:prstGeom prst="rect">
+            <a:avLst/>
+          </a:prstGeom>
+          <a:noFill/>
+        </p:spPr>
+        <p:txBody>
+          <a:bodyPr wrap="none" rtlCol="0">
+            <a:spAutoFit/>
+          </a:bodyPr>
+          <a:lstStyle/>
+          <a:p>
+            <a:r>
+              <a:rPr lang="en-US" altLang="zh-CN"/>
+              <a:t>18</a:t>
+            </a:r>
+            <a:endParaRPr lang="zh-CN" altLang="en-US"/>
+          </a:p>
+        </p:txBody>
+      </p:sp>
+      <p:cxnSp>
+        <p:nvCxnSpPr>
+          <p:cNvPr id="12" name="直接连接符 11">
+            <a:extLst>
+              <a:ext uri="{FF2B5EF4-FFF2-40B4-BE49-F238E27FC236}">
+                <a16:creationId xmlns:a16="http://schemas.microsoft.com/office/drawing/2014/main" id="{BE1E27E1-CCE9-AE70-BD35-DDC89264E8D7}"/>
+              </a:ext>
+            </a:extLst>
+          </p:cNvPr>
+          <p:cNvCxnSpPr>
+            <a:stCxn id="2" idx="2"/>
+            <a:endCxn id="7" idx="0"/>
+          </p:cNvCxnSpPr>
+          <p:nvPr/>
+        </p:nvCxnSpPr>
+        <p:spPr>
+          <a:xfrm>
+            <a:off x="3337033" y="981935"/>
+            <a:ext cx="454950" cy="445969"/>
+          </a:xfrm>
+          <a:prstGeom prst="line">
+            <a:avLst/>
+          </a:prstGeom>
+        </p:spPr>
+        <p:style>
+          <a:lnRef idx="2">
+            <a:schemeClr val="dk1"/>
+          </a:lnRef>
+          <a:fillRef idx="0">
+            <a:schemeClr val="dk1"/>
+          </a:fillRef>
+          <a:effectRef idx="1">
+            <a:schemeClr val="dk1"/>
+          </a:effectRef>
+          <a:fontRef idx="minor">
+            <a:schemeClr val="tx1"/>
+          </a:fontRef>
+        </p:style>
+      </p:cxnSp>
+      <p:cxnSp>
+        <p:nvCxnSpPr>
+          <p:cNvPr id="14" name="直接连接符 13">
+            <a:extLst>
+              <a:ext uri="{FF2B5EF4-FFF2-40B4-BE49-F238E27FC236}">
+                <a16:creationId xmlns:a16="http://schemas.microsoft.com/office/drawing/2014/main" id="{69B4ADD0-ED6E-D39D-466D-C6C59CFE34F0}"/>
+              </a:ext>
+            </a:extLst>
+          </p:cNvPr>
+          <p:cNvCxnSpPr>
+            <a:stCxn id="3" idx="2"/>
+            <a:endCxn id="7" idx="0"/>
+          </p:cNvCxnSpPr>
+          <p:nvPr/>
+        </p:nvCxnSpPr>
+        <p:spPr>
+          <a:xfrm flipH="1">
+            <a:off x="3791983" y="981935"/>
+            <a:ext cx="468461" cy="445969"/>
+          </a:xfrm>
+          <a:prstGeom prst="line">
+            <a:avLst/>
+          </a:prstGeom>
+        </p:spPr>
+        <p:style>
+          <a:lnRef idx="2">
+            <a:schemeClr val="dk1"/>
+          </a:lnRef>
+          <a:fillRef idx="0">
+            <a:schemeClr val="dk1"/>
+          </a:fillRef>
+          <a:effectRef idx="1">
+            <a:schemeClr val="dk1"/>
+          </a:effectRef>
+          <a:fontRef idx="minor">
+            <a:schemeClr val="tx1"/>
+          </a:fontRef>
+        </p:style>
+      </p:cxnSp>
+      <p:cxnSp>
+        <p:nvCxnSpPr>
+          <p:cNvPr id="16" name="直接连接符 15">
+            <a:extLst>
+              <a:ext uri="{FF2B5EF4-FFF2-40B4-BE49-F238E27FC236}">
+                <a16:creationId xmlns:a16="http://schemas.microsoft.com/office/drawing/2014/main" id="{D52ECD33-9732-D256-9C53-7561D1213F80}"/>
+              </a:ext>
+            </a:extLst>
+          </p:cNvPr>
+          <p:cNvCxnSpPr>
+            <a:stCxn id="7" idx="2"/>
+            <a:endCxn id="8" idx="0"/>
+          </p:cNvCxnSpPr>
+          <p:nvPr/>
+        </p:nvCxnSpPr>
+        <p:spPr>
+          <a:xfrm>
+            <a:off x="3791983" y="1797236"/>
+            <a:ext cx="763606" cy="279308"/>
+          </a:xfrm>
+          <a:prstGeom prst="line">
+            <a:avLst/>
+          </a:prstGeom>
+        </p:spPr>
+        <p:style>
+          <a:lnRef idx="2">
+            <a:schemeClr val="dk1"/>
+          </a:lnRef>
+          <a:fillRef idx="0">
+            <a:schemeClr val="dk1"/>
+          </a:fillRef>
+          <a:effectRef idx="1">
+            <a:schemeClr val="dk1"/>
+          </a:effectRef>
+          <a:fontRef idx="minor">
+            <a:schemeClr val="tx1"/>
+          </a:fontRef>
+        </p:style>
+      </p:cxnSp>
+      <p:cxnSp>
+        <p:nvCxnSpPr>
+          <p:cNvPr id="18" name="直接连接符 17">
+            <a:extLst>
+              <a:ext uri="{FF2B5EF4-FFF2-40B4-BE49-F238E27FC236}">
+                <a16:creationId xmlns:a16="http://schemas.microsoft.com/office/drawing/2014/main" id="{445580B9-E779-6869-813F-CF3563815E98}"/>
+              </a:ext>
+            </a:extLst>
+          </p:cNvPr>
+          <p:cNvCxnSpPr>
+            <a:stCxn id="4" idx="2"/>
+            <a:endCxn id="8" idx="0"/>
+          </p:cNvCxnSpPr>
+          <p:nvPr/>
+        </p:nvCxnSpPr>
+        <p:spPr>
+          <a:xfrm flipH="1">
+            <a:off x="4555589" y="981935"/>
+            <a:ext cx="565107" cy="1094609"/>
+          </a:xfrm>
+          <a:prstGeom prst="line">
+            <a:avLst/>
+          </a:prstGeom>
+        </p:spPr>
+        <p:style>
+          <a:lnRef idx="2">
+            <a:schemeClr val="dk1"/>
+          </a:lnRef>
+          <a:fillRef idx="0">
+            <a:schemeClr val="dk1"/>
+          </a:fillRef>
+          <a:effectRef idx="1">
+            <a:schemeClr val="dk1"/>
+          </a:effectRef>
+          <a:fontRef idx="minor">
+            <a:schemeClr val="tx1"/>
+          </a:fontRef>
+        </p:style>
+      </p:cxnSp>
+      <p:cxnSp>
+        <p:nvCxnSpPr>
+          <p:cNvPr id="20" name="直接连接符 19">
+            <a:extLst>
+              <a:ext uri="{FF2B5EF4-FFF2-40B4-BE49-F238E27FC236}">
+                <a16:creationId xmlns:a16="http://schemas.microsoft.com/office/drawing/2014/main" id="{1588F5FD-06C6-EFB4-8F36-BBC984A55C16}"/>
+              </a:ext>
+            </a:extLst>
+          </p:cNvPr>
+          <p:cNvCxnSpPr>
+            <a:stCxn id="8" idx="2"/>
+            <a:endCxn id="9" idx="0"/>
+          </p:cNvCxnSpPr>
+          <p:nvPr/>
+        </p:nvCxnSpPr>
+        <p:spPr>
+          <a:xfrm>
+            <a:off x="4555589" y="2445876"/>
+            <a:ext cx="729717" cy="402052"/>
+          </a:xfrm>
+          <a:prstGeom prst="line">
+            <a:avLst/>
+          </a:prstGeom>
+        </p:spPr>
+        <p:style>
+          <a:lnRef idx="2">
+            <a:schemeClr val="dk1"/>
+          </a:lnRef>
+          <a:fillRef idx="0">
+            <a:schemeClr val="dk1"/>
+          </a:fillRef>
+          <a:effectRef idx="1">
+            <a:schemeClr val="dk1"/>
+          </a:effectRef>
+          <a:fontRef idx="minor">
+            <a:schemeClr val="tx1"/>
+          </a:fontRef>
+        </p:style>
+      </p:cxnSp>
+      <p:cxnSp>
+        <p:nvCxnSpPr>
+          <p:cNvPr id="22" name="直接连接符 21">
+            <a:extLst>
+              <a:ext uri="{FF2B5EF4-FFF2-40B4-BE49-F238E27FC236}">
+                <a16:creationId xmlns:a16="http://schemas.microsoft.com/office/drawing/2014/main" id="{36182FC8-7F7D-9A53-F2BC-E27473B0C4BC}"/>
+              </a:ext>
+            </a:extLst>
+          </p:cNvPr>
+          <p:cNvCxnSpPr>
+            <a:stCxn id="5" idx="2"/>
+            <a:endCxn id="9" idx="0"/>
+          </p:cNvCxnSpPr>
+          <p:nvPr/>
+        </p:nvCxnSpPr>
+        <p:spPr>
+          <a:xfrm flipH="1">
+            <a:off x="5285306" y="981935"/>
+            <a:ext cx="657447" cy="1865993"/>
+          </a:xfrm>
+          <a:prstGeom prst="line">
+            <a:avLst/>
+          </a:prstGeom>
+        </p:spPr>
+        <p:style>
+          <a:lnRef idx="2">
+            <a:schemeClr val="dk1"/>
+          </a:lnRef>
+          <a:fillRef idx="0">
+            <a:schemeClr val="dk1"/>
+          </a:fillRef>
+          <a:effectRef idx="1">
+            <a:schemeClr val="dk1"/>
+          </a:effectRef>
+          <a:fontRef idx="minor">
+            <a:schemeClr val="tx1"/>
+          </a:fontRef>
+        </p:style>
+      </p:cxnSp>
+      <p:cxnSp>
+        <p:nvCxnSpPr>
+          <p:cNvPr id="24" name="直接连接符 23">
+            <a:extLst>
+              <a:ext uri="{FF2B5EF4-FFF2-40B4-BE49-F238E27FC236}">
+                <a16:creationId xmlns:a16="http://schemas.microsoft.com/office/drawing/2014/main" id="{8DE2D6A8-B47E-70E1-0212-DBE6DB604781}"/>
+              </a:ext>
+            </a:extLst>
+          </p:cNvPr>
+          <p:cNvCxnSpPr>
+            <a:stCxn id="9" idx="2"/>
+            <a:endCxn id="10" idx="0"/>
+          </p:cNvCxnSpPr>
+          <p:nvPr/>
+        </p:nvCxnSpPr>
+        <p:spPr>
+          <a:xfrm>
+            <a:off x="5285306" y="3217260"/>
+            <a:ext cx="810694" cy="309712"/>
+          </a:xfrm>
+          <a:prstGeom prst="line">
+            <a:avLst/>
+          </a:prstGeom>
+        </p:spPr>
+        <p:style>
+          <a:lnRef idx="2">
+            <a:schemeClr val="dk1"/>
+          </a:lnRef>
+          <a:fillRef idx="0">
+            <a:schemeClr val="dk1"/>
+          </a:fillRef>
+          <a:effectRef idx="1">
+            <a:schemeClr val="dk1"/>
+          </a:effectRef>
+          <a:fontRef idx="minor">
+            <a:schemeClr val="tx1"/>
+          </a:fontRef>
+        </p:style>
+      </p:cxnSp>
+      <p:cxnSp>
+        <p:nvCxnSpPr>
+          <p:cNvPr id="26" name="直接连接符 25">
+            <a:extLst>
+              <a:ext uri="{FF2B5EF4-FFF2-40B4-BE49-F238E27FC236}">
+                <a16:creationId xmlns:a16="http://schemas.microsoft.com/office/drawing/2014/main" id="{E9FC23CC-38CD-D232-1264-3B0CC4939683}"/>
+              </a:ext>
+            </a:extLst>
+          </p:cNvPr>
+          <p:cNvCxnSpPr>
+            <a:stCxn id="6" idx="2"/>
+            <a:endCxn id="10" idx="0"/>
+          </p:cNvCxnSpPr>
+          <p:nvPr/>
+        </p:nvCxnSpPr>
+        <p:spPr>
+          <a:xfrm flipH="1">
+            <a:off x="6096000" y="981935"/>
+            <a:ext cx="817555" cy="2545037"/>
+          </a:xfrm>
+          <a:prstGeom prst="line">
+            <a:avLst/>
+          </a:prstGeom>
+        </p:spPr>
+        <p:style>
+          <a:lnRef idx="2">
+            <a:schemeClr val="dk1"/>
+          </a:lnRef>
+          <a:fillRef idx="0">
+            <a:schemeClr val="dk1"/>
+          </a:fillRef>
+          <a:effectRef idx="1">
+            <a:schemeClr val="dk1"/>
+          </a:effectRef>
+          <a:fontRef idx="minor">
+            <a:schemeClr val="tx1"/>
+          </a:fontRef>
+        </p:style>
+      </p:cxnSp>
     </p:spTree>
     <p:extLst>
       <p:ext uri="{BB962C8B-B14F-4D97-AF65-F5344CB8AC3E}">
@@ -14895,7 +20271,7 @@
 </p:sld>
 </file>
 
-<file path=ppt/slides/slide17.xml><?xml version="1.0" encoding="utf-8"?>
+<file path=ppt/slides/slide18.xml><?xml version="1.0" encoding="utf-8"?>
 <p:sld xmlns:a="http://schemas.openxmlformats.org/drawingml/2006/main" xmlns:r="http://schemas.openxmlformats.org/officeDocument/2006/relationships" xmlns:p="http://schemas.openxmlformats.org/presentationml/2006/main">
   <p:cSld>
     <p:spTree>
@@ -14903,7 +20279,826 @@
         <p:cNvPr id="1" name="">
           <a:extLst>
             <a:ext uri="{FF2B5EF4-FFF2-40B4-BE49-F238E27FC236}">
-              <a16:creationId xmlns:a16="http://schemas.microsoft.com/office/drawing/2014/main" id="{90AE90DD-26AA-F232-A92A-35696F78B098}"/>
+              <a16:creationId xmlns:a16="http://schemas.microsoft.com/office/drawing/2014/main" id="{BBF83861-C13D-4041-6525-58DCBD9BB98B}"/>
+            </a:ext>
+          </a:extLst>
+        </p:cNvPr>
+        <p:cNvGrpSpPr/>
+        <p:nvPr/>
+      </p:nvGrpSpPr>
+      <p:grpSpPr>
+        <a:xfrm>
+          <a:off x="0" y="0"/>
+          <a:ext cx="0" cy="0"/>
+          <a:chOff x="0" y="0"/>
+          <a:chExt cx="0" cy="0"/>
+        </a:xfrm>
+      </p:grpSpPr>
+      <p:sp>
+        <p:nvSpPr>
+          <p:cNvPr id="2" name="文本框 1">
+            <a:extLst>
+              <a:ext uri="{FF2B5EF4-FFF2-40B4-BE49-F238E27FC236}">
+                <a16:creationId xmlns:a16="http://schemas.microsoft.com/office/drawing/2014/main" id="{D4076475-9052-4453-F46B-79106D6D9CD0}"/>
+              </a:ext>
+            </a:extLst>
+          </p:cNvPr>
+          <p:cNvSpPr txBox="1"/>
+          <p:nvPr/>
+        </p:nvSpPr>
+        <p:spPr>
+          <a:xfrm>
+            <a:off x="3906459" y="653143"/>
+            <a:ext cx="306494" cy="369332"/>
+          </a:xfrm>
+          <a:prstGeom prst="rect">
+            <a:avLst/>
+          </a:prstGeom>
+          <a:noFill/>
+        </p:spPr>
+        <p:txBody>
+          <a:bodyPr wrap="none" rtlCol="0">
+            <a:spAutoFit/>
+          </a:bodyPr>
+          <a:lstStyle/>
+          <a:p>
+            <a:r>
+              <a:rPr lang="en-US" altLang="zh-CN"/>
+              <a:t>3</a:t>
+            </a:r>
+            <a:endParaRPr lang="zh-CN" altLang="en-US"/>
+          </a:p>
+        </p:txBody>
+      </p:sp>
+      <p:sp>
+        <p:nvSpPr>
+          <p:cNvPr id="3" name="文本框 2">
+            <a:extLst>
+              <a:ext uri="{FF2B5EF4-FFF2-40B4-BE49-F238E27FC236}">
+                <a16:creationId xmlns:a16="http://schemas.microsoft.com/office/drawing/2014/main" id="{D8FB5C4A-AD3B-B723-F170-D536798EAAA4}"/>
+              </a:ext>
+            </a:extLst>
+          </p:cNvPr>
+          <p:cNvSpPr txBox="1"/>
+          <p:nvPr/>
+        </p:nvSpPr>
+        <p:spPr>
+          <a:xfrm>
+            <a:off x="3201961" y="653143"/>
+            <a:ext cx="306494" cy="369332"/>
+          </a:xfrm>
+          <a:prstGeom prst="rect">
+            <a:avLst/>
+          </a:prstGeom>
+          <a:noFill/>
+        </p:spPr>
+        <p:txBody>
+          <a:bodyPr wrap="none" rtlCol="0">
+            <a:spAutoFit/>
+          </a:bodyPr>
+          <a:lstStyle/>
+          <a:p>
+            <a:r>
+              <a:rPr lang="en-US" altLang="zh-CN"/>
+              <a:t>6</a:t>
+            </a:r>
+            <a:endParaRPr lang="zh-CN" altLang="en-US"/>
+          </a:p>
+        </p:txBody>
+      </p:sp>
+      <p:sp>
+        <p:nvSpPr>
+          <p:cNvPr id="4" name="文本框 3">
+            <a:extLst>
+              <a:ext uri="{FF2B5EF4-FFF2-40B4-BE49-F238E27FC236}">
+                <a16:creationId xmlns:a16="http://schemas.microsoft.com/office/drawing/2014/main" id="{6ED3D8B6-6AA1-6868-C910-27378FBA4046}"/>
+              </a:ext>
+            </a:extLst>
+          </p:cNvPr>
+          <p:cNvSpPr txBox="1"/>
+          <p:nvPr/>
+        </p:nvSpPr>
+        <p:spPr>
+          <a:xfrm>
+            <a:off x="1532259" y="653143"/>
+            <a:ext cx="306494" cy="369332"/>
+          </a:xfrm>
+          <a:prstGeom prst="rect">
+            <a:avLst/>
+          </a:prstGeom>
+          <a:noFill/>
+        </p:spPr>
+        <p:txBody>
+          <a:bodyPr wrap="none" rtlCol="0">
+            <a:spAutoFit/>
+          </a:bodyPr>
+          <a:lstStyle/>
+          <a:p>
+            <a:r>
+              <a:rPr lang="en-US" altLang="zh-CN"/>
+              <a:t>2</a:t>
+            </a:r>
+            <a:endParaRPr lang="zh-CN" altLang="en-US"/>
+          </a:p>
+        </p:txBody>
+      </p:sp>
+      <p:sp>
+        <p:nvSpPr>
+          <p:cNvPr id="5" name="文本框 4">
+            <a:extLst>
+              <a:ext uri="{FF2B5EF4-FFF2-40B4-BE49-F238E27FC236}">
+                <a16:creationId xmlns:a16="http://schemas.microsoft.com/office/drawing/2014/main" id="{0EC75085-612E-AE73-E5D8-CFAD84EE2435}"/>
+              </a:ext>
+            </a:extLst>
+          </p:cNvPr>
+          <p:cNvSpPr txBox="1"/>
+          <p:nvPr/>
+        </p:nvSpPr>
+        <p:spPr>
+          <a:xfrm>
+            <a:off x="2430837" y="653143"/>
+            <a:ext cx="306494" cy="369332"/>
+          </a:xfrm>
+          <a:prstGeom prst="rect">
+            <a:avLst/>
+          </a:prstGeom>
+          <a:noFill/>
+        </p:spPr>
+        <p:txBody>
+          <a:bodyPr wrap="none" rtlCol="0">
+            <a:spAutoFit/>
+          </a:bodyPr>
+          <a:lstStyle/>
+          <a:p>
+            <a:r>
+              <a:rPr lang="en-US" altLang="zh-CN"/>
+              <a:t>3</a:t>
+            </a:r>
+            <a:endParaRPr lang="zh-CN" altLang="en-US"/>
+          </a:p>
+        </p:txBody>
+      </p:sp>
+      <p:sp>
+        <p:nvSpPr>
+          <p:cNvPr id="6" name="文本框 5">
+            <a:extLst>
+              <a:ext uri="{FF2B5EF4-FFF2-40B4-BE49-F238E27FC236}">
+                <a16:creationId xmlns:a16="http://schemas.microsoft.com/office/drawing/2014/main" id="{9B9DFA95-C68B-EE1E-3F03-BF0F88FADA0C}"/>
+              </a:ext>
+            </a:extLst>
+          </p:cNvPr>
+          <p:cNvSpPr txBox="1"/>
+          <p:nvPr/>
+        </p:nvSpPr>
+        <p:spPr>
+          <a:xfrm>
+            <a:off x="4554433" y="653143"/>
+            <a:ext cx="306494" cy="369332"/>
+          </a:xfrm>
+          <a:prstGeom prst="rect">
+            <a:avLst/>
+          </a:prstGeom>
+          <a:noFill/>
+        </p:spPr>
+        <p:txBody>
+          <a:bodyPr wrap="none" rtlCol="0">
+            <a:spAutoFit/>
+          </a:bodyPr>
+          <a:lstStyle/>
+          <a:p>
+            <a:r>
+              <a:rPr lang="en-US" altLang="zh-CN"/>
+              <a:t>4</a:t>
+            </a:r>
+            <a:endParaRPr lang="zh-CN" altLang="en-US"/>
+          </a:p>
+        </p:txBody>
+      </p:sp>
+      <p:sp>
+        <p:nvSpPr>
+          <p:cNvPr id="11" name="文本框 10">
+            <a:extLst>
+              <a:ext uri="{FF2B5EF4-FFF2-40B4-BE49-F238E27FC236}">
+                <a16:creationId xmlns:a16="http://schemas.microsoft.com/office/drawing/2014/main" id="{EF01590C-6C42-A69F-772B-DE59240836B8}"/>
+              </a:ext>
+            </a:extLst>
+          </p:cNvPr>
+          <p:cNvSpPr txBox="1"/>
+          <p:nvPr/>
+        </p:nvSpPr>
+        <p:spPr>
+          <a:xfrm>
+            <a:off x="2005023" y="1508984"/>
+            <a:ext cx="306494" cy="369332"/>
+          </a:xfrm>
+          <a:prstGeom prst="rect">
+            <a:avLst/>
+          </a:prstGeom>
+          <a:noFill/>
+        </p:spPr>
+        <p:txBody>
+          <a:bodyPr wrap="none" rtlCol="0">
+            <a:spAutoFit/>
+          </a:bodyPr>
+          <a:lstStyle/>
+          <a:p>
+            <a:r>
+              <a:rPr lang="en-US" altLang="zh-CN"/>
+              <a:t>5</a:t>
+            </a:r>
+            <a:endParaRPr lang="zh-CN" altLang="en-US"/>
+          </a:p>
+        </p:txBody>
+      </p:sp>
+      <p:cxnSp>
+        <p:nvCxnSpPr>
+          <p:cNvPr id="17" name="直接连接符 16">
+            <a:extLst>
+              <a:ext uri="{FF2B5EF4-FFF2-40B4-BE49-F238E27FC236}">
+                <a16:creationId xmlns:a16="http://schemas.microsoft.com/office/drawing/2014/main" id="{B1B5B3D3-1D0C-D2BB-D0D9-FADB8D810041}"/>
+              </a:ext>
+            </a:extLst>
+          </p:cNvPr>
+          <p:cNvCxnSpPr>
+            <a:stCxn id="4" idx="2"/>
+            <a:endCxn id="11" idx="0"/>
+          </p:cNvCxnSpPr>
+          <p:nvPr/>
+        </p:nvCxnSpPr>
+        <p:spPr>
+          <a:xfrm>
+            <a:off x="1685506" y="1022475"/>
+            <a:ext cx="472764" cy="486509"/>
+          </a:xfrm>
+          <a:prstGeom prst="line">
+            <a:avLst/>
+          </a:prstGeom>
+        </p:spPr>
+        <p:style>
+          <a:lnRef idx="2">
+            <a:schemeClr val="dk1"/>
+          </a:lnRef>
+          <a:fillRef idx="0">
+            <a:schemeClr val="dk1"/>
+          </a:fillRef>
+          <a:effectRef idx="1">
+            <a:schemeClr val="dk1"/>
+          </a:effectRef>
+          <a:fontRef idx="minor">
+            <a:schemeClr val="tx1"/>
+          </a:fontRef>
+        </p:style>
+      </p:cxnSp>
+      <p:cxnSp>
+        <p:nvCxnSpPr>
+          <p:cNvPr id="19" name="直接连接符 18">
+            <a:extLst>
+              <a:ext uri="{FF2B5EF4-FFF2-40B4-BE49-F238E27FC236}">
+                <a16:creationId xmlns:a16="http://schemas.microsoft.com/office/drawing/2014/main" id="{FAB80500-B21E-9464-E6DA-DCB8807B6C8E}"/>
+              </a:ext>
+            </a:extLst>
+          </p:cNvPr>
+          <p:cNvCxnSpPr>
+            <a:cxnSpLocks/>
+            <a:stCxn id="5" idx="2"/>
+            <a:endCxn id="11" idx="0"/>
+          </p:cNvCxnSpPr>
+          <p:nvPr/>
+        </p:nvCxnSpPr>
+        <p:spPr>
+          <a:xfrm flipH="1">
+            <a:off x="2158270" y="1022475"/>
+            <a:ext cx="425814" cy="486509"/>
+          </a:xfrm>
+          <a:prstGeom prst="line">
+            <a:avLst/>
+          </a:prstGeom>
+        </p:spPr>
+        <p:style>
+          <a:lnRef idx="2">
+            <a:schemeClr val="dk1"/>
+          </a:lnRef>
+          <a:fillRef idx="0">
+            <a:schemeClr val="dk1"/>
+          </a:fillRef>
+          <a:effectRef idx="1">
+            <a:schemeClr val="dk1"/>
+          </a:effectRef>
+          <a:fontRef idx="minor">
+            <a:schemeClr val="tx1"/>
+          </a:fontRef>
+        </p:style>
+      </p:cxnSp>
+      <p:sp>
+        <p:nvSpPr>
+          <p:cNvPr id="59" name="文本框 58">
+            <a:extLst>
+              <a:ext uri="{FF2B5EF4-FFF2-40B4-BE49-F238E27FC236}">
+                <a16:creationId xmlns:a16="http://schemas.microsoft.com/office/drawing/2014/main" id="{5BD90FFE-3A16-6568-2729-525509D88406}"/>
+              </a:ext>
+            </a:extLst>
+          </p:cNvPr>
+          <p:cNvSpPr txBox="1"/>
+          <p:nvPr/>
+        </p:nvSpPr>
+        <p:spPr>
+          <a:xfrm>
+            <a:off x="3163609" y="3109153"/>
+            <a:ext cx="428322" cy="369332"/>
+          </a:xfrm>
+          <a:prstGeom prst="rect">
+            <a:avLst/>
+          </a:prstGeom>
+          <a:noFill/>
+        </p:spPr>
+        <p:txBody>
+          <a:bodyPr wrap="none" rtlCol="0">
+            <a:spAutoFit/>
+          </a:bodyPr>
+          <a:lstStyle/>
+          <a:p>
+            <a:r>
+              <a:rPr lang="en-US" altLang="zh-CN"/>
+              <a:t>18</a:t>
+            </a:r>
+            <a:endParaRPr lang="zh-CN" altLang="en-US"/>
+          </a:p>
+        </p:txBody>
+      </p:sp>
+      <p:sp>
+        <p:nvSpPr>
+          <p:cNvPr id="109" name="文本框 108">
+            <a:extLst>
+              <a:ext uri="{FF2B5EF4-FFF2-40B4-BE49-F238E27FC236}">
+                <a16:creationId xmlns:a16="http://schemas.microsoft.com/office/drawing/2014/main" id="{9C620E4F-6970-E28C-0578-C70451132532}"/>
+              </a:ext>
+            </a:extLst>
+          </p:cNvPr>
+          <p:cNvSpPr txBox="1"/>
+          <p:nvPr/>
+        </p:nvSpPr>
+        <p:spPr>
+          <a:xfrm>
+            <a:off x="4122103" y="1508984"/>
+            <a:ext cx="306494" cy="369332"/>
+          </a:xfrm>
+          <a:prstGeom prst="rect">
+            <a:avLst/>
+          </a:prstGeom>
+          <a:noFill/>
+        </p:spPr>
+        <p:txBody>
+          <a:bodyPr wrap="none" rtlCol="0">
+            <a:spAutoFit/>
+          </a:bodyPr>
+          <a:lstStyle/>
+          <a:p>
+            <a:r>
+              <a:rPr lang="en-US" altLang="zh-CN"/>
+              <a:t>7</a:t>
+            </a:r>
+            <a:endParaRPr lang="zh-CN" altLang="en-US"/>
+          </a:p>
+        </p:txBody>
+      </p:sp>
+      <p:cxnSp>
+        <p:nvCxnSpPr>
+          <p:cNvPr id="110" name="直接连接符 109">
+            <a:extLst>
+              <a:ext uri="{FF2B5EF4-FFF2-40B4-BE49-F238E27FC236}">
+                <a16:creationId xmlns:a16="http://schemas.microsoft.com/office/drawing/2014/main" id="{2082B7DD-8C83-A444-6056-6C327932178F}"/>
+              </a:ext>
+            </a:extLst>
+          </p:cNvPr>
+          <p:cNvCxnSpPr>
+            <a:cxnSpLocks/>
+            <a:stCxn id="2" idx="2"/>
+            <a:endCxn id="109" idx="0"/>
+          </p:cNvCxnSpPr>
+          <p:nvPr/>
+        </p:nvCxnSpPr>
+        <p:spPr>
+          <a:xfrm>
+            <a:off x="4059706" y="1022475"/>
+            <a:ext cx="215644" cy="486509"/>
+          </a:xfrm>
+          <a:prstGeom prst="line">
+            <a:avLst/>
+          </a:prstGeom>
+        </p:spPr>
+        <p:style>
+          <a:lnRef idx="2">
+            <a:schemeClr val="dk1"/>
+          </a:lnRef>
+          <a:fillRef idx="0">
+            <a:schemeClr val="dk1"/>
+          </a:fillRef>
+          <a:effectRef idx="1">
+            <a:schemeClr val="dk1"/>
+          </a:effectRef>
+          <a:fontRef idx="minor">
+            <a:schemeClr val="tx1"/>
+          </a:fontRef>
+        </p:style>
+      </p:cxnSp>
+      <p:cxnSp>
+        <p:nvCxnSpPr>
+          <p:cNvPr id="113" name="直接连接符 112">
+            <a:extLst>
+              <a:ext uri="{FF2B5EF4-FFF2-40B4-BE49-F238E27FC236}">
+                <a16:creationId xmlns:a16="http://schemas.microsoft.com/office/drawing/2014/main" id="{9D3E03DC-2AC6-2E71-13B1-67692C7FC313}"/>
+              </a:ext>
+            </a:extLst>
+          </p:cNvPr>
+          <p:cNvCxnSpPr>
+            <a:cxnSpLocks/>
+            <a:stCxn id="6" idx="2"/>
+            <a:endCxn id="109" idx="0"/>
+          </p:cNvCxnSpPr>
+          <p:nvPr/>
+        </p:nvCxnSpPr>
+        <p:spPr>
+          <a:xfrm flipH="1">
+            <a:off x="4275350" y="1022475"/>
+            <a:ext cx="432330" cy="486509"/>
+          </a:xfrm>
+          <a:prstGeom prst="line">
+            <a:avLst/>
+          </a:prstGeom>
+        </p:spPr>
+        <p:style>
+          <a:lnRef idx="2">
+            <a:schemeClr val="dk1"/>
+          </a:lnRef>
+          <a:fillRef idx="0">
+            <a:schemeClr val="dk1"/>
+          </a:fillRef>
+          <a:effectRef idx="1">
+            <a:schemeClr val="dk1"/>
+          </a:effectRef>
+          <a:fontRef idx="minor">
+            <a:schemeClr val="tx1"/>
+          </a:fontRef>
+        </p:style>
+      </p:cxnSp>
+      <p:sp>
+        <p:nvSpPr>
+          <p:cNvPr id="116" name="文本框 115">
+            <a:extLst>
+              <a:ext uri="{FF2B5EF4-FFF2-40B4-BE49-F238E27FC236}">
+                <a16:creationId xmlns:a16="http://schemas.microsoft.com/office/drawing/2014/main" id="{6AE49E42-C6D7-9868-E2E5-F9389D698AD8}"/>
+              </a:ext>
+            </a:extLst>
+          </p:cNvPr>
+          <p:cNvSpPr txBox="1"/>
+          <p:nvPr/>
+        </p:nvSpPr>
+        <p:spPr>
+          <a:xfrm>
+            <a:off x="2648607" y="2211677"/>
+            <a:ext cx="428322" cy="369332"/>
+          </a:xfrm>
+          <a:prstGeom prst="rect">
+            <a:avLst/>
+          </a:prstGeom>
+          <a:noFill/>
+        </p:spPr>
+        <p:txBody>
+          <a:bodyPr wrap="none" rtlCol="0">
+            <a:spAutoFit/>
+          </a:bodyPr>
+          <a:lstStyle/>
+          <a:p>
+            <a:r>
+              <a:rPr lang="en-US" altLang="zh-CN"/>
+              <a:t>11</a:t>
+            </a:r>
+            <a:endParaRPr lang="zh-CN" altLang="en-US"/>
+          </a:p>
+        </p:txBody>
+      </p:sp>
+      <p:cxnSp>
+        <p:nvCxnSpPr>
+          <p:cNvPr id="117" name="直接连接符 116">
+            <a:extLst>
+              <a:ext uri="{FF2B5EF4-FFF2-40B4-BE49-F238E27FC236}">
+                <a16:creationId xmlns:a16="http://schemas.microsoft.com/office/drawing/2014/main" id="{2D8D8DCB-8E00-E2D2-6FB5-71E8DB1B2C45}"/>
+              </a:ext>
+            </a:extLst>
+          </p:cNvPr>
+          <p:cNvCxnSpPr>
+            <a:cxnSpLocks/>
+            <a:stCxn id="11" idx="2"/>
+            <a:endCxn id="116" idx="0"/>
+          </p:cNvCxnSpPr>
+          <p:nvPr/>
+        </p:nvCxnSpPr>
+        <p:spPr>
+          <a:xfrm>
+            <a:off x="2158270" y="1878316"/>
+            <a:ext cx="704498" cy="333361"/>
+          </a:xfrm>
+          <a:prstGeom prst="line">
+            <a:avLst/>
+          </a:prstGeom>
+        </p:spPr>
+        <p:style>
+          <a:lnRef idx="2">
+            <a:schemeClr val="dk1"/>
+          </a:lnRef>
+          <a:fillRef idx="0">
+            <a:schemeClr val="dk1"/>
+          </a:fillRef>
+          <a:effectRef idx="1">
+            <a:schemeClr val="dk1"/>
+          </a:effectRef>
+          <a:fontRef idx="minor">
+            <a:schemeClr val="tx1"/>
+          </a:fontRef>
+        </p:style>
+      </p:cxnSp>
+      <p:cxnSp>
+        <p:nvCxnSpPr>
+          <p:cNvPr id="120" name="直接连接符 119">
+            <a:extLst>
+              <a:ext uri="{FF2B5EF4-FFF2-40B4-BE49-F238E27FC236}">
+                <a16:creationId xmlns:a16="http://schemas.microsoft.com/office/drawing/2014/main" id="{1E58A279-524E-5DC1-D620-9E8FBEE90EFB}"/>
+              </a:ext>
+            </a:extLst>
+          </p:cNvPr>
+          <p:cNvCxnSpPr>
+            <a:cxnSpLocks/>
+            <a:stCxn id="3" idx="2"/>
+            <a:endCxn id="116" idx="0"/>
+          </p:cNvCxnSpPr>
+          <p:nvPr/>
+        </p:nvCxnSpPr>
+        <p:spPr>
+          <a:xfrm flipH="1">
+            <a:off x="2862768" y="1022475"/>
+            <a:ext cx="492440" cy="1189202"/>
+          </a:xfrm>
+          <a:prstGeom prst="line">
+            <a:avLst/>
+          </a:prstGeom>
+        </p:spPr>
+        <p:style>
+          <a:lnRef idx="2">
+            <a:schemeClr val="dk1"/>
+          </a:lnRef>
+          <a:fillRef idx="0">
+            <a:schemeClr val="dk1"/>
+          </a:fillRef>
+          <a:effectRef idx="1">
+            <a:schemeClr val="dk1"/>
+          </a:effectRef>
+          <a:fontRef idx="minor">
+            <a:schemeClr val="tx1"/>
+          </a:fontRef>
+        </p:style>
+      </p:cxnSp>
+      <p:cxnSp>
+        <p:nvCxnSpPr>
+          <p:cNvPr id="123" name="直接连接符 122">
+            <a:extLst>
+              <a:ext uri="{FF2B5EF4-FFF2-40B4-BE49-F238E27FC236}">
+                <a16:creationId xmlns:a16="http://schemas.microsoft.com/office/drawing/2014/main" id="{1B4F115C-6B8F-F96C-D4D8-3CFB6D5E6C0E}"/>
+              </a:ext>
+            </a:extLst>
+          </p:cNvPr>
+          <p:cNvCxnSpPr>
+            <a:cxnSpLocks/>
+            <a:stCxn id="116" idx="2"/>
+            <a:endCxn id="59" idx="0"/>
+          </p:cNvCxnSpPr>
+          <p:nvPr/>
+        </p:nvCxnSpPr>
+        <p:spPr>
+          <a:xfrm>
+            <a:off x="2862768" y="2581009"/>
+            <a:ext cx="515002" cy="528144"/>
+          </a:xfrm>
+          <a:prstGeom prst="line">
+            <a:avLst/>
+          </a:prstGeom>
+        </p:spPr>
+        <p:style>
+          <a:lnRef idx="2">
+            <a:schemeClr val="dk1"/>
+          </a:lnRef>
+          <a:fillRef idx="0">
+            <a:schemeClr val="dk1"/>
+          </a:fillRef>
+          <a:effectRef idx="1">
+            <a:schemeClr val="dk1"/>
+          </a:effectRef>
+          <a:fontRef idx="minor">
+            <a:schemeClr val="tx1"/>
+          </a:fontRef>
+        </p:style>
+      </p:cxnSp>
+      <p:cxnSp>
+        <p:nvCxnSpPr>
+          <p:cNvPr id="126" name="直接连接符 125">
+            <a:extLst>
+              <a:ext uri="{FF2B5EF4-FFF2-40B4-BE49-F238E27FC236}">
+                <a16:creationId xmlns:a16="http://schemas.microsoft.com/office/drawing/2014/main" id="{79FA583F-B239-4EC0-7B9B-32CBFB87FFC5}"/>
+              </a:ext>
+            </a:extLst>
+          </p:cNvPr>
+          <p:cNvCxnSpPr>
+            <a:cxnSpLocks/>
+            <a:stCxn id="109" idx="2"/>
+            <a:endCxn id="59" idx="0"/>
+          </p:cNvCxnSpPr>
+          <p:nvPr/>
+        </p:nvCxnSpPr>
+        <p:spPr>
+          <a:xfrm flipH="1">
+            <a:off x="3377770" y="1878316"/>
+            <a:ext cx="897580" cy="1230837"/>
+          </a:xfrm>
+          <a:prstGeom prst="line">
+            <a:avLst/>
+          </a:prstGeom>
+        </p:spPr>
+        <p:style>
+          <a:lnRef idx="2">
+            <a:schemeClr val="dk1"/>
+          </a:lnRef>
+          <a:fillRef idx="0">
+            <a:schemeClr val="dk1"/>
+          </a:fillRef>
+          <a:effectRef idx="1">
+            <a:schemeClr val="dk1"/>
+          </a:effectRef>
+          <a:fontRef idx="minor">
+            <a:schemeClr val="tx1"/>
+          </a:fontRef>
+        </p:style>
+      </p:cxnSp>
+      <p:sp>
+        <p:nvSpPr>
+          <p:cNvPr id="135" name="文本框 134">
+            <a:extLst>
+              <a:ext uri="{FF2B5EF4-FFF2-40B4-BE49-F238E27FC236}">
+                <a16:creationId xmlns:a16="http://schemas.microsoft.com/office/drawing/2014/main" id="{F4DDC5A4-5483-8B30-851D-1FE9F838B38E}"/>
+              </a:ext>
+            </a:extLst>
+          </p:cNvPr>
+          <p:cNvSpPr txBox="1"/>
+          <p:nvPr/>
+        </p:nvSpPr>
+        <p:spPr>
+          <a:xfrm>
+            <a:off x="1964216" y="1183237"/>
+            <a:ext cx="364202" cy="307777"/>
+          </a:xfrm>
+          <a:prstGeom prst="rect">
+            <a:avLst/>
+          </a:prstGeom>
+          <a:noFill/>
+        </p:spPr>
+        <p:txBody>
+          <a:bodyPr wrap="none" rtlCol="0">
+            <a:spAutoFit/>
+          </a:bodyPr>
+          <a:lstStyle/>
+          <a:p>
+            <a:r>
+              <a:rPr lang="zh-CN" altLang="en-US" sz="1400"/>
+              <a:t>①</a:t>
+            </a:r>
+          </a:p>
+        </p:txBody>
+      </p:sp>
+      <p:sp>
+        <p:nvSpPr>
+          <p:cNvPr id="139" name="文本框 138">
+            <a:extLst>
+              <a:ext uri="{FF2B5EF4-FFF2-40B4-BE49-F238E27FC236}">
+                <a16:creationId xmlns:a16="http://schemas.microsoft.com/office/drawing/2014/main" id="{EE3A8027-E6E0-4B59-F0F1-2236A1E22FAB}"/>
+              </a:ext>
+            </a:extLst>
+          </p:cNvPr>
+          <p:cNvSpPr txBox="1"/>
+          <p:nvPr/>
+        </p:nvSpPr>
+        <p:spPr>
+          <a:xfrm>
+            <a:off x="4122103" y="1102910"/>
+            <a:ext cx="364202" cy="307777"/>
+          </a:xfrm>
+          <a:prstGeom prst="rect">
+            <a:avLst/>
+          </a:prstGeom>
+          <a:noFill/>
+        </p:spPr>
+        <p:txBody>
+          <a:bodyPr wrap="none" rtlCol="0">
+            <a:spAutoFit/>
+          </a:bodyPr>
+          <a:lstStyle/>
+          <a:p>
+            <a:r>
+              <a:rPr lang="zh-CN" altLang="en-US" sz="1400"/>
+              <a:t>②</a:t>
+            </a:r>
+          </a:p>
+        </p:txBody>
+      </p:sp>
+      <p:sp>
+        <p:nvSpPr>
+          <p:cNvPr id="140" name="文本框 139">
+            <a:extLst>
+              <a:ext uri="{FF2B5EF4-FFF2-40B4-BE49-F238E27FC236}">
+                <a16:creationId xmlns:a16="http://schemas.microsoft.com/office/drawing/2014/main" id="{170AE4CA-1241-B426-CDE2-62796328E727}"/>
+              </a:ext>
+            </a:extLst>
+          </p:cNvPr>
+          <p:cNvSpPr txBox="1"/>
+          <p:nvPr/>
+        </p:nvSpPr>
+        <p:spPr>
+          <a:xfrm>
+            <a:off x="2640313" y="1891107"/>
+            <a:ext cx="364202" cy="307777"/>
+          </a:xfrm>
+          <a:prstGeom prst="rect">
+            <a:avLst/>
+          </a:prstGeom>
+          <a:noFill/>
+        </p:spPr>
+        <p:txBody>
+          <a:bodyPr wrap="none" rtlCol="0">
+            <a:spAutoFit/>
+          </a:bodyPr>
+          <a:lstStyle/>
+          <a:p>
+            <a:r>
+              <a:rPr lang="zh-CN" altLang="en-US" sz="1400"/>
+              <a:t>③</a:t>
+            </a:r>
+          </a:p>
+        </p:txBody>
+      </p:sp>
+      <p:sp>
+        <p:nvSpPr>
+          <p:cNvPr id="141" name="文本框 140">
+            <a:extLst>
+              <a:ext uri="{FF2B5EF4-FFF2-40B4-BE49-F238E27FC236}">
+                <a16:creationId xmlns:a16="http://schemas.microsoft.com/office/drawing/2014/main" id="{8B402B1F-9DC0-2674-E581-1B54729540A4}"/>
+              </a:ext>
+            </a:extLst>
+          </p:cNvPr>
+          <p:cNvSpPr txBox="1"/>
+          <p:nvPr/>
+        </p:nvSpPr>
+        <p:spPr>
+          <a:xfrm>
+            <a:off x="3184388" y="2691193"/>
+            <a:ext cx="364202" cy="307777"/>
+          </a:xfrm>
+          <a:prstGeom prst="rect">
+            <a:avLst/>
+          </a:prstGeom>
+          <a:noFill/>
+        </p:spPr>
+        <p:txBody>
+          <a:bodyPr wrap="none" rtlCol="0">
+            <a:spAutoFit/>
+          </a:bodyPr>
+          <a:lstStyle/>
+          <a:p>
+            <a:r>
+              <a:rPr lang="zh-CN" altLang="en-US" sz="1400"/>
+              <a:t>④</a:t>
+            </a:r>
+          </a:p>
+        </p:txBody>
+      </p:sp>
+    </p:spTree>
+    <p:extLst>
+      <p:ext uri="{BB962C8B-B14F-4D97-AF65-F5344CB8AC3E}">
+        <p14:creationId xmlns:p14="http://schemas.microsoft.com/office/powerpoint/2010/main" val="1830815851"/>
+      </p:ext>
+    </p:extLst>
+  </p:cSld>
+  <p:clrMapOvr>
+    <a:masterClrMapping/>
+  </p:clrMapOvr>
+</p:sld>
+</file>
+
+<file path=ppt/slides/slide19.xml><?xml version="1.0" encoding="utf-8"?>
+<p:sld xmlns:a="http://schemas.openxmlformats.org/drawingml/2006/main" xmlns:r="http://schemas.openxmlformats.org/officeDocument/2006/relationships" xmlns:p="http://schemas.openxmlformats.org/presentationml/2006/main">
+  <p:cSld>
+    <p:spTree>
+      <p:nvGrpSpPr>
+        <p:cNvPr id="1" name="">
+          <a:extLst>
+            <a:ext uri="{FF2B5EF4-FFF2-40B4-BE49-F238E27FC236}">
+              <a16:creationId xmlns:a16="http://schemas.microsoft.com/office/drawing/2014/main" id="{6103A6F9-4B7D-0679-8D7D-D60E62342D74}"/>
             </a:ext>
           </a:extLst>
         </p:cNvPr>
@@ -14921,7 +21116,7 @@
     </p:spTree>
     <p:extLst>
       <p:ext uri="{BB962C8B-B14F-4D97-AF65-F5344CB8AC3E}">
-        <p14:creationId xmlns:p14="http://schemas.microsoft.com/office/powerpoint/2010/main" val="3287285191"/>
+        <p14:creationId xmlns:p14="http://schemas.microsoft.com/office/powerpoint/2010/main" val="3537804454"/>
       </p:ext>
     </p:extLst>
   </p:cSld>
@@ -15956,6 +22151,150 @@
     <p:extLst>
       <p:ext uri="{BB962C8B-B14F-4D97-AF65-F5344CB8AC3E}">
         <p14:creationId xmlns:p14="http://schemas.microsoft.com/office/powerpoint/2010/main" val="3413113299"/>
+      </p:ext>
+    </p:extLst>
+  </p:cSld>
+  <p:clrMapOvr>
+    <a:masterClrMapping/>
+  </p:clrMapOvr>
+</p:sld>
+</file>
+
+<file path=ppt/slides/slide20.xml><?xml version="1.0" encoding="utf-8"?>
+<p:sld xmlns:a="http://schemas.openxmlformats.org/drawingml/2006/main" xmlns:r="http://schemas.openxmlformats.org/officeDocument/2006/relationships" xmlns:p="http://schemas.openxmlformats.org/presentationml/2006/main">
+  <p:cSld>
+    <p:spTree>
+      <p:nvGrpSpPr>
+        <p:cNvPr id="1" name="">
+          <a:extLst>
+            <a:ext uri="{FF2B5EF4-FFF2-40B4-BE49-F238E27FC236}">
+              <a16:creationId xmlns:a16="http://schemas.microsoft.com/office/drawing/2014/main" id="{9DB9390C-2CE2-DB41-A4E1-6A69CCCF9DD3}"/>
+            </a:ext>
+          </a:extLst>
+        </p:cNvPr>
+        <p:cNvGrpSpPr/>
+        <p:nvPr/>
+      </p:nvGrpSpPr>
+      <p:grpSpPr>
+        <a:xfrm>
+          <a:off x="0" y="0"/>
+          <a:ext cx="0" cy="0"/>
+          <a:chOff x="0" y="0"/>
+          <a:chExt cx="0" cy="0"/>
+        </a:xfrm>
+      </p:grpSpPr>
+    </p:spTree>
+    <p:extLst>
+      <p:ext uri="{BB962C8B-B14F-4D97-AF65-F5344CB8AC3E}">
+        <p14:creationId xmlns:p14="http://schemas.microsoft.com/office/powerpoint/2010/main" val="3519793534"/>
+      </p:ext>
+    </p:extLst>
+  </p:cSld>
+  <p:clrMapOvr>
+    <a:masterClrMapping/>
+  </p:clrMapOvr>
+</p:sld>
+</file>
+
+<file path=ppt/slides/slide21.xml><?xml version="1.0" encoding="utf-8"?>
+<p:sld xmlns:a="http://schemas.openxmlformats.org/drawingml/2006/main" xmlns:r="http://schemas.openxmlformats.org/officeDocument/2006/relationships" xmlns:p="http://schemas.openxmlformats.org/presentationml/2006/main">
+  <p:cSld>
+    <p:spTree>
+      <p:nvGrpSpPr>
+        <p:cNvPr id="1" name="">
+          <a:extLst>
+            <a:ext uri="{FF2B5EF4-FFF2-40B4-BE49-F238E27FC236}">
+              <a16:creationId xmlns:a16="http://schemas.microsoft.com/office/drawing/2014/main" id="{1DD5A92F-D53D-975F-FE77-9AB3146303B4}"/>
+            </a:ext>
+          </a:extLst>
+        </p:cNvPr>
+        <p:cNvGrpSpPr/>
+        <p:nvPr/>
+      </p:nvGrpSpPr>
+      <p:grpSpPr>
+        <a:xfrm>
+          <a:off x="0" y="0"/>
+          <a:ext cx="0" cy="0"/>
+          <a:chOff x="0" y="0"/>
+          <a:chExt cx="0" cy="0"/>
+        </a:xfrm>
+      </p:grpSpPr>
+    </p:spTree>
+    <p:extLst>
+      <p:ext uri="{BB962C8B-B14F-4D97-AF65-F5344CB8AC3E}">
+        <p14:creationId xmlns:p14="http://schemas.microsoft.com/office/powerpoint/2010/main" val="1013309240"/>
+      </p:ext>
+    </p:extLst>
+  </p:cSld>
+  <p:clrMapOvr>
+    <a:masterClrMapping/>
+  </p:clrMapOvr>
+</p:sld>
+</file>
+
+<file path=ppt/slides/slide22.xml><?xml version="1.0" encoding="utf-8"?>
+<p:sld xmlns:a="http://schemas.openxmlformats.org/drawingml/2006/main" xmlns:r="http://schemas.openxmlformats.org/officeDocument/2006/relationships" xmlns:p="http://schemas.openxmlformats.org/presentationml/2006/main">
+  <p:cSld>
+    <p:spTree>
+      <p:nvGrpSpPr>
+        <p:cNvPr id="1" name="">
+          <a:extLst>
+            <a:ext uri="{FF2B5EF4-FFF2-40B4-BE49-F238E27FC236}">
+              <a16:creationId xmlns:a16="http://schemas.microsoft.com/office/drawing/2014/main" id="{8170FBE0-89AB-28D9-22EF-C55DC5D5BD8C}"/>
+            </a:ext>
+          </a:extLst>
+        </p:cNvPr>
+        <p:cNvGrpSpPr/>
+        <p:nvPr/>
+      </p:nvGrpSpPr>
+      <p:grpSpPr>
+        <a:xfrm>
+          <a:off x="0" y="0"/>
+          <a:ext cx="0" cy="0"/>
+          <a:chOff x="0" y="0"/>
+          <a:chExt cx="0" cy="0"/>
+        </a:xfrm>
+      </p:grpSpPr>
+    </p:spTree>
+    <p:extLst>
+      <p:ext uri="{BB962C8B-B14F-4D97-AF65-F5344CB8AC3E}">
+        <p14:creationId xmlns:p14="http://schemas.microsoft.com/office/powerpoint/2010/main" val="2134879664"/>
+      </p:ext>
+    </p:extLst>
+  </p:cSld>
+  <p:clrMapOvr>
+    <a:masterClrMapping/>
+  </p:clrMapOvr>
+</p:sld>
+</file>
+
+<file path=ppt/slides/slide23.xml><?xml version="1.0" encoding="utf-8"?>
+<p:sld xmlns:a="http://schemas.openxmlformats.org/drawingml/2006/main" xmlns:r="http://schemas.openxmlformats.org/officeDocument/2006/relationships" xmlns:p="http://schemas.openxmlformats.org/presentationml/2006/main">
+  <p:cSld>
+    <p:spTree>
+      <p:nvGrpSpPr>
+        <p:cNvPr id="1" name="">
+          <a:extLst>
+            <a:ext uri="{FF2B5EF4-FFF2-40B4-BE49-F238E27FC236}">
+              <a16:creationId xmlns:a16="http://schemas.microsoft.com/office/drawing/2014/main" id="{90AE90DD-26AA-F232-A92A-35696F78B098}"/>
+            </a:ext>
+          </a:extLst>
+        </p:cNvPr>
+        <p:cNvGrpSpPr/>
+        <p:nvPr/>
+      </p:nvGrpSpPr>
+      <p:grpSpPr>
+        <a:xfrm>
+          <a:off x="0" y="0"/>
+          <a:ext cx="0" cy="0"/>
+          <a:chOff x="0" y="0"/>
+          <a:chExt cx="0" cy="0"/>
+        </a:xfrm>
+      </p:grpSpPr>
+    </p:spTree>
+    <p:extLst>
+      <p:ext uri="{BB962C8B-B14F-4D97-AF65-F5344CB8AC3E}">
+        <p14:creationId xmlns:p14="http://schemas.microsoft.com/office/powerpoint/2010/main" val="3287285191"/>
       </p:ext>
     </p:extLst>
   </p:cSld>

--- a/data_structure/assets/pics_and_ppts/ch4/画图用.pptx
+++ b/data_structure/assets/pics_and_ppts/ch4/画图用.pptx
@@ -5,7 +5,7 @@
     <p:sldMasterId id="2147483648" r:id="rId1"/>
   </p:sldMasterIdLst>
   <p:notesMasterIdLst>
-    <p:notesMasterId r:id="rId33"/>
+    <p:notesMasterId r:id="rId36"/>
   </p:notesMasterIdLst>
   <p:sldIdLst>
     <p:sldId id="256" r:id="rId2"/>
@@ -38,7 +38,10 @@
     <p:sldId id="285" r:id="rId29"/>
     <p:sldId id="281" r:id="rId30"/>
     <p:sldId id="282" r:id="rId31"/>
-    <p:sldId id="270" r:id="rId32"/>
+    <p:sldId id="287" r:id="rId32"/>
+    <p:sldId id="288" r:id="rId33"/>
+    <p:sldId id="289" r:id="rId34"/>
+    <p:sldId id="270" r:id="rId35"/>
   </p:sldIdLst>
   <p:sldSz cx="12192000" cy="6858000"/>
   <p:notesSz cx="6858000" cy="9144000"/>
@@ -227,7 +230,7 @@
           <a:p>
             <a:fld id="{4265347F-0490-42B1-9604-2668F30EEAC5}" type="datetimeFigureOut">
               <a:rPr lang="zh-CN" altLang="en-US" smtClean="0"/>
-              <a:t>2026/10/12</a:t>
+              <a:t>2026/10/13</a:t>
             </a:fld>
             <a:endParaRPr lang="zh-CN" altLang="en-US"/>
           </a:p>
@@ -725,7 +728,7 @@
           <a:p>
             <a:fld id="{0617A84F-C5EA-4D1F-9163-CC9D70D46673}" type="datetimeFigureOut">
               <a:rPr lang="zh-CN" altLang="en-US" smtClean="0"/>
-              <a:t>2026/10/12</a:t>
+              <a:t>2026/10/13</a:t>
             </a:fld>
             <a:endParaRPr lang="zh-CN" altLang="en-US"/>
           </a:p>
@@ -923,7 +926,7 @@
           <a:p>
             <a:fld id="{0617A84F-C5EA-4D1F-9163-CC9D70D46673}" type="datetimeFigureOut">
               <a:rPr lang="zh-CN" altLang="en-US" smtClean="0"/>
-              <a:t>2026/10/12</a:t>
+              <a:t>2026/10/13</a:t>
             </a:fld>
             <a:endParaRPr lang="zh-CN" altLang="en-US"/>
           </a:p>
@@ -1131,7 +1134,7 @@
           <a:p>
             <a:fld id="{0617A84F-C5EA-4D1F-9163-CC9D70D46673}" type="datetimeFigureOut">
               <a:rPr lang="zh-CN" altLang="en-US" smtClean="0"/>
-              <a:t>2026/10/12</a:t>
+              <a:t>2026/10/13</a:t>
             </a:fld>
             <a:endParaRPr lang="zh-CN" altLang="en-US"/>
           </a:p>
@@ -1329,7 +1332,7 @@
           <a:p>
             <a:fld id="{0617A84F-C5EA-4D1F-9163-CC9D70D46673}" type="datetimeFigureOut">
               <a:rPr lang="zh-CN" altLang="en-US" smtClean="0"/>
-              <a:t>2026/10/12</a:t>
+              <a:t>2026/10/13</a:t>
             </a:fld>
             <a:endParaRPr lang="zh-CN" altLang="en-US"/>
           </a:p>
@@ -1604,7 +1607,7 @@
           <a:p>
             <a:fld id="{0617A84F-C5EA-4D1F-9163-CC9D70D46673}" type="datetimeFigureOut">
               <a:rPr lang="zh-CN" altLang="en-US" smtClean="0"/>
-              <a:t>2026/10/12</a:t>
+              <a:t>2026/10/13</a:t>
             </a:fld>
             <a:endParaRPr lang="zh-CN" altLang="en-US"/>
           </a:p>
@@ -1869,7 +1872,7 @@
           <a:p>
             <a:fld id="{0617A84F-C5EA-4D1F-9163-CC9D70D46673}" type="datetimeFigureOut">
               <a:rPr lang="zh-CN" altLang="en-US" smtClean="0"/>
-              <a:t>2026/10/12</a:t>
+              <a:t>2026/10/13</a:t>
             </a:fld>
             <a:endParaRPr lang="zh-CN" altLang="en-US"/>
           </a:p>
@@ -2281,7 +2284,7 @@
           <a:p>
             <a:fld id="{0617A84F-C5EA-4D1F-9163-CC9D70D46673}" type="datetimeFigureOut">
               <a:rPr lang="zh-CN" altLang="en-US" smtClean="0"/>
-              <a:t>2026/10/12</a:t>
+              <a:t>2026/10/13</a:t>
             </a:fld>
             <a:endParaRPr lang="zh-CN" altLang="en-US"/>
           </a:p>
@@ -2422,7 +2425,7 @@
           <a:p>
             <a:fld id="{0617A84F-C5EA-4D1F-9163-CC9D70D46673}" type="datetimeFigureOut">
               <a:rPr lang="zh-CN" altLang="en-US" smtClean="0"/>
-              <a:t>2026/10/12</a:t>
+              <a:t>2026/10/13</a:t>
             </a:fld>
             <a:endParaRPr lang="zh-CN" altLang="en-US"/>
           </a:p>
@@ -2535,7 +2538,7 @@
           <a:p>
             <a:fld id="{0617A84F-C5EA-4D1F-9163-CC9D70D46673}" type="datetimeFigureOut">
               <a:rPr lang="zh-CN" altLang="en-US" smtClean="0"/>
-              <a:t>2026/10/12</a:t>
+              <a:t>2026/10/13</a:t>
             </a:fld>
             <a:endParaRPr lang="zh-CN" altLang="en-US"/>
           </a:p>
@@ -2846,7 +2849,7 @@
           <a:p>
             <a:fld id="{0617A84F-C5EA-4D1F-9163-CC9D70D46673}" type="datetimeFigureOut">
               <a:rPr lang="zh-CN" altLang="en-US" smtClean="0"/>
-              <a:t>2026/10/12</a:t>
+              <a:t>2026/10/13</a:t>
             </a:fld>
             <a:endParaRPr lang="zh-CN" altLang="en-US"/>
           </a:p>
@@ -3134,7 +3137,7 @@
           <a:p>
             <a:fld id="{0617A84F-C5EA-4D1F-9163-CC9D70D46673}" type="datetimeFigureOut">
               <a:rPr lang="zh-CN" altLang="en-US" smtClean="0"/>
-              <a:t>2026/10/12</a:t>
+              <a:t>2026/10/13</a:t>
             </a:fld>
             <a:endParaRPr lang="zh-CN" altLang="en-US"/>
           </a:p>
@@ -3375,7 +3378,7 @@
           <a:p>
             <a:fld id="{0617A84F-C5EA-4D1F-9163-CC9D70D46673}" type="datetimeFigureOut">
               <a:rPr lang="zh-CN" altLang="en-US" smtClean="0"/>
-              <a:t>2026/10/12</a:t>
+              <a:t>2026/10/13</a:t>
             </a:fld>
             <a:endParaRPr lang="zh-CN" altLang="en-US"/>
           </a:p>
@@ -43718,6 +43721,3594 @@
           <a:chExt cx="0" cy="0"/>
         </a:xfrm>
       </p:grpSpPr>
+      <p:sp>
+        <p:nvSpPr>
+          <p:cNvPr id="3" name="文本框 2">
+            <a:extLst>
+              <a:ext uri="{FF2B5EF4-FFF2-40B4-BE49-F238E27FC236}">
+                <a16:creationId xmlns:a16="http://schemas.microsoft.com/office/drawing/2014/main" id="{16235D9F-4B63-826E-850E-6D061016384F}"/>
+              </a:ext>
+            </a:extLst>
+          </p:cNvPr>
+          <p:cNvSpPr txBox="1"/>
+          <p:nvPr/>
+        </p:nvSpPr>
+        <p:spPr>
+          <a:xfrm>
+            <a:off x="2049517" y="545037"/>
+            <a:ext cx="428322" cy="369332"/>
+          </a:xfrm>
+          <a:prstGeom prst="rect">
+            <a:avLst/>
+          </a:prstGeom>
+          <a:noFill/>
+        </p:spPr>
+        <p:txBody>
+          <a:bodyPr wrap="none" rtlCol="0">
+            <a:spAutoFit/>
+          </a:bodyPr>
+          <a:lstStyle/>
+          <a:p>
+            <a:r>
+              <a:rPr lang="en-US" altLang="zh-CN"/>
+              <a:t>15</a:t>
+            </a:r>
+            <a:endParaRPr lang="zh-CN" altLang="en-US"/>
+          </a:p>
+        </p:txBody>
+      </p:sp>
+      <p:sp>
+        <p:nvSpPr>
+          <p:cNvPr id="4" name="文本框 3">
+            <a:extLst>
+              <a:ext uri="{FF2B5EF4-FFF2-40B4-BE49-F238E27FC236}">
+                <a16:creationId xmlns:a16="http://schemas.microsoft.com/office/drawing/2014/main" id="{FB47317E-2661-1CDC-0B29-3CA45EE82460}"/>
+              </a:ext>
+            </a:extLst>
+          </p:cNvPr>
+          <p:cNvSpPr txBox="1"/>
+          <p:nvPr/>
+        </p:nvSpPr>
+        <p:spPr>
+          <a:xfrm>
+            <a:off x="1405384" y="1162144"/>
+            <a:ext cx="428322" cy="369332"/>
+          </a:xfrm>
+          <a:prstGeom prst="rect">
+            <a:avLst/>
+          </a:prstGeom>
+          <a:noFill/>
+        </p:spPr>
+        <p:txBody>
+          <a:bodyPr wrap="none" rtlCol="0">
+            <a:spAutoFit/>
+          </a:bodyPr>
+          <a:lstStyle/>
+          <a:p>
+            <a:r>
+              <a:rPr lang="en-US" altLang="zh-CN"/>
+              <a:t>13</a:t>
+            </a:r>
+            <a:endParaRPr lang="zh-CN" altLang="en-US"/>
+          </a:p>
+        </p:txBody>
+      </p:sp>
+      <p:sp>
+        <p:nvSpPr>
+          <p:cNvPr id="5" name="文本框 4">
+            <a:extLst>
+              <a:ext uri="{FF2B5EF4-FFF2-40B4-BE49-F238E27FC236}">
+                <a16:creationId xmlns:a16="http://schemas.microsoft.com/office/drawing/2014/main" id="{B9A88C8C-8B0B-7107-C382-E64374148367}"/>
+              </a:ext>
+            </a:extLst>
+          </p:cNvPr>
+          <p:cNvSpPr txBox="1"/>
+          <p:nvPr/>
+        </p:nvSpPr>
+        <p:spPr>
+          <a:xfrm>
+            <a:off x="2666624" y="1162144"/>
+            <a:ext cx="306494" cy="369332"/>
+          </a:xfrm>
+          <a:prstGeom prst="rect">
+            <a:avLst/>
+          </a:prstGeom>
+          <a:noFill/>
+        </p:spPr>
+        <p:txBody>
+          <a:bodyPr wrap="none" rtlCol="0">
+            <a:spAutoFit/>
+          </a:bodyPr>
+          <a:lstStyle/>
+          <a:p>
+            <a:r>
+              <a:rPr lang="en-US" altLang="zh-CN"/>
+              <a:t>7</a:t>
+            </a:r>
+            <a:endParaRPr lang="zh-CN" altLang="en-US"/>
+          </a:p>
+        </p:txBody>
+      </p:sp>
+      <p:sp>
+        <p:nvSpPr>
+          <p:cNvPr id="6" name="文本框 5">
+            <a:extLst>
+              <a:ext uri="{FF2B5EF4-FFF2-40B4-BE49-F238E27FC236}">
+                <a16:creationId xmlns:a16="http://schemas.microsoft.com/office/drawing/2014/main" id="{B02364CB-820F-BCA6-83EB-660F0C4E5068}"/>
+              </a:ext>
+            </a:extLst>
+          </p:cNvPr>
+          <p:cNvSpPr txBox="1"/>
+          <p:nvPr/>
+        </p:nvSpPr>
+        <p:spPr>
+          <a:xfrm>
+            <a:off x="977062" y="1833305"/>
+            <a:ext cx="428322" cy="369332"/>
+          </a:xfrm>
+          <a:prstGeom prst="rect">
+            <a:avLst/>
+          </a:prstGeom>
+          <a:noFill/>
+        </p:spPr>
+        <p:txBody>
+          <a:bodyPr wrap="none" rtlCol="0">
+            <a:spAutoFit/>
+          </a:bodyPr>
+          <a:lstStyle/>
+          <a:p>
+            <a:r>
+              <a:rPr lang="en-US" altLang="zh-CN"/>
+              <a:t>12</a:t>
+            </a:r>
+            <a:endParaRPr lang="zh-CN" altLang="en-US"/>
+          </a:p>
+        </p:txBody>
+      </p:sp>
+      <p:cxnSp>
+        <p:nvCxnSpPr>
+          <p:cNvPr id="8" name="直接连接符 7">
+            <a:extLst>
+              <a:ext uri="{FF2B5EF4-FFF2-40B4-BE49-F238E27FC236}">
+                <a16:creationId xmlns:a16="http://schemas.microsoft.com/office/drawing/2014/main" id="{D2BFD9A1-F3AD-F58D-D763-D94C1525CB98}"/>
+              </a:ext>
+            </a:extLst>
+          </p:cNvPr>
+          <p:cNvCxnSpPr>
+            <a:stCxn id="3" idx="2"/>
+            <a:endCxn id="4" idx="0"/>
+          </p:cNvCxnSpPr>
+          <p:nvPr/>
+        </p:nvCxnSpPr>
+        <p:spPr>
+          <a:xfrm flipH="1">
+            <a:off x="1619545" y="914369"/>
+            <a:ext cx="644133" cy="247775"/>
+          </a:xfrm>
+          <a:prstGeom prst="line">
+            <a:avLst/>
+          </a:prstGeom>
+        </p:spPr>
+        <p:style>
+          <a:lnRef idx="2">
+            <a:schemeClr val="dk1"/>
+          </a:lnRef>
+          <a:fillRef idx="0">
+            <a:schemeClr val="dk1"/>
+          </a:fillRef>
+          <a:effectRef idx="1">
+            <a:schemeClr val="dk1"/>
+          </a:effectRef>
+          <a:fontRef idx="minor">
+            <a:schemeClr val="tx1"/>
+          </a:fontRef>
+        </p:style>
+      </p:cxnSp>
+      <p:cxnSp>
+        <p:nvCxnSpPr>
+          <p:cNvPr id="9" name="直接连接符 8">
+            <a:extLst>
+              <a:ext uri="{FF2B5EF4-FFF2-40B4-BE49-F238E27FC236}">
+                <a16:creationId xmlns:a16="http://schemas.microsoft.com/office/drawing/2014/main" id="{305416AF-A39E-4070-D849-FBE90A9CD2F9}"/>
+              </a:ext>
+            </a:extLst>
+          </p:cNvPr>
+          <p:cNvCxnSpPr>
+            <a:cxnSpLocks/>
+            <a:stCxn id="3" idx="2"/>
+            <a:endCxn id="5" idx="0"/>
+          </p:cNvCxnSpPr>
+          <p:nvPr/>
+        </p:nvCxnSpPr>
+        <p:spPr>
+          <a:xfrm>
+            <a:off x="2263678" y="914369"/>
+            <a:ext cx="556193" cy="247775"/>
+          </a:xfrm>
+          <a:prstGeom prst="line">
+            <a:avLst/>
+          </a:prstGeom>
+        </p:spPr>
+        <p:style>
+          <a:lnRef idx="2">
+            <a:schemeClr val="dk1"/>
+          </a:lnRef>
+          <a:fillRef idx="0">
+            <a:schemeClr val="dk1"/>
+          </a:fillRef>
+          <a:effectRef idx="1">
+            <a:schemeClr val="dk1"/>
+          </a:effectRef>
+          <a:fontRef idx="minor">
+            <a:schemeClr val="tx1"/>
+          </a:fontRef>
+        </p:style>
+      </p:cxnSp>
+      <p:cxnSp>
+        <p:nvCxnSpPr>
+          <p:cNvPr id="12" name="直接连接符 11">
+            <a:extLst>
+              <a:ext uri="{FF2B5EF4-FFF2-40B4-BE49-F238E27FC236}">
+                <a16:creationId xmlns:a16="http://schemas.microsoft.com/office/drawing/2014/main" id="{807DA2E7-FBCF-4CED-6F2F-71EE5FAE0A58}"/>
+              </a:ext>
+            </a:extLst>
+          </p:cNvPr>
+          <p:cNvCxnSpPr>
+            <a:cxnSpLocks/>
+            <a:stCxn id="4" idx="2"/>
+            <a:endCxn id="6" idx="0"/>
+          </p:cNvCxnSpPr>
+          <p:nvPr/>
+        </p:nvCxnSpPr>
+        <p:spPr>
+          <a:xfrm flipH="1">
+            <a:off x="1191223" y="1531476"/>
+            <a:ext cx="428322" cy="301829"/>
+          </a:xfrm>
+          <a:prstGeom prst="line">
+            <a:avLst/>
+          </a:prstGeom>
+        </p:spPr>
+        <p:style>
+          <a:lnRef idx="2">
+            <a:schemeClr val="dk1"/>
+          </a:lnRef>
+          <a:fillRef idx="0">
+            <a:schemeClr val="dk1"/>
+          </a:fillRef>
+          <a:effectRef idx="1">
+            <a:schemeClr val="dk1"/>
+          </a:effectRef>
+          <a:fontRef idx="minor">
+            <a:schemeClr val="tx1"/>
+          </a:fontRef>
+        </p:style>
+      </p:cxnSp>
+      <p:sp>
+        <p:nvSpPr>
+          <p:cNvPr id="15" name="文本框 14">
+            <a:extLst>
+              <a:ext uri="{FF2B5EF4-FFF2-40B4-BE49-F238E27FC236}">
+                <a16:creationId xmlns:a16="http://schemas.microsoft.com/office/drawing/2014/main" id="{5B599DA0-A35F-AFF4-FC6A-1392A68C012B}"/>
+              </a:ext>
+            </a:extLst>
+          </p:cNvPr>
+          <p:cNvSpPr txBox="1"/>
+          <p:nvPr/>
+        </p:nvSpPr>
+        <p:spPr>
+          <a:xfrm>
+            <a:off x="4577814" y="545037"/>
+            <a:ext cx="428322" cy="369332"/>
+          </a:xfrm>
+          <a:prstGeom prst="rect">
+            <a:avLst/>
+          </a:prstGeom>
+          <a:noFill/>
+        </p:spPr>
+        <p:txBody>
+          <a:bodyPr wrap="none" rtlCol="0">
+            <a:spAutoFit/>
+          </a:bodyPr>
+          <a:lstStyle/>
+          <a:p>
+            <a:r>
+              <a:rPr lang="en-US" altLang="zh-CN"/>
+              <a:t>22</a:t>
+            </a:r>
+            <a:endParaRPr lang="zh-CN" altLang="en-US"/>
+          </a:p>
+        </p:txBody>
+      </p:sp>
+      <p:sp>
+        <p:nvSpPr>
+          <p:cNvPr id="16" name="文本框 15">
+            <a:extLst>
+              <a:ext uri="{FF2B5EF4-FFF2-40B4-BE49-F238E27FC236}">
+                <a16:creationId xmlns:a16="http://schemas.microsoft.com/office/drawing/2014/main" id="{27CB3209-1650-FCC6-AC39-77A32EF2B96A}"/>
+              </a:ext>
+            </a:extLst>
+          </p:cNvPr>
+          <p:cNvSpPr txBox="1"/>
+          <p:nvPr/>
+        </p:nvSpPr>
+        <p:spPr>
+          <a:xfrm>
+            <a:off x="3933681" y="1162144"/>
+            <a:ext cx="428322" cy="369332"/>
+          </a:xfrm>
+          <a:prstGeom prst="rect">
+            <a:avLst/>
+          </a:prstGeom>
+          <a:noFill/>
+        </p:spPr>
+        <p:txBody>
+          <a:bodyPr wrap="none" rtlCol="0">
+            <a:spAutoFit/>
+          </a:bodyPr>
+          <a:lstStyle/>
+          <a:p>
+            <a:r>
+              <a:rPr lang="en-US" altLang="zh-CN"/>
+              <a:t>23</a:t>
+            </a:r>
+            <a:endParaRPr lang="zh-CN" altLang="en-US"/>
+          </a:p>
+        </p:txBody>
+      </p:sp>
+      <p:sp>
+        <p:nvSpPr>
+          <p:cNvPr id="17" name="文本框 16">
+            <a:extLst>
+              <a:ext uri="{FF2B5EF4-FFF2-40B4-BE49-F238E27FC236}">
+                <a16:creationId xmlns:a16="http://schemas.microsoft.com/office/drawing/2014/main" id="{45B35E7F-CEC9-3A49-79C7-AFCBAB92D66D}"/>
+              </a:ext>
+            </a:extLst>
+          </p:cNvPr>
+          <p:cNvSpPr txBox="1"/>
+          <p:nvPr/>
+        </p:nvSpPr>
+        <p:spPr>
+          <a:xfrm>
+            <a:off x="5194921" y="1162144"/>
+            <a:ext cx="428322" cy="369332"/>
+          </a:xfrm>
+          <a:prstGeom prst="rect">
+            <a:avLst/>
+          </a:prstGeom>
+          <a:noFill/>
+        </p:spPr>
+        <p:txBody>
+          <a:bodyPr wrap="none" rtlCol="0">
+            <a:spAutoFit/>
+          </a:bodyPr>
+          <a:lstStyle/>
+          <a:p>
+            <a:r>
+              <a:rPr lang="en-US" altLang="zh-CN"/>
+              <a:t>33</a:t>
+            </a:r>
+            <a:endParaRPr lang="zh-CN" altLang="en-US"/>
+          </a:p>
+        </p:txBody>
+      </p:sp>
+      <p:sp>
+        <p:nvSpPr>
+          <p:cNvPr id="18" name="文本框 17">
+            <a:extLst>
+              <a:ext uri="{FF2B5EF4-FFF2-40B4-BE49-F238E27FC236}">
+                <a16:creationId xmlns:a16="http://schemas.microsoft.com/office/drawing/2014/main" id="{060DB2C2-DE03-4F60-E208-AE53B5E5955D}"/>
+              </a:ext>
+            </a:extLst>
+          </p:cNvPr>
+          <p:cNvSpPr txBox="1"/>
+          <p:nvPr/>
+        </p:nvSpPr>
+        <p:spPr>
+          <a:xfrm>
+            <a:off x="3505359" y="1833305"/>
+            <a:ext cx="428322" cy="369332"/>
+          </a:xfrm>
+          <a:prstGeom prst="rect">
+            <a:avLst/>
+          </a:prstGeom>
+          <a:noFill/>
+        </p:spPr>
+        <p:txBody>
+          <a:bodyPr wrap="none" rtlCol="0">
+            <a:spAutoFit/>
+          </a:bodyPr>
+          <a:lstStyle/>
+          <a:p>
+            <a:r>
+              <a:rPr lang="en-US" altLang="zh-CN"/>
+              <a:t>55</a:t>
+            </a:r>
+            <a:endParaRPr lang="zh-CN" altLang="en-US"/>
+          </a:p>
+        </p:txBody>
+      </p:sp>
+      <p:cxnSp>
+        <p:nvCxnSpPr>
+          <p:cNvPr id="19" name="直接连接符 18">
+            <a:extLst>
+              <a:ext uri="{FF2B5EF4-FFF2-40B4-BE49-F238E27FC236}">
+                <a16:creationId xmlns:a16="http://schemas.microsoft.com/office/drawing/2014/main" id="{A38D13EF-01B4-F12A-E6FA-6EF7BD3527CF}"/>
+              </a:ext>
+            </a:extLst>
+          </p:cNvPr>
+          <p:cNvCxnSpPr>
+            <a:stCxn id="15" idx="2"/>
+            <a:endCxn id="16" idx="0"/>
+          </p:cNvCxnSpPr>
+          <p:nvPr/>
+        </p:nvCxnSpPr>
+        <p:spPr>
+          <a:xfrm flipH="1">
+            <a:off x="4147842" y="914369"/>
+            <a:ext cx="644133" cy="247775"/>
+          </a:xfrm>
+          <a:prstGeom prst="line">
+            <a:avLst/>
+          </a:prstGeom>
+        </p:spPr>
+        <p:style>
+          <a:lnRef idx="2">
+            <a:schemeClr val="dk1"/>
+          </a:lnRef>
+          <a:fillRef idx="0">
+            <a:schemeClr val="dk1"/>
+          </a:fillRef>
+          <a:effectRef idx="1">
+            <a:schemeClr val="dk1"/>
+          </a:effectRef>
+          <a:fontRef idx="minor">
+            <a:schemeClr val="tx1"/>
+          </a:fontRef>
+        </p:style>
+      </p:cxnSp>
+      <p:cxnSp>
+        <p:nvCxnSpPr>
+          <p:cNvPr id="20" name="直接连接符 19">
+            <a:extLst>
+              <a:ext uri="{FF2B5EF4-FFF2-40B4-BE49-F238E27FC236}">
+                <a16:creationId xmlns:a16="http://schemas.microsoft.com/office/drawing/2014/main" id="{0985126F-38E4-A624-926E-AC99004A9250}"/>
+              </a:ext>
+            </a:extLst>
+          </p:cNvPr>
+          <p:cNvCxnSpPr>
+            <a:cxnSpLocks/>
+            <a:stCxn id="15" idx="2"/>
+            <a:endCxn id="17" idx="0"/>
+          </p:cNvCxnSpPr>
+          <p:nvPr/>
+        </p:nvCxnSpPr>
+        <p:spPr>
+          <a:xfrm>
+            <a:off x="4791975" y="914369"/>
+            <a:ext cx="617107" cy="247775"/>
+          </a:xfrm>
+          <a:prstGeom prst="line">
+            <a:avLst/>
+          </a:prstGeom>
+        </p:spPr>
+        <p:style>
+          <a:lnRef idx="2">
+            <a:schemeClr val="dk1"/>
+          </a:lnRef>
+          <a:fillRef idx="0">
+            <a:schemeClr val="dk1"/>
+          </a:fillRef>
+          <a:effectRef idx="1">
+            <a:schemeClr val="dk1"/>
+          </a:effectRef>
+          <a:fontRef idx="minor">
+            <a:schemeClr val="tx1"/>
+          </a:fontRef>
+        </p:style>
+      </p:cxnSp>
+      <p:cxnSp>
+        <p:nvCxnSpPr>
+          <p:cNvPr id="21" name="直接连接符 20">
+            <a:extLst>
+              <a:ext uri="{FF2B5EF4-FFF2-40B4-BE49-F238E27FC236}">
+                <a16:creationId xmlns:a16="http://schemas.microsoft.com/office/drawing/2014/main" id="{7409742B-655D-CA28-5CE3-7C5C251AB755}"/>
+              </a:ext>
+            </a:extLst>
+          </p:cNvPr>
+          <p:cNvCxnSpPr>
+            <a:cxnSpLocks/>
+            <a:stCxn id="16" idx="2"/>
+            <a:endCxn id="18" idx="0"/>
+          </p:cNvCxnSpPr>
+          <p:nvPr/>
+        </p:nvCxnSpPr>
+        <p:spPr>
+          <a:xfrm flipH="1">
+            <a:off x="3719520" y="1531476"/>
+            <a:ext cx="428322" cy="301829"/>
+          </a:xfrm>
+          <a:prstGeom prst="line">
+            <a:avLst/>
+          </a:prstGeom>
+        </p:spPr>
+        <p:style>
+          <a:lnRef idx="2">
+            <a:schemeClr val="dk1"/>
+          </a:lnRef>
+          <a:fillRef idx="0">
+            <a:schemeClr val="dk1"/>
+          </a:fillRef>
+          <a:effectRef idx="1">
+            <a:schemeClr val="dk1"/>
+          </a:effectRef>
+          <a:fontRef idx="minor">
+            <a:schemeClr val="tx1"/>
+          </a:fontRef>
+        </p:style>
+      </p:cxnSp>
+      <p:sp>
+        <p:nvSpPr>
+          <p:cNvPr id="23" name="文本框 22">
+            <a:extLst>
+              <a:ext uri="{FF2B5EF4-FFF2-40B4-BE49-F238E27FC236}">
+                <a16:creationId xmlns:a16="http://schemas.microsoft.com/office/drawing/2014/main" id="{1C1387DA-57AD-306A-3AF7-C9230EFD1122}"/>
+              </a:ext>
+            </a:extLst>
+          </p:cNvPr>
+          <p:cNvSpPr txBox="1"/>
+          <p:nvPr/>
+        </p:nvSpPr>
+        <p:spPr>
+          <a:xfrm>
+            <a:off x="4255747" y="1833305"/>
+            <a:ext cx="428322" cy="369332"/>
+          </a:xfrm>
+          <a:prstGeom prst="rect">
+            <a:avLst/>
+          </a:prstGeom>
+          <a:noFill/>
+        </p:spPr>
+        <p:txBody>
+          <a:bodyPr wrap="none" rtlCol="0">
+            <a:spAutoFit/>
+          </a:bodyPr>
+          <a:lstStyle/>
+          <a:p>
+            <a:r>
+              <a:rPr lang="en-US" altLang="zh-CN"/>
+              <a:t>70</a:t>
+            </a:r>
+            <a:endParaRPr lang="zh-CN" altLang="en-US"/>
+          </a:p>
+        </p:txBody>
+      </p:sp>
+      <p:sp>
+        <p:nvSpPr>
+          <p:cNvPr id="25" name="文本框 24">
+            <a:extLst>
+              <a:ext uri="{FF2B5EF4-FFF2-40B4-BE49-F238E27FC236}">
+                <a16:creationId xmlns:a16="http://schemas.microsoft.com/office/drawing/2014/main" id="{DDE2ADB0-DCDA-3482-C4D5-7AA6CD5574C2}"/>
+              </a:ext>
+            </a:extLst>
+          </p:cNvPr>
+          <p:cNvSpPr txBox="1"/>
+          <p:nvPr/>
+        </p:nvSpPr>
+        <p:spPr>
+          <a:xfrm>
+            <a:off x="4937018" y="1833305"/>
+            <a:ext cx="428322" cy="369332"/>
+          </a:xfrm>
+          <a:prstGeom prst="rect">
+            <a:avLst/>
+          </a:prstGeom>
+          <a:noFill/>
+        </p:spPr>
+        <p:txBody>
+          <a:bodyPr wrap="none" rtlCol="0">
+            <a:spAutoFit/>
+          </a:bodyPr>
+          <a:lstStyle/>
+          <a:p>
+            <a:r>
+              <a:rPr lang="en-US" altLang="zh-CN"/>
+              <a:t>12</a:t>
+            </a:r>
+            <a:endParaRPr lang="zh-CN" altLang="en-US"/>
+          </a:p>
+        </p:txBody>
+      </p:sp>
+      <p:cxnSp>
+        <p:nvCxnSpPr>
+          <p:cNvPr id="26" name="直接连接符 25">
+            <a:extLst>
+              <a:ext uri="{FF2B5EF4-FFF2-40B4-BE49-F238E27FC236}">
+                <a16:creationId xmlns:a16="http://schemas.microsoft.com/office/drawing/2014/main" id="{F53D8EBA-ED2C-97BA-C1E5-498EF5F1EBBD}"/>
+              </a:ext>
+            </a:extLst>
+          </p:cNvPr>
+          <p:cNvCxnSpPr>
+            <a:cxnSpLocks/>
+            <a:stCxn id="16" idx="2"/>
+            <a:endCxn id="23" idx="0"/>
+          </p:cNvCxnSpPr>
+          <p:nvPr/>
+        </p:nvCxnSpPr>
+        <p:spPr>
+          <a:xfrm>
+            <a:off x="4147842" y="1531476"/>
+            <a:ext cx="322066" cy="301829"/>
+          </a:xfrm>
+          <a:prstGeom prst="line">
+            <a:avLst/>
+          </a:prstGeom>
+        </p:spPr>
+        <p:style>
+          <a:lnRef idx="2">
+            <a:schemeClr val="dk1"/>
+          </a:lnRef>
+          <a:fillRef idx="0">
+            <a:schemeClr val="dk1"/>
+          </a:fillRef>
+          <a:effectRef idx="1">
+            <a:schemeClr val="dk1"/>
+          </a:effectRef>
+          <a:fontRef idx="minor">
+            <a:schemeClr val="tx1"/>
+          </a:fontRef>
+        </p:style>
+      </p:cxnSp>
+      <p:cxnSp>
+        <p:nvCxnSpPr>
+          <p:cNvPr id="29" name="直接连接符 28">
+            <a:extLst>
+              <a:ext uri="{FF2B5EF4-FFF2-40B4-BE49-F238E27FC236}">
+                <a16:creationId xmlns:a16="http://schemas.microsoft.com/office/drawing/2014/main" id="{207291A8-8925-ECE4-DAA3-3E77D505A4F5}"/>
+              </a:ext>
+            </a:extLst>
+          </p:cNvPr>
+          <p:cNvCxnSpPr>
+            <a:cxnSpLocks/>
+            <a:stCxn id="17" idx="2"/>
+            <a:endCxn id="25" idx="0"/>
+          </p:cNvCxnSpPr>
+          <p:nvPr/>
+        </p:nvCxnSpPr>
+        <p:spPr>
+          <a:xfrm flipH="1">
+            <a:off x="5151179" y="1531476"/>
+            <a:ext cx="257903" cy="301829"/>
+          </a:xfrm>
+          <a:prstGeom prst="line">
+            <a:avLst/>
+          </a:prstGeom>
+        </p:spPr>
+        <p:style>
+          <a:lnRef idx="2">
+            <a:schemeClr val="dk1"/>
+          </a:lnRef>
+          <a:fillRef idx="0">
+            <a:schemeClr val="dk1"/>
+          </a:fillRef>
+          <a:effectRef idx="1">
+            <a:schemeClr val="dk1"/>
+          </a:effectRef>
+          <a:fontRef idx="minor">
+            <a:schemeClr val="tx1"/>
+          </a:fontRef>
+        </p:style>
+      </p:cxnSp>
+      <p:sp>
+        <p:nvSpPr>
+          <p:cNvPr id="32" name="文本框 31">
+            <a:extLst>
+              <a:ext uri="{FF2B5EF4-FFF2-40B4-BE49-F238E27FC236}">
+                <a16:creationId xmlns:a16="http://schemas.microsoft.com/office/drawing/2014/main" id="{36CB81EA-4BCE-6B41-E0E7-7C58154BEE1C}"/>
+              </a:ext>
+            </a:extLst>
+          </p:cNvPr>
+          <p:cNvSpPr txBox="1"/>
+          <p:nvPr/>
+        </p:nvSpPr>
+        <p:spPr>
+          <a:xfrm>
+            <a:off x="7106111" y="545037"/>
+            <a:ext cx="428322" cy="369332"/>
+          </a:xfrm>
+          <a:prstGeom prst="rect">
+            <a:avLst/>
+          </a:prstGeom>
+          <a:noFill/>
+        </p:spPr>
+        <p:txBody>
+          <a:bodyPr wrap="none" rtlCol="0">
+            <a:spAutoFit/>
+          </a:bodyPr>
+          <a:lstStyle/>
+          <a:p>
+            <a:r>
+              <a:rPr lang="en-US" altLang="zh-CN"/>
+              <a:t>30</a:t>
+            </a:r>
+            <a:endParaRPr lang="zh-CN" altLang="en-US"/>
+          </a:p>
+        </p:txBody>
+      </p:sp>
+      <p:sp>
+        <p:nvSpPr>
+          <p:cNvPr id="33" name="文本框 32">
+            <a:extLst>
+              <a:ext uri="{FF2B5EF4-FFF2-40B4-BE49-F238E27FC236}">
+                <a16:creationId xmlns:a16="http://schemas.microsoft.com/office/drawing/2014/main" id="{5F32E6A2-DD2A-0735-81F8-862FA255EDD6}"/>
+              </a:ext>
+            </a:extLst>
+          </p:cNvPr>
+          <p:cNvSpPr txBox="1"/>
+          <p:nvPr/>
+        </p:nvSpPr>
+        <p:spPr>
+          <a:xfrm>
+            <a:off x="6461978" y="1162144"/>
+            <a:ext cx="428322" cy="369332"/>
+          </a:xfrm>
+          <a:prstGeom prst="rect">
+            <a:avLst/>
+          </a:prstGeom>
+          <a:noFill/>
+        </p:spPr>
+        <p:txBody>
+          <a:bodyPr wrap="none" rtlCol="0">
+            <a:spAutoFit/>
+          </a:bodyPr>
+          <a:lstStyle/>
+          <a:p>
+            <a:r>
+              <a:rPr lang="en-US" altLang="zh-CN"/>
+              <a:t>23</a:t>
+            </a:r>
+            <a:endParaRPr lang="zh-CN" altLang="en-US"/>
+          </a:p>
+        </p:txBody>
+      </p:sp>
+      <p:sp>
+        <p:nvSpPr>
+          <p:cNvPr id="34" name="文本框 33">
+            <a:extLst>
+              <a:ext uri="{FF2B5EF4-FFF2-40B4-BE49-F238E27FC236}">
+                <a16:creationId xmlns:a16="http://schemas.microsoft.com/office/drawing/2014/main" id="{2728C6C7-A43E-47BE-7DFD-5653132D27A1}"/>
+              </a:ext>
+            </a:extLst>
+          </p:cNvPr>
+          <p:cNvSpPr txBox="1"/>
+          <p:nvPr/>
+        </p:nvSpPr>
+        <p:spPr>
+          <a:xfrm>
+            <a:off x="7723218" y="1162144"/>
+            <a:ext cx="428322" cy="369332"/>
+          </a:xfrm>
+          <a:prstGeom prst="rect">
+            <a:avLst/>
+          </a:prstGeom>
+          <a:noFill/>
+        </p:spPr>
+        <p:txBody>
+          <a:bodyPr wrap="none" rtlCol="0">
+            <a:spAutoFit/>
+          </a:bodyPr>
+          <a:lstStyle/>
+          <a:p>
+            <a:r>
+              <a:rPr lang="en-US" altLang="zh-CN"/>
+              <a:t>17</a:t>
+            </a:r>
+            <a:endParaRPr lang="zh-CN" altLang="en-US"/>
+          </a:p>
+        </p:txBody>
+      </p:sp>
+      <p:sp>
+        <p:nvSpPr>
+          <p:cNvPr id="35" name="文本框 34">
+            <a:extLst>
+              <a:ext uri="{FF2B5EF4-FFF2-40B4-BE49-F238E27FC236}">
+                <a16:creationId xmlns:a16="http://schemas.microsoft.com/office/drawing/2014/main" id="{14DD6DC5-8DD8-EE3B-028A-302A6790818B}"/>
+              </a:ext>
+            </a:extLst>
+          </p:cNvPr>
+          <p:cNvSpPr txBox="1"/>
+          <p:nvPr/>
+        </p:nvSpPr>
+        <p:spPr>
+          <a:xfrm>
+            <a:off x="6033656" y="1833305"/>
+            <a:ext cx="306494" cy="369332"/>
+          </a:xfrm>
+          <a:prstGeom prst="rect">
+            <a:avLst/>
+          </a:prstGeom>
+          <a:noFill/>
+        </p:spPr>
+        <p:txBody>
+          <a:bodyPr wrap="none" rtlCol="0">
+            <a:spAutoFit/>
+          </a:bodyPr>
+          <a:lstStyle/>
+          <a:p>
+            <a:r>
+              <a:rPr lang="en-US" altLang="zh-CN"/>
+              <a:t>8</a:t>
+            </a:r>
+            <a:endParaRPr lang="zh-CN" altLang="en-US"/>
+          </a:p>
+        </p:txBody>
+      </p:sp>
+      <p:cxnSp>
+        <p:nvCxnSpPr>
+          <p:cNvPr id="36" name="直接连接符 35">
+            <a:extLst>
+              <a:ext uri="{FF2B5EF4-FFF2-40B4-BE49-F238E27FC236}">
+                <a16:creationId xmlns:a16="http://schemas.microsoft.com/office/drawing/2014/main" id="{F6AA57AF-5100-64BC-C397-2B075BE9DE0D}"/>
+              </a:ext>
+            </a:extLst>
+          </p:cNvPr>
+          <p:cNvCxnSpPr>
+            <a:stCxn id="32" idx="2"/>
+            <a:endCxn id="33" idx="0"/>
+          </p:cNvCxnSpPr>
+          <p:nvPr/>
+        </p:nvCxnSpPr>
+        <p:spPr>
+          <a:xfrm flipH="1">
+            <a:off x="6676139" y="914369"/>
+            <a:ext cx="644133" cy="247775"/>
+          </a:xfrm>
+          <a:prstGeom prst="line">
+            <a:avLst/>
+          </a:prstGeom>
+        </p:spPr>
+        <p:style>
+          <a:lnRef idx="2">
+            <a:schemeClr val="dk1"/>
+          </a:lnRef>
+          <a:fillRef idx="0">
+            <a:schemeClr val="dk1"/>
+          </a:fillRef>
+          <a:effectRef idx="1">
+            <a:schemeClr val="dk1"/>
+          </a:effectRef>
+          <a:fontRef idx="minor">
+            <a:schemeClr val="tx1"/>
+          </a:fontRef>
+        </p:style>
+      </p:cxnSp>
+      <p:cxnSp>
+        <p:nvCxnSpPr>
+          <p:cNvPr id="37" name="直接连接符 36">
+            <a:extLst>
+              <a:ext uri="{FF2B5EF4-FFF2-40B4-BE49-F238E27FC236}">
+                <a16:creationId xmlns:a16="http://schemas.microsoft.com/office/drawing/2014/main" id="{33F1A434-AE71-006D-7618-A2CAF26DD7FA}"/>
+              </a:ext>
+            </a:extLst>
+          </p:cNvPr>
+          <p:cNvCxnSpPr>
+            <a:cxnSpLocks/>
+            <a:stCxn id="32" idx="2"/>
+            <a:endCxn id="34" idx="0"/>
+          </p:cNvCxnSpPr>
+          <p:nvPr/>
+        </p:nvCxnSpPr>
+        <p:spPr>
+          <a:xfrm>
+            <a:off x="7320272" y="914369"/>
+            <a:ext cx="617107" cy="247775"/>
+          </a:xfrm>
+          <a:prstGeom prst="line">
+            <a:avLst/>
+          </a:prstGeom>
+        </p:spPr>
+        <p:style>
+          <a:lnRef idx="2">
+            <a:schemeClr val="dk1"/>
+          </a:lnRef>
+          <a:fillRef idx="0">
+            <a:schemeClr val="dk1"/>
+          </a:fillRef>
+          <a:effectRef idx="1">
+            <a:schemeClr val="dk1"/>
+          </a:effectRef>
+          <a:fontRef idx="minor">
+            <a:schemeClr val="tx1"/>
+          </a:fontRef>
+        </p:style>
+      </p:cxnSp>
+      <p:cxnSp>
+        <p:nvCxnSpPr>
+          <p:cNvPr id="38" name="直接连接符 37">
+            <a:extLst>
+              <a:ext uri="{FF2B5EF4-FFF2-40B4-BE49-F238E27FC236}">
+                <a16:creationId xmlns:a16="http://schemas.microsoft.com/office/drawing/2014/main" id="{3A02352C-7A9D-F0B9-ABF6-0FC8422F578C}"/>
+              </a:ext>
+            </a:extLst>
+          </p:cNvPr>
+          <p:cNvCxnSpPr>
+            <a:cxnSpLocks/>
+            <a:stCxn id="33" idx="2"/>
+            <a:endCxn id="35" idx="0"/>
+          </p:cNvCxnSpPr>
+          <p:nvPr/>
+        </p:nvCxnSpPr>
+        <p:spPr>
+          <a:xfrm flipH="1">
+            <a:off x="6186903" y="1531476"/>
+            <a:ext cx="489236" cy="301829"/>
+          </a:xfrm>
+          <a:prstGeom prst="line">
+            <a:avLst/>
+          </a:prstGeom>
+        </p:spPr>
+        <p:style>
+          <a:lnRef idx="2">
+            <a:schemeClr val="dk1"/>
+          </a:lnRef>
+          <a:fillRef idx="0">
+            <a:schemeClr val="dk1"/>
+          </a:fillRef>
+          <a:effectRef idx="1">
+            <a:schemeClr val="dk1"/>
+          </a:effectRef>
+          <a:fontRef idx="minor">
+            <a:schemeClr val="tx1"/>
+          </a:fontRef>
+        </p:style>
+      </p:cxnSp>
+      <p:sp>
+        <p:nvSpPr>
+          <p:cNvPr id="39" name="文本框 38">
+            <a:extLst>
+              <a:ext uri="{FF2B5EF4-FFF2-40B4-BE49-F238E27FC236}">
+                <a16:creationId xmlns:a16="http://schemas.microsoft.com/office/drawing/2014/main" id="{2C89B565-FE74-809C-3B56-ED311EA417EC}"/>
+              </a:ext>
+            </a:extLst>
+          </p:cNvPr>
+          <p:cNvSpPr txBox="1"/>
+          <p:nvPr/>
+        </p:nvSpPr>
+        <p:spPr>
+          <a:xfrm>
+            <a:off x="6784044" y="1833305"/>
+            <a:ext cx="428322" cy="369332"/>
+          </a:xfrm>
+          <a:prstGeom prst="rect">
+            <a:avLst/>
+          </a:prstGeom>
+          <a:noFill/>
+        </p:spPr>
+        <p:txBody>
+          <a:bodyPr wrap="none" rtlCol="0">
+            <a:spAutoFit/>
+          </a:bodyPr>
+          <a:lstStyle/>
+          <a:p>
+            <a:r>
+              <a:rPr lang="en-US" altLang="zh-CN"/>
+              <a:t>16</a:t>
+            </a:r>
+            <a:endParaRPr lang="zh-CN" altLang="en-US"/>
+          </a:p>
+        </p:txBody>
+      </p:sp>
+      <p:sp>
+        <p:nvSpPr>
+          <p:cNvPr id="40" name="文本框 39">
+            <a:extLst>
+              <a:ext uri="{FF2B5EF4-FFF2-40B4-BE49-F238E27FC236}">
+                <a16:creationId xmlns:a16="http://schemas.microsoft.com/office/drawing/2014/main" id="{29DBF750-E068-A086-CF48-10079B14BD6C}"/>
+              </a:ext>
+            </a:extLst>
+          </p:cNvPr>
+          <p:cNvSpPr txBox="1"/>
+          <p:nvPr/>
+        </p:nvSpPr>
+        <p:spPr>
+          <a:xfrm>
+            <a:off x="7465315" y="1833305"/>
+            <a:ext cx="428322" cy="369332"/>
+          </a:xfrm>
+          <a:prstGeom prst="rect">
+            <a:avLst/>
+          </a:prstGeom>
+          <a:noFill/>
+        </p:spPr>
+        <p:txBody>
+          <a:bodyPr wrap="none" rtlCol="0">
+            <a:spAutoFit/>
+          </a:bodyPr>
+          <a:lstStyle/>
+          <a:p>
+            <a:r>
+              <a:rPr lang="en-US" altLang="zh-CN"/>
+              <a:t>12</a:t>
+            </a:r>
+            <a:endParaRPr lang="zh-CN" altLang="en-US"/>
+          </a:p>
+        </p:txBody>
+      </p:sp>
+      <p:cxnSp>
+        <p:nvCxnSpPr>
+          <p:cNvPr id="41" name="直接连接符 40">
+            <a:extLst>
+              <a:ext uri="{FF2B5EF4-FFF2-40B4-BE49-F238E27FC236}">
+                <a16:creationId xmlns:a16="http://schemas.microsoft.com/office/drawing/2014/main" id="{951E84C3-BED8-A0E8-EA18-01E273E1D0B1}"/>
+              </a:ext>
+            </a:extLst>
+          </p:cNvPr>
+          <p:cNvCxnSpPr>
+            <a:cxnSpLocks/>
+            <a:stCxn id="33" idx="2"/>
+            <a:endCxn id="39" idx="0"/>
+          </p:cNvCxnSpPr>
+          <p:nvPr/>
+        </p:nvCxnSpPr>
+        <p:spPr>
+          <a:xfrm>
+            <a:off x="6676139" y="1531476"/>
+            <a:ext cx="322066" cy="301829"/>
+          </a:xfrm>
+          <a:prstGeom prst="line">
+            <a:avLst/>
+          </a:prstGeom>
+        </p:spPr>
+        <p:style>
+          <a:lnRef idx="2">
+            <a:schemeClr val="dk1"/>
+          </a:lnRef>
+          <a:fillRef idx="0">
+            <a:schemeClr val="dk1"/>
+          </a:fillRef>
+          <a:effectRef idx="1">
+            <a:schemeClr val="dk1"/>
+          </a:effectRef>
+          <a:fontRef idx="minor">
+            <a:schemeClr val="tx1"/>
+          </a:fontRef>
+        </p:style>
+      </p:cxnSp>
+      <p:cxnSp>
+        <p:nvCxnSpPr>
+          <p:cNvPr id="42" name="直接连接符 41">
+            <a:extLst>
+              <a:ext uri="{FF2B5EF4-FFF2-40B4-BE49-F238E27FC236}">
+                <a16:creationId xmlns:a16="http://schemas.microsoft.com/office/drawing/2014/main" id="{C440B228-B596-DBAC-C08E-6D524336A4FE}"/>
+              </a:ext>
+            </a:extLst>
+          </p:cNvPr>
+          <p:cNvCxnSpPr>
+            <a:cxnSpLocks/>
+            <a:stCxn id="34" idx="2"/>
+            <a:endCxn id="40" idx="0"/>
+          </p:cNvCxnSpPr>
+          <p:nvPr/>
+        </p:nvCxnSpPr>
+        <p:spPr>
+          <a:xfrm flipH="1">
+            <a:off x="7679476" y="1531476"/>
+            <a:ext cx="257903" cy="301829"/>
+          </a:xfrm>
+          <a:prstGeom prst="line">
+            <a:avLst/>
+          </a:prstGeom>
+        </p:spPr>
+        <p:style>
+          <a:lnRef idx="2">
+            <a:schemeClr val="dk1"/>
+          </a:lnRef>
+          <a:fillRef idx="0">
+            <a:schemeClr val="dk1"/>
+          </a:fillRef>
+          <a:effectRef idx="1">
+            <a:schemeClr val="dk1"/>
+          </a:effectRef>
+          <a:fontRef idx="minor">
+            <a:schemeClr val="tx1"/>
+          </a:fontRef>
+        </p:style>
+      </p:cxnSp>
+      <p:sp>
+        <p:nvSpPr>
+          <p:cNvPr id="43" name="文本框 42">
+            <a:extLst>
+              <a:ext uri="{FF2B5EF4-FFF2-40B4-BE49-F238E27FC236}">
+                <a16:creationId xmlns:a16="http://schemas.microsoft.com/office/drawing/2014/main" id="{CE461AA6-55CF-9C8B-AFA6-3E583D371FF4}"/>
+              </a:ext>
+            </a:extLst>
+          </p:cNvPr>
+          <p:cNvSpPr txBox="1"/>
+          <p:nvPr/>
+        </p:nvSpPr>
+        <p:spPr>
+          <a:xfrm>
+            <a:off x="9842752" y="545037"/>
+            <a:ext cx="428322" cy="369332"/>
+          </a:xfrm>
+          <a:prstGeom prst="rect">
+            <a:avLst/>
+          </a:prstGeom>
+          <a:noFill/>
+        </p:spPr>
+        <p:txBody>
+          <a:bodyPr wrap="none" rtlCol="0">
+            <a:spAutoFit/>
+          </a:bodyPr>
+          <a:lstStyle/>
+          <a:p>
+            <a:r>
+              <a:rPr lang="en-US" altLang="zh-CN"/>
+              <a:t>56</a:t>
+            </a:r>
+            <a:endParaRPr lang="zh-CN" altLang="en-US"/>
+          </a:p>
+        </p:txBody>
+      </p:sp>
+      <p:sp>
+        <p:nvSpPr>
+          <p:cNvPr id="44" name="文本框 43">
+            <a:extLst>
+              <a:ext uri="{FF2B5EF4-FFF2-40B4-BE49-F238E27FC236}">
+                <a16:creationId xmlns:a16="http://schemas.microsoft.com/office/drawing/2014/main" id="{0DAEED3C-D8FB-ADA9-9F53-0DBAAEC20509}"/>
+              </a:ext>
+            </a:extLst>
+          </p:cNvPr>
+          <p:cNvSpPr txBox="1"/>
+          <p:nvPr/>
+        </p:nvSpPr>
+        <p:spPr>
+          <a:xfrm>
+            <a:off x="9198619" y="1162144"/>
+            <a:ext cx="428322" cy="369332"/>
+          </a:xfrm>
+          <a:prstGeom prst="rect">
+            <a:avLst/>
+          </a:prstGeom>
+          <a:noFill/>
+        </p:spPr>
+        <p:txBody>
+          <a:bodyPr wrap="none" rtlCol="0">
+            <a:spAutoFit/>
+          </a:bodyPr>
+          <a:lstStyle/>
+          <a:p>
+            <a:r>
+              <a:rPr lang="en-US" altLang="zh-CN"/>
+              <a:t>38</a:t>
+            </a:r>
+            <a:endParaRPr lang="zh-CN" altLang="en-US"/>
+          </a:p>
+        </p:txBody>
+      </p:sp>
+      <p:sp>
+        <p:nvSpPr>
+          <p:cNvPr id="45" name="文本框 44">
+            <a:extLst>
+              <a:ext uri="{FF2B5EF4-FFF2-40B4-BE49-F238E27FC236}">
+                <a16:creationId xmlns:a16="http://schemas.microsoft.com/office/drawing/2014/main" id="{5596AFAC-269C-F52C-6828-97D9BBC0EDFA}"/>
+              </a:ext>
+            </a:extLst>
+          </p:cNvPr>
+          <p:cNvSpPr txBox="1"/>
+          <p:nvPr/>
+        </p:nvSpPr>
+        <p:spPr>
+          <a:xfrm>
+            <a:off x="10459859" y="1162144"/>
+            <a:ext cx="428322" cy="369332"/>
+          </a:xfrm>
+          <a:prstGeom prst="rect">
+            <a:avLst/>
+          </a:prstGeom>
+          <a:noFill/>
+        </p:spPr>
+        <p:txBody>
+          <a:bodyPr wrap="none" rtlCol="0">
+            <a:spAutoFit/>
+          </a:bodyPr>
+          <a:lstStyle/>
+          <a:p>
+            <a:r>
+              <a:rPr lang="en-US" altLang="zh-CN"/>
+              <a:t>40</a:t>
+            </a:r>
+            <a:endParaRPr lang="zh-CN" altLang="en-US"/>
+          </a:p>
+        </p:txBody>
+      </p:sp>
+      <p:sp>
+        <p:nvSpPr>
+          <p:cNvPr id="46" name="文本框 45">
+            <a:extLst>
+              <a:ext uri="{FF2B5EF4-FFF2-40B4-BE49-F238E27FC236}">
+                <a16:creationId xmlns:a16="http://schemas.microsoft.com/office/drawing/2014/main" id="{46874AB6-3829-EE9A-A8A8-42723B50F327}"/>
+              </a:ext>
+            </a:extLst>
+          </p:cNvPr>
+          <p:cNvSpPr txBox="1"/>
+          <p:nvPr/>
+        </p:nvSpPr>
+        <p:spPr>
+          <a:xfrm>
+            <a:off x="8770297" y="1833305"/>
+            <a:ext cx="428322" cy="369332"/>
+          </a:xfrm>
+          <a:prstGeom prst="rect">
+            <a:avLst/>
+          </a:prstGeom>
+          <a:noFill/>
+        </p:spPr>
+        <p:txBody>
+          <a:bodyPr wrap="none" rtlCol="0">
+            <a:spAutoFit/>
+          </a:bodyPr>
+          <a:lstStyle/>
+          <a:p>
+            <a:r>
+              <a:rPr lang="en-US" altLang="zh-CN"/>
+              <a:t>17</a:t>
+            </a:r>
+            <a:endParaRPr lang="zh-CN" altLang="en-US"/>
+          </a:p>
+        </p:txBody>
+      </p:sp>
+      <p:cxnSp>
+        <p:nvCxnSpPr>
+          <p:cNvPr id="47" name="直接连接符 46">
+            <a:extLst>
+              <a:ext uri="{FF2B5EF4-FFF2-40B4-BE49-F238E27FC236}">
+                <a16:creationId xmlns:a16="http://schemas.microsoft.com/office/drawing/2014/main" id="{B9F5E175-850C-BCEE-1E01-D95F59B7907A}"/>
+              </a:ext>
+            </a:extLst>
+          </p:cNvPr>
+          <p:cNvCxnSpPr>
+            <a:stCxn id="43" idx="2"/>
+            <a:endCxn id="44" idx="0"/>
+          </p:cNvCxnSpPr>
+          <p:nvPr/>
+        </p:nvCxnSpPr>
+        <p:spPr>
+          <a:xfrm flipH="1">
+            <a:off x="9412780" y="914369"/>
+            <a:ext cx="644133" cy="247775"/>
+          </a:xfrm>
+          <a:prstGeom prst="line">
+            <a:avLst/>
+          </a:prstGeom>
+        </p:spPr>
+        <p:style>
+          <a:lnRef idx="2">
+            <a:schemeClr val="dk1"/>
+          </a:lnRef>
+          <a:fillRef idx="0">
+            <a:schemeClr val="dk1"/>
+          </a:fillRef>
+          <a:effectRef idx="1">
+            <a:schemeClr val="dk1"/>
+          </a:effectRef>
+          <a:fontRef idx="minor">
+            <a:schemeClr val="tx1"/>
+          </a:fontRef>
+        </p:style>
+      </p:cxnSp>
+      <p:cxnSp>
+        <p:nvCxnSpPr>
+          <p:cNvPr id="48" name="直接连接符 47">
+            <a:extLst>
+              <a:ext uri="{FF2B5EF4-FFF2-40B4-BE49-F238E27FC236}">
+                <a16:creationId xmlns:a16="http://schemas.microsoft.com/office/drawing/2014/main" id="{9CEC6531-5F9F-B17C-45DE-09EF1BB7CB62}"/>
+              </a:ext>
+            </a:extLst>
+          </p:cNvPr>
+          <p:cNvCxnSpPr>
+            <a:cxnSpLocks/>
+            <a:stCxn id="43" idx="2"/>
+            <a:endCxn id="45" idx="0"/>
+          </p:cNvCxnSpPr>
+          <p:nvPr/>
+        </p:nvCxnSpPr>
+        <p:spPr>
+          <a:xfrm>
+            <a:off x="10056913" y="914369"/>
+            <a:ext cx="617107" cy="247775"/>
+          </a:xfrm>
+          <a:prstGeom prst="line">
+            <a:avLst/>
+          </a:prstGeom>
+        </p:spPr>
+        <p:style>
+          <a:lnRef idx="2">
+            <a:schemeClr val="dk1"/>
+          </a:lnRef>
+          <a:fillRef idx="0">
+            <a:schemeClr val="dk1"/>
+          </a:fillRef>
+          <a:effectRef idx="1">
+            <a:schemeClr val="dk1"/>
+          </a:effectRef>
+          <a:fontRef idx="minor">
+            <a:schemeClr val="tx1"/>
+          </a:fontRef>
+        </p:style>
+      </p:cxnSp>
+      <p:cxnSp>
+        <p:nvCxnSpPr>
+          <p:cNvPr id="49" name="直接连接符 48">
+            <a:extLst>
+              <a:ext uri="{FF2B5EF4-FFF2-40B4-BE49-F238E27FC236}">
+                <a16:creationId xmlns:a16="http://schemas.microsoft.com/office/drawing/2014/main" id="{9DC4B92E-0B62-53DE-A414-6ECAEB15DEEB}"/>
+              </a:ext>
+            </a:extLst>
+          </p:cNvPr>
+          <p:cNvCxnSpPr>
+            <a:cxnSpLocks/>
+            <a:stCxn id="44" idx="2"/>
+            <a:endCxn id="46" idx="0"/>
+          </p:cNvCxnSpPr>
+          <p:nvPr/>
+        </p:nvCxnSpPr>
+        <p:spPr>
+          <a:xfrm flipH="1">
+            <a:off x="8984458" y="1531476"/>
+            <a:ext cx="428322" cy="301829"/>
+          </a:xfrm>
+          <a:prstGeom prst="line">
+            <a:avLst/>
+          </a:prstGeom>
+        </p:spPr>
+        <p:style>
+          <a:lnRef idx="2">
+            <a:schemeClr val="dk1"/>
+          </a:lnRef>
+          <a:fillRef idx="0">
+            <a:schemeClr val="dk1"/>
+          </a:fillRef>
+          <a:effectRef idx="1">
+            <a:schemeClr val="dk1"/>
+          </a:effectRef>
+          <a:fontRef idx="minor">
+            <a:schemeClr val="tx1"/>
+          </a:fontRef>
+        </p:style>
+      </p:cxnSp>
+      <p:sp>
+        <p:nvSpPr>
+          <p:cNvPr id="50" name="文本框 49">
+            <a:extLst>
+              <a:ext uri="{FF2B5EF4-FFF2-40B4-BE49-F238E27FC236}">
+                <a16:creationId xmlns:a16="http://schemas.microsoft.com/office/drawing/2014/main" id="{1251A95A-730B-B9EA-0C45-5FB853427ADA}"/>
+              </a:ext>
+            </a:extLst>
+          </p:cNvPr>
+          <p:cNvSpPr txBox="1"/>
+          <p:nvPr/>
+        </p:nvSpPr>
+        <p:spPr>
+          <a:xfrm>
+            <a:off x="9520685" y="1833305"/>
+            <a:ext cx="428322" cy="369332"/>
+          </a:xfrm>
+          <a:prstGeom prst="rect">
+            <a:avLst/>
+          </a:prstGeom>
+          <a:noFill/>
+        </p:spPr>
+        <p:txBody>
+          <a:bodyPr wrap="none" rtlCol="0">
+            <a:spAutoFit/>
+          </a:bodyPr>
+          <a:lstStyle/>
+          <a:p>
+            <a:r>
+              <a:rPr lang="en-US" altLang="zh-CN"/>
+              <a:t>52</a:t>
+            </a:r>
+            <a:endParaRPr lang="zh-CN" altLang="en-US"/>
+          </a:p>
+        </p:txBody>
+      </p:sp>
+      <p:sp>
+        <p:nvSpPr>
+          <p:cNvPr id="51" name="文本框 50">
+            <a:extLst>
+              <a:ext uri="{FF2B5EF4-FFF2-40B4-BE49-F238E27FC236}">
+                <a16:creationId xmlns:a16="http://schemas.microsoft.com/office/drawing/2014/main" id="{7D8AA165-8961-4668-96BB-4568512FDCE6}"/>
+              </a:ext>
+            </a:extLst>
+          </p:cNvPr>
+          <p:cNvSpPr txBox="1"/>
+          <p:nvPr/>
+        </p:nvSpPr>
+        <p:spPr>
+          <a:xfrm>
+            <a:off x="10201956" y="1833305"/>
+            <a:ext cx="428322" cy="369332"/>
+          </a:xfrm>
+          <a:prstGeom prst="rect">
+            <a:avLst/>
+          </a:prstGeom>
+          <a:noFill/>
+        </p:spPr>
+        <p:txBody>
+          <a:bodyPr wrap="none" rtlCol="0">
+            <a:spAutoFit/>
+          </a:bodyPr>
+          <a:lstStyle/>
+          <a:p>
+            <a:r>
+              <a:rPr lang="en-US" altLang="zh-CN"/>
+              <a:t>60</a:t>
+            </a:r>
+            <a:endParaRPr lang="zh-CN" altLang="en-US"/>
+          </a:p>
+        </p:txBody>
+      </p:sp>
+      <p:cxnSp>
+        <p:nvCxnSpPr>
+          <p:cNvPr id="52" name="直接连接符 51">
+            <a:extLst>
+              <a:ext uri="{FF2B5EF4-FFF2-40B4-BE49-F238E27FC236}">
+                <a16:creationId xmlns:a16="http://schemas.microsoft.com/office/drawing/2014/main" id="{659B2C54-54C4-DD13-9973-E0D325F2A0EB}"/>
+              </a:ext>
+            </a:extLst>
+          </p:cNvPr>
+          <p:cNvCxnSpPr>
+            <a:cxnSpLocks/>
+            <a:stCxn id="44" idx="2"/>
+            <a:endCxn id="50" idx="0"/>
+          </p:cNvCxnSpPr>
+          <p:nvPr/>
+        </p:nvCxnSpPr>
+        <p:spPr>
+          <a:xfrm>
+            <a:off x="9412780" y="1531476"/>
+            <a:ext cx="322066" cy="301829"/>
+          </a:xfrm>
+          <a:prstGeom prst="line">
+            <a:avLst/>
+          </a:prstGeom>
+        </p:spPr>
+        <p:style>
+          <a:lnRef idx="2">
+            <a:schemeClr val="dk1"/>
+          </a:lnRef>
+          <a:fillRef idx="0">
+            <a:schemeClr val="dk1"/>
+          </a:fillRef>
+          <a:effectRef idx="1">
+            <a:schemeClr val="dk1"/>
+          </a:effectRef>
+          <a:fontRef idx="minor">
+            <a:schemeClr val="tx1"/>
+          </a:fontRef>
+        </p:style>
+      </p:cxnSp>
+      <p:cxnSp>
+        <p:nvCxnSpPr>
+          <p:cNvPr id="53" name="直接连接符 52">
+            <a:extLst>
+              <a:ext uri="{FF2B5EF4-FFF2-40B4-BE49-F238E27FC236}">
+                <a16:creationId xmlns:a16="http://schemas.microsoft.com/office/drawing/2014/main" id="{071F87E1-C899-E4E1-7773-D7F011AE7085}"/>
+              </a:ext>
+            </a:extLst>
+          </p:cNvPr>
+          <p:cNvCxnSpPr>
+            <a:cxnSpLocks/>
+            <a:stCxn id="45" idx="2"/>
+            <a:endCxn id="51" idx="0"/>
+          </p:cNvCxnSpPr>
+          <p:nvPr/>
+        </p:nvCxnSpPr>
+        <p:spPr>
+          <a:xfrm flipH="1">
+            <a:off x="10416117" y="1531476"/>
+            <a:ext cx="257903" cy="301829"/>
+          </a:xfrm>
+          <a:prstGeom prst="line">
+            <a:avLst/>
+          </a:prstGeom>
+        </p:spPr>
+        <p:style>
+          <a:lnRef idx="2">
+            <a:schemeClr val="dk1"/>
+          </a:lnRef>
+          <a:fillRef idx="0">
+            <a:schemeClr val="dk1"/>
+          </a:fillRef>
+          <a:effectRef idx="1">
+            <a:schemeClr val="dk1"/>
+          </a:effectRef>
+          <a:fontRef idx="minor">
+            <a:schemeClr val="tx1"/>
+          </a:fontRef>
+        </p:style>
+      </p:cxnSp>
+      <p:sp>
+        <p:nvSpPr>
+          <p:cNvPr id="57" name="文本框 56">
+            <a:extLst>
+              <a:ext uri="{FF2B5EF4-FFF2-40B4-BE49-F238E27FC236}">
+                <a16:creationId xmlns:a16="http://schemas.microsoft.com/office/drawing/2014/main" id="{A18D041E-1E27-B4B0-9E1B-EB49E8FFA968}"/>
+              </a:ext>
+            </a:extLst>
+          </p:cNvPr>
+          <p:cNvSpPr txBox="1"/>
+          <p:nvPr/>
+        </p:nvSpPr>
+        <p:spPr>
+          <a:xfrm>
+            <a:off x="2049517" y="2811893"/>
+            <a:ext cx="428322" cy="369332"/>
+          </a:xfrm>
+          <a:prstGeom prst="rect">
+            <a:avLst/>
+          </a:prstGeom>
+          <a:noFill/>
+        </p:spPr>
+        <p:txBody>
+          <a:bodyPr wrap="none" rtlCol="0">
+            <a:spAutoFit/>
+          </a:bodyPr>
+          <a:lstStyle/>
+          <a:p>
+            <a:r>
+              <a:rPr lang="en-US" altLang="zh-CN"/>
+              <a:t>50</a:t>
+            </a:r>
+            <a:endParaRPr lang="zh-CN" altLang="en-US"/>
+          </a:p>
+        </p:txBody>
+      </p:sp>
+      <p:sp>
+        <p:nvSpPr>
+          <p:cNvPr id="58" name="文本框 57">
+            <a:extLst>
+              <a:ext uri="{FF2B5EF4-FFF2-40B4-BE49-F238E27FC236}">
+                <a16:creationId xmlns:a16="http://schemas.microsoft.com/office/drawing/2014/main" id="{A2D704B6-7979-71BE-62BC-34E11D2B5775}"/>
+              </a:ext>
+            </a:extLst>
+          </p:cNvPr>
+          <p:cNvSpPr txBox="1"/>
+          <p:nvPr/>
+        </p:nvSpPr>
+        <p:spPr>
+          <a:xfrm>
+            <a:off x="1405384" y="3429000"/>
+            <a:ext cx="428322" cy="369332"/>
+          </a:xfrm>
+          <a:prstGeom prst="rect">
+            <a:avLst/>
+          </a:prstGeom>
+          <a:noFill/>
+        </p:spPr>
+        <p:txBody>
+          <a:bodyPr wrap="none" rtlCol="0">
+            <a:spAutoFit/>
+          </a:bodyPr>
+          <a:lstStyle/>
+          <a:p>
+            <a:r>
+              <a:rPr lang="en-US" altLang="zh-CN"/>
+              <a:t>73</a:t>
+            </a:r>
+            <a:endParaRPr lang="zh-CN" altLang="en-US"/>
+          </a:p>
+        </p:txBody>
+      </p:sp>
+      <p:sp>
+        <p:nvSpPr>
+          <p:cNvPr id="59" name="文本框 58">
+            <a:extLst>
+              <a:ext uri="{FF2B5EF4-FFF2-40B4-BE49-F238E27FC236}">
+                <a16:creationId xmlns:a16="http://schemas.microsoft.com/office/drawing/2014/main" id="{2B1E0F05-992D-FAC4-1C29-C9C6806AEC04}"/>
+              </a:ext>
+            </a:extLst>
+          </p:cNvPr>
+          <p:cNvSpPr txBox="1"/>
+          <p:nvPr/>
+        </p:nvSpPr>
+        <p:spPr>
+          <a:xfrm>
+            <a:off x="2666624" y="3429000"/>
+            <a:ext cx="428322" cy="369332"/>
+          </a:xfrm>
+          <a:prstGeom prst="rect">
+            <a:avLst/>
+          </a:prstGeom>
+          <a:noFill/>
+        </p:spPr>
+        <p:txBody>
+          <a:bodyPr wrap="none" rtlCol="0">
+            <a:spAutoFit/>
+          </a:bodyPr>
+          <a:lstStyle/>
+          <a:p>
+            <a:r>
+              <a:rPr lang="en-US" altLang="zh-CN"/>
+              <a:t>90</a:t>
+            </a:r>
+            <a:endParaRPr lang="zh-CN" altLang="en-US"/>
+          </a:p>
+        </p:txBody>
+      </p:sp>
+      <p:sp>
+        <p:nvSpPr>
+          <p:cNvPr id="60" name="文本框 59">
+            <a:extLst>
+              <a:ext uri="{FF2B5EF4-FFF2-40B4-BE49-F238E27FC236}">
+                <a16:creationId xmlns:a16="http://schemas.microsoft.com/office/drawing/2014/main" id="{B32E8FCA-3441-56AB-BDD8-3DF49EE4A33B}"/>
+              </a:ext>
+            </a:extLst>
+          </p:cNvPr>
+          <p:cNvSpPr txBox="1"/>
+          <p:nvPr/>
+        </p:nvSpPr>
+        <p:spPr>
+          <a:xfrm>
+            <a:off x="977062" y="4100161"/>
+            <a:ext cx="428322" cy="369332"/>
+          </a:xfrm>
+          <a:prstGeom prst="rect">
+            <a:avLst/>
+          </a:prstGeom>
+          <a:noFill/>
+        </p:spPr>
+        <p:txBody>
+          <a:bodyPr wrap="none" rtlCol="0">
+            <a:spAutoFit/>
+          </a:bodyPr>
+          <a:lstStyle/>
+          <a:p>
+            <a:r>
+              <a:rPr lang="en-US" altLang="zh-CN"/>
+              <a:t>80</a:t>
+            </a:r>
+            <a:endParaRPr lang="zh-CN" altLang="en-US"/>
+          </a:p>
+        </p:txBody>
+      </p:sp>
+      <p:cxnSp>
+        <p:nvCxnSpPr>
+          <p:cNvPr id="61" name="直接连接符 60">
+            <a:extLst>
+              <a:ext uri="{FF2B5EF4-FFF2-40B4-BE49-F238E27FC236}">
+                <a16:creationId xmlns:a16="http://schemas.microsoft.com/office/drawing/2014/main" id="{30793476-C001-37B2-7DBF-3752C3475CE8}"/>
+              </a:ext>
+            </a:extLst>
+          </p:cNvPr>
+          <p:cNvCxnSpPr>
+            <a:stCxn id="57" idx="2"/>
+            <a:endCxn id="58" idx="0"/>
+          </p:cNvCxnSpPr>
+          <p:nvPr/>
+        </p:nvCxnSpPr>
+        <p:spPr>
+          <a:xfrm flipH="1">
+            <a:off x="1619545" y="3181225"/>
+            <a:ext cx="644133" cy="247775"/>
+          </a:xfrm>
+          <a:prstGeom prst="line">
+            <a:avLst/>
+          </a:prstGeom>
+        </p:spPr>
+        <p:style>
+          <a:lnRef idx="2">
+            <a:schemeClr val="dk1"/>
+          </a:lnRef>
+          <a:fillRef idx="0">
+            <a:schemeClr val="dk1"/>
+          </a:fillRef>
+          <a:effectRef idx="1">
+            <a:schemeClr val="dk1"/>
+          </a:effectRef>
+          <a:fontRef idx="minor">
+            <a:schemeClr val="tx1"/>
+          </a:fontRef>
+        </p:style>
+      </p:cxnSp>
+      <p:cxnSp>
+        <p:nvCxnSpPr>
+          <p:cNvPr id="62" name="直接连接符 61">
+            <a:extLst>
+              <a:ext uri="{FF2B5EF4-FFF2-40B4-BE49-F238E27FC236}">
+                <a16:creationId xmlns:a16="http://schemas.microsoft.com/office/drawing/2014/main" id="{441A95A0-759B-F812-5026-C8867B4F88C6}"/>
+              </a:ext>
+            </a:extLst>
+          </p:cNvPr>
+          <p:cNvCxnSpPr>
+            <a:cxnSpLocks/>
+            <a:stCxn id="57" idx="2"/>
+            <a:endCxn id="59" idx="0"/>
+          </p:cNvCxnSpPr>
+          <p:nvPr/>
+        </p:nvCxnSpPr>
+        <p:spPr>
+          <a:xfrm>
+            <a:off x="2263678" y="3181225"/>
+            <a:ext cx="617107" cy="247775"/>
+          </a:xfrm>
+          <a:prstGeom prst="line">
+            <a:avLst/>
+          </a:prstGeom>
+        </p:spPr>
+        <p:style>
+          <a:lnRef idx="2">
+            <a:schemeClr val="dk1"/>
+          </a:lnRef>
+          <a:fillRef idx="0">
+            <a:schemeClr val="dk1"/>
+          </a:fillRef>
+          <a:effectRef idx="1">
+            <a:schemeClr val="dk1"/>
+          </a:effectRef>
+          <a:fontRef idx="minor">
+            <a:schemeClr val="tx1"/>
+          </a:fontRef>
+        </p:style>
+      </p:cxnSp>
+      <p:cxnSp>
+        <p:nvCxnSpPr>
+          <p:cNvPr id="63" name="直接连接符 62">
+            <a:extLst>
+              <a:ext uri="{FF2B5EF4-FFF2-40B4-BE49-F238E27FC236}">
+                <a16:creationId xmlns:a16="http://schemas.microsoft.com/office/drawing/2014/main" id="{FCB56DFC-BFD4-A74C-214F-00A4F18F17EE}"/>
+              </a:ext>
+            </a:extLst>
+          </p:cNvPr>
+          <p:cNvCxnSpPr>
+            <a:cxnSpLocks/>
+            <a:stCxn id="58" idx="2"/>
+            <a:endCxn id="60" idx="0"/>
+          </p:cNvCxnSpPr>
+          <p:nvPr/>
+        </p:nvCxnSpPr>
+        <p:spPr>
+          <a:xfrm flipH="1">
+            <a:off x="1191223" y="3798332"/>
+            <a:ext cx="428322" cy="301829"/>
+          </a:xfrm>
+          <a:prstGeom prst="line">
+            <a:avLst/>
+          </a:prstGeom>
+        </p:spPr>
+        <p:style>
+          <a:lnRef idx="2">
+            <a:schemeClr val="dk1"/>
+          </a:lnRef>
+          <a:fillRef idx="0">
+            <a:schemeClr val="dk1"/>
+          </a:fillRef>
+          <a:effectRef idx="1">
+            <a:schemeClr val="dk1"/>
+          </a:effectRef>
+          <a:fontRef idx="minor">
+            <a:schemeClr val="tx1"/>
+          </a:fontRef>
+        </p:style>
+      </p:cxnSp>
+      <p:sp>
+        <p:nvSpPr>
+          <p:cNvPr id="65" name="文本框 64">
+            <a:extLst>
+              <a:ext uri="{FF2B5EF4-FFF2-40B4-BE49-F238E27FC236}">
+                <a16:creationId xmlns:a16="http://schemas.microsoft.com/office/drawing/2014/main" id="{79C754BB-09B0-B4DD-59CE-8E0FE46CDBC0}"/>
+              </a:ext>
+            </a:extLst>
+          </p:cNvPr>
+          <p:cNvSpPr txBox="1"/>
+          <p:nvPr/>
+        </p:nvSpPr>
+        <p:spPr>
+          <a:xfrm>
+            <a:off x="1674499" y="4100161"/>
+            <a:ext cx="428322" cy="369332"/>
+          </a:xfrm>
+          <a:prstGeom prst="rect">
+            <a:avLst/>
+          </a:prstGeom>
+          <a:noFill/>
+        </p:spPr>
+        <p:txBody>
+          <a:bodyPr wrap="none" rtlCol="0">
+            <a:spAutoFit/>
+          </a:bodyPr>
+          <a:lstStyle/>
+          <a:p>
+            <a:r>
+              <a:rPr lang="en-US" altLang="zh-CN"/>
+              <a:t>90</a:t>
+            </a:r>
+            <a:endParaRPr lang="zh-CN" altLang="en-US"/>
+          </a:p>
+        </p:txBody>
+      </p:sp>
+      <p:cxnSp>
+        <p:nvCxnSpPr>
+          <p:cNvPr id="66" name="直接连接符 65">
+            <a:extLst>
+              <a:ext uri="{FF2B5EF4-FFF2-40B4-BE49-F238E27FC236}">
+                <a16:creationId xmlns:a16="http://schemas.microsoft.com/office/drawing/2014/main" id="{2421200E-4D24-5E40-165A-1B38A851EBD6}"/>
+              </a:ext>
+            </a:extLst>
+          </p:cNvPr>
+          <p:cNvCxnSpPr>
+            <a:cxnSpLocks/>
+            <a:stCxn id="58" idx="2"/>
+            <a:endCxn id="65" idx="0"/>
+          </p:cNvCxnSpPr>
+          <p:nvPr/>
+        </p:nvCxnSpPr>
+        <p:spPr>
+          <a:xfrm>
+            <a:off x="1619545" y="3798332"/>
+            <a:ext cx="269115" cy="301829"/>
+          </a:xfrm>
+          <a:prstGeom prst="line">
+            <a:avLst/>
+          </a:prstGeom>
+        </p:spPr>
+        <p:style>
+          <a:lnRef idx="2">
+            <a:schemeClr val="dk1"/>
+          </a:lnRef>
+          <a:fillRef idx="0">
+            <a:schemeClr val="dk1"/>
+          </a:fillRef>
+          <a:effectRef idx="1">
+            <a:schemeClr val="dk1"/>
+          </a:effectRef>
+          <a:fontRef idx="minor">
+            <a:schemeClr val="tx1"/>
+          </a:fontRef>
+        </p:style>
+      </p:cxnSp>
+      <p:sp>
+        <p:nvSpPr>
+          <p:cNvPr id="69" name="文本框 68">
+            <a:extLst>
+              <a:ext uri="{FF2B5EF4-FFF2-40B4-BE49-F238E27FC236}">
+                <a16:creationId xmlns:a16="http://schemas.microsoft.com/office/drawing/2014/main" id="{5231BDB7-50E5-CE04-6149-058B1B81F08C}"/>
+              </a:ext>
+            </a:extLst>
+          </p:cNvPr>
+          <p:cNvSpPr txBox="1"/>
+          <p:nvPr/>
+        </p:nvSpPr>
+        <p:spPr>
+          <a:xfrm>
+            <a:off x="4636931" y="2811893"/>
+            <a:ext cx="428322" cy="369332"/>
+          </a:xfrm>
+          <a:prstGeom prst="rect">
+            <a:avLst/>
+          </a:prstGeom>
+          <a:noFill/>
+        </p:spPr>
+        <p:txBody>
+          <a:bodyPr wrap="none" rtlCol="0">
+            <a:spAutoFit/>
+          </a:bodyPr>
+          <a:lstStyle/>
+          <a:p>
+            <a:r>
+              <a:rPr lang="en-US" altLang="zh-CN"/>
+              <a:t>66</a:t>
+            </a:r>
+            <a:endParaRPr lang="zh-CN" altLang="en-US"/>
+          </a:p>
+        </p:txBody>
+      </p:sp>
+      <p:sp>
+        <p:nvSpPr>
+          <p:cNvPr id="70" name="文本框 69">
+            <a:extLst>
+              <a:ext uri="{FF2B5EF4-FFF2-40B4-BE49-F238E27FC236}">
+                <a16:creationId xmlns:a16="http://schemas.microsoft.com/office/drawing/2014/main" id="{2F1689AE-8793-9467-DCE0-4B079DC126C6}"/>
+              </a:ext>
+            </a:extLst>
+          </p:cNvPr>
+          <p:cNvSpPr txBox="1"/>
+          <p:nvPr/>
+        </p:nvSpPr>
+        <p:spPr>
+          <a:xfrm>
+            <a:off x="3992798" y="3429000"/>
+            <a:ext cx="428322" cy="369332"/>
+          </a:xfrm>
+          <a:prstGeom prst="rect">
+            <a:avLst/>
+          </a:prstGeom>
+          <a:noFill/>
+        </p:spPr>
+        <p:txBody>
+          <a:bodyPr wrap="none" rtlCol="0">
+            <a:spAutoFit/>
+          </a:bodyPr>
+          <a:lstStyle/>
+          <a:p>
+            <a:r>
+              <a:rPr lang="en-US" altLang="zh-CN"/>
+              <a:t>66</a:t>
+            </a:r>
+            <a:endParaRPr lang="zh-CN" altLang="en-US"/>
+          </a:p>
+        </p:txBody>
+      </p:sp>
+      <p:sp>
+        <p:nvSpPr>
+          <p:cNvPr id="71" name="文本框 70">
+            <a:extLst>
+              <a:ext uri="{FF2B5EF4-FFF2-40B4-BE49-F238E27FC236}">
+                <a16:creationId xmlns:a16="http://schemas.microsoft.com/office/drawing/2014/main" id="{EEB3A7D0-080A-623C-88D0-343AE265BDA5}"/>
+              </a:ext>
+            </a:extLst>
+          </p:cNvPr>
+          <p:cNvSpPr txBox="1"/>
+          <p:nvPr/>
+        </p:nvSpPr>
+        <p:spPr>
+          <a:xfrm>
+            <a:off x="5254038" y="3429000"/>
+            <a:ext cx="428322" cy="369332"/>
+          </a:xfrm>
+          <a:prstGeom prst="rect">
+            <a:avLst/>
+          </a:prstGeom>
+          <a:noFill/>
+        </p:spPr>
+        <p:txBody>
+          <a:bodyPr wrap="none" rtlCol="0">
+            <a:spAutoFit/>
+          </a:bodyPr>
+          <a:lstStyle/>
+          <a:p>
+            <a:r>
+              <a:rPr lang="en-US" altLang="zh-CN"/>
+              <a:t>66</a:t>
+            </a:r>
+            <a:endParaRPr lang="zh-CN" altLang="en-US"/>
+          </a:p>
+        </p:txBody>
+      </p:sp>
+      <p:sp>
+        <p:nvSpPr>
+          <p:cNvPr id="72" name="文本框 71">
+            <a:extLst>
+              <a:ext uri="{FF2B5EF4-FFF2-40B4-BE49-F238E27FC236}">
+                <a16:creationId xmlns:a16="http://schemas.microsoft.com/office/drawing/2014/main" id="{A0901EC6-5A26-EFA2-7B9F-BA96BED7C9A3}"/>
+              </a:ext>
+            </a:extLst>
+          </p:cNvPr>
+          <p:cNvSpPr txBox="1"/>
+          <p:nvPr/>
+        </p:nvSpPr>
+        <p:spPr>
+          <a:xfrm>
+            <a:off x="3564476" y="4100161"/>
+            <a:ext cx="428322" cy="369332"/>
+          </a:xfrm>
+          <a:prstGeom prst="rect">
+            <a:avLst/>
+          </a:prstGeom>
+          <a:noFill/>
+        </p:spPr>
+        <p:txBody>
+          <a:bodyPr wrap="none" rtlCol="0">
+            <a:spAutoFit/>
+          </a:bodyPr>
+          <a:lstStyle/>
+          <a:p>
+            <a:r>
+              <a:rPr lang="en-US" altLang="zh-CN"/>
+              <a:t>66</a:t>
+            </a:r>
+            <a:endParaRPr lang="zh-CN" altLang="en-US"/>
+          </a:p>
+        </p:txBody>
+      </p:sp>
+      <p:cxnSp>
+        <p:nvCxnSpPr>
+          <p:cNvPr id="73" name="直接连接符 72">
+            <a:extLst>
+              <a:ext uri="{FF2B5EF4-FFF2-40B4-BE49-F238E27FC236}">
+                <a16:creationId xmlns:a16="http://schemas.microsoft.com/office/drawing/2014/main" id="{D31D0AA3-D2CB-F5BD-C92B-9A1B12229562}"/>
+              </a:ext>
+            </a:extLst>
+          </p:cNvPr>
+          <p:cNvCxnSpPr>
+            <a:stCxn id="69" idx="2"/>
+            <a:endCxn id="70" idx="0"/>
+          </p:cNvCxnSpPr>
+          <p:nvPr/>
+        </p:nvCxnSpPr>
+        <p:spPr>
+          <a:xfrm flipH="1">
+            <a:off x="4206959" y="3181225"/>
+            <a:ext cx="644133" cy="247775"/>
+          </a:xfrm>
+          <a:prstGeom prst="line">
+            <a:avLst/>
+          </a:prstGeom>
+        </p:spPr>
+        <p:style>
+          <a:lnRef idx="2">
+            <a:schemeClr val="dk1"/>
+          </a:lnRef>
+          <a:fillRef idx="0">
+            <a:schemeClr val="dk1"/>
+          </a:fillRef>
+          <a:effectRef idx="1">
+            <a:schemeClr val="dk1"/>
+          </a:effectRef>
+          <a:fontRef idx="minor">
+            <a:schemeClr val="tx1"/>
+          </a:fontRef>
+        </p:style>
+      </p:cxnSp>
+      <p:cxnSp>
+        <p:nvCxnSpPr>
+          <p:cNvPr id="74" name="直接连接符 73">
+            <a:extLst>
+              <a:ext uri="{FF2B5EF4-FFF2-40B4-BE49-F238E27FC236}">
+                <a16:creationId xmlns:a16="http://schemas.microsoft.com/office/drawing/2014/main" id="{2ED4A5B2-8B70-AF0D-A1F7-B302F86DDBFA}"/>
+              </a:ext>
+            </a:extLst>
+          </p:cNvPr>
+          <p:cNvCxnSpPr>
+            <a:cxnSpLocks/>
+            <a:stCxn id="69" idx="2"/>
+            <a:endCxn id="71" idx="0"/>
+          </p:cNvCxnSpPr>
+          <p:nvPr/>
+        </p:nvCxnSpPr>
+        <p:spPr>
+          <a:xfrm>
+            <a:off x="4851092" y="3181225"/>
+            <a:ext cx="617107" cy="247775"/>
+          </a:xfrm>
+          <a:prstGeom prst="line">
+            <a:avLst/>
+          </a:prstGeom>
+        </p:spPr>
+        <p:style>
+          <a:lnRef idx="2">
+            <a:schemeClr val="dk1"/>
+          </a:lnRef>
+          <a:fillRef idx="0">
+            <a:schemeClr val="dk1"/>
+          </a:fillRef>
+          <a:effectRef idx="1">
+            <a:schemeClr val="dk1"/>
+          </a:effectRef>
+          <a:fontRef idx="minor">
+            <a:schemeClr val="tx1"/>
+          </a:fontRef>
+        </p:style>
+      </p:cxnSp>
+      <p:cxnSp>
+        <p:nvCxnSpPr>
+          <p:cNvPr id="75" name="直接连接符 74">
+            <a:extLst>
+              <a:ext uri="{FF2B5EF4-FFF2-40B4-BE49-F238E27FC236}">
+                <a16:creationId xmlns:a16="http://schemas.microsoft.com/office/drawing/2014/main" id="{975865EA-CD36-737B-D0CF-E5D433E1697D}"/>
+              </a:ext>
+            </a:extLst>
+          </p:cNvPr>
+          <p:cNvCxnSpPr>
+            <a:cxnSpLocks/>
+            <a:stCxn id="70" idx="2"/>
+            <a:endCxn id="72" idx="0"/>
+          </p:cNvCxnSpPr>
+          <p:nvPr/>
+        </p:nvCxnSpPr>
+        <p:spPr>
+          <a:xfrm flipH="1">
+            <a:off x="3778637" y="3798332"/>
+            <a:ext cx="428322" cy="301829"/>
+          </a:xfrm>
+          <a:prstGeom prst="line">
+            <a:avLst/>
+          </a:prstGeom>
+        </p:spPr>
+        <p:style>
+          <a:lnRef idx="2">
+            <a:schemeClr val="dk1"/>
+          </a:lnRef>
+          <a:fillRef idx="0">
+            <a:schemeClr val="dk1"/>
+          </a:fillRef>
+          <a:effectRef idx="1">
+            <a:schemeClr val="dk1"/>
+          </a:effectRef>
+          <a:fontRef idx="minor">
+            <a:schemeClr val="tx1"/>
+          </a:fontRef>
+        </p:style>
+      </p:cxnSp>
+      <p:sp>
+        <p:nvSpPr>
+          <p:cNvPr id="76" name="文本框 75">
+            <a:extLst>
+              <a:ext uri="{FF2B5EF4-FFF2-40B4-BE49-F238E27FC236}">
+                <a16:creationId xmlns:a16="http://schemas.microsoft.com/office/drawing/2014/main" id="{7F964EA0-233D-4BBC-FA53-B293380B011A}"/>
+              </a:ext>
+            </a:extLst>
+          </p:cNvPr>
+          <p:cNvSpPr txBox="1"/>
+          <p:nvPr/>
+        </p:nvSpPr>
+        <p:spPr>
+          <a:xfrm>
+            <a:off x="4314864" y="4100161"/>
+            <a:ext cx="428322" cy="369332"/>
+          </a:xfrm>
+          <a:prstGeom prst="rect">
+            <a:avLst/>
+          </a:prstGeom>
+          <a:noFill/>
+        </p:spPr>
+        <p:txBody>
+          <a:bodyPr wrap="none" rtlCol="0">
+            <a:spAutoFit/>
+          </a:bodyPr>
+          <a:lstStyle/>
+          <a:p>
+            <a:r>
+              <a:rPr lang="en-US" altLang="zh-CN"/>
+              <a:t>66</a:t>
+            </a:r>
+            <a:endParaRPr lang="zh-CN" altLang="en-US"/>
+          </a:p>
+        </p:txBody>
+      </p:sp>
+      <p:sp>
+        <p:nvSpPr>
+          <p:cNvPr id="77" name="文本框 76">
+            <a:extLst>
+              <a:ext uri="{FF2B5EF4-FFF2-40B4-BE49-F238E27FC236}">
+                <a16:creationId xmlns:a16="http://schemas.microsoft.com/office/drawing/2014/main" id="{E5BB3088-6939-CDA6-A91F-4F55C4C0A872}"/>
+              </a:ext>
+            </a:extLst>
+          </p:cNvPr>
+          <p:cNvSpPr txBox="1"/>
+          <p:nvPr/>
+        </p:nvSpPr>
+        <p:spPr>
+          <a:xfrm>
+            <a:off x="4996135" y="4100161"/>
+            <a:ext cx="428322" cy="369332"/>
+          </a:xfrm>
+          <a:prstGeom prst="rect">
+            <a:avLst/>
+          </a:prstGeom>
+          <a:noFill/>
+        </p:spPr>
+        <p:txBody>
+          <a:bodyPr wrap="none" rtlCol="0">
+            <a:spAutoFit/>
+          </a:bodyPr>
+          <a:lstStyle/>
+          <a:p>
+            <a:r>
+              <a:rPr lang="en-US" altLang="zh-CN"/>
+              <a:t>66</a:t>
+            </a:r>
+            <a:endParaRPr lang="zh-CN" altLang="en-US"/>
+          </a:p>
+        </p:txBody>
+      </p:sp>
+      <p:cxnSp>
+        <p:nvCxnSpPr>
+          <p:cNvPr id="78" name="直接连接符 77">
+            <a:extLst>
+              <a:ext uri="{FF2B5EF4-FFF2-40B4-BE49-F238E27FC236}">
+                <a16:creationId xmlns:a16="http://schemas.microsoft.com/office/drawing/2014/main" id="{C59FA95F-A82B-B1CF-CE8E-A0443022BDF1}"/>
+              </a:ext>
+            </a:extLst>
+          </p:cNvPr>
+          <p:cNvCxnSpPr>
+            <a:cxnSpLocks/>
+            <a:stCxn id="70" idx="2"/>
+            <a:endCxn id="76" idx="0"/>
+          </p:cNvCxnSpPr>
+          <p:nvPr/>
+        </p:nvCxnSpPr>
+        <p:spPr>
+          <a:xfrm>
+            <a:off x="4206959" y="3798332"/>
+            <a:ext cx="322066" cy="301829"/>
+          </a:xfrm>
+          <a:prstGeom prst="line">
+            <a:avLst/>
+          </a:prstGeom>
+        </p:spPr>
+        <p:style>
+          <a:lnRef idx="2">
+            <a:schemeClr val="dk1"/>
+          </a:lnRef>
+          <a:fillRef idx="0">
+            <a:schemeClr val="dk1"/>
+          </a:fillRef>
+          <a:effectRef idx="1">
+            <a:schemeClr val="dk1"/>
+          </a:effectRef>
+          <a:fontRef idx="minor">
+            <a:schemeClr val="tx1"/>
+          </a:fontRef>
+        </p:style>
+      </p:cxnSp>
+      <p:cxnSp>
+        <p:nvCxnSpPr>
+          <p:cNvPr id="79" name="直接连接符 78">
+            <a:extLst>
+              <a:ext uri="{FF2B5EF4-FFF2-40B4-BE49-F238E27FC236}">
+                <a16:creationId xmlns:a16="http://schemas.microsoft.com/office/drawing/2014/main" id="{4D87EFD2-1565-CAF9-31DC-772D63FC59AA}"/>
+              </a:ext>
+            </a:extLst>
+          </p:cNvPr>
+          <p:cNvCxnSpPr>
+            <a:cxnSpLocks/>
+            <a:stCxn id="71" idx="2"/>
+            <a:endCxn id="77" idx="0"/>
+          </p:cNvCxnSpPr>
+          <p:nvPr/>
+        </p:nvCxnSpPr>
+        <p:spPr>
+          <a:xfrm flipH="1">
+            <a:off x="5210296" y="3798332"/>
+            <a:ext cx="257903" cy="301829"/>
+          </a:xfrm>
+          <a:prstGeom prst="line">
+            <a:avLst/>
+          </a:prstGeom>
+        </p:spPr>
+        <p:style>
+          <a:lnRef idx="2">
+            <a:schemeClr val="dk1"/>
+          </a:lnRef>
+          <a:fillRef idx="0">
+            <a:schemeClr val="dk1"/>
+          </a:fillRef>
+          <a:effectRef idx="1">
+            <a:schemeClr val="dk1"/>
+          </a:effectRef>
+          <a:fontRef idx="minor">
+            <a:schemeClr val="tx1"/>
+          </a:fontRef>
+        </p:style>
+      </p:cxnSp>
+      <p:sp>
+        <p:nvSpPr>
+          <p:cNvPr id="80" name="文本框 79">
+            <a:extLst>
+              <a:ext uri="{FF2B5EF4-FFF2-40B4-BE49-F238E27FC236}">
+                <a16:creationId xmlns:a16="http://schemas.microsoft.com/office/drawing/2014/main" id="{A20FA38E-EE31-E8FC-29BB-6D5870215485}"/>
+              </a:ext>
+            </a:extLst>
+          </p:cNvPr>
+          <p:cNvSpPr txBox="1"/>
+          <p:nvPr/>
+        </p:nvSpPr>
+        <p:spPr>
+          <a:xfrm>
+            <a:off x="7153775" y="2811893"/>
+            <a:ext cx="428322" cy="369332"/>
+          </a:xfrm>
+          <a:prstGeom prst="rect">
+            <a:avLst/>
+          </a:prstGeom>
+          <a:noFill/>
+        </p:spPr>
+        <p:txBody>
+          <a:bodyPr wrap="none" rtlCol="0">
+            <a:spAutoFit/>
+          </a:bodyPr>
+          <a:lstStyle/>
+          <a:p>
+            <a:r>
+              <a:rPr lang="en-US" altLang="zh-CN"/>
+              <a:t>16</a:t>
+            </a:r>
+            <a:endParaRPr lang="zh-CN" altLang="en-US"/>
+          </a:p>
+        </p:txBody>
+      </p:sp>
+      <p:sp>
+        <p:nvSpPr>
+          <p:cNvPr id="81" name="文本框 80">
+            <a:extLst>
+              <a:ext uri="{FF2B5EF4-FFF2-40B4-BE49-F238E27FC236}">
+                <a16:creationId xmlns:a16="http://schemas.microsoft.com/office/drawing/2014/main" id="{3DC3D518-934E-5A13-B0EA-42E0E7D74BF9}"/>
+              </a:ext>
+            </a:extLst>
+          </p:cNvPr>
+          <p:cNvSpPr txBox="1"/>
+          <p:nvPr/>
+        </p:nvSpPr>
+        <p:spPr>
+          <a:xfrm>
+            <a:off x="6509642" y="3429000"/>
+            <a:ext cx="428322" cy="369332"/>
+          </a:xfrm>
+          <a:prstGeom prst="rect">
+            <a:avLst/>
+          </a:prstGeom>
+          <a:noFill/>
+        </p:spPr>
+        <p:txBody>
+          <a:bodyPr wrap="none" rtlCol="0">
+            <a:spAutoFit/>
+          </a:bodyPr>
+          <a:lstStyle/>
+          <a:p>
+            <a:r>
+              <a:rPr lang="en-US" altLang="zh-CN"/>
+              <a:t>58</a:t>
+            </a:r>
+            <a:endParaRPr lang="zh-CN" altLang="en-US"/>
+          </a:p>
+        </p:txBody>
+      </p:sp>
+      <p:sp>
+        <p:nvSpPr>
+          <p:cNvPr id="82" name="文本框 81">
+            <a:extLst>
+              <a:ext uri="{FF2B5EF4-FFF2-40B4-BE49-F238E27FC236}">
+                <a16:creationId xmlns:a16="http://schemas.microsoft.com/office/drawing/2014/main" id="{534B3F89-6988-C38D-3CF9-3169BA5FCE3A}"/>
+              </a:ext>
+            </a:extLst>
+          </p:cNvPr>
+          <p:cNvSpPr txBox="1"/>
+          <p:nvPr/>
+        </p:nvSpPr>
+        <p:spPr>
+          <a:xfrm>
+            <a:off x="7770882" y="3429000"/>
+            <a:ext cx="428322" cy="369332"/>
+          </a:xfrm>
+          <a:prstGeom prst="rect">
+            <a:avLst/>
+          </a:prstGeom>
+          <a:noFill/>
+        </p:spPr>
+        <p:txBody>
+          <a:bodyPr wrap="none" rtlCol="0">
+            <a:spAutoFit/>
+          </a:bodyPr>
+          <a:lstStyle/>
+          <a:p>
+            <a:r>
+              <a:rPr lang="en-US" altLang="zh-CN"/>
+              <a:t>37</a:t>
+            </a:r>
+            <a:endParaRPr lang="zh-CN" altLang="en-US"/>
+          </a:p>
+        </p:txBody>
+      </p:sp>
+      <p:sp>
+        <p:nvSpPr>
+          <p:cNvPr id="83" name="文本框 82">
+            <a:extLst>
+              <a:ext uri="{FF2B5EF4-FFF2-40B4-BE49-F238E27FC236}">
+                <a16:creationId xmlns:a16="http://schemas.microsoft.com/office/drawing/2014/main" id="{CFFBF86E-EB07-C30F-D979-A4B11FDFB323}"/>
+              </a:ext>
+            </a:extLst>
+          </p:cNvPr>
+          <p:cNvSpPr txBox="1"/>
+          <p:nvPr/>
+        </p:nvSpPr>
+        <p:spPr>
+          <a:xfrm>
+            <a:off x="6081320" y="4100161"/>
+            <a:ext cx="428322" cy="369332"/>
+          </a:xfrm>
+          <a:prstGeom prst="rect">
+            <a:avLst/>
+          </a:prstGeom>
+          <a:noFill/>
+        </p:spPr>
+        <p:txBody>
+          <a:bodyPr wrap="none" rtlCol="0">
+            <a:spAutoFit/>
+          </a:bodyPr>
+          <a:lstStyle/>
+          <a:p>
+            <a:r>
+              <a:rPr lang="en-US" altLang="zh-CN"/>
+              <a:t>60</a:t>
+            </a:r>
+            <a:endParaRPr lang="zh-CN" altLang="en-US"/>
+          </a:p>
+        </p:txBody>
+      </p:sp>
+      <p:cxnSp>
+        <p:nvCxnSpPr>
+          <p:cNvPr id="84" name="直接连接符 83">
+            <a:extLst>
+              <a:ext uri="{FF2B5EF4-FFF2-40B4-BE49-F238E27FC236}">
+                <a16:creationId xmlns:a16="http://schemas.microsoft.com/office/drawing/2014/main" id="{3BF64668-E5D7-3627-0A63-9BBEA4AEDEEF}"/>
+              </a:ext>
+            </a:extLst>
+          </p:cNvPr>
+          <p:cNvCxnSpPr>
+            <a:stCxn id="80" idx="2"/>
+            <a:endCxn id="81" idx="0"/>
+          </p:cNvCxnSpPr>
+          <p:nvPr/>
+        </p:nvCxnSpPr>
+        <p:spPr>
+          <a:xfrm flipH="1">
+            <a:off x="6723803" y="3181225"/>
+            <a:ext cx="644133" cy="247775"/>
+          </a:xfrm>
+          <a:prstGeom prst="line">
+            <a:avLst/>
+          </a:prstGeom>
+        </p:spPr>
+        <p:style>
+          <a:lnRef idx="2">
+            <a:schemeClr val="dk1"/>
+          </a:lnRef>
+          <a:fillRef idx="0">
+            <a:schemeClr val="dk1"/>
+          </a:fillRef>
+          <a:effectRef idx="1">
+            <a:schemeClr val="dk1"/>
+          </a:effectRef>
+          <a:fontRef idx="minor">
+            <a:schemeClr val="tx1"/>
+          </a:fontRef>
+        </p:style>
+      </p:cxnSp>
+      <p:cxnSp>
+        <p:nvCxnSpPr>
+          <p:cNvPr id="85" name="直接连接符 84">
+            <a:extLst>
+              <a:ext uri="{FF2B5EF4-FFF2-40B4-BE49-F238E27FC236}">
+                <a16:creationId xmlns:a16="http://schemas.microsoft.com/office/drawing/2014/main" id="{FF7F10F6-6E74-EE9B-513E-AA96AACE4399}"/>
+              </a:ext>
+            </a:extLst>
+          </p:cNvPr>
+          <p:cNvCxnSpPr>
+            <a:cxnSpLocks/>
+            <a:stCxn id="80" idx="2"/>
+            <a:endCxn id="82" idx="0"/>
+          </p:cNvCxnSpPr>
+          <p:nvPr/>
+        </p:nvCxnSpPr>
+        <p:spPr>
+          <a:xfrm>
+            <a:off x="7367936" y="3181225"/>
+            <a:ext cx="617107" cy="247775"/>
+          </a:xfrm>
+          <a:prstGeom prst="line">
+            <a:avLst/>
+          </a:prstGeom>
+        </p:spPr>
+        <p:style>
+          <a:lnRef idx="2">
+            <a:schemeClr val="dk1"/>
+          </a:lnRef>
+          <a:fillRef idx="0">
+            <a:schemeClr val="dk1"/>
+          </a:fillRef>
+          <a:effectRef idx="1">
+            <a:schemeClr val="dk1"/>
+          </a:effectRef>
+          <a:fontRef idx="minor">
+            <a:schemeClr val="tx1"/>
+          </a:fontRef>
+        </p:style>
+      </p:cxnSp>
+      <p:cxnSp>
+        <p:nvCxnSpPr>
+          <p:cNvPr id="86" name="直接连接符 85">
+            <a:extLst>
+              <a:ext uri="{FF2B5EF4-FFF2-40B4-BE49-F238E27FC236}">
+                <a16:creationId xmlns:a16="http://schemas.microsoft.com/office/drawing/2014/main" id="{24E3EDD3-933A-EAA2-207D-8DBFC1BD528A}"/>
+              </a:ext>
+            </a:extLst>
+          </p:cNvPr>
+          <p:cNvCxnSpPr>
+            <a:cxnSpLocks/>
+            <a:stCxn id="81" idx="2"/>
+            <a:endCxn id="83" idx="0"/>
+          </p:cNvCxnSpPr>
+          <p:nvPr/>
+        </p:nvCxnSpPr>
+        <p:spPr>
+          <a:xfrm flipH="1">
+            <a:off x="6295481" y="3798332"/>
+            <a:ext cx="428322" cy="301829"/>
+          </a:xfrm>
+          <a:prstGeom prst="line">
+            <a:avLst/>
+          </a:prstGeom>
+        </p:spPr>
+        <p:style>
+          <a:lnRef idx="2">
+            <a:schemeClr val="dk1"/>
+          </a:lnRef>
+          <a:fillRef idx="0">
+            <a:schemeClr val="dk1"/>
+          </a:fillRef>
+          <a:effectRef idx="1">
+            <a:schemeClr val="dk1"/>
+          </a:effectRef>
+          <a:fontRef idx="minor">
+            <a:schemeClr val="tx1"/>
+          </a:fontRef>
+        </p:style>
+      </p:cxnSp>
+      <p:sp>
+        <p:nvSpPr>
+          <p:cNvPr id="87" name="文本框 86">
+            <a:extLst>
+              <a:ext uri="{FF2B5EF4-FFF2-40B4-BE49-F238E27FC236}">
+                <a16:creationId xmlns:a16="http://schemas.microsoft.com/office/drawing/2014/main" id="{8169F842-D972-7AEC-E60D-874DD316D812}"/>
+              </a:ext>
+            </a:extLst>
+          </p:cNvPr>
+          <p:cNvSpPr txBox="1"/>
+          <p:nvPr/>
+        </p:nvSpPr>
+        <p:spPr>
+          <a:xfrm>
+            <a:off x="6831708" y="4100161"/>
+            <a:ext cx="428322" cy="369332"/>
+          </a:xfrm>
+          <a:prstGeom prst="rect">
+            <a:avLst/>
+          </a:prstGeom>
+          <a:noFill/>
+        </p:spPr>
+        <p:txBody>
+          <a:bodyPr wrap="none" rtlCol="0">
+            <a:spAutoFit/>
+          </a:bodyPr>
+          <a:lstStyle/>
+          <a:p>
+            <a:r>
+              <a:rPr lang="en-US" altLang="zh-CN"/>
+              <a:t>76</a:t>
+            </a:r>
+            <a:endParaRPr lang="zh-CN" altLang="en-US"/>
+          </a:p>
+        </p:txBody>
+      </p:sp>
+      <p:sp>
+        <p:nvSpPr>
+          <p:cNvPr id="88" name="文本框 87">
+            <a:extLst>
+              <a:ext uri="{FF2B5EF4-FFF2-40B4-BE49-F238E27FC236}">
+                <a16:creationId xmlns:a16="http://schemas.microsoft.com/office/drawing/2014/main" id="{E6323C73-2532-D7F6-42A8-BE3965E8F5BF}"/>
+              </a:ext>
+            </a:extLst>
+          </p:cNvPr>
+          <p:cNvSpPr txBox="1"/>
+          <p:nvPr/>
+        </p:nvSpPr>
+        <p:spPr>
+          <a:xfrm>
+            <a:off x="7512979" y="4100161"/>
+            <a:ext cx="428322" cy="369332"/>
+          </a:xfrm>
+          <a:prstGeom prst="rect">
+            <a:avLst/>
+          </a:prstGeom>
+          <a:noFill/>
+        </p:spPr>
+        <p:txBody>
+          <a:bodyPr wrap="none" rtlCol="0">
+            <a:spAutoFit/>
+          </a:bodyPr>
+          <a:lstStyle/>
+          <a:p>
+            <a:r>
+              <a:rPr lang="en-US" altLang="zh-CN"/>
+              <a:t>45</a:t>
+            </a:r>
+            <a:endParaRPr lang="zh-CN" altLang="en-US"/>
+          </a:p>
+        </p:txBody>
+      </p:sp>
+      <p:cxnSp>
+        <p:nvCxnSpPr>
+          <p:cNvPr id="89" name="直接连接符 88">
+            <a:extLst>
+              <a:ext uri="{FF2B5EF4-FFF2-40B4-BE49-F238E27FC236}">
+                <a16:creationId xmlns:a16="http://schemas.microsoft.com/office/drawing/2014/main" id="{D81234F5-E966-327C-132E-D4A9A0734B18}"/>
+              </a:ext>
+            </a:extLst>
+          </p:cNvPr>
+          <p:cNvCxnSpPr>
+            <a:cxnSpLocks/>
+            <a:stCxn id="81" idx="2"/>
+            <a:endCxn id="87" idx="0"/>
+          </p:cNvCxnSpPr>
+          <p:nvPr/>
+        </p:nvCxnSpPr>
+        <p:spPr>
+          <a:xfrm>
+            <a:off x="6723803" y="3798332"/>
+            <a:ext cx="322066" cy="301829"/>
+          </a:xfrm>
+          <a:prstGeom prst="line">
+            <a:avLst/>
+          </a:prstGeom>
+        </p:spPr>
+        <p:style>
+          <a:lnRef idx="2">
+            <a:schemeClr val="dk1"/>
+          </a:lnRef>
+          <a:fillRef idx="0">
+            <a:schemeClr val="dk1"/>
+          </a:fillRef>
+          <a:effectRef idx="1">
+            <a:schemeClr val="dk1"/>
+          </a:effectRef>
+          <a:fontRef idx="minor">
+            <a:schemeClr val="tx1"/>
+          </a:fontRef>
+        </p:style>
+      </p:cxnSp>
+      <p:cxnSp>
+        <p:nvCxnSpPr>
+          <p:cNvPr id="90" name="直接连接符 89">
+            <a:extLst>
+              <a:ext uri="{FF2B5EF4-FFF2-40B4-BE49-F238E27FC236}">
+                <a16:creationId xmlns:a16="http://schemas.microsoft.com/office/drawing/2014/main" id="{4188B0F8-46A1-8F36-DBEA-A017FFA6540E}"/>
+              </a:ext>
+            </a:extLst>
+          </p:cNvPr>
+          <p:cNvCxnSpPr>
+            <a:cxnSpLocks/>
+            <a:stCxn id="82" idx="2"/>
+            <a:endCxn id="88" idx="0"/>
+          </p:cNvCxnSpPr>
+          <p:nvPr/>
+        </p:nvCxnSpPr>
+        <p:spPr>
+          <a:xfrm flipH="1">
+            <a:off x="7727140" y="3798332"/>
+            <a:ext cx="257903" cy="301829"/>
+          </a:xfrm>
+          <a:prstGeom prst="line">
+            <a:avLst/>
+          </a:prstGeom>
+        </p:spPr>
+        <p:style>
+          <a:lnRef idx="2">
+            <a:schemeClr val="dk1"/>
+          </a:lnRef>
+          <a:fillRef idx="0">
+            <a:schemeClr val="dk1"/>
+          </a:fillRef>
+          <a:effectRef idx="1">
+            <a:schemeClr val="dk1"/>
+          </a:effectRef>
+          <a:fontRef idx="minor">
+            <a:schemeClr val="tx1"/>
+          </a:fontRef>
+        </p:style>
+      </p:cxnSp>
+      <p:sp>
+        <p:nvSpPr>
+          <p:cNvPr id="92" name="文本框 91">
+            <a:extLst>
+              <a:ext uri="{FF2B5EF4-FFF2-40B4-BE49-F238E27FC236}">
+                <a16:creationId xmlns:a16="http://schemas.microsoft.com/office/drawing/2014/main" id="{EFC72F86-0D9B-52BC-6074-86B3BFE4FF5C}"/>
+              </a:ext>
+            </a:extLst>
+          </p:cNvPr>
+          <p:cNvSpPr txBox="1"/>
+          <p:nvPr/>
+        </p:nvSpPr>
+        <p:spPr>
+          <a:xfrm>
+            <a:off x="8043952" y="4100161"/>
+            <a:ext cx="428322" cy="369332"/>
+          </a:xfrm>
+          <a:prstGeom prst="rect">
+            <a:avLst/>
+          </a:prstGeom>
+          <a:noFill/>
+        </p:spPr>
+        <p:txBody>
+          <a:bodyPr wrap="none" rtlCol="0">
+            <a:spAutoFit/>
+          </a:bodyPr>
+          <a:lstStyle/>
+          <a:p>
+            <a:r>
+              <a:rPr lang="en-US" altLang="zh-CN"/>
+              <a:t>53</a:t>
+            </a:r>
+            <a:endParaRPr lang="zh-CN" altLang="en-US"/>
+          </a:p>
+        </p:txBody>
+      </p:sp>
+      <p:cxnSp>
+        <p:nvCxnSpPr>
+          <p:cNvPr id="93" name="直接连接符 92">
+            <a:extLst>
+              <a:ext uri="{FF2B5EF4-FFF2-40B4-BE49-F238E27FC236}">
+                <a16:creationId xmlns:a16="http://schemas.microsoft.com/office/drawing/2014/main" id="{6B20F04D-52A1-3ACF-4AF7-DAEE5EAD4C1C}"/>
+              </a:ext>
+            </a:extLst>
+          </p:cNvPr>
+          <p:cNvCxnSpPr>
+            <a:cxnSpLocks/>
+            <a:stCxn id="82" idx="2"/>
+            <a:endCxn id="92" idx="0"/>
+          </p:cNvCxnSpPr>
+          <p:nvPr/>
+        </p:nvCxnSpPr>
+        <p:spPr>
+          <a:xfrm>
+            <a:off x="7985043" y="3798332"/>
+            <a:ext cx="273070" cy="301829"/>
+          </a:xfrm>
+          <a:prstGeom prst="line">
+            <a:avLst/>
+          </a:prstGeom>
+        </p:spPr>
+        <p:style>
+          <a:lnRef idx="2">
+            <a:schemeClr val="dk1"/>
+          </a:lnRef>
+          <a:fillRef idx="0">
+            <a:schemeClr val="dk1"/>
+          </a:fillRef>
+          <a:effectRef idx="1">
+            <a:schemeClr val="dk1"/>
+          </a:effectRef>
+          <a:fontRef idx="minor">
+            <a:schemeClr val="tx1"/>
+          </a:fontRef>
+        </p:style>
+      </p:cxnSp>
+      <p:sp>
+        <p:nvSpPr>
+          <p:cNvPr id="97" name="文本框 96">
+            <a:extLst>
+              <a:ext uri="{FF2B5EF4-FFF2-40B4-BE49-F238E27FC236}">
+                <a16:creationId xmlns:a16="http://schemas.microsoft.com/office/drawing/2014/main" id="{3BDC8087-D50B-5E0B-DFF2-57C2ACFA1A69}"/>
+              </a:ext>
+            </a:extLst>
+          </p:cNvPr>
+          <p:cNvSpPr txBox="1"/>
+          <p:nvPr/>
+        </p:nvSpPr>
+        <p:spPr>
+          <a:xfrm>
+            <a:off x="9928322" y="2811893"/>
+            <a:ext cx="428322" cy="369332"/>
+          </a:xfrm>
+          <a:prstGeom prst="rect">
+            <a:avLst/>
+          </a:prstGeom>
+          <a:noFill/>
+        </p:spPr>
+        <p:txBody>
+          <a:bodyPr wrap="none" rtlCol="0">
+            <a:spAutoFit/>
+          </a:bodyPr>
+          <a:lstStyle/>
+          <a:p>
+            <a:r>
+              <a:rPr lang="en-US" altLang="zh-CN"/>
+              <a:t>33</a:t>
+            </a:r>
+            <a:endParaRPr lang="zh-CN" altLang="en-US"/>
+          </a:p>
+        </p:txBody>
+      </p:sp>
+      <p:sp>
+        <p:nvSpPr>
+          <p:cNvPr id="98" name="文本框 97">
+            <a:extLst>
+              <a:ext uri="{FF2B5EF4-FFF2-40B4-BE49-F238E27FC236}">
+                <a16:creationId xmlns:a16="http://schemas.microsoft.com/office/drawing/2014/main" id="{A6FD9A46-D4F0-E5C4-2C8E-3893B6933643}"/>
+              </a:ext>
+            </a:extLst>
+          </p:cNvPr>
+          <p:cNvSpPr txBox="1"/>
+          <p:nvPr/>
+        </p:nvSpPr>
+        <p:spPr>
+          <a:xfrm>
+            <a:off x="9284189" y="3429000"/>
+            <a:ext cx="428322" cy="369332"/>
+          </a:xfrm>
+          <a:prstGeom prst="rect">
+            <a:avLst/>
+          </a:prstGeom>
+          <a:noFill/>
+        </p:spPr>
+        <p:txBody>
+          <a:bodyPr wrap="none" rtlCol="0">
+            <a:spAutoFit/>
+          </a:bodyPr>
+          <a:lstStyle/>
+          <a:p>
+            <a:r>
+              <a:rPr lang="en-US" altLang="zh-CN"/>
+              <a:t>33</a:t>
+            </a:r>
+            <a:endParaRPr lang="zh-CN" altLang="en-US"/>
+          </a:p>
+        </p:txBody>
+      </p:sp>
+      <p:sp>
+        <p:nvSpPr>
+          <p:cNvPr id="99" name="文本框 98">
+            <a:extLst>
+              <a:ext uri="{FF2B5EF4-FFF2-40B4-BE49-F238E27FC236}">
+                <a16:creationId xmlns:a16="http://schemas.microsoft.com/office/drawing/2014/main" id="{7A024FCC-A0E9-1393-58CD-44AC20E5B4F5}"/>
+              </a:ext>
+            </a:extLst>
+          </p:cNvPr>
+          <p:cNvSpPr txBox="1"/>
+          <p:nvPr/>
+        </p:nvSpPr>
+        <p:spPr>
+          <a:xfrm>
+            <a:off x="10545429" y="3429000"/>
+            <a:ext cx="428322" cy="369332"/>
+          </a:xfrm>
+          <a:prstGeom prst="rect">
+            <a:avLst/>
+          </a:prstGeom>
+          <a:noFill/>
+        </p:spPr>
+        <p:txBody>
+          <a:bodyPr wrap="none" rtlCol="0">
+            <a:spAutoFit/>
+          </a:bodyPr>
+          <a:lstStyle/>
+          <a:p>
+            <a:r>
+              <a:rPr lang="en-US" altLang="zh-CN"/>
+              <a:t>60</a:t>
+            </a:r>
+            <a:endParaRPr lang="zh-CN" altLang="en-US"/>
+          </a:p>
+        </p:txBody>
+      </p:sp>
+      <p:sp>
+        <p:nvSpPr>
+          <p:cNvPr id="100" name="文本框 99">
+            <a:extLst>
+              <a:ext uri="{FF2B5EF4-FFF2-40B4-BE49-F238E27FC236}">
+                <a16:creationId xmlns:a16="http://schemas.microsoft.com/office/drawing/2014/main" id="{2C98888D-8E36-29F1-91F5-6975A9E98E59}"/>
+              </a:ext>
+            </a:extLst>
+          </p:cNvPr>
+          <p:cNvSpPr txBox="1"/>
+          <p:nvPr/>
+        </p:nvSpPr>
+        <p:spPr>
+          <a:xfrm>
+            <a:off x="8855867" y="4100161"/>
+            <a:ext cx="428322" cy="369332"/>
+          </a:xfrm>
+          <a:prstGeom prst="rect">
+            <a:avLst/>
+          </a:prstGeom>
+          <a:noFill/>
+        </p:spPr>
+        <p:txBody>
+          <a:bodyPr wrap="none" rtlCol="0">
+            <a:spAutoFit/>
+          </a:bodyPr>
+          <a:lstStyle/>
+          <a:p>
+            <a:r>
+              <a:rPr lang="en-US" altLang="zh-CN"/>
+              <a:t>15</a:t>
+            </a:r>
+            <a:endParaRPr lang="zh-CN" altLang="en-US"/>
+          </a:p>
+        </p:txBody>
+      </p:sp>
+      <p:cxnSp>
+        <p:nvCxnSpPr>
+          <p:cNvPr id="101" name="直接连接符 100">
+            <a:extLst>
+              <a:ext uri="{FF2B5EF4-FFF2-40B4-BE49-F238E27FC236}">
+                <a16:creationId xmlns:a16="http://schemas.microsoft.com/office/drawing/2014/main" id="{C2DE4D74-7001-D5DB-67DC-EAC56217F10A}"/>
+              </a:ext>
+            </a:extLst>
+          </p:cNvPr>
+          <p:cNvCxnSpPr>
+            <a:stCxn id="97" idx="2"/>
+            <a:endCxn id="98" idx="0"/>
+          </p:cNvCxnSpPr>
+          <p:nvPr/>
+        </p:nvCxnSpPr>
+        <p:spPr>
+          <a:xfrm flipH="1">
+            <a:off x="9498350" y="3181225"/>
+            <a:ext cx="644133" cy="247775"/>
+          </a:xfrm>
+          <a:prstGeom prst="line">
+            <a:avLst/>
+          </a:prstGeom>
+        </p:spPr>
+        <p:style>
+          <a:lnRef idx="2">
+            <a:schemeClr val="dk1"/>
+          </a:lnRef>
+          <a:fillRef idx="0">
+            <a:schemeClr val="dk1"/>
+          </a:fillRef>
+          <a:effectRef idx="1">
+            <a:schemeClr val="dk1"/>
+          </a:effectRef>
+          <a:fontRef idx="minor">
+            <a:schemeClr val="tx1"/>
+          </a:fontRef>
+        </p:style>
+      </p:cxnSp>
+      <p:cxnSp>
+        <p:nvCxnSpPr>
+          <p:cNvPr id="102" name="直接连接符 101">
+            <a:extLst>
+              <a:ext uri="{FF2B5EF4-FFF2-40B4-BE49-F238E27FC236}">
+                <a16:creationId xmlns:a16="http://schemas.microsoft.com/office/drawing/2014/main" id="{32F6ED4A-47CB-CBA1-DEC5-DF30B2656725}"/>
+              </a:ext>
+            </a:extLst>
+          </p:cNvPr>
+          <p:cNvCxnSpPr>
+            <a:cxnSpLocks/>
+            <a:stCxn id="97" idx="2"/>
+            <a:endCxn id="99" idx="0"/>
+          </p:cNvCxnSpPr>
+          <p:nvPr/>
+        </p:nvCxnSpPr>
+        <p:spPr>
+          <a:xfrm>
+            <a:off x="10142483" y="3181225"/>
+            <a:ext cx="617107" cy="247775"/>
+          </a:xfrm>
+          <a:prstGeom prst="line">
+            <a:avLst/>
+          </a:prstGeom>
+        </p:spPr>
+        <p:style>
+          <a:lnRef idx="2">
+            <a:schemeClr val="dk1"/>
+          </a:lnRef>
+          <a:fillRef idx="0">
+            <a:schemeClr val="dk1"/>
+          </a:fillRef>
+          <a:effectRef idx="1">
+            <a:schemeClr val="dk1"/>
+          </a:effectRef>
+          <a:fontRef idx="minor">
+            <a:schemeClr val="tx1"/>
+          </a:fontRef>
+        </p:style>
+      </p:cxnSp>
+      <p:cxnSp>
+        <p:nvCxnSpPr>
+          <p:cNvPr id="103" name="直接连接符 102">
+            <a:extLst>
+              <a:ext uri="{FF2B5EF4-FFF2-40B4-BE49-F238E27FC236}">
+                <a16:creationId xmlns:a16="http://schemas.microsoft.com/office/drawing/2014/main" id="{1BCAFE91-02AB-38A6-D3CF-8BA8EECAB4AF}"/>
+              </a:ext>
+            </a:extLst>
+          </p:cNvPr>
+          <p:cNvCxnSpPr>
+            <a:cxnSpLocks/>
+            <a:stCxn id="98" idx="2"/>
+            <a:endCxn id="100" idx="0"/>
+          </p:cNvCxnSpPr>
+          <p:nvPr/>
+        </p:nvCxnSpPr>
+        <p:spPr>
+          <a:xfrm flipH="1">
+            <a:off x="9070028" y="3798332"/>
+            <a:ext cx="428322" cy="301829"/>
+          </a:xfrm>
+          <a:prstGeom prst="line">
+            <a:avLst/>
+          </a:prstGeom>
+        </p:spPr>
+        <p:style>
+          <a:lnRef idx="2">
+            <a:schemeClr val="dk1"/>
+          </a:lnRef>
+          <a:fillRef idx="0">
+            <a:schemeClr val="dk1"/>
+          </a:fillRef>
+          <a:effectRef idx="1">
+            <a:schemeClr val="dk1"/>
+          </a:effectRef>
+          <a:fontRef idx="minor">
+            <a:schemeClr val="tx1"/>
+          </a:fontRef>
+        </p:style>
+      </p:cxnSp>
+      <p:sp>
+        <p:nvSpPr>
+          <p:cNvPr id="104" name="文本框 103">
+            <a:extLst>
+              <a:ext uri="{FF2B5EF4-FFF2-40B4-BE49-F238E27FC236}">
+                <a16:creationId xmlns:a16="http://schemas.microsoft.com/office/drawing/2014/main" id="{9D700476-CD4D-D867-5067-F05ABE652AF4}"/>
+              </a:ext>
+            </a:extLst>
+          </p:cNvPr>
+          <p:cNvSpPr txBox="1"/>
+          <p:nvPr/>
+        </p:nvSpPr>
+        <p:spPr>
+          <a:xfrm>
+            <a:off x="9606255" y="4100161"/>
+            <a:ext cx="428322" cy="369332"/>
+          </a:xfrm>
+          <a:prstGeom prst="rect">
+            <a:avLst/>
+          </a:prstGeom>
+          <a:noFill/>
+        </p:spPr>
+        <p:txBody>
+          <a:bodyPr wrap="none" rtlCol="0">
+            <a:spAutoFit/>
+          </a:bodyPr>
+          <a:lstStyle/>
+          <a:p>
+            <a:r>
+              <a:rPr lang="en-US" altLang="zh-CN"/>
+              <a:t>40</a:t>
+            </a:r>
+            <a:endParaRPr lang="zh-CN" altLang="en-US"/>
+          </a:p>
+        </p:txBody>
+      </p:sp>
+      <p:sp>
+        <p:nvSpPr>
+          <p:cNvPr id="105" name="文本框 104">
+            <a:extLst>
+              <a:ext uri="{FF2B5EF4-FFF2-40B4-BE49-F238E27FC236}">
+                <a16:creationId xmlns:a16="http://schemas.microsoft.com/office/drawing/2014/main" id="{BC2F8CCA-0859-37D9-7614-09986E608C3C}"/>
+              </a:ext>
+            </a:extLst>
+          </p:cNvPr>
+          <p:cNvSpPr txBox="1"/>
+          <p:nvPr/>
+        </p:nvSpPr>
+        <p:spPr>
+          <a:xfrm>
+            <a:off x="10287526" y="4100161"/>
+            <a:ext cx="428322" cy="369332"/>
+          </a:xfrm>
+          <a:prstGeom prst="rect">
+            <a:avLst/>
+          </a:prstGeom>
+          <a:noFill/>
+        </p:spPr>
+        <p:txBody>
+          <a:bodyPr wrap="none" rtlCol="0">
+            <a:spAutoFit/>
+          </a:bodyPr>
+          <a:lstStyle/>
+          <a:p>
+            <a:r>
+              <a:rPr lang="en-US" altLang="zh-CN"/>
+              <a:t>11</a:t>
+            </a:r>
+            <a:endParaRPr lang="zh-CN" altLang="en-US"/>
+          </a:p>
+        </p:txBody>
+      </p:sp>
+      <p:cxnSp>
+        <p:nvCxnSpPr>
+          <p:cNvPr id="106" name="直接连接符 105">
+            <a:extLst>
+              <a:ext uri="{FF2B5EF4-FFF2-40B4-BE49-F238E27FC236}">
+                <a16:creationId xmlns:a16="http://schemas.microsoft.com/office/drawing/2014/main" id="{E0DC510E-D111-A6D9-A262-D56486452941}"/>
+              </a:ext>
+            </a:extLst>
+          </p:cNvPr>
+          <p:cNvCxnSpPr>
+            <a:cxnSpLocks/>
+            <a:stCxn id="98" idx="2"/>
+            <a:endCxn id="104" idx="0"/>
+          </p:cNvCxnSpPr>
+          <p:nvPr/>
+        </p:nvCxnSpPr>
+        <p:spPr>
+          <a:xfrm>
+            <a:off x="9498350" y="3798332"/>
+            <a:ext cx="322066" cy="301829"/>
+          </a:xfrm>
+          <a:prstGeom prst="line">
+            <a:avLst/>
+          </a:prstGeom>
+        </p:spPr>
+        <p:style>
+          <a:lnRef idx="2">
+            <a:schemeClr val="dk1"/>
+          </a:lnRef>
+          <a:fillRef idx="0">
+            <a:schemeClr val="dk1"/>
+          </a:fillRef>
+          <a:effectRef idx="1">
+            <a:schemeClr val="dk1"/>
+          </a:effectRef>
+          <a:fontRef idx="minor">
+            <a:schemeClr val="tx1"/>
+          </a:fontRef>
+        </p:style>
+      </p:cxnSp>
+      <p:cxnSp>
+        <p:nvCxnSpPr>
+          <p:cNvPr id="107" name="直接连接符 106">
+            <a:extLst>
+              <a:ext uri="{FF2B5EF4-FFF2-40B4-BE49-F238E27FC236}">
+                <a16:creationId xmlns:a16="http://schemas.microsoft.com/office/drawing/2014/main" id="{77E8B909-968A-BCBD-86ED-3E94942F4760}"/>
+              </a:ext>
+            </a:extLst>
+          </p:cNvPr>
+          <p:cNvCxnSpPr>
+            <a:cxnSpLocks/>
+            <a:stCxn id="99" idx="2"/>
+            <a:endCxn id="105" idx="0"/>
+          </p:cNvCxnSpPr>
+          <p:nvPr/>
+        </p:nvCxnSpPr>
+        <p:spPr>
+          <a:xfrm flipH="1">
+            <a:off x="10501687" y="3798332"/>
+            <a:ext cx="257903" cy="301829"/>
+          </a:xfrm>
+          <a:prstGeom prst="line">
+            <a:avLst/>
+          </a:prstGeom>
+        </p:spPr>
+        <p:style>
+          <a:lnRef idx="2">
+            <a:schemeClr val="dk1"/>
+          </a:lnRef>
+          <a:fillRef idx="0">
+            <a:schemeClr val="dk1"/>
+          </a:fillRef>
+          <a:effectRef idx="1">
+            <a:schemeClr val="dk1"/>
+          </a:effectRef>
+          <a:fontRef idx="minor">
+            <a:schemeClr val="tx1"/>
+          </a:fontRef>
+        </p:style>
+      </p:cxnSp>
+      <p:sp>
+        <p:nvSpPr>
+          <p:cNvPr id="108" name="文本框 107">
+            <a:extLst>
+              <a:ext uri="{FF2B5EF4-FFF2-40B4-BE49-F238E27FC236}">
+                <a16:creationId xmlns:a16="http://schemas.microsoft.com/office/drawing/2014/main" id="{5D206305-ACCA-9D3E-994E-C3DF65A9FE54}"/>
+              </a:ext>
+            </a:extLst>
+          </p:cNvPr>
+          <p:cNvSpPr txBox="1"/>
+          <p:nvPr/>
+        </p:nvSpPr>
+        <p:spPr>
+          <a:xfrm>
+            <a:off x="10818499" y="4100161"/>
+            <a:ext cx="428322" cy="369332"/>
+          </a:xfrm>
+          <a:prstGeom prst="rect">
+            <a:avLst/>
+          </a:prstGeom>
+          <a:noFill/>
+        </p:spPr>
+        <p:txBody>
+          <a:bodyPr wrap="none" rtlCol="0">
+            <a:spAutoFit/>
+          </a:bodyPr>
+          <a:lstStyle/>
+          <a:p>
+            <a:r>
+              <a:rPr lang="en-US" altLang="zh-CN"/>
+              <a:t>72</a:t>
+            </a:r>
+            <a:endParaRPr lang="zh-CN" altLang="en-US"/>
+          </a:p>
+        </p:txBody>
+      </p:sp>
+      <p:cxnSp>
+        <p:nvCxnSpPr>
+          <p:cNvPr id="109" name="直接连接符 108">
+            <a:extLst>
+              <a:ext uri="{FF2B5EF4-FFF2-40B4-BE49-F238E27FC236}">
+                <a16:creationId xmlns:a16="http://schemas.microsoft.com/office/drawing/2014/main" id="{49F41E64-AFA0-A20D-04B4-962B6FF9EAFE}"/>
+              </a:ext>
+            </a:extLst>
+          </p:cNvPr>
+          <p:cNvCxnSpPr>
+            <a:cxnSpLocks/>
+            <a:stCxn id="99" idx="2"/>
+            <a:endCxn id="108" idx="0"/>
+          </p:cNvCxnSpPr>
+          <p:nvPr/>
+        </p:nvCxnSpPr>
+        <p:spPr>
+          <a:xfrm>
+            <a:off x="10759590" y="3798332"/>
+            <a:ext cx="273070" cy="301829"/>
+          </a:xfrm>
+          <a:prstGeom prst="line">
+            <a:avLst/>
+          </a:prstGeom>
+        </p:spPr>
+        <p:style>
+          <a:lnRef idx="2">
+            <a:schemeClr val="dk1"/>
+          </a:lnRef>
+          <a:fillRef idx="0">
+            <a:schemeClr val="dk1"/>
+          </a:fillRef>
+          <a:effectRef idx="1">
+            <a:schemeClr val="dk1"/>
+          </a:effectRef>
+          <a:fontRef idx="minor">
+            <a:schemeClr val="tx1"/>
+          </a:fontRef>
+        </p:style>
+      </p:cxnSp>
+      <p:sp>
+        <p:nvSpPr>
+          <p:cNvPr id="110" name="文本框 109">
+            <a:extLst>
+              <a:ext uri="{FF2B5EF4-FFF2-40B4-BE49-F238E27FC236}">
+                <a16:creationId xmlns:a16="http://schemas.microsoft.com/office/drawing/2014/main" id="{07F194A6-D757-0165-7B7E-08A123175920}"/>
+              </a:ext>
+            </a:extLst>
+          </p:cNvPr>
+          <p:cNvSpPr txBox="1"/>
+          <p:nvPr/>
+        </p:nvSpPr>
+        <p:spPr>
+          <a:xfrm>
+            <a:off x="1765328" y="2156295"/>
+            <a:ext cx="869149" cy="400110"/>
+          </a:xfrm>
+          <a:prstGeom prst="rect">
+            <a:avLst/>
+          </a:prstGeom>
+          <a:noFill/>
+        </p:spPr>
+        <p:txBody>
+          <a:bodyPr wrap="none" rtlCol="0">
+            <a:spAutoFit/>
+          </a:bodyPr>
+          <a:lstStyle/>
+          <a:p>
+            <a:r>
+              <a:rPr lang="zh-CN" altLang="en-US" sz="2000" b="1"/>
+              <a:t>（</a:t>
+            </a:r>
+            <a:r>
+              <a:rPr lang="en-US" altLang="zh-CN" sz="2000" b="1"/>
+              <a:t>A</a:t>
+            </a:r>
+            <a:r>
+              <a:rPr lang="zh-CN" altLang="en-US" sz="2000" b="1"/>
+              <a:t>）</a:t>
+            </a:r>
+          </a:p>
+        </p:txBody>
+      </p:sp>
+      <p:sp>
+        <p:nvSpPr>
+          <p:cNvPr id="112" name="文本框 111">
+            <a:extLst>
+              <a:ext uri="{FF2B5EF4-FFF2-40B4-BE49-F238E27FC236}">
+                <a16:creationId xmlns:a16="http://schemas.microsoft.com/office/drawing/2014/main" id="{C24C4785-56DB-8A27-28F6-B147595DA1B0}"/>
+              </a:ext>
+            </a:extLst>
+          </p:cNvPr>
+          <p:cNvSpPr txBox="1"/>
+          <p:nvPr/>
+        </p:nvSpPr>
+        <p:spPr>
+          <a:xfrm>
+            <a:off x="4332024" y="2183323"/>
+            <a:ext cx="869149" cy="400110"/>
+          </a:xfrm>
+          <a:prstGeom prst="rect">
+            <a:avLst/>
+          </a:prstGeom>
+          <a:noFill/>
+        </p:spPr>
+        <p:txBody>
+          <a:bodyPr wrap="none" rtlCol="0">
+            <a:spAutoFit/>
+          </a:bodyPr>
+          <a:lstStyle/>
+          <a:p>
+            <a:r>
+              <a:rPr lang="zh-CN" altLang="en-US" sz="2000" b="1"/>
+              <a:t>（</a:t>
+            </a:r>
+            <a:r>
+              <a:rPr lang="en-US" altLang="zh-CN" sz="2000" b="1"/>
+              <a:t>B</a:t>
+            </a:r>
+            <a:r>
+              <a:rPr lang="zh-CN" altLang="en-US" sz="2000" b="1"/>
+              <a:t>）</a:t>
+            </a:r>
+          </a:p>
+        </p:txBody>
+      </p:sp>
+      <p:sp>
+        <p:nvSpPr>
+          <p:cNvPr id="114" name="文本框 113">
+            <a:extLst>
+              <a:ext uri="{FF2B5EF4-FFF2-40B4-BE49-F238E27FC236}">
+                <a16:creationId xmlns:a16="http://schemas.microsoft.com/office/drawing/2014/main" id="{2842B957-CBD7-D13D-20F9-F752F567F727}"/>
+              </a:ext>
+            </a:extLst>
+          </p:cNvPr>
+          <p:cNvSpPr txBox="1"/>
+          <p:nvPr/>
+        </p:nvSpPr>
+        <p:spPr>
+          <a:xfrm>
+            <a:off x="1754102" y="4571267"/>
+            <a:ext cx="830677" cy="400110"/>
+          </a:xfrm>
+          <a:prstGeom prst="rect">
+            <a:avLst/>
+          </a:prstGeom>
+          <a:noFill/>
+        </p:spPr>
+        <p:txBody>
+          <a:bodyPr wrap="none" rtlCol="0">
+            <a:spAutoFit/>
+          </a:bodyPr>
+          <a:lstStyle/>
+          <a:p>
+            <a:r>
+              <a:rPr lang="zh-CN" altLang="en-US" sz="2000" b="1"/>
+              <a:t>（</a:t>
+            </a:r>
+            <a:r>
+              <a:rPr lang="en-US" altLang="zh-CN" sz="2000" b="1"/>
+              <a:t>E</a:t>
+            </a:r>
+            <a:r>
+              <a:rPr lang="zh-CN" altLang="en-US" sz="2000" b="1"/>
+              <a:t>）</a:t>
+            </a:r>
+          </a:p>
+        </p:txBody>
+      </p:sp>
+      <p:sp>
+        <p:nvSpPr>
+          <p:cNvPr id="116" name="文本框 115">
+            <a:extLst>
+              <a:ext uri="{FF2B5EF4-FFF2-40B4-BE49-F238E27FC236}">
+                <a16:creationId xmlns:a16="http://schemas.microsoft.com/office/drawing/2014/main" id="{D94A2EFB-9259-389D-49B3-3B25F40DC0DC}"/>
+              </a:ext>
+            </a:extLst>
+          </p:cNvPr>
+          <p:cNvSpPr txBox="1"/>
+          <p:nvPr/>
+        </p:nvSpPr>
+        <p:spPr>
+          <a:xfrm>
+            <a:off x="4310017" y="4624585"/>
+            <a:ext cx="825867" cy="400110"/>
+          </a:xfrm>
+          <a:prstGeom prst="rect">
+            <a:avLst/>
+          </a:prstGeom>
+          <a:noFill/>
+        </p:spPr>
+        <p:txBody>
+          <a:bodyPr wrap="none" rtlCol="0">
+            <a:spAutoFit/>
+          </a:bodyPr>
+          <a:lstStyle/>
+          <a:p>
+            <a:r>
+              <a:rPr lang="zh-CN" altLang="en-US" sz="2000" b="1"/>
+              <a:t>（</a:t>
+            </a:r>
+            <a:r>
+              <a:rPr lang="en-US" altLang="zh-CN" sz="2000" b="1"/>
+              <a:t>F</a:t>
+            </a:r>
+            <a:r>
+              <a:rPr lang="zh-CN" altLang="en-US" sz="2000" b="1"/>
+              <a:t>）</a:t>
+            </a:r>
+          </a:p>
+        </p:txBody>
+      </p:sp>
+      <p:sp>
+        <p:nvSpPr>
+          <p:cNvPr id="119" name="文本框 118">
+            <a:extLst>
+              <a:ext uri="{FF2B5EF4-FFF2-40B4-BE49-F238E27FC236}">
+                <a16:creationId xmlns:a16="http://schemas.microsoft.com/office/drawing/2014/main" id="{D84918A5-8041-04AC-98F7-608505441515}"/>
+              </a:ext>
+            </a:extLst>
+          </p:cNvPr>
+          <p:cNvSpPr txBox="1"/>
+          <p:nvPr/>
+        </p:nvSpPr>
+        <p:spPr>
+          <a:xfrm>
+            <a:off x="6904266" y="2202637"/>
+            <a:ext cx="869149" cy="400110"/>
+          </a:xfrm>
+          <a:prstGeom prst="rect">
+            <a:avLst/>
+          </a:prstGeom>
+          <a:noFill/>
+        </p:spPr>
+        <p:txBody>
+          <a:bodyPr wrap="none" rtlCol="0">
+            <a:spAutoFit/>
+          </a:bodyPr>
+          <a:lstStyle/>
+          <a:p>
+            <a:r>
+              <a:rPr lang="zh-CN" altLang="en-US" sz="2000" b="1"/>
+              <a:t>（</a:t>
+            </a:r>
+            <a:r>
+              <a:rPr lang="en-US" altLang="zh-CN" sz="2000" b="1"/>
+              <a:t>C</a:t>
+            </a:r>
+            <a:r>
+              <a:rPr lang="zh-CN" altLang="en-US" sz="2000" b="1"/>
+              <a:t>）</a:t>
+            </a:r>
+          </a:p>
+        </p:txBody>
+      </p:sp>
+      <p:sp>
+        <p:nvSpPr>
+          <p:cNvPr id="121" name="文本框 120">
+            <a:extLst>
+              <a:ext uri="{FF2B5EF4-FFF2-40B4-BE49-F238E27FC236}">
+                <a16:creationId xmlns:a16="http://schemas.microsoft.com/office/drawing/2014/main" id="{B8CA9A32-587C-D060-A746-7F32ED77A690}"/>
+              </a:ext>
+            </a:extLst>
+          </p:cNvPr>
+          <p:cNvSpPr txBox="1"/>
+          <p:nvPr/>
+        </p:nvSpPr>
+        <p:spPr>
+          <a:xfrm>
+            <a:off x="9675919" y="2202637"/>
+            <a:ext cx="881973" cy="400110"/>
+          </a:xfrm>
+          <a:prstGeom prst="rect">
+            <a:avLst/>
+          </a:prstGeom>
+          <a:noFill/>
+        </p:spPr>
+        <p:txBody>
+          <a:bodyPr wrap="none" rtlCol="0">
+            <a:spAutoFit/>
+          </a:bodyPr>
+          <a:lstStyle/>
+          <a:p>
+            <a:r>
+              <a:rPr lang="zh-CN" altLang="en-US" sz="2000" b="1"/>
+              <a:t>（</a:t>
+            </a:r>
+            <a:r>
+              <a:rPr lang="en-US" altLang="zh-CN" sz="2000" b="1"/>
+              <a:t>D</a:t>
+            </a:r>
+            <a:r>
+              <a:rPr lang="zh-CN" altLang="en-US" sz="2000" b="1"/>
+              <a:t>）</a:t>
+            </a:r>
+          </a:p>
+        </p:txBody>
+      </p:sp>
+      <p:sp>
+        <p:nvSpPr>
+          <p:cNvPr id="123" name="文本框 122">
+            <a:extLst>
+              <a:ext uri="{FF2B5EF4-FFF2-40B4-BE49-F238E27FC236}">
+                <a16:creationId xmlns:a16="http://schemas.microsoft.com/office/drawing/2014/main" id="{4207E175-A862-ECAE-2E78-45346EC12EB1}"/>
+              </a:ext>
+            </a:extLst>
+          </p:cNvPr>
+          <p:cNvSpPr txBox="1"/>
+          <p:nvPr/>
+        </p:nvSpPr>
+        <p:spPr>
+          <a:xfrm>
+            <a:off x="6933361" y="4678639"/>
+            <a:ext cx="869149" cy="400110"/>
+          </a:xfrm>
+          <a:prstGeom prst="rect">
+            <a:avLst/>
+          </a:prstGeom>
+          <a:noFill/>
+        </p:spPr>
+        <p:txBody>
+          <a:bodyPr wrap="none" rtlCol="0">
+            <a:spAutoFit/>
+          </a:bodyPr>
+          <a:lstStyle/>
+          <a:p>
+            <a:r>
+              <a:rPr lang="zh-CN" altLang="en-US" sz="2000" b="1"/>
+              <a:t>（</a:t>
+            </a:r>
+            <a:r>
+              <a:rPr lang="en-US" altLang="zh-CN" sz="2000" b="1"/>
+              <a:t>G</a:t>
+            </a:r>
+            <a:r>
+              <a:rPr lang="zh-CN" altLang="en-US" sz="2000" b="1"/>
+              <a:t>）</a:t>
+            </a:r>
+          </a:p>
+        </p:txBody>
+      </p:sp>
+      <p:sp>
+        <p:nvSpPr>
+          <p:cNvPr id="125" name="文本框 124">
+            <a:extLst>
+              <a:ext uri="{FF2B5EF4-FFF2-40B4-BE49-F238E27FC236}">
+                <a16:creationId xmlns:a16="http://schemas.microsoft.com/office/drawing/2014/main" id="{4E686F16-3945-C426-317F-FAFFABB3FB51}"/>
+              </a:ext>
+            </a:extLst>
+          </p:cNvPr>
+          <p:cNvSpPr txBox="1"/>
+          <p:nvPr/>
+        </p:nvSpPr>
+        <p:spPr>
+          <a:xfrm>
+            <a:off x="9743854" y="4655364"/>
+            <a:ext cx="886781" cy="400110"/>
+          </a:xfrm>
+          <a:prstGeom prst="rect">
+            <a:avLst/>
+          </a:prstGeom>
+          <a:noFill/>
+        </p:spPr>
+        <p:txBody>
+          <a:bodyPr wrap="none" rtlCol="0">
+            <a:spAutoFit/>
+          </a:bodyPr>
+          <a:lstStyle/>
+          <a:p>
+            <a:r>
+              <a:rPr lang="zh-CN" altLang="en-US" sz="2000" b="1"/>
+              <a:t>（</a:t>
+            </a:r>
+            <a:r>
+              <a:rPr lang="en-US" altLang="zh-CN" sz="2000" b="1"/>
+              <a:t>H</a:t>
+            </a:r>
+            <a:r>
+              <a:rPr lang="zh-CN" altLang="en-US" sz="2000" b="1"/>
+              <a:t>）</a:t>
+            </a:r>
+          </a:p>
+        </p:txBody>
+      </p:sp>
     </p:spTree>
     <p:extLst>
       <p:ext uri="{BB962C8B-B14F-4D97-AF65-F5344CB8AC3E}">
@@ -44931,6 +48522,1251 @@
           <a:chExt cx="0" cy="0"/>
         </a:xfrm>
       </p:grpSpPr>
+      <p:sp>
+        <p:nvSpPr>
+          <p:cNvPr id="2" name="椭圆 1">
+            <a:extLst>
+              <a:ext uri="{FF2B5EF4-FFF2-40B4-BE49-F238E27FC236}">
+                <a16:creationId xmlns:a16="http://schemas.microsoft.com/office/drawing/2014/main" id="{6F8F882F-523C-918A-4411-0EC18F19768F}"/>
+              </a:ext>
+            </a:extLst>
+          </p:cNvPr>
+          <p:cNvSpPr/>
+          <p:nvPr/>
+        </p:nvSpPr>
+        <p:spPr>
+          <a:xfrm>
+            <a:off x="5839060" y="1390976"/>
+            <a:ext cx="333328" cy="333328"/>
+          </a:xfrm>
+          <a:prstGeom prst="ellipse">
+            <a:avLst/>
+          </a:prstGeom>
+        </p:spPr>
+        <p:style>
+          <a:lnRef idx="2">
+            <a:schemeClr val="dk1"/>
+          </a:lnRef>
+          <a:fillRef idx="1">
+            <a:schemeClr val="lt1"/>
+          </a:fillRef>
+          <a:effectRef idx="0">
+            <a:schemeClr val="dk1"/>
+          </a:effectRef>
+          <a:fontRef idx="minor">
+            <a:schemeClr val="dk1"/>
+          </a:fontRef>
+        </p:style>
+        <p:txBody>
+          <a:bodyPr rtlCol="0" anchor="ctr"/>
+          <a:lstStyle/>
+          <a:p>
+            <a:pPr algn="ctr"/>
+            <a:endParaRPr lang="zh-CN" altLang="en-US" sz="1600"/>
+          </a:p>
+        </p:txBody>
+      </p:sp>
+      <p:sp>
+        <p:nvSpPr>
+          <p:cNvPr id="3" name="椭圆 2">
+            <a:extLst>
+              <a:ext uri="{FF2B5EF4-FFF2-40B4-BE49-F238E27FC236}">
+                <a16:creationId xmlns:a16="http://schemas.microsoft.com/office/drawing/2014/main" id="{8855D9CE-3663-284D-2A00-9E8716BD36C3}"/>
+              </a:ext>
+            </a:extLst>
+          </p:cNvPr>
+          <p:cNvSpPr/>
+          <p:nvPr/>
+        </p:nvSpPr>
+        <p:spPr>
+          <a:xfrm>
+            <a:off x="4664997" y="2053894"/>
+            <a:ext cx="333328" cy="333328"/>
+          </a:xfrm>
+          <a:prstGeom prst="ellipse">
+            <a:avLst/>
+          </a:prstGeom>
+        </p:spPr>
+        <p:style>
+          <a:lnRef idx="2">
+            <a:schemeClr val="dk1"/>
+          </a:lnRef>
+          <a:fillRef idx="1">
+            <a:schemeClr val="lt1"/>
+          </a:fillRef>
+          <a:effectRef idx="0">
+            <a:schemeClr val="dk1"/>
+          </a:effectRef>
+          <a:fontRef idx="minor">
+            <a:schemeClr val="dk1"/>
+          </a:fontRef>
+        </p:style>
+        <p:txBody>
+          <a:bodyPr rtlCol="0" anchor="ctr"/>
+          <a:lstStyle/>
+          <a:p>
+            <a:pPr algn="ctr"/>
+            <a:endParaRPr lang="zh-CN" altLang="en-US" sz="1600"/>
+          </a:p>
+        </p:txBody>
+      </p:sp>
+      <p:cxnSp>
+        <p:nvCxnSpPr>
+          <p:cNvPr id="4" name="直接连接符 3">
+            <a:extLst>
+              <a:ext uri="{FF2B5EF4-FFF2-40B4-BE49-F238E27FC236}">
+                <a16:creationId xmlns:a16="http://schemas.microsoft.com/office/drawing/2014/main" id="{BAD1C9DE-6447-6BC7-9A4D-F4F5CBE0D05B}"/>
+              </a:ext>
+            </a:extLst>
+          </p:cNvPr>
+          <p:cNvCxnSpPr>
+            <a:cxnSpLocks/>
+            <a:stCxn id="20" idx="5"/>
+            <a:endCxn id="2" idx="1"/>
+          </p:cNvCxnSpPr>
+          <p:nvPr/>
+        </p:nvCxnSpPr>
+        <p:spPr>
+          <a:xfrm>
+            <a:off x="5348624" y="1059149"/>
+            <a:ext cx="539251" cy="380642"/>
+          </a:xfrm>
+          <a:prstGeom prst="line">
+            <a:avLst/>
+          </a:prstGeom>
+        </p:spPr>
+        <p:style>
+          <a:lnRef idx="2">
+            <a:schemeClr val="dk1"/>
+          </a:lnRef>
+          <a:fillRef idx="0">
+            <a:schemeClr val="dk1"/>
+          </a:fillRef>
+          <a:effectRef idx="1">
+            <a:schemeClr val="dk1"/>
+          </a:effectRef>
+          <a:fontRef idx="minor">
+            <a:schemeClr val="tx1"/>
+          </a:fontRef>
+        </p:style>
+      </p:cxnSp>
+      <p:cxnSp>
+        <p:nvCxnSpPr>
+          <p:cNvPr id="5" name="直接连接符 4">
+            <a:extLst>
+              <a:ext uri="{FF2B5EF4-FFF2-40B4-BE49-F238E27FC236}">
+                <a16:creationId xmlns:a16="http://schemas.microsoft.com/office/drawing/2014/main" id="{E2A0EA98-1078-AF2D-2640-5C8A33F7E222}"/>
+              </a:ext>
+            </a:extLst>
+          </p:cNvPr>
+          <p:cNvCxnSpPr>
+            <a:cxnSpLocks/>
+            <a:stCxn id="6" idx="5"/>
+            <a:endCxn id="3" idx="0"/>
+          </p:cNvCxnSpPr>
+          <p:nvPr/>
+        </p:nvCxnSpPr>
+        <p:spPr>
+          <a:xfrm>
+            <a:off x="4398236" y="1675489"/>
+            <a:ext cx="433425" cy="378405"/>
+          </a:xfrm>
+          <a:prstGeom prst="line">
+            <a:avLst/>
+          </a:prstGeom>
+        </p:spPr>
+        <p:style>
+          <a:lnRef idx="2">
+            <a:schemeClr val="dk1"/>
+          </a:lnRef>
+          <a:fillRef idx="0">
+            <a:schemeClr val="dk1"/>
+          </a:fillRef>
+          <a:effectRef idx="1">
+            <a:schemeClr val="dk1"/>
+          </a:effectRef>
+          <a:fontRef idx="minor">
+            <a:schemeClr val="tx1"/>
+          </a:fontRef>
+        </p:style>
+      </p:cxnSp>
+      <p:sp>
+        <p:nvSpPr>
+          <p:cNvPr id="6" name="椭圆 5">
+            <a:extLst>
+              <a:ext uri="{FF2B5EF4-FFF2-40B4-BE49-F238E27FC236}">
+                <a16:creationId xmlns:a16="http://schemas.microsoft.com/office/drawing/2014/main" id="{54A0CCC5-1599-A529-56EF-7CE50FDE4B5E}"/>
+              </a:ext>
+            </a:extLst>
+          </p:cNvPr>
+          <p:cNvSpPr/>
+          <p:nvPr/>
+        </p:nvSpPr>
+        <p:spPr>
+          <a:xfrm>
+            <a:off x="4113723" y="1390976"/>
+            <a:ext cx="333328" cy="333328"/>
+          </a:xfrm>
+          <a:prstGeom prst="ellipse">
+            <a:avLst/>
+          </a:prstGeom>
+          <a:ln>
+            <a:prstDash val="solid"/>
+          </a:ln>
+        </p:spPr>
+        <p:style>
+          <a:lnRef idx="2">
+            <a:schemeClr val="dk1"/>
+          </a:lnRef>
+          <a:fillRef idx="1">
+            <a:schemeClr val="lt1"/>
+          </a:fillRef>
+          <a:effectRef idx="0">
+            <a:schemeClr val="dk1"/>
+          </a:effectRef>
+          <a:fontRef idx="minor">
+            <a:schemeClr val="dk1"/>
+          </a:fontRef>
+        </p:style>
+        <p:txBody>
+          <a:bodyPr rtlCol="0" anchor="ctr"/>
+          <a:lstStyle/>
+          <a:p>
+            <a:pPr algn="ctr"/>
+            <a:endParaRPr lang="zh-CN" altLang="en-US" sz="1600"/>
+          </a:p>
+        </p:txBody>
+      </p:sp>
+      <p:sp>
+        <p:nvSpPr>
+          <p:cNvPr id="7" name="椭圆 6">
+            <a:extLst>
+              <a:ext uri="{FF2B5EF4-FFF2-40B4-BE49-F238E27FC236}">
+                <a16:creationId xmlns:a16="http://schemas.microsoft.com/office/drawing/2014/main" id="{2D9F7773-CD5B-E499-77DA-BC381687C9B4}"/>
+              </a:ext>
+            </a:extLst>
+          </p:cNvPr>
+          <p:cNvSpPr/>
+          <p:nvPr/>
+        </p:nvSpPr>
+        <p:spPr>
+          <a:xfrm>
+            <a:off x="3391321" y="2055398"/>
+            <a:ext cx="333328" cy="333328"/>
+          </a:xfrm>
+          <a:prstGeom prst="ellipse">
+            <a:avLst/>
+          </a:prstGeom>
+          <a:ln>
+            <a:prstDash val="solid"/>
+          </a:ln>
+        </p:spPr>
+        <p:style>
+          <a:lnRef idx="2">
+            <a:schemeClr val="dk1"/>
+          </a:lnRef>
+          <a:fillRef idx="1">
+            <a:schemeClr val="lt1"/>
+          </a:fillRef>
+          <a:effectRef idx="0">
+            <a:schemeClr val="dk1"/>
+          </a:effectRef>
+          <a:fontRef idx="minor">
+            <a:schemeClr val="dk1"/>
+          </a:fontRef>
+        </p:style>
+        <p:txBody>
+          <a:bodyPr rtlCol="0" anchor="ctr"/>
+          <a:lstStyle/>
+          <a:p>
+            <a:pPr algn="ctr"/>
+            <a:endParaRPr lang="zh-CN" altLang="en-US" sz="1600"/>
+          </a:p>
+        </p:txBody>
+      </p:sp>
+      <p:cxnSp>
+        <p:nvCxnSpPr>
+          <p:cNvPr id="8" name="直接连接符 7">
+            <a:extLst>
+              <a:ext uri="{FF2B5EF4-FFF2-40B4-BE49-F238E27FC236}">
+                <a16:creationId xmlns:a16="http://schemas.microsoft.com/office/drawing/2014/main" id="{554B9CE0-A710-67F4-F32B-A36B0B707202}"/>
+              </a:ext>
+            </a:extLst>
+          </p:cNvPr>
+          <p:cNvCxnSpPr>
+            <a:stCxn id="20" idx="3"/>
+            <a:endCxn id="6" idx="7"/>
+          </p:cNvCxnSpPr>
+          <p:nvPr/>
+        </p:nvCxnSpPr>
+        <p:spPr>
+          <a:xfrm flipH="1">
+            <a:off x="4398236" y="1059149"/>
+            <a:ext cx="714690" cy="380642"/>
+          </a:xfrm>
+          <a:prstGeom prst="line">
+            <a:avLst/>
+          </a:prstGeom>
+          <a:ln w="9525" cap="flat" cmpd="sng" algn="ctr">
+            <a:solidFill>
+              <a:schemeClr val="dk1"/>
+            </a:solidFill>
+            <a:prstDash val="solid"/>
+            <a:round/>
+            <a:headEnd type="none" w="med" len="med"/>
+            <a:tailEnd type="none" w="med" len="med"/>
+          </a:ln>
+        </p:spPr>
+        <p:style>
+          <a:lnRef idx="0">
+            <a:scrgbClr r="0" g="0" b="0"/>
+          </a:lnRef>
+          <a:fillRef idx="0">
+            <a:scrgbClr r="0" g="0" b="0"/>
+          </a:fillRef>
+          <a:effectRef idx="0">
+            <a:scrgbClr r="0" g="0" b="0"/>
+          </a:effectRef>
+          <a:fontRef idx="minor">
+            <a:schemeClr val="tx1"/>
+          </a:fontRef>
+        </p:style>
+      </p:cxnSp>
+      <p:cxnSp>
+        <p:nvCxnSpPr>
+          <p:cNvPr id="9" name="直接连接符 8">
+            <a:extLst>
+              <a:ext uri="{FF2B5EF4-FFF2-40B4-BE49-F238E27FC236}">
+                <a16:creationId xmlns:a16="http://schemas.microsoft.com/office/drawing/2014/main" id="{86704128-A49E-22FD-0122-357FB4B63931}"/>
+              </a:ext>
+            </a:extLst>
+          </p:cNvPr>
+          <p:cNvCxnSpPr>
+            <a:cxnSpLocks/>
+            <a:stCxn id="6" idx="3"/>
+            <a:endCxn id="7" idx="7"/>
+          </p:cNvCxnSpPr>
+          <p:nvPr/>
+        </p:nvCxnSpPr>
+        <p:spPr>
+          <a:xfrm flipH="1">
+            <a:off x="3675834" y="1675489"/>
+            <a:ext cx="486704" cy="428724"/>
+          </a:xfrm>
+          <a:prstGeom prst="line">
+            <a:avLst/>
+          </a:prstGeom>
+          <a:ln w="9525" cap="flat" cmpd="sng" algn="ctr">
+            <a:solidFill>
+              <a:schemeClr val="dk1"/>
+            </a:solidFill>
+            <a:prstDash val="solid"/>
+            <a:round/>
+            <a:headEnd type="none" w="med" len="med"/>
+            <a:tailEnd type="none" w="med" len="med"/>
+          </a:ln>
+        </p:spPr>
+        <p:style>
+          <a:lnRef idx="0">
+            <a:scrgbClr r="0" g="0" b="0"/>
+          </a:lnRef>
+          <a:fillRef idx="0">
+            <a:scrgbClr r="0" g="0" b="0"/>
+          </a:fillRef>
+          <a:effectRef idx="0">
+            <a:scrgbClr r="0" g="0" b="0"/>
+          </a:effectRef>
+          <a:fontRef idx="minor">
+            <a:schemeClr val="tx1"/>
+          </a:fontRef>
+        </p:style>
+      </p:cxnSp>
+      <p:sp>
+        <p:nvSpPr>
+          <p:cNvPr id="11" name="椭圆 10">
+            <a:extLst>
+              <a:ext uri="{FF2B5EF4-FFF2-40B4-BE49-F238E27FC236}">
+                <a16:creationId xmlns:a16="http://schemas.microsoft.com/office/drawing/2014/main" id="{625DFC07-B13B-0A38-8A12-1280E3B55730}"/>
+              </a:ext>
+            </a:extLst>
+          </p:cNvPr>
+          <p:cNvSpPr/>
+          <p:nvPr/>
+        </p:nvSpPr>
+        <p:spPr>
+          <a:xfrm>
+            <a:off x="6356023" y="2053894"/>
+            <a:ext cx="333328" cy="333328"/>
+          </a:xfrm>
+          <a:prstGeom prst="ellipse">
+            <a:avLst/>
+          </a:prstGeom>
+        </p:spPr>
+        <p:style>
+          <a:lnRef idx="2">
+            <a:schemeClr val="dk1"/>
+          </a:lnRef>
+          <a:fillRef idx="1">
+            <a:schemeClr val="lt1"/>
+          </a:fillRef>
+          <a:effectRef idx="0">
+            <a:schemeClr val="dk1"/>
+          </a:effectRef>
+          <a:fontRef idx="minor">
+            <a:schemeClr val="dk1"/>
+          </a:fontRef>
+        </p:style>
+        <p:txBody>
+          <a:bodyPr rtlCol="0" anchor="ctr"/>
+          <a:lstStyle/>
+          <a:p>
+            <a:pPr algn="ctr"/>
+            <a:endParaRPr lang="zh-CN" altLang="en-US" sz="1400"/>
+          </a:p>
+        </p:txBody>
+      </p:sp>
+      <p:cxnSp>
+        <p:nvCxnSpPr>
+          <p:cNvPr id="13" name="直接连接符 12">
+            <a:extLst>
+              <a:ext uri="{FF2B5EF4-FFF2-40B4-BE49-F238E27FC236}">
+                <a16:creationId xmlns:a16="http://schemas.microsoft.com/office/drawing/2014/main" id="{90A7DEF1-2228-3245-1C04-FDBFFC48E408}"/>
+              </a:ext>
+            </a:extLst>
+          </p:cNvPr>
+          <p:cNvCxnSpPr>
+            <a:stCxn id="2" idx="5"/>
+            <a:endCxn id="11" idx="1"/>
+          </p:cNvCxnSpPr>
+          <p:nvPr/>
+        </p:nvCxnSpPr>
+        <p:spPr>
+          <a:xfrm>
+            <a:off x="6123573" y="1675489"/>
+            <a:ext cx="281265" cy="427220"/>
+          </a:xfrm>
+          <a:prstGeom prst="line">
+            <a:avLst/>
+          </a:prstGeom>
+        </p:spPr>
+        <p:style>
+          <a:lnRef idx="2">
+            <a:schemeClr val="dk1"/>
+          </a:lnRef>
+          <a:fillRef idx="0">
+            <a:schemeClr val="dk1"/>
+          </a:fillRef>
+          <a:effectRef idx="1">
+            <a:schemeClr val="dk1"/>
+          </a:effectRef>
+          <a:fontRef idx="minor">
+            <a:schemeClr val="tx1"/>
+          </a:fontRef>
+        </p:style>
+      </p:cxnSp>
+      <p:sp>
+        <p:nvSpPr>
+          <p:cNvPr id="14" name="椭圆 13">
+            <a:extLst>
+              <a:ext uri="{FF2B5EF4-FFF2-40B4-BE49-F238E27FC236}">
+                <a16:creationId xmlns:a16="http://schemas.microsoft.com/office/drawing/2014/main" id="{11CF3BB1-8CB9-72DA-4205-2BCDA6485BBB}"/>
+              </a:ext>
+            </a:extLst>
+          </p:cNvPr>
+          <p:cNvSpPr/>
+          <p:nvPr/>
+        </p:nvSpPr>
+        <p:spPr>
+          <a:xfrm>
+            <a:off x="2881569" y="2791875"/>
+            <a:ext cx="333328" cy="333328"/>
+          </a:xfrm>
+          <a:prstGeom prst="ellipse">
+            <a:avLst/>
+          </a:prstGeom>
+          <a:ln>
+            <a:prstDash val="solid"/>
+          </a:ln>
+        </p:spPr>
+        <p:style>
+          <a:lnRef idx="2">
+            <a:schemeClr val="dk1"/>
+          </a:lnRef>
+          <a:fillRef idx="1">
+            <a:schemeClr val="lt1"/>
+          </a:fillRef>
+          <a:effectRef idx="0">
+            <a:schemeClr val="dk1"/>
+          </a:effectRef>
+          <a:fontRef idx="minor">
+            <a:schemeClr val="dk1"/>
+          </a:fontRef>
+        </p:style>
+        <p:txBody>
+          <a:bodyPr rtlCol="0" anchor="ctr"/>
+          <a:lstStyle/>
+          <a:p>
+            <a:pPr algn="ctr"/>
+            <a:endParaRPr lang="zh-CN" altLang="en-US" sz="1600"/>
+          </a:p>
+        </p:txBody>
+      </p:sp>
+      <p:cxnSp>
+        <p:nvCxnSpPr>
+          <p:cNvPr id="15" name="直接连接符 14">
+            <a:extLst>
+              <a:ext uri="{FF2B5EF4-FFF2-40B4-BE49-F238E27FC236}">
+                <a16:creationId xmlns:a16="http://schemas.microsoft.com/office/drawing/2014/main" id="{6FEC8D91-02D9-4A75-B907-A63EBCDBEB8B}"/>
+              </a:ext>
+            </a:extLst>
+          </p:cNvPr>
+          <p:cNvCxnSpPr>
+            <a:stCxn id="7" idx="3"/>
+            <a:endCxn id="14" idx="0"/>
+          </p:cNvCxnSpPr>
+          <p:nvPr/>
+        </p:nvCxnSpPr>
+        <p:spPr>
+          <a:xfrm flipH="1">
+            <a:off x="3048233" y="2339911"/>
+            <a:ext cx="391903" cy="451964"/>
+          </a:xfrm>
+          <a:prstGeom prst="line">
+            <a:avLst/>
+          </a:prstGeom>
+        </p:spPr>
+        <p:style>
+          <a:lnRef idx="2">
+            <a:schemeClr val="dk1"/>
+          </a:lnRef>
+          <a:fillRef idx="0">
+            <a:schemeClr val="dk1"/>
+          </a:fillRef>
+          <a:effectRef idx="1">
+            <a:schemeClr val="dk1"/>
+          </a:effectRef>
+          <a:fontRef idx="minor">
+            <a:schemeClr val="tx1"/>
+          </a:fontRef>
+        </p:style>
+      </p:cxnSp>
+      <p:sp>
+        <p:nvSpPr>
+          <p:cNvPr id="16" name="椭圆 15">
+            <a:extLst>
+              <a:ext uri="{FF2B5EF4-FFF2-40B4-BE49-F238E27FC236}">
+                <a16:creationId xmlns:a16="http://schemas.microsoft.com/office/drawing/2014/main" id="{0BA05B54-86C2-F271-35BB-B28379742990}"/>
+              </a:ext>
+            </a:extLst>
+          </p:cNvPr>
+          <p:cNvSpPr/>
+          <p:nvPr/>
+        </p:nvSpPr>
+        <p:spPr>
+          <a:xfrm>
+            <a:off x="5424369" y="2053894"/>
+            <a:ext cx="333328" cy="333328"/>
+          </a:xfrm>
+          <a:prstGeom prst="ellipse">
+            <a:avLst/>
+          </a:prstGeom>
+        </p:spPr>
+        <p:style>
+          <a:lnRef idx="2">
+            <a:schemeClr val="dk1"/>
+          </a:lnRef>
+          <a:fillRef idx="1">
+            <a:schemeClr val="lt1"/>
+          </a:fillRef>
+          <a:effectRef idx="0">
+            <a:schemeClr val="dk1"/>
+          </a:effectRef>
+          <a:fontRef idx="minor">
+            <a:schemeClr val="dk1"/>
+          </a:fontRef>
+        </p:style>
+        <p:txBody>
+          <a:bodyPr rtlCol="0" anchor="ctr"/>
+          <a:lstStyle/>
+          <a:p>
+            <a:pPr algn="ctr"/>
+            <a:endParaRPr lang="zh-CN" altLang="en-US" sz="1400"/>
+          </a:p>
+        </p:txBody>
+      </p:sp>
+      <p:cxnSp>
+        <p:nvCxnSpPr>
+          <p:cNvPr id="17" name="直接连接符 16">
+            <a:extLst>
+              <a:ext uri="{FF2B5EF4-FFF2-40B4-BE49-F238E27FC236}">
+                <a16:creationId xmlns:a16="http://schemas.microsoft.com/office/drawing/2014/main" id="{63738F79-3FBC-3095-3A6E-A23EA43F093D}"/>
+              </a:ext>
+            </a:extLst>
+          </p:cNvPr>
+          <p:cNvCxnSpPr>
+            <a:stCxn id="2" idx="3"/>
+            <a:endCxn id="16" idx="0"/>
+          </p:cNvCxnSpPr>
+          <p:nvPr/>
+        </p:nvCxnSpPr>
+        <p:spPr>
+          <a:xfrm flipH="1">
+            <a:off x="5591033" y="1675489"/>
+            <a:ext cx="296842" cy="378405"/>
+          </a:xfrm>
+          <a:prstGeom prst="line">
+            <a:avLst/>
+          </a:prstGeom>
+        </p:spPr>
+        <p:style>
+          <a:lnRef idx="2">
+            <a:schemeClr val="dk1"/>
+          </a:lnRef>
+          <a:fillRef idx="0">
+            <a:schemeClr val="dk1"/>
+          </a:fillRef>
+          <a:effectRef idx="1">
+            <a:schemeClr val="dk1"/>
+          </a:effectRef>
+          <a:fontRef idx="minor">
+            <a:schemeClr val="tx1"/>
+          </a:fontRef>
+        </p:style>
+      </p:cxnSp>
+      <p:sp>
+        <p:nvSpPr>
+          <p:cNvPr id="18" name="椭圆 17">
+            <a:extLst>
+              <a:ext uri="{FF2B5EF4-FFF2-40B4-BE49-F238E27FC236}">
+                <a16:creationId xmlns:a16="http://schemas.microsoft.com/office/drawing/2014/main" id="{E7DC01F0-27E5-E1E2-D57F-F33C57048BFB}"/>
+              </a:ext>
+            </a:extLst>
+          </p:cNvPr>
+          <p:cNvSpPr/>
+          <p:nvPr/>
+        </p:nvSpPr>
+        <p:spPr>
+          <a:xfrm>
+            <a:off x="3702674" y="2797130"/>
+            <a:ext cx="333328" cy="333328"/>
+          </a:xfrm>
+          <a:prstGeom prst="ellipse">
+            <a:avLst/>
+          </a:prstGeom>
+          <a:ln>
+            <a:prstDash val="solid"/>
+          </a:ln>
+        </p:spPr>
+        <p:style>
+          <a:lnRef idx="2">
+            <a:schemeClr val="dk1"/>
+          </a:lnRef>
+          <a:fillRef idx="1">
+            <a:schemeClr val="lt1"/>
+          </a:fillRef>
+          <a:effectRef idx="0">
+            <a:schemeClr val="dk1"/>
+          </a:effectRef>
+          <a:fontRef idx="minor">
+            <a:schemeClr val="dk1"/>
+          </a:fontRef>
+        </p:style>
+        <p:txBody>
+          <a:bodyPr rtlCol="0" anchor="ctr"/>
+          <a:lstStyle/>
+          <a:p>
+            <a:pPr algn="ctr"/>
+            <a:endParaRPr lang="zh-CN" altLang="en-US" sz="1600"/>
+          </a:p>
+        </p:txBody>
+      </p:sp>
+      <p:cxnSp>
+        <p:nvCxnSpPr>
+          <p:cNvPr id="19" name="直接连接符 18">
+            <a:extLst>
+              <a:ext uri="{FF2B5EF4-FFF2-40B4-BE49-F238E27FC236}">
+                <a16:creationId xmlns:a16="http://schemas.microsoft.com/office/drawing/2014/main" id="{841F2E17-F010-06A2-DE46-E8B29BACF78A}"/>
+              </a:ext>
+            </a:extLst>
+          </p:cNvPr>
+          <p:cNvCxnSpPr>
+            <a:stCxn id="7" idx="5"/>
+            <a:endCxn id="18" idx="0"/>
+          </p:cNvCxnSpPr>
+          <p:nvPr/>
+        </p:nvCxnSpPr>
+        <p:spPr>
+          <a:xfrm>
+            <a:off x="3675834" y="2339911"/>
+            <a:ext cx="193504" cy="457219"/>
+          </a:xfrm>
+          <a:prstGeom prst="line">
+            <a:avLst/>
+          </a:prstGeom>
+        </p:spPr>
+        <p:style>
+          <a:lnRef idx="2">
+            <a:schemeClr val="dk1"/>
+          </a:lnRef>
+          <a:fillRef idx="0">
+            <a:schemeClr val="dk1"/>
+          </a:fillRef>
+          <a:effectRef idx="1">
+            <a:schemeClr val="dk1"/>
+          </a:effectRef>
+          <a:fontRef idx="minor">
+            <a:schemeClr val="tx1"/>
+          </a:fontRef>
+        </p:style>
+      </p:cxnSp>
+      <p:sp>
+        <p:nvSpPr>
+          <p:cNvPr id="20" name="椭圆 19">
+            <a:extLst>
+              <a:ext uri="{FF2B5EF4-FFF2-40B4-BE49-F238E27FC236}">
+                <a16:creationId xmlns:a16="http://schemas.microsoft.com/office/drawing/2014/main" id="{62D984E9-DB8B-8E97-3BCB-1F479A21EDC8}"/>
+              </a:ext>
+            </a:extLst>
+          </p:cNvPr>
+          <p:cNvSpPr/>
+          <p:nvPr/>
+        </p:nvSpPr>
+        <p:spPr>
+          <a:xfrm>
+            <a:off x="5064111" y="774636"/>
+            <a:ext cx="333328" cy="333328"/>
+          </a:xfrm>
+          <a:prstGeom prst="ellipse">
+            <a:avLst/>
+          </a:prstGeom>
+        </p:spPr>
+        <p:style>
+          <a:lnRef idx="2">
+            <a:schemeClr val="dk1"/>
+          </a:lnRef>
+          <a:fillRef idx="1">
+            <a:schemeClr val="lt1"/>
+          </a:fillRef>
+          <a:effectRef idx="0">
+            <a:schemeClr val="dk1"/>
+          </a:effectRef>
+          <a:fontRef idx="minor">
+            <a:schemeClr val="dk1"/>
+          </a:fontRef>
+        </p:style>
+        <p:txBody>
+          <a:bodyPr rtlCol="0" anchor="ctr"/>
+          <a:lstStyle/>
+          <a:p>
+            <a:pPr algn="ctr"/>
+            <a:endParaRPr lang="zh-CN" altLang="en-US" sz="1600"/>
+          </a:p>
+        </p:txBody>
+      </p:sp>
+      <p:sp>
+        <p:nvSpPr>
+          <p:cNvPr id="21" name="文本框 20">
+            <a:extLst>
+              <a:ext uri="{FF2B5EF4-FFF2-40B4-BE49-F238E27FC236}">
+                <a16:creationId xmlns:a16="http://schemas.microsoft.com/office/drawing/2014/main" id="{6BD0AA2A-A0FD-CDD9-71F0-A61A5121AA8D}"/>
+              </a:ext>
+            </a:extLst>
+          </p:cNvPr>
+          <p:cNvSpPr txBox="1"/>
+          <p:nvPr/>
+        </p:nvSpPr>
+        <p:spPr>
+          <a:xfrm>
+            <a:off x="4142756" y="1388363"/>
+            <a:ext cx="399468" cy="338554"/>
+          </a:xfrm>
+          <a:prstGeom prst="rect">
+            <a:avLst/>
+          </a:prstGeom>
+          <a:noFill/>
+        </p:spPr>
+        <p:txBody>
+          <a:bodyPr wrap="square" rtlCol="0">
+            <a:spAutoFit/>
+          </a:bodyPr>
+          <a:lstStyle/>
+          <a:p>
+            <a:r>
+              <a:rPr lang="en-US" altLang="zh-CN" sz="1600"/>
+              <a:t>9</a:t>
+            </a:r>
+            <a:endParaRPr lang="zh-CN" altLang="en-US" sz="1600"/>
+          </a:p>
+        </p:txBody>
+      </p:sp>
+      <p:sp>
+        <p:nvSpPr>
+          <p:cNvPr id="22" name="文本框 21">
+            <a:extLst>
+              <a:ext uri="{FF2B5EF4-FFF2-40B4-BE49-F238E27FC236}">
+                <a16:creationId xmlns:a16="http://schemas.microsoft.com/office/drawing/2014/main" id="{56555EDB-6E84-0AD7-A8F3-8A99D54A4D71}"/>
+              </a:ext>
+            </a:extLst>
+          </p:cNvPr>
+          <p:cNvSpPr txBox="1"/>
+          <p:nvPr/>
+        </p:nvSpPr>
+        <p:spPr>
+          <a:xfrm>
+            <a:off x="6380739" y="2043014"/>
+            <a:ext cx="292068" cy="338554"/>
+          </a:xfrm>
+          <a:prstGeom prst="rect">
+            <a:avLst/>
+          </a:prstGeom>
+          <a:noFill/>
+        </p:spPr>
+        <p:txBody>
+          <a:bodyPr wrap="none" rtlCol="0">
+            <a:spAutoFit/>
+          </a:bodyPr>
+          <a:lstStyle/>
+          <a:p>
+            <a:r>
+              <a:rPr lang="en-US" altLang="zh-CN" sz="1600"/>
+              <a:t>4</a:t>
+            </a:r>
+            <a:endParaRPr lang="zh-CN" altLang="en-US" sz="1600"/>
+          </a:p>
+        </p:txBody>
+      </p:sp>
+      <p:sp>
+        <p:nvSpPr>
+          <p:cNvPr id="23" name="文本框 22">
+            <a:extLst>
+              <a:ext uri="{FF2B5EF4-FFF2-40B4-BE49-F238E27FC236}">
+                <a16:creationId xmlns:a16="http://schemas.microsoft.com/office/drawing/2014/main" id="{F3D3972F-B4C6-06AA-FC8D-1686756C9D61}"/>
+              </a:ext>
+            </a:extLst>
+          </p:cNvPr>
+          <p:cNvSpPr txBox="1"/>
+          <p:nvPr/>
+        </p:nvSpPr>
+        <p:spPr>
+          <a:xfrm>
+            <a:off x="3426825" y="2043932"/>
+            <a:ext cx="292068" cy="338554"/>
+          </a:xfrm>
+          <a:prstGeom prst="rect">
+            <a:avLst/>
+          </a:prstGeom>
+          <a:noFill/>
+        </p:spPr>
+        <p:txBody>
+          <a:bodyPr wrap="none" rtlCol="0">
+            <a:spAutoFit/>
+          </a:bodyPr>
+          <a:lstStyle/>
+          <a:p>
+            <a:r>
+              <a:rPr lang="en-US" altLang="zh-CN" sz="1600"/>
+              <a:t>4</a:t>
+            </a:r>
+            <a:endParaRPr lang="zh-CN" altLang="en-US" sz="1600"/>
+          </a:p>
+        </p:txBody>
+      </p:sp>
+      <p:sp>
+        <p:nvSpPr>
+          <p:cNvPr id="24" name="文本框 23">
+            <a:extLst>
+              <a:ext uri="{FF2B5EF4-FFF2-40B4-BE49-F238E27FC236}">
+                <a16:creationId xmlns:a16="http://schemas.microsoft.com/office/drawing/2014/main" id="{AF8115AF-D4F2-2B7D-E323-855D894F1716}"/>
+              </a:ext>
+            </a:extLst>
+          </p:cNvPr>
+          <p:cNvSpPr txBox="1"/>
+          <p:nvPr/>
+        </p:nvSpPr>
+        <p:spPr>
+          <a:xfrm>
+            <a:off x="3707202" y="2786649"/>
+            <a:ext cx="292068" cy="338554"/>
+          </a:xfrm>
+          <a:prstGeom prst="rect">
+            <a:avLst/>
+          </a:prstGeom>
+          <a:noFill/>
+        </p:spPr>
+        <p:txBody>
+          <a:bodyPr wrap="none" rtlCol="0">
+            <a:spAutoFit/>
+          </a:bodyPr>
+          <a:lstStyle/>
+          <a:p>
+            <a:r>
+              <a:rPr lang="en-US" altLang="zh-CN" sz="1600"/>
+              <a:t>1</a:t>
+            </a:r>
+            <a:endParaRPr lang="zh-CN" altLang="en-US" sz="1600"/>
+          </a:p>
+        </p:txBody>
+      </p:sp>
+      <p:sp>
+        <p:nvSpPr>
+          <p:cNvPr id="25" name="文本框 24">
+            <a:extLst>
+              <a:ext uri="{FF2B5EF4-FFF2-40B4-BE49-F238E27FC236}">
+                <a16:creationId xmlns:a16="http://schemas.microsoft.com/office/drawing/2014/main" id="{CAAF1AD8-F38F-CE03-8A6B-3A74869EC421}"/>
+              </a:ext>
+            </a:extLst>
+          </p:cNvPr>
+          <p:cNvSpPr txBox="1"/>
+          <p:nvPr/>
+        </p:nvSpPr>
+        <p:spPr>
+          <a:xfrm>
+            <a:off x="2891472" y="2795708"/>
+            <a:ext cx="292068" cy="338554"/>
+          </a:xfrm>
+          <a:prstGeom prst="rect">
+            <a:avLst/>
+          </a:prstGeom>
+          <a:noFill/>
+        </p:spPr>
+        <p:txBody>
+          <a:bodyPr wrap="none" rtlCol="0">
+            <a:spAutoFit/>
+          </a:bodyPr>
+          <a:lstStyle/>
+          <a:p>
+            <a:r>
+              <a:rPr lang="en-US" altLang="zh-CN" sz="1600"/>
+              <a:t>3</a:t>
+            </a:r>
+            <a:endParaRPr lang="zh-CN" altLang="en-US" sz="1600"/>
+          </a:p>
+        </p:txBody>
+      </p:sp>
+      <p:sp>
+        <p:nvSpPr>
+          <p:cNvPr id="26" name="文本框 25">
+            <a:extLst>
+              <a:ext uri="{FF2B5EF4-FFF2-40B4-BE49-F238E27FC236}">
+                <a16:creationId xmlns:a16="http://schemas.microsoft.com/office/drawing/2014/main" id="{6739AB60-23F2-D095-E670-F6FC0CB73A73}"/>
+              </a:ext>
+            </a:extLst>
+          </p:cNvPr>
+          <p:cNvSpPr txBox="1"/>
+          <p:nvPr/>
+        </p:nvSpPr>
+        <p:spPr>
+          <a:xfrm>
+            <a:off x="4675923" y="2043014"/>
+            <a:ext cx="292068" cy="338554"/>
+          </a:xfrm>
+          <a:prstGeom prst="rect">
+            <a:avLst/>
+          </a:prstGeom>
+          <a:noFill/>
+        </p:spPr>
+        <p:txBody>
+          <a:bodyPr wrap="none" rtlCol="0">
+            <a:spAutoFit/>
+          </a:bodyPr>
+          <a:lstStyle/>
+          <a:p>
+            <a:r>
+              <a:rPr lang="en-US" altLang="zh-CN" sz="1600"/>
+              <a:t>5</a:t>
+            </a:r>
+            <a:endParaRPr lang="zh-CN" altLang="en-US" sz="1600"/>
+          </a:p>
+        </p:txBody>
+      </p:sp>
+      <p:sp>
+        <p:nvSpPr>
+          <p:cNvPr id="27" name="文本框 26">
+            <a:extLst>
+              <a:ext uri="{FF2B5EF4-FFF2-40B4-BE49-F238E27FC236}">
+                <a16:creationId xmlns:a16="http://schemas.microsoft.com/office/drawing/2014/main" id="{B6E6E245-6B8D-EE92-1C93-C0692CF1ADAE}"/>
+              </a:ext>
+            </a:extLst>
+          </p:cNvPr>
+          <p:cNvSpPr txBox="1"/>
+          <p:nvPr/>
+        </p:nvSpPr>
+        <p:spPr>
+          <a:xfrm>
+            <a:off x="5859690" y="1402848"/>
+            <a:ext cx="292068" cy="338554"/>
+          </a:xfrm>
+          <a:prstGeom prst="rect">
+            <a:avLst/>
+          </a:prstGeom>
+          <a:noFill/>
+        </p:spPr>
+        <p:txBody>
+          <a:bodyPr wrap="none" rtlCol="0">
+            <a:spAutoFit/>
+          </a:bodyPr>
+          <a:lstStyle/>
+          <a:p>
+            <a:r>
+              <a:rPr lang="en-US" altLang="zh-CN" sz="1600"/>
+              <a:t>7</a:t>
+            </a:r>
+            <a:endParaRPr lang="zh-CN" altLang="en-US" sz="1600"/>
+          </a:p>
+        </p:txBody>
+      </p:sp>
+      <p:sp>
+        <p:nvSpPr>
+          <p:cNvPr id="28" name="文本框 27">
+            <a:extLst>
+              <a:ext uri="{FF2B5EF4-FFF2-40B4-BE49-F238E27FC236}">
+                <a16:creationId xmlns:a16="http://schemas.microsoft.com/office/drawing/2014/main" id="{913FB1E7-DA93-00CC-E7D2-7E2CBD418225}"/>
+              </a:ext>
+            </a:extLst>
+          </p:cNvPr>
+          <p:cNvSpPr txBox="1"/>
+          <p:nvPr/>
+        </p:nvSpPr>
+        <p:spPr>
+          <a:xfrm>
+            <a:off x="5036263" y="762320"/>
+            <a:ext cx="399468" cy="338554"/>
+          </a:xfrm>
+          <a:prstGeom prst="rect">
+            <a:avLst/>
+          </a:prstGeom>
+          <a:noFill/>
+        </p:spPr>
+        <p:txBody>
+          <a:bodyPr wrap="none" rtlCol="0">
+            <a:spAutoFit/>
+          </a:bodyPr>
+          <a:lstStyle/>
+          <a:p>
+            <a:r>
+              <a:rPr lang="en-US" altLang="zh-CN" sz="1600"/>
+              <a:t>16</a:t>
+            </a:r>
+            <a:endParaRPr lang="zh-CN" altLang="en-US" sz="1600"/>
+          </a:p>
+        </p:txBody>
+      </p:sp>
+      <p:sp>
+        <p:nvSpPr>
+          <p:cNvPr id="30" name="文本框 29">
+            <a:extLst>
+              <a:ext uri="{FF2B5EF4-FFF2-40B4-BE49-F238E27FC236}">
+                <a16:creationId xmlns:a16="http://schemas.microsoft.com/office/drawing/2014/main" id="{55CC5312-7572-4FCB-8399-DEEFAE96258E}"/>
+              </a:ext>
+            </a:extLst>
+          </p:cNvPr>
+          <p:cNvSpPr txBox="1"/>
+          <p:nvPr/>
+        </p:nvSpPr>
+        <p:spPr>
+          <a:xfrm>
+            <a:off x="5438084" y="2043014"/>
+            <a:ext cx="292068" cy="338554"/>
+          </a:xfrm>
+          <a:prstGeom prst="rect">
+            <a:avLst/>
+          </a:prstGeom>
+          <a:noFill/>
+        </p:spPr>
+        <p:txBody>
+          <a:bodyPr wrap="none" rtlCol="0">
+            <a:spAutoFit/>
+          </a:bodyPr>
+          <a:lstStyle/>
+          <a:p>
+            <a:r>
+              <a:rPr lang="en-US" altLang="zh-CN" sz="1600"/>
+              <a:t>3</a:t>
+            </a:r>
+            <a:endParaRPr lang="zh-CN" altLang="en-US" sz="1600"/>
+          </a:p>
+        </p:txBody>
+      </p:sp>
+      <p:sp>
+        <p:nvSpPr>
+          <p:cNvPr id="31" name="文本框 30">
+            <a:extLst>
+              <a:ext uri="{FF2B5EF4-FFF2-40B4-BE49-F238E27FC236}">
+                <a16:creationId xmlns:a16="http://schemas.microsoft.com/office/drawing/2014/main" id="{52612B96-E84D-597D-D470-EE30FC294304}"/>
+              </a:ext>
+            </a:extLst>
+          </p:cNvPr>
+          <p:cNvSpPr txBox="1"/>
+          <p:nvPr/>
+        </p:nvSpPr>
+        <p:spPr>
+          <a:xfrm>
+            <a:off x="2784259" y="3125203"/>
+            <a:ext cx="332142" cy="369332"/>
+          </a:xfrm>
+          <a:prstGeom prst="rect">
+            <a:avLst/>
+          </a:prstGeom>
+          <a:noFill/>
+        </p:spPr>
+        <p:txBody>
+          <a:bodyPr wrap="none" rtlCol="0">
+            <a:spAutoFit/>
+          </a:bodyPr>
+          <a:lstStyle/>
+          <a:p>
+            <a:r>
+              <a:rPr lang="en-US" altLang="zh-CN"/>
+              <a:t>A</a:t>
+            </a:r>
+            <a:endParaRPr lang="zh-CN" altLang="en-US"/>
+          </a:p>
+        </p:txBody>
+      </p:sp>
+      <p:sp>
+        <p:nvSpPr>
+          <p:cNvPr id="32" name="文本框 31">
+            <a:extLst>
+              <a:ext uri="{FF2B5EF4-FFF2-40B4-BE49-F238E27FC236}">
+                <a16:creationId xmlns:a16="http://schemas.microsoft.com/office/drawing/2014/main" id="{9B65E228-222D-1F1C-8F63-37FD5F61B2ED}"/>
+              </a:ext>
+            </a:extLst>
+          </p:cNvPr>
+          <p:cNvSpPr txBox="1"/>
+          <p:nvPr/>
+        </p:nvSpPr>
+        <p:spPr>
+          <a:xfrm>
+            <a:off x="3642241" y="3120715"/>
+            <a:ext cx="312906" cy="369332"/>
+          </a:xfrm>
+          <a:prstGeom prst="rect">
+            <a:avLst/>
+          </a:prstGeom>
+          <a:noFill/>
+        </p:spPr>
+        <p:txBody>
+          <a:bodyPr wrap="none" rtlCol="0">
+            <a:spAutoFit/>
+          </a:bodyPr>
+          <a:lstStyle/>
+          <a:p>
+            <a:r>
+              <a:rPr lang="en-US" altLang="zh-CN"/>
+              <a:t>B</a:t>
+            </a:r>
+            <a:endParaRPr lang="zh-CN" altLang="en-US"/>
+          </a:p>
+        </p:txBody>
+      </p:sp>
+      <p:sp>
+        <p:nvSpPr>
+          <p:cNvPr id="33" name="文本框 32">
+            <a:extLst>
+              <a:ext uri="{FF2B5EF4-FFF2-40B4-BE49-F238E27FC236}">
+                <a16:creationId xmlns:a16="http://schemas.microsoft.com/office/drawing/2014/main" id="{7E40B71C-09D7-46DF-53EB-FCFD3BCF4D44}"/>
+              </a:ext>
+            </a:extLst>
+          </p:cNvPr>
+          <p:cNvSpPr txBox="1"/>
+          <p:nvPr/>
+        </p:nvSpPr>
+        <p:spPr>
+          <a:xfrm>
+            <a:off x="4490044" y="2398102"/>
+            <a:ext cx="327334" cy="369332"/>
+          </a:xfrm>
+          <a:prstGeom prst="rect">
+            <a:avLst/>
+          </a:prstGeom>
+          <a:noFill/>
+        </p:spPr>
+        <p:txBody>
+          <a:bodyPr wrap="none" rtlCol="0">
+            <a:spAutoFit/>
+          </a:bodyPr>
+          <a:lstStyle/>
+          <a:p>
+            <a:r>
+              <a:rPr lang="en-US" altLang="zh-CN"/>
+              <a:t>C</a:t>
+            </a:r>
+            <a:endParaRPr lang="zh-CN" altLang="en-US"/>
+          </a:p>
+        </p:txBody>
+      </p:sp>
+      <p:sp>
+        <p:nvSpPr>
+          <p:cNvPr id="34" name="文本框 33">
+            <a:extLst>
+              <a:ext uri="{FF2B5EF4-FFF2-40B4-BE49-F238E27FC236}">
+                <a16:creationId xmlns:a16="http://schemas.microsoft.com/office/drawing/2014/main" id="{53B89A57-425D-0B0D-2360-51E0CC64A5C5}"/>
+              </a:ext>
+            </a:extLst>
+          </p:cNvPr>
+          <p:cNvSpPr txBox="1"/>
+          <p:nvPr/>
+        </p:nvSpPr>
+        <p:spPr>
+          <a:xfrm>
+            <a:off x="5285995" y="2398102"/>
+            <a:ext cx="343364" cy="369332"/>
+          </a:xfrm>
+          <a:prstGeom prst="rect">
+            <a:avLst/>
+          </a:prstGeom>
+          <a:noFill/>
+        </p:spPr>
+        <p:txBody>
+          <a:bodyPr wrap="none" rtlCol="0">
+            <a:spAutoFit/>
+          </a:bodyPr>
+          <a:lstStyle/>
+          <a:p>
+            <a:r>
+              <a:rPr lang="en-US" altLang="zh-CN"/>
+              <a:t>D</a:t>
+            </a:r>
+            <a:endParaRPr lang="zh-CN" altLang="en-US"/>
+          </a:p>
+        </p:txBody>
+      </p:sp>
+      <p:sp>
+        <p:nvSpPr>
+          <p:cNvPr id="35" name="文本框 34">
+            <a:extLst>
+              <a:ext uri="{FF2B5EF4-FFF2-40B4-BE49-F238E27FC236}">
+                <a16:creationId xmlns:a16="http://schemas.microsoft.com/office/drawing/2014/main" id="{E348897D-206E-342B-55FE-C83DFE238AB2}"/>
+              </a:ext>
+            </a:extLst>
+          </p:cNvPr>
+          <p:cNvSpPr txBox="1"/>
+          <p:nvPr/>
+        </p:nvSpPr>
+        <p:spPr>
+          <a:xfrm>
+            <a:off x="6328478" y="2392416"/>
+            <a:ext cx="300082" cy="369332"/>
+          </a:xfrm>
+          <a:prstGeom prst="rect">
+            <a:avLst/>
+          </a:prstGeom>
+          <a:noFill/>
+        </p:spPr>
+        <p:txBody>
+          <a:bodyPr wrap="none" rtlCol="0">
+            <a:spAutoFit/>
+          </a:bodyPr>
+          <a:lstStyle/>
+          <a:p>
+            <a:r>
+              <a:rPr lang="en-US" altLang="zh-CN"/>
+              <a:t>E</a:t>
+            </a:r>
+            <a:endParaRPr lang="zh-CN" altLang="en-US"/>
+          </a:p>
+        </p:txBody>
+      </p:sp>
     </p:spTree>
     <p:extLst>
       <p:ext uri="{BB962C8B-B14F-4D97-AF65-F5344CB8AC3E}">
@@ -44945,6 +49781,2056 @@
 </file>
 
 <file path=ppt/slides/slide31.xml><?xml version="1.0" encoding="utf-8"?>
+<p:sld xmlns:a="http://schemas.openxmlformats.org/drawingml/2006/main" xmlns:r="http://schemas.openxmlformats.org/officeDocument/2006/relationships" xmlns:p="http://schemas.openxmlformats.org/presentationml/2006/main">
+  <p:cSld>
+    <p:spTree>
+      <p:nvGrpSpPr>
+        <p:cNvPr id="1" name="">
+          <a:extLst>
+            <a:ext uri="{FF2B5EF4-FFF2-40B4-BE49-F238E27FC236}">
+              <a16:creationId xmlns:a16="http://schemas.microsoft.com/office/drawing/2014/main" id="{AC8ACA78-7B6D-0806-5613-9B3AB66338A0}"/>
+            </a:ext>
+          </a:extLst>
+        </p:cNvPr>
+        <p:cNvGrpSpPr/>
+        <p:nvPr/>
+      </p:nvGrpSpPr>
+      <p:grpSpPr>
+        <a:xfrm>
+          <a:off x="0" y="0"/>
+          <a:ext cx="0" cy="0"/>
+          <a:chOff x="0" y="0"/>
+          <a:chExt cx="0" cy="0"/>
+        </a:xfrm>
+      </p:grpSpPr>
+      <p:sp>
+        <p:nvSpPr>
+          <p:cNvPr id="2" name="文本框 1">
+            <a:extLst>
+              <a:ext uri="{FF2B5EF4-FFF2-40B4-BE49-F238E27FC236}">
+                <a16:creationId xmlns:a16="http://schemas.microsoft.com/office/drawing/2014/main" id="{9F80311A-E1C8-BBA0-9295-EBF2BCB7CF26}"/>
+              </a:ext>
+            </a:extLst>
+          </p:cNvPr>
+          <p:cNvSpPr txBox="1"/>
+          <p:nvPr/>
+        </p:nvSpPr>
+        <p:spPr>
+          <a:xfrm>
+            <a:off x="642083" y="3175625"/>
+            <a:ext cx="428322" cy="369332"/>
+          </a:xfrm>
+          <a:prstGeom prst="rect">
+            <a:avLst/>
+          </a:prstGeom>
+          <a:noFill/>
+          <a:ln w="19050">
+            <a:solidFill>
+              <a:schemeClr val="tx1"/>
+            </a:solidFill>
+          </a:ln>
+        </p:spPr>
+        <p:txBody>
+          <a:bodyPr wrap="none" rtlCol="0">
+            <a:spAutoFit/>
+          </a:bodyPr>
+          <a:lstStyle/>
+          <a:p>
+            <a:r>
+              <a:rPr lang="en-US" altLang="zh-CN"/>
+              <a:t>10</a:t>
+            </a:r>
+            <a:endParaRPr lang="zh-CN" altLang="en-US"/>
+          </a:p>
+        </p:txBody>
+      </p:sp>
+      <p:sp>
+        <p:nvSpPr>
+          <p:cNvPr id="3" name="文本框 2">
+            <a:extLst>
+              <a:ext uri="{FF2B5EF4-FFF2-40B4-BE49-F238E27FC236}">
+                <a16:creationId xmlns:a16="http://schemas.microsoft.com/office/drawing/2014/main" id="{30ED766A-7C63-AF80-A6F9-0A0FE8ACC398}"/>
+              </a:ext>
+            </a:extLst>
+          </p:cNvPr>
+          <p:cNvSpPr txBox="1"/>
+          <p:nvPr/>
+        </p:nvSpPr>
+        <p:spPr>
+          <a:xfrm>
+            <a:off x="1360339" y="3175625"/>
+            <a:ext cx="428322" cy="369332"/>
+          </a:xfrm>
+          <a:prstGeom prst="rect">
+            <a:avLst/>
+          </a:prstGeom>
+          <a:noFill/>
+          <a:ln w="19050">
+            <a:solidFill>
+              <a:schemeClr val="tx1"/>
+            </a:solidFill>
+          </a:ln>
+        </p:spPr>
+        <p:txBody>
+          <a:bodyPr wrap="none" rtlCol="0">
+            <a:spAutoFit/>
+          </a:bodyPr>
+          <a:lstStyle/>
+          <a:p>
+            <a:r>
+              <a:rPr lang="en-US" altLang="zh-CN"/>
+              <a:t>12</a:t>
+            </a:r>
+            <a:endParaRPr lang="zh-CN" altLang="en-US"/>
+          </a:p>
+        </p:txBody>
+      </p:sp>
+      <p:sp>
+        <p:nvSpPr>
+          <p:cNvPr id="4" name="文本框 3">
+            <a:extLst>
+              <a:ext uri="{FF2B5EF4-FFF2-40B4-BE49-F238E27FC236}">
+                <a16:creationId xmlns:a16="http://schemas.microsoft.com/office/drawing/2014/main" id="{DD168329-2EFB-6715-90C1-617A69657CD8}"/>
+              </a:ext>
+            </a:extLst>
+          </p:cNvPr>
+          <p:cNvSpPr txBox="1"/>
+          <p:nvPr/>
+        </p:nvSpPr>
+        <p:spPr>
+          <a:xfrm>
+            <a:off x="999984" y="2590049"/>
+            <a:ext cx="428322" cy="369332"/>
+          </a:xfrm>
+          <a:prstGeom prst="rect">
+            <a:avLst/>
+          </a:prstGeom>
+          <a:noFill/>
+        </p:spPr>
+        <p:txBody>
+          <a:bodyPr wrap="none" rtlCol="0">
+            <a:spAutoFit/>
+          </a:bodyPr>
+          <a:lstStyle/>
+          <a:p>
+            <a:r>
+              <a:rPr lang="en-US" altLang="zh-CN"/>
+              <a:t>22</a:t>
+            </a:r>
+            <a:endParaRPr lang="zh-CN" altLang="en-US"/>
+          </a:p>
+        </p:txBody>
+      </p:sp>
+      <p:cxnSp>
+        <p:nvCxnSpPr>
+          <p:cNvPr id="6" name="直接连接符 5">
+            <a:extLst>
+              <a:ext uri="{FF2B5EF4-FFF2-40B4-BE49-F238E27FC236}">
+                <a16:creationId xmlns:a16="http://schemas.microsoft.com/office/drawing/2014/main" id="{8E59669E-B74D-48E9-2C52-95975E65AA88}"/>
+              </a:ext>
+            </a:extLst>
+          </p:cNvPr>
+          <p:cNvCxnSpPr>
+            <a:stCxn id="4" idx="2"/>
+            <a:endCxn id="2" idx="0"/>
+          </p:cNvCxnSpPr>
+          <p:nvPr/>
+        </p:nvCxnSpPr>
+        <p:spPr>
+          <a:xfrm flipH="1">
+            <a:off x="856244" y="2959381"/>
+            <a:ext cx="357901" cy="216244"/>
+          </a:xfrm>
+          <a:prstGeom prst="line">
+            <a:avLst/>
+          </a:prstGeom>
+        </p:spPr>
+        <p:style>
+          <a:lnRef idx="2">
+            <a:schemeClr val="dk1"/>
+          </a:lnRef>
+          <a:fillRef idx="0">
+            <a:schemeClr val="dk1"/>
+          </a:fillRef>
+          <a:effectRef idx="1">
+            <a:schemeClr val="dk1"/>
+          </a:effectRef>
+          <a:fontRef idx="minor">
+            <a:schemeClr val="tx1"/>
+          </a:fontRef>
+        </p:style>
+      </p:cxnSp>
+      <p:cxnSp>
+        <p:nvCxnSpPr>
+          <p:cNvPr id="8" name="直接连接符 7">
+            <a:extLst>
+              <a:ext uri="{FF2B5EF4-FFF2-40B4-BE49-F238E27FC236}">
+                <a16:creationId xmlns:a16="http://schemas.microsoft.com/office/drawing/2014/main" id="{DD239F13-A908-2C6D-DE5A-EE74346E76B0}"/>
+              </a:ext>
+            </a:extLst>
+          </p:cNvPr>
+          <p:cNvCxnSpPr>
+            <a:stCxn id="4" idx="2"/>
+            <a:endCxn id="3" idx="0"/>
+          </p:cNvCxnSpPr>
+          <p:nvPr/>
+        </p:nvCxnSpPr>
+        <p:spPr>
+          <a:xfrm>
+            <a:off x="1214145" y="2959381"/>
+            <a:ext cx="360355" cy="216244"/>
+          </a:xfrm>
+          <a:prstGeom prst="line">
+            <a:avLst/>
+          </a:prstGeom>
+        </p:spPr>
+        <p:style>
+          <a:lnRef idx="2">
+            <a:schemeClr val="dk1"/>
+          </a:lnRef>
+          <a:fillRef idx="0">
+            <a:schemeClr val="dk1"/>
+          </a:fillRef>
+          <a:effectRef idx="1">
+            <a:schemeClr val="dk1"/>
+          </a:effectRef>
+          <a:fontRef idx="minor">
+            <a:schemeClr val="tx1"/>
+          </a:fontRef>
+        </p:style>
+      </p:cxnSp>
+      <p:sp>
+        <p:nvSpPr>
+          <p:cNvPr id="9" name="文本框 8">
+            <a:extLst>
+              <a:ext uri="{FF2B5EF4-FFF2-40B4-BE49-F238E27FC236}">
+                <a16:creationId xmlns:a16="http://schemas.microsoft.com/office/drawing/2014/main" id="{E8BF0AD9-AF4E-546F-8242-C978EFEDB4EB}"/>
+              </a:ext>
+            </a:extLst>
+          </p:cNvPr>
+          <p:cNvSpPr txBox="1"/>
+          <p:nvPr/>
+        </p:nvSpPr>
+        <p:spPr>
+          <a:xfrm>
+            <a:off x="2393557" y="3175625"/>
+            <a:ext cx="428322" cy="369332"/>
+          </a:xfrm>
+          <a:prstGeom prst="rect">
+            <a:avLst/>
+          </a:prstGeom>
+          <a:noFill/>
+          <a:ln w="19050">
+            <a:solidFill>
+              <a:schemeClr val="tx1"/>
+            </a:solidFill>
+          </a:ln>
+        </p:spPr>
+        <p:txBody>
+          <a:bodyPr wrap="none" rtlCol="0">
+            <a:spAutoFit/>
+          </a:bodyPr>
+          <a:lstStyle/>
+          <a:p>
+            <a:r>
+              <a:rPr lang="en-US" altLang="zh-CN"/>
+              <a:t>10</a:t>
+            </a:r>
+            <a:endParaRPr lang="zh-CN" altLang="en-US"/>
+          </a:p>
+        </p:txBody>
+      </p:sp>
+      <p:sp>
+        <p:nvSpPr>
+          <p:cNvPr id="10" name="文本框 9">
+            <a:extLst>
+              <a:ext uri="{FF2B5EF4-FFF2-40B4-BE49-F238E27FC236}">
+                <a16:creationId xmlns:a16="http://schemas.microsoft.com/office/drawing/2014/main" id="{002AEB55-12C8-4887-BB42-934845AEE84F}"/>
+              </a:ext>
+            </a:extLst>
+          </p:cNvPr>
+          <p:cNvSpPr txBox="1"/>
+          <p:nvPr/>
+        </p:nvSpPr>
+        <p:spPr>
+          <a:xfrm>
+            <a:off x="3111813" y="3175625"/>
+            <a:ext cx="428322" cy="369332"/>
+          </a:xfrm>
+          <a:prstGeom prst="rect">
+            <a:avLst/>
+          </a:prstGeom>
+          <a:noFill/>
+          <a:ln w="19050">
+            <a:solidFill>
+              <a:schemeClr val="tx1"/>
+            </a:solidFill>
+          </a:ln>
+        </p:spPr>
+        <p:txBody>
+          <a:bodyPr wrap="none" rtlCol="0">
+            <a:spAutoFit/>
+          </a:bodyPr>
+          <a:lstStyle/>
+          <a:p>
+            <a:r>
+              <a:rPr lang="en-US" altLang="zh-CN"/>
+              <a:t>12</a:t>
+            </a:r>
+            <a:endParaRPr lang="zh-CN" altLang="en-US"/>
+          </a:p>
+        </p:txBody>
+      </p:sp>
+      <p:sp>
+        <p:nvSpPr>
+          <p:cNvPr id="11" name="文本框 10">
+            <a:extLst>
+              <a:ext uri="{FF2B5EF4-FFF2-40B4-BE49-F238E27FC236}">
+                <a16:creationId xmlns:a16="http://schemas.microsoft.com/office/drawing/2014/main" id="{B8FF90E8-A079-7F5D-9FEA-1C3E4998F0BB}"/>
+              </a:ext>
+            </a:extLst>
+          </p:cNvPr>
+          <p:cNvSpPr txBox="1"/>
+          <p:nvPr/>
+        </p:nvSpPr>
+        <p:spPr>
+          <a:xfrm>
+            <a:off x="2751458" y="2590049"/>
+            <a:ext cx="428322" cy="369332"/>
+          </a:xfrm>
+          <a:prstGeom prst="rect">
+            <a:avLst/>
+          </a:prstGeom>
+          <a:noFill/>
+        </p:spPr>
+        <p:txBody>
+          <a:bodyPr wrap="none" rtlCol="0">
+            <a:spAutoFit/>
+          </a:bodyPr>
+          <a:lstStyle/>
+          <a:p>
+            <a:r>
+              <a:rPr lang="en-US" altLang="zh-CN"/>
+              <a:t>22</a:t>
+            </a:r>
+            <a:endParaRPr lang="zh-CN" altLang="en-US"/>
+          </a:p>
+        </p:txBody>
+      </p:sp>
+      <p:cxnSp>
+        <p:nvCxnSpPr>
+          <p:cNvPr id="12" name="直接连接符 11">
+            <a:extLst>
+              <a:ext uri="{FF2B5EF4-FFF2-40B4-BE49-F238E27FC236}">
+                <a16:creationId xmlns:a16="http://schemas.microsoft.com/office/drawing/2014/main" id="{20A0DDEF-EB3D-E3BE-FCCF-3D2CF9FC3752}"/>
+              </a:ext>
+            </a:extLst>
+          </p:cNvPr>
+          <p:cNvCxnSpPr>
+            <a:stCxn id="11" idx="2"/>
+            <a:endCxn id="9" idx="0"/>
+          </p:cNvCxnSpPr>
+          <p:nvPr/>
+        </p:nvCxnSpPr>
+        <p:spPr>
+          <a:xfrm flipH="1">
+            <a:off x="2607718" y="2959381"/>
+            <a:ext cx="357901" cy="216244"/>
+          </a:xfrm>
+          <a:prstGeom prst="line">
+            <a:avLst/>
+          </a:prstGeom>
+        </p:spPr>
+        <p:style>
+          <a:lnRef idx="2">
+            <a:schemeClr val="dk1"/>
+          </a:lnRef>
+          <a:fillRef idx="0">
+            <a:schemeClr val="dk1"/>
+          </a:fillRef>
+          <a:effectRef idx="1">
+            <a:schemeClr val="dk1"/>
+          </a:effectRef>
+          <a:fontRef idx="minor">
+            <a:schemeClr val="tx1"/>
+          </a:fontRef>
+        </p:style>
+      </p:cxnSp>
+      <p:cxnSp>
+        <p:nvCxnSpPr>
+          <p:cNvPr id="13" name="直接连接符 12">
+            <a:extLst>
+              <a:ext uri="{FF2B5EF4-FFF2-40B4-BE49-F238E27FC236}">
+                <a16:creationId xmlns:a16="http://schemas.microsoft.com/office/drawing/2014/main" id="{40F0623B-3751-6575-9EF3-BA537E10D57B}"/>
+              </a:ext>
+            </a:extLst>
+          </p:cNvPr>
+          <p:cNvCxnSpPr>
+            <a:stCxn id="11" idx="2"/>
+            <a:endCxn id="10" idx="0"/>
+          </p:cNvCxnSpPr>
+          <p:nvPr/>
+        </p:nvCxnSpPr>
+        <p:spPr>
+          <a:xfrm>
+            <a:off x="2965619" y="2959381"/>
+            <a:ext cx="360355" cy="216244"/>
+          </a:xfrm>
+          <a:prstGeom prst="line">
+            <a:avLst/>
+          </a:prstGeom>
+        </p:spPr>
+        <p:style>
+          <a:lnRef idx="2">
+            <a:schemeClr val="dk1"/>
+          </a:lnRef>
+          <a:fillRef idx="0">
+            <a:schemeClr val="dk1"/>
+          </a:fillRef>
+          <a:effectRef idx="1">
+            <a:schemeClr val="dk1"/>
+          </a:effectRef>
+          <a:fontRef idx="minor">
+            <a:schemeClr val="tx1"/>
+          </a:fontRef>
+        </p:style>
+      </p:cxnSp>
+      <p:sp>
+        <p:nvSpPr>
+          <p:cNvPr id="14" name="文本框 13">
+            <a:extLst>
+              <a:ext uri="{FF2B5EF4-FFF2-40B4-BE49-F238E27FC236}">
+                <a16:creationId xmlns:a16="http://schemas.microsoft.com/office/drawing/2014/main" id="{371B8C7A-6B0B-93AC-D543-5C17B1151A78}"/>
+              </a:ext>
+            </a:extLst>
+          </p:cNvPr>
+          <p:cNvSpPr txBox="1"/>
+          <p:nvPr/>
+        </p:nvSpPr>
+        <p:spPr>
+          <a:xfrm>
+            <a:off x="3570515" y="3175625"/>
+            <a:ext cx="428322" cy="369332"/>
+          </a:xfrm>
+          <a:prstGeom prst="rect">
+            <a:avLst/>
+          </a:prstGeom>
+          <a:noFill/>
+          <a:ln w="19050">
+            <a:solidFill>
+              <a:schemeClr val="tx1"/>
+            </a:solidFill>
+          </a:ln>
+        </p:spPr>
+        <p:txBody>
+          <a:bodyPr wrap="none" rtlCol="0">
+            <a:spAutoFit/>
+          </a:bodyPr>
+          <a:lstStyle/>
+          <a:p>
+            <a:r>
+              <a:rPr lang="en-US" altLang="zh-CN"/>
+              <a:t>16</a:t>
+            </a:r>
+            <a:endParaRPr lang="zh-CN" altLang="en-US"/>
+          </a:p>
+        </p:txBody>
+      </p:sp>
+      <p:sp>
+        <p:nvSpPr>
+          <p:cNvPr id="15" name="文本框 14">
+            <a:extLst>
+              <a:ext uri="{FF2B5EF4-FFF2-40B4-BE49-F238E27FC236}">
+                <a16:creationId xmlns:a16="http://schemas.microsoft.com/office/drawing/2014/main" id="{C33E600E-701E-F15A-D870-9F2847FD58D5}"/>
+              </a:ext>
+            </a:extLst>
+          </p:cNvPr>
+          <p:cNvSpPr txBox="1"/>
+          <p:nvPr/>
+        </p:nvSpPr>
+        <p:spPr>
+          <a:xfrm>
+            <a:off x="4288771" y="3175625"/>
+            <a:ext cx="428322" cy="369332"/>
+          </a:xfrm>
+          <a:prstGeom prst="rect">
+            <a:avLst/>
+          </a:prstGeom>
+          <a:noFill/>
+          <a:ln w="19050">
+            <a:solidFill>
+              <a:schemeClr val="tx1"/>
+            </a:solidFill>
+          </a:ln>
+        </p:spPr>
+        <p:txBody>
+          <a:bodyPr wrap="none" rtlCol="0">
+            <a:spAutoFit/>
+          </a:bodyPr>
+          <a:lstStyle/>
+          <a:p>
+            <a:r>
+              <a:rPr lang="en-US" altLang="zh-CN"/>
+              <a:t>21</a:t>
+            </a:r>
+            <a:endParaRPr lang="zh-CN" altLang="en-US"/>
+          </a:p>
+        </p:txBody>
+      </p:sp>
+      <p:sp>
+        <p:nvSpPr>
+          <p:cNvPr id="16" name="文本框 15">
+            <a:extLst>
+              <a:ext uri="{FF2B5EF4-FFF2-40B4-BE49-F238E27FC236}">
+                <a16:creationId xmlns:a16="http://schemas.microsoft.com/office/drawing/2014/main" id="{82FACF1E-B0B2-3050-B260-B71864DB12CC}"/>
+              </a:ext>
+            </a:extLst>
+          </p:cNvPr>
+          <p:cNvSpPr txBox="1"/>
+          <p:nvPr/>
+        </p:nvSpPr>
+        <p:spPr>
+          <a:xfrm>
+            <a:off x="3928416" y="2590049"/>
+            <a:ext cx="428322" cy="369332"/>
+          </a:xfrm>
+          <a:prstGeom prst="rect">
+            <a:avLst/>
+          </a:prstGeom>
+          <a:noFill/>
+        </p:spPr>
+        <p:txBody>
+          <a:bodyPr wrap="none" rtlCol="0">
+            <a:spAutoFit/>
+          </a:bodyPr>
+          <a:lstStyle/>
+          <a:p>
+            <a:r>
+              <a:rPr lang="en-US" altLang="zh-CN"/>
+              <a:t>37</a:t>
+            </a:r>
+            <a:endParaRPr lang="zh-CN" altLang="en-US"/>
+          </a:p>
+        </p:txBody>
+      </p:sp>
+      <p:cxnSp>
+        <p:nvCxnSpPr>
+          <p:cNvPr id="17" name="直接连接符 16">
+            <a:extLst>
+              <a:ext uri="{FF2B5EF4-FFF2-40B4-BE49-F238E27FC236}">
+                <a16:creationId xmlns:a16="http://schemas.microsoft.com/office/drawing/2014/main" id="{07B83D74-30B0-A7BC-5F2D-C721D9241DFB}"/>
+              </a:ext>
+            </a:extLst>
+          </p:cNvPr>
+          <p:cNvCxnSpPr>
+            <a:stCxn id="16" idx="2"/>
+            <a:endCxn id="14" idx="0"/>
+          </p:cNvCxnSpPr>
+          <p:nvPr/>
+        </p:nvCxnSpPr>
+        <p:spPr>
+          <a:xfrm flipH="1">
+            <a:off x="3784676" y="2959381"/>
+            <a:ext cx="357901" cy="216244"/>
+          </a:xfrm>
+          <a:prstGeom prst="line">
+            <a:avLst/>
+          </a:prstGeom>
+        </p:spPr>
+        <p:style>
+          <a:lnRef idx="2">
+            <a:schemeClr val="dk1"/>
+          </a:lnRef>
+          <a:fillRef idx="0">
+            <a:schemeClr val="dk1"/>
+          </a:fillRef>
+          <a:effectRef idx="1">
+            <a:schemeClr val="dk1"/>
+          </a:effectRef>
+          <a:fontRef idx="minor">
+            <a:schemeClr val="tx1"/>
+          </a:fontRef>
+        </p:style>
+      </p:cxnSp>
+      <p:cxnSp>
+        <p:nvCxnSpPr>
+          <p:cNvPr id="18" name="直接连接符 17">
+            <a:extLst>
+              <a:ext uri="{FF2B5EF4-FFF2-40B4-BE49-F238E27FC236}">
+                <a16:creationId xmlns:a16="http://schemas.microsoft.com/office/drawing/2014/main" id="{7367E33E-98DB-8711-22B0-64EBB73ED70D}"/>
+              </a:ext>
+            </a:extLst>
+          </p:cNvPr>
+          <p:cNvCxnSpPr>
+            <a:stCxn id="16" idx="2"/>
+            <a:endCxn id="15" idx="0"/>
+          </p:cNvCxnSpPr>
+          <p:nvPr/>
+        </p:nvCxnSpPr>
+        <p:spPr>
+          <a:xfrm>
+            <a:off x="4142577" y="2959381"/>
+            <a:ext cx="360355" cy="216244"/>
+          </a:xfrm>
+          <a:prstGeom prst="line">
+            <a:avLst/>
+          </a:prstGeom>
+        </p:spPr>
+        <p:style>
+          <a:lnRef idx="2">
+            <a:schemeClr val="dk1"/>
+          </a:lnRef>
+          <a:fillRef idx="0">
+            <a:schemeClr val="dk1"/>
+          </a:fillRef>
+          <a:effectRef idx="1">
+            <a:schemeClr val="dk1"/>
+          </a:effectRef>
+          <a:fontRef idx="minor">
+            <a:schemeClr val="tx1"/>
+          </a:fontRef>
+        </p:style>
+      </p:cxnSp>
+      <p:sp>
+        <p:nvSpPr>
+          <p:cNvPr id="19" name="文本框 18">
+            <a:extLst>
+              <a:ext uri="{FF2B5EF4-FFF2-40B4-BE49-F238E27FC236}">
+                <a16:creationId xmlns:a16="http://schemas.microsoft.com/office/drawing/2014/main" id="{3F69406C-5316-BF26-4DAC-08D477BA93C0}"/>
+              </a:ext>
+            </a:extLst>
+          </p:cNvPr>
+          <p:cNvSpPr txBox="1"/>
+          <p:nvPr/>
+        </p:nvSpPr>
+        <p:spPr>
+          <a:xfrm>
+            <a:off x="5251567" y="3175625"/>
+            <a:ext cx="428322" cy="369332"/>
+          </a:xfrm>
+          <a:prstGeom prst="rect">
+            <a:avLst/>
+          </a:prstGeom>
+          <a:noFill/>
+          <a:ln w="19050">
+            <a:solidFill>
+              <a:schemeClr val="tx1"/>
+            </a:solidFill>
+          </a:ln>
+        </p:spPr>
+        <p:txBody>
+          <a:bodyPr wrap="none" rtlCol="0">
+            <a:spAutoFit/>
+          </a:bodyPr>
+          <a:lstStyle/>
+          <a:p>
+            <a:r>
+              <a:rPr lang="en-US" altLang="zh-CN"/>
+              <a:t>10</a:t>
+            </a:r>
+            <a:endParaRPr lang="zh-CN" altLang="en-US"/>
+          </a:p>
+        </p:txBody>
+      </p:sp>
+      <p:sp>
+        <p:nvSpPr>
+          <p:cNvPr id="20" name="文本框 19">
+            <a:extLst>
+              <a:ext uri="{FF2B5EF4-FFF2-40B4-BE49-F238E27FC236}">
+                <a16:creationId xmlns:a16="http://schemas.microsoft.com/office/drawing/2014/main" id="{4A67DA48-55E5-C12D-39B4-FC92CC1EB09E}"/>
+              </a:ext>
+            </a:extLst>
+          </p:cNvPr>
+          <p:cNvSpPr txBox="1"/>
+          <p:nvPr/>
+        </p:nvSpPr>
+        <p:spPr>
+          <a:xfrm>
+            <a:off x="5969823" y="3175625"/>
+            <a:ext cx="428322" cy="369332"/>
+          </a:xfrm>
+          <a:prstGeom prst="rect">
+            <a:avLst/>
+          </a:prstGeom>
+          <a:noFill/>
+          <a:ln w="19050">
+            <a:solidFill>
+              <a:schemeClr val="tx1"/>
+            </a:solidFill>
+          </a:ln>
+        </p:spPr>
+        <p:txBody>
+          <a:bodyPr wrap="none" rtlCol="0">
+            <a:spAutoFit/>
+          </a:bodyPr>
+          <a:lstStyle/>
+          <a:p>
+            <a:r>
+              <a:rPr lang="en-US" altLang="zh-CN"/>
+              <a:t>12</a:t>
+            </a:r>
+            <a:endParaRPr lang="zh-CN" altLang="en-US"/>
+          </a:p>
+        </p:txBody>
+      </p:sp>
+      <p:sp>
+        <p:nvSpPr>
+          <p:cNvPr id="21" name="文本框 20">
+            <a:extLst>
+              <a:ext uri="{FF2B5EF4-FFF2-40B4-BE49-F238E27FC236}">
+                <a16:creationId xmlns:a16="http://schemas.microsoft.com/office/drawing/2014/main" id="{FF269F49-EEE4-7D14-AA50-C4B860C8807D}"/>
+              </a:ext>
+            </a:extLst>
+          </p:cNvPr>
+          <p:cNvSpPr txBox="1"/>
+          <p:nvPr/>
+        </p:nvSpPr>
+        <p:spPr>
+          <a:xfrm>
+            <a:off x="5609468" y="2590049"/>
+            <a:ext cx="428322" cy="369332"/>
+          </a:xfrm>
+          <a:prstGeom prst="rect">
+            <a:avLst/>
+          </a:prstGeom>
+          <a:noFill/>
+        </p:spPr>
+        <p:txBody>
+          <a:bodyPr wrap="none" rtlCol="0">
+            <a:spAutoFit/>
+          </a:bodyPr>
+          <a:lstStyle/>
+          <a:p>
+            <a:r>
+              <a:rPr lang="en-US" altLang="zh-CN"/>
+              <a:t>22</a:t>
+            </a:r>
+            <a:endParaRPr lang="zh-CN" altLang="en-US"/>
+          </a:p>
+        </p:txBody>
+      </p:sp>
+      <p:cxnSp>
+        <p:nvCxnSpPr>
+          <p:cNvPr id="22" name="直接连接符 21">
+            <a:extLst>
+              <a:ext uri="{FF2B5EF4-FFF2-40B4-BE49-F238E27FC236}">
+                <a16:creationId xmlns:a16="http://schemas.microsoft.com/office/drawing/2014/main" id="{893FCA38-7E12-8BB7-238B-9E97B279F393}"/>
+              </a:ext>
+            </a:extLst>
+          </p:cNvPr>
+          <p:cNvCxnSpPr>
+            <a:stCxn id="21" idx="2"/>
+            <a:endCxn id="19" idx="0"/>
+          </p:cNvCxnSpPr>
+          <p:nvPr/>
+        </p:nvCxnSpPr>
+        <p:spPr>
+          <a:xfrm flipH="1">
+            <a:off x="5465728" y="2959381"/>
+            <a:ext cx="357901" cy="216244"/>
+          </a:xfrm>
+          <a:prstGeom prst="line">
+            <a:avLst/>
+          </a:prstGeom>
+        </p:spPr>
+        <p:style>
+          <a:lnRef idx="2">
+            <a:schemeClr val="dk1"/>
+          </a:lnRef>
+          <a:fillRef idx="0">
+            <a:schemeClr val="dk1"/>
+          </a:fillRef>
+          <a:effectRef idx="1">
+            <a:schemeClr val="dk1"/>
+          </a:effectRef>
+          <a:fontRef idx="minor">
+            <a:schemeClr val="tx1"/>
+          </a:fontRef>
+        </p:style>
+      </p:cxnSp>
+      <p:cxnSp>
+        <p:nvCxnSpPr>
+          <p:cNvPr id="23" name="直接连接符 22">
+            <a:extLst>
+              <a:ext uri="{FF2B5EF4-FFF2-40B4-BE49-F238E27FC236}">
+                <a16:creationId xmlns:a16="http://schemas.microsoft.com/office/drawing/2014/main" id="{678D330F-62D1-12AA-2954-CF6C8DCEE7D7}"/>
+              </a:ext>
+            </a:extLst>
+          </p:cNvPr>
+          <p:cNvCxnSpPr>
+            <a:stCxn id="21" idx="2"/>
+            <a:endCxn id="20" idx="0"/>
+          </p:cNvCxnSpPr>
+          <p:nvPr/>
+        </p:nvCxnSpPr>
+        <p:spPr>
+          <a:xfrm>
+            <a:off x="5823629" y="2959381"/>
+            <a:ext cx="360355" cy="216244"/>
+          </a:xfrm>
+          <a:prstGeom prst="line">
+            <a:avLst/>
+          </a:prstGeom>
+        </p:spPr>
+        <p:style>
+          <a:lnRef idx="2">
+            <a:schemeClr val="dk1"/>
+          </a:lnRef>
+          <a:fillRef idx="0">
+            <a:schemeClr val="dk1"/>
+          </a:fillRef>
+          <a:effectRef idx="1">
+            <a:schemeClr val="dk1"/>
+          </a:effectRef>
+          <a:fontRef idx="minor">
+            <a:schemeClr val="tx1"/>
+          </a:fontRef>
+        </p:style>
+      </p:cxnSp>
+      <p:sp>
+        <p:nvSpPr>
+          <p:cNvPr id="24" name="文本框 23">
+            <a:extLst>
+              <a:ext uri="{FF2B5EF4-FFF2-40B4-BE49-F238E27FC236}">
+                <a16:creationId xmlns:a16="http://schemas.microsoft.com/office/drawing/2014/main" id="{9C197BB8-17FA-9F1E-6268-422BA03BBAEE}"/>
+              </a:ext>
+            </a:extLst>
+          </p:cNvPr>
+          <p:cNvSpPr txBox="1"/>
+          <p:nvPr/>
+        </p:nvSpPr>
+        <p:spPr>
+          <a:xfrm>
+            <a:off x="6683247" y="3175625"/>
+            <a:ext cx="428322" cy="369332"/>
+          </a:xfrm>
+          <a:prstGeom prst="rect">
+            <a:avLst/>
+          </a:prstGeom>
+          <a:noFill/>
+          <a:ln w="19050">
+            <a:solidFill>
+              <a:schemeClr val="tx1"/>
+            </a:solidFill>
+          </a:ln>
+        </p:spPr>
+        <p:txBody>
+          <a:bodyPr wrap="none" rtlCol="0">
+            <a:spAutoFit/>
+          </a:bodyPr>
+          <a:lstStyle/>
+          <a:p>
+            <a:r>
+              <a:rPr lang="en-US" altLang="zh-CN"/>
+              <a:t>16</a:t>
+            </a:r>
+            <a:endParaRPr lang="zh-CN" altLang="en-US"/>
+          </a:p>
+        </p:txBody>
+      </p:sp>
+      <p:sp>
+        <p:nvSpPr>
+          <p:cNvPr id="25" name="文本框 24">
+            <a:extLst>
+              <a:ext uri="{FF2B5EF4-FFF2-40B4-BE49-F238E27FC236}">
+                <a16:creationId xmlns:a16="http://schemas.microsoft.com/office/drawing/2014/main" id="{6F665DFB-8B81-2088-DE8D-11709C4F1A07}"/>
+              </a:ext>
+            </a:extLst>
+          </p:cNvPr>
+          <p:cNvSpPr txBox="1"/>
+          <p:nvPr/>
+        </p:nvSpPr>
+        <p:spPr>
+          <a:xfrm>
+            <a:off x="7401503" y="3175625"/>
+            <a:ext cx="428322" cy="369332"/>
+          </a:xfrm>
+          <a:prstGeom prst="rect">
+            <a:avLst/>
+          </a:prstGeom>
+          <a:noFill/>
+          <a:ln w="19050">
+            <a:solidFill>
+              <a:schemeClr val="tx1"/>
+            </a:solidFill>
+          </a:ln>
+        </p:spPr>
+        <p:txBody>
+          <a:bodyPr wrap="none" rtlCol="0">
+            <a:spAutoFit/>
+          </a:bodyPr>
+          <a:lstStyle/>
+          <a:p>
+            <a:r>
+              <a:rPr lang="en-US" altLang="zh-CN"/>
+              <a:t>21</a:t>
+            </a:r>
+            <a:endParaRPr lang="zh-CN" altLang="en-US"/>
+          </a:p>
+        </p:txBody>
+      </p:sp>
+      <p:sp>
+        <p:nvSpPr>
+          <p:cNvPr id="26" name="文本框 25">
+            <a:extLst>
+              <a:ext uri="{FF2B5EF4-FFF2-40B4-BE49-F238E27FC236}">
+                <a16:creationId xmlns:a16="http://schemas.microsoft.com/office/drawing/2014/main" id="{A2E26891-90C5-22BC-B49A-A2E516ACCB41}"/>
+              </a:ext>
+            </a:extLst>
+          </p:cNvPr>
+          <p:cNvSpPr txBox="1"/>
+          <p:nvPr/>
+        </p:nvSpPr>
+        <p:spPr>
+          <a:xfrm>
+            <a:off x="7041148" y="2590049"/>
+            <a:ext cx="428322" cy="369332"/>
+          </a:xfrm>
+          <a:prstGeom prst="rect">
+            <a:avLst/>
+          </a:prstGeom>
+          <a:noFill/>
+        </p:spPr>
+        <p:txBody>
+          <a:bodyPr wrap="none" rtlCol="0">
+            <a:spAutoFit/>
+          </a:bodyPr>
+          <a:lstStyle/>
+          <a:p>
+            <a:r>
+              <a:rPr lang="en-US" altLang="zh-CN"/>
+              <a:t>37</a:t>
+            </a:r>
+            <a:endParaRPr lang="zh-CN" altLang="en-US"/>
+          </a:p>
+        </p:txBody>
+      </p:sp>
+      <p:cxnSp>
+        <p:nvCxnSpPr>
+          <p:cNvPr id="27" name="直接连接符 26">
+            <a:extLst>
+              <a:ext uri="{FF2B5EF4-FFF2-40B4-BE49-F238E27FC236}">
+                <a16:creationId xmlns:a16="http://schemas.microsoft.com/office/drawing/2014/main" id="{A4FB5ED1-00D1-1A34-67A7-8A7E68794D10}"/>
+              </a:ext>
+            </a:extLst>
+          </p:cNvPr>
+          <p:cNvCxnSpPr>
+            <a:stCxn id="26" idx="2"/>
+            <a:endCxn id="24" idx="0"/>
+          </p:cNvCxnSpPr>
+          <p:nvPr/>
+        </p:nvCxnSpPr>
+        <p:spPr>
+          <a:xfrm flipH="1">
+            <a:off x="6897408" y="2959381"/>
+            <a:ext cx="357901" cy="216244"/>
+          </a:xfrm>
+          <a:prstGeom prst="line">
+            <a:avLst/>
+          </a:prstGeom>
+        </p:spPr>
+        <p:style>
+          <a:lnRef idx="2">
+            <a:schemeClr val="dk1"/>
+          </a:lnRef>
+          <a:fillRef idx="0">
+            <a:schemeClr val="dk1"/>
+          </a:fillRef>
+          <a:effectRef idx="1">
+            <a:schemeClr val="dk1"/>
+          </a:effectRef>
+          <a:fontRef idx="minor">
+            <a:schemeClr val="tx1"/>
+          </a:fontRef>
+        </p:style>
+      </p:cxnSp>
+      <p:cxnSp>
+        <p:nvCxnSpPr>
+          <p:cNvPr id="28" name="直接连接符 27">
+            <a:extLst>
+              <a:ext uri="{FF2B5EF4-FFF2-40B4-BE49-F238E27FC236}">
+                <a16:creationId xmlns:a16="http://schemas.microsoft.com/office/drawing/2014/main" id="{1E0EE0B5-ADF4-B2DA-E0F9-557D1701842E}"/>
+              </a:ext>
+            </a:extLst>
+          </p:cNvPr>
+          <p:cNvCxnSpPr>
+            <a:stCxn id="26" idx="2"/>
+            <a:endCxn id="25" idx="0"/>
+          </p:cNvCxnSpPr>
+          <p:nvPr/>
+        </p:nvCxnSpPr>
+        <p:spPr>
+          <a:xfrm>
+            <a:off x="7255309" y="2959381"/>
+            <a:ext cx="360355" cy="216244"/>
+          </a:xfrm>
+          <a:prstGeom prst="line">
+            <a:avLst/>
+          </a:prstGeom>
+        </p:spPr>
+        <p:style>
+          <a:lnRef idx="2">
+            <a:schemeClr val="dk1"/>
+          </a:lnRef>
+          <a:fillRef idx="0">
+            <a:schemeClr val="dk1"/>
+          </a:fillRef>
+          <a:effectRef idx="1">
+            <a:schemeClr val="dk1"/>
+          </a:effectRef>
+          <a:fontRef idx="minor">
+            <a:schemeClr val="tx1"/>
+          </a:fontRef>
+        </p:style>
+      </p:cxnSp>
+      <p:sp>
+        <p:nvSpPr>
+          <p:cNvPr id="31" name="文本框 30">
+            <a:extLst>
+              <a:ext uri="{FF2B5EF4-FFF2-40B4-BE49-F238E27FC236}">
+                <a16:creationId xmlns:a16="http://schemas.microsoft.com/office/drawing/2014/main" id="{96595BB8-9DE2-B9B4-9689-D3987914099B}"/>
+              </a:ext>
+            </a:extLst>
+          </p:cNvPr>
+          <p:cNvSpPr txBox="1"/>
+          <p:nvPr/>
+        </p:nvSpPr>
+        <p:spPr>
+          <a:xfrm>
+            <a:off x="6340307" y="2590049"/>
+            <a:ext cx="428322" cy="369332"/>
+          </a:xfrm>
+          <a:prstGeom prst="rect">
+            <a:avLst/>
+          </a:prstGeom>
+          <a:noFill/>
+          <a:ln w="19050">
+            <a:solidFill>
+              <a:schemeClr val="tx1"/>
+            </a:solidFill>
+          </a:ln>
+        </p:spPr>
+        <p:txBody>
+          <a:bodyPr wrap="none" rtlCol="0">
+            <a:spAutoFit/>
+          </a:bodyPr>
+          <a:lstStyle/>
+          <a:p>
+            <a:r>
+              <a:rPr lang="en-US" altLang="zh-CN"/>
+              <a:t>30</a:t>
+            </a:r>
+            <a:endParaRPr lang="zh-CN" altLang="en-US"/>
+          </a:p>
+        </p:txBody>
+      </p:sp>
+      <p:sp>
+        <p:nvSpPr>
+          <p:cNvPr id="32" name="文本框 31">
+            <a:extLst>
+              <a:ext uri="{FF2B5EF4-FFF2-40B4-BE49-F238E27FC236}">
+                <a16:creationId xmlns:a16="http://schemas.microsoft.com/office/drawing/2014/main" id="{653CED2A-3D13-DFAF-82D0-B92E6D740FAD}"/>
+              </a:ext>
+            </a:extLst>
+          </p:cNvPr>
+          <p:cNvSpPr txBox="1"/>
+          <p:nvPr/>
+        </p:nvSpPr>
+        <p:spPr>
+          <a:xfrm>
+            <a:off x="5969823" y="2076591"/>
+            <a:ext cx="428322" cy="369332"/>
+          </a:xfrm>
+          <a:prstGeom prst="rect">
+            <a:avLst/>
+          </a:prstGeom>
+          <a:noFill/>
+        </p:spPr>
+        <p:txBody>
+          <a:bodyPr wrap="none" rtlCol="0">
+            <a:spAutoFit/>
+          </a:bodyPr>
+          <a:lstStyle/>
+          <a:p>
+            <a:r>
+              <a:rPr lang="en-US" altLang="zh-CN"/>
+              <a:t>52</a:t>
+            </a:r>
+            <a:endParaRPr lang="zh-CN" altLang="en-US"/>
+          </a:p>
+        </p:txBody>
+      </p:sp>
+      <p:cxnSp>
+        <p:nvCxnSpPr>
+          <p:cNvPr id="33" name="直接连接符 32">
+            <a:extLst>
+              <a:ext uri="{FF2B5EF4-FFF2-40B4-BE49-F238E27FC236}">
+                <a16:creationId xmlns:a16="http://schemas.microsoft.com/office/drawing/2014/main" id="{8688C87C-4B6A-6704-8929-B674E2CA6507}"/>
+              </a:ext>
+            </a:extLst>
+          </p:cNvPr>
+          <p:cNvCxnSpPr>
+            <a:cxnSpLocks/>
+            <a:stCxn id="32" idx="2"/>
+            <a:endCxn id="21" idx="0"/>
+          </p:cNvCxnSpPr>
+          <p:nvPr/>
+        </p:nvCxnSpPr>
+        <p:spPr>
+          <a:xfrm flipH="1">
+            <a:off x="5823629" y="2445923"/>
+            <a:ext cx="360355" cy="144126"/>
+          </a:xfrm>
+          <a:prstGeom prst="line">
+            <a:avLst/>
+          </a:prstGeom>
+        </p:spPr>
+        <p:style>
+          <a:lnRef idx="2">
+            <a:schemeClr val="dk1"/>
+          </a:lnRef>
+          <a:fillRef idx="0">
+            <a:schemeClr val="dk1"/>
+          </a:fillRef>
+          <a:effectRef idx="1">
+            <a:schemeClr val="dk1"/>
+          </a:effectRef>
+          <a:fontRef idx="minor">
+            <a:schemeClr val="tx1"/>
+          </a:fontRef>
+        </p:style>
+      </p:cxnSp>
+      <p:cxnSp>
+        <p:nvCxnSpPr>
+          <p:cNvPr id="36" name="直接连接符 35">
+            <a:extLst>
+              <a:ext uri="{FF2B5EF4-FFF2-40B4-BE49-F238E27FC236}">
+                <a16:creationId xmlns:a16="http://schemas.microsoft.com/office/drawing/2014/main" id="{165FE596-BB87-0706-6FDC-86FAE6A3331E}"/>
+              </a:ext>
+            </a:extLst>
+          </p:cNvPr>
+          <p:cNvCxnSpPr>
+            <a:cxnSpLocks/>
+            <a:stCxn id="32" idx="2"/>
+            <a:endCxn id="31" idx="0"/>
+          </p:cNvCxnSpPr>
+          <p:nvPr/>
+        </p:nvCxnSpPr>
+        <p:spPr>
+          <a:xfrm>
+            <a:off x="6183984" y="2445923"/>
+            <a:ext cx="370484" cy="144126"/>
+          </a:xfrm>
+          <a:prstGeom prst="line">
+            <a:avLst/>
+          </a:prstGeom>
+        </p:spPr>
+        <p:style>
+          <a:lnRef idx="2">
+            <a:schemeClr val="dk1"/>
+          </a:lnRef>
+          <a:fillRef idx="0">
+            <a:schemeClr val="dk1"/>
+          </a:fillRef>
+          <a:effectRef idx="1">
+            <a:schemeClr val="dk1"/>
+          </a:effectRef>
+          <a:fontRef idx="minor">
+            <a:schemeClr val="tx1"/>
+          </a:fontRef>
+        </p:style>
+      </p:cxnSp>
+      <p:sp>
+        <p:nvSpPr>
+          <p:cNvPr id="39" name="文本框 38">
+            <a:extLst>
+              <a:ext uri="{FF2B5EF4-FFF2-40B4-BE49-F238E27FC236}">
+                <a16:creationId xmlns:a16="http://schemas.microsoft.com/office/drawing/2014/main" id="{A8711B7C-6BC1-C555-FF27-6176BC518E35}"/>
+              </a:ext>
+            </a:extLst>
+          </p:cNvPr>
+          <p:cNvSpPr txBox="1"/>
+          <p:nvPr/>
+        </p:nvSpPr>
+        <p:spPr>
+          <a:xfrm>
+            <a:off x="8537900" y="3175625"/>
+            <a:ext cx="428322" cy="369332"/>
+          </a:xfrm>
+          <a:prstGeom prst="rect">
+            <a:avLst/>
+          </a:prstGeom>
+          <a:noFill/>
+          <a:ln w="19050">
+            <a:solidFill>
+              <a:schemeClr val="tx1"/>
+            </a:solidFill>
+          </a:ln>
+        </p:spPr>
+        <p:txBody>
+          <a:bodyPr wrap="none" rtlCol="0">
+            <a:spAutoFit/>
+          </a:bodyPr>
+          <a:lstStyle/>
+          <a:p>
+            <a:r>
+              <a:rPr lang="en-US" altLang="zh-CN"/>
+              <a:t>10</a:t>
+            </a:r>
+            <a:endParaRPr lang="zh-CN" altLang="en-US"/>
+          </a:p>
+        </p:txBody>
+      </p:sp>
+      <p:sp>
+        <p:nvSpPr>
+          <p:cNvPr id="40" name="文本框 39">
+            <a:extLst>
+              <a:ext uri="{FF2B5EF4-FFF2-40B4-BE49-F238E27FC236}">
+                <a16:creationId xmlns:a16="http://schemas.microsoft.com/office/drawing/2014/main" id="{105EE1F5-C5F9-BBA0-10E7-B10BB503F8E4}"/>
+              </a:ext>
+            </a:extLst>
+          </p:cNvPr>
+          <p:cNvSpPr txBox="1"/>
+          <p:nvPr/>
+        </p:nvSpPr>
+        <p:spPr>
+          <a:xfrm>
+            <a:off x="9256156" y="3175625"/>
+            <a:ext cx="428322" cy="369332"/>
+          </a:xfrm>
+          <a:prstGeom prst="rect">
+            <a:avLst/>
+          </a:prstGeom>
+          <a:noFill/>
+          <a:ln w="19050">
+            <a:solidFill>
+              <a:schemeClr val="tx1"/>
+            </a:solidFill>
+          </a:ln>
+        </p:spPr>
+        <p:txBody>
+          <a:bodyPr wrap="none" rtlCol="0">
+            <a:spAutoFit/>
+          </a:bodyPr>
+          <a:lstStyle/>
+          <a:p>
+            <a:r>
+              <a:rPr lang="en-US" altLang="zh-CN"/>
+              <a:t>12</a:t>
+            </a:r>
+            <a:endParaRPr lang="zh-CN" altLang="en-US"/>
+          </a:p>
+        </p:txBody>
+      </p:sp>
+      <p:sp>
+        <p:nvSpPr>
+          <p:cNvPr id="41" name="文本框 40">
+            <a:extLst>
+              <a:ext uri="{FF2B5EF4-FFF2-40B4-BE49-F238E27FC236}">
+                <a16:creationId xmlns:a16="http://schemas.microsoft.com/office/drawing/2014/main" id="{64813B61-81EA-6362-BD8C-839857A8E710}"/>
+              </a:ext>
+            </a:extLst>
+          </p:cNvPr>
+          <p:cNvSpPr txBox="1"/>
+          <p:nvPr/>
+        </p:nvSpPr>
+        <p:spPr>
+          <a:xfrm>
+            <a:off x="8895801" y="2590049"/>
+            <a:ext cx="428322" cy="369332"/>
+          </a:xfrm>
+          <a:prstGeom prst="rect">
+            <a:avLst/>
+          </a:prstGeom>
+          <a:noFill/>
+        </p:spPr>
+        <p:txBody>
+          <a:bodyPr wrap="none" rtlCol="0">
+            <a:spAutoFit/>
+          </a:bodyPr>
+          <a:lstStyle/>
+          <a:p>
+            <a:r>
+              <a:rPr lang="en-US" altLang="zh-CN"/>
+              <a:t>22</a:t>
+            </a:r>
+            <a:endParaRPr lang="zh-CN" altLang="en-US"/>
+          </a:p>
+        </p:txBody>
+      </p:sp>
+      <p:cxnSp>
+        <p:nvCxnSpPr>
+          <p:cNvPr id="42" name="直接连接符 41">
+            <a:extLst>
+              <a:ext uri="{FF2B5EF4-FFF2-40B4-BE49-F238E27FC236}">
+                <a16:creationId xmlns:a16="http://schemas.microsoft.com/office/drawing/2014/main" id="{227601BE-1297-6AB0-A9DE-EF2007C9BE0C}"/>
+              </a:ext>
+            </a:extLst>
+          </p:cNvPr>
+          <p:cNvCxnSpPr>
+            <a:stCxn id="41" idx="2"/>
+            <a:endCxn id="39" idx="0"/>
+          </p:cNvCxnSpPr>
+          <p:nvPr/>
+        </p:nvCxnSpPr>
+        <p:spPr>
+          <a:xfrm flipH="1">
+            <a:off x="8752061" y="2959381"/>
+            <a:ext cx="357901" cy="216244"/>
+          </a:xfrm>
+          <a:prstGeom prst="line">
+            <a:avLst/>
+          </a:prstGeom>
+        </p:spPr>
+        <p:style>
+          <a:lnRef idx="2">
+            <a:schemeClr val="dk1"/>
+          </a:lnRef>
+          <a:fillRef idx="0">
+            <a:schemeClr val="dk1"/>
+          </a:fillRef>
+          <a:effectRef idx="1">
+            <a:schemeClr val="dk1"/>
+          </a:effectRef>
+          <a:fontRef idx="minor">
+            <a:schemeClr val="tx1"/>
+          </a:fontRef>
+        </p:style>
+      </p:cxnSp>
+      <p:cxnSp>
+        <p:nvCxnSpPr>
+          <p:cNvPr id="43" name="直接连接符 42">
+            <a:extLst>
+              <a:ext uri="{FF2B5EF4-FFF2-40B4-BE49-F238E27FC236}">
+                <a16:creationId xmlns:a16="http://schemas.microsoft.com/office/drawing/2014/main" id="{9AD9B259-D79F-1555-0C5C-A45EF350CFE1}"/>
+              </a:ext>
+            </a:extLst>
+          </p:cNvPr>
+          <p:cNvCxnSpPr>
+            <a:stCxn id="41" idx="2"/>
+            <a:endCxn id="40" idx="0"/>
+          </p:cNvCxnSpPr>
+          <p:nvPr/>
+        </p:nvCxnSpPr>
+        <p:spPr>
+          <a:xfrm>
+            <a:off x="9109962" y="2959381"/>
+            <a:ext cx="360355" cy="216244"/>
+          </a:xfrm>
+          <a:prstGeom prst="line">
+            <a:avLst/>
+          </a:prstGeom>
+        </p:spPr>
+        <p:style>
+          <a:lnRef idx="2">
+            <a:schemeClr val="dk1"/>
+          </a:lnRef>
+          <a:fillRef idx="0">
+            <a:schemeClr val="dk1"/>
+          </a:fillRef>
+          <a:effectRef idx="1">
+            <a:schemeClr val="dk1"/>
+          </a:effectRef>
+          <a:fontRef idx="minor">
+            <a:schemeClr val="tx1"/>
+          </a:fontRef>
+        </p:style>
+      </p:cxnSp>
+      <p:sp>
+        <p:nvSpPr>
+          <p:cNvPr id="44" name="文本框 43">
+            <a:extLst>
+              <a:ext uri="{FF2B5EF4-FFF2-40B4-BE49-F238E27FC236}">
+                <a16:creationId xmlns:a16="http://schemas.microsoft.com/office/drawing/2014/main" id="{6132F273-4399-2567-D089-397293FDE6F3}"/>
+              </a:ext>
+            </a:extLst>
+          </p:cNvPr>
+          <p:cNvSpPr txBox="1"/>
+          <p:nvPr/>
+        </p:nvSpPr>
+        <p:spPr>
+          <a:xfrm>
+            <a:off x="10344896" y="2590049"/>
+            <a:ext cx="428322" cy="369332"/>
+          </a:xfrm>
+          <a:prstGeom prst="rect">
+            <a:avLst/>
+          </a:prstGeom>
+          <a:noFill/>
+          <a:ln w="19050">
+            <a:solidFill>
+              <a:schemeClr val="tx1"/>
+            </a:solidFill>
+          </a:ln>
+        </p:spPr>
+        <p:txBody>
+          <a:bodyPr wrap="none" rtlCol="0">
+            <a:spAutoFit/>
+          </a:bodyPr>
+          <a:lstStyle/>
+          <a:p>
+            <a:r>
+              <a:rPr lang="en-US" altLang="zh-CN"/>
+              <a:t>16</a:t>
+            </a:r>
+            <a:endParaRPr lang="zh-CN" altLang="en-US"/>
+          </a:p>
+        </p:txBody>
+      </p:sp>
+      <p:sp>
+        <p:nvSpPr>
+          <p:cNvPr id="45" name="文本框 44">
+            <a:extLst>
+              <a:ext uri="{FF2B5EF4-FFF2-40B4-BE49-F238E27FC236}">
+                <a16:creationId xmlns:a16="http://schemas.microsoft.com/office/drawing/2014/main" id="{AD7A5266-0924-4EC1-BB6A-0F70F40AB39A}"/>
+              </a:ext>
+            </a:extLst>
+          </p:cNvPr>
+          <p:cNvSpPr txBox="1"/>
+          <p:nvPr/>
+        </p:nvSpPr>
+        <p:spPr>
+          <a:xfrm>
+            <a:off x="11063152" y="2590049"/>
+            <a:ext cx="428322" cy="369332"/>
+          </a:xfrm>
+          <a:prstGeom prst="rect">
+            <a:avLst/>
+          </a:prstGeom>
+          <a:noFill/>
+          <a:ln w="19050">
+            <a:solidFill>
+              <a:schemeClr val="tx1"/>
+            </a:solidFill>
+          </a:ln>
+        </p:spPr>
+        <p:txBody>
+          <a:bodyPr wrap="none" rtlCol="0">
+            <a:spAutoFit/>
+          </a:bodyPr>
+          <a:lstStyle/>
+          <a:p>
+            <a:r>
+              <a:rPr lang="en-US" altLang="zh-CN"/>
+              <a:t>21</a:t>
+            </a:r>
+            <a:endParaRPr lang="zh-CN" altLang="en-US"/>
+          </a:p>
+        </p:txBody>
+      </p:sp>
+      <p:sp>
+        <p:nvSpPr>
+          <p:cNvPr id="46" name="文本框 45">
+            <a:extLst>
+              <a:ext uri="{FF2B5EF4-FFF2-40B4-BE49-F238E27FC236}">
+                <a16:creationId xmlns:a16="http://schemas.microsoft.com/office/drawing/2014/main" id="{94FE39F2-4E86-AF4E-86B4-A7C31D4DFAD5}"/>
+              </a:ext>
+            </a:extLst>
+          </p:cNvPr>
+          <p:cNvSpPr txBox="1"/>
+          <p:nvPr/>
+        </p:nvSpPr>
+        <p:spPr>
+          <a:xfrm>
+            <a:off x="10715380" y="2004473"/>
+            <a:ext cx="428322" cy="369332"/>
+          </a:xfrm>
+          <a:prstGeom prst="rect">
+            <a:avLst/>
+          </a:prstGeom>
+          <a:noFill/>
+        </p:spPr>
+        <p:txBody>
+          <a:bodyPr wrap="none" rtlCol="0">
+            <a:spAutoFit/>
+          </a:bodyPr>
+          <a:lstStyle/>
+          <a:p>
+            <a:r>
+              <a:rPr lang="en-US" altLang="zh-CN"/>
+              <a:t>37</a:t>
+            </a:r>
+            <a:endParaRPr lang="zh-CN" altLang="en-US"/>
+          </a:p>
+        </p:txBody>
+      </p:sp>
+      <p:cxnSp>
+        <p:nvCxnSpPr>
+          <p:cNvPr id="47" name="直接连接符 46">
+            <a:extLst>
+              <a:ext uri="{FF2B5EF4-FFF2-40B4-BE49-F238E27FC236}">
+                <a16:creationId xmlns:a16="http://schemas.microsoft.com/office/drawing/2014/main" id="{F2912981-DC75-3921-3639-462640A71DB6}"/>
+              </a:ext>
+            </a:extLst>
+          </p:cNvPr>
+          <p:cNvCxnSpPr>
+            <a:stCxn id="46" idx="2"/>
+            <a:endCxn id="44" idx="0"/>
+          </p:cNvCxnSpPr>
+          <p:nvPr/>
+        </p:nvCxnSpPr>
+        <p:spPr>
+          <a:xfrm flipH="1">
+            <a:off x="10559057" y="2373805"/>
+            <a:ext cx="370484" cy="216244"/>
+          </a:xfrm>
+          <a:prstGeom prst="line">
+            <a:avLst/>
+          </a:prstGeom>
+        </p:spPr>
+        <p:style>
+          <a:lnRef idx="2">
+            <a:schemeClr val="dk1"/>
+          </a:lnRef>
+          <a:fillRef idx="0">
+            <a:schemeClr val="dk1"/>
+          </a:fillRef>
+          <a:effectRef idx="1">
+            <a:schemeClr val="dk1"/>
+          </a:effectRef>
+          <a:fontRef idx="minor">
+            <a:schemeClr val="tx1"/>
+          </a:fontRef>
+        </p:style>
+      </p:cxnSp>
+      <p:cxnSp>
+        <p:nvCxnSpPr>
+          <p:cNvPr id="48" name="直接连接符 47">
+            <a:extLst>
+              <a:ext uri="{FF2B5EF4-FFF2-40B4-BE49-F238E27FC236}">
+                <a16:creationId xmlns:a16="http://schemas.microsoft.com/office/drawing/2014/main" id="{47E79837-F9B1-38DB-F1F8-010F75679AF6}"/>
+              </a:ext>
+            </a:extLst>
+          </p:cNvPr>
+          <p:cNvCxnSpPr>
+            <a:stCxn id="46" idx="2"/>
+            <a:endCxn id="45" idx="0"/>
+          </p:cNvCxnSpPr>
+          <p:nvPr/>
+        </p:nvCxnSpPr>
+        <p:spPr>
+          <a:xfrm>
+            <a:off x="10929541" y="2373805"/>
+            <a:ext cx="347772" cy="216244"/>
+          </a:xfrm>
+          <a:prstGeom prst="line">
+            <a:avLst/>
+          </a:prstGeom>
+        </p:spPr>
+        <p:style>
+          <a:lnRef idx="2">
+            <a:schemeClr val="dk1"/>
+          </a:lnRef>
+          <a:fillRef idx="0">
+            <a:schemeClr val="dk1"/>
+          </a:fillRef>
+          <a:effectRef idx="1">
+            <a:schemeClr val="dk1"/>
+          </a:effectRef>
+          <a:fontRef idx="minor">
+            <a:schemeClr val="tx1"/>
+          </a:fontRef>
+        </p:style>
+      </p:cxnSp>
+      <p:sp>
+        <p:nvSpPr>
+          <p:cNvPr id="49" name="文本框 48">
+            <a:extLst>
+              <a:ext uri="{FF2B5EF4-FFF2-40B4-BE49-F238E27FC236}">
+                <a16:creationId xmlns:a16="http://schemas.microsoft.com/office/drawing/2014/main" id="{7F5315E9-D0C3-6606-CD7B-5EB7EA61E1B7}"/>
+              </a:ext>
+            </a:extLst>
+          </p:cNvPr>
+          <p:cNvSpPr txBox="1"/>
+          <p:nvPr/>
+        </p:nvSpPr>
+        <p:spPr>
+          <a:xfrm>
+            <a:off x="9626640" y="2590049"/>
+            <a:ext cx="428322" cy="369332"/>
+          </a:xfrm>
+          <a:prstGeom prst="rect">
+            <a:avLst/>
+          </a:prstGeom>
+          <a:noFill/>
+          <a:ln w="19050">
+            <a:solidFill>
+              <a:schemeClr val="tx1"/>
+            </a:solidFill>
+          </a:ln>
+        </p:spPr>
+        <p:txBody>
+          <a:bodyPr wrap="none" rtlCol="0">
+            <a:spAutoFit/>
+          </a:bodyPr>
+          <a:lstStyle/>
+          <a:p>
+            <a:r>
+              <a:rPr lang="en-US" altLang="zh-CN"/>
+              <a:t>30</a:t>
+            </a:r>
+            <a:endParaRPr lang="zh-CN" altLang="en-US"/>
+          </a:p>
+        </p:txBody>
+      </p:sp>
+      <p:sp>
+        <p:nvSpPr>
+          <p:cNvPr id="50" name="文本框 49">
+            <a:extLst>
+              <a:ext uri="{FF2B5EF4-FFF2-40B4-BE49-F238E27FC236}">
+                <a16:creationId xmlns:a16="http://schemas.microsoft.com/office/drawing/2014/main" id="{25415309-1383-D2B5-432A-CD0CF424EE06}"/>
+              </a:ext>
+            </a:extLst>
+          </p:cNvPr>
+          <p:cNvSpPr txBox="1"/>
+          <p:nvPr/>
+        </p:nvSpPr>
+        <p:spPr>
+          <a:xfrm>
+            <a:off x="9256156" y="2004473"/>
+            <a:ext cx="428322" cy="369332"/>
+          </a:xfrm>
+          <a:prstGeom prst="rect">
+            <a:avLst/>
+          </a:prstGeom>
+          <a:noFill/>
+        </p:spPr>
+        <p:txBody>
+          <a:bodyPr wrap="none" rtlCol="0">
+            <a:spAutoFit/>
+          </a:bodyPr>
+          <a:lstStyle/>
+          <a:p>
+            <a:r>
+              <a:rPr lang="en-US" altLang="zh-CN"/>
+              <a:t>52</a:t>
+            </a:r>
+            <a:endParaRPr lang="zh-CN" altLang="en-US"/>
+          </a:p>
+        </p:txBody>
+      </p:sp>
+      <p:cxnSp>
+        <p:nvCxnSpPr>
+          <p:cNvPr id="51" name="直接连接符 50">
+            <a:extLst>
+              <a:ext uri="{FF2B5EF4-FFF2-40B4-BE49-F238E27FC236}">
+                <a16:creationId xmlns:a16="http://schemas.microsoft.com/office/drawing/2014/main" id="{3ED3CB60-F38C-7ABD-50EE-8FF9C5DBD403}"/>
+              </a:ext>
+            </a:extLst>
+          </p:cNvPr>
+          <p:cNvCxnSpPr>
+            <a:cxnSpLocks/>
+            <a:stCxn id="50" idx="2"/>
+            <a:endCxn id="41" idx="0"/>
+          </p:cNvCxnSpPr>
+          <p:nvPr/>
+        </p:nvCxnSpPr>
+        <p:spPr>
+          <a:xfrm flipH="1">
+            <a:off x="9109962" y="2373805"/>
+            <a:ext cx="360355" cy="216244"/>
+          </a:xfrm>
+          <a:prstGeom prst="line">
+            <a:avLst/>
+          </a:prstGeom>
+        </p:spPr>
+        <p:style>
+          <a:lnRef idx="2">
+            <a:schemeClr val="dk1"/>
+          </a:lnRef>
+          <a:fillRef idx="0">
+            <a:schemeClr val="dk1"/>
+          </a:fillRef>
+          <a:effectRef idx="1">
+            <a:schemeClr val="dk1"/>
+          </a:effectRef>
+          <a:fontRef idx="minor">
+            <a:schemeClr val="tx1"/>
+          </a:fontRef>
+        </p:style>
+      </p:cxnSp>
+      <p:cxnSp>
+        <p:nvCxnSpPr>
+          <p:cNvPr id="52" name="直接连接符 51">
+            <a:extLst>
+              <a:ext uri="{FF2B5EF4-FFF2-40B4-BE49-F238E27FC236}">
+                <a16:creationId xmlns:a16="http://schemas.microsoft.com/office/drawing/2014/main" id="{BD9F90D5-5B97-3348-D17B-EEB1DC370668}"/>
+              </a:ext>
+            </a:extLst>
+          </p:cNvPr>
+          <p:cNvCxnSpPr>
+            <a:cxnSpLocks/>
+            <a:stCxn id="50" idx="2"/>
+            <a:endCxn id="49" idx="0"/>
+          </p:cNvCxnSpPr>
+          <p:nvPr/>
+        </p:nvCxnSpPr>
+        <p:spPr>
+          <a:xfrm>
+            <a:off x="9470317" y="2373805"/>
+            <a:ext cx="370484" cy="216244"/>
+          </a:xfrm>
+          <a:prstGeom prst="line">
+            <a:avLst/>
+          </a:prstGeom>
+        </p:spPr>
+        <p:style>
+          <a:lnRef idx="2">
+            <a:schemeClr val="dk1"/>
+          </a:lnRef>
+          <a:fillRef idx="0">
+            <a:schemeClr val="dk1"/>
+          </a:fillRef>
+          <a:effectRef idx="1">
+            <a:schemeClr val="dk1"/>
+          </a:effectRef>
+          <a:fontRef idx="minor">
+            <a:schemeClr val="tx1"/>
+          </a:fontRef>
+        </p:style>
+      </p:cxnSp>
+      <p:sp>
+        <p:nvSpPr>
+          <p:cNvPr id="57" name="文本框 56">
+            <a:extLst>
+              <a:ext uri="{FF2B5EF4-FFF2-40B4-BE49-F238E27FC236}">
+                <a16:creationId xmlns:a16="http://schemas.microsoft.com/office/drawing/2014/main" id="{58BFC519-7BF4-C03F-AA0D-E6002D3FA822}"/>
+              </a:ext>
+            </a:extLst>
+          </p:cNvPr>
+          <p:cNvSpPr txBox="1"/>
+          <p:nvPr/>
+        </p:nvSpPr>
+        <p:spPr>
+          <a:xfrm>
+            <a:off x="10004346" y="1342321"/>
+            <a:ext cx="428322" cy="369332"/>
+          </a:xfrm>
+          <a:prstGeom prst="rect">
+            <a:avLst/>
+          </a:prstGeom>
+          <a:noFill/>
+        </p:spPr>
+        <p:txBody>
+          <a:bodyPr wrap="none" rtlCol="0">
+            <a:spAutoFit/>
+          </a:bodyPr>
+          <a:lstStyle/>
+          <a:p>
+            <a:r>
+              <a:rPr lang="en-US" altLang="zh-CN"/>
+              <a:t>89</a:t>
+            </a:r>
+            <a:endParaRPr lang="zh-CN" altLang="en-US"/>
+          </a:p>
+        </p:txBody>
+      </p:sp>
+      <p:cxnSp>
+        <p:nvCxnSpPr>
+          <p:cNvPr id="58" name="直接连接符 57">
+            <a:extLst>
+              <a:ext uri="{FF2B5EF4-FFF2-40B4-BE49-F238E27FC236}">
+                <a16:creationId xmlns:a16="http://schemas.microsoft.com/office/drawing/2014/main" id="{35AA89AA-551C-FF43-CD8C-B353E304E6B7}"/>
+              </a:ext>
+            </a:extLst>
+          </p:cNvPr>
+          <p:cNvCxnSpPr>
+            <a:cxnSpLocks/>
+            <a:stCxn id="57" idx="2"/>
+            <a:endCxn id="50" idx="0"/>
+          </p:cNvCxnSpPr>
+          <p:nvPr/>
+        </p:nvCxnSpPr>
+        <p:spPr>
+          <a:xfrm flipH="1">
+            <a:off x="9470317" y="1711653"/>
+            <a:ext cx="748190" cy="292820"/>
+          </a:xfrm>
+          <a:prstGeom prst="line">
+            <a:avLst/>
+          </a:prstGeom>
+        </p:spPr>
+        <p:style>
+          <a:lnRef idx="2">
+            <a:schemeClr val="dk1"/>
+          </a:lnRef>
+          <a:fillRef idx="0">
+            <a:schemeClr val="dk1"/>
+          </a:fillRef>
+          <a:effectRef idx="1">
+            <a:schemeClr val="dk1"/>
+          </a:effectRef>
+          <a:fontRef idx="minor">
+            <a:schemeClr val="tx1"/>
+          </a:fontRef>
+        </p:style>
+      </p:cxnSp>
+      <p:cxnSp>
+        <p:nvCxnSpPr>
+          <p:cNvPr id="61" name="直接连接符 60">
+            <a:extLst>
+              <a:ext uri="{FF2B5EF4-FFF2-40B4-BE49-F238E27FC236}">
+                <a16:creationId xmlns:a16="http://schemas.microsoft.com/office/drawing/2014/main" id="{21AAD2F1-DEE7-335A-9DDC-61B11B96CF61}"/>
+              </a:ext>
+            </a:extLst>
+          </p:cNvPr>
+          <p:cNvCxnSpPr>
+            <a:cxnSpLocks/>
+            <a:stCxn id="57" idx="2"/>
+            <a:endCxn id="46" idx="0"/>
+          </p:cNvCxnSpPr>
+          <p:nvPr/>
+        </p:nvCxnSpPr>
+        <p:spPr>
+          <a:xfrm>
+            <a:off x="10218507" y="1711653"/>
+            <a:ext cx="711034" cy="292820"/>
+          </a:xfrm>
+          <a:prstGeom prst="line">
+            <a:avLst/>
+          </a:prstGeom>
+        </p:spPr>
+        <p:style>
+          <a:lnRef idx="2">
+            <a:schemeClr val="dk1"/>
+          </a:lnRef>
+          <a:fillRef idx="0">
+            <a:schemeClr val="dk1"/>
+          </a:fillRef>
+          <a:effectRef idx="1">
+            <a:schemeClr val="dk1"/>
+          </a:effectRef>
+          <a:fontRef idx="minor">
+            <a:schemeClr val="tx1"/>
+          </a:fontRef>
+        </p:style>
+      </p:cxnSp>
+      <p:sp>
+        <p:nvSpPr>
+          <p:cNvPr id="64" name="文本框 63">
+            <a:extLst>
+              <a:ext uri="{FF2B5EF4-FFF2-40B4-BE49-F238E27FC236}">
+                <a16:creationId xmlns:a16="http://schemas.microsoft.com/office/drawing/2014/main" id="{B904915B-E799-F30F-CDC8-D20D0F239DF3}"/>
+              </a:ext>
+            </a:extLst>
+          </p:cNvPr>
+          <p:cNvSpPr txBox="1"/>
+          <p:nvPr/>
+        </p:nvSpPr>
+        <p:spPr>
+          <a:xfrm>
+            <a:off x="769151" y="3682376"/>
+            <a:ext cx="877163" cy="369332"/>
+          </a:xfrm>
+          <a:prstGeom prst="rect">
+            <a:avLst/>
+          </a:prstGeom>
+          <a:noFill/>
+        </p:spPr>
+        <p:txBody>
+          <a:bodyPr wrap="none" rtlCol="0">
+            <a:spAutoFit/>
+          </a:bodyPr>
+          <a:lstStyle/>
+          <a:p>
+            <a:r>
+              <a:rPr lang="zh-CN" altLang="en-US"/>
+              <a:t>第一步</a:t>
+            </a:r>
+          </a:p>
+        </p:txBody>
+      </p:sp>
+      <p:sp>
+        <p:nvSpPr>
+          <p:cNvPr id="66" name="文本框 65">
+            <a:extLst>
+              <a:ext uri="{FF2B5EF4-FFF2-40B4-BE49-F238E27FC236}">
+                <a16:creationId xmlns:a16="http://schemas.microsoft.com/office/drawing/2014/main" id="{D4644F0E-FFB9-81DF-DC9A-ACA8EE79ED7D}"/>
+              </a:ext>
+            </a:extLst>
+          </p:cNvPr>
+          <p:cNvSpPr txBox="1"/>
+          <p:nvPr/>
+        </p:nvSpPr>
+        <p:spPr>
+          <a:xfrm>
+            <a:off x="3129320" y="3682376"/>
+            <a:ext cx="877163" cy="369332"/>
+          </a:xfrm>
+          <a:prstGeom prst="rect">
+            <a:avLst/>
+          </a:prstGeom>
+          <a:noFill/>
+        </p:spPr>
+        <p:txBody>
+          <a:bodyPr wrap="none" rtlCol="0">
+            <a:spAutoFit/>
+          </a:bodyPr>
+          <a:lstStyle/>
+          <a:p>
+            <a:r>
+              <a:rPr lang="zh-CN" altLang="en-US"/>
+              <a:t>第二步</a:t>
+            </a:r>
+          </a:p>
+        </p:txBody>
+      </p:sp>
+      <p:sp>
+        <p:nvSpPr>
+          <p:cNvPr id="68" name="文本框 67">
+            <a:extLst>
+              <a:ext uri="{FF2B5EF4-FFF2-40B4-BE49-F238E27FC236}">
+                <a16:creationId xmlns:a16="http://schemas.microsoft.com/office/drawing/2014/main" id="{A15792F4-FAAF-7C37-1C1E-83F0018EB5BF}"/>
+              </a:ext>
+            </a:extLst>
+          </p:cNvPr>
+          <p:cNvSpPr txBox="1"/>
+          <p:nvPr/>
+        </p:nvSpPr>
+        <p:spPr>
+          <a:xfrm>
+            <a:off x="6037790" y="3682376"/>
+            <a:ext cx="877163" cy="369332"/>
+          </a:xfrm>
+          <a:prstGeom prst="rect">
+            <a:avLst/>
+          </a:prstGeom>
+          <a:noFill/>
+        </p:spPr>
+        <p:txBody>
+          <a:bodyPr wrap="none" rtlCol="0">
+            <a:spAutoFit/>
+          </a:bodyPr>
+          <a:lstStyle/>
+          <a:p>
+            <a:r>
+              <a:rPr lang="zh-CN" altLang="en-US"/>
+              <a:t>第三步</a:t>
+            </a:r>
+          </a:p>
+        </p:txBody>
+      </p:sp>
+      <p:sp>
+        <p:nvSpPr>
+          <p:cNvPr id="70" name="文本框 69">
+            <a:extLst>
+              <a:ext uri="{FF2B5EF4-FFF2-40B4-BE49-F238E27FC236}">
+                <a16:creationId xmlns:a16="http://schemas.microsoft.com/office/drawing/2014/main" id="{9452EDA7-40B8-936B-D84A-2FBA9DA0E09D}"/>
+              </a:ext>
+            </a:extLst>
+          </p:cNvPr>
+          <p:cNvSpPr txBox="1"/>
+          <p:nvPr/>
+        </p:nvSpPr>
+        <p:spPr>
+          <a:xfrm>
+            <a:off x="9773513" y="3682376"/>
+            <a:ext cx="877163" cy="369332"/>
+          </a:xfrm>
+          <a:prstGeom prst="rect">
+            <a:avLst/>
+          </a:prstGeom>
+          <a:noFill/>
+        </p:spPr>
+        <p:txBody>
+          <a:bodyPr wrap="none" rtlCol="0">
+            <a:spAutoFit/>
+          </a:bodyPr>
+          <a:lstStyle/>
+          <a:p>
+            <a:r>
+              <a:rPr lang="zh-CN" altLang="en-US"/>
+              <a:t>第四步</a:t>
+            </a:r>
+          </a:p>
+        </p:txBody>
+      </p:sp>
+    </p:spTree>
+    <p:extLst>
+      <p:ext uri="{BB962C8B-B14F-4D97-AF65-F5344CB8AC3E}">
+        <p14:creationId xmlns:p14="http://schemas.microsoft.com/office/powerpoint/2010/main" val="373417057"/>
+      </p:ext>
+    </p:extLst>
+  </p:cSld>
+  <p:clrMapOvr>
+    <a:masterClrMapping/>
+  </p:clrMapOvr>
+</p:sld>
+</file>
+
+<file path=ppt/slides/slide32.xml><?xml version="1.0" encoding="utf-8"?>
+<p:sld xmlns:a="http://schemas.openxmlformats.org/drawingml/2006/main" xmlns:r="http://schemas.openxmlformats.org/officeDocument/2006/relationships" xmlns:p="http://schemas.openxmlformats.org/presentationml/2006/main">
+  <p:cSld>
+    <p:spTree>
+      <p:nvGrpSpPr>
+        <p:cNvPr id="1" name="">
+          <a:extLst>
+            <a:ext uri="{FF2B5EF4-FFF2-40B4-BE49-F238E27FC236}">
+              <a16:creationId xmlns:a16="http://schemas.microsoft.com/office/drawing/2014/main" id="{65CA5421-FFE0-2669-E332-E67D92C858D7}"/>
+            </a:ext>
+          </a:extLst>
+        </p:cNvPr>
+        <p:cNvGrpSpPr/>
+        <p:nvPr/>
+      </p:nvGrpSpPr>
+      <p:grpSpPr>
+        <a:xfrm>
+          <a:off x="0" y="0"/>
+          <a:ext cx="0" cy="0"/>
+          <a:chOff x="0" y="0"/>
+          <a:chExt cx="0" cy="0"/>
+        </a:xfrm>
+      </p:grpSpPr>
+    </p:spTree>
+    <p:extLst>
+      <p:ext uri="{BB962C8B-B14F-4D97-AF65-F5344CB8AC3E}">
+        <p14:creationId xmlns:p14="http://schemas.microsoft.com/office/powerpoint/2010/main" val="2685904838"/>
+      </p:ext>
+    </p:extLst>
+  </p:cSld>
+  <p:clrMapOvr>
+    <a:masterClrMapping/>
+  </p:clrMapOvr>
+</p:sld>
+</file>
+
+<file path=ppt/slides/slide33.xml><?xml version="1.0" encoding="utf-8"?>
+<p:sld xmlns:a="http://schemas.openxmlformats.org/drawingml/2006/main" xmlns:r="http://schemas.openxmlformats.org/officeDocument/2006/relationships" xmlns:p="http://schemas.openxmlformats.org/presentationml/2006/main">
+  <p:cSld>
+    <p:spTree>
+      <p:nvGrpSpPr>
+        <p:cNvPr id="1" name="">
+          <a:extLst>
+            <a:ext uri="{FF2B5EF4-FFF2-40B4-BE49-F238E27FC236}">
+              <a16:creationId xmlns:a16="http://schemas.microsoft.com/office/drawing/2014/main" id="{76F60A4E-EEDA-2640-3033-49BD7ED45941}"/>
+            </a:ext>
+          </a:extLst>
+        </p:cNvPr>
+        <p:cNvGrpSpPr/>
+        <p:nvPr/>
+      </p:nvGrpSpPr>
+      <p:grpSpPr>
+        <a:xfrm>
+          <a:off x="0" y="0"/>
+          <a:ext cx="0" cy="0"/>
+          <a:chOff x="0" y="0"/>
+          <a:chExt cx="0" cy="0"/>
+        </a:xfrm>
+      </p:grpSpPr>
+    </p:spTree>
+    <p:extLst>
+      <p:ext uri="{BB962C8B-B14F-4D97-AF65-F5344CB8AC3E}">
+        <p14:creationId xmlns:p14="http://schemas.microsoft.com/office/powerpoint/2010/main" val="1979029602"/>
+      </p:ext>
+    </p:extLst>
+  </p:cSld>
+  <p:clrMapOvr>
+    <a:masterClrMapping/>
+  </p:clrMapOvr>
+</p:sld>
+</file>
+
+<file path=ppt/slides/slide34.xml><?xml version="1.0" encoding="utf-8"?>
 <p:sld xmlns:a="http://schemas.openxmlformats.org/drawingml/2006/main" xmlns:r="http://schemas.openxmlformats.org/officeDocument/2006/relationships" xmlns:p="http://schemas.openxmlformats.org/presentationml/2006/main">
   <p:cSld>
     <p:spTree>
